--- a/docs/lecture_slides/Week 2/Week2_Lecture3_Slides_1_19_2024.pptx
+++ b/docs/lecture_slides/Week 2/Week2_Lecture3_Slides_1_19_2024.pptx
@@ -15722,7 +15722,12 @@
             <p:ph type="title"/>
           </p:nvPr>
         </p:nvSpPr>
-        <p:spPr/>
+        <p:spPr>
+          <a:xfrm>
+            <a:off x="764309" y="0"/>
+            <a:ext cx="10515600" cy="1325563"/>
+          </a:xfrm>
+        </p:spPr>
         <p:txBody>
           <a:bodyPr/>
           <a:lstStyle/>
@@ -15737,10 +15742,10 @@
       </p:sp>
       <p:pic>
         <p:nvPicPr>
-          <p:cNvPr id="5" name="Picture 4">
+          <p:cNvPr id="4" name="Picture 3">
             <a:extLst>
               <a:ext uri="{FF2B5EF4-FFF2-40B4-BE49-F238E27FC236}">
-                <a16:creationId xmlns:a16="http://schemas.microsoft.com/office/drawing/2014/main" id="{D2A6CFA9-8621-1511-99AE-0343BA94DC76}"/>
+                <a16:creationId xmlns:a16="http://schemas.microsoft.com/office/drawing/2014/main" id="{BC445D82-BC54-E443-F806-44E9E15C1C53}"/>
               </a:ext>
             </a:extLst>
           </p:cNvPr>
@@ -15757,8 +15762,8 @@
         </p:blipFill>
         <p:spPr>
           <a:xfrm>
-            <a:off x="2499810" y="2324150"/>
-            <a:ext cx="7192379" cy="3410426"/>
+            <a:off x="1878155" y="1789972"/>
+            <a:ext cx="8287907" cy="4220164"/>
           </a:xfrm>
           <a:prstGeom prst="rect">
             <a:avLst/>

--- a/docs/lecture_slides/Week 2/Week2_Lecture3_Slides_1_19_2024.pptx
+++ b/docs/lecture_slides/Week 2/Week2_Lecture3_Slides_1_19_2024.pptx
@@ -8,8 +8,14 @@
     <p:sldId id="256" r:id="rId2"/>
     <p:sldId id="266" r:id="rId3"/>
     <p:sldId id="331" r:id="rId4"/>
+    <p:sldId id="340" r:id="rId27"/>
+    <p:sldId id="341" r:id="rId28"/>
+    <p:sldId id="342" r:id="rId29"/>
+    <p:sldId id="343" r:id="rId30"/>
     <p:sldId id="330" r:id="rId5"/>
+    <p:sldId id="344" r:id="rId31"/>
     <p:sldId id="286" r:id="rId6"/>
+    <p:sldId id="345" r:id="rId32"/>
     <p:sldId id="273" r:id="rId7"/>
     <p:sldId id="288" r:id="rId8"/>
     <p:sldId id="277" r:id="rId9"/>
@@ -14044,13 +14050,7 @@
       </p:grpSpPr>
       <p:sp>
         <p:nvSpPr>
-          <p:cNvPr id="2" name="Title 1">
-            <a:extLst>
-              <a:ext uri="{FF2B5EF4-FFF2-40B4-BE49-F238E27FC236}">
-                <a16:creationId xmlns:a16="http://schemas.microsoft.com/office/drawing/2014/main" id="{3BD591D5-706A-722B-CDCB-CEDE379441B3}"/>
-              </a:ext>
-            </a:extLst>
-          </p:cNvPr>
+          <p:cNvPr id="2" name="Title 1"/>
           <p:cNvSpPr>
             <a:spLocks noGrp="1"/>
           </p:cNvSpPr>
@@ -14060,7 +14060,9 @@
         </p:nvSpPr>
         <p:spPr/>
         <p:txBody>
-          <a:bodyPr/>
+          <a:bodyPr>
+            <a:normAutofit/>
+          </a:bodyPr>
           <a:lstStyle/>
           <a:p>
             <a:r>
@@ -14070,42 +14072,570 @@
           </a:p>
         </p:txBody>
       </p:sp>
-      <p:graphicFrame>
-        <p:nvGraphicFramePr>
-          <p:cNvPr id="5" name="Content Placeholder 2">
-            <a:extLst>
-              <a:ext uri="{FF2B5EF4-FFF2-40B4-BE49-F238E27FC236}">
-                <a16:creationId xmlns:a16="http://schemas.microsoft.com/office/drawing/2014/main" id="{08353695-84B9-833A-18A5-F133BB6B3891}"/>
-              </a:ext>
-            </a:extLst>
-          </p:cNvPr>
-          <p:cNvGraphicFramePr>
-            <a:graphicFrameLocks noGrp="1"/>
-          </p:cNvGraphicFramePr>
+      <p:sp>
+        <p:nvSpPr>
+          <p:cNvPr id="3" name="Content Placeholder 2"/>
+          <p:cNvSpPr>
+            <a:spLocks noGrp="1"/>
+          </p:cNvSpPr>
           <p:nvPr>
             <p:ph idx="1"/>
           </p:nvPr>
-        </p:nvGraphicFramePr>
-        <p:xfrm>
-          <a:off x="838200" y="1825625"/>
-          <a:ext cx="10515600" cy="4351338"/>
-        </p:xfrm>
-        <a:graphic>
-          <a:graphicData uri="http://schemas.openxmlformats.org/drawingml/2006/diagram">
-            <dgm:relIds xmlns:dgm="http://schemas.openxmlformats.org/drawingml/2006/diagram" xmlns:r="http://schemas.openxmlformats.org/officeDocument/2006/relationships" r:dm="rId2" r:lo="rId3" r:qs="rId4" r:cs="rId5"/>
-          </a:graphicData>
-        </a:graphic>
-      </p:graphicFrame>
+        </p:nvSpPr>
+        <p:spPr>
+          <a:xfrm>
+            <a:off x="838200" y="1600200"/>
+            <a:ext cx="10515600" cy="4800000"/>
+          </a:xfrm>
+        </p:spPr>
+        <p:txBody>
+          <a:bodyPr wrap="square">
+            <a:normAutofit/>
+          </a:bodyPr>
+          <a:lstStyle/>
+          <a:p>
+            <a:pPr marL="0" indent="0">
+              <a:buNone/>
+            </a:pPr>
+            <a:r>
+              <a:rPr lang="en-US" sz="2000" dirty="0"/>
+              <a:t>What do we use data for?</a:t>
+            </a:r>
+          </a:p>
+          <a:p>
+            <a:pPr marL="0" indent="0">
+              <a:spcBef>
+                <a:spcPts val="200"/>
+              </a:spcBef>
+              <a:buNone/>
+            </a:pPr>
+            <a:r>
+              <a:rPr lang="en-US" sz="2000" dirty="0">
+                <a:solidFill>
+                  <a:srgbClr val="FF0000"/>
+                </a:solidFill>
+              </a:rPr>
+              <a:t>To answer questions about a population.</a:t>
+            </a:r>
+          </a:p>
+          <a:p>
+            <a:pPr marL="0" indent="0">
+              <a:spcBef>
+                <a:spcPts val="1000"/>
+              </a:spcBef>
+              <a:buNone/>
+            </a:pPr>
+            <a:r>
+              <a:rPr lang="en-US" sz="2000" dirty="0"/>
+              <a:t>What is a population?</a:t>
+            </a:r>
+          </a:p>
+          <a:p>
+            <a:pPr marL="0" indent="0">
+              <a:spcBef>
+                <a:spcPts val="200"/>
+              </a:spcBef>
+              <a:buNone/>
+            </a:pPr>
+            <a:r>
+              <a:rPr lang="en-US" sz="2000" dirty="0">
+                <a:solidFill>
+                  <a:srgbClr val="FF0000"/>
+                </a:solidFill>
+              </a:rPr>
+              <a:t>The set of all observations of interest – observed and unobserved.</a:t>
+            </a:r>
+          </a:p>
+          <a:p>
+            <a:pPr marL="0" indent="0">
+              <a:spcBef>
+                <a:spcPts val="1000"/>
+              </a:spcBef>
+              <a:buNone/>
+            </a:pPr>
+            <a:r>
+              <a:rPr lang="en-US" sz="2000" dirty="0"/>
+              <a:t>What is a sample?</a:t>
+            </a:r>
+          </a:p>
+          <a:p>
+            <a:pPr marL="0" indent="0">
+              <a:spcBef>
+                <a:spcPts val="200"/>
+              </a:spcBef>
+              <a:buNone/>
+            </a:pPr>
+            <a:r>
+              <a:rPr lang="en-US" sz="2000" dirty="0">
+                <a:solidFill>
+                  <a:srgbClr val="FF0000"/>
+                </a:solidFill>
+              </a:rPr>
+              <a:t>The subset of the population that we actually observe.</a:t>
+            </a:r>
+          </a:p>
+          <a:p>
+            <a:pPr marL="0" indent="0">
+              <a:spcBef>
+                <a:spcPts val="1000"/>
+              </a:spcBef>
+              <a:buNone/>
+            </a:pPr>
+            <a:r>
+              <a:rPr lang="en-US" sz="2000" dirty="0"/>
+              <a:t>What do we call the way we collect the data?</a:t>
+            </a:r>
+          </a:p>
+          <a:p>
+            <a:pPr marL="0" indent="0">
+              <a:spcBef>
+                <a:spcPts val="200"/>
+              </a:spcBef>
+              <a:buNone/>
+            </a:pPr>
+            <a:r>
+              <a:rPr lang="en-US" sz="2000" dirty="0">
+                <a:solidFill>
+                  <a:srgbClr val="FF0000"/>
+                </a:solidFill>
+              </a:rPr>
+              <a:t>The sampling design.</a:t>
+            </a:r>
+          </a:p>
+        </p:txBody>
+      </p:sp>
     </p:spTree>
     <p:extLst>
       <p:ext uri="{BB962C8B-B14F-4D97-AF65-F5344CB8AC3E}">
-        <p14:creationId xmlns:p14="http://schemas.microsoft.com/office/powerpoint/2010/main" val="241386992"/>
+        <p14:creationId xmlns:p14="http://schemas.microsoft.com/office/powerpoint/2010/main" val="1517484001"/>
       </p:ext>
     </p:extLst>
   </p:cSld>
   <p:clrMapOvr>
     <a:masterClrMapping/>
   </p:clrMapOvr>
+  <p:timing>
+    <p:tnLst>
+      <p:par>
+        <p:cTn id="1" dur="indefinite" restart="never" nodeType="tmRoot">
+          <p:childTnLst>
+            <p:seq concurrent="1" nextAc="seek">
+              <p:cTn id="2" dur="indefinite" nodeType="mainSeq">
+                <p:childTnLst>
+                  <p:par>
+                    <p:cTn id="3" fill="hold">
+                      <p:stCondLst>
+                        <p:cond delay="indefinite"/>
+                      </p:stCondLst>
+                      <p:childTnLst>
+                        <p:par>
+                          <p:cTn id="4" fill="hold">
+                            <p:stCondLst>
+                              <p:cond delay="0"/>
+                            </p:stCondLst>
+                            <p:childTnLst>
+                              <p:par>
+                                <p:cTn id="5" presetID="1" presetClass="entr" presetSubtype="0" fill="hold" nodeType="clickEffect">
+                                  <p:stCondLst>
+                                    <p:cond delay="0"/>
+                                  </p:stCondLst>
+                                  <p:childTnLst>
+                                    <p:set>
+                                      <p:cBhvr>
+                                        <p:cTn id="6" dur="1" fill="hold">
+                                          <p:stCondLst>
+                                            <p:cond delay="0"/>
+                                          </p:stCondLst>
+                                        </p:cTn>
+                                        <p:tgtEl>
+                                          <p:spTgt spid="3">
+                                            <p:txEl>
+                                              <p:pRg st="0" end="0"/>
+                                            </p:txEl>
+                                          </p:spTgt>
+                                        </p:tgtEl>
+                                        <p:attrNameLst>
+                                          <p:attrName>style.visibility</p:attrName>
+                                        </p:attrNameLst>
+                                      </p:cBhvr>
+                                      <p:to>
+                                        <p:strVal val="visible"/>
+                                      </p:to>
+                                    </p:set>
+                                  </p:childTnLst>
+                                </p:cTn>
+                              </p:par>
+                            </p:childTnLst>
+                          </p:cTn>
+                        </p:par>
+                      </p:childTnLst>
+                    </p:cTn>
+                  </p:par>
+                  <p:par>
+                    <p:cTn id="7" fill="hold">
+                      <p:stCondLst>
+                        <p:cond delay="indefinite"/>
+                      </p:stCondLst>
+                      <p:childTnLst>
+                        <p:par>
+                          <p:cTn id="8" fill="hold">
+                            <p:stCondLst>
+                              <p:cond delay="0"/>
+                            </p:stCondLst>
+                            <p:childTnLst>
+                              <p:par>
+                                <p:cTn id="9" presetID="1" presetClass="entr" presetSubtype="0" fill="hold" nodeType="clickEffect">
+                                  <p:stCondLst>
+                                    <p:cond delay="0"/>
+                                  </p:stCondLst>
+                                  <p:childTnLst>
+                                    <p:set>
+                                      <p:cBhvr>
+                                        <p:cTn id="10" dur="1" fill="hold">
+                                          <p:stCondLst>
+                                            <p:cond delay="0"/>
+                                          </p:stCondLst>
+                                        </p:cTn>
+                                        <p:tgtEl>
+                                          <p:spTgt spid="3">
+                                            <p:txEl>
+                                              <p:pRg st="1" end="1"/>
+                                            </p:txEl>
+                                          </p:spTgt>
+                                        </p:tgtEl>
+                                        <p:attrNameLst>
+                                          <p:attrName>style.visibility</p:attrName>
+                                        </p:attrNameLst>
+                                      </p:cBhvr>
+                                      <p:to>
+                                        <p:strVal val="visible"/>
+                                      </p:to>
+                                    </p:set>
+                                  </p:childTnLst>
+                                </p:cTn>
+                              </p:par>
+                            </p:childTnLst>
+                          </p:cTn>
+                        </p:par>
+                      </p:childTnLst>
+                    </p:cTn>
+                  </p:par>
+                  <p:par>
+                    <p:cTn id="11" fill="hold">
+                      <p:stCondLst>
+                        <p:cond delay="indefinite"/>
+                      </p:stCondLst>
+                      <p:childTnLst>
+                        <p:par>
+                          <p:cTn id="12" fill="hold">
+                            <p:stCondLst>
+                              <p:cond delay="0"/>
+                            </p:stCondLst>
+                            <p:childTnLst>
+                              <p:par>
+                                <p:cTn id="13" presetID="1" presetClass="entr" presetSubtype="0" fill="hold" nodeType="clickEffect">
+                                  <p:stCondLst>
+                                    <p:cond delay="0"/>
+                                  </p:stCondLst>
+                                  <p:childTnLst>
+                                    <p:set>
+                                      <p:cBhvr>
+                                        <p:cTn id="14" dur="1" fill="hold">
+                                          <p:stCondLst>
+                                            <p:cond delay="0"/>
+                                          </p:stCondLst>
+                                        </p:cTn>
+                                        <p:tgtEl>
+                                          <p:spTgt spid="3">
+                                            <p:txEl>
+                                              <p:pRg st="2" end="2"/>
+                                            </p:txEl>
+                                          </p:spTgt>
+                                        </p:tgtEl>
+                                        <p:attrNameLst>
+                                          <p:attrName>style.visibility</p:attrName>
+                                        </p:attrNameLst>
+                                      </p:cBhvr>
+                                      <p:to>
+                                        <p:strVal val="visible"/>
+                                      </p:to>
+                                    </p:set>
+                                  </p:childTnLst>
+                                </p:cTn>
+                              </p:par>
+                            </p:childTnLst>
+                          </p:cTn>
+                        </p:par>
+                      </p:childTnLst>
+                    </p:cTn>
+                  </p:par>
+                  <p:par>
+                    <p:cTn id="15" fill="hold">
+                      <p:stCondLst>
+                        <p:cond delay="indefinite"/>
+                      </p:stCondLst>
+                      <p:childTnLst>
+                        <p:par>
+                          <p:cTn id="16" fill="hold">
+                            <p:stCondLst>
+                              <p:cond delay="0"/>
+                            </p:stCondLst>
+                            <p:childTnLst>
+                              <p:par>
+                                <p:cTn id="17" presetID="1" presetClass="entr" presetSubtype="0" fill="hold" nodeType="clickEffect">
+                                  <p:stCondLst>
+                                    <p:cond delay="0"/>
+                                  </p:stCondLst>
+                                  <p:childTnLst>
+                                    <p:set>
+                                      <p:cBhvr>
+                                        <p:cTn id="18" dur="1" fill="hold">
+                                          <p:stCondLst>
+                                            <p:cond delay="0"/>
+                                          </p:stCondLst>
+                                        </p:cTn>
+                                        <p:tgtEl>
+                                          <p:spTgt spid="3">
+                                            <p:txEl>
+                                              <p:pRg st="3" end="3"/>
+                                            </p:txEl>
+                                          </p:spTgt>
+                                        </p:tgtEl>
+                                        <p:attrNameLst>
+                                          <p:attrName>style.visibility</p:attrName>
+                                        </p:attrNameLst>
+                                      </p:cBhvr>
+                                      <p:to>
+                                        <p:strVal val="visible"/>
+                                      </p:to>
+                                    </p:set>
+                                  </p:childTnLst>
+                                </p:cTn>
+                              </p:par>
+                            </p:childTnLst>
+                          </p:cTn>
+                        </p:par>
+                      </p:childTnLst>
+                    </p:cTn>
+                  </p:par>
+                  <p:par>
+                    <p:cTn id="19" fill="hold">
+                      <p:stCondLst>
+                        <p:cond delay="indefinite"/>
+                      </p:stCondLst>
+                      <p:childTnLst>
+                        <p:par>
+                          <p:cTn id="20" fill="hold">
+                            <p:stCondLst>
+                              <p:cond delay="0"/>
+                            </p:stCondLst>
+                            <p:childTnLst>
+                              <p:par>
+                                <p:cTn id="21" presetID="1" presetClass="entr" presetSubtype="0" fill="hold" nodeType="clickEffect">
+                                  <p:stCondLst>
+                                    <p:cond delay="0"/>
+                                  </p:stCondLst>
+                                  <p:childTnLst>
+                                    <p:set>
+                                      <p:cBhvr>
+                                        <p:cTn id="22" dur="1" fill="hold">
+                                          <p:stCondLst>
+                                            <p:cond delay="0"/>
+                                          </p:stCondLst>
+                                        </p:cTn>
+                                        <p:tgtEl>
+                                          <p:spTgt spid="3">
+                                            <p:txEl>
+                                              <p:pRg st="4" end="4"/>
+                                            </p:txEl>
+                                          </p:spTgt>
+                                        </p:tgtEl>
+                                        <p:attrNameLst>
+                                          <p:attrName>style.visibility</p:attrName>
+                                        </p:attrNameLst>
+                                      </p:cBhvr>
+                                      <p:to>
+                                        <p:strVal val="visible"/>
+                                      </p:to>
+                                    </p:set>
+                                  </p:childTnLst>
+                                </p:cTn>
+                              </p:par>
+                            </p:childTnLst>
+                          </p:cTn>
+                        </p:par>
+                      </p:childTnLst>
+                    </p:cTn>
+                  </p:par>
+                  <p:par>
+                    <p:cTn id="23" fill="hold">
+                      <p:stCondLst>
+                        <p:cond delay="indefinite"/>
+                      </p:stCondLst>
+                      <p:childTnLst>
+                        <p:par>
+                          <p:cTn id="24" fill="hold">
+                            <p:stCondLst>
+                              <p:cond delay="0"/>
+                            </p:stCondLst>
+                            <p:childTnLst>
+                              <p:par>
+                                <p:cTn id="25" presetID="1" presetClass="entr" presetSubtype="0" fill="hold" nodeType="clickEffect">
+                                  <p:stCondLst>
+                                    <p:cond delay="0"/>
+                                  </p:stCondLst>
+                                  <p:childTnLst>
+                                    <p:set>
+                                      <p:cBhvr>
+                                        <p:cTn id="26" dur="1" fill="hold">
+                                          <p:stCondLst>
+                                            <p:cond delay="0"/>
+                                          </p:stCondLst>
+                                        </p:cTn>
+                                        <p:tgtEl>
+                                          <p:spTgt spid="3">
+                                            <p:txEl>
+                                              <p:pRg st="5" end="5"/>
+                                            </p:txEl>
+                                          </p:spTgt>
+                                        </p:tgtEl>
+                                        <p:attrNameLst>
+                                          <p:attrName>style.visibility</p:attrName>
+                                        </p:attrNameLst>
+                                      </p:cBhvr>
+                                      <p:to>
+                                        <p:strVal val="visible"/>
+                                      </p:to>
+                                    </p:set>
+                                  </p:childTnLst>
+                                </p:cTn>
+                              </p:par>
+                            </p:childTnLst>
+                          </p:cTn>
+                        </p:par>
+                      </p:childTnLst>
+                    </p:cTn>
+                  </p:par>
+                  <p:par>
+                    <p:cTn id="27" fill="hold">
+                      <p:stCondLst>
+                        <p:cond delay="indefinite"/>
+                      </p:stCondLst>
+                      <p:childTnLst>
+                        <p:par>
+                          <p:cTn id="28" fill="hold">
+                            <p:stCondLst>
+                              <p:cond delay="0"/>
+                            </p:stCondLst>
+                            <p:childTnLst>
+                              <p:par>
+                                <p:cTn id="29" presetID="1" presetClass="entr" presetSubtype="0" fill="hold" nodeType="clickEffect">
+                                  <p:stCondLst>
+                                    <p:cond delay="0"/>
+                                  </p:stCondLst>
+                                  <p:childTnLst>
+                                    <p:set>
+                                      <p:cBhvr>
+                                        <p:cTn id="30" dur="1" fill="hold">
+                                          <p:stCondLst>
+                                            <p:cond delay="0"/>
+                                          </p:stCondLst>
+                                        </p:cTn>
+                                        <p:tgtEl>
+                                          <p:spTgt spid="3">
+                                            <p:txEl>
+                                              <p:pRg st="6" end="6"/>
+                                            </p:txEl>
+                                          </p:spTgt>
+                                        </p:tgtEl>
+                                        <p:attrNameLst>
+                                          <p:attrName>style.visibility</p:attrName>
+                                        </p:attrNameLst>
+                                      </p:cBhvr>
+                                      <p:to>
+                                        <p:strVal val="visible"/>
+                                      </p:to>
+                                    </p:set>
+                                  </p:childTnLst>
+                                </p:cTn>
+                              </p:par>
+                            </p:childTnLst>
+                          </p:cTn>
+                        </p:par>
+                      </p:childTnLst>
+                    </p:cTn>
+                  </p:par>
+                  <p:par>
+                    <p:cTn id="31" fill="hold">
+                      <p:stCondLst>
+                        <p:cond delay="indefinite"/>
+                      </p:stCondLst>
+                      <p:childTnLst>
+                        <p:par>
+                          <p:cTn id="32" fill="hold">
+                            <p:stCondLst>
+                              <p:cond delay="0"/>
+                            </p:stCondLst>
+                            <p:childTnLst>
+                              <p:par>
+                                <p:cTn id="33" presetID="1" presetClass="entr" presetSubtype="0" fill="hold" nodeType="clickEffect">
+                                  <p:stCondLst>
+                                    <p:cond delay="0"/>
+                                  </p:stCondLst>
+                                  <p:childTnLst>
+                                    <p:set>
+                                      <p:cBhvr>
+                                        <p:cTn id="34" dur="1" fill="hold">
+                                          <p:stCondLst>
+                                            <p:cond delay="0"/>
+                                          </p:stCondLst>
+                                        </p:cTn>
+                                        <p:tgtEl>
+                                          <p:spTgt spid="3">
+                                            <p:txEl>
+                                              <p:pRg st="7" end="7"/>
+                                            </p:txEl>
+                                          </p:spTgt>
+                                        </p:tgtEl>
+                                        <p:attrNameLst>
+                                          <p:attrName>style.visibility</p:attrName>
+                                        </p:attrNameLst>
+                                      </p:cBhvr>
+                                      <p:to>
+                                        <p:strVal val="visible"/>
+                                      </p:to>
+                                    </p:set>
+                                  </p:childTnLst>
+                                </p:cTn>
+                              </p:par>
+                            </p:childTnLst>
+                          </p:cTn>
+                        </p:par>
+                      </p:childTnLst>
+                    </p:cTn>
+                  </p:par>
+                </p:childTnLst>
+              </p:cTn>
+              <p:prevCondLst>
+                <p:cond evt="onPrev" delay="0">
+                  <p:tgtEl>
+                    <p:sldTgt/>
+                  </p:tgtEl>
+                </p:cond>
+              </p:prevCondLst>
+              <p:nextCondLst>
+                <p:cond evt="onNext" delay="0">
+                  <p:tgtEl>
+                    <p:sldTgt/>
+                  </p:tgtEl>
+                </p:cond>
+              </p:nextCondLst>
+            </p:seq>
+          </p:childTnLst>
+        </p:cTn>
+      </p:par>
+    </p:tnLst>
+  </p:timing>
 </p:sld>
 </file>
 
@@ -14520,7 +15050,377 @@
 </p:sld>
 </file>
 
-<file path=ppt/slides/slide3.xml><?xml version="1.0" encoding="utf-8"?>
+<file path=ppt/slides/slide22.xml><?xml version="1.0" encoding="utf-8"?>
+<p:sld xmlns:a="http://schemas.openxmlformats.org/drawingml/2006/main" xmlns:r="http://schemas.openxmlformats.org/officeDocument/2006/relationships" xmlns:p="http://schemas.openxmlformats.org/presentationml/2006/main">
+  <p:cSld>
+    <p:bg>
+      <p:bgPr>
+        <a:solidFill>
+          <a:schemeClr val="bg1"/>
+        </a:solidFill>
+        <a:effectLst/>
+      </p:bgPr>
+    </p:bg>
+    <p:spTree>
+      <p:nvGrpSpPr>
+        <p:cNvPr id="1" name=""/>
+        <p:cNvGrpSpPr/>
+        <p:nvPr/>
+      </p:nvGrpSpPr>
+      <p:grpSpPr>
+        <a:xfrm>
+          <a:off x="0" y="0"/>
+          <a:ext cx="0" cy="0"/>
+          <a:chOff x="0" y="0"/>
+          <a:chExt cx="0" cy="0"/>
+        </a:xfrm>
+      </p:grpSpPr>
+      <p:pic>
+        <p:nvPicPr>
+          <p:cNvPr id="9" name="Picture 8">
+            <a:extLst>
+              <a:ext uri="{FF2B5EF4-FFF2-40B4-BE49-F238E27FC236}">
+                <a16:creationId xmlns:a16="http://schemas.microsoft.com/office/drawing/2014/main" id="{61327843-2234-FD4B-8B1B-E62A4EDD2B5A}"/>
+              </a:ext>
+            </a:extLst>
+          </p:cNvPr>
+          <p:cNvPicPr>
+            <a:picLocks noChangeAspect="1"/>
+          </p:cNvPicPr>
+          <p:nvPr/>
+        </p:nvPicPr>
+        <p:blipFill>
+          <a:blip r:embed="rId2"/>
+          <a:stretch>
+            <a:fillRect/>
+          </a:stretch>
+        </p:blipFill>
+        <p:spPr>
+          <a:xfrm>
+            <a:off x="1938487" y="643466"/>
+            <a:ext cx="8315026" cy="5571067"/>
+          </a:xfrm>
+          <a:prstGeom prst="rect">
+            <a:avLst/>
+          </a:prstGeom>
+        </p:spPr>
+      </p:pic>
+    </p:spTree>
+    <p:extLst>
+      <p:ext uri="{BB962C8B-B14F-4D97-AF65-F5344CB8AC3E}">
+        <p14:creationId xmlns:p14="http://schemas.microsoft.com/office/powerpoint/2010/main" val="3231681995"/>
+      </p:ext>
+    </p:extLst>
+  </p:cSld>
+  <p:clrMapOvr>
+    <a:masterClrMapping/>
+  </p:clrMapOvr>
+</p:sld>
+</file>
+
+<file path=ppt/slides/slide23.xml><?xml version="1.0" encoding="utf-8"?>
+<p:sld xmlns:a="http://schemas.openxmlformats.org/drawingml/2006/main" xmlns:r="http://schemas.openxmlformats.org/officeDocument/2006/relationships" xmlns:p="http://schemas.openxmlformats.org/presentationml/2006/main">
+  <p:cSld>
+    <p:bg>
+      <p:bgPr>
+        <a:solidFill>
+          <a:schemeClr val="bg1"/>
+        </a:solidFill>
+        <a:effectLst/>
+      </p:bgPr>
+    </p:bg>
+    <p:spTree>
+      <p:nvGrpSpPr>
+        <p:cNvPr id="1" name=""/>
+        <p:cNvGrpSpPr/>
+        <p:nvPr/>
+      </p:nvGrpSpPr>
+      <p:grpSpPr>
+        <a:xfrm>
+          <a:off x="0" y="0"/>
+          <a:ext cx="0" cy="0"/>
+          <a:chOff x="0" y="0"/>
+          <a:chExt cx="0" cy="0"/>
+        </a:xfrm>
+      </p:grpSpPr>
+      <p:sp useBgFill="1">
+        <p:nvSpPr>
+          <p:cNvPr id="10" name="Rectangle 9">
+            <a:extLst>
+              <a:ext uri="{FF2B5EF4-FFF2-40B4-BE49-F238E27FC236}">
+                <a16:creationId xmlns:a16="http://schemas.microsoft.com/office/drawing/2014/main" id="{B14C2221-2B8C-494D-9442-F812DF4E8794}"/>
+              </a:ext>
+              <a:ext uri="{C183D7F6-B498-43B3-948B-1728B52AA6E4}">
+                <adec:decorative xmlns:adec="http://schemas.microsoft.com/office/drawing/2017/decorative" val="1"/>
+              </a:ext>
+            </a:extLst>
+          </p:cNvPr>
+          <p:cNvSpPr>
+            <a:spLocks noGrp="1" noRot="1" noChangeAspect="1" noMove="1" noResize="1" noEditPoints="1" noAdjustHandles="1" noChangeArrowheads="1" noChangeShapeType="1" noTextEdit="1"/>
+          </p:cNvSpPr>
+          <p:nvPr>
+            <p:extLst>
+              <p:ext uri="{386F3935-93C4-4BCD-93E2-E3B085C9AB24}">
+                <p16:designElem xmlns:p16="http://schemas.microsoft.com/office/powerpoint/2015/main" val="1"/>
+              </p:ext>
+            </p:extLst>
+          </p:nvPr>
+        </p:nvSpPr>
+        <p:spPr>
+          <a:xfrm>
+            <a:off x="0" y="-1"/>
+            <a:ext cx="12188952" cy="6858000"/>
+          </a:xfrm>
+          <a:prstGeom prst="rect">
+            <a:avLst/>
+          </a:prstGeom>
+          <a:ln>
+            <a:noFill/>
+          </a:ln>
+        </p:spPr>
+        <p:style>
+          <a:lnRef idx="2">
+            <a:schemeClr val="accent1">
+              <a:shade val="50000"/>
+            </a:schemeClr>
+          </a:lnRef>
+          <a:fillRef idx="1">
+            <a:schemeClr val="accent1"/>
+          </a:fillRef>
+          <a:effectRef idx="0">
+            <a:schemeClr val="accent1"/>
+          </a:effectRef>
+          <a:fontRef idx="minor">
+            <a:schemeClr val="lt1"/>
+          </a:fontRef>
+        </p:style>
+        <p:txBody>
+          <a:bodyPr rtlCol="0" anchor="ctr"/>
+          <a:lstStyle/>
+          <a:p>
+            <a:pPr algn="ctr"/>
+            <a:endParaRPr lang="en-US"/>
+          </a:p>
+        </p:txBody>
+      </p:sp>
+      <p:sp>
+        <p:nvSpPr>
+          <p:cNvPr id="2" name="Title 1">
+            <a:extLst>
+              <a:ext uri="{FF2B5EF4-FFF2-40B4-BE49-F238E27FC236}">
+                <a16:creationId xmlns:a16="http://schemas.microsoft.com/office/drawing/2014/main" id="{B350C838-419D-A320-939B-B830BDB03E4B}"/>
+              </a:ext>
+            </a:extLst>
+          </p:cNvPr>
+          <p:cNvSpPr>
+            <a:spLocks noGrp="1"/>
+          </p:cNvSpPr>
+          <p:nvPr>
+            <p:ph type="title"/>
+          </p:nvPr>
+        </p:nvSpPr>
+        <p:spPr>
+          <a:xfrm>
+            <a:off x="0" y="3513932"/>
+            <a:ext cx="3143250" cy="2601119"/>
+          </a:xfrm>
+        </p:spPr>
+        <p:txBody>
+          <a:bodyPr anchor="t">
+            <a:normAutofit/>
+          </a:bodyPr>
+          <a:lstStyle/>
+          <a:p>
+            <a:pPr algn="ctr"/>
+            <a:r>
+              <a:rPr lang="en-US" sz="3200" dirty="0"/>
+              <a:t>Features of Distributions</a:t>
+            </a:r>
+          </a:p>
+        </p:txBody>
+      </p:sp>
+      <p:pic>
+        <p:nvPicPr>
+          <p:cNvPr id="7" name="Graphic 6" descr="Bar chart">
+            <a:extLst>
+              <a:ext uri="{FF2B5EF4-FFF2-40B4-BE49-F238E27FC236}">
+                <a16:creationId xmlns:a16="http://schemas.microsoft.com/office/drawing/2014/main" id="{A24949B9-7196-14B2-6760-43F0BB29FDAA}"/>
+              </a:ext>
+            </a:extLst>
+          </p:cNvPr>
+          <p:cNvPicPr>
+            <a:picLocks noChangeAspect="1"/>
+          </p:cNvPicPr>
+          <p:nvPr/>
+        </p:nvPicPr>
+        <p:blipFill>
+          <a:blip>
+            <a:extLst>
+              <a:ext uri="{28A0092B-C50C-407E-A947-70E740481C1C}">
+                <a14:useLocalDpi xmlns:a14="http://schemas.microsoft.com/office/drawing/2010/main" val="0"/>
+              </a:ext>
+              <a:ext uri="{96DAC541-7B7A-43D3-8B79-37D633B846F1}">
+                <asvg:svgBlip xmlns:asvg="http://schemas.microsoft.com/office/drawing/2016/SVG/main" r:embed="rId2"/>
+              </a:ext>
+            </a:extLst>
+          </a:blip>
+          <a:stretch>
+            <a:fillRect/>
+          </a:stretch>
+        </p:blipFill>
+        <p:spPr>
+          <a:xfrm>
+            <a:off x="1185926" y="2429668"/>
+            <a:ext cx="914400" cy="914400"/>
+          </a:xfrm>
+          <a:prstGeom prst="rect">
+            <a:avLst/>
+          </a:prstGeom>
+        </p:spPr>
+      </p:pic>
+      <p:sp>
+        <p:nvSpPr>
+          <p:cNvPr id="3" name="Content Placeholder 2">
+            <a:extLst>
+              <a:ext uri="{FF2B5EF4-FFF2-40B4-BE49-F238E27FC236}">
+                <a16:creationId xmlns:a16="http://schemas.microsoft.com/office/drawing/2014/main" id="{1BE77A37-4E8C-D029-B59B-07E4F0EE31A8}"/>
+              </a:ext>
+            </a:extLst>
+          </p:cNvPr>
+          <p:cNvSpPr>
+            <a:spLocks noGrp="1"/>
+          </p:cNvSpPr>
+          <p:nvPr>
+            <p:ph idx="1"/>
+          </p:nvPr>
+        </p:nvSpPr>
+        <p:spPr>
+          <a:xfrm>
+            <a:off x="3048000" y="730249"/>
+            <a:ext cx="8305799" cy="5803901"/>
+          </a:xfrm>
+        </p:spPr>
+        <p:txBody>
+          <a:bodyPr anchor="ctr">
+            <a:normAutofit lnSpcReduction="10000"/>
+          </a:bodyPr>
+          <a:lstStyle/>
+          <a:p>
+            <a:r>
+              <a:rPr lang="en-US" sz="2000" dirty="0"/>
+              <a:t>A </a:t>
+            </a:r>
+            <a:r>
+              <a:rPr lang="en-US" sz="2000" b="1" dirty="0"/>
+              <a:t>distribution</a:t>
+            </a:r>
+            <a:r>
+              <a:rPr lang="en-US" sz="2000" dirty="0"/>
+              <a:t> of a variable gives (a) the values that occur and (b) how often each value occurs</a:t>
+            </a:r>
+          </a:p>
+          <a:p>
+            <a:pPr marL="0" indent="0">
+              <a:buNone/>
+            </a:pPr>
+            <a:endParaRPr lang="en-US" sz="2000" dirty="0"/>
+          </a:p>
+          <a:p>
+            <a:pPr marL="0" indent="0">
+              <a:buNone/>
+            </a:pPr>
+            <a:r>
+              <a:rPr lang="en-US" sz="2000" b="1" u="sng" dirty="0"/>
+              <a:t>Features of A Distribution</a:t>
+            </a:r>
+          </a:p>
+          <a:p>
+            <a:pPr marL="0" indent="0">
+              <a:buNone/>
+            </a:pPr>
+            <a:r>
+              <a:rPr lang="en-US" sz="2000" b="1" dirty="0"/>
+              <a:t>Categorical Variables:</a:t>
+            </a:r>
+          </a:p>
+          <a:p>
+            <a:r>
+              <a:rPr lang="en-US" sz="2000" b="1" dirty="0"/>
+              <a:t>Modal category </a:t>
+            </a:r>
+            <a:r>
+              <a:rPr lang="en-US" sz="2000" dirty="0"/>
+              <a:t>– the category with the highest frequency</a:t>
+            </a:r>
+          </a:p>
+          <a:p>
+            <a:pPr marL="0" indent="0">
+              <a:buNone/>
+            </a:pPr>
+            <a:endParaRPr lang="en-US" sz="2000" b="1" dirty="0"/>
+          </a:p>
+          <a:p>
+            <a:pPr marL="0" indent="0">
+              <a:buNone/>
+            </a:pPr>
+            <a:r>
+              <a:rPr lang="en-US" sz="2000" b="1" dirty="0"/>
+              <a:t>Quantitative Variables:</a:t>
+            </a:r>
+          </a:p>
+          <a:p>
+            <a:r>
+              <a:rPr lang="en-US" sz="2000" b="1" dirty="0"/>
+              <a:t>Shape</a:t>
+            </a:r>
+            <a:r>
+              <a:rPr lang="en-US" sz="2000" dirty="0"/>
+              <a:t> – do observations cluster into certain areas, are values spread out or more densely packed together?</a:t>
+            </a:r>
+          </a:p>
+          <a:p>
+            <a:endParaRPr lang="en-US" sz="2000" b="1" dirty="0"/>
+          </a:p>
+          <a:p>
+            <a:r>
+              <a:rPr lang="en-US" sz="2000" b="1" dirty="0"/>
+              <a:t>Center</a:t>
+            </a:r>
+            <a:r>
+              <a:rPr lang="en-US" sz="2000" dirty="0"/>
+              <a:t> – where is the middle point on the distribution, where does a typical value fall?</a:t>
+            </a:r>
+            <a:endParaRPr lang="en-US" sz="2000" b="1" dirty="0"/>
+          </a:p>
+          <a:p>
+            <a:endParaRPr lang="en-US" sz="2000" b="1" dirty="0"/>
+          </a:p>
+          <a:p>
+            <a:r>
+              <a:rPr lang="en-US" sz="2000" b="1" dirty="0"/>
+              <a:t>Variability</a:t>
+            </a:r>
+            <a:r>
+              <a:rPr lang="en-US" sz="2000" dirty="0"/>
+              <a:t> – how tightly to observations cluster around the center of the distribution </a:t>
+            </a:r>
+          </a:p>
+        </p:txBody>
+      </p:sp>
+    </p:spTree>
+    <p:extLst>
+      <p:ext uri="{BB962C8B-B14F-4D97-AF65-F5344CB8AC3E}">
+        <p14:creationId xmlns:p14="http://schemas.microsoft.com/office/powerpoint/2010/main" val="109664182"/>
+      </p:ext>
+    </p:extLst>
+  </p:cSld>
+  <p:clrMapOvr>
+    <a:masterClrMapping/>
+  </p:clrMapOvr>
+</p:sld>
+</file>
+
+<file path=ppt/slides/slide24.xml><?xml version="1.0" encoding="utf-8"?>
 <p:sld xmlns:a="http://schemas.openxmlformats.org/drawingml/2006/main" xmlns:r="http://schemas.openxmlformats.org/officeDocument/2006/relationships" xmlns:p="http://schemas.openxmlformats.org/presentationml/2006/main">
   <p:cSld>
     <p:spTree>
@@ -14542,7 +15442,7 @@
           <p:cNvPr id="2" name="Title 1">
             <a:extLst>
               <a:ext uri="{FF2B5EF4-FFF2-40B4-BE49-F238E27FC236}">
-                <a16:creationId xmlns:a16="http://schemas.microsoft.com/office/drawing/2014/main" id="{B69814C7-501D-6E5F-A6A6-DB317C7D65BB}"/>
+                <a16:creationId xmlns:a16="http://schemas.microsoft.com/office/drawing/2014/main" id="{746E7931-7E6D-2752-3470-1130A2671C60}"/>
               </a:ext>
             </a:extLst>
           </p:cNvPr>
@@ -14560,25 +15460,383 @@
           <a:p>
             <a:r>
               <a:rPr lang="en-US" dirty="0"/>
-              <a:t>Review</a:t>
+              <a:t>Displaying Distributions: Frequency Tables</a:t>
+            </a:r>
+          </a:p>
+        </p:txBody>
+      </p:sp>
+      <mc:AlternateContent xmlns:mc="http://schemas.openxmlformats.org/markup-compatibility/2006" xmlns:a14="http://schemas.microsoft.com/office/drawing/2010/main">
+        <mc:Choice Requires="a14">
+          <p:sp>
+            <p:nvSpPr>
+              <p:cNvPr id="3" name="Content Placeholder 2">
+                <a:extLst>
+                  <a:ext uri="{FF2B5EF4-FFF2-40B4-BE49-F238E27FC236}">
+                    <a16:creationId xmlns:a16="http://schemas.microsoft.com/office/drawing/2014/main" id="{F62BC55B-314A-1FBB-D20E-C5A204950191}"/>
+                  </a:ext>
+                </a:extLst>
+              </p:cNvPr>
+              <p:cNvSpPr>
+                <a:spLocks noGrp="1"/>
+              </p:cNvSpPr>
+              <p:nvPr>
+                <p:ph idx="1"/>
+              </p:nvPr>
+            </p:nvSpPr>
+            <p:spPr>
+              <a:xfrm>
+                <a:off x="838200" y="1825625"/>
+                <a:ext cx="4686300" cy="4351338"/>
+              </a:xfrm>
+            </p:spPr>
+            <p:txBody>
+              <a:bodyPr>
+                <a:normAutofit fontScale="70000" lnSpcReduction="20000"/>
+              </a:bodyPr>
+              <a:lstStyle/>
+              <a:p>
+                <a:r>
+                  <a:rPr lang="en-US" b="1" dirty="0"/>
+                  <a:t>Frequency table – </a:t>
+                </a:r>
+                <a:r>
+                  <a:rPr lang="en-US" dirty="0"/>
+                  <a:t>a table listing the distinct values of variable together with the number of observations of each value</a:t>
+                </a:r>
+              </a:p>
+              <a:p>
+                <a:endParaRPr lang="en-US" b="1" dirty="0"/>
+              </a:p>
+              <a:p>
+                <a:r>
+                  <a:rPr lang="en-US" b="1" dirty="0"/>
+                  <a:t>Frequency</a:t>
+                </a:r>
+                <a:r>
+                  <a:rPr lang="en-US" dirty="0"/>
+                  <a:t> – the number of times a value occurs</a:t>
+                </a:r>
+              </a:p>
+              <a:p>
+                <a:endParaRPr lang="en-US" dirty="0"/>
+              </a:p>
+              <a:p>
+                <a:r>
+                  <a:rPr lang="en-US" b="1" dirty="0"/>
+                  <a:t>Relative Frequency</a:t>
+                </a:r>
+                <a:r>
+                  <a:rPr lang="en-US" dirty="0"/>
+                  <a:t> – the proportion of observations that assume a given value</a:t>
+                </a:r>
+              </a:p>
+              <a:p>
+                <a:pPr marL="0" indent="0">
+                  <a:buNone/>
+                </a:pPr>
+                <a:r>
+                  <a:rPr lang="en-US" dirty="0"/>
+                  <a:t>	</a:t>
+                </a:r>
+                <a14:m>
+                  <m:oMath xmlns:m="http://schemas.openxmlformats.org/officeDocument/2006/math">
+                    <m:r>
+                      <m:rPr>
+                        <m:sty m:val="p"/>
+                      </m:rPr>
+                      <a:rPr lang="en-US" sz="3400" b="0" i="0" smtClean="0">
+                        <a:latin typeface="Cambria Math" panose="02040503050406030204" pitchFamily="18" charset="0"/>
+                      </a:rPr>
+                      <m:t>RF</m:t>
+                    </m:r>
+                    <m:r>
+                      <a:rPr lang="en-US" sz="3400" b="0" i="0" smtClean="0">
+                        <a:latin typeface="Cambria Math" panose="02040503050406030204" pitchFamily="18" charset="0"/>
+                      </a:rPr>
+                      <m:t>= </m:t>
+                    </m:r>
+                    <m:f>
+                      <m:fPr>
+                        <m:ctrlPr>
+                          <a:rPr lang="en-US" sz="3400" b="0" i="1" smtClean="0">
+                            <a:latin typeface="Cambria Math" panose="02040503050406030204" pitchFamily="18" charset="0"/>
+                          </a:rPr>
+                        </m:ctrlPr>
+                      </m:fPr>
+                      <m:num>
+                        <m:r>
+                          <a:rPr lang="en-US" sz="3400" b="0" i="1" smtClean="0">
+                            <a:latin typeface="Cambria Math" panose="02040503050406030204" pitchFamily="18" charset="0"/>
+                          </a:rPr>
+                          <m:t>𝑓</m:t>
+                        </m:r>
+                      </m:num>
+                      <m:den>
+                        <m:r>
+                          <a:rPr lang="en-US" sz="3400" b="0" i="1" smtClean="0">
+                            <a:latin typeface="Cambria Math" panose="02040503050406030204" pitchFamily="18" charset="0"/>
+                          </a:rPr>
+                          <m:t>𝑛</m:t>
+                        </m:r>
+                      </m:den>
+                    </m:f>
+                    <m:r>
+                      <a:rPr lang="en-US" sz="3400" b="0" i="1" smtClean="0">
+                        <a:latin typeface="Cambria Math" panose="02040503050406030204" pitchFamily="18" charset="0"/>
+                      </a:rPr>
+                      <m:t>,</m:t>
+                    </m:r>
+                  </m:oMath>
+                </a14:m>
+                <a:endParaRPr lang="en-US" dirty="0"/>
+              </a:p>
+              <a:p>
+                <a:r>
+                  <a:rPr lang="en-US" b="1" dirty="0"/>
+                  <a:t>Cumulative Relative Frequency </a:t>
+                </a:r>
+                <a:r>
+                  <a:rPr lang="en-US" dirty="0"/>
+                  <a:t>- the proportion of observations </a:t>
+                </a:r>
+                <a:r>
+                  <a:rPr lang="en-US" u="sng" dirty="0"/>
+                  <a:t>equal to or less than</a:t>
+                </a:r>
+                <a:r>
+                  <a:rPr lang="en-US" dirty="0"/>
+                  <a:t> a given value (more on this later)</a:t>
+                </a:r>
+              </a:p>
+            </p:txBody>
+          </p:sp>
+        </mc:Choice>
+        <mc:Fallback xmlns="">
+          <p:sp>
+            <p:nvSpPr>
+              <p:cNvPr id="3" name="Content Placeholder 2">
+                <a:extLst>
+                  <a:ext uri="{FF2B5EF4-FFF2-40B4-BE49-F238E27FC236}">
+                    <a16:creationId xmlns:a16="http://schemas.microsoft.com/office/drawing/2014/main" id="{F62BC55B-314A-1FBB-D20E-C5A204950191}"/>
+                  </a:ext>
+                </a:extLst>
+              </p:cNvPr>
+              <p:cNvSpPr>
+                <a:spLocks noGrp="1" noRot="1" noChangeAspect="1" noMove="1" noResize="1" noEditPoints="1" noAdjustHandles="1" noChangeArrowheads="1" noChangeShapeType="1" noTextEdit="1"/>
+              </p:cNvSpPr>
+              <p:nvPr>
+                <p:ph idx="1"/>
+              </p:nvPr>
+            </p:nvSpPr>
+            <p:spPr>
+              <a:xfrm>
+                <a:off x="838200" y="1825625"/>
+                <a:ext cx="4686300" cy="4351338"/>
+              </a:xfrm>
+              <a:blipFill>
+                <a:blip r:embed="rId2"/>
+                <a:stretch>
+                  <a:fillRect l="-1172" t="-2521" r="-2083"/>
+                </a:stretch>
+              </a:blipFill>
+            </p:spPr>
+            <p:txBody>
+              <a:bodyPr/>
+              <a:lstStyle/>
+              <a:p>
+                <a:r>
+                  <a:rPr lang="en-US">
+                    <a:noFill/>
+                  </a:rPr>
+                  <a:t> </a:t>
+                </a:r>
+              </a:p>
+            </p:txBody>
+          </p:sp>
+        </mc:Fallback>
+      </mc:AlternateContent>
+      <p:sp>
+        <p:nvSpPr>
+          <p:cNvPr id="5" name="TextBox 4">
+            <a:extLst>
+              <a:ext uri="{FF2B5EF4-FFF2-40B4-BE49-F238E27FC236}">
+                <a16:creationId xmlns:a16="http://schemas.microsoft.com/office/drawing/2014/main" id="{C16CEE11-2CF1-DEAD-BC8D-9BB706DE1AB6}"/>
+              </a:ext>
+            </a:extLst>
+          </p:cNvPr>
+          <p:cNvSpPr txBox="1"/>
+          <p:nvPr/>
+        </p:nvSpPr>
+        <p:spPr>
+          <a:xfrm>
+            <a:off x="6873497" y="1506022"/>
+            <a:ext cx="4392100" cy="369332"/>
+          </a:xfrm>
+          <a:prstGeom prst="rect">
+            <a:avLst/>
+          </a:prstGeom>
+          <a:noFill/>
+        </p:spPr>
+        <p:txBody>
+          <a:bodyPr wrap="none" rtlCol="0">
+            <a:spAutoFit/>
+          </a:bodyPr>
+          <a:lstStyle/>
+          <a:p>
+            <a:r>
+              <a:rPr lang="en-US" dirty="0"/>
+              <a:t>Ex. Are teens distracted by their cell phones?</a:t>
             </a:r>
           </a:p>
         </p:txBody>
       </p:sp>
       <p:sp>
         <p:nvSpPr>
-          <p:cNvPr id="3" name="Content Placeholder 2">
+          <p:cNvPr id="6" name="TextBox 5">
             <a:extLst>
               <a:ext uri="{FF2B5EF4-FFF2-40B4-BE49-F238E27FC236}">
-                <a16:creationId xmlns:a16="http://schemas.microsoft.com/office/drawing/2014/main" id="{5F9B8ED3-1C8A-EEFD-DA97-C58941FA5B9E}"/>
+                <a16:creationId xmlns:a16="http://schemas.microsoft.com/office/drawing/2014/main" id="{7CCE2FF9-7536-5C89-D055-D6807D532711}"/>
               </a:ext>
             </a:extLst>
           </p:cNvPr>
+          <p:cNvSpPr txBox="1"/>
+          <p:nvPr/>
+        </p:nvSpPr>
+        <p:spPr>
+          <a:xfrm>
+            <a:off x="6455303" y="4492364"/>
+            <a:ext cx="5045612" cy="523220"/>
+          </a:xfrm>
+          <a:prstGeom prst="rect">
+            <a:avLst/>
+          </a:prstGeom>
+          <a:noFill/>
+        </p:spPr>
+        <p:txBody>
+          <a:bodyPr wrap="square" rtlCol="0">
+            <a:spAutoFit/>
+          </a:bodyPr>
+          <a:lstStyle/>
+          <a:p>
+            <a:r>
+              <a:rPr lang="en-US" sz="1400" dirty="0"/>
+              <a:t>Ex. </a:t>
+            </a:r>
+            <a:r>
+              <a:rPr lang="en-US" sz="1400" dirty="0" err="1"/>
+              <a:t>Mendels</a:t>
+            </a:r>
+            <a:r>
+              <a:rPr lang="en-US" sz="1400" dirty="0"/>
+              <a:t> Pea Plants - In one of Gregor Mendel’s classic studies, </a:t>
+            </a:r>
+          </a:p>
+          <a:p>
+            <a:r>
+              <a:rPr lang="en-US" sz="1400" dirty="0"/>
+              <a:t>he bred 8023 pea plants and observed the color of the pea pods. </a:t>
+            </a:r>
+          </a:p>
+        </p:txBody>
+      </p:sp>
+      <p:pic>
+        <p:nvPicPr>
+          <p:cNvPr id="7" name="Picture 6">
+            <a:extLst>
+              <a:ext uri="{FF2B5EF4-FFF2-40B4-BE49-F238E27FC236}">
+                <a16:creationId xmlns:a16="http://schemas.microsoft.com/office/drawing/2014/main" id="{7747518D-2983-9589-ADFC-D914C94612B9}"/>
+              </a:ext>
+            </a:extLst>
+          </p:cNvPr>
+          <p:cNvPicPr>
+            <a:picLocks noChangeAspect="1"/>
+          </p:cNvPicPr>
+          <p:nvPr/>
+        </p:nvPicPr>
+        <p:blipFill>
+          <a:blip r:embed="rId3"/>
+          <a:stretch>
+            <a:fillRect/>
+          </a:stretch>
+        </p:blipFill>
+        <p:spPr>
+          <a:xfrm>
+            <a:off x="6873497" y="5015584"/>
+            <a:ext cx="4359220" cy="1477291"/>
+          </a:xfrm>
+          <a:prstGeom prst="rect">
+            <a:avLst/>
+          </a:prstGeom>
+        </p:spPr>
+      </p:pic>
+      <p:pic>
+        <p:nvPicPr>
+          <p:cNvPr id="9" name="Picture 8">
+            <a:extLst>
+              <a:ext uri="{FF2B5EF4-FFF2-40B4-BE49-F238E27FC236}">
+                <a16:creationId xmlns:a16="http://schemas.microsoft.com/office/drawing/2014/main" id="{A726F141-28A4-5B62-1A80-B214989D15D2}"/>
+              </a:ext>
+            </a:extLst>
+          </p:cNvPr>
+          <p:cNvPicPr>
+            <a:picLocks noChangeAspect="1"/>
+          </p:cNvPicPr>
+          <p:nvPr/>
+        </p:nvPicPr>
+        <p:blipFill>
+          <a:blip r:embed="rId4"/>
+          <a:stretch>
+            <a:fillRect/>
+          </a:stretch>
+        </p:blipFill>
+        <p:spPr>
+          <a:xfrm>
+            <a:off x="5661891" y="1887427"/>
+            <a:ext cx="6358151" cy="2477747"/>
+          </a:xfrm>
+          <a:prstGeom prst="rect">
+            <a:avLst/>
+          </a:prstGeom>
+        </p:spPr>
+      </p:pic>
+    </p:spTree>
+    <p:extLst>
+      <p:ext uri="{BB962C8B-B14F-4D97-AF65-F5344CB8AC3E}">
+        <p14:creationId xmlns:p14="http://schemas.microsoft.com/office/powerpoint/2010/main" val="3307213172"/>
+      </p:ext>
+    </p:extLst>
+  </p:cSld>
+  <p:clrMapOvr>
+    <a:masterClrMapping/>
+  </p:clrMapOvr>
+</p:sld>
+</file>
+
+<file path=ppt/slides/slide25.xml><?xml version="1.0" encoding="utf-8"?>
+<p:sld xmlns:a="http://schemas.openxmlformats.org/drawingml/2006/main" xmlns:r="http://schemas.openxmlformats.org/officeDocument/2006/relationships" xmlns:p="http://schemas.openxmlformats.org/presentationml/2006/main">
+  <p:cSld>
+    <p:spTree>
+      <p:nvGrpSpPr>
+        <p:cNvPr id="1" name=""/>
+        <p:cNvGrpSpPr/>
+        <p:nvPr/>
+      </p:nvGrpSpPr>
+      <p:grpSpPr>
+        <a:xfrm>
+          <a:off x="0" y="0"/>
+          <a:ext cx="0" cy="0"/>
+          <a:chOff x="0" y="0"/>
+          <a:chExt cx="0" cy="0"/>
+        </a:xfrm>
+      </p:grpSpPr>
+      <p:sp>
+        <p:nvSpPr>
+          <p:cNvPr id="2" name="Title 1"/>
           <p:cNvSpPr>
             <a:spLocks noGrp="1"/>
           </p:cNvSpPr>
           <p:nvPr>
-            <p:ph idx="1"/>
+            <p:ph type="title"/>
           </p:nvPr>
         </p:nvSpPr>
         <p:spPr/>
@@ -14590,41 +15848,510 @@
           <a:p>
             <a:r>
               <a:rPr lang="en-US" dirty="0"/>
-              <a:t>A natural first step of statistical description is to look at graphical summaries of the observations for our variables</a:t>
+              <a:t>Try it out: A Frequency Table by Hand</a:t>
             </a:r>
           </a:p>
-          <a:p>
-            <a:endParaRPr lang="en-US" dirty="0"/>
-          </a:p>
-          <a:p>
+        </p:txBody>
+      </p:sp>
+      <p:sp>
+        <p:nvSpPr>
+          <p:cNvPr id="3" name="Prompt"/>
+          <p:cNvSpPr txBox="1"/>
+          <p:nvPr/>
+        </p:nvSpPr>
+        <p:spPr>
+          <a:xfrm>
+            <a:off x="838200" y="1600200"/>
+            <a:ext cx="5250000" cy="4700000"/>
+          </a:xfrm>
+          <a:prstGeom prst="rect">
+            <a:avLst/>
+          </a:prstGeom>
+          <a:noFill/>
+        </p:spPr>
+        <p:txBody>
+          <a:bodyPr wrap="square">
+            <a:normAutofit/>
+          </a:bodyPr>
+          <a:lstStyle/>
+          <a:p>
+            <a:pPr marL="0" indent="0">
+              <a:buNone/>
+            </a:pPr>
             <a:r>
-              <a:rPr lang="en-US" dirty="0"/>
-              <a:t>A </a:t>
+              <a:rPr lang="en-US" sz="1600" dirty="0"/>
+              <a:t>We put Pew's question to 20 students in this room: are you losing focus in class by checking your phone?</a:t>
             </a:r>
+          </a:p>
+          <a:p>
+            <a:pPr marL="0" indent="0">
+              <a:spcBef>
+                <a:spcPts val="300"/>
+              </a:spcBef>
+              <a:buNone/>
+            </a:pPr>
             <a:r>
-              <a:rPr lang="en-US" b="1" dirty="0"/>
-              <a:t>distribution</a:t>
+              <a:rPr lang="en-US" sz="1500" dirty="0">
+                <a:latin typeface="Consolas" panose="020B0609020204030204"/>
+              </a:rPr>
+              <a:t>Sometimes  Never  Rarely  Never  Often</a:t>
             </a:r>
+          </a:p>
+          <a:p>
+            <a:pPr marL="0" indent="0">
+              <a:buNone/>
+            </a:pPr>
             <a:r>
-              <a:rPr lang="en-US" dirty="0"/>
-              <a:t> of a variable gives (a) the values that occur and (b) how often each value occurs</a:t>
+              <a:rPr lang="en-US" sz="1500" dirty="0">
+                <a:latin typeface="Consolas" panose="020B0609020204030204"/>
+              </a:rPr>
+              <a:t>Rarely  Never  Sometimes  Rarely  Never</a:t>
             </a:r>
           </a:p>
           <a:p>
-            <a:endParaRPr lang="en-US" dirty="0"/>
-          </a:p>
-          <a:p>
+            <a:pPr marL="0" indent="0">
+              <a:buNone/>
+            </a:pPr>
             <a:r>
-              <a:rPr lang="en-US" dirty="0"/>
-              <a:t>A </a:t>
+              <a:rPr lang="en-US" sz="1500" dirty="0">
+                <a:latin typeface="Consolas" panose="020B0609020204030204"/>
+              </a:rPr>
+              <a:t>Sometimes  Rarely  Never  Often  Sometimes</a:t>
             </a:r>
+          </a:p>
+          <a:p>
+            <a:pPr marL="0" indent="0">
+              <a:buNone/>
+            </a:pPr>
             <a:r>
-              <a:rPr lang="en-US" b="1" dirty="0"/>
-              <a:t>frequency table </a:t>
+              <a:rPr lang="en-US" sz="1500" dirty="0">
+                <a:latin typeface="Consolas" panose="020B0609020204030204"/>
+              </a:rPr>
+              <a:t>Rarely  Never  Rarely  Sometimes  Never</a:t>
             </a:r>
+          </a:p>
+          <a:p>
+            <a:pPr marL="0" indent="0">
+              <a:spcBef>
+                <a:spcPts val="700"/>
+              </a:spcBef>
+              <a:buNone/>
+            </a:pPr>
             <a:r>
-              <a:rPr lang="en-US" dirty="0"/>
-              <a:t>is a tabular descriptions of the distribution of a variable – it can be applied to either quantitative or qualitative variables</a:t>
+              <a:rPr lang="en-US" sz="1600" b="1" dirty="0"/>
+              <a:t>Build the frequency table: frequency, relative frequency and cumulative relative frequency. Which is the modal category?</a:t>
+            </a:r>
+          </a:p>
+        </p:txBody>
+      </p:sp>
+      <p:graphicFrame>
+        <p:nvGraphicFramePr>
+          <p:cNvPr id="4" name="Answer table"/>
+          <p:cNvGraphicFramePr>
+            <a:graphicFrameLocks noGrp="1"/>
+          </p:cNvGraphicFramePr>
+          <p:nvPr/>
+        </p:nvGraphicFramePr>
+        <p:xfrm>
+          <a:off x="6400800" y="1750000"/>
+          <a:ext cx="5100000" cy="2220000"/>
+        </p:xfrm>
+        <a:graphic>
+          <a:graphicData uri="http://schemas.openxmlformats.org/drawingml/2006/table">
+            <a:tbl>
+              <a:tblPr firstRow="1" bandRow="1">
+                <a:tableStyleId>{5C22544A-7EE6-4342-B048-85BDC9FD1C3A}</a:tableStyleId>
+              </a:tblPr>
+              <a:tblGrid>
+                <a:gridCol w="1900000"/>
+                <a:gridCol w="900000"/>
+                <a:gridCol w="1150000"/>
+                <a:gridCol w="1150000"/>
+              </a:tblGrid>
+              <a:tr h="370000">
+                <a:tc>
+                  <a:txBody>
+                    <a:bodyPr/>
+                    <a:lstStyle/>
+                    <a:p>
+                      <a:pPr algn="l"/>
+                      <a:r>
+                        <a:rPr lang="en-US" sz="1400" dirty="0"/>
+                        <a:t>Response</a:t>
+                      </a:r>
+                    </a:p>
+                  </a:txBody>
+                  <a:tcPr marL="68580" marR="68580" marT="0" marB="0" anchor="ctr"/>
+                </a:tc>
+                <a:tc>
+                  <a:txBody>
+                    <a:bodyPr/>
+                    <a:lstStyle/>
+                    <a:p>
+                      <a:pPr algn="ctr"/>
+                      <a:r>
+                        <a:rPr lang="en-US" sz="1400" dirty="0"/>
+                        <a:t>f</a:t>
+                      </a:r>
+                    </a:p>
+                  </a:txBody>
+                  <a:tcPr marL="68580" marR="68580" marT="0" marB="0" anchor="ctr"/>
+                </a:tc>
+                <a:tc>
+                  <a:txBody>
+                    <a:bodyPr/>
+                    <a:lstStyle/>
+                    <a:p>
+                      <a:pPr algn="ctr"/>
+                      <a:r>
+                        <a:rPr lang="en-US" sz="1400" dirty="0"/>
+                        <a:t>Rel. freq.</a:t>
+                      </a:r>
+                    </a:p>
+                  </a:txBody>
+                  <a:tcPr marL="68580" marR="68580" marT="0" marB="0" anchor="ctr"/>
+                </a:tc>
+                <a:tc>
+                  <a:txBody>
+                    <a:bodyPr/>
+                    <a:lstStyle/>
+                    <a:p>
+                      <a:pPr algn="ctr"/>
+                      <a:r>
+                        <a:rPr lang="en-US" sz="1400" dirty="0"/>
+                        <a:t>Cum. rel. freq.</a:t>
+                      </a:r>
+                    </a:p>
+                  </a:txBody>
+                  <a:tcPr marL="68580" marR="68580" marT="0" marB="0" anchor="ctr"/>
+                </a:tc>
+              </a:tr>
+              <a:tr h="370000">
+                <a:tc>
+                  <a:txBody>
+                    <a:bodyPr/>
+                    <a:lstStyle/>
+                    <a:p>
+                      <a:pPr algn="l"/>
+                      <a:r>
+                        <a:rPr lang="en-US" sz="1400" dirty="0"/>
+                        <a:t>Never</a:t>
+                      </a:r>
+                    </a:p>
+                  </a:txBody>
+                  <a:tcPr marL="68580" marR="68580" marT="0" marB="0" anchor="ctr"/>
+                </a:tc>
+                <a:tc>
+                  <a:txBody>
+                    <a:bodyPr/>
+                    <a:lstStyle/>
+                    <a:p>
+                      <a:pPr algn="ctr"/>
+                      <a:r>
+                        <a:rPr lang="en-US" sz="1400" dirty="0"/>
+                        <a:t>7</a:t>
+                      </a:r>
+                    </a:p>
+                  </a:txBody>
+                  <a:tcPr marL="68580" marR="68580" marT="0" marB="0" anchor="ctr"/>
+                </a:tc>
+                <a:tc>
+                  <a:txBody>
+                    <a:bodyPr/>
+                    <a:lstStyle/>
+                    <a:p>
+                      <a:pPr algn="ctr"/>
+                      <a:r>
+                        <a:rPr lang="en-US" sz="1400" dirty="0"/>
+                        <a:t>0.35</a:t>
+                      </a:r>
+                    </a:p>
+                  </a:txBody>
+                  <a:tcPr marL="68580" marR="68580" marT="0" marB="0" anchor="ctr"/>
+                </a:tc>
+                <a:tc>
+                  <a:txBody>
+                    <a:bodyPr/>
+                    <a:lstStyle/>
+                    <a:p>
+                      <a:pPr algn="ctr"/>
+                      <a:r>
+                        <a:rPr lang="en-US" sz="1400" dirty="0"/>
+                        <a:t>0.35</a:t>
+                      </a:r>
+                    </a:p>
+                  </a:txBody>
+                  <a:tcPr marL="68580" marR="68580" marT="0" marB="0" anchor="ctr"/>
+                </a:tc>
+              </a:tr>
+              <a:tr h="370000">
+                <a:tc>
+                  <a:txBody>
+                    <a:bodyPr/>
+                    <a:lstStyle/>
+                    <a:p>
+                      <a:pPr algn="l"/>
+                      <a:r>
+                        <a:rPr lang="en-US" sz="1400" dirty="0"/>
+                        <a:t>Rarely</a:t>
+                      </a:r>
+                    </a:p>
+                  </a:txBody>
+                  <a:tcPr marL="68580" marR="68580" marT="0" marB="0" anchor="ctr"/>
+                </a:tc>
+                <a:tc>
+                  <a:txBody>
+                    <a:bodyPr/>
+                    <a:lstStyle/>
+                    <a:p>
+                      <a:pPr algn="ctr"/>
+                      <a:r>
+                        <a:rPr lang="en-US" sz="1400" dirty="0"/>
+                        <a:t>6</a:t>
+                      </a:r>
+                    </a:p>
+                  </a:txBody>
+                  <a:tcPr marL="68580" marR="68580" marT="0" marB="0" anchor="ctr"/>
+                </a:tc>
+                <a:tc>
+                  <a:txBody>
+                    <a:bodyPr/>
+                    <a:lstStyle/>
+                    <a:p>
+                      <a:pPr algn="ctr"/>
+                      <a:r>
+                        <a:rPr lang="en-US" sz="1400" dirty="0"/>
+                        <a:t>0.30</a:t>
+                      </a:r>
+                    </a:p>
+                  </a:txBody>
+                  <a:tcPr marL="68580" marR="68580" marT="0" marB="0" anchor="ctr"/>
+                </a:tc>
+                <a:tc>
+                  <a:txBody>
+                    <a:bodyPr/>
+                    <a:lstStyle/>
+                    <a:p>
+                      <a:pPr algn="ctr"/>
+                      <a:r>
+                        <a:rPr lang="en-US" sz="1400" dirty="0"/>
+                        <a:t>0.65</a:t>
+                      </a:r>
+                    </a:p>
+                  </a:txBody>
+                  <a:tcPr marL="68580" marR="68580" marT="0" marB="0" anchor="ctr"/>
+                </a:tc>
+              </a:tr>
+              <a:tr h="370000">
+                <a:tc>
+                  <a:txBody>
+                    <a:bodyPr/>
+                    <a:lstStyle/>
+                    <a:p>
+                      <a:pPr algn="l"/>
+                      <a:r>
+                        <a:rPr lang="en-US" sz="1400" dirty="0"/>
+                        <a:t>Sometimes</a:t>
+                      </a:r>
+                    </a:p>
+                  </a:txBody>
+                  <a:tcPr marL="68580" marR="68580" marT="0" marB="0" anchor="ctr"/>
+                </a:tc>
+                <a:tc>
+                  <a:txBody>
+                    <a:bodyPr/>
+                    <a:lstStyle/>
+                    <a:p>
+                      <a:pPr algn="ctr"/>
+                      <a:r>
+                        <a:rPr lang="en-US" sz="1400" dirty="0"/>
+                        <a:t>5</a:t>
+                      </a:r>
+                    </a:p>
+                  </a:txBody>
+                  <a:tcPr marL="68580" marR="68580" marT="0" marB="0" anchor="ctr"/>
+                </a:tc>
+                <a:tc>
+                  <a:txBody>
+                    <a:bodyPr/>
+                    <a:lstStyle/>
+                    <a:p>
+                      <a:pPr algn="ctr"/>
+                      <a:r>
+                        <a:rPr lang="en-US" sz="1400" dirty="0"/>
+                        <a:t>0.25</a:t>
+                      </a:r>
+                    </a:p>
+                  </a:txBody>
+                  <a:tcPr marL="68580" marR="68580" marT="0" marB="0" anchor="ctr"/>
+                </a:tc>
+                <a:tc>
+                  <a:txBody>
+                    <a:bodyPr/>
+                    <a:lstStyle/>
+                    <a:p>
+                      <a:pPr algn="ctr"/>
+                      <a:r>
+                        <a:rPr lang="en-US" sz="1400" dirty="0"/>
+                        <a:t>0.90</a:t>
+                      </a:r>
+                    </a:p>
+                  </a:txBody>
+                  <a:tcPr marL="68580" marR="68580" marT="0" marB="0" anchor="ctr"/>
+                </a:tc>
+              </a:tr>
+              <a:tr h="370000">
+                <a:tc>
+                  <a:txBody>
+                    <a:bodyPr/>
+                    <a:lstStyle/>
+                    <a:p>
+                      <a:pPr algn="l"/>
+                      <a:r>
+                        <a:rPr lang="en-US" sz="1400" dirty="0"/>
+                        <a:t>Often</a:t>
+                      </a:r>
+                    </a:p>
+                  </a:txBody>
+                  <a:tcPr marL="68580" marR="68580" marT="0" marB="0" anchor="ctr"/>
+                </a:tc>
+                <a:tc>
+                  <a:txBody>
+                    <a:bodyPr/>
+                    <a:lstStyle/>
+                    <a:p>
+                      <a:pPr algn="ctr"/>
+                      <a:r>
+                        <a:rPr lang="en-US" sz="1400" dirty="0"/>
+                        <a:t>2</a:t>
+                      </a:r>
+                    </a:p>
+                  </a:txBody>
+                  <a:tcPr marL="68580" marR="68580" marT="0" marB="0" anchor="ctr"/>
+                </a:tc>
+                <a:tc>
+                  <a:txBody>
+                    <a:bodyPr/>
+                    <a:lstStyle/>
+                    <a:p>
+                      <a:pPr algn="ctr"/>
+                      <a:r>
+                        <a:rPr lang="en-US" sz="1400" dirty="0"/>
+                        <a:t>0.10</a:t>
+                      </a:r>
+                    </a:p>
+                  </a:txBody>
+                  <a:tcPr marL="68580" marR="68580" marT="0" marB="0" anchor="ctr"/>
+                </a:tc>
+                <a:tc>
+                  <a:txBody>
+                    <a:bodyPr/>
+                    <a:lstStyle/>
+                    <a:p>
+                      <a:pPr algn="ctr"/>
+                      <a:r>
+                        <a:rPr lang="en-US" sz="1400" dirty="0"/>
+                        <a:t>1.00</a:t>
+                      </a:r>
+                    </a:p>
+                  </a:txBody>
+                  <a:tcPr marL="68580" marR="68580" marT="0" marB="0" anchor="ctr"/>
+                </a:tc>
+              </a:tr>
+              <a:tr h="370000">
+                <a:tc>
+                  <a:txBody>
+                    <a:bodyPr/>
+                    <a:lstStyle/>
+                    <a:p>
+                      <a:pPr algn="l"/>
+                      <a:r>
+                        <a:rPr lang="en-US" sz="1400" dirty="0"/>
+                        <a:t>Total</a:t>
+                      </a:r>
+                    </a:p>
+                  </a:txBody>
+                  <a:tcPr marL="68580" marR="68580" marT="0" marB="0" anchor="ctr"/>
+                </a:tc>
+                <a:tc>
+                  <a:txBody>
+                    <a:bodyPr/>
+                    <a:lstStyle/>
+                    <a:p>
+                      <a:pPr algn="ctr"/>
+                      <a:r>
+                        <a:rPr lang="en-US" sz="1400" dirty="0"/>
+                        <a:t>20</a:t>
+                      </a:r>
+                    </a:p>
+                  </a:txBody>
+                  <a:tcPr marL="68580" marR="68580" marT="0" marB="0" anchor="ctr"/>
+                </a:tc>
+                <a:tc>
+                  <a:txBody>
+                    <a:bodyPr/>
+                    <a:lstStyle/>
+                    <a:p>
+                      <a:pPr algn="ctr"/>
+                      <a:r>
+                        <a:rPr lang="en-US" sz="1400" dirty="0"/>
+                        <a:t>1.00</a:t>
+                      </a:r>
+                    </a:p>
+                  </a:txBody>
+                  <a:tcPr marL="68580" marR="68580" marT="0" marB="0" anchor="ctr"/>
+                </a:tc>
+                <a:tc>
+                  <a:txBody>
+                    <a:bodyPr/>
+                    <a:lstStyle/>
+                    <a:p>
+                      <a:pPr algn="ctr"/>
+                      <a:r>
+                        <a:rPr lang="en-US" sz="1400" dirty="0"/>
+                        <a:t/>
+                      </a:r>
+                    </a:p>
+                  </a:txBody>
+                  <a:tcPr marL="68580" marR="68580" marT="0" marB="0" anchor="ctr"/>
+                </a:tc>
+              </a:tr>
+            </a:tbl>
+          </a:graphicData>
+        </a:graphic>
+      </p:graphicFrame>
+      <p:sp>
+        <p:nvSpPr>
+          <p:cNvPr id="5" name="Takeaway"/>
+          <p:cNvSpPr txBox="1"/>
+          <p:nvPr/>
+        </p:nvSpPr>
+        <p:spPr>
+          <a:xfrm>
+            <a:off x="6400800" y="4230000"/>
+            <a:ext cx="5100000" cy="1400000"/>
+          </a:xfrm>
+          <a:prstGeom prst="rect">
+            <a:avLst/>
+          </a:prstGeom>
+          <a:noFill/>
+        </p:spPr>
+        <p:txBody>
+          <a:bodyPr wrap="square">
+            <a:normAutofit/>
+          </a:bodyPr>
+          <a:lstStyle/>
+          <a:p>
+            <a:pPr marL="0" indent="0">
+              <a:buNone/>
+            </a:pPr>
+            <a:r>
+              <a:rPr lang="en-US" sz="1500" b="1" dirty="0">
+                <a:solidFill>
+                  <a:srgbClr val="C00000"/>
+                </a:solidFill>
+              </a:rPr>
+              <a:t>Modal category: Never. Pew's 743 teens gave 0.39, 0.29, 0.24, 0.08 – 20 students landed within a few points of them.</a:t>
             </a:r>
           </a:p>
         </p:txBody>
@@ -14632,13 +16359,1986 @@
     </p:spTree>
     <p:extLst>
       <p:ext uri="{BB962C8B-B14F-4D97-AF65-F5344CB8AC3E}">
-        <p14:creationId xmlns:p14="http://schemas.microsoft.com/office/powerpoint/2010/main" val="3747072180"/>
+        <p14:creationId xmlns:p14="http://schemas.microsoft.com/office/powerpoint/2010/main" val="1517484003"/>
       </p:ext>
     </p:extLst>
   </p:cSld>
   <p:clrMapOvr>
     <a:masterClrMapping/>
   </p:clrMapOvr>
+  <p:timing>
+    <p:tnLst>
+      <p:par>
+        <p:cTn id="1" dur="indefinite" restart="never" nodeType="tmRoot">
+          <p:childTnLst>
+            <p:seq concurrent="1" nextAc="seek">
+              <p:cTn id="2" dur="indefinite" nodeType="mainSeq">
+                <p:childTnLst>
+                  <p:par>
+                    <p:cTn id="3" fill="hold">
+                      <p:stCondLst>
+                        <p:cond delay="indefinite"/>
+                      </p:stCondLst>
+                      <p:childTnLst>
+                        <p:par>
+                          <p:cTn id="4" fill="hold">
+                            <p:stCondLst>
+                              <p:cond delay="0"/>
+                            </p:stCondLst>
+                            <p:childTnLst>
+                              <p:par>
+                                <p:cTn id="5" presetID="1" presetClass="entr" presetSubtype="0" fill="hold" nodeType="clickEffect">
+                                  <p:stCondLst>
+                                    <p:cond delay="0"/>
+                                  </p:stCondLst>
+                                  <p:childTnLst>
+                                    <p:set>
+                                      <p:cBhvr>
+                                        <p:cTn id="6" dur="1" fill="hold">
+                                          <p:stCondLst>
+                                            <p:cond delay="0"/>
+                                          </p:stCondLst>
+                                        </p:cTn>
+                                        <p:tgtEl>
+                                          <p:spTgt spid="4"/>
+                                        </p:tgtEl>
+                                        <p:attrNameLst>
+                                          <p:attrName>style.visibility</p:attrName>
+                                        </p:attrNameLst>
+                                      </p:cBhvr>
+                                      <p:to>
+                                        <p:strVal val="visible"/>
+                                      </p:to>
+                                    </p:set>
+                                  </p:childTnLst>
+                                </p:cTn>
+                              </p:par>
+                            </p:childTnLst>
+                          </p:cTn>
+                        </p:par>
+                      </p:childTnLst>
+                    </p:cTn>
+                  </p:par>
+                  <p:par>
+                    <p:cTn id="7" fill="hold">
+                      <p:stCondLst>
+                        <p:cond delay="indefinite"/>
+                      </p:stCondLst>
+                      <p:childTnLst>
+                        <p:par>
+                          <p:cTn id="8" fill="hold">
+                            <p:stCondLst>
+                              <p:cond delay="0"/>
+                            </p:stCondLst>
+                            <p:childTnLst>
+                              <p:par>
+                                <p:cTn id="9" presetID="1" presetClass="entr" presetSubtype="0" fill="hold" nodeType="clickEffect">
+                                  <p:stCondLst>
+                                    <p:cond delay="0"/>
+                                  </p:stCondLst>
+                                  <p:childTnLst>
+                                    <p:set>
+                                      <p:cBhvr>
+                                        <p:cTn id="10" dur="1" fill="hold">
+                                          <p:stCondLst>
+                                            <p:cond delay="0"/>
+                                          </p:stCondLst>
+                                        </p:cTn>
+                                        <p:tgtEl>
+                                          <p:spTgt spid="5"/>
+                                        </p:tgtEl>
+                                        <p:attrNameLst>
+                                          <p:attrName>style.visibility</p:attrName>
+                                        </p:attrNameLst>
+                                      </p:cBhvr>
+                                      <p:to>
+                                        <p:strVal val="visible"/>
+                                      </p:to>
+                                    </p:set>
+                                  </p:childTnLst>
+                                </p:cTn>
+                              </p:par>
+                            </p:childTnLst>
+                          </p:cTn>
+                        </p:par>
+                      </p:childTnLst>
+                    </p:cTn>
+                  </p:par>
+                </p:childTnLst>
+              </p:cTn>
+              <p:prevCondLst>
+                <p:cond evt="onPrev" delay="0">
+                  <p:tgtEl>
+                    <p:sldTgt/>
+                  </p:tgtEl>
+                </p:cond>
+              </p:prevCondLst>
+              <p:nextCondLst>
+                <p:cond evt="onNext" delay="0">
+                  <p:tgtEl>
+                    <p:sldTgt/>
+                  </p:tgtEl>
+                </p:cond>
+              </p:nextCondLst>
+            </p:seq>
+          </p:childTnLst>
+        </p:cTn>
+      </p:par>
+    </p:tnLst>
+  </p:timing>
+</p:sld>
+</file>
+
+<file path=ppt/slides/slide26.xml><?xml version="1.0" encoding="utf-8"?>
+<p:sld xmlns:a="http://schemas.openxmlformats.org/drawingml/2006/main" xmlns:r="http://schemas.openxmlformats.org/officeDocument/2006/relationships" xmlns:p="http://schemas.openxmlformats.org/presentationml/2006/main">
+  <p:cSld>
+    <p:spTree>
+      <p:nvGrpSpPr>
+        <p:cNvPr id="1" name=""/>
+        <p:cNvGrpSpPr/>
+        <p:nvPr/>
+      </p:nvGrpSpPr>
+      <p:grpSpPr>
+        <a:xfrm>
+          <a:off x="0" y="0"/>
+          <a:ext cx="0" cy="0"/>
+          <a:chOff x="0" y="0"/>
+          <a:chExt cx="0" cy="0"/>
+        </a:xfrm>
+      </p:grpSpPr>
+      <p:sp>
+        <p:nvSpPr>
+          <p:cNvPr id="2" name="Title 1"/>
+          <p:cNvSpPr>
+            <a:spLocks noGrp="1"/>
+          </p:cNvSpPr>
+          <p:nvPr>
+            <p:ph type="title"/>
+          </p:nvPr>
+        </p:nvSpPr>
+        <p:spPr/>
+        <p:txBody>
+          <a:bodyPr>
+            <a:normAutofit/>
+          </a:bodyPr>
+          <a:lstStyle/>
+          <a:p>
+            <a:r>
+              <a:rPr lang="en-US" dirty="0"/>
+              <a:t>Try it out: A Discrete Variable</a:t>
+            </a:r>
+          </a:p>
+        </p:txBody>
+      </p:sp>
+      <p:sp>
+        <p:nvSpPr>
+          <p:cNvPr id="3" name="Prompt"/>
+          <p:cNvSpPr txBox="1"/>
+          <p:nvPr/>
+        </p:nvSpPr>
+        <p:spPr>
+          <a:xfrm>
+            <a:off x="838200" y="1600200"/>
+            <a:ext cx="5250000" cy="4700000"/>
+          </a:xfrm>
+          <a:prstGeom prst="rect">
+            <a:avLst/>
+          </a:prstGeom>
+          <a:noFill/>
+        </p:spPr>
+        <p:txBody>
+          <a:bodyPr wrap="square">
+            <a:normAutofit/>
+          </a:bodyPr>
+          <a:lstStyle/>
+          <a:p>
+            <a:pPr marL="0" indent="0">
+              <a:buNone/>
+            </a:pPr>
+            <a:r>
+              <a:rPr lang="en-US" sz="1600" dirty="0"/>
+              <a:t>Twenty students report how many siblings they have:</a:t>
+            </a:r>
+          </a:p>
+          <a:p>
+            <a:pPr marL="0" indent="0">
+              <a:spcBef>
+                <a:spcPts val="300"/>
+              </a:spcBef>
+              <a:buNone/>
+            </a:pPr>
+            <a:r>
+              <a:rPr lang="en-US" sz="1500" dirty="0">
+                <a:latin typeface="Consolas" panose="020B0609020204030204"/>
+              </a:rPr>
+              <a:t>0  1  1  2  0  3  1  2  1  0</a:t>
+            </a:r>
+          </a:p>
+          <a:p>
+            <a:pPr marL="0" indent="0">
+              <a:buNone/>
+            </a:pPr>
+            <a:r>
+              <a:rPr lang="en-US" sz="1500" dirty="0">
+                <a:latin typeface="Consolas" panose="020B0609020204030204"/>
+              </a:rPr>
+              <a:t>4  2  1  1  3  0  2  1  5  1</a:t>
+            </a:r>
+          </a:p>
+          <a:p>
+            <a:pPr marL="0" indent="0">
+              <a:spcBef>
+                <a:spcPts val="700"/>
+              </a:spcBef>
+              <a:buNone/>
+            </a:pPr>
+            <a:r>
+              <a:rPr lang="en-US" sz="1600" b="1" dirty="0"/>
+              <a:t>Build the frequency table. What is the modal value? Is the distribution symmetric, or skewed – and which way?</a:t>
+            </a:r>
+          </a:p>
+        </p:txBody>
+      </p:sp>
+      <p:graphicFrame>
+        <p:nvGraphicFramePr>
+          <p:cNvPr id="4" name="Answer table"/>
+          <p:cNvGraphicFramePr>
+            <a:graphicFrameLocks noGrp="1"/>
+          </p:cNvGraphicFramePr>
+          <p:nvPr/>
+        </p:nvGraphicFramePr>
+        <p:xfrm>
+          <a:off x="6400800" y="1750000"/>
+          <a:ext cx="4300000" cy="2960000"/>
+        </p:xfrm>
+        <a:graphic>
+          <a:graphicData uri="http://schemas.openxmlformats.org/drawingml/2006/table">
+            <a:tbl>
+              <a:tblPr firstRow="1" bandRow="1">
+                <a:tableStyleId>{5C22544A-7EE6-4342-B048-85BDC9FD1C3A}</a:tableStyleId>
+              </a:tblPr>
+              <a:tblGrid>
+                <a:gridCol w="1900000"/>
+                <a:gridCol w="1000000"/>
+                <a:gridCol w="1400000"/>
+              </a:tblGrid>
+              <a:tr h="370000">
+                <a:tc>
+                  <a:txBody>
+                    <a:bodyPr/>
+                    <a:lstStyle/>
+                    <a:p>
+                      <a:pPr algn="l"/>
+                      <a:r>
+                        <a:rPr lang="en-US" sz="1400" dirty="0"/>
+                        <a:t>Siblings</a:t>
+                      </a:r>
+                    </a:p>
+                  </a:txBody>
+                  <a:tcPr marL="68580" marR="68580" marT="0" marB="0" anchor="ctr"/>
+                </a:tc>
+                <a:tc>
+                  <a:txBody>
+                    <a:bodyPr/>
+                    <a:lstStyle/>
+                    <a:p>
+                      <a:pPr algn="ctr"/>
+                      <a:r>
+                        <a:rPr lang="en-US" sz="1400" dirty="0"/>
+                        <a:t>f</a:t>
+                      </a:r>
+                    </a:p>
+                  </a:txBody>
+                  <a:tcPr marL="68580" marR="68580" marT="0" marB="0" anchor="ctr"/>
+                </a:tc>
+                <a:tc>
+                  <a:txBody>
+                    <a:bodyPr/>
+                    <a:lstStyle/>
+                    <a:p>
+                      <a:pPr algn="ctr"/>
+                      <a:r>
+                        <a:rPr lang="en-US" sz="1400" dirty="0"/>
+                        <a:t>Rel. freq.</a:t>
+                      </a:r>
+                    </a:p>
+                  </a:txBody>
+                  <a:tcPr marL="68580" marR="68580" marT="0" marB="0" anchor="ctr"/>
+                </a:tc>
+              </a:tr>
+              <a:tr h="370000">
+                <a:tc>
+                  <a:txBody>
+                    <a:bodyPr/>
+                    <a:lstStyle/>
+                    <a:p>
+                      <a:pPr algn="l"/>
+                      <a:r>
+                        <a:rPr lang="en-US" sz="1400" dirty="0"/>
+                        <a:t>0</a:t>
+                      </a:r>
+                    </a:p>
+                  </a:txBody>
+                  <a:tcPr marL="68580" marR="68580" marT="0" marB="0" anchor="ctr"/>
+                </a:tc>
+                <a:tc>
+                  <a:txBody>
+                    <a:bodyPr/>
+                    <a:lstStyle/>
+                    <a:p>
+                      <a:pPr algn="ctr"/>
+                      <a:r>
+                        <a:rPr lang="en-US" sz="1400" dirty="0"/>
+                        <a:t>4</a:t>
+                      </a:r>
+                    </a:p>
+                  </a:txBody>
+                  <a:tcPr marL="68580" marR="68580" marT="0" marB="0" anchor="ctr"/>
+                </a:tc>
+                <a:tc>
+                  <a:txBody>
+                    <a:bodyPr/>
+                    <a:lstStyle/>
+                    <a:p>
+                      <a:pPr algn="ctr"/>
+                      <a:r>
+                        <a:rPr lang="en-US" sz="1400" dirty="0"/>
+                        <a:t>0.20</a:t>
+                      </a:r>
+                    </a:p>
+                  </a:txBody>
+                  <a:tcPr marL="68580" marR="68580" marT="0" marB="0" anchor="ctr"/>
+                </a:tc>
+              </a:tr>
+              <a:tr h="370000">
+                <a:tc>
+                  <a:txBody>
+                    <a:bodyPr/>
+                    <a:lstStyle/>
+                    <a:p>
+                      <a:pPr algn="l"/>
+                      <a:r>
+                        <a:rPr lang="en-US" sz="1400" dirty="0"/>
+                        <a:t>1</a:t>
+                      </a:r>
+                    </a:p>
+                  </a:txBody>
+                  <a:tcPr marL="68580" marR="68580" marT="0" marB="0" anchor="ctr"/>
+                </a:tc>
+                <a:tc>
+                  <a:txBody>
+                    <a:bodyPr/>
+                    <a:lstStyle/>
+                    <a:p>
+                      <a:pPr algn="ctr"/>
+                      <a:r>
+                        <a:rPr lang="en-US" sz="1400" dirty="0"/>
+                        <a:t>8</a:t>
+                      </a:r>
+                    </a:p>
+                  </a:txBody>
+                  <a:tcPr marL="68580" marR="68580" marT="0" marB="0" anchor="ctr"/>
+                </a:tc>
+                <a:tc>
+                  <a:txBody>
+                    <a:bodyPr/>
+                    <a:lstStyle/>
+                    <a:p>
+                      <a:pPr algn="ctr"/>
+                      <a:r>
+                        <a:rPr lang="en-US" sz="1400" dirty="0"/>
+                        <a:t>0.40</a:t>
+                      </a:r>
+                    </a:p>
+                  </a:txBody>
+                  <a:tcPr marL="68580" marR="68580" marT="0" marB="0" anchor="ctr"/>
+                </a:tc>
+              </a:tr>
+              <a:tr h="370000">
+                <a:tc>
+                  <a:txBody>
+                    <a:bodyPr/>
+                    <a:lstStyle/>
+                    <a:p>
+                      <a:pPr algn="l"/>
+                      <a:r>
+                        <a:rPr lang="en-US" sz="1400" dirty="0"/>
+                        <a:t>2</a:t>
+                      </a:r>
+                    </a:p>
+                  </a:txBody>
+                  <a:tcPr marL="68580" marR="68580" marT="0" marB="0" anchor="ctr"/>
+                </a:tc>
+                <a:tc>
+                  <a:txBody>
+                    <a:bodyPr/>
+                    <a:lstStyle/>
+                    <a:p>
+                      <a:pPr algn="ctr"/>
+                      <a:r>
+                        <a:rPr lang="en-US" sz="1400" dirty="0"/>
+                        <a:t>4</a:t>
+                      </a:r>
+                    </a:p>
+                  </a:txBody>
+                  <a:tcPr marL="68580" marR="68580" marT="0" marB="0" anchor="ctr"/>
+                </a:tc>
+                <a:tc>
+                  <a:txBody>
+                    <a:bodyPr/>
+                    <a:lstStyle/>
+                    <a:p>
+                      <a:pPr algn="ctr"/>
+                      <a:r>
+                        <a:rPr lang="en-US" sz="1400" dirty="0"/>
+                        <a:t>0.20</a:t>
+                      </a:r>
+                    </a:p>
+                  </a:txBody>
+                  <a:tcPr marL="68580" marR="68580" marT="0" marB="0" anchor="ctr"/>
+                </a:tc>
+              </a:tr>
+              <a:tr h="370000">
+                <a:tc>
+                  <a:txBody>
+                    <a:bodyPr/>
+                    <a:lstStyle/>
+                    <a:p>
+                      <a:pPr algn="l"/>
+                      <a:r>
+                        <a:rPr lang="en-US" sz="1400" dirty="0"/>
+                        <a:t>3</a:t>
+                      </a:r>
+                    </a:p>
+                  </a:txBody>
+                  <a:tcPr marL="68580" marR="68580" marT="0" marB="0" anchor="ctr"/>
+                </a:tc>
+                <a:tc>
+                  <a:txBody>
+                    <a:bodyPr/>
+                    <a:lstStyle/>
+                    <a:p>
+                      <a:pPr algn="ctr"/>
+                      <a:r>
+                        <a:rPr lang="en-US" sz="1400" dirty="0"/>
+                        <a:t>2</a:t>
+                      </a:r>
+                    </a:p>
+                  </a:txBody>
+                  <a:tcPr marL="68580" marR="68580" marT="0" marB="0" anchor="ctr"/>
+                </a:tc>
+                <a:tc>
+                  <a:txBody>
+                    <a:bodyPr/>
+                    <a:lstStyle/>
+                    <a:p>
+                      <a:pPr algn="ctr"/>
+                      <a:r>
+                        <a:rPr lang="en-US" sz="1400" dirty="0"/>
+                        <a:t>0.10</a:t>
+                      </a:r>
+                    </a:p>
+                  </a:txBody>
+                  <a:tcPr marL="68580" marR="68580" marT="0" marB="0" anchor="ctr"/>
+                </a:tc>
+              </a:tr>
+              <a:tr h="370000">
+                <a:tc>
+                  <a:txBody>
+                    <a:bodyPr/>
+                    <a:lstStyle/>
+                    <a:p>
+                      <a:pPr algn="l"/>
+                      <a:r>
+                        <a:rPr lang="en-US" sz="1400" dirty="0"/>
+                        <a:t>4</a:t>
+                      </a:r>
+                    </a:p>
+                  </a:txBody>
+                  <a:tcPr marL="68580" marR="68580" marT="0" marB="0" anchor="ctr"/>
+                </a:tc>
+                <a:tc>
+                  <a:txBody>
+                    <a:bodyPr/>
+                    <a:lstStyle/>
+                    <a:p>
+                      <a:pPr algn="ctr"/>
+                      <a:r>
+                        <a:rPr lang="en-US" sz="1400" dirty="0"/>
+                        <a:t>1</a:t>
+                      </a:r>
+                    </a:p>
+                  </a:txBody>
+                  <a:tcPr marL="68580" marR="68580" marT="0" marB="0" anchor="ctr"/>
+                </a:tc>
+                <a:tc>
+                  <a:txBody>
+                    <a:bodyPr/>
+                    <a:lstStyle/>
+                    <a:p>
+                      <a:pPr algn="ctr"/>
+                      <a:r>
+                        <a:rPr lang="en-US" sz="1400" dirty="0"/>
+                        <a:t>0.05</a:t>
+                      </a:r>
+                    </a:p>
+                  </a:txBody>
+                  <a:tcPr marL="68580" marR="68580" marT="0" marB="0" anchor="ctr"/>
+                </a:tc>
+              </a:tr>
+              <a:tr h="370000">
+                <a:tc>
+                  <a:txBody>
+                    <a:bodyPr/>
+                    <a:lstStyle/>
+                    <a:p>
+                      <a:pPr algn="l"/>
+                      <a:r>
+                        <a:rPr lang="en-US" sz="1400" dirty="0"/>
+                        <a:t>5</a:t>
+                      </a:r>
+                    </a:p>
+                  </a:txBody>
+                  <a:tcPr marL="68580" marR="68580" marT="0" marB="0" anchor="ctr"/>
+                </a:tc>
+                <a:tc>
+                  <a:txBody>
+                    <a:bodyPr/>
+                    <a:lstStyle/>
+                    <a:p>
+                      <a:pPr algn="ctr"/>
+                      <a:r>
+                        <a:rPr lang="en-US" sz="1400" dirty="0"/>
+                        <a:t>1</a:t>
+                      </a:r>
+                    </a:p>
+                  </a:txBody>
+                  <a:tcPr marL="68580" marR="68580" marT="0" marB="0" anchor="ctr"/>
+                </a:tc>
+                <a:tc>
+                  <a:txBody>
+                    <a:bodyPr/>
+                    <a:lstStyle/>
+                    <a:p>
+                      <a:pPr algn="ctr"/>
+                      <a:r>
+                        <a:rPr lang="en-US" sz="1400" dirty="0"/>
+                        <a:t>0.05</a:t>
+                      </a:r>
+                    </a:p>
+                  </a:txBody>
+                  <a:tcPr marL="68580" marR="68580" marT="0" marB="0" anchor="ctr"/>
+                </a:tc>
+              </a:tr>
+              <a:tr h="370000">
+                <a:tc>
+                  <a:txBody>
+                    <a:bodyPr/>
+                    <a:lstStyle/>
+                    <a:p>
+                      <a:pPr algn="l"/>
+                      <a:r>
+                        <a:rPr lang="en-US" sz="1400" dirty="0"/>
+                        <a:t>Total</a:t>
+                      </a:r>
+                    </a:p>
+                  </a:txBody>
+                  <a:tcPr marL="68580" marR="68580" marT="0" marB="0" anchor="ctr"/>
+                </a:tc>
+                <a:tc>
+                  <a:txBody>
+                    <a:bodyPr/>
+                    <a:lstStyle/>
+                    <a:p>
+                      <a:pPr algn="ctr"/>
+                      <a:r>
+                        <a:rPr lang="en-US" sz="1400" dirty="0"/>
+                        <a:t>20</a:t>
+                      </a:r>
+                    </a:p>
+                  </a:txBody>
+                  <a:tcPr marL="68580" marR="68580" marT="0" marB="0" anchor="ctr"/>
+                </a:tc>
+                <a:tc>
+                  <a:txBody>
+                    <a:bodyPr/>
+                    <a:lstStyle/>
+                    <a:p>
+                      <a:pPr algn="ctr"/>
+                      <a:r>
+                        <a:rPr lang="en-US" sz="1400" dirty="0"/>
+                        <a:t>1.00</a:t>
+                      </a:r>
+                    </a:p>
+                  </a:txBody>
+                  <a:tcPr marL="68580" marR="68580" marT="0" marB="0" anchor="ctr"/>
+                </a:tc>
+              </a:tr>
+            </a:tbl>
+          </a:graphicData>
+        </a:graphic>
+      </p:graphicFrame>
+      <p:sp>
+        <p:nvSpPr>
+          <p:cNvPr id="5" name="Takeaway"/>
+          <p:cNvSpPr txBox="1"/>
+          <p:nvPr/>
+        </p:nvSpPr>
+        <p:spPr>
+          <a:xfrm>
+            <a:off x="6400800" y="4970000"/>
+            <a:ext cx="4300000" cy="1400000"/>
+          </a:xfrm>
+          <a:prstGeom prst="rect">
+            <a:avLst/>
+          </a:prstGeom>
+          <a:noFill/>
+        </p:spPr>
+        <p:txBody>
+          <a:bodyPr wrap="square">
+            <a:normAutofit/>
+          </a:bodyPr>
+          <a:lstStyle/>
+          <a:p>
+            <a:pPr marL="0" indent="0">
+              <a:buNone/>
+            </a:pPr>
+            <a:r>
+              <a:rPr lang="en-US" sz="1500" b="1" dirty="0">
+                <a:solidFill>
+                  <a:srgbClr val="C00000"/>
+                </a:solidFill>
+              </a:rPr>
+              <a:t>Mode = 1. Median = 1 but the mean is 1.55: the mean is pulled above the median by the long right tail, so the distribution is skewed right.</a:t>
+            </a:r>
+          </a:p>
+        </p:txBody>
+      </p:sp>
+    </p:spTree>
+    <p:extLst>
+      <p:ext uri="{BB962C8B-B14F-4D97-AF65-F5344CB8AC3E}">
+        <p14:creationId xmlns:p14="http://schemas.microsoft.com/office/powerpoint/2010/main" val="1517484004"/>
+      </p:ext>
+    </p:extLst>
+  </p:cSld>
+  <p:clrMapOvr>
+    <a:masterClrMapping/>
+  </p:clrMapOvr>
+  <p:timing>
+    <p:tnLst>
+      <p:par>
+        <p:cTn id="1" dur="indefinite" restart="never" nodeType="tmRoot">
+          <p:childTnLst>
+            <p:seq concurrent="1" nextAc="seek">
+              <p:cTn id="2" dur="indefinite" nodeType="mainSeq">
+                <p:childTnLst>
+                  <p:par>
+                    <p:cTn id="3" fill="hold">
+                      <p:stCondLst>
+                        <p:cond delay="indefinite"/>
+                      </p:stCondLst>
+                      <p:childTnLst>
+                        <p:par>
+                          <p:cTn id="4" fill="hold">
+                            <p:stCondLst>
+                              <p:cond delay="0"/>
+                            </p:stCondLst>
+                            <p:childTnLst>
+                              <p:par>
+                                <p:cTn id="5" presetID="1" presetClass="entr" presetSubtype="0" fill="hold" nodeType="clickEffect">
+                                  <p:stCondLst>
+                                    <p:cond delay="0"/>
+                                  </p:stCondLst>
+                                  <p:childTnLst>
+                                    <p:set>
+                                      <p:cBhvr>
+                                        <p:cTn id="6" dur="1" fill="hold">
+                                          <p:stCondLst>
+                                            <p:cond delay="0"/>
+                                          </p:stCondLst>
+                                        </p:cTn>
+                                        <p:tgtEl>
+                                          <p:spTgt spid="4"/>
+                                        </p:tgtEl>
+                                        <p:attrNameLst>
+                                          <p:attrName>style.visibility</p:attrName>
+                                        </p:attrNameLst>
+                                      </p:cBhvr>
+                                      <p:to>
+                                        <p:strVal val="visible"/>
+                                      </p:to>
+                                    </p:set>
+                                  </p:childTnLst>
+                                </p:cTn>
+                              </p:par>
+                            </p:childTnLst>
+                          </p:cTn>
+                        </p:par>
+                      </p:childTnLst>
+                    </p:cTn>
+                  </p:par>
+                  <p:par>
+                    <p:cTn id="7" fill="hold">
+                      <p:stCondLst>
+                        <p:cond delay="indefinite"/>
+                      </p:stCondLst>
+                      <p:childTnLst>
+                        <p:par>
+                          <p:cTn id="8" fill="hold">
+                            <p:stCondLst>
+                              <p:cond delay="0"/>
+                            </p:stCondLst>
+                            <p:childTnLst>
+                              <p:par>
+                                <p:cTn id="9" presetID="1" presetClass="entr" presetSubtype="0" fill="hold" nodeType="clickEffect">
+                                  <p:stCondLst>
+                                    <p:cond delay="0"/>
+                                  </p:stCondLst>
+                                  <p:childTnLst>
+                                    <p:set>
+                                      <p:cBhvr>
+                                        <p:cTn id="10" dur="1" fill="hold">
+                                          <p:stCondLst>
+                                            <p:cond delay="0"/>
+                                          </p:stCondLst>
+                                        </p:cTn>
+                                        <p:tgtEl>
+                                          <p:spTgt spid="5"/>
+                                        </p:tgtEl>
+                                        <p:attrNameLst>
+                                          <p:attrName>style.visibility</p:attrName>
+                                        </p:attrNameLst>
+                                      </p:cBhvr>
+                                      <p:to>
+                                        <p:strVal val="visible"/>
+                                      </p:to>
+                                    </p:set>
+                                  </p:childTnLst>
+                                </p:cTn>
+                              </p:par>
+                            </p:childTnLst>
+                          </p:cTn>
+                        </p:par>
+                      </p:childTnLst>
+                    </p:cTn>
+                  </p:par>
+                </p:childTnLst>
+              </p:cTn>
+              <p:prevCondLst>
+                <p:cond evt="onPrev" delay="0">
+                  <p:tgtEl>
+                    <p:sldTgt/>
+                  </p:tgtEl>
+                </p:cond>
+              </p:prevCondLst>
+              <p:nextCondLst>
+                <p:cond evt="onNext" delay="0">
+                  <p:tgtEl>
+                    <p:sldTgt/>
+                  </p:tgtEl>
+                </p:cond>
+              </p:nextCondLst>
+            </p:seq>
+          </p:childTnLst>
+        </p:cTn>
+      </p:par>
+    </p:tnLst>
+  </p:timing>
+</p:sld>
+</file>
+
+<file path=ppt/slides/slide27.xml><?xml version="1.0" encoding="utf-8"?>
+<p:sld xmlns:a="http://schemas.openxmlformats.org/drawingml/2006/main" xmlns:r="http://schemas.openxmlformats.org/officeDocument/2006/relationships" xmlns:p="http://schemas.openxmlformats.org/presentationml/2006/main">
+  <p:cSld>
+    <p:spTree>
+      <p:nvGrpSpPr>
+        <p:cNvPr id="1" name=""/>
+        <p:cNvGrpSpPr/>
+        <p:nvPr/>
+      </p:nvGrpSpPr>
+      <p:grpSpPr>
+        <a:xfrm>
+          <a:off x="0" y="0"/>
+          <a:ext cx="0" cy="0"/>
+          <a:chOff x="0" y="0"/>
+          <a:chExt cx="0" cy="0"/>
+        </a:xfrm>
+      </p:grpSpPr>
+      <p:sp>
+        <p:nvSpPr>
+          <p:cNvPr id="2" name="Title 1"/>
+          <p:cNvSpPr>
+            <a:spLocks noGrp="1"/>
+          </p:cNvSpPr>
+          <p:nvPr>
+            <p:ph type="title"/>
+          </p:nvPr>
+        </p:nvSpPr>
+        <p:spPr/>
+        <p:txBody>
+          <a:bodyPr>
+            <a:normAutofit/>
+          </a:bodyPr>
+          <a:lstStyle/>
+          <a:p>
+            <a:r>
+              <a:rPr lang="en-US" dirty="0"/>
+              <a:t>Try it out: Binning a Continuous Variable</a:t>
+            </a:r>
+          </a:p>
+        </p:txBody>
+      </p:sp>
+      <p:sp>
+        <p:nvSpPr>
+          <p:cNvPr id="3" name="Prompt"/>
+          <p:cNvSpPr txBox="1"/>
+          <p:nvPr/>
+        </p:nvSpPr>
+        <p:spPr>
+          <a:xfrm>
+            <a:off x="838200" y="1600200"/>
+            <a:ext cx="5250000" cy="4700000"/>
+          </a:xfrm>
+          <a:prstGeom prst="rect">
+            <a:avLst/>
+          </a:prstGeom>
+          <a:noFill/>
+        </p:spPr>
+        <p:txBody>
+          <a:bodyPr wrap="square">
+            <a:normAutofit/>
+          </a:bodyPr>
+          <a:lstStyle/>
+          <a:p>
+            <a:pPr marL="0" indent="0">
+              <a:buNone/>
+            </a:pPr>
+            <a:r>
+              <a:rPr lang="en-US" sz="1600" dirty="0"/>
+              <a:t>Fifteen observations of a continuous variable X:</a:t>
+            </a:r>
+          </a:p>
+          <a:p>
+            <a:pPr marL="0" indent="0">
+              <a:spcBef>
+                <a:spcPts val="300"/>
+              </a:spcBef>
+              <a:buNone/>
+            </a:pPr>
+            <a:r>
+              <a:rPr lang="en-US" sz="1500" dirty="0">
+                <a:latin typeface="Consolas" panose="020B0609020204030204"/>
+              </a:rPr>
+              <a:t>1.23  1.38  1.76  2.60  2.65</a:t>
+            </a:r>
+          </a:p>
+          <a:p>
+            <a:pPr marL="0" indent="0">
+              <a:buNone/>
+            </a:pPr>
+            <a:r>
+              <a:rPr lang="en-US" sz="1500" dirty="0">
+                <a:latin typeface="Consolas" panose="020B0609020204030204"/>
+              </a:rPr>
+              <a:t>2.79  2.89  3.12  3.15  3.18</a:t>
+            </a:r>
+          </a:p>
+          <a:p>
+            <a:pPr marL="0" indent="0">
+              <a:buNone/>
+            </a:pPr>
+            <a:r>
+              <a:rPr lang="en-US" sz="1500" dirty="0">
+                <a:latin typeface="Consolas" panose="020B0609020204030204"/>
+              </a:rPr>
+              <a:t>3.65  3.77  3.87  4.12  4.41</a:t>
+            </a:r>
+          </a:p>
+          <a:p>
+            <a:pPr marL="0" indent="0">
+              <a:spcBef>
+                <a:spcPts val="700"/>
+              </a:spcBef>
+              <a:buNone/>
+            </a:pPr>
+            <a:r>
+              <a:rPr lang="en-US" sz="1600" b="1" dirty="0"/>
+              <a:t>No two values are alike, so listing them gives 15 values of frequency 1 and tells us nothing. Group them into bins of width 0.5 starting at 1.0.</a:t>
+            </a:r>
+          </a:p>
+        </p:txBody>
+      </p:sp>
+      <p:graphicFrame>
+        <p:nvGraphicFramePr>
+          <p:cNvPr id="4" name="Answer table"/>
+          <p:cNvGraphicFramePr>
+            <a:graphicFrameLocks noGrp="1"/>
+          </p:cNvGraphicFramePr>
+          <p:nvPr/>
+        </p:nvGraphicFramePr>
+        <p:xfrm>
+          <a:off x="6400800" y="1700000"/>
+          <a:ext cx="4300000" cy="3060000"/>
+        </p:xfrm>
+        <a:graphic>
+          <a:graphicData uri="http://schemas.openxmlformats.org/drawingml/2006/table">
+            <a:tbl>
+              <a:tblPr firstRow="1" bandRow="1">
+                <a:tableStyleId>{5C22544A-7EE6-4342-B048-85BDC9FD1C3A}</a:tableStyleId>
+              </a:tblPr>
+              <a:tblGrid>
+                <a:gridCol w="1900000"/>
+                <a:gridCol w="1000000"/>
+                <a:gridCol w="1400000"/>
+              </a:tblGrid>
+              <a:tr h="340000">
+                <a:tc>
+                  <a:txBody>
+                    <a:bodyPr/>
+                    <a:lstStyle/>
+                    <a:p>
+                      <a:pPr algn="l"/>
+                      <a:r>
+                        <a:rPr lang="en-US" sz="1400" dirty="0"/>
+                        <a:t>Bin</a:t>
+                      </a:r>
+                    </a:p>
+                  </a:txBody>
+                  <a:tcPr marL="68580" marR="68580" marT="0" marB="0" anchor="ctr"/>
+                </a:tc>
+                <a:tc>
+                  <a:txBody>
+                    <a:bodyPr/>
+                    <a:lstStyle/>
+                    <a:p>
+                      <a:pPr algn="ctr"/>
+                      <a:r>
+                        <a:rPr lang="en-US" sz="1400" dirty="0"/>
+                        <a:t>f</a:t>
+                      </a:r>
+                    </a:p>
+                  </a:txBody>
+                  <a:tcPr marL="68580" marR="68580" marT="0" marB="0" anchor="ctr"/>
+                </a:tc>
+                <a:tc>
+                  <a:txBody>
+                    <a:bodyPr/>
+                    <a:lstStyle/>
+                    <a:p>
+                      <a:pPr algn="ctr"/>
+                      <a:r>
+                        <a:rPr lang="en-US" sz="1400" dirty="0"/>
+                        <a:t>Rel. freq.</a:t>
+                      </a:r>
+                    </a:p>
+                  </a:txBody>
+                  <a:tcPr marL="68580" marR="68580" marT="0" marB="0" anchor="ctr"/>
+                </a:tc>
+              </a:tr>
+              <a:tr h="340000">
+                <a:tc>
+                  <a:txBody>
+                    <a:bodyPr/>
+                    <a:lstStyle/>
+                    <a:p>
+                      <a:pPr algn="l"/>
+                      <a:r>
+                        <a:rPr lang="en-US" sz="1400" dirty="0"/>
+                        <a:t>1.0 &lt; X ≤ 1.5</a:t>
+                      </a:r>
+                    </a:p>
+                  </a:txBody>
+                  <a:tcPr marL="68580" marR="68580" marT="0" marB="0" anchor="ctr"/>
+                </a:tc>
+                <a:tc>
+                  <a:txBody>
+                    <a:bodyPr/>
+                    <a:lstStyle/>
+                    <a:p>
+                      <a:pPr algn="ctr"/>
+                      <a:r>
+                        <a:rPr lang="en-US" sz="1400" dirty="0"/>
+                        <a:t>2</a:t>
+                      </a:r>
+                    </a:p>
+                  </a:txBody>
+                  <a:tcPr marL="68580" marR="68580" marT="0" marB="0" anchor="ctr"/>
+                </a:tc>
+                <a:tc>
+                  <a:txBody>
+                    <a:bodyPr/>
+                    <a:lstStyle/>
+                    <a:p>
+                      <a:pPr algn="ctr"/>
+                      <a:r>
+                        <a:rPr lang="en-US" sz="1400" dirty="0"/>
+                        <a:t>0.13</a:t>
+                      </a:r>
+                    </a:p>
+                  </a:txBody>
+                  <a:tcPr marL="68580" marR="68580" marT="0" marB="0" anchor="ctr"/>
+                </a:tc>
+              </a:tr>
+              <a:tr h="340000">
+                <a:tc>
+                  <a:txBody>
+                    <a:bodyPr/>
+                    <a:lstStyle/>
+                    <a:p>
+                      <a:pPr algn="l"/>
+                      <a:r>
+                        <a:rPr lang="en-US" sz="1400" dirty="0"/>
+                        <a:t>1.5 &lt; X ≤ 2.0</a:t>
+                      </a:r>
+                    </a:p>
+                  </a:txBody>
+                  <a:tcPr marL="68580" marR="68580" marT="0" marB="0" anchor="ctr"/>
+                </a:tc>
+                <a:tc>
+                  <a:txBody>
+                    <a:bodyPr/>
+                    <a:lstStyle/>
+                    <a:p>
+                      <a:pPr algn="ctr"/>
+                      <a:r>
+                        <a:rPr lang="en-US" sz="1400" dirty="0"/>
+                        <a:t>1</a:t>
+                      </a:r>
+                    </a:p>
+                  </a:txBody>
+                  <a:tcPr marL="68580" marR="68580" marT="0" marB="0" anchor="ctr"/>
+                </a:tc>
+                <a:tc>
+                  <a:txBody>
+                    <a:bodyPr/>
+                    <a:lstStyle/>
+                    <a:p>
+                      <a:pPr algn="ctr"/>
+                      <a:r>
+                        <a:rPr lang="en-US" sz="1400" dirty="0"/>
+                        <a:t>0.07</a:t>
+                      </a:r>
+                    </a:p>
+                  </a:txBody>
+                  <a:tcPr marL="68580" marR="68580" marT="0" marB="0" anchor="ctr"/>
+                </a:tc>
+              </a:tr>
+              <a:tr h="340000">
+                <a:tc>
+                  <a:txBody>
+                    <a:bodyPr/>
+                    <a:lstStyle/>
+                    <a:p>
+                      <a:pPr algn="l"/>
+                      <a:r>
+                        <a:rPr lang="en-US" sz="1400" dirty="0"/>
+                        <a:t>2.0 &lt; X ≤ 2.5</a:t>
+                      </a:r>
+                    </a:p>
+                  </a:txBody>
+                  <a:tcPr marL="68580" marR="68580" marT="0" marB="0" anchor="ctr"/>
+                </a:tc>
+                <a:tc>
+                  <a:txBody>
+                    <a:bodyPr/>
+                    <a:lstStyle/>
+                    <a:p>
+                      <a:pPr algn="ctr"/>
+                      <a:r>
+                        <a:rPr lang="en-US" sz="1400" dirty="0"/>
+                        <a:t>0</a:t>
+                      </a:r>
+                    </a:p>
+                  </a:txBody>
+                  <a:tcPr marL="68580" marR="68580" marT="0" marB="0" anchor="ctr"/>
+                </a:tc>
+                <a:tc>
+                  <a:txBody>
+                    <a:bodyPr/>
+                    <a:lstStyle/>
+                    <a:p>
+                      <a:pPr algn="ctr"/>
+                      <a:r>
+                        <a:rPr lang="en-US" sz="1400" dirty="0"/>
+                        <a:t>0.00</a:t>
+                      </a:r>
+                    </a:p>
+                  </a:txBody>
+                  <a:tcPr marL="68580" marR="68580" marT="0" marB="0" anchor="ctr"/>
+                </a:tc>
+              </a:tr>
+              <a:tr h="340000">
+                <a:tc>
+                  <a:txBody>
+                    <a:bodyPr/>
+                    <a:lstStyle/>
+                    <a:p>
+                      <a:pPr algn="l"/>
+                      <a:r>
+                        <a:rPr lang="en-US" sz="1400" dirty="0"/>
+                        <a:t>2.5 &lt; X ≤ 3.0</a:t>
+                      </a:r>
+                    </a:p>
+                  </a:txBody>
+                  <a:tcPr marL="68580" marR="68580" marT="0" marB="0" anchor="ctr"/>
+                </a:tc>
+                <a:tc>
+                  <a:txBody>
+                    <a:bodyPr/>
+                    <a:lstStyle/>
+                    <a:p>
+                      <a:pPr algn="ctr"/>
+                      <a:r>
+                        <a:rPr lang="en-US" sz="1400" dirty="0"/>
+                        <a:t>4</a:t>
+                      </a:r>
+                    </a:p>
+                  </a:txBody>
+                  <a:tcPr marL="68580" marR="68580" marT="0" marB="0" anchor="ctr"/>
+                </a:tc>
+                <a:tc>
+                  <a:txBody>
+                    <a:bodyPr/>
+                    <a:lstStyle/>
+                    <a:p>
+                      <a:pPr algn="ctr"/>
+                      <a:r>
+                        <a:rPr lang="en-US" sz="1400" dirty="0"/>
+                        <a:t>0.27</a:t>
+                      </a:r>
+                    </a:p>
+                  </a:txBody>
+                  <a:tcPr marL="68580" marR="68580" marT="0" marB="0" anchor="ctr"/>
+                </a:tc>
+              </a:tr>
+              <a:tr h="340000">
+                <a:tc>
+                  <a:txBody>
+                    <a:bodyPr/>
+                    <a:lstStyle/>
+                    <a:p>
+                      <a:pPr algn="l"/>
+                      <a:r>
+                        <a:rPr lang="en-US" sz="1400" dirty="0"/>
+                        <a:t>3.0 &lt; X ≤ 3.5</a:t>
+                      </a:r>
+                    </a:p>
+                  </a:txBody>
+                  <a:tcPr marL="68580" marR="68580" marT="0" marB="0" anchor="ctr"/>
+                </a:tc>
+                <a:tc>
+                  <a:txBody>
+                    <a:bodyPr/>
+                    <a:lstStyle/>
+                    <a:p>
+                      <a:pPr algn="ctr"/>
+                      <a:r>
+                        <a:rPr lang="en-US" sz="1400" dirty="0"/>
+                        <a:t>3</a:t>
+                      </a:r>
+                    </a:p>
+                  </a:txBody>
+                  <a:tcPr marL="68580" marR="68580" marT="0" marB="0" anchor="ctr"/>
+                </a:tc>
+                <a:tc>
+                  <a:txBody>
+                    <a:bodyPr/>
+                    <a:lstStyle/>
+                    <a:p>
+                      <a:pPr algn="ctr"/>
+                      <a:r>
+                        <a:rPr lang="en-US" sz="1400" dirty="0"/>
+                        <a:t>0.20</a:t>
+                      </a:r>
+                    </a:p>
+                  </a:txBody>
+                  <a:tcPr marL="68580" marR="68580" marT="0" marB="0" anchor="ctr"/>
+                </a:tc>
+              </a:tr>
+              <a:tr h="340000">
+                <a:tc>
+                  <a:txBody>
+                    <a:bodyPr/>
+                    <a:lstStyle/>
+                    <a:p>
+                      <a:pPr algn="l"/>
+                      <a:r>
+                        <a:rPr lang="en-US" sz="1400" dirty="0"/>
+                        <a:t>3.5 &lt; X ≤ 4.0</a:t>
+                      </a:r>
+                    </a:p>
+                  </a:txBody>
+                  <a:tcPr marL="68580" marR="68580" marT="0" marB="0" anchor="ctr"/>
+                </a:tc>
+                <a:tc>
+                  <a:txBody>
+                    <a:bodyPr/>
+                    <a:lstStyle/>
+                    <a:p>
+                      <a:pPr algn="ctr"/>
+                      <a:r>
+                        <a:rPr lang="en-US" sz="1400" dirty="0"/>
+                        <a:t>3</a:t>
+                      </a:r>
+                    </a:p>
+                  </a:txBody>
+                  <a:tcPr marL="68580" marR="68580" marT="0" marB="0" anchor="ctr"/>
+                </a:tc>
+                <a:tc>
+                  <a:txBody>
+                    <a:bodyPr/>
+                    <a:lstStyle/>
+                    <a:p>
+                      <a:pPr algn="ctr"/>
+                      <a:r>
+                        <a:rPr lang="en-US" sz="1400" dirty="0"/>
+                        <a:t>0.20</a:t>
+                      </a:r>
+                    </a:p>
+                  </a:txBody>
+                  <a:tcPr marL="68580" marR="68580" marT="0" marB="0" anchor="ctr"/>
+                </a:tc>
+              </a:tr>
+              <a:tr h="340000">
+                <a:tc>
+                  <a:txBody>
+                    <a:bodyPr/>
+                    <a:lstStyle/>
+                    <a:p>
+                      <a:pPr algn="l"/>
+                      <a:r>
+                        <a:rPr lang="en-US" sz="1400" dirty="0"/>
+                        <a:t>4.0 &lt; X ≤ 4.5</a:t>
+                      </a:r>
+                    </a:p>
+                  </a:txBody>
+                  <a:tcPr marL="68580" marR="68580" marT="0" marB="0" anchor="ctr"/>
+                </a:tc>
+                <a:tc>
+                  <a:txBody>
+                    <a:bodyPr/>
+                    <a:lstStyle/>
+                    <a:p>
+                      <a:pPr algn="ctr"/>
+                      <a:r>
+                        <a:rPr lang="en-US" sz="1400" dirty="0"/>
+                        <a:t>2</a:t>
+                      </a:r>
+                    </a:p>
+                  </a:txBody>
+                  <a:tcPr marL="68580" marR="68580" marT="0" marB="0" anchor="ctr"/>
+                </a:tc>
+                <a:tc>
+                  <a:txBody>
+                    <a:bodyPr/>
+                    <a:lstStyle/>
+                    <a:p>
+                      <a:pPr algn="ctr"/>
+                      <a:r>
+                        <a:rPr lang="en-US" sz="1400" dirty="0"/>
+                        <a:t>0.13</a:t>
+                      </a:r>
+                    </a:p>
+                  </a:txBody>
+                  <a:tcPr marL="68580" marR="68580" marT="0" marB="0" anchor="ctr"/>
+                </a:tc>
+              </a:tr>
+              <a:tr h="340000">
+                <a:tc>
+                  <a:txBody>
+                    <a:bodyPr/>
+                    <a:lstStyle/>
+                    <a:p>
+                      <a:pPr algn="l"/>
+                      <a:r>
+                        <a:rPr lang="en-US" sz="1400" dirty="0"/>
+                        <a:t>Total</a:t>
+                      </a:r>
+                    </a:p>
+                  </a:txBody>
+                  <a:tcPr marL="68580" marR="68580" marT="0" marB="0" anchor="ctr"/>
+                </a:tc>
+                <a:tc>
+                  <a:txBody>
+                    <a:bodyPr/>
+                    <a:lstStyle/>
+                    <a:p>
+                      <a:pPr algn="ctr"/>
+                      <a:r>
+                        <a:rPr lang="en-US" sz="1400" dirty="0"/>
+                        <a:t>15</a:t>
+                      </a:r>
+                    </a:p>
+                  </a:txBody>
+                  <a:tcPr marL="68580" marR="68580" marT="0" marB="0" anchor="ctr"/>
+                </a:tc>
+                <a:tc>
+                  <a:txBody>
+                    <a:bodyPr/>
+                    <a:lstStyle/>
+                    <a:p>
+                      <a:pPr algn="ctr"/>
+                      <a:r>
+                        <a:rPr lang="en-US" sz="1400" dirty="0"/>
+                        <a:t>1.00</a:t>
+                      </a:r>
+                    </a:p>
+                  </a:txBody>
+                  <a:tcPr marL="68580" marR="68580" marT="0" marB="0" anchor="ctr"/>
+                </a:tc>
+              </a:tr>
+            </a:tbl>
+          </a:graphicData>
+        </a:graphic>
+      </p:graphicFrame>
+      <p:sp>
+        <p:nvSpPr>
+          <p:cNvPr id="5" name="Takeaway"/>
+          <p:cNvSpPr txBox="1"/>
+          <p:nvPr/>
+        </p:nvSpPr>
+        <p:spPr>
+          <a:xfrm>
+            <a:off x="6400800" y="5020000"/>
+            <a:ext cx="4300000" cy="1400000"/>
+          </a:xfrm>
+          <a:prstGeom prst="rect">
+            <a:avLst/>
+          </a:prstGeom>
+          <a:noFill/>
+        </p:spPr>
+        <p:txBody>
+          <a:bodyPr wrap="square">
+            <a:normAutofit/>
+          </a:bodyPr>
+          <a:lstStyle/>
+          <a:p>
+            <a:pPr marL="0" indent="0">
+              <a:buNone/>
+            </a:pPr>
+            <a:r>
+              <a:rPr lang="en-US" sz="1500" b="1" dirty="0">
+                <a:solidFill>
+                  <a:srgbClr val="C00000"/>
+                </a:solidFill>
+              </a:rPr>
+              <a:t>The empty bin is information: the values fall into two clusters. Next, the same procedure on real data – 272 Old Faithful eruptions.</a:t>
+            </a:r>
+          </a:p>
+        </p:txBody>
+      </p:sp>
+    </p:spTree>
+    <p:extLst>
+      <p:ext uri="{BB962C8B-B14F-4D97-AF65-F5344CB8AC3E}">
+        <p14:creationId xmlns:p14="http://schemas.microsoft.com/office/powerpoint/2010/main" val="1517484005"/>
+      </p:ext>
+    </p:extLst>
+  </p:cSld>
+  <p:clrMapOvr>
+    <a:masterClrMapping/>
+  </p:clrMapOvr>
+  <p:timing>
+    <p:tnLst>
+      <p:par>
+        <p:cTn id="1" dur="indefinite" restart="never" nodeType="tmRoot">
+          <p:childTnLst>
+            <p:seq concurrent="1" nextAc="seek">
+              <p:cTn id="2" dur="indefinite" nodeType="mainSeq">
+                <p:childTnLst>
+                  <p:par>
+                    <p:cTn id="3" fill="hold">
+                      <p:stCondLst>
+                        <p:cond delay="indefinite"/>
+                      </p:stCondLst>
+                      <p:childTnLst>
+                        <p:par>
+                          <p:cTn id="4" fill="hold">
+                            <p:stCondLst>
+                              <p:cond delay="0"/>
+                            </p:stCondLst>
+                            <p:childTnLst>
+                              <p:par>
+                                <p:cTn id="5" presetID="1" presetClass="entr" presetSubtype="0" fill="hold" nodeType="clickEffect">
+                                  <p:stCondLst>
+                                    <p:cond delay="0"/>
+                                  </p:stCondLst>
+                                  <p:childTnLst>
+                                    <p:set>
+                                      <p:cBhvr>
+                                        <p:cTn id="6" dur="1" fill="hold">
+                                          <p:stCondLst>
+                                            <p:cond delay="0"/>
+                                          </p:stCondLst>
+                                        </p:cTn>
+                                        <p:tgtEl>
+                                          <p:spTgt spid="4"/>
+                                        </p:tgtEl>
+                                        <p:attrNameLst>
+                                          <p:attrName>style.visibility</p:attrName>
+                                        </p:attrNameLst>
+                                      </p:cBhvr>
+                                      <p:to>
+                                        <p:strVal val="visible"/>
+                                      </p:to>
+                                    </p:set>
+                                  </p:childTnLst>
+                                </p:cTn>
+                              </p:par>
+                            </p:childTnLst>
+                          </p:cTn>
+                        </p:par>
+                      </p:childTnLst>
+                    </p:cTn>
+                  </p:par>
+                  <p:par>
+                    <p:cTn id="7" fill="hold">
+                      <p:stCondLst>
+                        <p:cond delay="indefinite"/>
+                      </p:stCondLst>
+                      <p:childTnLst>
+                        <p:par>
+                          <p:cTn id="8" fill="hold">
+                            <p:stCondLst>
+                              <p:cond delay="0"/>
+                            </p:stCondLst>
+                            <p:childTnLst>
+                              <p:par>
+                                <p:cTn id="9" presetID="1" presetClass="entr" presetSubtype="0" fill="hold" nodeType="clickEffect">
+                                  <p:stCondLst>
+                                    <p:cond delay="0"/>
+                                  </p:stCondLst>
+                                  <p:childTnLst>
+                                    <p:set>
+                                      <p:cBhvr>
+                                        <p:cTn id="10" dur="1" fill="hold">
+                                          <p:stCondLst>
+                                            <p:cond delay="0"/>
+                                          </p:stCondLst>
+                                        </p:cTn>
+                                        <p:tgtEl>
+                                          <p:spTgt spid="5"/>
+                                        </p:tgtEl>
+                                        <p:attrNameLst>
+                                          <p:attrName>style.visibility</p:attrName>
+                                        </p:attrNameLst>
+                                      </p:cBhvr>
+                                      <p:to>
+                                        <p:strVal val="visible"/>
+                                      </p:to>
+                                    </p:set>
+                                  </p:childTnLst>
+                                </p:cTn>
+                              </p:par>
+                            </p:childTnLst>
+                          </p:cTn>
+                        </p:par>
+                      </p:childTnLst>
+                    </p:cTn>
+                  </p:par>
+                </p:childTnLst>
+              </p:cTn>
+              <p:prevCondLst>
+                <p:cond evt="onPrev" delay="0">
+                  <p:tgtEl>
+                    <p:sldTgt/>
+                  </p:tgtEl>
+                </p:cond>
+              </p:prevCondLst>
+              <p:nextCondLst>
+                <p:cond evt="onNext" delay="0">
+                  <p:tgtEl>
+                    <p:sldTgt/>
+                  </p:tgtEl>
+                </p:cond>
+              </p:nextCondLst>
+            </p:seq>
+          </p:childTnLst>
+        </p:cTn>
+      </p:par>
+    </p:tnLst>
+  </p:timing>
+</p:sld>
+</file>
+
+<file path=ppt/slides/slide3.xml><?xml version="1.0" encoding="utf-8"?>
+<p:sld xmlns:a="http://schemas.openxmlformats.org/drawingml/2006/main" xmlns:r="http://schemas.openxmlformats.org/officeDocument/2006/relationships" xmlns:p="http://schemas.openxmlformats.org/presentationml/2006/main">
+  <p:cSld>
+    <p:spTree>
+      <p:nvGrpSpPr>
+        <p:cNvPr id="1" name=""/>
+        <p:cNvGrpSpPr/>
+        <p:nvPr/>
+      </p:nvGrpSpPr>
+      <p:grpSpPr>
+        <a:xfrm>
+          <a:off x="0" y="0"/>
+          <a:ext cx="0" cy="0"/>
+          <a:chOff x="0" y="0"/>
+          <a:chExt cx="0" cy="0"/>
+        </a:xfrm>
+      </p:grpSpPr>
+      <p:sp>
+        <p:nvSpPr>
+          <p:cNvPr id="2" name="Title 1"/>
+          <p:cNvSpPr>
+            <a:spLocks noGrp="1"/>
+          </p:cNvSpPr>
+          <p:nvPr>
+            <p:ph type="title"/>
+          </p:nvPr>
+        </p:nvSpPr>
+        <p:spPr/>
+        <p:txBody>
+          <a:bodyPr>
+            <a:normAutofit/>
+          </a:bodyPr>
+          <a:lstStyle/>
+          <a:p>
+            <a:r>
+              <a:rPr lang="en-US" dirty="0"/>
+              <a:t>Review</a:t>
+            </a:r>
+          </a:p>
+        </p:txBody>
+      </p:sp>
+      <p:sp>
+        <p:nvSpPr>
+          <p:cNvPr id="3" name="Content Placeholder 2"/>
+          <p:cNvSpPr>
+            <a:spLocks noGrp="1"/>
+          </p:cNvSpPr>
+          <p:nvPr>
+            <p:ph idx="1"/>
+          </p:nvPr>
+        </p:nvSpPr>
+        <p:spPr>
+          <a:xfrm>
+            <a:off x="838200" y="1600200"/>
+            <a:ext cx="10515600" cy="4800000"/>
+          </a:xfrm>
+        </p:spPr>
+        <p:txBody>
+          <a:bodyPr wrap="square">
+            <a:normAutofit/>
+          </a:bodyPr>
+          <a:lstStyle/>
+          <a:p>
+            <a:pPr marL="0" indent="0">
+              <a:buNone/>
+            </a:pPr>
+            <a:r>
+              <a:rPr lang="en-US" sz="2000" dirty="0"/>
+              <a:t>What are the three arms of statistics?</a:t>
+            </a:r>
+          </a:p>
+          <a:p>
+            <a:pPr marL="0" indent="0">
+              <a:spcBef>
+                <a:spcPts val="200"/>
+              </a:spcBef>
+              <a:buNone/>
+            </a:pPr>
+            <a:r>
+              <a:rPr lang="en-US" sz="1800" dirty="0">
+                <a:solidFill>
+                  <a:srgbClr val="FF0000"/>
+                </a:solidFill>
+              </a:rPr>
+              <a:t>Design, description and inference.</a:t>
+            </a:r>
+          </a:p>
+          <a:p>
+            <a:pPr marL="0" indent="0">
+              <a:spcBef>
+                <a:spcPts val="1000"/>
+              </a:spcBef>
+              <a:buNone/>
+            </a:pPr>
+            <a:r>
+              <a:rPr lang="en-US" sz="2000" dirty="0"/>
+              <a:t>Which one comes first, and why?</a:t>
+            </a:r>
+          </a:p>
+          <a:p>
+            <a:pPr marL="0" indent="0">
+              <a:spcBef>
+                <a:spcPts val="200"/>
+              </a:spcBef>
+              <a:buNone/>
+            </a:pPr>
+            <a:r>
+              <a:rPr lang="en-US" sz="1800" dirty="0">
+                <a:solidFill>
+                  <a:srgbClr val="FF0000"/>
+                </a:solidFill>
+              </a:rPr>
+              <a:t>Design – how we plan to collect the data, settled before any data exists. No amount of description or inference repairs a bad design.</a:t>
+            </a:r>
+          </a:p>
+          <a:p>
+            <a:pPr marL="0" indent="0">
+              <a:spcBef>
+                <a:spcPts val="1000"/>
+              </a:spcBef>
+              <a:buNone/>
+            </a:pPr>
+            <a:r>
+              <a:rPr lang="en-US" sz="2000" dirty="0"/>
+              <a:t>What is an estimate?</a:t>
+            </a:r>
+          </a:p>
+          <a:p>
+            <a:pPr marL="0" indent="0">
+              <a:spcBef>
+                <a:spcPts val="200"/>
+              </a:spcBef>
+              <a:buNone/>
+            </a:pPr>
+            <a:r>
+              <a:rPr lang="en-US" sz="1800" dirty="0">
+                <a:solidFill>
+                  <a:srgbClr val="FF0000"/>
+                </a:solidFill>
+              </a:rPr>
+              <a:t>A statistic computed from a sample, used to approximate an unknown population parameter – together with a statement of how far off it is likely to be.</a:t>
+            </a:r>
+          </a:p>
+        </p:txBody>
+      </p:sp>
+    </p:spTree>
+    <p:extLst>
+      <p:ext uri="{BB962C8B-B14F-4D97-AF65-F5344CB8AC3E}">
+        <p14:creationId xmlns:p14="http://schemas.microsoft.com/office/powerpoint/2010/main" val="1517484002"/>
+      </p:ext>
+    </p:extLst>
+  </p:cSld>
+  <p:clrMapOvr>
+    <a:masterClrMapping/>
+  </p:clrMapOvr>
+  <p:timing>
+    <p:tnLst>
+      <p:par>
+        <p:cTn id="1" dur="indefinite" restart="never" nodeType="tmRoot">
+          <p:childTnLst>
+            <p:seq concurrent="1" nextAc="seek">
+              <p:cTn id="2" dur="indefinite" nodeType="mainSeq">
+                <p:childTnLst>
+                  <p:par>
+                    <p:cTn id="3" fill="hold">
+                      <p:stCondLst>
+                        <p:cond delay="indefinite"/>
+                      </p:stCondLst>
+                      <p:childTnLst>
+                        <p:par>
+                          <p:cTn id="4" fill="hold">
+                            <p:stCondLst>
+                              <p:cond delay="0"/>
+                            </p:stCondLst>
+                            <p:childTnLst>
+                              <p:par>
+                                <p:cTn id="5" presetID="1" presetClass="entr" presetSubtype="0" fill="hold" nodeType="clickEffect">
+                                  <p:stCondLst>
+                                    <p:cond delay="0"/>
+                                  </p:stCondLst>
+                                  <p:childTnLst>
+                                    <p:set>
+                                      <p:cBhvr>
+                                        <p:cTn id="6" dur="1" fill="hold">
+                                          <p:stCondLst>
+                                            <p:cond delay="0"/>
+                                          </p:stCondLst>
+                                        </p:cTn>
+                                        <p:tgtEl>
+                                          <p:spTgt spid="3">
+                                            <p:txEl>
+                                              <p:pRg st="0" end="0"/>
+                                            </p:txEl>
+                                          </p:spTgt>
+                                        </p:tgtEl>
+                                        <p:attrNameLst>
+                                          <p:attrName>style.visibility</p:attrName>
+                                        </p:attrNameLst>
+                                      </p:cBhvr>
+                                      <p:to>
+                                        <p:strVal val="visible"/>
+                                      </p:to>
+                                    </p:set>
+                                  </p:childTnLst>
+                                </p:cTn>
+                              </p:par>
+                            </p:childTnLst>
+                          </p:cTn>
+                        </p:par>
+                      </p:childTnLst>
+                    </p:cTn>
+                  </p:par>
+                  <p:par>
+                    <p:cTn id="7" fill="hold">
+                      <p:stCondLst>
+                        <p:cond delay="indefinite"/>
+                      </p:stCondLst>
+                      <p:childTnLst>
+                        <p:par>
+                          <p:cTn id="8" fill="hold">
+                            <p:stCondLst>
+                              <p:cond delay="0"/>
+                            </p:stCondLst>
+                            <p:childTnLst>
+                              <p:par>
+                                <p:cTn id="9" presetID="1" presetClass="entr" presetSubtype="0" fill="hold" nodeType="clickEffect">
+                                  <p:stCondLst>
+                                    <p:cond delay="0"/>
+                                  </p:stCondLst>
+                                  <p:childTnLst>
+                                    <p:set>
+                                      <p:cBhvr>
+                                        <p:cTn id="10" dur="1" fill="hold">
+                                          <p:stCondLst>
+                                            <p:cond delay="0"/>
+                                          </p:stCondLst>
+                                        </p:cTn>
+                                        <p:tgtEl>
+                                          <p:spTgt spid="3">
+                                            <p:txEl>
+                                              <p:pRg st="1" end="1"/>
+                                            </p:txEl>
+                                          </p:spTgt>
+                                        </p:tgtEl>
+                                        <p:attrNameLst>
+                                          <p:attrName>style.visibility</p:attrName>
+                                        </p:attrNameLst>
+                                      </p:cBhvr>
+                                      <p:to>
+                                        <p:strVal val="visible"/>
+                                      </p:to>
+                                    </p:set>
+                                  </p:childTnLst>
+                                </p:cTn>
+                              </p:par>
+                            </p:childTnLst>
+                          </p:cTn>
+                        </p:par>
+                      </p:childTnLst>
+                    </p:cTn>
+                  </p:par>
+                  <p:par>
+                    <p:cTn id="11" fill="hold">
+                      <p:stCondLst>
+                        <p:cond delay="indefinite"/>
+                      </p:stCondLst>
+                      <p:childTnLst>
+                        <p:par>
+                          <p:cTn id="12" fill="hold">
+                            <p:stCondLst>
+                              <p:cond delay="0"/>
+                            </p:stCondLst>
+                            <p:childTnLst>
+                              <p:par>
+                                <p:cTn id="13" presetID="1" presetClass="entr" presetSubtype="0" fill="hold" nodeType="clickEffect">
+                                  <p:stCondLst>
+                                    <p:cond delay="0"/>
+                                  </p:stCondLst>
+                                  <p:childTnLst>
+                                    <p:set>
+                                      <p:cBhvr>
+                                        <p:cTn id="14" dur="1" fill="hold">
+                                          <p:stCondLst>
+                                            <p:cond delay="0"/>
+                                          </p:stCondLst>
+                                        </p:cTn>
+                                        <p:tgtEl>
+                                          <p:spTgt spid="3">
+                                            <p:txEl>
+                                              <p:pRg st="2" end="2"/>
+                                            </p:txEl>
+                                          </p:spTgt>
+                                        </p:tgtEl>
+                                        <p:attrNameLst>
+                                          <p:attrName>style.visibility</p:attrName>
+                                        </p:attrNameLst>
+                                      </p:cBhvr>
+                                      <p:to>
+                                        <p:strVal val="visible"/>
+                                      </p:to>
+                                    </p:set>
+                                  </p:childTnLst>
+                                </p:cTn>
+                              </p:par>
+                            </p:childTnLst>
+                          </p:cTn>
+                        </p:par>
+                      </p:childTnLst>
+                    </p:cTn>
+                  </p:par>
+                  <p:par>
+                    <p:cTn id="15" fill="hold">
+                      <p:stCondLst>
+                        <p:cond delay="indefinite"/>
+                      </p:stCondLst>
+                      <p:childTnLst>
+                        <p:par>
+                          <p:cTn id="16" fill="hold">
+                            <p:stCondLst>
+                              <p:cond delay="0"/>
+                            </p:stCondLst>
+                            <p:childTnLst>
+                              <p:par>
+                                <p:cTn id="17" presetID="1" presetClass="entr" presetSubtype="0" fill="hold" nodeType="clickEffect">
+                                  <p:stCondLst>
+                                    <p:cond delay="0"/>
+                                  </p:stCondLst>
+                                  <p:childTnLst>
+                                    <p:set>
+                                      <p:cBhvr>
+                                        <p:cTn id="18" dur="1" fill="hold">
+                                          <p:stCondLst>
+                                            <p:cond delay="0"/>
+                                          </p:stCondLst>
+                                        </p:cTn>
+                                        <p:tgtEl>
+                                          <p:spTgt spid="3">
+                                            <p:txEl>
+                                              <p:pRg st="3" end="3"/>
+                                            </p:txEl>
+                                          </p:spTgt>
+                                        </p:tgtEl>
+                                        <p:attrNameLst>
+                                          <p:attrName>style.visibility</p:attrName>
+                                        </p:attrNameLst>
+                                      </p:cBhvr>
+                                      <p:to>
+                                        <p:strVal val="visible"/>
+                                      </p:to>
+                                    </p:set>
+                                  </p:childTnLst>
+                                </p:cTn>
+                              </p:par>
+                            </p:childTnLst>
+                          </p:cTn>
+                        </p:par>
+                      </p:childTnLst>
+                    </p:cTn>
+                  </p:par>
+                  <p:par>
+                    <p:cTn id="19" fill="hold">
+                      <p:stCondLst>
+                        <p:cond delay="indefinite"/>
+                      </p:stCondLst>
+                      <p:childTnLst>
+                        <p:par>
+                          <p:cTn id="20" fill="hold">
+                            <p:stCondLst>
+                              <p:cond delay="0"/>
+                            </p:stCondLst>
+                            <p:childTnLst>
+                              <p:par>
+                                <p:cTn id="21" presetID="1" presetClass="entr" presetSubtype="0" fill="hold" nodeType="clickEffect">
+                                  <p:stCondLst>
+                                    <p:cond delay="0"/>
+                                  </p:stCondLst>
+                                  <p:childTnLst>
+                                    <p:set>
+                                      <p:cBhvr>
+                                        <p:cTn id="22" dur="1" fill="hold">
+                                          <p:stCondLst>
+                                            <p:cond delay="0"/>
+                                          </p:stCondLst>
+                                        </p:cTn>
+                                        <p:tgtEl>
+                                          <p:spTgt spid="3">
+                                            <p:txEl>
+                                              <p:pRg st="4" end="4"/>
+                                            </p:txEl>
+                                          </p:spTgt>
+                                        </p:tgtEl>
+                                        <p:attrNameLst>
+                                          <p:attrName>style.visibility</p:attrName>
+                                        </p:attrNameLst>
+                                      </p:cBhvr>
+                                      <p:to>
+                                        <p:strVal val="visible"/>
+                                      </p:to>
+                                    </p:set>
+                                  </p:childTnLst>
+                                </p:cTn>
+                              </p:par>
+                            </p:childTnLst>
+                          </p:cTn>
+                        </p:par>
+                      </p:childTnLst>
+                    </p:cTn>
+                  </p:par>
+                  <p:par>
+                    <p:cTn id="23" fill="hold">
+                      <p:stCondLst>
+                        <p:cond delay="indefinite"/>
+                      </p:stCondLst>
+                      <p:childTnLst>
+                        <p:par>
+                          <p:cTn id="24" fill="hold">
+                            <p:stCondLst>
+                              <p:cond delay="0"/>
+                            </p:stCondLst>
+                            <p:childTnLst>
+                              <p:par>
+                                <p:cTn id="25" presetID="1" presetClass="entr" presetSubtype="0" fill="hold" nodeType="clickEffect">
+                                  <p:stCondLst>
+                                    <p:cond delay="0"/>
+                                  </p:stCondLst>
+                                  <p:childTnLst>
+                                    <p:set>
+                                      <p:cBhvr>
+                                        <p:cTn id="26" dur="1" fill="hold">
+                                          <p:stCondLst>
+                                            <p:cond delay="0"/>
+                                          </p:stCondLst>
+                                        </p:cTn>
+                                        <p:tgtEl>
+                                          <p:spTgt spid="3">
+                                            <p:txEl>
+                                              <p:pRg st="5" end="5"/>
+                                            </p:txEl>
+                                          </p:spTgt>
+                                        </p:tgtEl>
+                                        <p:attrNameLst>
+                                          <p:attrName>style.visibility</p:attrName>
+                                        </p:attrNameLst>
+                                      </p:cBhvr>
+                                      <p:to>
+                                        <p:strVal val="visible"/>
+                                      </p:to>
+                                    </p:set>
+                                  </p:childTnLst>
+                                </p:cTn>
+                              </p:par>
+                            </p:childTnLst>
+                          </p:cTn>
+                        </p:par>
+                      </p:childTnLst>
+                    </p:cTn>
+                  </p:par>
+                </p:childTnLst>
+              </p:cTn>
+              <p:prevCondLst>
+                <p:cond evt="onPrev" delay="0">
+                  <p:tgtEl>
+                    <p:sldTgt/>
+                  </p:tgtEl>
+                </p:cond>
+              </p:prevCondLst>
+              <p:nextCondLst>
+                <p:cond evt="onNext" delay="0">
+                  <p:tgtEl>
+                    <p:sldTgt/>
+                  </p:tgtEl>
+                </p:cond>
+              </p:nextCondLst>
+            </p:seq>
+          </p:childTnLst>
+        </p:cTn>
+      </p:par>
+    </p:tnLst>
+  </p:timing>
 </p:sld>
 </file>
 

--- a/docs/lecture_slides/Week 2/Week2_Lecture3_Slides_1_19_2024.pptx
+++ b/docs/lecture_slides/Week 2/Week2_Lecture3_Slides_1_19_2024.pptx
@@ -11,6 +11,7 @@
     <p:sldId id="340" r:id="rId27"/>
     <p:sldId id="341" r:id="rId28"/>
     <p:sldId id="342" r:id="rId29"/>
+    <p:sldId id="346" r:id="rId33"/>
     <p:sldId id="343" r:id="rId30"/>
     <p:sldId id="330" r:id="rId5"/>
     <p:sldId id="344" r:id="rId31"/>
@@ -14074,22 +14075,31 @@
       </p:sp>
       <p:sp>
         <p:nvSpPr>
-          <p:cNvPr id="3" name="Content Placeholder 2"/>
-          <p:cNvSpPr>
-            <a:spLocks noGrp="1"/>
-          </p:cNvSpPr>
-          <p:nvPr>
-            <p:ph idx="1"/>
-          </p:nvPr>
+          <p:cNvPr id="3" name="Question 1"/>
+          <p:cNvSpPr/>
+          <p:nvPr/>
         </p:nvSpPr>
         <p:spPr>
           <a:xfrm>
-            <a:off x="838200" y="1600200"/>
-            <a:ext cx="10515600" cy="4800000"/>
+            <a:off x="838200" y="1620000"/>
+            <a:ext cx="10515600" cy="1150000"/>
           </a:xfrm>
+          <a:prstGeom prst="roundRect">
+            <a:avLst>
+              <a:gd name="adj" fmla="val 4000"/>
+            </a:avLst>
+          </a:prstGeom>
+          <a:solidFill>
+            <a:srgbClr val="F2F6FC"/>
+          </a:solidFill>
+          <a:ln w="19050">
+            <a:solidFill>
+              <a:schemeClr val="accent1"/>
+            </a:solidFill>
+          </a:ln>
         </p:spPr>
         <p:txBody>
-          <a:bodyPr wrap="square">
+          <a:bodyPr lIns="228600" tIns="182880" rIns="228600" bIns="91440" anchor="t">
             <a:normAutofit/>
           </a:bodyPr>
           <a:lstStyle/>
@@ -14098,105 +14108,304 @@
               <a:buNone/>
             </a:pPr>
             <a:r>
-              <a:rPr lang="en-US" sz="2000" dirty="0"/>
+              <a:rPr lang="en-US" sz="1800" b="1" dirty="0">
+                <a:solidFill>
+                  <a:srgbClr val="4472C4"/>
+                </a:solidFill>
+              </a:rPr>
+              <a:t>1   </a:t>
+            </a:r>
+            <a:r>
+              <a:rPr lang="en-US" sz="1800" b="1" dirty="0"/>
               <a:t>What do we use data for?</a:t>
             </a:r>
           </a:p>
+        </p:txBody>
+      </p:sp>
+      <p:sp>
+        <p:nvSpPr>
+          <p:cNvPr id="4" name="Answer 1"/>
+          <p:cNvSpPr txBox="1"/>
+          <p:nvPr/>
+        </p:nvSpPr>
+        <p:spPr>
+          <a:xfrm>
+            <a:off x="1066800" y="2240000"/>
+            <a:ext cx="10058400" cy="438560"/>
+          </a:xfrm>
+          <a:prstGeom prst="rect">
+            <a:avLst/>
+          </a:prstGeom>
+          <a:noFill/>
+        </p:spPr>
+        <p:txBody>
+          <a:bodyPr wrap="square" lIns="0" tIns="0" rIns="0" bIns="0">
+            <a:normAutofit/>
+          </a:bodyPr>
+          <a:lstStyle/>
           <a:p>
             <a:pPr marL="0" indent="0">
-              <a:spcBef>
-                <a:spcPts val="200"/>
-              </a:spcBef>
               <a:buNone/>
             </a:pPr>
             <a:r>
-              <a:rPr lang="en-US" sz="2000" dirty="0">
+              <a:rPr lang="en-US" sz="1600" dirty="0">
                 <a:solidFill>
-                  <a:srgbClr val="FF0000"/>
+                  <a:srgbClr val="C00000"/>
                 </a:solidFill>
               </a:rPr>
               <a:t>To answer questions about a population.</a:t>
             </a:r>
           </a:p>
+        </p:txBody>
+      </p:sp>
+      <p:sp>
+        <p:nvSpPr>
+          <p:cNvPr id="5" name="Question 2"/>
+          <p:cNvSpPr/>
+          <p:nvPr/>
+        </p:nvSpPr>
+        <p:spPr>
+          <a:xfrm>
+            <a:off x="838200" y="2870000"/>
+            <a:ext cx="10515600" cy="1150000"/>
+          </a:xfrm>
+          <a:prstGeom prst="roundRect">
+            <a:avLst>
+              <a:gd name="adj" fmla="val 4000"/>
+            </a:avLst>
+          </a:prstGeom>
+          <a:solidFill>
+            <a:srgbClr val="F2F6FC"/>
+          </a:solidFill>
+          <a:ln w="19050">
+            <a:solidFill>
+              <a:schemeClr val="accent1"/>
+            </a:solidFill>
+          </a:ln>
+        </p:spPr>
+        <p:txBody>
+          <a:bodyPr lIns="228600" tIns="182880" rIns="228600" bIns="91440" anchor="t">
+            <a:normAutofit/>
+          </a:bodyPr>
+          <a:lstStyle/>
           <a:p>
             <a:pPr marL="0" indent="0">
-              <a:spcBef>
-                <a:spcPts val="1000"/>
-              </a:spcBef>
               <a:buNone/>
             </a:pPr>
             <a:r>
-              <a:rPr lang="en-US" sz="2000" dirty="0"/>
+              <a:rPr lang="en-US" sz="1800" b="1" dirty="0">
+                <a:solidFill>
+                  <a:srgbClr val="4472C4"/>
+                </a:solidFill>
+              </a:rPr>
+              <a:t>2   </a:t>
+            </a:r>
+            <a:r>
+              <a:rPr lang="en-US" sz="1800" b="1" dirty="0"/>
               <a:t>What is a population?</a:t>
             </a:r>
           </a:p>
+        </p:txBody>
+      </p:sp>
+      <p:sp>
+        <p:nvSpPr>
+          <p:cNvPr id="6" name="Answer 2"/>
+          <p:cNvSpPr txBox="1"/>
+          <p:nvPr/>
+        </p:nvSpPr>
+        <p:spPr>
+          <a:xfrm>
+            <a:off x="1066800" y="3490000"/>
+            <a:ext cx="10058400" cy="438560"/>
+          </a:xfrm>
+          <a:prstGeom prst="rect">
+            <a:avLst/>
+          </a:prstGeom>
+          <a:noFill/>
+        </p:spPr>
+        <p:txBody>
+          <a:bodyPr wrap="square" lIns="0" tIns="0" rIns="0" bIns="0">
+            <a:normAutofit/>
+          </a:bodyPr>
+          <a:lstStyle/>
           <a:p>
             <a:pPr marL="0" indent="0">
-              <a:spcBef>
-                <a:spcPts val="200"/>
-              </a:spcBef>
               <a:buNone/>
             </a:pPr>
             <a:r>
-              <a:rPr lang="en-US" sz="2000" dirty="0">
+              <a:rPr lang="en-US" sz="1600" dirty="0">
                 <a:solidFill>
-                  <a:srgbClr val="FF0000"/>
+                  <a:srgbClr val="C00000"/>
                 </a:solidFill>
               </a:rPr>
               <a:t>The set of all observations of interest – observed and unobserved.</a:t>
             </a:r>
           </a:p>
+        </p:txBody>
+      </p:sp>
+      <p:sp>
+        <p:nvSpPr>
+          <p:cNvPr id="7" name="Question 3"/>
+          <p:cNvSpPr/>
+          <p:nvPr/>
+        </p:nvSpPr>
+        <p:spPr>
+          <a:xfrm>
+            <a:off x="838200" y="4120000"/>
+            <a:ext cx="10515600" cy="1150000"/>
+          </a:xfrm>
+          <a:prstGeom prst="roundRect">
+            <a:avLst>
+              <a:gd name="adj" fmla="val 4000"/>
+            </a:avLst>
+          </a:prstGeom>
+          <a:solidFill>
+            <a:srgbClr val="F2F6FC"/>
+          </a:solidFill>
+          <a:ln w="19050">
+            <a:solidFill>
+              <a:schemeClr val="accent1"/>
+            </a:solidFill>
+          </a:ln>
+        </p:spPr>
+        <p:txBody>
+          <a:bodyPr lIns="228600" tIns="182880" rIns="228600" bIns="91440" anchor="t">
+            <a:normAutofit/>
+          </a:bodyPr>
+          <a:lstStyle/>
           <a:p>
             <a:pPr marL="0" indent="0">
-              <a:spcBef>
-                <a:spcPts val="1000"/>
-              </a:spcBef>
               <a:buNone/>
             </a:pPr>
             <a:r>
-              <a:rPr lang="en-US" sz="2000" dirty="0"/>
+              <a:rPr lang="en-US" sz="1800" b="1" dirty="0">
+                <a:solidFill>
+                  <a:srgbClr val="4472C4"/>
+                </a:solidFill>
+              </a:rPr>
+              <a:t>3   </a:t>
+            </a:r>
+            <a:r>
+              <a:rPr lang="en-US" sz="1800" b="1" dirty="0"/>
               <a:t>What is a sample?</a:t>
             </a:r>
           </a:p>
+        </p:txBody>
+      </p:sp>
+      <p:sp>
+        <p:nvSpPr>
+          <p:cNvPr id="8" name="Answer 3"/>
+          <p:cNvSpPr txBox="1"/>
+          <p:nvPr/>
+        </p:nvSpPr>
+        <p:spPr>
+          <a:xfrm>
+            <a:off x="1066800" y="4740000"/>
+            <a:ext cx="10058400" cy="438560"/>
+          </a:xfrm>
+          <a:prstGeom prst="rect">
+            <a:avLst/>
+          </a:prstGeom>
+          <a:noFill/>
+        </p:spPr>
+        <p:txBody>
+          <a:bodyPr wrap="square" lIns="0" tIns="0" rIns="0" bIns="0">
+            <a:normAutofit/>
+          </a:bodyPr>
+          <a:lstStyle/>
           <a:p>
             <a:pPr marL="0" indent="0">
-              <a:spcBef>
-                <a:spcPts val="200"/>
-              </a:spcBef>
               <a:buNone/>
             </a:pPr>
             <a:r>
-              <a:rPr lang="en-US" sz="2000" dirty="0">
+              <a:rPr lang="en-US" sz="1600" dirty="0">
                 <a:solidFill>
-                  <a:srgbClr val="FF0000"/>
+                  <a:srgbClr val="C00000"/>
                 </a:solidFill>
               </a:rPr>
               <a:t>The subset of the population that we actually observe.</a:t>
             </a:r>
           </a:p>
+        </p:txBody>
+      </p:sp>
+      <p:sp>
+        <p:nvSpPr>
+          <p:cNvPr id="9" name="Question 4"/>
+          <p:cNvSpPr/>
+          <p:nvPr/>
+        </p:nvSpPr>
+        <p:spPr>
+          <a:xfrm>
+            <a:off x="838200" y="5370000"/>
+            <a:ext cx="10515600" cy="1150000"/>
+          </a:xfrm>
+          <a:prstGeom prst="roundRect">
+            <a:avLst>
+              <a:gd name="adj" fmla="val 4000"/>
+            </a:avLst>
+          </a:prstGeom>
+          <a:solidFill>
+            <a:srgbClr val="F2F6FC"/>
+          </a:solidFill>
+          <a:ln w="19050">
+            <a:solidFill>
+              <a:schemeClr val="accent1"/>
+            </a:solidFill>
+          </a:ln>
+        </p:spPr>
+        <p:txBody>
+          <a:bodyPr lIns="228600" tIns="182880" rIns="228600" bIns="91440" anchor="t">
+            <a:normAutofit/>
+          </a:bodyPr>
+          <a:lstStyle/>
           <a:p>
             <a:pPr marL="0" indent="0">
-              <a:spcBef>
-                <a:spcPts val="1000"/>
-              </a:spcBef>
               <a:buNone/>
             </a:pPr>
             <a:r>
-              <a:rPr lang="en-US" sz="2000" dirty="0"/>
+              <a:rPr lang="en-US" sz="1800" b="1" dirty="0">
+                <a:solidFill>
+                  <a:srgbClr val="4472C4"/>
+                </a:solidFill>
+              </a:rPr>
+              <a:t>4   </a:t>
+            </a:r>
+            <a:r>
+              <a:rPr lang="en-US" sz="1800" b="1" dirty="0"/>
               <a:t>What do we call the way we collect the data?</a:t>
             </a:r>
           </a:p>
+        </p:txBody>
+      </p:sp>
+      <p:sp>
+        <p:nvSpPr>
+          <p:cNvPr id="10" name="Answer 4"/>
+          <p:cNvSpPr txBox="1"/>
+          <p:nvPr/>
+        </p:nvSpPr>
+        <p:spPr>
+          <a:xfrm>
+            <a:off x="1066800" y="5990000"/>
+            <a:ext cx="10058400" cy="438560"/>
+          </a:xfrm>
+          <a:prstGeom prst="rect">
+            <a:avLst/>
+          </a:prstGeom>
+          <a:noFill/>
+        </p:spPr>
+        <p:txBody>
+          <a:bodyPr wrap="square" lIns="0" tIns="0" rIns="0" bIns="0">
+            <a:normAutofit/>
+          </a:bodyPr>
+          <a:lstStyle/>
           <a:p>
             <a:pPr marL="0" indent="0">
-              <a:spcBef>
-                <a:spcPts val="200"/>
-              </a:spcBef>
               <a:buNone/>
             </a:pPr>
             <a:r>
-              <a:rPr lang="en-US" sz="2000" dirty="0">
+              <a:rPr lang="en-US" sz="1600" dirty="0">
                 <a:solidFill>
-                  <a:srgbClr val="FF0000"/>
+                  <a:srgbClr val="C00000"/>
                 </a:solidFill>
               </a:rPr>
               <a:t>The sampling design.</a:t>
@@ -14207,7 +14416,7 @@
     </p:spTree>
     <p:extLst>
       <p:ext uri="{BB962C8B-B14F-4D97-AF65-F5344CB8AC3E}">
-        <p14:creationId xmlns:p14="http://schemas.microsoft.com/office/powerpoint/2010/main" val="1517484001"/>
+        <p14:creationId xmlns:p14="http://schemas.microsoft.com/office/powerpoint/2010/main" val="1517484011"/>
       </p:ext>
     </p:extLst>
   </p:cSld>
@@ -14248,11 +14457,7 @@
                                           </p:stCondLst>
                                         </p:cTn>
                                         <p:tgtEl>
-                                          <p:spTgt spid="3">
-                                            <p:txEl>
-                                              <p:pRg st="0" end="0"/>
-                                            </p:txEl>
-                                          </p:spTgt>
+                                          <p:spTgt spid="3"/>
                                         </p:tgtEl>
                                         <p:attrNameLst>
                                           <p:attrName>style.visibility</p:attrName>
@@ -14297,11 +14502,7 @@
                                           </p:stCondLst>
                                         </p:cTn>
                                         <p:tgtEl>
-                                          <p:spTgt spid="3">
-                                            <p:txEl>
-                                              <p:pRg st="1" end="1"/>
-                                            </p:txEl>
-                                          </p:spTgt>
+                                          <p:spTgt spid="4"/>
                                         </p:tgtEl>
                                         <p:attrNameLst>
                                           <p:attrName>style.visibility</p:attrName>
@@ -14346,11 +14547,7 @@
                                           </p:stCondLst>
                                         </p:cTn>
                                         <p:tgtEl>
-                                          <p:spTgt spid="3">
-                                            <p:txEl>
-                                              <p:pRg st="2" end="2"/>
-                                            </p:txEl>
-                                          </p:spTgt>
+                                          <p:spTgt spid="5"/>
                                         </p:tgtEl>
                                         <p:attrNameLst>
                                           <p:attrName>style.visibility</p:attrName>
@@ -14395,11 +14592,7 @@
                                           </p:stCondLst>
                                         </p:cTn>
                                         <p:tgtEl>
-                                          <p:spTgt spid="3">
-                                            <p:txEl>
-                                              <p:pRg st="3" end="3"/>
-                                            </p:txEl>
-                                          </p:spTgt>
+                                          <p:spTgt spid="6"/>
                                         </p:tgtEl>
                                         <p:attrNameLst>
                                           <p:attrName>style.visibility</p:attrName>
@@ -14444,11 +14637,7 @@
                                           </p:stCondLst>
                                         </p:cTn>
                                         <p:tgtEl>
-                                          <p:spTgt spid="3">
-                                            <p:txEl>
-                                              <p:pRg st="4" end="4"/>
-                                            </p:txEl>
-                                          </p:spTgt>
+                                          <p:spTgt spid="7"/>
                                         </p:tgtEl>
                                         <p:attrNameLst>
                                           <p:attrName>style.visibility</p:attrName>
@@ -14493,11 +14682,7 @@
                                           </p:stCondLst>
                                         </p:cTn>
                                         <p:tgtEl>
-                                          <p:spTgt spid="3">
-                                            <p:txEl>
-                                              <p:pRg st="5" end="5"/>
-                                            </p:txEl>
-                                          </p:spTgt>
+                                          <p:spTgt spid="8"/>
                                         </p:tgtEl>
                                         <p:attrNameLst>
                                           <p:attrName>style.visibility</p:attrName>
@@ -14542,11 +14727,7 @@
                                           </p:stCondLst>
                                         </p:cTn>
                                         <p:tgtEl>
-                                          <p:spTgt spid="3">
-                                            <p:txEl>
-                                              <p:pRg st="6" end="6"/>
-                                            </p:txEl>
-                                          </p:spTgt>
+                                          <p:spTgt spid="9"/>
                                         </p:tgtEl>
                                         <p:attrNameLst>
                                           <p:attrName>style.visibility</p:attrName>
@@ -14591,11 +14772,7 @@
                                           </p:stCondLst>
                                         </p:cTn>
                                         <p:tgtEl>
-                                          <p:spTgt spid="3">
-                                            <p:txEl>
-                                              <p:pRg st="7" end="7"/>
-                                            </p:txEl>
-                                          </p:spTgt>
+                                          <p:spTgt spid="10"/>
                                         </p:tgtEl>
                                         <p:attrNameLst>
                                           <p:attrName>style.visibility</p:attrName>
@@ -15690,85 +15867,6 @@
           </a:p>
         </p:txBody>
       </p:sp>
-      <p:sp>
-        <p:nvSpPr>
-          <p:cNvPr id="6" name="TextBox 5">
-            <a:extLst>
-              <a:ext uri="{FF2B5EF4-FFF2-40B4-BE49-F238E27FC236}">
-                <a16:creationId xmlns:a16="http://schemas.microsoft.com/office/drawing/2014/main" id="{7CCE2FF9-7536-5C89-D055-D6807D532711}"/>
-              </a:ext>
-            </a:extLst>
-          </p:cNvPr>
-          <p:cNvSpPr txBox="1"/>
-          <p:nvPr/>
-        </p:nvSpPr>
-        <p:spPr>
-          <a:xfrm>
-            <a:off x="6455303" y="4492364"/>
-            <a:ext cx="5045612" cy="523220"/>
-          </a:xfrm>
-          <a:prstGeom prst="rect">
-            <a:avLst/>
-          </a:prstGeom>
-          <a:noFill/>
-        </p:spPr>
-        <p:txBody>
-          <a:bodyPr wrap="square" rtlCol="0">
-            <a:spAutoFit/>
-          </a:bodyPr>
-          <a:lstStyle/>
-          <a:p>
-            <a:r>
-              <a:rPr lang="en-US" sz="1400" dirty="0"/>
-              <a:t>Ex. </a:t>
-            </a:r>
-            <a:r>
-              <a:rPr lang="en-US" sz="1400" dirty="0" err="1"/>
-              <a:t>Mendels</a:t>
-            </a:r>
-            <a:r>
-              <a:rPr lang="en-US" sz="1400" dirty="0"/>
-              <a:t> Pea Plants - In one of Gregor Mendel’s classic studies, </a:t>
-            </a:r>
-          </a:p>
-          <a:p>
-            <a:r>
-              <a:rPr lang="en-US" sz="1400" dirty="0"/>
-              <a:t>he bred 8023 pea plants and observed the color of the pea pods. </a:t>
-            </a:r>
-          </a:p>
-        </p:txBody>
-      </p:sp>
-      <p:pic>
-        <p:nvPicPr>
-          <p:cNvPr id="7" name="Picture 6">
-            <a:extLst>
-              <a:ext uri="{FF2B5EF4-FFF2-40B4-BE49-F238E27FC236}">
-                <a16:creationId xmlns:a16="http://schemas.microsoft.com/office/drawing/2014/main" id="{7747518D-2983-9589-ADFC-D914C94612B9}"/>
-              </a:ext>
-            </a:extLst>
-          </p:cNvPr>
-          <p:cNvPicPr>
-            <a:picLocks noChangeAspect="1"/>
-          </p:cNvPicPr>
-          <p:nvPr/>
-        </p:nvPicPr>
-        <p:blipFill>
-          <a:blip r:embed="rId3"/>
-          <a:stretch>
-            <a:fillRect/>
-          </a:stretch>
-        </p:blipFill>
-        <p:spPr>
-          <a:xfrm>
-            <a:off x="6873497" y="5015584"/>
-            <a:ext cx="4359220" cy="1477291"/>
-          </a:xfrm>
-          <a:prstGeom prst="rect">
-            <a:avLst/>
-          </a:prstGeom>
-        </p:spPr>
-      </p:pic>
       <p:pic>
         <p:nvPicPr>
           <p:cNvPr id="9" name="Picture 8">
@@ -15792,7 +15890,7 @@
         <p:spPr>
           <a:xfrm>
             <a:off x="5661891" y="1887427"/>
-            <a:ext cx="6358151" cy="2477747"/>
+            <a:ext cx="6358151" cy="2636307"/>
           </a:xfrm>
           <a:prstGeom prst="rect">
             <a:avLst/>
@@ -17860,7 +17958,7 @@
 </p:sld>
 </file>
 
-<file path=ppt/slides/slide3.xml><?xml version="1.0" encoding="utf-8"?>
+<file path=ppt/slides/slide28.xml><?xml version="1.0" encoding="utf-8"?>
 <p:sld xmlns:a="http://schemas.openxmlformats.org/drawingml/2006/main" xmlns:r="http://schemas.openxmlformats.org/officeDocument/2006/relationships" xmlns:p="http://schemas.openxmlformats.org/presentationml/2006/main">
   <p:cSld>
     <p:spTree>
@@ -17896,26 +17994,26 @@
           <a:p>
             <a:r>
               <a:rPr lang="en-US" dirty="0"/>
-              <a:t>Review</a:t>
+              <a:t>Example: Mendel’s Pea Plants</a:t>
             </a:r>
           </a:p>
         </p:txBody>
       </p:sp>
       <p:sp>
         <p:nvSpPr>
-          <p:cNvPr id="3" name="Content Placeholder 2"/>
-          <p:cNvSpPr>
-            <a:spLocks noGrp="1"/>
-          </p:cNvSpPr>
-          <p:nvPr>
-            <p:ph idx="1"/>
-          </p:nvPr>
+          <p:cNvPr id="3" name="Caption"/>
+          <p:cNvSpPr txBox="1"/>
+          <p:nvPr/>
         </p:nvSpPr>
         <p:spPr>
           <a:xfrm>
-            <a:off x="838200" y="1600200"/>
-            <a:ext cx="10515600" cy="4800000"/>
+            <a:off x="1200150" y="1600200"/>
+            <a:ext cx="9800000" cy="800000"/>
           </a:xfrm>
+          <a:prstGeom prst="rect">
+            <a:avLst/>
+          </a:prstGeom>
+          <a:noFill/>
         </p:spPr>
         <p:txBody>
           <a:bodyPr wrap="square">
@@ -17927,80 +18025,68 @@
               <a:buNone/>
             </a:pPr>
             <a:r>
-              <a:rPr lang="en-US" sz="2000" dirty="0"/>
-              <a:t>What are the three arms of statistics?</a:t>
+              <a:rPr lang="en-US" sz="1800" dirty="0"/>
+              <a:t>In one of Gregor Mendel’s classic studies he bred 8,023 pea plants and recorded the color of the peas – the seeds – that each plant produced.</a:t>
             </a:r>
           </a:p>
+        </p:txBody>
+      </p:sp>
+      <p:pic>
+        <p:nvPicPr>
+          <p:cNvPr id="4" name="Mendel table"/>
+          <p:cNvPicPr>
+            <a:picLocks noChangeAspect="1"/>
+          </p:cNvPicPr>
+          <p:nvPr/>
+        </p:nvPicPr>
+        <p:blipFill>
+          <a:blip r:embed="rId2"/>
+          <a:stretch>
+            <a:fillRect/>
+          </a:stretch>
+        </p:blipFill>
+        <p:spPr>
+          <a:xfrm>
+            <a:off x="2438400" y="2620000"/>
+            <a:ext cx="7315200" cy="2479040"/>
+          </a:xfrm>
+          <a:prstGeom prst="rect">
+            <a:avLst/>
+          </a:prstGeom>
+        </p:spPr>
+      </p:pic>
+      <p:sp>
+        <p:nvSpPr>
+          <p:cNvPr id="5" name="Payoff"/>
+          <p:cNvSpPr txBox="1"/>
+          <p:nvPr/>
+        </p:nvSpPr>
+        <p:spPr>
+          <a:xfrm>
+            <a:off x="1200150" y="5300000"/>
+            <a:ext cx="9800000" cy="900000"/>
+          </a:xfrm>
+          <a:prstGeom prst="rect">
+            <a:avLst/>
+          </a:prstGeom>
+          <a:noFill/>
+        </p:spPr>
+        <p:txBody>
+          <a:bodyPr wrap="square">
+            <a:normAutofit/>
+          </a:bodyPr>
+          <a:lstStyle/>
           <a:p>
             <a:pPr marL="0" indent="0">
-              <a:spcBef>
-                <a:spcPts val="200"/>
-              </a:spcBef>
               <a:buNone/>
             </a:pPr>
             <a:r>
-              <a:rPr lang="en-US" sz="1800" dirty="0">
+              <a:rPr lang="en-US" sz="1800" b="1" dirty="0">
                 <a:solidFill>
-                  <a:srgbClr val="FF0000"/>
+                  <a:srgbClr val="C00000"/>
                 </a:solidFill>
               </a:rPr>
-              <a:t>Design, description and inference.</a:t>
-            </a:r>
-          </a:p>
-          <a:p>
-            <a:pPr marL="0" indent="0">
-              <a:spcBef>
-                <a:spcPts val="1000"/>
-              </a:spcBef>
-              <a:buNone/>
-            </a:pPr>
-            <a:r>
-              <a:rPr lang="en-US" sz="2000" dirty="0"/>
-              <a:t>Which one comes first, and why?</a:t>
-            </a:r>
-          </a:p>
-          <a:p>
-            <a:pPr marL="0" indent="0">
-              <a:spcBef>
-                <a:spcPts val="200"/>
-              </a:spcBef>
-              <a:buNone/>
-            </a:pPr>
-            <a:r>
-              <a:rPr lang="en-US" sz="1800" dirty="0">
-                <a:solidFill>
-                  <a:srgbClr val="FF0000"/>
-                </a:solidFill>
-              </a:rPr>
-              <a:t>Design – how we plan to collect the data, settled before any data exists. No amount of description or inference repairs a bad design.</a:t>
-            </a:r>
-          </a:p>
-          <a:p>
-            <a:pPr marL="0" indent="0">
-              <a:spcBef>
-                <a:spcPts val="1000"/>
-              </a:spcBef>
-              <a:buNone/>
-            </a:pPr>
-            <a:r>
-              <a:rPr lang="en-US" sz="2000" dirty="0"/>
-              <a:t>What is an estimate?</a:t>
-            </a:r>
-          </a:p>
-          <a:p>
-            <a:pPr marL="0" indent="0">
-              <a:spcBef>
-                <a:spcPts val="200"/>
-              </a:spcBef>
-              <a:buNone/>
-            </a:pPr>
-            <a:r>
-              <a:rPr lang="en-US" sz="1800" dirty="0">
-                <a:solidFill>
-                  <a:srgbClr val="FF0000"/>
-                </a:solidFill>
-              </a:rPr>
-              <a:t>A statistic computed from a sample, used to approximate an unknown population parameter – together with a statement of how far off it is likely to be.</a:t>
+              <a:t>The relative frequencies are almost exactly 3/4 and 1/4 – the 3:1 ratio Mendel’s theory of inheritance predicts. A frequency table is doing real scientific work here.</a:t>
             </a:r>
           </a:p>
         </p:txBody>
@@ -18008,7 +18094,7 @@
     </p:spTree>
     <p:extLst>
       <p:ext uri="{BB962C8B-B14F-4D97-AF65-F5344CB8AC3E}">
-        <p14:creationId xmlns:p14="http://schemas.microsoft.com/office/powerpoint/2010/main" val="1517484002"/>
+        <p14:creationId xmlns:p14="http://schemas.microsoft.com/office/powerpoint/2010/main" val="1517484006"/>
       </p:ext>
     </p:extLst>
   </p:cSld>
@@ -18049,11 +18135,391 @@
                                           </p:stCondLst>
                                         </p:cTn>
                                         <p:tgtEl>
-                                          <p:spTgt spid="3">
-                                            <p:txEl>
-                                              <p:pRg st="0" end="0"/>
-                                            </p:txEl>
-                                          </p:spTgt>
+                                          <p:spTgt spid="5"/>
+                                        </p:tgtEl>
+                                        <p:attrNameLst>
+                                          <p:attrName>style.visibility</p:attrName>
+                                        </p:attrNameLst>
+                                      </p:cBhvr>
+                                      <p:to>
+                                        <p:strVal val="visible"/>
+                                      </p:to>
+                                    </p:set>
+                                  </p:childTnLst>
+                                </p:cTn>
+                              </p:par>
+                            </p:childTnLst>
+                          </p:cTn>
+                        </p:par>
+                      </p:childTnLst>
+                    </p:cTn>
+                  </p:par>
+                </p:childTnLst>
+              </p:cTn>
+              <p:prevCondLst>
+                <p:cond evt="onPrev" delay="0">
+                  <p:tgtEl>
+                    <p:sldTgt/>
+                  </p:tgtEl>
+                </p:cond>
+              </p:prevCondLst>
+              <p:nextCondLst>
+                <p:cond evt="onNext" delay="0">
+                  <p:tgtEl>
+                    <p:sldTgt/>
+                  </p:tgtEl>
+                </p:cond>
+              </p:nextCondLst>
+            </p:seq>
+          </p:childTnLst>
+        </p:cTn>
+      </p:par>
+    </p:tnLst>
+  </p:timing>
+</p:sld>
+</file>
+
+<file path=ppt/slides/slide3.xml><?xml version="1.0" encoding="utf-8"?>
+<p:sld xmlns:a="http://schemas.openxmlformats.org/drawingml/2006/main" xmlns:r="http://schemas.openxmlformats.org/officeDocument/2006/relationships" xmlns:p="http://schemas.openxmlformats.org/presentationml/2006/main">
+  <p:cSld>
+    <p:spTree>
+      <p:nvGrpSpPr>
+        <p:cNvPr id="1" name=""/>
+        <p:cNvGrpSpPr/>
+        <p:nvPr/>
+      </p:nvGrpSpPr>
+      <p:grpSpPr>
+        <a:xfrm>
+          <a:off x="0" y="0"/>
+          <a:ext cx="0" cy="0"/>
+          <a:chOff x="0" y="0"/>
+          <a:chExt cx="0" cy="0"/>
+        </a:xfrm>
+      </p:grpSpPr>
+      <p:sp>
+        <p:nvSpPr>
+          <p:cNvPr id="2" name="Title 1"/>
+          <p:cNvSpPr>
+            <a:spLocks noGrp="1"/>
+          </p:cNvSpPr>
+          <p:nvPr>
+            <p:ph type="title"/>
+          </p:nvPr>
+        </p:nvSpPr>
+        <p:spPr/>
+        <p:txBody>
+          <a:bodyPr>
+            <a:normAutofit/>
+          </a:bodyPr>
+          <a:lstStyle/>
+          <a:p>
+            <a:r>
+              <a:rPr lang="en-US" dirty="0"/>
+              <a:t>Review</a:t>
+            </a:r>
+          </a:p>
+        </p:txBody>
+      </p:sp>
+      <p:sp>
+        <p:nvSpPr>
+          <p:cNvPr id="3" name="Question 1"/>
+          <p:cNvSpPr/>
+          <p:nvPr/>
+        </p:nvSpPr>
+        <p:spPr>
+          <a:xfrm>
+            <a:off x="838200" y="1650000"/>
+            <a:ext cx="10515600" cy="1450000"/>
+          </a:xfrm>
+          <a:prstGeom prst="roundRect">
+            <a:avLst>
+              <a:gd name="adj" fmla="val 4000"/>
+            </a:avLst>
+          </a:prstGeom>
+          <a:solidFill>
+            <a:srgbClr val="F2F6FC"/>
+          </a:solidFill>
+          <a:ln w="19050">
+            <a:solidFill>
+              <a:schemeClr val="accent1"/>
+            </a:solidFill>
+          </a:ln>
+        </p:spPr>
+        <p:txBody>
+          <a:bodyPr lIns="228600" tIns="182880" rIns="228600" bIns="91440" anchor="t">
+            <a:normAutofit/>
+          </a:bodyPr>
+          <a:lstStyle/>
+          <a:p>
+            <a:pPr marL="0" indent="0">
+              <a:buNone/>
+            </a:pPr>
+            <a:r>
+              <a:rPr lang="en-US" sz="1800" b="1" dirty="0">
+                <a:solidFill>
+                  <a:srgbClr val="4472C4"/>
+                </a:solidFill>
+              </a:rPr>
+              <a:t>1   </a:t>
+            </a:r>
+            <a:r>
+              <a:rPr lang="en-US" sz="1800" b="1" dirty="0"/>
+              <a:t>What are the three arms of statistics?</a:t>
+            </a:r>
+          </a:p>
+        </p:txBody>
+      </p:sp>
+      <p:sp>
+        <p:nvSpPr>
+          <p:cNvPr id="4" name="Answer 1"/>
+          <p:cNvSpPr txBox="1"/>
+          <p:nvPr/>
+        </p:nvSpPr>
+        <p:spPr>
+          <a:xfrm>
+            <a:off x="1066800" y="2290000"/>
+            <a:ext cx="10058400" cy="718560"/>
+          </a:xfrm>
+          <a:prstGeom prst="rect">
+            <a:avLst/>
+          </a:prstGeom>
+          <a:noFill/>
+        </p:spPr>
+        <p:txBody>
+          <a:bodyPr wrap="square" lIns="0" tIns="0" rIns="0" bIns="0">
+            <a:normAutofit/>
+          </a:bodyPr>
+          <a:lstStyle/>
+          <a:p>
+            <a:pPr marL="0" indent="0">
+              <a:buNone/>
+            </a:pPr>
+            <a:r>
+              <a:rPr lang="en-US" sz="1600" dirty="0">
+                <a:solidFill>
+                  <a:srgbClr val="C00000"/>
+                </a:solidFill>
+              </a:rPr>
+              <a:t>Design, description and inference.</a:t>
+            </a:r>
+          </a:p>
+        </p:txBody>
+      </p:sp>
+      <p:sp>
+        <p:nvSpPr>
+          <p:cNvPr id="5" name="Question 2"/>
+          <p:cNvSpPr/>
+          <p:nvPr/>
+        </p:nvSpPr>
+        <p:spPr>
+          <a:xfrm>
+            <a:off x="838200" y="3300000"/>
+            <a:ext cx="10515600" cy="1450000"/>
+          </a:xfrm>
+          <a:prstGeom prst="roundRect">
+            <a:avLst>
+              <a:gd name="adj" fmla="val 4000"/>
+            </a:avLst>
+          </a:prstGeom>
+          <a:solidFill>
+            <a:srgbClr val="F2F6FC"/>
+          </a:solidFill>
+          <a:ln w="19050">
+            <a:solidFill>
+              <a:schemeClr val="accent1"/>
+            </a:solidFill>
+          </a:ln>
+        </p:spPr>
+        <p:txBody>
+          <a:bodyPr lIns="228600" tIns="182880" rIns="228600" bIns="91440" anchor="t">
+            <a:normAutofit/>
+          </a:bodyPr>
+          <a:lstStyle/>
+          <a:p>
+            <a:pPr marL="0" indent="0">
+              <a:buNone/>
+            </a:pPr>
+            <a:r>
+              <a:rPr lang="en-US" sz="1800" b="1" dirty="0">
+                <a:solidFill>
+                  <a:srgbClr val="4472C4"/>
+                </a:solidFill>
+              </a:rPr>
+              <a:t>2   </a:t>
+            </a:r>
+            <a:r>
+              <a:rPr lang="en-US" sz="1800" b="1" dirty="0"/>
+              <a:t>Which one comes first, and why?</a:t>
+            </a:r>
+          </a:p>
+        </p:txBody>
+      </p:sp>
+      <p:sp>
+        <p:nvSpPr>
+          <p:cNvPr id="6" name="Answer 2"/>
+          <p:cNvSpPr txBox="1"/>
+          <p:nvPr/>
+        </p:nvSpPr>
+        <p:spPr>
+          <a:xfrm>
+            <a:off x="1066800" y="3940000"/>
+            <a:ext cx="10058400" cy="718560"/>
+          </a:xfrm>
+          <a:prstGeom prst="rect">
+            <a:avLst/>
+          </a:prstGeom>
+          <a:noFill/>
+        </p:spPr>
+        <p:txBody>
+          <a:bodyPr wrap="square" lIns="0" tIns="0" rIns="0" bIns="0">
+            <a:normAutofit/>
+          </a:bodyPr>
+          <a:lstStyle/>
+          <a:p>
+            <a:pPr marL="0" indent="0">
+              <a:buNone/>
+            </a:pPr>
+            <a:r>
+              <a:rPr lang="en-US" sz="1600" dirty="0">
+                <a:solidFill>
+                  <a:srgbClr val="C00000"/>
+                </a:solidFill>
+              </a:rPr>
+              <a:t>Design – how we plan to collect the data, settled before any data exists. No amount of description or inference repairs a bad design.</a:t>
+            </a:r>
+          </a:p>
+        </p:txBody>
+      </p:sp>
+      <p:sp>
+        <p:nvSpPr>
+          <p:cNvPr id="7" name="Question 3"/>
+          <p:cNvSpPr/>
+          <p:nvPr/>
+        </p:nvSpPr>
+        <p:spPr>
+          <a:xfrm>
+            <a:off x="838200" y="4950000"/>
+            <a:ext cx="10515600" cy="1450000"/>
+          </a:xfrm>
+          <a:prstGeom prst="roundRect">
+            <a:avLst>
+              <a:gd name="adj" fmla="val 4000"/>
+            </a:avLst>
+          </a:prstGeom>
+          <a:solidFill>
+            <a:srgbClr val="F2F6FC"/>
+          </a:solidFill>
+          <a:ln w="19050">
+            <a:solidFill>
+              <a:schemeClr val="accent1"/>
+            </a:solidFill>
+          </a:ln>
+        </p:spPr>
+        <p:txBody>
+          <a:bodyPr lIns="228600" tIns="182880" rIns="228600" bIns="91440" anchor="t">
+            <a:normAutofit/>
+          </a:bodyPr>
+          <a:lstStyle/>
+          <a:p>
+            <a:pPr marL="0" indent="0">
+              <a:buNone/>
+            </a:pPr>
+            <a:r>
+              <a:rPr lang="en-US" sz="1800" b="1" dirty="0">
+                <a:solidFill>
+                  <a:srgbClr val="4472C4"/>
+                </a:solidFill>
+              </a:rPr>
+              <a:t>3   </a:t>
+            </a:r>
+            <a:r>
+              <a:rPr lang="en-US" sz="1800" b="1" dirty="0"/>
+              <a:t>What is an estimate?</a:t>
+            </a:r>
+          </a:p>
+        </p:txBody>
+      </p:sp>
+      <p:sp>
+        <p:nvSpPr>
+          <p:cNvPr id="8" name="Answer 3"/>
+          <p:cNvSpPr txBox="1"/>
+          <p:nvPr/>
+        </p:nvSpPr>
+        <p:spPr>
+          <a:xfrm>
+            <a:off x="1066800" y="5590000"/>
+            <a:ext cx="10058400" cy="718560"/>
+          </a:xfrm>
+          <a:prstGeom prst="rect">
+            <a:avLst/>
+          </a:prstGeom>
+          <a:noFill/>
+        </p:spPr>
+        <p:txBody>
+          <a:bodyPr wrap="square" lIns="0" tIns="0" rIns="0" bIns="0">
+            <a:normAutofit/>
+          </a:bodyPr>
+          <a:lstStyle/>
+          <a:p>
+            <a:pPr marL="0" indent="0">
+              <a:buNone/>
+            </a:pPr>
+            <a:r>
+              <a:rPr lang="en-US" sz="1600" dirty="0">
+                <a:solidFill>
+                  <a:srgbClr val="C00000"/>
+                </a:solidFill>
+              </a:rPr>
+              <a:t>A statistic computed from a sample, used to approximate an unknown population parameter – together with a statement of how far off it is likely to be.</a:t>
+            </a:r>
+          </a:p>
+        </p:txBody>
+      </p:sp>
+    </p:spTree>
+    <p:extLst>
+      <p:ext uri="{BB962C8B-B14F-4D97-AF65-F5344CB8AC3E}">
+        <p14:creationId xmlns:p14="http://schemas.microsoft.com/office/powerpoint/2010/main" val="1517484012"/>
+      </p:ext>
+    </p:extLst>
+  </p:cSld>
+  <p:clrMapOvr>
+    <a:masterClrMapping/>
+  </p:clrMapOvr>
+  <p:timing>
+    <p:tnLst>
+      <p:par>
+        <p:cTn id="1" dur="indefinite" restart="never" nodeType="tmRoot">
+          <p:childTnLst>
+            <p:seq concurrent="1" nextAc="seek">
+              <p:cTn id="2" dur="indefinite" nodeType="mainSeq">
+                <p:childTnLst>
+                  <p:par>
+                    <p:cTn id="3" fill="hold">
+                      <p:stCondLst>
+                        <p:cond delay="indefinite"/>
+                      </p:stCondLst>
+                      <p:childTnLst>
+                        <p:par>
+                          <p:cTn id="4" fill="hold">
+                            <p:stCondLst>
+                              <p:cond delay="0"/>
+                            </p:stCondLst>
+                            <p:childTnLst>
+                              <p:par>
+                                <p:cTn id="5" presetID="1" presetClass="entr" presetSubtype="0" fill="hold" nodeType="clickEffect">
+                                  <p:stCondLst>
+                                    <p:cond delay="0"/>
+                                  </p:stCondLst>
+                                  <p:childTnLst>
+                                    <p:set>
+                                      <p:cBhvr>
+                                        <p:cTn id="6" dur="1" fill="hold">
+                                          <p:stCondLst>
+                                            <p:cond delay="0"/>
+                                          </p:stCondLst>
+                                        </p:cTn>
+                                        <p:tgtEl>
+                                          <p:spTgt spid="3"/>
                                         </p:tgtEl>
                                         <p:attrNameLst>
                                           <p:attrName>style.visibility</p:attrName>
@@ -18098,11 +18564,7 @@
                                           </p:stCondLst>
                                         </p:cTn>
                                         <p:tgtEl>
-                                          <p:spTgt spid="3">
-                                            <p:txEl>
-                                              <p:pRg st="1" end="1"/>
-                                            </p:txEl>
-                                          </p:spTgt>
+                                          <p:spTgt spid="4"/>
                                         </p:tgtEl>
                                         <p:attrNameLst>
                                           <p:attrName>style.visibility</p:attrName>
@@ -18147,11 +18609,7 @@
                                           </p:stCondLst>
                                         </p:cTn>
                                         <p:tgtEl>
-                                          <p:spTgt spid="3">
-                                            <p:txEl>
-                                              <p:pRg st="2" end="2"/>
-                                            </p:txEl>
-                                          </p:spTgt>
+                                          <p:spTgt spid="5"/>
                                         </p:tgtEl>
                                         <p:attrNameLst>
                                           <p:attrName>style.visibility</p:attrName>
@@ -18196,11 +18654,7 @@
                                           </p:stCondLst>
                                         </p:cTn>
                                         <p:tgtEl>
-                                          <p:spTgt spid="3">
-                                            <p:txEl>
-                                              <p:pRg st="3" end="3"/>
-                                            </p:txEl>
-                                          </p:spTgt>
+                                          <p:spTgt spid="6"/>
                                         </p:tgtEl>
                                         <p:attrNameLst>
                                           <p:attrName>style.visibility</p:attrName>
@@ -18245,11 +18699,7 @@
                                           </p:stCondLst>
                                         </p:cTn>
                                         <p:tgtEl>
-                                          <p:spTgt spid="3">
-                                            <p:txEl>
-                                              <p:pRg st="4" end="4"/>
-                                            </p:txEl>
-                                          </p:spTgt>
+                                          <p:spTgt spid="7"/>
                                         </p:tgtEl>
                                         <p:attrNameLst>
                                           <p:attrName>style.visibility</p:attrName>
@@ -18294,11 +18744,7 @@
                                           </p:stCondLst>
                                         </p:cTn>
                                         <p:tgtEl>
-                                          <p:spTgt spid="3">
-                                            <p:txEl>
-                                              <p:pRg st="5" end="5"/>
-                                            </p:txEl>
-                                          </p:spTgt>
+                                          <p:spTgt spid="8"/>
                                         </p:tgtEl>
                                         <p:attrNameLst>
                                           <p:attrName>style.visibility</p:attrName>

--- a/docs/lecture_slides/Week 2/Week2_Lecture3_Slides_1_19_2024.pptx
+++ b/docs/lecture_slides/Week 2/Week2_Lecture3_Slides_1_19_2024.pptx
@@ -14081,8 +14081,8 @@
         </p:nvSpPr>
         <p:spPr>
           <a:xfrm>
-            <a:off x="838200" y="1620000"/>
-            <a:ext cx="10515600" cy="1150000"/>
+            <a:off x="838200" y="1500000"/>
+            <a:ext cx="10515600" cy="980000"/>
           </a:xfrm>
           <a:prstGeom prst="roundRect">
             <a:avLst>
@@ -14108,7 +14108,7 @@
               <a:buNone/>
             </a:pPr>
             <a:r>
-              <a:rPr lang="en-US" sz="1800" b="1" dirty="0">
+              <a:rPr lang="en-US" sz="1700" b="1" dirty="0">
                 <a:solidFill>
                   <a:srgbClr val="4472C4"/>
                 </a:solidFill>
@@ -14116,8 +14116,8 @@
               <a:t>1   </a:t>
             </a:r>
             <a:r>
-              <a:rPr lang="en-US" sz="1800" b="1" dirty="0"/>
-              <a:t>What do we use data for?</a:t>
+              <a:rPr lang="en-US" sz="1700" b="1" dirty="0"/>
+              <a:t>What is a statistic?</a:t>
             </a:r>
           </a:p>
         </p:txBody>
@@ -14130,8 +14130,8 @@
         </p:nvSpPr>
         <p:spPr>
           <a:xfrm>
-            <a:off x="1066800" y="2240000"/>
-            <a:ext cx="10058400" cy="438560"/>
+            <a:off x="1066800" y="2060000"/>
+            <a:ext cx="10058400" cy="328560"/>
           </a:xfrm>
           <a:prstGeom prst="rect">
             <a:avLst/>
@@ -14148,12 +14148,12 @@
               <a:buNone/>
             </a:pPr>
             <a:r>
-              <a:rPr lang="en-US" sz="1600" dirty="0">
+              <a:rPr lang="en-US" sz="1500" dirty="0">
                 <a:solidFill>
                   <a:srgbClr val="C00000"/>
                 </a:solidFill>
               </a:rPr>
-              <a:t>To answer questions about a population.</a:t>
+              <a:t>A numerical characteristic of a sample – a number computed from the observations we actually collected.</a:t>
             </a:r>
           </a:p>
         </p:txBody>
@@ -14166,8 +14166,8 @@
         </p:nvSpPr>
         <p:spPr>
           <a:xfrm>
-            <a:off x="838200" y="2870000"/>
-            <a:ext cx="10515600" cy="1150000"/>
+            <a:off x="838200" y="2560000"/>
+            <a:ext cx="10515600" cy="980000"/>
           </a:xfrm>
           <a:prstGeom prst="roundRect">
             <a:avLst>
@@ -14193,7 +14193,7 @@
               <a:buNone/>
             </a:pPr>
             <a:r>
-              <a:rPr lang="en-US" sz="1800" b="1" dirty="0">
+              <a:rPr lang="en-US" sz="1700" b="1" dirty="0">
                 <a:solidFill>
                   <a:srgbClr val="4472C4"/>
                 </a:solidFill>
@@ -14201,8 +14201,8 @@
               <a:t>2   </a:t>
             </a:r>
             <a:r>
-              <a:rPr lang="en-US" sz="1800" b="1" dirty="0"/>
-              <a:t>What is a population?</a:t>
+              <a:rPr lang="en-US" sz="1700" b="1" dirty="0"/>
+              <a:t>What is a parameter?</a:t>
             </a:r>
           </a:p>
         </p:txBody>
@@ -14215,8 +14215,8 @@
         </p:nvSpPr>
         <p:spPr>
           <a:xfrm>
-            <a:off x="1066800" y="3490000"/>
-            <a:ext cx="10058400" cy="438560"/>
+            <a:off x="1066800" y="3120000"/>
+            <a:ext cx="10058400" cy="328560"/>
           </a:xfrm>
           <a:prstGeom prst="rect">
             <a:avLst/>
@@ -14233,12 +14233,12 @@
               <a:buNone/>
             </a:pPr>
             <a:r>
-              <a:rPr lang="en-US" sz="1600" dirty="0">
+              <a:rPr lang="en-US" sz="1500" dirty="0">
                 <a:solidFill>
                   <a:srgbClr val="C00000"/>
                 </a:solidFill>
               </a:rPr>
-              <a:t>The set of all observations of interest – observed and unobserved.</a:t>
+              <a:t>The same kind of number for a population, computed from every observation – and usually unknown.</a:t>
             </a:r>
           </a:p>
         </p:txBody>
@@ -14251,8 +14251,8 @@
         </p:nvSpPr>
         <p:spPr>
           <a:xfrm>
-            <a:off x="838200" y="4120000"/>
-            <a:ext cx="10515600" cy="1150000"/>
+            <a:off x="838200" y="3620000"/>
+            <a:ext cx="10515600" cy="980000"/>
           </a:xfrm>
           <a:prstGeom prst="roundRect">
             <a:avLst>
@@ -14278,7 +14278,7 @@
               <a:buNone/>
             </a:pPr>
             <a:r>
-              <a:rPr lang="en-US" sz="1800" b="1" dirty="0">
+              <a:rPr lang="en-US" sz="1700" b="1" dirty="0">
                 <a:solidFill>
                   <a:srgbClr val="4472C4"/>
                 </a:solidFill>
@@ -14286,8 +14286,8 @@
               <a:t>3   </a:t>
             </a:r>
             <a:r>
-              <a:rPr lang="en-US" sz="1800" b="1" dirty="0"/>
-              <a:t>What is a sample?</a:t>
+              <a:rPr lang="en-US" sz="1700" b="1" dirty="0"/>
+              <a:t>What do we use data for?</a:t>
             </a:r>
           </a:p>
         </p:txBody>
@@ -14300,8 +14300,8 @@
         </p:nvSpPr>
         <p:spPr>
           <a:xfrm>
-            <a:off x="1066800" y="4740000"/>
-            <a:ext cx="10058400" cy="438560"/>
+            <a:off x="1066800" y="4180000"/>
+            <a:ext cx="10058400" cy="328560"/>
           </a:xfrm>
           <a:prstGeom prst="rect">
             <a:avLst/>
@@ -14318,12 +14318,12 @@
               <a:buNone/>
             </a:pPr>
             <a:r>
-              <a:rPr lang="en-US" sz="1600" dirty="0">
+              <a:rPr lang="en-US" sz="1500" dirty="0">
                 <a:solidFill>
                   <a:srgbClr val="C00000"/>
                 </a:solidFill>
               </a:rPr>
-              <a:t>The subset of the population that we actually observe.</a:t>
+              <a:t>To answer questions about a population.</a:t>
             </a:r>
           </a:p>
         </p:txBody>
@@ -14336,8 +14336,8 @@
         </p:nvSpPr>
         <p:spPr>
           <a:xfrm>
-            <a:off x="838200" y="5370000"/>
-            <a:ext cx="10515600" cy="1150000"/>
+            <a:off x="838200" y="4680000"/>
+            <a:ext cx="10515600" cy="980000"/>
           </a:xfrm>
           <a:prstGeom prst="roundRect">
             <a:avLst>
@@ -14363,7 +14363,7 @@
               <a:buNone/>
             </a:pPr>
             <a:r>
-              <a:rPr lang="en-US" sz="1800" b="1" dirty="0">
+              <a:rPr lang="en-US" sz="1700" b="1" dirty="0">
                 <a:solidFill>
                   <a:srgbClr val="4472C4"/>
                 </a:solidFill>
@@ -14371,8 +14371,8 @@
               <a:t>4   </a:t>
             </a:r>
             <a:r>
-              <a:rPr lang="en-US" sz="1800" b="1" dirty="0"/>
-              <a:t>What do we call the way we collect the data?</a:t>
+              <a:rPr lang="en-US" sz="1700" b="1" dirty="0"/>
+              <a:t>What is a population?</a:t>
             </a:r>
           </a:p>
         </p:txBody>
@@ -14385,8 +14385,8 @@
         </p:nvSpPr>
         <p:spPr>
           <a:xfrm>
-            <a:off x="1066800" y="5990000"/>
-            <a:ext cx="10058400" cy="438560"/>
+            <a:off x="1066800" y="5240000"/>
+            <a:ext cx="10058400" cy="328560"/>
           </a:xfrm>
           <a:prstGeom prst="rect">
             <a:avLst/>
@@ -14403,12 +14403,97 @@
               <a:buNone/>
             </a:pPr>
             <a:r>
-              <a:rPr lang="en-US" sz="1600" dirty="0">
+              <a:rPr lang="en-US" sz="1500" dirty="0">
                 <a:solidFill>
                   <a:srgbClr val="C00000"/>
                 </a:solidFill>
               </a:rPr>
-              <a:t>The sampling design.</a:t>
+              <a:t>The set of all observations of interest – observed and unobserved.</a:t>
+            </a:r>
+          </a:p>
+        </p:txBody>
+      </p:sp>
+      <p:sp>
+        <p:nvSpPr>
+          <p:cNvPr id="11" name="Question 5"/>
+          <p:cNvSpPr/>
+          <p:nvPr/>
+        </p:nvSpPr>
+        <p:spPr>
+          <a:xfrm>
+            <a:off x="838200" y="5740000"/>
+            <a:ext cx="10515600" cy="980000"/>
+          </a:xfrm>
+          <a:prstGeom prst="roundRect">
+            <a:avLst>
+              <a:gd name="adj" fmla="val 4000"/>
+            </a:avLst>
+          </a:prstGeom>
+          <a:solidFill>
+            <a:srgbClr val="F2F6FC"/>
+          </a:solidFill>
+          <a:ln w="19050">
+            <a:solidFill>
+              <a:schemeClr val="accent1"/>
+            </a:solidFill>
+          </a:ln>
+        </p:spPr>
+        <p:txBody>
+          <a:bodyPr lIns="228600" tIns="182880" rIns="228600" bIns="91440" anchor="t">
+            <a:normAutofit/>
+          </a:bodyPr>
+          <a:lstStyle/>
+          <a:p>
+            <a:pPr marL="0" indent="0">
+              <a:buNone/>
+            </a:pPr>
+            <a:r>
+              <a:rPr lang="en-US" sz="1700" b="1" dirty="0">
+                <a:solidFill>
+                  <a:srgbClr val="4472C4"/>
+                </a:solidFill>
+              </a:rPr>
+              <a:t>5   </a:t>
+            </a:r>
+            <a:r>
+              <a:rPr lang="en-US" sz="1700" b="1" dirty="0"/>
+              <a:t>What is a sample?</a:t>
+            </a:r>
+          </a:p>
+        </p:txBody>
+      </p:sp>
+      <p:sp>
+        <p:nvSpPr>
+          <p:cNvPr id="12" name="Answer 5"/>
+          <p:cNvSpPr txBox="1"/>
+          <p:nvPr/>
+        </p:nvSpPr>
+        <p:spPr>
+          <a:xfrm>
+            <a:off x="1066800" y="6300000"/>
+            <a:ext cx="10058400" cy="328560"/>
+          </a:xfrm>
+          <a:prstGeom prst="rect">
+            <a:avLst/>
+          </a:prstGeom>
+          <a:noFill/>
+        </p:spPr>
+        <p:txBody>
+          <a:bodyPr wrap="square" lIns="0" tIns="0" rIns="0" bIns="0">
+            <a:normAutofit/>
+          </a:bodyPr>
+          <a:lstStyle/>
+          <a:p>
+            <a:pPr marL="0" indent="0">
+              <a:buNone/>
+            </a:pPr>
+            <a:r>
+              <a:rPr lang="en-US" sz="1500" dirty="0">
+                <a:solidFill>
+                  <a:srgbClr val="C00000"/>
+                </a:solidFill>
+              </a:rPr>
+              <a:t>The subset of the population that we actually observe.</a:t>
             </a:r>
           </a:p>
         </p:txBody>
@@ -14791,6 +14876,96 @@
                       </p:childTnLst>
                     </p:cTn>
                   </p:par>
+                  <p:par>
+                    <p:cTn id="35" fill="hold">
+                      <p:stCondLst>
+                        <p:cond delay="indefinite"/>
+                      </p:stCondLst>
+                      <p:childTnLst>
+                        <p:par>
+                          <p:cTn id="36" fill="hold">
+                            <p:stCondLst>
+                              <p:cond delay="0"/>
+                            </p:stCondLst>
+                            <p:childTnLst>
+                              <p:par>
+                                <p:cTn id="37" presetID="1" presetClass="entr" presetSubtype="0" fill="hold" nodeType="clickEffect">
+                                  <p:stCondLst>
+                                    <p:cond delay="0"/>
+                                  </p:stCondLst>
+                                  <p:childTnLst>
+                                    <p:set>
+                                      <p:cBhvr>
+                                        <p:cTn id="38" dur="1" fill="hold">
+                                          <p:stCondLst>
+                                            <p:cond delay="0"/>
+                                          </p:stCondLst>
+                                        </p:cTn>
+                                        <p:tgtEl>
+                                          <p:spTgt spid="11"/>
+                                        </p:tgtEl>
+                                        <p:attrNameLst>
+                                          <p:attrName>style.visibility</p:attrName>
+                                        </p:attrNameLst>
+                                      </p:cBhvr>
+                                      <p:to>
+                                        <p:strVal val="visible"/>
+                                      </p:to>
+                                    </p:set>
+                                  </p:childTnLst>
+                                </p:cTn>
+                              </p:par>
+                            </p:childTnLst>
+                          </p:cTn>
+                        </p:par>
+                      </p:childTnLst>
+                    </p:cTn>
+                  </p:par>
+                  <p:par>
+                    <p:cTn id="39" fill="hold">
+                      <p:stCondLst>
+                        <p:cond delay="indefinite"/>
+                      </p:stCondLst>
+                      <p:childTnLst>
+                        <p:par>
+                          <p:cTn id="40" fill="hold">
+                            <p:stCondLst>
+                              <p:cond delay="0"/>
+                            </p:stCondLst>
+                            <p:childTnLst>
+                              <p:par>
+                                <p:cTn id="41" presetID="1" presetClass="entr" presetSubtype="0" fill="hold" nodeType="clickEffect">
+                                  <p:stCondLst>
+                                    <p:cond delay="0"/>
+                                  </p:stCondLst>
+                                  <p:childTnLst>
+                                    <p:set>
+                                      <p:cBhvr>
+                                        <p:cTn id="42" dur="1" fill="hold">
+                                          <p:stCondLst>
+                                            <p:cond delay="0"/>
+                                          </p:stCondLst>
+                                        </p:cTn>
+                                        <p:tgtEl>
+                                          <p:spTgt spid="12"/>
+                                        </p:tgtEl>
+                                        <p:attrNameLst>
+                                          <p:attrName>style.visibility</p:attrName>
+                                        </p:attrNameLst>
+                                      </p:cBhvr>
+                                      <p:to>
+                                        <p:strVal val="visible"/>
+                                      </p:to>
+                                    </p:set>
+                                  </p:childTnLst>
+                                </p:cTn>
+                              </p:par>
+                            </p:childTnLst>
+                          </p:cTn>
+                        </p:par>
+                      </p:childTnLst>
+                    </p:cTn>
+                  </p:par>
                 </p:childTnLst>
               </p:cTn>
               <p:prevCondLst>
@@ -15594,6 +15769,232 @@
   <p:clrMapOvr>
     <a:masterClrMapping/>
   </p:clrMapOvr>
+  <p:timing>
+    <p:tnLst>
+      <p:par>
+        <p:cTn id="1" dur="indefinite" restart="never" nodeType="tmRoot">
+          <p:childTnLst>
+            <p:seq concurrent="1" nextAc="seek">
+              <p:cTn id="2" dur="indefinite" nodeType="mainSeq">
+                <p:childTnLst>
+                  <p:par>
+                    <p:cTn id="3" fill="hold">
+                      <p:stCondLst>
+                        <p:cond delay="indefinite"/>
+                      </p:stCondLst>
+                      <p:childTnLst>
+                        <p:par>
+                          <p:cTn id="4" fill="hold">
+                            <p:stCondLst>
+                              <p:cond delay="0"/>
+                            </p:stCondLst>
+                            <p:childTnLst>
+                              <p:par>
+                                <p:cTn id="5" presetID="1" presetClass="entr" presetSubtype="0" fill="hold" nodeType="clickEffect">
+                                  <p:stCondLst>
+                                    <p:cond delay="0"/>
+                                  </p:stCondLst>
+                                  <p:childTnLst>
+                                    <p:set>
+                                      <p:cBhvr>
+                                        <p:cTn id="6" dur="1" fill="hold">
+                                          <p:stCondLst>
+                                            <p:cond delay="0"/>
+                                          </p:stCondLst>
+                                        </p:cTn>
+                                        <p:tgtEl>
+                                          <p:spTgt spid="3">
+                                            <p:txEl>
+                                              <p:pRg st="2" end="4"/>
+                                            </p:txEl>
+                                          </p:spTgt>
+                                        </p:tgtEl>
+                                        <p:attrNameLst>
+                                          <p:attrName>style.visibility</p:attrName>
+                                        </p:attrNameLst>
+                                      </p:cBhvr>
+                                      <p:to>
+                                        <p:strVal val="visible"/>
+                                      </p:to>
+                                    </p:set>
+                                  </p:childTnLst>
+                                </p:cTn>
+                              </p:par>
+                            </p:childTnLst>
+                          </p:cTn>
+                        </p:par>
+                      </p:childTnLst>
+                    </p:cTn>
+                  </p:par>
+                  <p:par>
+                    <p:cTn id="7" fill="hold">
+                      <p:stCondLst>
+                        <p:cond delay="indefinite"/>
+                      </p:stCondLst>
+                      <p:childTnLst>
+                        <p:par>
+                          <p:cTn id="8" fill="hold">
+                            <p:stCondLst>
+                              <p:cond delay="0"/>
+                            </p:stCondLst>
+                            <p:childTnLst>
+                              <p:par>
+                                <p:cTn id="9" presetID="1" presetClass="entr" presetSubtype="0" fill="hold" nodeType="clickEffect">
+                                  <p:stCondLst>
+                                    <p:cond delay="0"/>
+                                  </p:stCondLst>
+                                  <p:childTnLst>
+                                    <p:set>
+                                      <p:cBhvr>
+                                        <p:cTn id="10" dur="1" fill="hold">
+                                          <p:stCondLst>
+                                            <p:cond delay="0"/>
+                                          </p:stCondLst>
+                                        </p:cTn>
+                                        <p:tgtEl>
+                                          <p:spTgt spid="3">
+                                            <p:txEl>
+                                              <p:pRg st="6" end="7"/>
+                                            </p:txEl>
+                                          </p:spTgt>
+                                        </p:tgtEl>
+                                        <p:attrNameLst>
+                                          <p:attrName>style.visibility</p:attrName>
+                                        </p:attrNameLst>
+                                      </p:cBhvr>
+                                      <p:to>
+                                        <p:strVal val="visible"/>
+                                      </p:to>
+                                    </p:set>
+                                  </p:childTnLst>
+                                </p:cTn>
+                              </p:par>
+                            </p:childTnLst>
+                          </p:cTn>
+                        </p:par>
+                      </p:childTnLst>
+                    </p:cTn>
+                  </p:par>
+                  <p:par>
+                    <p:cTn id="11" fill="hold">
+                      <p:stCondLst>
+                        <p:cond delay="indefinite"/>
+                      </p:stCondLst>
+                      <p:childTnLst>
+                        <p:par>
+                          <p:cTn id="12" fill="hold">
+                            <p:stCondLst>
+                              <p:cond delay="0"/>
+                            </p:stCondLst>
+                            <p:childTnLst>
+                              <p:par>
+                                <p:cTn id="13" presetID="1" presetClass="entr" presetSubtype="0" fill="hold" nodeType="clickEffect">
+                                  <p:stCondLst>
+                                    <p:cond delay="0"/>
+                                  </p:stCondLst>
+                                  <p:childTnLst>
+                                    <p:set>
+                                      <p:cBhvr>
+                                        <p:cTn id="14" dur="1" fill="hold">
+                                          <p:stCondLst>
+                                            <p:cond delay="0"/>
+                                          </p:stCondLst>
+                                        </p:cTn>
+                                        <p:tgtEl>
+                                          <p:spTgt spid="3">
+                                            <p:txEl>
+                                              <p:pRg st="9" end="9"/>
+                                            </p:txEl>
+                                          </p:spTgt>
+                                        </p:tgtEl>
+                                        <p:attrNameLst>
+                                          <p:attrName>style.visibility</p:attrName>
+                                        </p:attrNameLst>
+                                      </p:cBhvr>
+                                      <p:to>
+                                        <p:strVal val="visible"/>
+                                      </p:to>
+                                    </p:set>
+                                  </p:childTnLst>
+                                </p:cTn>
+                              </p:par>
+                            </p:childTnLst>
+                          </p:cTn>
+                        </p:par>
+                      </p:childTnLst>
+                    </p:cTn>
+                  </p:par>
+                  <p:par>
+                    <p:cTn id="15" fill="hold">
+                      <p:stCondLst>
+                        <p:cond delay="indefinite"/>
+                      </p:stCondLst>
+                      <p:childTnLst>
+                        <p:par>
+                          <p:cTn id="16" fill="hold">
+                            <p:stCondLst>
+                              <p:cond delay="0"/>
+                            </p:stCondLst>
+                            <p:childTnLst>
+                              <p:par>
+                                <p:cTn id="17" presetID="1" presetClass="entr" presetSubtype="0" fill="hold" nodeType="clickEffect">
+                                  <p:stCondLst>
+                                    <p:cond delay="0"/>
+                                  </p:stCondLst>
+                                  <p:childTnLst>
+                                    <p:set>
+                                      <p:cBhvr>
+                                        <p:cTn id="18" dur="1" fill="hold">
+                                          <p:stCondLst>
+                                            <p:cond delay="0"/>
+                                          </p:stCondLst>
+                                        </p:cTn>
+                                        <p:tgtEl>
+                                          <p:spTgt spid="3">
+                                            <p:txEl>
+                                              <p:pRg st="11" end="11"/>
+                                            </p:txEl>
+                                          </p:spTgt>
+                                        </p:tgtEl>
+                                        <p:attrNameLst>
+                                          <p:attrName>style.visibility</p:attrName>
+                                        </p:attrNameLst>
+                                      </p:cBhvr>
+                                      <p:to>
+                                        <p:strVal val="visible"/>
+                                      </p:to>
+                                    </p:set>
+                                  </p:childTnLst>
+                                </p:cTn>
+                              </p:par>
+                            </p:childTnLst>
+                          </p:cTn>
+                        </p:par>
+                      </p:childTnLst>
+                    </p:cTn>
+                  </p:par>
+                </p:childTnLst>
+              </p:cTn>
+              <p:prevCondLst>
+                <p:cond evt="onPrev" delay="0">
+                  <p:tgtEl>
+                    <p:sldTgt/>
+                  </p:tgtEl>
+                </p:cond>
+              </p:prevCondLst>
+              <p:nextCondLst>
+                <p:cond evt="onNext" delay="0">
+                  <p:tgtEl>
+                    <p:sldTgt/>
+                  </p:tgtEl>
+                </p:cond>
+              </p:nextCondLst>
+            </p:seq>
+          </p:childTnLst>
+        </p:cTn>
+      </p:par>
+    </p:tnLst>
+  </p:timing>
 </p:sld>
 </file>
 
@@ -15869,6 +16270,66 @@
       </p:sp>
       <p:pic>
         <p:nvPicPr>
+          <p:cNvPr id="30" name="Table stage 1">
+            <a:extLst>
+              <a:ext uri="{FF2B5EF4-FFF2-40B4-BE49-F238E27FC236}">
+                <a16:creationId xmlns:a16="http://schemas.microsoft.com/office/drawing/2014/main" id="{A726F141-28A4-5B62-1A80-B214989D15D2}"/>
+              </a:ext>
+            </a:extLst>
+          </p:cNvPr>
+          <p:cNvPicPr>
+            <a:picLocks noChangeAspect="1"/>
+          </p:cNvPicPr>
+          <p:nvPr/>
+        </p:nvPicPr>
+        <p:blipFill>
+          <a:blip r:embed="rId5"/>
+          <a:stretch>
+            <a:fillRect/>
+          </a:stretch>
+        </p:blipFill>
+        <p:spPr>
+          <a:xfrm>
+            <a:off x="5661891" y="1887427"/>
+            <a:ext cx="6358151" cy="2636307"/>
+          </a:xfrm>
+          <a:prstGeom prst="rect">
+            <a:avLst/>
+          </a:prstGeom>
+        </p:spPr>
+      </p:pic>
+      <p:pic>
+        <p:nvPicPr>
+          <p:cNvPr id="31" name="Table stage 2">
+            <a:extLst>
+              <a:ext uri="{FF2B5EF4-FFF2-40B4-BE49-F238E27FC236}">
+                <a16:creationId xmlns:a16="http://schemas.microsoft.com/office/drawing/2014/main" id="{A726F141-28A4-5B62-1A80-B214989D15D2}"/>
+              </a:ext>
+            </a:extLst>
+          </p:cNvPr>
+          <p:cNvPicPr>
+            <a:picLocks noChangeAspect="1"/>
+          </p:cNvPicPr>
+          <p:nvPr/>
+        </p:nvPicPr>
+        <p:blipFill>
+          <a:blip r:embed="rId6"/>
+          <a:stretch>
+            <a:fillRect/>
+          </a:stretch>
+        </p:blipFill>
+        <p:spPr>
+          <a:xfrm>
+            <a:off x="5661891" y="1887427"/>
+            <a:ext cx="6358151" cy="2636307"/>
+          </a:xfrm>
+          <a:prstGeom prst="rect">
+            <a:avLst/>
+          </a:prstGeom>
+        </p:spPr>
+      </p:pic>
+      <p:pic>
+        <p:nvPicPr>
           <p:cNvPr id="9" name="Picture 8">
             <a:extLst>
               <a:ext uri="{FF2B5EF4-FFF2-40B4-BE49-F238E27FC236}">
@@ -15907,6 +16368,188 @@
   <p:clrMapOvr>
     <a:masterClrMapping/>
   </p:clrMapOvr>
+  <p:timing>
+    <p:tnLst>
+      <p:par>
+        <p:cTn id="1" dur="indefinite" restart="never" nodeType="tmRoot">
+          <p:childTnLst>
+            <p:seq concurrent="1" nextAc="seek">
+              <p:cTn id="2" dur="indefinite" nodeType="mainSeq">
+                <p:childTnLst>
+                  <p:par>
+                    <p:cTn id="3" fill="hold">
+                      <p:stCondLst>
+                        <p:cond delay="indefinite"/>
+                      </p:stCondLst>
+                      <p:childTnLst>
+                        <p:par>
+                          <p:cTn id="4" fill="hold">
+                            <p:stCondLst>
+                              <p:cond delay="0"/>
+                            </p:stCondLst>
+                            <p:childTnLst>
+                              <p:par>
+                                <p:cTn id="5" presetID="1" presetClass="entr" presetSubtype="0" fill="hold" nodeType="clickEffect">
+                                  <p:stCondLst>
+                                    <p:cond delay="0"/>
+                                  </p:stCondLst>
+                                  <p:childTnLst>
+                                    <p:set>
+                                      <p:cBhvr>
+                                        <p:cTn id="6" dur="1" fill="hold">
+                                          <p:stCondLst>
+                                            <p:cond delay="0"/>
+                                          </p:stCondLst>
+                                        </p:cTn>
+                                        <p:tgtEl>
+                                          <p:spTgt spid="3">
+                                            <p:txEl>
+                                              <p:pRg st="4" end="5"/>
+                                            </p:txEl>
+                                          </p:spTgt>
+                                        </p:tgtEl>
+                                        <p:attrNameLst>
+                                          <p:attrName>style.visibility</p:attrName>
+                                        </p:attrNameLst>
+                                      </p:cBhvr>
+                                      <p:to>
+                                        <p:strVal val="visible"/>
+                                      </p:to>
+                                    </p:set>
+                                  </p:childTnLst>
+                                </p:cTn>
+                              </p:par>
+                              <p:par>
+                                <p:cTn id="7" presetID="1" presetClass="entr" presetSubtype="0" fill="hold" nodeType="withEffect">
+                                  <p:stCondLst>
+                                    <p:cond delay="0"/>
+                                  </p:stCondLst>
+                                  <p:childTnLst>
+                                    <p:set>
+                                      <p:cBhvr>
+                                        <p:cTn id="8" dur="1" fill="hold">
+                                          <p:stCondLst>
+                                            <p:cond delay="0"/>
+                                          </p:stCondLst>
+                                        </p:cTn>
+                                        <p:tgtEl>
+                                          <p:spTgt spid="31"/>
+                                        </p:tgtEl>
+                                        <p:attrNameLst>
+                                          <p:attrName>style.visibility</p:attrName>
+                                        </p:attrNameLst>
+                                      </p:cBhvr>
+                                      <p:to>
+                                        <p:strVal val="visible"/>
+                                      </p:to>
+                                    </p:set>
+                                  </p:childTnLst>
+                                </p:cTn>
+                              </p:par>
+                            </p:childTnLst>
+                          </p:cTn>
+                        </p:par>
+                      </p:childTnLst>
+                    </p:cTn>
+                  </p:par>
+                  <p:par>
+                    <p:cTn id="9" fill="hold">
+                      <p:stCondLst>
+                        <p:cond delay="indefinite"/>
+                      </p:stCondLst>
+                      <p:childTnLst>
+                        <p:par>
+                          <p:cTn id="10" fill="hold">
+                            <p:stCondLst>
+                              <p:cond delay="0"/>
+                            </p:stCondLst>
+                            <p:childTnLst>
+                              <p:par>
+                                <p:cTn id="11" presetID="1" presetClass="entr" presetSubtype="0" fill="hold" nodeType="clickEffect">
+                                  <p:stCondLst>
+                                    <p:cond delay="0"/>
+                                  </p:stCondLst>
+                                  <p:childTnLst>
+                                    <p:set>
+                                      <p:cBhvr>
+                                        <p:cTn id="12" dur="1" fill="hold">
+                                          <p:stCondLst>
+                                            <p:cond delay="0"/>
+                                          </p:stCondLst>
+                                        </p:cTn>
+                                        <p:tgtEl>
+                                          <p:spTgt spid="3">
+                                            <p:txEl>
+                                              <p:pRg st="6" end="6"/>
+                                            </p:txEl>
+                                          </p:spTgt>
+                                        </p:tgtEl>
+                                        <p:attrNameLst>
+                                          <p:attrName>style.visibility</p:attrName>
+                                        </p:attrNameLst>
+                                      </p:cBhvr>
+                                      <p:to>
+                                        <p:strVal val="visible"/>
+                                      </p:to>
+                                    </p:set>
+                                  </p:childTnLst>
+                                </p:cTn>
+                              </p:par>
+                              <p:par>
+                                <p:cTn id="13" presetID="1" presetClass="entr" presetSubtype="0" fill="hold" nodeType="withEffect">
+                                  <p:stCondLst>
+                                    <p:cond delay="0"/>
+                                  </p:stCondLst>
+                                  <p:childTnLst>
+                                    <p:set>
+                                      <p:cBhvr>
+                                        <p:cTn id="14" dur="1" fill="hold">
+                                          <p:stCondLst>
+                                            <p:cond delay="0"/>
+                                          </p:stCondLst>
+                                        </p:cTn>
+                                        <p:tgtEl>
+                                          <p:spTgt spid="9"/>
+                                        </p:tgtEl>
+                                        <p:attrNameLst>
+                                          <p:attrName>style.visibility</p:attrName>
+                                        </p:attrNameLst>
+                                      </p:cBhvr>
+                                      <p:to>
+                                        <p:strVal val="visible"/>
+                                      </p:to>
+                                    </p:set>
+                                  </p:childTnLst>
+                                </p:cTn>
+                              </p:par>
+                            </p:childTnLst>
+                          </p:cTn>
+                        </p:par>
+                      </p:childTnLst>
+                    </p:cTn>
+                  </p:par>
+                </p:childTnLst>
+              </p:cTn>
+              <p:prevCondLst>
+                <p:cond evt="onPrev" delay="0">
+                  <p:tgtEl>
+                    <p:sldTgt/>
+                  </p:tgtEl>
+                </p:cond>
+              </p:prevCondLst>
+              <p:nextCondLst>
+                <p:cond evt="onNext" delay="0">
+                  <p:tgtEl>
+                    <p:sldTgt/>
+                  </p:tgtEl>
+                </p:cond>
+              </p:nextCondLst>
+            </p:seq>
+          </p:childTnLst>
+        </p:cTn>
+      </p:par>
+    </p:tnLst>
+  </p:timing>
 </p:sld>
 </file>
 
@@ -16645,7 +17288,7 @@
           <a:noFill/>
         </p:spPr>
         <p:txBody>
-          <a:bodyPr wrap="square">
+          <a:bodyPr wrap="square" lIns="0" tIns="0" rIns="0" bIns="0">
             <a:normAutofit/>
           </a:bodyPr>
           <a:lstStyle/>
@@ -16655,7 +17298,7 @@
             </a:pPr>
             <a:r>
               <a:rPr lang="en-US" sz="1600" dirty="0"/>
-              <a:t>Twenty students report how many siblings they have:</a:t>
+              <a:t>Ten students report how many siblings they have. Writing the responses as a set:</a:t>
             </a:r>
           </a:p>
           <a:p>
@@ -16669,7 +17312,7 @@
               <a:rPr lang="en-US" sz="1500" dirty="0">
                 <a:latin typeface="Consolas" panose="020B0609020204030204"/>
               </a:rPr>
-              <a:t>0  1  1  2  0  3  1  2  1  0</a:t>
+              <a:t>R = {0, 1, 1, 2, 0,</a:t>
             </a:r>
           </a:p>
           <a:p>
@@ -16680,7 +17323,7 @@
               <a:rPr lang="en-US" sz="1500" dirty="0">
                 <a:latin typeface="Consolas" panose="020B0609020204030204"/>
               </a:rPr>
-              <a:t>4  2  1  1  3  0  2  1  5  1</a:t>
+              <a:t>        3, 1, 2, 1, 4}</a:t>
             </a:r>
           </a:p>
           <a:p>
@@ -16707,7 +17350,7 @@
         </p:nvGraphicFramePr>
         <p:xfrm>
           <a:off x="6400800" y="1750000"/>
-          <a:ext cx="4300000" cy="2960000"/>
+          <a:ext cx="4300000" cy="2380000"/>
         </p:xfrm>
         <a:graphic>
           <a:graphicData uri="http://schemas.openxmlformats.org/drawingml/2006/table">
@@ -16720,7 +17363,7 @@
                 <a:gridCol w="1000000"/>
                 <a:gridCol w="1400000"/>
               </a:tblGrid>
-              <a:tr h="370000">
+              <a:tr h="340000">
                 <a:tc>
                   <a:txBody>
                     <a:bodyPr/>
@@ -16729,7 +17372,7 @@
                       <a:pPr algn="l"/>
                       <a:r>
                         <a:rPr lang="en-US" sz="1400" dirty="0"/>
-                        <a:t>Siblings</a:t>
+                        <a:t>R</a:t>
                       </a:r>
                     </a:p>
                   </a:txBody>
@@ -16764,7 +17407,7 @@
                   <a:tcPr marL="68580" marR="68580" marT="0" marB="0" anchor="ctr"/>
                 </a:tc>
               </a:tr>
-              <a:tr h="370000">
+              <a:tr h="340000">
                 <a:tc>
                   <a:txBody>
                     <a:bodyPr/>
@@ -16774,6 +17417,50 @@
                       <a:r>
                         <a:rPr lang="en-US" sz="1400" dirty="0"/>
                         <a:t>0</a:t>
+                      </a:r>
+                    </a:p>
+                  </a:txBody>
+                  <a:tcPr marL="68580" marR="68580" marT="0" marB="0" anchor="ctr"/>
+                </a:tc>
+                <a:tc>
+                  <a:txBody>
+                    <a:bodyPr/>
+                    <a:lstStyle/>
+                    <a:p>
+                      <a:pPr algn="ctr"/>
+                      <a:r>
+                        <a:rPr lang="en-US" sz="1400" dirty="0"/>
+                        <a:t>2</a:t>
+                      </a:r>
+                    </a:p>
+                  </a:txBody>
+                  <a:tcPr marL="68580" marR="68580" marT="0" marB="0" anchor="ctr"/>
+                </a:tc>
+                <a:tc>
+                  <a:txBody>
+                    <a:bodyPr/>
+                    <a:lstStyle/>
+                    <a:p>
+                      <a:pPr algn="ctr"/>
+                      <a:r>
+                        <a:rPr lang="en-US" sz="1400" dirty="0"/>
+                        <a:t>0.20</a:t>
+                      </a:r>
+                    </a:p>
+                  </a:txBody>
+                  <a:tcPr marL="68580" marR="68580" marT="0" marB="0" anchor="ctr"/>
+                </a:tc>
+              </a:tr>
+              <a:tr h="340000">
+                <a:tc>
+                  <a:txBody>
+                    <a:bodyPr/>
+                    <a:lstStyle/>
+                    <a:p>
+                      <a:pPr algn="l"/>
+                      <a:r>
+                        <a:rPr lang="en-US" sz="1400" dirty="0"/>
+                        <a:t>1</a:t>
                       </a:r>
                     </a:p>
                   </a:txBody>
@@ -16801,50 +17488,6 @@
                       <a:pPr algn="ctr"/>
                       <a:r>
                         <a:rPr lang="en-US" sz="1400" dirty="0"/>
-                        <a:t>0.20</a:t>
-                      </a:r>
-                    </a:p>
-                  </a:txBody>
-                  <a:tcPr marL="68580" marR="68580" marT="0" marB="0" anchor="ctr"/>
-                </a:tc>
-              </a:tr>
-              <a:tr h="370000">
-                <a:tc>
-                  <a:txBody>
-                    <a:bodyPr/>
-                    <a:lstStyle/>
-                    <a:p>
-                      <a:pPr algn="l"/>
-                      <a:r>
-                        <a:rPr lang="en-US" sz="1400" dirty="0"/>
-                        <a:t>1</a:t>
-                      </a:r>
-                    </a:p>
-                  </a:txBody>
-                  <a:tcPr marL="68580" marR="68580" marT="0" marB="0" anchor="ctr"/>
-                </a:tc>
-                <a:tc>
-                  <a:txBody>
-                    <a:bodyPr/>
-                    <a:lstStyle/>
-                    <a:p>
-                      <a:pPr algn="ctr"/>
-                      <a:r>
-                        <a:rPr lang="en-US" sz="1400" dirty="0"/>
-                        <a:t>8</a:t>
-                      </a:r>
-                    </a:p>
-                  </a:txBody>
-                  <a:tcPr marL="68580" marR="68580" marT="0" marB="0" anchor="ctr"/>
-                </a:tc>
-                <a:tc>
-                  <a:txBody>
-                    <a:bodyPr/>
-                    <a:lstStyle/>
-                    <a:p>
-                      <a:pPr algn="ctr"/>
-                      <a:r>
-                        <a:rPr lang="en-US" sz="1400" dirty="0"/>
                         <a:t>0.40</a:t>
                       </a:r>
                     </a:p>
@@ -16852,7 +17495,7 @@
                   <a:tcPr marL="68580" marR="68580" marT="0" marB="0" anchor="ctr"/>
                 </a:tc>
               </a:tr>
-              <a:tr h="370000">
+              <a:tr h="340000">
                 <a:tc>
                   <a:txBody>
                     <a:bodyPr/>
@@ -16862,50 +17505,6 @@
                       <a:r>
                         <a:rPr lang="en-US" sz="1400" dirty="0"/>
                         <a:t>2</a:t>
-                      </a:r>
-                    </a:p>
-                  </a:txBody>
-                  <a:tcPr marL="68580" marR="68580" marT="0" marB="0" anchor="ctr"/>
-                </a:tc>
-                <a:tc>
-                  <a:txBody>
-                    <a:bodyPr/>
-                    <a:lstStyle/>
-                    <a:p>
-                      <a:pPr algn="ctr"/>
-                      <a:r>
-                        <a:rPr lang="en-US" sz="1400" dirty="0"/>
-                        <a:t>4</a:t>
-                      </a:r>
-                    </a:p>
-                  </a:txBody>
-                  <a:tcPr marL="68580" marR="68580" marT="0" marB="0" anchor="ctr"/>
-                </a:tc>
-                <a:tc>
-                  <a:txBody>
-                    <a:bodyPr/>
-                    <a:lstStyle/>
-                    <a:p>
-                      <a:pPr algn="ctr"/>
-                      <a:r>
-                        <a:rPr lang="en-US" sz="1400" dirty="0"/>
-                        <a:t>0.20</a:t>
-                      </a:r>
-                    </a:p>
-                  </a:txBody>
-                  <a:tcPr marL="68580" marR="68580" marT="0" marB="0" anchor="ctr"/>
-                </a:tc>
-              </a:tr>
-              <a:tr h="370000">
-                <a:tc>
-                  <a:txBody>
-                    <a:bodyPr/>
-                    <a:lstStyle/>
-                    <a:p>
-                      <a:pPr algn="l"/>
-                      <a:r>
-                        <a:rPr lang="en-US" sz="1400" dirty="0"/>
-                        <a:t>3</a:t>
                       </a:r>
                     </a:p>
                   </a:txBody>
@@ -16933,6 +17532,50 @@
                       <a:pPr algn="ctr"/>
                       <a:r>
                         <a:rPr lang="en-US" sz="1400" dirty="0"/>
+                        <a:t>0.20</a:t>
+                      </a:r>
+                    </a:p>
+                  </a:txBody>
+                  <a:tcPr marL="68580" marR="68580" marT="0" marB="0" anchor="ctr"/>
+                </a:tc>
+              </a:tr>
+              <a:tr h="340000">
+                <a:tc>
+                  <a:txBody>
+                    <a:bodyPr/>
+                    <a:lstStyle/>
+                    <a:p>
+                      <a:pPr algn="l"/>
+                      <a:r>
+                        <a:rPr lang="en-US" sz="1400" dirty="0"/>
+                        <a:t>3</a:t>
+                      </a:r>
+                    </a:p>
+                  </a:txBody>
+                  <a:tcPr marL="68580" marR="68580" marT="0" marB="0" anchor="ctr"/>
+                </a:tc>
+                <a:tc>
+                  <a:txBody>
+                    <a:bodyPr/>
+                    <a:lstStyle/>
+                    <a:p>
+                      <a:pPr algn="ctr"/>
+                      <a:r>
+                        <a:rPr lang="en-US" sz="1400" dirty="0"/>
+                        <a:t>1</a:t>
+                      </a:r>
+                    </a:p>
+                  </a:txBody>
+                  <a:tcPr marL="68580" marR="68580" marT="0" marB="0" anchor="ctr"/>
+                </a:tc>
+                <a:tc>
+                  <a:txBody>
+                    <a:bodyPr/>
+                    <a:lstStyle/>
+                    <a:p>
+                      <a:pPr algn="ctr"/>
+                      <a:r>
+                        <a:rPr lang="en-US" sz="1400" dirty="0"/>
                         <a:t>0.10</a:t>
                       </a:r>
                     </a:p>
@@ -16940,7 +17583,7 @@
                   <a:tcPr marL="68580" marR="68580" marT="0" marB="0" anchor="ctr"/>
                 </a:tc>
               </a:tr>
-              <a:tr h="370000">
+              <a:tr h="340000">
                 <a:tc>
                   <a:txBody>
                     <a:bodyPr/>
@@ -16977,58 +17620,14 @@
                       <a:pPr algn="ctr"/>
                       <a:r>
                         <a:rPr lang="en-US" sz="1400" dirty="0"/>
-                        <a:t>0.05</a:t>
+                        <a:t>0.10</a:t>
                       </a:r>
                     </a:p>
                   </a:txBody>
                   <a:tcPr marL="68580" marR="68580" marT="0" marB="0" anchor="ctr"/>
                 </a:tc>
               </a:tr>
-              <a:tr h="370000">
-                <a:tc>
-                  <a:txBody>
-                    <a:bodyPr/>
-                    <a:lstStyle/>
-                    <a:p>
-                      <a:pPr algn="l"/>
-                      <a:r>
-                        <a:rPr lang="en-US" sz="1400" dirty="0"/>
-                        <a:t>5</a:t>
-                      </a:r>
-                    </a:p>
-                  </a:txBody>
-                  <a:tcPr marL="68580" marR="68580" marT="0" marB="0" anchor="ctr"/>
-                </a:tc>
-                <a:tc>
-                  <a:txBody>
-                    <a:bodyPr/>
-                    <a:lstStyle/>
-                    <a:p>
-                      <a:pPr algn="ctr"/>
-                      <a:r>
-                        <a:rPr lang="en-US" sz="1400" dirty="0"/>
-                        <a:t>1</a:t>
-                      </a:r>
-                    </a:p>
-                  </a:txBody>
-                  <a:tcPr marL="68580" marR="68580" marT="0" marB="0" anchor="ctr"/>
-                </a:tc>
-                <a:tc>
-                  <a:txBody>
-                    <a:bodyPr/>
-                    <a:lstStyle/>
-                    <a:p>
-                      <a:pPr algn="ctr"/>
-                      <a:r>
-                        <a:rPr lang="en-US" sz="1400" dirty="0"/>
-                        <a:t>0.05</a:t>
-                      </a:r>
-                    </a:p>
-                  </a:txBody>
-                  <a:tcPr marL="68580" marR="68580" marT="0" marB="0" anchor="ctr"/>
-                </a:tc>
-              </a:tr>
-              <a:tr h="370000">
+              <a:tr h="340000">
                 <a:tc>
                   <a:txBody>
                     <a:bodyPr/>
@@ -17051,7 +17650,7 @@
                       <a:pPr algn="ctr"/>
                       <a:r>
                         <a:rPr lang="en-US" sz="1400" dirty="0"/>
-                        <a:t>20</a:t>
+                        <a:t>10</a:t>
                       </a:r>
                     </a:p>
                   </a:txBody>
@@ -17084,8 +17683,8 @@
         </p:nvSpPr>
         <p:spPr>
           <a:xfrm>
-            <a:off x="6400800" y="4970000"/>
-            <a:ext cx="4300000" cy="1400000"/>
+            <a:off x="6400800" y="4390000"/>
+            <a:ext cx="4300000" cy="1300000"/>
           </a:xfrm>
           <a:prstGeom prst="rect">
             <a:avLst/>
@@ -17093,7 +17692,7 @@
           <a:noFill/>
         </p:spPr>
         <p:txBody>
-          <a:bodyPr wrap="square">
+          <a:bodyPr wrap="square" lIns="0" tIns="0" rIns="0" bIns="0">
             <a:normAutofit/>
           </a:bodyPr>
           <a:lstStyle/>
@@ -17107,7 +17706,7 @@
                   <a:srgbClr val="C00000"/>
                 </a:solidFill>
               </a:rPr>
-              <a:t>Mode = 1. Median = 1 but the mean is 1.55: the mean is pulled above the median by the long right tail, so the distribution is skewed right.</a:t>
+              <a:t>Mode = 1. Median = 1 but the mean is 1.5: the mean is pulled above the median by the long right tail, so the distribution is skewed right.</a:t>
             </a:r>
           </a:p>
         </p:txBody>
@@ -17115,7 +17714,7 @@
     </p:spTree>
     <p:extLst>
       <p:ext uri="{BB962C8B-B14F-4D97-AF65-F5344CB8AC3E}">
-        <p14:creationId xmlns:p14="http://schemas.microsoft.com/office/powerpoint/2010/main" val="1517484004"/>
+        <p14:creationId xmlns:p14="http://schemas.microsoft.com/office/powerpoint/2010/main" val="1517484022"/>
       </p:ext>
     </p:extLst>
   </p:cSld>
@@ -17303,7 +17902,7 @@
           <a:noFill/>
         </p:spPr>
         <p:txBody>
-          <a:bodyPr wrap="square">
+          <a:bodyPr wrap="square" lIns="0" tIns="0" rIns="0" bIns="0">
             <a:normAutofit/>
           </a:bodyPr>
           <a:lstStyle/>
@@ -17313,7 +17912,7 @@
             </a:pPr>
             <a:r>
               <a:rPr lang="en-US" sz="1600" dirty="0"/>
-              <a:t>Fifteen observations of a continuous variable X:</a:t>
+              <a:t>Fifteen observations of a continuous variable, written as a set:</a:t>
             </a:r>
           </a:p>
           <a:p>
@@ -17327,7 +17926,7 @@
               <a:rPr lang="en-US" sz="1500" dirty="0">
                 <a:latin typeface="Consolas" panose="020B0609020204030204"/>
               </a:rPr>
-              <a:t>1.23  1.38  1.76  2.60  2.65</a:t>
+              <a:t>X = {1.23, 1.38, 1.76, 2.60, 2.65,</a:t>
             </a:r>
           </a:p>
           <a:p>
@@ -17338,7 +17937,7 @@
               <a:rPr lang="en-US" sz="1500" dirty="0">
                 <a:latin typeface="Consolas" panose="020B0609020204030204"/>
               </a:rPr>
-              <a:t>2.79  2.89  3.12  3.15  3.18</a:t>
+              <a:t>        2.79, 2.89, 3.12, 3.15, 3.18,</a:t>
             </a:r>
           </a:p>
           <a:p>
@@ -17349,7 +17948,7 @@
               <a:rPr lang="en-US" sz="1500" dirty="0">
                 <a:latin typeface="Consolas" panose="020B0609020204030204"/>
               </a:rPr>
-              <a:t>3.65  3.77  3.87  4.12  4.41</a:t>
+              <a:t>        3.65, 3.77, 3.87, 4.12, 4.41}</a:t>
             </a:r>
           </a:p>
           <a:p>
@@ -17361,7 +17960,7 @@
             </a:pPr>
             <a:r>
               <a:rPr lang="en-US" sz="1600" b="1" dirty="0"/>
-              <a:t>No two values are alike, so listing them gives 15 values of frequency 1 and tells us nothing. Group them into bins of width 0.5 starting at 1.0.</a:t>
+              <a:t>No two values are alike, so listing them gives 15 values of frequency 1 and tells us nothing. Group them into whole-number bins.</a:t>
             </a:r>
           </a:p>
         </p:txBody>
@@ -17375,8 +17974,8 @@
           <p:nvPr/>
         </p:nvGraphicFramePr>
         <p:xfrm>
-          <a:off x="6400800" y="1700000"/>
-          <a:ext cx="4300000" cy="3060000"/>
+          <a:off x="6400800" y="1620000"/>
+          <a:ext cx="4100000" cy="1920000"/>
         </p:xfrm>
         <a:graphic>
           <a:graphicData uri="http://schemas.openxmlformats.org/drawingml/2006/table">
@@ -17386,10 +17985,10 @@
               </a:tblPr>
               <a:tblGrid>
                 <a:gridCol w="1900000"/>
-                <a:gridCol w="1000000"/>
-                <a:gridCol w="1400000"/>
+                <a:gridCol w="900000"/>
+                <a:gridCol w="1300000"/>
               </a:tblGrid>
-              <a:tr h="340000">
+              <a:tr h="320000">
                 <a:tc>
                   <a:txBody>
                     <a:bodyPr/>
@@ -17433,7 +18032,7 @@
                   <a:tcPr marL="68580" marR="68580" marT="0" marB="0" anchor="ctr"/>
                 </a:tc>
               </a:tr>
-              <a:tr h="340000">
+              <a:tr h="320000">
                 <a:tc>
                   <a:txBody>
                     <a:bodyPr/>
@@ -17442,7 +18041,139 @@
                       <a:pPr algn="l"/>
                       <a:r>
                         <a:rPr lang="en-US" sz="1400" dirty="0"/>
-                        <a:t>1.0 &lt; X ≤ 1.5</a:t>
+                        <a:t>1 ≤ X &lt; 2</a:t>
+                      </a:r>
+                    </a:p>
+                  </a:txBody>
+                  <a:tcPr marL="68580" marR="68580" marT="0" marB="0" anchor="ctr"/>
+                </a:tc>
+                <a:tc>
+                  <a:txBody>
+                    <a:bodyPr/>
+                    <a:lstStyle/>
+                    <a:p>
+                      <a:pPr algn="ctr"/>
+                      <a:r>
+                        <a:rPr lang="en-US" sz="1400" dirty="0"/>
+                        <a:t>3</a:t>
+                      </a:r>
+                    </a:p>
+                  </a:txBody>
+                  <a:tcPr marL="68580" marR="68580" marT="0" marB="0" anchor="ctr"/>
+                </a:tc>
+                <a:tc>
+                  <a:txBody>
+                    <a:bodyPr/>
+                    <a:lstStyle/>
+                    <a:p>
+                      <a:pPr algn="ctr"/>
+                      <a:r>
+                        <a:rPr lang="en-US" sz="1400" dirty="0"/>
+                        <a:t>0.20</a:t>
+                      </a:r>
+                    </a:p>
+                  </a:txBody>
+                  <a:tcPr marL="68580" marR="68580" marT="0" marB="0" anchor="ctr"/>
+                </a:tc>
+              </a:tr>
+              <a:tr h="320000">
+                <a:tc>
+                  <a:txBody>
+                    <a:bodyPr/>
+                    <a:lstStyle/>
+                    <a:p>
+                      <a:pPr algn="l"/>
+                      <a:r>
+                        <a:rPr lang="en-US" sz="1400" dirty="0"/>
+                        <a:t>2 ≤ X &lt; 3</a:t>
+                      </a:r>
+                    </a:p>
+                  </a:txBody>
+                  <a:tcPr marL="68580" marR="68580" marT="0" marB="0" anchor="ctr"/>
+                </a:tc>
+                <a:tc>
+                  <a:txBody>
+                    <a:bodyPr/>
+                    <a:lstStyle/>
+                    <a:p>
+                      <a:pPr algn="ctr"/>
+                      <a:r>
+                        <a:rPr lang="en-US" sz="1400" dirty="0"/>
+                        <a:t>4</a:t>
+                      </a:r>
+                    </a:p>
+                  </a:txBody>
+                  <a:tcPr marL="68580" marR="68580" marT="0" marB="0" anchor="ctr"/>
+                </a:tc>
+                <a:tc>
+                  <a:txBody>
+                    <a:bodyPr/>
+                    <a:lstStyle/>
+                    <a:p>
+                      <a:pPr algn="ctr"/>
+                      <a:r>
+                        <a:rPr lang="en-US" sz="1400" dirty="0"/>
+                        <a:t>0.27</a:t>
+                      </a:r>
+                    </a:p>
+                  </a:txBody>
+                  <a:tcPr marL="68580" marR="68580" marT="0" marB="0" anchor="ctr"/>
+                </a:tc>
+              </a:tr>
+              <a:tr h="320000">
+                <a:tc>
+                  <a:txBody>
+                    <a:bodyPr/>
+                    <a:lstStyle/>
+                    <a:p>
+                      <a:pPr algn="l"/>
+                      <a:r>
+                        <a:rPr lang="en-US" sz="1400" dirty="0"/>
+                        <a:t>3 ≤ X &lt; 4</a:t>
+                      </a:r>
+                    </a:p>
+                  </a:txBody>
+                  <a:tcPr marL="68580" marR="68580" marT="0" marB="0" anchor="ctr"/>
+                </a:tc>
+                <a:tc>
+                  <a:txBody>
+                    <a:bodyPr/>
+                    <a:lstStyle/>
+                    <a:p>
+                      <a:pPr algn="ctr"/>
+                      <a:r>
+                        <a:rPr lang="en-US" sz="1400" dirty="0"/>
+                        <a:t>6</a:t>
+                      </a:r>
+                    </a:p>
+                  </a:txBody>
+                  <a:tcPr marL="68580" marR="68580" marT="0" marB="0" anchor="ctr"/>
+                </a:tc>
+                <a:tc>
+                  <a:txBody>
+                    <a:bodyPr/>
+                    <a:lstStyle/>
+                    <a:p>
+                      <a:pPr algn="ctr"/>
+                      <a:r>
+                        <a:rPr lang="en-US" sz="1400" dirty="0"/>
+                        <a:t>0.40</a:t>
+                      </a:r>
+                    </a:p>
+                  </a:txBody>
+                  <a:tcPr marL="68580" marR="68580" marT="0" marB="0" anchor="ctr"/>
+                </a:tc>
+              </a:tr>
+              <a:tr h="320000">
+                <a:tc>
+                  <a:txBody>
+                    <a:bodyPr/>
+                    <a:lstStyle/>
+                    <a:p>
+                      <a:pPr algn="l"/>
+                      <a:r>
+                        <a:rPr lang="en-US" sz="1400" dirty="0"/>
+                        <a:t>4 ≤ X &lt; 5</a:t>
                       </a:r>
                     </a:p>
                   </a:txBody>
@@ -17477,271 +18208,7 @@
                   <a:tcPr marL="68580" marR="68580" marT="0" marB="0" anchor="ctr"/>
                 </a:tc>
               </a:tr>
-              <a:tr h="340000">
-                <a:tc>
-                  <a:txBody>
-                    <a:bodyPr/>
-                    <a:lstStyle/>
-                    <a:p>
-                      <a:pPr algn="l"/>
-                      <a:r>
-                        <a:rPr lang="en-US" sz="1400" dirty="0"/>
-                        <a:t>1.5 &lt; X ≤ 2.0</a:t>
-                      </a:r>
-                    </a:p>
-                  </a:txBody>
-                  <a:tcPr marL="68580" marR="68580" marT="0" marB="0" anchor="ctr"/>
-                </a:tc>
-                <a:tc>
-                  <a:txBody>
-                    <a:bodyPr/>
-                    <a:lstStyle/>
-                    <a:p>
-                      <a:pPr algn="ctr"/>
-                      <a:r>
-                        <a:rPr lang="en-US" sz="1400" dirty="0"/>
-                        <a:t>1</a:t>
-                      </a:r>
-                    </a:p>
-                  </a:txBody>
-                  <a:tcPr marL="68580" marR="68580" marT="0" marB="0" anchor="ctr"/>
-                </a:tc>
-                <a:tc>
-                  <a:txBody>
-                    <a:bodyPr/>
-                    <a:lstStyle/>
-                    <a:p>
-                      <a:pPr algn="ctr"/>
-                      <a:r>
-                        <a:rPr lang="en-US" sz="1400" dirty="0"/>
-                        <a:t>0.07</a:t>
-                      </a:r>
-                    </a:p>
-                  </a:txBody>
-                  <a:tcPr marL="68580" marR="68580" marT="0" marB="0" anchor="ctr"/>
-                </a:tc>
-              </a:tr>
-              <a:tr h="340000">
-                <a:tc>
-                  <a:txBody>
-                    <a:bodyPr/>
-                    <a:lstStyle/>
-                    <a:p>
-                      <a:pPr algn="l"/>
-                      <a:r>
-                        <a:rPr lang="en-US" sz="1400" dirty="0"/>
-                        <a:t>2.0 &lt; X ≤ 2.5</a:t>
-                      </a:r>
-                    </a:p>
-                  </a:txBody>
-                  <a:tcPr marL="68580" marR="68580" marT="0" marB="0" anchor="ctr"/>
-                </a:tc>
-                <a:tc>
-                  <a:txBody>
-                    <a:bodyPr/>
-                    <a:lstStyle/>
-                    <a:p>
-                      <a:pPr algn="ctr"/>
-                      <a:r>
-                        <a:rPr lang="en-US" sz="1400" dirty="0"/>
-                        <a:t>0</a:t>
-                      </a:r>
-                    </a:p>
-                  </a:txBody>
-                  <a:tcPr marL="68580" marR="68580" marT="0" marB="0" anchor="ctr"/>
-                </a:tc>
-                <a:tc>
-                  <a:txBody>
-                    <a:bodyPr/>
-                    <a:lstStyle/>
-                    <a:p>
-                      <a:pPr algn="ctr"/>
-                      <a:r>
-                        <a:rPr lang="en-US" sz="1400" dirty="0"/>
-                        <a:t>0.00</a:t>
-                      </a:r>
-                    </a:p>
-                  </a:txBody>
-                  <a:tcPr marL="68580" marR="68580" marT="0" marB="0" anchor="ctr"/>
-                </a:tc>
-              </a:tr>
-              <a:tr h="340000">
-                <a:tc>
-                  <a:txBody>
-                    <a:bodyPr/>
-                    <a:lstStyle/>
-                    <a:p>
-                      <a:pPr algn="l"/>
-                      <a:r>
-                        <a:rPr lang="en-US" sz="1400" dirty="0"/>
-                        <a:t>2.5 &lt; X ≤ 3.0</a:t>
-                      </a:r>
-                    </a:p>
-                  </a:txBody>
-                  <a:tcPr marL="68580" marR="68580" marT="0" marB="0" anchor="ctr"/>
-                </a:tc>
-                <a:tc>
-                  <a:txBody>
-                    <a:bodyPr/>
-                    <a:lstStyle/>
-                    <a:p>
-                      <a:pPr algn="ctr"/>
-                      <a:r>
-                        <a:rPr lang="en-US" sz="1400" dirty="0"/>
-                        <a:t>4</a:t>
-                      </a:r>
-                    </a:p>
-                  </a:txBody>
-                  <a:tcPr marL="68580" marR="68580" marT="0" marB="0" anchor="ctr"/>
-                </a:tc>
-                <a:tc>
-                  <a:txBody>
-                    <a:bodyPr/>
-                    <a:lstStyle/>
-                    <a:p>
-                      <a:pPr algn="ctr"/>
-                      <a:r>
-                        <a:rPr lang="en-US" sz="1400" dirty="0"/>
-                        <a:t>0.27</a:t>
-                      </a:r>
-                    </a:p>
-                  </a:txBody>
-                  <a:tcPr marL="68580" marR="68580" marT="0" marB="0" anchor="ctr"/>
-                </a:tc>
-              </a:tr>
-              <a:tr h="340000">
-                <a:tc>
-                  <a:txBody>
-                    <a:bodyPr/>
-                    <a:lstStyle/>
-                    <a:p>
-                      <a:pPr algn="l"/>
-                      <a:r>
-                        <a:rPr lang="en-US" sz="1400" dirty="0"/>
-                        <a:t>3.0 &lt; X ≤ 3.5</a:t>
-                      </a:r>
-                    </a:p>
-                  </a:txBody>
-                  <a:tcPr marL="68580" marR="68580" marT="0" marB="0" anchor="ctr"/>
-                </a:tc>
-                <a:tc>
-                  <a:txBody>
-                    <a:bodyPr/>
-                    <a:lstStyle/>
-                    <a:p>
-                      <a:pPr algn="ctr"/>
-                      <a:r>
-                        <a:rPr lang="en-US" sz="1400" dirty="0"/>
-                        <a:t>3</a:t>
-                      </a:r>
-                    </a:p>
-                  </a:txBody>
-                  <a:tcPr marL="68580" marR="68580" marT="0" marB="0" anchor="ctr"/>
-                </a:tc>
-                <a:tc>
-                  <a:txBody>
-                    <a:bodyPr/>
-                    <a:lstStyle/>
-                    <a:p>
-                      <a:pPr algn="ctr"/>
-                      <a:r>
-                        <a:rPr lang="en-US" sz="1400" dirty="0"/>
-                        <a:t>0.20</a:t>
-                      </a:r>
-                    </a:p>
-                  </a:txBody>
-                  <a:tcPr marL="68580" marR="68580" marT="0" marB="0" anchor="ctr"/>
-                </a:tc>
-              </a:tr>
-              <a:tr h="340000">
-                <a:tc>
-                  <a:txBody>
-                    <a:bodyPr/>
-                    <a:lstStyle/>
-                    <a:p>
-                      <a:pPr algn="l"/>
-                      <a:r>
-                        <a:rPr lang="en-US" sz="1400" dirty="0"/>
-                        <a:t>3.5 &lt; X ≤ 4.0</a:t>
-                      </a:r>
-                    </a:p>
-                  </a:txBody>
-                  <a:tcPr marL="68580" marR="68580" marT="0" marB="0" anchor="ctr"/>
-                </a:tc>
-                <a:tc>
-                  <a:txBody>
-                    <a:bodyPr/>
-                    <a:lstStyle/>
-                    <a:p>
-                      <a:pPr algn="ctr"/>
-                      <a:r>
-                        <a:rPr lang="en-US" sz="1400" dirty="0"/>
-                        <a:t>3</a:t>
-                      </a:r>
-                    </a:p>
-                  </a:txBody>
-                  <a:tcPr marL="68580" marR="68580" marT="0" marB="0" anchor="ctr"/>
-                </a:tc>
-                <a:tc>
-                  <a:txBody>
-                    <a:bodyPr/>
-                    <a:lstStyle/>
-                    <a:p>
-                      <a:pPr algn="ctr"/>
-                      <a:r>
-                        <a:rPr lang="en-US" sz="1400" dirty="0"/>
-                        <a:t>0.20</a:t>
-                      </a:r>
-                    </a:p>
-                  </a:txBody>
-                  <a:tcPr marL="68580" marR="68580" marT="0" marB="0" anchor="ctr"/>
-                </a:tc>
-              </a:tr>
-              <a:tr h="340000">
-                <a:tc>
-                  <a:txBody>
-                    <a:bodyPr/>
-                    <a:lstStyle/>
-                    <a:p>
-                      <a:pPr algn="l"/>
-                      <a:r>
-                        <a:rPr lang="en-US" sz="1400" dirty="0"/>
-                        <a:t>4.0 &lt; X ≤ 4.5</a:t>
-                      </a:r>
-                    </a:p>
-                  </a:txBody>
-                  <a:tcPr marL="68580" marR="68580" marT="0" marB="0" anchor="ctr"/>
-                </a:tc>
-                <a:tc>
-                  <a:txBody>
-                    <a:bodyPr/>
-                    <a:lstStyle/>
-                    <a:p>
-                      <a:pPr algn="ctr"/>
-                      <a:r>
-                        <a:rPr lang="en-US" sz="1400" dirty="0"/>
-                        <a:t>2</a:t>
-                      </a:r>
-                    </a:p>
-                  </a:txBody>
-                  <a:tcPr marL="68580" marR="68580" marT="0" marB="0" anchor="ctr"/>
-                </a:tc>
-                <a:tc>
-                  <a:txBody>
-                    <a:bodyPr/>
-                    <a:lstStyle/>
-                    <a:p>
-                      <a:pPr algn="ctr"/>
-                      <a:r>
-                        <a:rPr lang="en-US" sz="1400" dirty="0"/>
-                        <a:t>0.13</a:t>
-                      </a:r>
-                    </a:p>
-                  </a:txBody>
-                  <a:tcPr marL="68580" marR="68580" marT="0" marB="0" anchor="ctr"/>
-                </a:tc>
-              </a:tr>
-              <a:tr h="340000">
+              <a:tr h="320000">
                 <a:tc>
                   <a:txBody>
                     <a:bodyPr/>
@@ -17789,6 +18256,385 @@
           </a:graphicData>
         </a:graphic>
       </p:graphicFrame>
+      <p:graphicFrame>
+        <p:nvGraphicFramePr>
+          <p:cNvPr id="6" name="Second binning"/>
+          <p:cNvGraphicFramePr>
+            <a:graphicFrameLocks noGrp="1"/>
+          </p:cNvGraphicFramePr>
+          <p:nvPr/>
+        </p:nvGraphicFramePr>
+        <p:xfrm>
+          <a:off x="6400800" y="3800000"/>
+          <a:ext cx="4100000" cy="2560000"/>
+        </p:xfrm>
+        <a:graphic>
+          <a:graphicData uri="http://schemas.openxmlformats.org/drawingml/2006/table">
+            <a:tbl>
+              <a:tblPr firstRow="1" bandRow="1">
+                <a:tableStyleId>{5C22544A-7EE6-4342-B048-85BDC9FD1C3A}</a:tableStyleId>
+              </a:tblPr>
+              <a:tblGrid>
+                <a:gridCol w="1900000"/>
+                <a:gridCol w="900000"/>
+                <a:gridCol w="1300000"/>
+              </a:tblGrid>
+              <a:tr h="320000">
+                <a:tc>
+                  <a:txBody>
+                    <a:bodyPr/>
+                    <a:lstStyle/>
+                    <a:p>
+                      <a:pPr algn="l"/>
+                      <a:r>
+                        <a:rPr lang="en-US" sz="1400" dirty="0"/>
+                        <a:t>Narrower bins</a:t>
+                      </a:r>
+                    </a:p>
+                  </a:txBody>
+                  <a:tcPr marL="68580" marR="68580" marT="0" marB="0" anchor="ctr"/>
+                </a:tc>
+                <a:tc>
+                  <a:txBody>
+                    <a:bodyPr/>
+                    <a:lstStyle/>
+                    <a:p>
+                      <a:pPr algn="ctr"/>
+                      <a:r>
+                        <a:rPr lang="en-US" sz="1400" dirty="0"/>
+                        <a:t>f</a:t>
+                      </a:r>
+                    </a:p>
+                  </a:txBody>
+                  <a:tcPr marL="68580" marR="68580" marT="0" marB="0" anchor="ctr"/>
+                </a:tc>
+                <a:tc>
+                  <a:txBody>
+                    <a:bodyPr/>
+                    <a:lstStyle/>
+                    <a:p>
+                      <a:pPr algn="ctr"/>
+                      <a:r>
+                        <a:rPr lang="en-US" sz="1400" dirty="0"/>
+                        <a:t>Rel. freq.</a:t>
+                      </a:r>
+                    </a:p>
+                  </a:txBody>
+                  <a:tcPr marL="68580" marR="68580" marT="0" marB="0" anchor="ctr"/>
+                </a:tc>
+              </a:tr>
+              <a:tr h="320000">
+                <a:tc>
+                  <a:txBody>
+                    <a:bodyPr/>
+                    <a:lstStyle/>
+                    <a:p>
+                      <a:pPr algn="l"/>
+                      <a:r>
+                        <a:rPr lang="en-US" sz="1400" dirty="0"/>
+                        <a:t>1.0 ≤ X &lt; 1.5</a:t>
+                      </a:r>
+                    </a:p>
+                  </a:txBody>
+                  <a:tcPr marL="68580" marR="68580" marT="0" marB="0" anchor="ctr"/>
+                </a:tc>
+                <a:tc>
+                  <a:txBody>
+                    <a:bodyPr/>
+                    <a:lstStyle/>
+                    <a:p>
+                      <a:pPr algn="ctr"/>
+                      <a:r>
+                        <a:rPr lang="en-US" sz="1400" dirty="0"/>
+                        <a:t>2</a:t>
+                      </a:r>
+                    </a:p>
+                  </a:txBody>
+                  <a:tcPr marL="68580" marR="68580" marT="0" marB="0" anchor="ctr"/>
+                </a:tc>
+                <a:tc>
+                  <a:txBody>
+                    <a:bodyPr/>
+                    <a:lstStyle/>
+                    <a:p>
+                      <a:pPr algn="ctr"/>
+                      <a:r>
+                        <a:rPr lang="en-US" sz="1400" dirty="0"/>
+                        <a:t>0.13</a:t>
+                      </a:r>
+                    </a:p>
+                  </a:txBody>
+                  <a:tcPr marL="68580" marR="68580" marT="0" marB="0" anchor="ctr"/>
+                </a:tc>
+              </a:tr>
+              <a:tr h="320000">
+                <a:tc>
+                  <a:txBody>
+                    <a:bodyPr/>
+                    <a:lstStyle/>
+                    <a:p>
+                      <a:pPr algn="l"/>
+                      <a:r>
+                        <a:rPr lang="en-US" sz="1400" dirty="0"/>
+                        <a:t>1.5 ≤ X &lt; 2.0</a:t>
+                      </a:r>
+                    </a:p>
+                  </a:txBody>
+                  <a:tcPr marL="68580" marR="68580" marT="0" marB="0" anchor="ctr"/>
+                </a:tc>
+                <a:tc>
+                  <a:txBody>
+                    <a:bodyPr/>
+                    <a:lstStyle/>
+                    <a:p>
+                      <a:pPr algn="ctr"/>
+                      <a:r>
+                        <a:rPr lang="en-US" sz="1400" dirty="0"/>
+                        <a:t>1</a:t>
+                      </a:r>
+                    </a:p>
+                  </a:txBody>
+                  <a:tcPr marL="68580" marR="68580" marT="0" marB="0" anchor="ctr"/>
+                </a:tc>
+                <a:tc>
+                  <a:txBody>
+                    <a:bodyPr/>
+                    <a:lstStyle/>
+                    <a:p>
+                      <a:pPr algn="ctr"/>
+                      <a:r>
+                        <a:rPr lang="en-US" sz="1400" dirty="0"/>
+                        <a:t>0.07</a:t>
+                      </a:r>
+                    </a:p>
+                  </a:txBody>
+                  <a:tcPr marL="68580" marR="68580" marT="0" marB="0" anchor="ctr"/>
+                </a:tc>
+              </a:tr>
+              <a:tr h="320000">
+                <a:tc>
+                  <a:txBody>
+                    <a:bodyPr/>
+                    <a:lstStyle/>
+                    <a:p>
+                      <a:pPr algn="l"/>
+                      <a:r>
+                        <a:rPr lang="en-US" sz="1400" dirty="0"/>
+                        <a:t>2.0 ≤ X &lt; 2.5</a:t>
+                      </a:r>
+                    </a:p>
+                  </a:txBody>
+                  <a:tcPr marL="68580" marR="68580" marT="0" marB="0" anchor="ctr"/>
+                </a:tc>
+                <a:tc>
+                  <a:txBody>
+                    <a:bodyPr/>
+                    <a:lstStyle/>
+                    <a:p>
+                      <a:pPr algn="ctr"/>
+                      <a:r>
+                        <a:rPr lang="en-US" sz="1400" dirty="0"/>
+                        <a:t>0</a:t>
+                      </a:r>
+                    </a:p>
+                  </a:txBody>
+                  <a:tcPr marL="68580" marR="68580" marT="0" marB="0" anchor="ctr"/>
+                </a:tc>
+                <a:tc>
+                  <a:txBody>
+                    <a:bodyPr/>
+                    <a:lstStyle/>
+                    <a:p>
+                      <a:pPr algn="ctr"/>
+                      <a:r>
+                        <a:rPr lang="en-US" sz="1400" dirty="0"/>
+                        <a:t>0.00</a:t>
+                      </a:r>
+                    </a:p>
+                  </a:txBody>
+                  <a:tcPr marL="68580" marR="68580" marT="0" marB="0" anchor="ctr"/>
+                </a:tc>
+              </a:tr>
+              <a:tr h="320000">
+                <a:tc>
+                  <a:txBody>
+                    <a:bodyPr/>
+                    <a:lstStyle/>
+                    <a:p>
+                      <a:pPr algn="l"/>
+                      <a:r>
+                        <a:rPr lang="en-US" sz="1400" dirty="0"/>
+                        <a:t>2.5 ≤ X &lt; 3.0</a:t>
+                      </a:r>
+                    </a:p>
+                  </a:txBody>
+                  <a:tcPr marL="68580" marR="68580" marT="0" marB="0" anchor="ctr"/>
+                </a:tc>
+                <a:tc>
+                  <a:txBody>
+                    <a:bodyPr/>
+                    <a:lstStyle/>
+                    <a:p>
+                      <a:pPr algn="ctr"/>
+                      <a:r>
+                        <a:rPr lang="en-US" sz="1400" dirty="0"/>
+                        <a:t>4</a:t>
+                      </a:r>
+                    </a:p>
+                  </a:txBody>
+                  <a:tcPr marL="68580" marR="68580" marT="0" marB="0" anchor="ctr"/>
+                </a:tc>
+                <a:tc>
+                  <a:txBody>
+                    <a:bodyPr/>
+                    <a:lstStyle/>
+                    <a:p>
+                      <a:pPr algn="ctr"/>
+                      <a:r>
+                        <a:rPr lang="en-US" sz="1400" dirty="0"/>
+                        <a:t>0.27</a:t>
+                      </a:r>
+                    </a:p>
+                  </a:txBody>
+                  <a:tcPr marL="68580" marR="68580" marT="0" marB="0" anchor="ctr"/>
+                </a:tc>
+              </a:tr>
+              <a:tr h="320000">
+                <a:tc>
+                  <a:txBody>
+                    <a:bodyPr/>
+                    <a:lstStyle/>
+                    <a:p>
+                      <a:pPr algn="l"/>
+                      <a:r>
+                        <a:rPr lang="en-US" sz="1400" dirty="0"/>
+                        <a:t>3.0 ≤ X &lt; 3.5</a:t>
+                      </a:r>
+                    </a:p>
+                  </a:txBody>
+                  <a:tcPr marL="68580" marR="68580" marT="0" marB="0" anchor="ctr"/>
+                </a:tc>
+                <a:tc>
+                  <a:txBody>
+                    <a:bodyPr/>
+                    <a:lstStyle/>
+                    <a:p>
+                      <a:pPr algn="ctr"/>
+                      <a:r>
+                        <a:rPr lang="en-US" sz="1400" dirty="0"/>
+                        <a:t>3</a:t>
+                      </a:r>
+                    </a:p>
+                  </a:txBody>
+                  <a:tcPr marL="68580" marR="68580" marT="0" marB="0" anchor="ctr"/>
+                </a:tc>
+                <a:tc>
+                  <a:txBody>
+                    <a:bodyPr/>
+                    <a:lstStyle/>
+                    <a:p>
+                      <a:pPr algn="ctr"/>
+                      <a:r>
+                        <a:rPr lang="en-US" sz="1400" dirty="0"/>
+                        <a:t>0.20</a:t>
+                      </a:r>
+                    </a:p>
+                  </a:txBody>
+                  <a:tcPr marL="68580" marR="68580" marT="0" marB="0" anchor="ctr"/>
+                </a:tc>
+              </a:tr>
+              <a:tr h="320000">
+                <a:tc>
+                  <a:txBody>
+                    <a:bodyPr/>
+                    <a:lstStyle/>
+                    <a:p>
+                      <a:pPr algn="l"/>
+                      <a:r>
+                        <a:rPr lang="en-US" sz="1400" dirty="0"/>
+                        <a:t>3.5 ≤ X &lt; 4.0</a:t>
+                      </a:r>
+                    </a:p>
+                  </a:txBody>
+                  <a:tcPr marL="68580" marR="68580" marT="0" marB="0" anchor="ctr"/>
+                </a:tc>
+                <a:tc>
+                  <a:txBody>
+                    <a:bodyPr/>
+                    <a:lstStyle/>
+                    <a:p>
+                      <a:pPr algn="ctr"/>
+                      <a:r>
+                        <a:rPr lang="en-US" sz="1400" dirty="0"/>
+                        <a:t>3</a:t>
+                      </a:r>
+                    </a:p>
+                  </a:txBody>
+                  <a:tcPr marL="68580" marR="68580" marT="0" marB="0" anchor="ctr"/>
+                </a:tc>
+                <a:tc>
+                  <a:txBody>
+                    <a:bodyPr/>
+                    <a:lstStyle/>
+                    <a:p>
+                      <a:pPr algn="ctr"/>
+                      <a:r>
+                        <a:rPr lang="en-US" sz="1400" dirty="0"/>
+                        <a:t>0.20</a:t>
+                      </a:r>
+                    </a:p>
+                  </a:txBody>
+                  <a:tcPr marL="68580" marR="68580" marT="0" marB="0" anchor="ctr"/>
+                </a:tc>
+              </a:tr>
+              <a:tr h="320000">
+                <a:tc>
+                  <a:txBody>
+                    <a:bodyPr/>
+                    <a:lstStyle/>
+                    <a:p>
+                      <a:pPr algn="l"/>
+                      <a:r>
+                        <a:rPr lang="en-US" sz="1400" dirty="0"/>
+                        <a:t>4.0 ≤ X &lt; 4.5</a:t>
+                      </a:r>
+                    </a:p>
+                  </a:txBody>
+                  <a:tcPr marL="68580" marR="68580" marT="0" marB="0" anchor="ctr"/>
+                </a:tc>
+                <a:tc>
+                  <a:txBody>
+                    <a:bodyPr/>
+                    <a:lstStyle/>
+                    <a:p>
+                      <a:pPr algn="ctr"/>
+                      <a:r>
+                        <a:rPr lang="en-US" sz="1400" dirty="0"/>
+                        <a:t>2</a:t>
+                      </a:r>
+                    </a:p>
+                  </a:txBody>
+                  <a:tcPr marL="68580" marR="68580" marT="0" marB="0" anchor="ctr"/>
+                </a:tc>
+                <a:tc>
+                  <a:txBody>
+                    <a:bodyPr/>
+                    <a:lstStyle/>
+                    <a:p>
+                      <a:pPr algn="ctr"/>
+                      <a:r>
+                        <a:rPr lang="en-US" sz="1400" dirty="0"/>
+                        <a:t>0.13</a:t>
+                      </a:r>
+                    </a:p>
+                  </a:txBody>
+                  <a:tcPr marL="68580" marR="68580" marT="0" marB="0" anchor="ctr"/>
+                </a:tc>
+              </a:tr>
+            </a:tbl>
+          </a:graphicData>
+        </a:graphic>
+      </p:graphicFrame>
       <p:sp>
         <p:nvSpPr>
           <p:cNvPr id="5" name="Takeaway"/>
@@ -17797,8 +18643,8 @@
         </p:nvSpPr>
         <p:spPr>
           <a:xfrm>
-            <a:off x="6400800" y="5020000"/>
-            <a:ext cx="4300000" cy="1400000"/>
+            <a:off x="838200" y="4150000"/>
+            <a:ext cx="5250000" cy="1900000"/>
           </a:xfrm>
           <a:prstGeom prst="rect">
             <a:avLst/>
@@ -17806,7 +18652,7 @@
           <a:noFill/>
         </p:spPr>
         <p:txBody>
-          <a:bodyPr wrap="square">
+          <a:bodyPr wrap="square" lIns="0" tIns="0" rIns="0" bIns="0">
             <a:normAutofit/>
           </a:bodyPr>
           <a:lstStyle/>
@@ -17820,7 +18666,23 @@
                   <a:srgbClr val="C00000"/>
                 </a:solidFill>
               </a:rPr>
-              <a:t>The empty bin is information: the values fall into two clusters. Next, the same procedure on real data – 272 Old Faithful eruptions.</a:t>
+              <a:t>Bin width is a choice, not a property of the data. Halving it splits the middle and exposes an empty bin: the values fall into two clusters.</a:t>
+            </a:r>
+          </a:p>
+          <a:p>
+            <a:pPr marL="0" indent="0">
+              <a:spcBef>
+                <a:spcPts val="400"/>
+              </a:spcBef>
+              <a:buNone/>
+            </a:pPr>
+            <a:r>
+              <a:rPr lang="en-US" sz="1500" b="1" dirty="0">
+                <a:solidFill>
+                  <a:srgbClr val="C00000"/>
+                </a:solidFill>
+              </a:rPr>
+              <a:t>Next: the same procedure on 272 Old Faithful eruptions.</a:t>
             </a:r>
           </a:p>
         </p:txBody>
@@ -17828,7 +18690,7 @@
     </p:spTree>
     <p:extLst>
       <p:ext uri="{BB962C8B-B14F-4D97-AF65-F5344CB8AC3E}">
-        <p14:creationId xmlns:p14="http://schemas.microsoft.com/office/powerpoint/2010/main" val="1517484005"/>
+        <p14:creationId xmlns:p14="http://schemas.microsoft.com/office/powerpoint/2010/main" val="1517484023"/>
       </p:ext>
     </p:extLst>
   </p:cSld>
@@ -17914,6 +18776,51 @@
                                           </p:stCondLst>
                                         </p:cTn>
                                         <p:tgtEl>
+                                          <p:spTgt spid="6"/>
+                                        </p:tgtEl>
+                                        <p:attrNameLst>
+                                          <p:attrName>style.visibility</p:attrName>
+                                        </p:attrNameLst>
+                                      </p:cBhvr>
+                                      <p:to>
+                                        <p:strVal val="visible"/>
+                                      </p:to>
+                                    </p:set>
+                                  </p:childTnLst>
+                                </p:cTn>
+                              </p:par>
+                            </p:childTnLst>
+                          </p:cTn>
+                        </p:par>
+                      </p:childTnLst>
+                    </p:cTn>
+                  </p:par>
+                  <p:par>
+                    <p:cTn id="11" fill="hold">
+                      <p:stCondLst>
+                        <p:cond delay="indefinite"/>
+                      </p:stCondLst>
+                      <p:childTnLst>
+                        <p:par>
+                          <p:cTn id="12" fill="hold">
+                            <p:stCondLst>
+                              <p:cond delay="0"/>
+                            </p:stCondLst>
+                            <p:childTnLst>
+                              <p:par>
+                                <p:cTn id="13" presetID="1" presetClass="entr" presetSubtype="0" fill="hold" nodeType="clickEffect">
+                                  <p:stCondLst>
+                                    <p:cond delay="0"/>
+                                  </p:stCondLst>
+                                  <p:childTnLst>
+                                    <p:set>
+                                      <p:cBhvr>
+                                        <p:cTn id="14" dur="1" fill="hold">
+                                          <p:stCondLst>
+                                            <p:cond delay="0"/>
+                                          </p:stCondLst>
+                                        </p:cTn>
+                                        <p:tgtEl>
                                           <p:spTgt spid="5"/>
                                         </p:tgtEl>
                                         <p:attrNameLst>
@@ -18007,8 +18914,8 @@
         </p:nvSpPr>
         <p:spPr>
           <a:xfrm>
-            <a:off x="1200150" y="1600200"/>
-            <a:ext cx="9800000" cy="800000"/>
+            <a:off x="838200" y="1560000"/>
+            <a:ext cx="10515600" cy="700000"/>
           </a:xfrm>
           <a:prstGeom prst="rect">
             <a:avLst/>
@@ -18016,7 +18923,7 @@
           <a:noFill/>
         </p:spPr>
         <p:txBody>
-          <a:bodyPr wrap="square">
+          <a:bodyPr wrap="square" lIns="0" tIns="0" rIns="0" bIns="0">
             <a:normAutofit/>
           </a:bodyPr>
           <a:lstStyle/>
@@ -18025,7 +18932,7 @@
               <a:buNone/>
             </a:pPr>
             <a:r>
-              <a:rPr lang="en-US" sz="1800" dirty="0"/>
+              <a:rPr lang="en-US" sz="1700" dirty="0"/>
               <a:t>In one of Gregor Mendel’s classic studies he bred 8,023 pea plants and recorded the color of the peas – the seeds – that each plant produced.</a:t>
             </a:r>
           </a:p>
@@ -18047,8 +18954,8 @@
         </p:blipFill>
         <p:spPr>
           <a:xfrm>
-            <a:off x="2438400" y="2620000"/>
-            <a:ext cx="7315200" cy="2479040"/>
+            <a:off x="838200" y="2750000"/>
+            <a:ext cx="5486400" cy="1859664"/>
           </a:xfrm>
           <a:prstGeom prst="rect">
             <a:avLst/>
@@ -18057,14 +18964,103 @@
       </p:pic>
       <p:sp>
         <p:nvSpPr>
-          <p:cNvPr id="5" name="Payoff"/>
+          <p:cNvPr id="5" name="Genetics"/>
+          <p:cNvSpPr/>
+          <p:nvPr/>
+        </p:nvSpPr>
+        <p:spPr>
+          <a:xfrm>
+            <a:off x="6650000" y="2420000"/>
+            <a:ext cx="4703800" cy="2550000"/>
+          </a:xfrm>
+          <a:prstGeom prst="roundRect">
+            <a:avLst>
+              <a:gd name="adj" fmla="val 4000"/>
+            </a:avLst>
+          </a:prstGeom>
+          <a:solidFill>
+            <a:srgbClr val="F2F6FC"/>
+          </a:solidFill>
+          <a:ln w="19050">
+            <a:solidFill>
+              <a:schemeClr val="accent1"/>
+            </a:solidFill>
+          </a:ln>
+        </p:spPr>
+        <p:txBody>
+          <a:bodyPr lIns="205740" tIns="160020" rIns="205740" bIns="114300">
+            <a:normAutofit/>
+          </a:bodyPr>
+          <a:lstStyle/>
+          <a:p>
+            <a:pPr marL="0" indent="0">
+              <a:buNone/>
+            </a:pPr>
+            <a:r>
+              <a:rPr lang="en-US" sz="1600" b="1" dirty="0"/>
+              <a:t>Pea color is set by a single gene.</a:t>
+            </a:r>
+          </a:p>
+          <a:p>
+            <a:pPr marL="0" indent="0">
+              <a:spcBef>
+                <a:spcPts val="400"/>
+              </a:spcBef>
+              <a:buNone/>
+            </a:pPr>
+            <a:r>
+              <a:rPr lang="en-US" sz="1600" dirty="0"/>
+              <a:t>Yellow (Y) is </a:t>
+            </a:r>
+            <a:r>
+              <a:rPr lang="en-US" sz="1600" b="1" dirty="0">
+                <a:solidFill>
+                  <a:srgbClr val="4472C4"/>
+                </a:solidFill>
+              </a:rPr>
+              <a:t>dominant</a:t>
+            </a:r>
+            <a:r>
+              <a:rPr lang="en-US" sz="1600" dirty="0"/>
+              <a:t>; green (y) is </a:t>
+            </a:r>
+            <a:r>
+              <a:rPr lang="en-US" sz="1600" b="1" dirty="0">
+                <a:solidFill>
+                  <a:srgbClr val="4472C4"/>
+                </a:solidFill>
+              </a:rPr>
+              <a:t>recessive</a:t>
+            </a:r>
+            <a:r>
+              <a:rPr lang="en-US" sz="1600" dirty="0"/>
+              <a:t>. A plant is green only if it inherits y from both parents.</a:t>
+            </a:r>
+          </a:p>
+          <a:p>
+            <a:pPr marL="0" indent="0">
+              <a:spcBef>
+                <a:spcPts val="400"/>
+              </a:spcBef>
+              <a:buNone/>
+            </a:pPr>
+            <a:r>
+              <a:rPr lang="en-US" sz="1600" dirty="0"/>
+              <a:t>Cross two Yy plants and the offspring are YY, Yy, yY, yy in equal proportion – and only yy shows green. So the theory predicts 3 yellow to every 1 green.</a:t>
+            </a:r>
+          </a:p>
+        </p:txBody>
+      </p:sp>
+      <p:sp>
+        <p:nvSpPr>
+          <p:cNvPr id="6" name="Payoff"/>
           <p:cNvSpPr txBox="1"/>
           <p:nvPr/>
         </p:nvSpPr>
         <p:spPr>
           <a:xfrm>
-            <a:off x="1200150" y="5300000"/>
-            <a:ext cx="9800000" cy="900000"/>
+            <a:off x="838200" y="5450000"/>
+            <a:ext cx="10515600" cy="900000"/>
           </a:xfrm>
           <a:prstGeom prst="rect">
             <a:avLst/>
@@ -18072,7 +19068,7 @@
           <a:noFill/>
         </p:spPr>
         <p:txBody>
-          <a:bodyPr wrap="square">
+          <a:bodyPr wrap="square" lIns="0" tIns="0" rIns="0" bIns="0">
             <a:normAutofit/>
           </a:bodyPr>
           <a:lstStyle/>
@@ -18081,12 +19077,12 @@
               <a:buNone/>
             </a:pPr>
             <a:r>
-              <a:rPr lang="en-US" sz="1800" b="1" dirty="0">
+              <a:rPr lang="en-US" sz="1700" b="1" dirty="0">
                 <a:solidFill>
                   <a:srgbClr val="C00000"/>
                 </a:solidFill>
               </a:rPr>
-              <a:t>The relative frequencies are almost exactly 3/4 and 1/4 – the 3:1 ratio Mendel’s theory of inheritance predicts. A frequency table is doing real scientific work here.</a:t>
+              <a:t>Mendel counted 0.751 and 0.249 – almost exactly 3/4 and 1/4. A frequency table is doing real scientific work here.</a:t>
             </a:r>
           </a:p>
         </p:txBody>
@@ -18094,7 +19090,7 @@
     </p:spTree>
     <p:extLst>
       <p:ext uri="{BB962C8B-B14F-4D97-AF65-F5344CB8AC3E}">
-        <p14:creationId xmlns:p14="http://schemas.microsoft.com/office/powerpoint/2010/main" val="1517484006"/>
+        <p14:creationId xmlns:p14="http://schemas.microsoft.com/office/powerpoint/2010/main" val="1517484021"/>
       </p:ext>
     </p:extLst>
   </p:cSld>
@@ -18136,6 +19132,51 @@
                                         </p:cTn>
                                         <p:tgtEl>
                                           <p:spTgt spid="5"/>
+                                        </p:tgtEl>
+                                        <p:attrNameLst>
+                                          <p:attrName>style.visibility</p:attrName>
+                                        </p:attrNameLst>
+                                      </p:cBhvr>
+                                      <p:to>
+                                        <p:strVal val="visible"/>
+                                      </p:to>
+                                    </p:set>
+                                  </p:childTnLst>
+                                </p:cTn>
+                              </p:par>
+                            </p:childTnLst>
+                          </p:cTn>
+                        </p:par>
+                      </p:childTnLst>
+                    </p:cTn>
+                  </p:par>
+                  <p:par>
+                    <p:cTn id="7" fill="hold">
+                      <p:stCondLst>
+                        <p:cond delay="indefinite"/>
+                      </p:stCondLst>
+                      <p:childTnLst>
+                        <p:par>
+                          <p:cTn id="8" fill="hold">
+                            <p:stCondLst>
+                              <p:cond delay="0"/>
+                            </p:stCondLst>
+                            <p:childTnLst>
+                              <p:par>
+                                <p:cTn id="9" presetID="1" presetClass="entr" presetSubtype="0" fill="hold" nodeType="clickEffect">
+                                  <p:stCondLst>
+                                    <p:cond delay="0"/>
+                                  </p:stCondLst>
+                                  <p:childTnLst>
+                                    <p:set>
+                                      <p:cBhvr>
+                                        <p:cTn id="10" dur="1" fill="hold">
+                                          <p:stCondLst>
+                                            <p:cond delay="0"/>
+                                          </p:stCondLst>
+                                        </p:cTn>
+                                        <p:tgtEl>
+                                          <p:spTgt spid="6"/>
                                         </p:tgtEl>
                                         <p:attrNameLst>
                                           <p:attrName>style.visibility</p:attrName>
@@ -18228,8 +19269,8 @@
         </p:nvSpPr>
         <p:spPr>
           <a:xfrm>
-            <a:off x="838200" y="1650000"/>
-            <a:ext cx="10515600" cy="1450000"/>
+            <a:off x="838200" y="1560000"/>
+            <a:ext cx="10515600" cy="1230000"/>
           </a:xfrm>
           <a:prstGeom prst="roundRect">
             <a:avLst>
@@ -18255,7 +19296,7 @@
               <a:buNone/>
             </a:pPr>
             <a:r>
-              <a:rPr lang="en-US" sz="1800" b="1" dirty="0">
+              <a:rPr lang="en-US" sz="1700" b="1" dirty="0">
                 <a:solidFill>
                   <a:srgbClr val="4472C4"/>
                 </a:solidFill>
@@ -18263,8 +19304,8 @@
               <a:t>1   </a:t>
             </a:r>
             <a:r>
-              <a:rPr lang="en-US" sz="1800" b="1" dirty="0"/>
-              <a:t>What are the three arms of statistics?</a:t>
+              <a:rPr lang="en-US" sz="1700" b="1" dirty="0"/>
+              <a:t>What do we call the way we collect the data?</a:t>
             </a:r>
           </a:p>
         </p:txBody>
@@ -18277,8 +19318,8 @@
         </p:nvSpPr>
         <p:spPr>
           <a:xfrm>
-            <a:off x="1066800" y="2290000"/>
-            <a:ext cx="10058400" cy="718560"/>
+            <a:off x="1066800" y="2140000"/>
+            <a:ext cx="10058400" cy="558560"/>
           </a:xfrm>
           <a:prstGeom prst="rect">
             <a:avLst/>
@@ -18295,12 +19336,12 @@
               <a:buNone/>
             </a:pPr>
             <a:r>
-              <a:rPr lang="en-US" sz="1600" dirty="0">
+              <a:rPr lang="en-US" sz="1500" dirty="0">
                 <a:solidFill>
                   <a:srgbClr val="C00000"/>
                 </a:solidFill>
               </a:rPr>
-              <a:t>Design, description and inference.</a:t>
+              <a:t>The sampling design.</a:t>
             </a:r>
           </a:p>
         </p:txBody>
@@ -18313,8 +19354,8 @@
         </p:nvSpPr>
         <p:spPr>
           <a:xfrm>
-            <a:off x="838200" y="3300000"/>
-            <a:ext cx="10515600" cy="1450000"/>
+            <a:off x="838200" y="2870000"/>
+            <a:ext cx="10515600" cy="1230000"/>
           </a:xfrm>
           <a:prstGeom prst="roundRect">
             <a:avLst>
@@ -18340,7 +19381,7 @@
               <a:buNone/>
             </a:pPr>
             <a:r>
-              <a:rPr lang="en-US" sz="1800" b="1" dirty="0">
+              <a:rPr lang="en-US" sz="1700" b="1" dirty="0">
                 <a:solidFill>
                   <a:srgbClr val="4472C4"/>
                 </a:solidFill>
@@ -18348,8 +19389,8 @@
               <a:t>2   </a:t>
             </a:r>
             <a:r>
-              <a:rPr lang="en-US" sz="1800" b="1" dirty="0"/>
-              <a:t>Which one comes first, and why?</a:t>
+              <a:rPr lang="en-US" sz="1700" b="1" dirty="0"/>
+              <a:t>What are the three arms of statistics?</a:t>
             </a:r>
           </a:p>
         </p:txBody>
@@ -18362,8 +19403,8 @@
         </p:nvSpPr>
         <p:spPr>
           <a:xfrm>
-            <a:off x="1066800" y="3940000"/>
-            <a:ext cx="10058400" cy="718560"/>
+            <a:off x="1066800" y="3450000"/>
+            <a:ext cx="10058400" cy="558560"/>
           </a:xfrm>
           <a:prstGeom prst="rect">
             <a:avLst/>
@@ -18380,12 +19421,12 @@
               <a:buNone/>
             </a:pPr>
             <a:r>
-              <a:rPr lang="en-US" sz="1600" dirty="0">
+              <a:rPr lang="en-US" sz="1500" dirty="0">
                 <a:solidFill>
                   <a:srgbClr val="C00000"/>
                 </a:solidFill>
               </a:rPr>
-              <a:t>Design – how we plan to collect the data, settled before any data exists. No amount of description or inference repairs a bad design.</a:t>
+              <a:t>Design, description and inference.</a:t>
             </a:r>
           </a:p>
         </p:txBody>
@@ -18398,8 +19439,8 @@
         </p:nvSpPr>
         <p:spPr>
           <a:xfrm>
-            <a:off x="838200" y="4950000"/>
-            <a:ext cx="10515600" cy="1450000"/>
+            <a:off x="838200" y="4180000"/>
+            <a:ext cx="10515600" cy="1230000"/>
           </a:xfrm>
           <a:prstGeom prst="roundRect">
             <a:avLst>
@@ -18425,7 +19466,7 @@
               <a:buNone/>
             </a:pPr>
             <a:r>
-              <a:rPr lang="en-US" sz="1800" b="1" dirty="0">
+              <a:rPr lang="en-US" sz="1700" b="1" dirty="0">
                 <a:solidFill>
                   <a:srgbClr val="4472C4"/>
                 </a:solidFill>
@@ -18433,8 +19474,8 @@
               <a:t>3   </a:t>
             </a:r>
             <a:r>
-              <a:rPr lang="en-US" sz="1800" b="1" dirty="0"/>
-              <a:t>What is an estimate?</a:t>
+              <a:rPr lang="en-US" sz="1700" b="1" dirty="0"/>
+              <a:t>Which one comes first, and why?</a:t>
             </a:r>
           </a:p>
         </p:txBody>
@@ -18447,8 +19488,8 @@
         </p:nvSpPr>
         <p:spPr>
           <a:xfrm>
-            <a:off x="1066800" y="5590000"/>
-            <a:ext cx="10058400" cy="718560"/>
+            <a:off x="1066800" y="4760000"/>
+            <a:ext cx="10058400" cy="558560"/>
           </a:xfrm>
           <a:prstGeom prst="rect">
             <a:avLst/>
@@ -18465,7 +19506,92 @@
               <a:buNone/>
             </a:pPr>
             <a:r>
-              <a:rPr lang="en-US" sz="1600" dirty="0">
+              <a:rPr lang="en-US" sz="1500" dirty="0">
+                <a:solidFill>
+                  <a:srgbClr val="C00000"/>
+                </a:solidFill>
+              </a:rPr>
+              <a:t>Design – how we plan to collect the data, settled before any data exists. No amount of description or inference repairs a bad design.</a:t>
+            </a:r>
+          </a:p>
+        </p:txBody>
+      </p:sp>
+      <p:sp>
+        <p:nvSpPr>
+          <p:cNvPr id="9" name="Question 4"/>
+          <p:cNvSpPr/>
+          <p:nvPr/>
+        </p:nvSpPr>
+        <p:spPr>
+          <a:xfrm>
+            <a:off x="838200" y="5490000"/>
+            <a:ext cx="10515600" cy="1230000"/>
+          </a:xfrm>
+          <a:prstGeom prst="roundRect">
+            <a:avLst>
+              <a:gd name="adj" fmla="val 4000"/>
+            </a:avLst>
+          </a:prstGeom>
+          <a:solidFill>
+            <a:srgbClr val="F2F6FC"/>
+          </a:solidFill>
+          <a:ln w="19050">
+            <a:solidFill>
+              <a:schemeClr val="accent1"/>
+            </a:solidFill>
+          </a:ln>
+        </p:spPr>
+        <p:txBody>
+          <a:bodyPr lIns="228600" tIns="182880" rIns="228600" bIns="91440" anchor="t">
+            <a:normAutofit/>
+          </a:bodyPr>
+          <a:lstStyle/>
+          <a:p>
+            <a:pPr marL="0" indent="0">
+              <a:buNone/>
+            </a:pPr>
+            <a:r>
+              <a:rPr lang="en-US" sz="1700" b="1" dirty="0">
+                <a:solidFill>
+                  <a:srgbClr val="4472C4"/>
+                </a:solidFill>
+              </a:rPr>
+              <a:t>4   </a:t>
+            </a:r>
+            <a:r>
+              <a:rPr lang="en-US" sz="1700" b="1" dirty="0"/>
+              <a:t>What is an estimate?</a:t>
+            </a:r>
+          </a:p>
+        </p:txBody>
+      </p:sp>
+      <p:sp>
+        <p:nvSpPr>
+          <p:cNvPr id="10" name="Answer 4"/>
+          <p:cNvSpPr txBox="1"/>
+          <p:nvPr/>
+        </p:nvSpPr>
+        <p:spPr>
+          <a:xfrm>
+            <a:off x="1066800" y="6070000"/>
+            <a:ext cx="10058400" cy="558560"/>
+          </a:xfrm>
+          <a:prstGeom prst="rect">
+            <a:avLst/>
+          </a:prstGeom>
+          <a:noFill/>
+        </p:spPr>
+        <p:txBody>
+          <a:bodyPr wrap="square" lIns="0" tIns="0" rIns="0" bIns="0">
+            <a:normAutofit/>
+          </a:bodyPr>
+          <a:lstStyle/>
+          <a:p>
+            <a:pPr marL="0" indent="0">
+              <a:buNone/>
+            </a:pPr>
+            <a:r>
+              <a:rPr lang="en-US" sz="1500" dirty="0">
                 <a:solidFill>
                   <a:srgbClr val="C00000"/>
                 </a:solidFill>
@@ -18745,6 +19871,96 @@
                                         </p:cTn>
                                         <p:tgtEl>
                                           <p:spTgt spid="8"/>
+                                        </p:tgtEl>
+                                        <p:attrNameLst>
+                                          <p:attrName>style.visibility</p:attrName>
+                                        </p:attrNameLst>
+                                      </p:cBhvr>
+                                      <p:to>
+                                        <p:strVal val="visible"/>
+                                      </p:to>
+                                    </p:set>
+                                  </p:childTnLst>
+                                </p:cTn>
+                              </p:par>
+                            </p:childTnLst>
+                          </p:cTn>
+                        </p:par>
+                      </p:childTnLst>
+                    </p:cTn>
+                  </p:par>
+                  <p:par>
+                    <p:cTn id="27" fill="hold">
+                      <p:stCondLst>
+                        <p:cond delay="indefinite"/>
+                      </p:stCondLst>
+                      <p:childTnLst>
+                        <p:par>
+                          <p:cTn id="28" fill="hold">
+                            <p:stCondLst>
+                              <p:cond delay="0"/>
+                            </p:stCondLst>
+                            <p:childTnLst>
+                              <p:par>
+                                <p:cTn id="29" presetID="1" presetClass="entr" presetSubtype="0" fill="hold" nodeType="clickEffect">
+                                  <p:stCondLst>
+                                    <p:cond delay="0"/>
+                                  </p:stCondLst>
+                                  <p:childTnLst>
+                                    <p:set>
+                                      <p:cBhvr>
+                                        <p:cTn id="30" dur="1" fill="hold">
+                                          <p:stCondLst>
+                                            <p:cond delay="0"/>
+                                          </p:stCondLst>
+                                        </p:cTn>
+                                        <p:tgtEl>
+                                          <p:spTgt spid="9"/>
+                                        </p:tgtEl>
+                                        <p:attrNameLst>
+                                          <p:attrName>style.visibility</p:attrName>
+                                        </p:attrNameLst>
+                                      </p:cBhvr>
+                                      <p:to>
+                                        <p:strVal val="visible"/>
+                                      </p:to>
+                                    </p:set>
+                                  </p:childTnLst>
+                                </p:cTn>
+                              </p:par>
+                            </p:childTnLst>
+                          </p:cTn>
+                        </p:par>
+                      </p:childTnLst>
+                    </p:cTn>
+                  </p:par>
+                  <p:par>
+                    <p:cTn id="31" fill="hold">
+                      <p:stCondLst>
+                        <p:cond delay="indefinite"/>
+                      </p:stCondLst>
+                      <p:childTnLst>
+                        <p:par>
+                          <p:cTn id="32" fill="hold">
+                            <p:stCondLst>
+                              <p:cond delay="0"/>
+                            </p:stCondLst>
+                            <p:childTnLst>
+                              <p:par>
+                                <p:cTn id="33" presetID="1" presetClass="entr" presetSubtype="0" fill="hold" nodeType="clickEffect">
+                                  <p:stCondLst>
+                                    <p:cond delay="0"/>
+                                  </p:stCondLst>
+                                  <p:childTnLst>
+                                    <p:set>
+                                      <p:cBhvr>
+                                        <p:cTn id="34" dur="1" fill="hold">
+                                          <p:stCondLst>
+                                            <p:cond delay="0"/>
+                                          </p:stCondLst>
+                                        </p:cTn>
+                                        <p:tgtEl>
+                                          <p:spTgt spid="10"/>
                                         </p:tgtEl>
                                         <p:attrNameLst>
                                           <p:attrName>style.visibility</p:attrName>

--- a/docs/lecture_slides/Week 2/Week2_Lecture3_Slides_1_19_2024.pptx
+++ b/docs/lecture_slides/Week 2/Week2_Lecture3_Slides_1_19_2024.pptx
@@ -10,29 +10,33 @@
     <p:sldId id="331" r:id="rId4"/>
     <p:sldId id="340" r:id="rId5"/>
     <p:sldId id="341" r:id="rId6"/>
-    <p:sldId id="342" r:id="rId7"/>
-    <p:sldId id="346" r:id="rId8"/>
-    <p:sldId id="343" r:id="rId9"/>
-    <p:sldId id="330" r:id="rId10"/>
-    <p:sldId id="344" r:id="rId11"/>
-    <p:sldId id="286" r:id="rId12"/>
-    <p:sldId id="345" r:id="rId13"/>
-    <p:sldId id="273" r:id="rId14"/>
-    <p:sldId id="288" r:id="rId15"/>
-    <p:sldId id="277" r:id="rId16"/>
-    <p:sldId id="287" r:id="rId17"/>
-    <p:sldId id="282" r:id="rId18"/>
-    <p:sldId id="279" r:id="rId19"/>
-    <p:sldId id="280" r:id="rId20"/>
-    <p:sldId id="281" r:id="rId21"/>
-    <p:sldId id="274" r:id="rId22"/>
-    <p:sldId id="292" r:id="rId23"/>
-    <p:sldId id="293" r:id="rId24"/>
-    <p:sldId id="290" r:id="rId25"/>
-    <p:sldId id="328" r:id="rId26"/>
-    <p:sldId id="332" r:id="rId27"/>
-    <p:sldId id="295" r:id="rId28"/>
-    <p:sldId id="294" r:id="rId29"/>
+    <p:sldId id="347" r:id="rId7"/>
+    <p:sldId id="348" r:id="rId8"/>
+    <p:sldId id="349" r:id="rId9"/>
+    <p:sldId id="350" r:id="rId10"/>
+    <p:sldId id="342" r:id="rId11"/>
+    <p:sldId id="346" r:id="rId12"/>
+    <p:sldId id="343" r:id="rId13"/>
+    <p:sldId id="330" r:id="rId14"/>
+    <p:sldId id="344" r:id="rId15"/>
+    <p:sldId id="286" r:id="rId16"/>
+    <p:sldId id="345" r:id="rId17"/>
+    <p:sldId id="273" r:id="rId18"/>
+    <p:sldId id="288" r:id="rId19"/>
+    <p:sldId id="277" r:id="rId20"/>
+    <p:sldId id="287" r:id="rId21"/>
+    <p:sldId id="282" r:id="rId22"/>
+    <p:sldId id="279" r:id="rId23"/>
+    <p:sldId id="280" r:id="rId24"/>
+    <p:sldId id="281" r:id="rId25"/>
+    <p:sldId id="274" r:id="rId26"/>
+    <p:sldId id="292" r:id="rId27"/>
+    <p:sldId id="293" r:id="rId28"/>
+    <p:sldId id="290" r:id="rId29"/>
+    <p:sldId id="328" r:id="rId30"/>
+    <p:sldId id="332" r:id="rId31"/>
+    <p:sldId id="295" r:id="rId32"/>
+    <p:sldId id="294" r:id="rId33"/>
   </p:sldIdLst>
   <p:sldSz cx="12192000" cy="6858000"/>
   <p:notesSz cx="6858000" cy="9144000"/>
@@ -6540,6 +6544,2428 @@
       </p:grpSpPr>
       <p:sp>
         <p:nvSpPr>
+          <p:cNvPr id="2" name="Title 1">
+            <a:extLst>
+              <a:ext uri="{FF2B5EF4-FFF2-40B4-BE49-F238E27FC236}">
+                <a16:creationId xmlns:a16="http://schemas.microsoft.com/office/drawing/2014/main" id="{746E7931-7E6D-2752-3470-1130A2671C60}"/>
+              </a:ext>
+            </a:extLst>
+          </p:cNvPr>
+          <p:cNvSpPr>
+            <a:spLocks noGrp="1"/>
+          </p:cNvSpPr>
+          <p:nvPr>
+            <p:ph type="title"/>
+          </p:nvPr>
+        </p:nvSpPr>
+        <p:spPr/>
+        <p:txBody>
+          <a:bodyPr/>
+          <a:lstStyle/>
+          <a:p>
+            <a:r>
+              <a:rPr lang="en-US" dirty="0"/>
+              <a:t>Displaying Distributions: Frequency Tables</a:t>
+            </a:r>
+          </a:p>
+        </p:txBody>
+      </p:sp>
+      <mc:AlternateContent xmlns:mc="http://schemas.openxmlformats.org/markup-compatibility/2006" xmlns:a14="http://schemas.microsoft.com/office/drawing/2010/main">
+        <mc:Choice Requires="a14">
+          <p:sp>
+            <p:nvSpPr>
+              <p:cNvPr id="3" name="Content Placeholder 2">
+                <a:extLst>
+                  <a:ext uri="{FF2B5EF4-FFF2-40B4-BE49-F238E27FC236}">
+                    <a16:creationId xmlns:a16="http://schemas.microsoft.com/office/drawing/2014/main" id="{F62BC55B-314A-1FBB-D20E-C5A204950191}"/>
+                  </a:ext>
+                </a:extLst>
+              </p:cNvPr>
+              <p:cNvSpPr>
+                <a:spLocks noGrp="1"/>
+              </p:cNvSpPr>
+              <p:nvPr>
+                <p:ph idx="1"/>
+              </p:nvPr>
+            </p:nvSpPr>
+            <p:spPr>
+              <a:xfrm>
+                <a:off x="838200" y="1825625"/>
+                <a:ext cx="4686300" cy="4351338"/>
+              </a:xfrm>
+            </p:spPr>
+            <p:txBody>
+              <a:bodyPr>
+                <a:normAutofit fontScale="70000" lnSpcReduction="20000"/>
+              </a:bodyPr>
+              <a:lstStyle/>
+              <a:p>
+                <a:r>
+                  <a:rPr lang="en-US" b="1" dirty="0"/>
+                  <a:t>Frequency table – </a:t>
+                </a:r>
+                <a:r>
+                  <a:rPr lang="en-US" dirty="0"/>
+                  <a:t>a table listing the distinct values of variable together with the number of observations of each value</a:t>
+                </a:r>
+              </a:p>
+              <a:p>
+                <a:endParaRPr lang="en-US" b="1" dirty="0"/>
+              </a:p>
+              <a:p>
+                <a:r>
+                  <a:rPr lang="en-US" b="1" dirty="0"/>
+                  <a:t>Frequency</a:t>
+                </a:r>
+                <a:r>
+                  <a:rPr lang="en-US" dirty="0"/>
+                  <a:t> – the number of times a value occurs</a:t>
+                </a:r>
+              </a:p>
+              <a:p>
+                <a:endParaRPr lang="en-US" dirty="0"/>
+              </a:p>
+              <a:p>
+                <a:r>
+                  <a:rPr lang="en-US" b="1" dirty="0"/>
+                  <a:t>Relative Frequency</a:t>
+                </a:r>
+                <a:r>
+                  <a:rPr lang="en-US" dirty="0"/>
+                  <a:t> – the proportion of observations that assume a given value</a:t>
+                </a:r>
+              </a:p>
+              <a:p>
+                <a:pPr marL="0" indent="0">
+                  <a:buNone/>
+                </a:pPr>
+                <a:r>
+                  <a:rPr lang="en-US" dirty="0"/>
+                  <a:t>	</a:t>
+                </a:r>
+                <a14:m>
+                  <m:oMath xmlns:m="http://schemas.openxmlformats.org/officeDocument/2006/math">
+                    <m:r>
+                      <m:rPr>
+                        <m:sty m:val="p"/>
+                      </m:rPr>
+                      <a:rPr lang="en-US" sz="3400" b="0" i="0" smtClean="0">
+                        <a:latin typeface="Cambria Math" panose="02040503050406030204" pitchFamily="18" charset="0"/>
+                      </a:rPr>
+                      <m:t>RF</m:t>
+                    </m:r>
+                    <m:r>
+                      <a:rPr lang="en-US" sz="3400" b="0" i="0" smtClean="0">
+                        <a:latin typeface="Cambria Math" panose="02040503050406030204" pitchFamily="18" charset="0"/>
+                      </a:rPr>
+                      <m:t>= </m:t>
+                    </m:r>
+                    <m:f>
+                      <m:fPr>
+                        <m:ctrlPr>
+                          <a:rPr lang="en-US" sz="3400" b="0" i="1" smtClean="0">
+                            <a:latin typeface="Cambria Math" panose="02040503050406030204" pitchFamily="18" charset="0"/>
+                          </a:rPr>
+                        </m:ctrlPr>
+                      </m:fPr>
+                      <m:num>
+                        <m:r>
+                          <a:rPr lang="en-US" sz="3400" b="0" i="1" smtClean="0">
+                            <a:latin typeface="Cambria Math" panose="02040503050406030204" pitchFamily="18" charset="0"/>
+                          </a:rPr>
+                          <m:t>𝑓</m:t>
+                        </m:r>
+                      </m:num>
+                      <m:den>
+                        <m:r>
+                          <a:rPr lang="en-US" sz="3400" b="0" i="1" smtClean="0">
+                            <a:latin typeface="Cambria Math" panose="02040503050406030204" pitchFamily="18" charset="0"/>
+                          </a:rPr>
+                          <m:t>𝑛</m:t>
+                        </m:r>
+                      </m:den>
+                    </m:f>
+                    <m:r>
+                      <a:rPr lang="en-US" sz="3400" b="0" i="1" smtClean="0">
+                        <a:latin typeface="Cambria Math" panose="02040503050406030204" pitchFamily="18" charset="0"/>
+                      </a:rPr>
+                      <m:t>,</m:t>
+                    </m:r>
+                  </m:oMath>
+                </a14:m>
+                <a:endParaRPr lang="en-US" dirty="0"/>
+              </a:p>
+              <a:p>
+                <a:r>
+                  <a:rPr lang="en-US" b="1" dirty="0"/>
+                  <a:t>Cumulative Relative Frequency </a:t>
+                </a:r>
+                <a:r>
+                  <a:rPr lang="en-US" dirty="0"/>
+                  <a:t>- the proportion of observations </a:t>
+                </a:r>
+                <a:r>
+                  <a:rPr lang="en-US" u="sng" dirty="0"/>
+                  <a:t>equal to or less than</a:t>
+                </a:r>
+                <a:r>
+                  <a:rPr lang="en-US" dirty="0"/>
+                  <a:t> a given value (more on this later)</a:t>
+                </a:r>
+              </a:p>
+            </p:txBody>
+          </p:sp>
+        </mc:Choice>
+        <mc:Fallback xmlns="">
+          <p:sp>
+            <p:nvSpPr>
+              <p:cNvPr id="3" name="Content Placeholder 2">
+                <a:extLst>
+                  <a:ext uri="{FF2B5EF4-FFF2-40B4-BE49-F238E27FC236}">
+                    <a16:creationId xmlns:a16="http://schemas.microsoft.com/office/drawing/2014/main" id="{F62BC55B-314A-1FBB-D20E-C5A204950191}"/>
+                  </a:ext>
+                </a:extLst>
+              </p:cNvPr>
+              <p:cNvSpPr>
+                <a:spLocks noGrp="1" noRot="1" noChangeAspect="1" noMove="1" noResize="1" noEditPoints="1" noAdjustHandles="1" noChangeArrowheads="1" noChangeShapeType="1" noTextEdit="1"/>
+              </p:cNvSpPr>
+              <p:nvPr>
+                <p:ph idx="1"/>
+              </p:nvPr>
+            </p:nvSpPr>
+            <p:spPr>
+              <a:xfrm>
+                <a:off x="838200" y="1825625"/>
+                <a:ext cx="4686300" cy="4351338"/>
+              </a:xfrm>
+              <a:blipFill>
+                <a:blip r:embed="rId2"/>
+                <a:stretch>
+                  <a:fillRect l="-1172" t="-2521" r="-2083"/>
+                </a:stretch>
+              </a:blipFill>
+            </p:spPr>
+            <p:txBody>
+              <a:bodyPr/>
+              <a:lstStyle/>
+              <a:p>
+                <a:r>
+                  <a:rPr lang="en-US">
+                    <a:noFill/>
+                  </a:rPr>
+                  <a:t> </a:t>
+                </a:r>
+              </a:p>
+            </p:txBody>
+          </p:sp>
+        </mc:Fallback>
+      </mc:AlternateContent>
+      <p:sp>
+        <p:nvSpPr>
+          <p:cNvPr id="5" name="TextBox 4">
+            <a:extLst>
+              <a:ext uri="{FF2B5EF4-FFF2-40B4-BE49-F238E27FC236}">
+                <a16:creationId xmlns:a16="http://schemas.microsoft.com/office/drawing/2014/main" id="{C16CEE11-2CF1-DEAD-BC8D-9BB706DE1AB6}"/>
+              </a:ext>
+            </a:extLst>
+          </p:cNvPr>
+          <p:cNvSpPr txBox="1"/>
+          <p:nvPr/>
+        </p:nvSpPr>
+        <p:spPr>
+          <a:xfrm>
+            <a:off x="6873497" y="1506022"/>
+            <a:ext cx="4392100" cy="369332"/>
+          </a:xfrm>
+          <a:prstGeom prst="rect">
+            <a:avLst/>
+          </a:prstGeom>
+          <a:noFill/>
+        </p:spPr>
+        <p:txBody>
+          <a:bodyPr wrap="none" rtlCol="0">
+            <a:spAutoFit/>
+          </a:bodyPr>
+          <a:lstStyle/>
+          <a:p>
+            <a:r>
+              <a:rPr lang="en-US" dirty="0"/>
+              <a:t>Ex. Are teens distracted by their cell phones?</a:t>
+            </a:r>
+          </a:p>
+        </p:txBody>
+      </p:sp>
+      <p:pic>
+        <p:nvPicPr>
+          <p:cNvPr id="30" name="Table stage 1">
+            <a:extLst>
+              <a:ext uri="{FF2B5EF4-FFF2-40B4-BE49-F238E27FC236}">
+                <a16:creationId xmlns:a16="http://schemas.microsoft.com/office/drawing/2014/main" id="{A726F141-28A4-5B62-1A80-B214989D15D2}"/>
+              </a:ext>
+            </a:extLst>
+          </p:cNvPr>
+          <p:cNvPicPr>
+            <a:picLocks noChangeAspect="1"/>
+          </p:cNvPicPr>
+          <p:nvPr/>
+        </p:nvPicPr>
+        <p:blipFill>
+          <a:blip r:embed="rId3"/>
+          <a:stretch>
+            <a:fillRect/>
+          </a:stretch>
+        </p:blipFill>
+        <p:spPr>
+          <a:xfrm>
+            <a:off x="5661891" y="1887427"/>
+            <a:ext cx="6358151" cy="2636307"/>
+          </a:xfrm>
+          <a:prstGeom prst="rect">
+            <a:avLst/>
+          </a:prstGeom>
+        </p:spPr>
+      </p:pic>
+      <p:pic>
+        <p:nvPicPr>
+          <p:cNvPr id="31" name="Table stage 2">
+            <a:extLst>
+              <a:ext uri="{FF2B5EF4-FFF2-40B4-BE49-F238E27FC236}">
+                <a16:creationId xmlns:a16="http://schemas.microsoft.com/office/drawing/2014/main" id="{A726F141-28A4-5B62-1A80-B214989D15D2}"/>
+              </a:ext>
+            </a:extLst>
+          </p:cNvPr>
+          <p:cNvPicPr>
+            <a:picLocks noChangeAspect="1"/>
+          </p:cNvPicPr>
+          <p:nvPr/>
+        </p:nvPicPr>
+        <p:blipFill>
+          <a:blip r:embed="rId4"/>
+          <a:stretch>
+            <a:fillRect/>
+          </a:stretch>
+        </p:blipFill>
+        <p:spPr>
+          <a:xfrm>
+            <a:off x="5661891" y="1887427"/>
+            <a:ext cx="6358151" cy="2636307"/>
+          </a:xfrm>
+          <a:prstGeom prst="rect">
+            <a:avLst/>
+          </a:prstGeom>
+        </p:spPr>
+      </p:pic>
+      <p:pic>
+        <p:nvPicPr>
+          <p:cNvPr id="9" name="Picture 8">
+            <a:extLst>
+              <a:ext uri="{FF2B5EF4-FFF2-40B4-BE49-F238E27FC236}">
+                <a16:creationId xmlns:a16="http://schemas.microsoft.com/office/drawing/2014/main" id="{A726F141-28A4-5B62-1A80-B214989D15D2}"/>
+              </a:ext>
+            </a:extLst>
+          </p:cNvPr>
+          <p:cNvPicPr>
+            <a:picLocks noChangeAspect="1"/>
+          </p:cNvPicPr>
+          <p:nvPr/>
+        </p:nvPicPr>
+        <p:blipFill>
+          <a:blip r:embed="rId5"/>
+          <a:stretch>
+            <a:fillRect/>
+          </a:stretch>
+        </p:blipFill>
+        <p:spPr>
+          <a:xfrm>
+            <a:off x="5661891" y="1887427"/>
+            <a:ext cx="6358151" cy="2636307"/>
+          </a:xfrm>
+          <a:prstGeom prst="rect">
+            <a:avLst/>
+          </a:prstGeom>
+        </p:spPr>
+      </p:pic>
+    </p:spTree>
+    <p:extLst>
+      <p:ext uri="{BB962C8B-B14F-4D97-AF65-F5344CB8AC3E}">
+        <p14:creationId xmlns:p14="http://schemas.microsoft.com/office/powerpoint/2010/main" val="3307213172"/>
+      </p:ext>
+    </p:extLst>
+  </p:cSld>
+  <p:clrMapOvr>
+    <a:masterClrMapping/>
+  </p:clrMapOvr>
+  <p:timing>
+    <p:tnLst>
+      <p:par>
+        <p:cTn id="1" dur="indefinite" restart="never" nodeType="tmRoot">
+          <p:childTnLst>
+            <p:seq concurrent="1" nextAc="seek">
+              <p:cTn id="2" dur="indefinite" nodeType="mainSeq">
+                <p:childTnLst>
+                  <p:par>
+                    <p:cTn id="3" fill="hold">
+                      <p:stCondLst>
+                        <p:cond delay="indefinite"/>
+                      </p:stCondLst>
+                      <p:childTnLst>
+                        <p:par>
+                          <p:cTn id="4" fill="hold">
+                            <p:stCondLst>
+                              <p:cond delay="0"/>
+                            </p:stCondLst>
+                            <p:childTnLst>
+                              <p:par>
+                                <p:cTn id="5" presetID="1" presetClass="entr" presetSubtype="0" fill="hold" nodeType="clickEffect">
+                                  <p:stCondLst>
+                                    <p:cond delay="0"/>
+                                  </p:stCondLst>
+                                  <p:childTnLst>
+                                    <p:set>
+                                      <p:cBhvr>
+                                        <p:cTn id="6" dur="1" fill="hold">
+                                          <p:stCondLst>
+                                            <p:cond delay="0"/>
+                                          </p:stCondLst>
+                                        </p:cTn>
+                                        <p:tgtEl>
+                                          <p:spTgt spid="3">
+                                            <p:txEl>
+                                              <p:pRg st="4" end="5"/>
+                                            </p:txEl>
+                                          </p:spTgt>
+                                        </p:tgtEl>
+                                        <p:attrNameLst>
+                                          <p:attrName>style.visibility</p:attrName>
+                                        </p:attrNameLst>
+                                      </p:cBhvr>
+                                      <p:to>
+                                        <p:strVal val="visible"/>
+                                      </p:to>
+                                    </p:set>
+                                  </p:childTnLst>
+                                </p:cTn>
+                              </p:par>
+                              <p:par>
+                                <p:cTn id="7" presetID="1" presetClass="entr" presetSubtype="0" fill="hold" nodeType="withEffect">
+                                  <p:stCondLst>
+                                    <p:cond delay="0"/>
+                                  </p:stCondLst>
+                                  <p:childTnLst>
+                                    <p:set>
+                                      <p:cBhvr>
+                                        <p:cTn id="8" dur="1" fill="hold">
+                                          <p:stCondLst>
+                                            <p:cond delay="0"/>
+                                          </p:stCondLst>
+                                        </p:cTn>
+                                        <p:tgtEl>
+                                          <p:spTgt spid="31"/>
+                                        </p:tgtEl>
+                                        <p:attrNameLst>
+                                          <p:attrName>style.visibility</p:attrName>
+                                        </p:attrNameLst>
+                                      </p:cBhvr>
+                                      <p:to>
+                                        <p:strVal val="visible"/>
+                                      </p:to>
+                                    </p:set>
+                                  </p:childTnLst>
+                                </p:cTn>
+                              </p:par>
+                            </p:childTnLst>
+                          </p:cTn>
+                        </p:par>
+                      </p:childTnLst>
+                    </p:cTn>
+                  </p:par>
+                  <p:par>
+                    <p:cTn id="9" fill="hold">
+                      <p:stCondLst>
+                        <p:cond delay="indefinite"/>
+                      </p:stCondLst>
+                      <p:childTnLst>
+                        <p:par>
+                          <p:cTn id="10" fill="hold">
+                            <p:stCondLst>
+                              <p:cond delay="0"/>
+                            </p:stCondLst>
+                            <p:childTnLst>
+                              <p:par>
+                                <p:cTn id="11" presetID="1" presetClass="entr" presetSubtype="0" fill="hold" nodeType="clickEffect">
+                                  <p:stCondLst>
+                                    <p:cond delay="0"/>
+                                  </p:stCondLst>
+                                  <p:childTnLst>
+                                    <p:set>
+                                      <p:cBhvr>
+                                        <p:cTn id="12" dur="1" fill="hold">
+                                          <p:stCondLst>
+                                            <p:cond delay="0"/>
+                                          </p:stCondLst>
+                                        </p:cTn>
+                                        <p:tgtEl>
+                                          <p:spTgt spid="3">
+                                            <p:txEl>
+                                              <p:pRg st="6" end="6"/>
+                                            </p:txEl>
+                                          </p:spTgt>
+                                        </p:tgtEl>
+                                        <p:attrNameLst>
+                                          <p:attrName>style.visibility</p:attrName>
+                                        </p:attrNameLst>
+                                      </p:cBhvr>
+                                      <p:to>
+                                        <p:strVal val="visible"/>
+                                      </p:to>
+                                    </p:set>
+                                  </p:childTnLst>
+                                </p:cTn>
+                              </p:par>
+                              <p:par>
+                                <p:cTn id="13" presetID="1" presetClass="entr" presetSubtype="0" fill="hold" nodeType="withEffect">
+                                  <p:stCondLst>
+                                    <p:cond delay="0"/>
+                                  </p:stCondLst>
+                                  <p:childTnLst>
+                                    <p:set>
+                                      <p:cBhvr>
+                                        <p:cTn id="14" dur="1" fill="hold">
+                                          <p:stCondLst>
+                                            <p:cond delay="0"/>
+                                          </p:stCondLst>
+                                        </p:cTn>
+                                        <p:tgtEl>
+                                          <p:spTgt spid="9"/>
+                                        </p:tgtEl>
+                                        <p:attrNameLst>
+                                          <p:attrName>style.visibility</p:attrName>
+                                        </p:attrNameLst>
+                                      </p:cBhvr>
+                                      <p:to>
+                                        <p:strVal val="visible"/>
+                                      </p:to>
+                                    </p:set>
+                                  </p:childTnLst>
+                                </p:cTn>
+                              </p:par>
+                            </p:childTnLst>
+                          </p:cTn>
+                        </p:par>
+                      </p:childTnLst>
+                    </p:cTn>
+                  </p:par>
+                </p:childTnLst>
+              </p:cTn>
+              <p:prevCondLst>
+                <p:cond evt="onPrev" delay="0">
+                  <p:tgtEl>
+                    <p:sldTgt/>
+                  </p:tgtEl>
+                </p:cond>
+              </p:prevCondLst>
+              <p:nextCondLst>
+                <p:cond evt="onNext" delay="0">
+                  <p:tgtEl>
+                    <p:sldTgt/>
+                  </p:tgtEl>
+                </p:cond>
+              </p:nextCondLst>
+            </p:seq>
+          </p:childTnLst>
+        </p:cTn>
+      </p:par>
+    </p:tnLst>
+  </p:timing>
+</p:sld>
+</file>
+
+<file path=ppt/slides/slide11.xml><?xml version="1.0" encoding="utf-8"?>
+<p:sld xmlns:a="http://schemas.openxmlformats.org/drawingml/2006/main" xmlns:r="http://schemas.openxmlformats.org/officeDocument/2006/relationships" xmlns:p="http://schemas.openxmlformats.org/presentationml/2006/main">
+  <p:cSld>
+    <p:spTree>
+      <p:nvGrpSpPr>
+        <p:cNvPr id="1" name=""/>
+        <p:cNvGrpSpPr/>
+        <p:nvPr/>
+      </p:nvGrpSpPr>
+      <p:grpSpPr>
+        <a:xfrm>
+          <a:off x="0" y="0"/>
+          <a:ext cx="0" cy="0"/>
+          <a:chOff x="0" y="0"/>
+          <a:chExt cx="0" cy="0"/>
+        </a:xfrm>
+      </p:grpSpPr>
+      <p:sp>
+        <p:nvSpPr>
+          <p:cNvPr id="2" name="Title 1"/>
+          <p:cNvSpPr>
+            <a:spLocks noGrp="1"/>
+          </p:cNvSpPr>
+          <p:nvPr>
+            <p:ph type="title"/>
+          </p:nvPr>
+        </p:nvSpPr>
+        <p:spPr/>
+        <p:txBody>
+          <a:bodyPr>
+            <a:normAutofit/>
+          </a:bodyPr>
+          <a:lstStyle/>
+          <a:p>
+            <a:r>
+              <a:rPr lang="en-US" dirty="0"/>
+              <a:t>Example: Mendel’s Pea Plants</a:t>
+            </a:r>
+          </a:p>
+        </p:txBody>
+      </p:sp>
+      <p:sp>
+        <p:nvSpPr>
+          <p:cNvPr id="3" name="Caption"/>
+          <p:cNvSpPr txBox="1"/>
+          <p:nvPr/>
+        </p:nvSpPr>
+        <p:spPr>
+          <a:xfrm>
+            <a:off x="838200" y="1560000"/>
+            <a:ext cx="10515600" cy="700000"/>
+          </a:xfrm>
+          <a:prstGeom prst="rect">
+            <a:avLst/>
+          </a:prstGeom>
+          <a:noFill/>
+        </p:spPr>
+        <p:txBody>
+          <a:bodyPr wrap="square" lIns="0" tIns="0" rIns="0" bIns="0">
+            <a:normAutofit/>
+          </a:bodyPr>
+          <a:lstStyle/>
+          <a:p>
+            <a:pPr marL="0" indent="0">
+              <a:buNone/>
+            </a:pPr>
+            <a:r>
+              <a:rPr lang="en-US" sz="1700" dirty="0"/>
+              <a:t>In one of Gregor Mendel’s classic studies he bred 8,023 pea plants and recorded the color of the peas – the seeds – that each plant produced.</a:t>
+            </a:r>
+          </a:p>
+        </p:txBody>
+      </p:sp>
+      <p:pic>
+        <p:nvPicPr>
+          <p:cNvPr id="4" name="Mendel table"/>
+          <p:cNvPicPr>
+            <a:picLocks noChangeAspect="1"/>
+          </p:cNvPicPr>
+          <p:nvPr/>
+        </p:nvPicPr>
+        <p:blipFill>
+          <a:blip r:embed="rId2"/>
+          <a:stretch>
+            <a:fillRect/>
+          </a:stretch>
+        </p:blipFill>
+        <p:spPr>
+          <a:xfrm>
+            <a:off x="838200" y="2750000"/>
+            <a:ext cx="5486400" cy="1859664"/>
+          </a:xfrm>
+          <a:prstGeom prst="rect">
+            <a:avLst/>
+          </a:prstGeom>
+        </p:spPr>
+      </p:pic>
+      <p:sp>
+        <p:nvSpPr>
+          <p:cNvPr id="5" name="Genetics"/>
+          <p:cNvSpPr/>
+          <p:nvPr/>
+        </p:nvSpPr>
+        <p:spPr>
+          <a:xfrm>
+            <a:off x="6650000" y="2420000"/>
+            <a:ext cx="4703800" cy="2550000"/>
+          </a:xfrm>
+          <a:prstGeom prst="roundRect">
+            <a:avLst>
+              <a:gd name="adj" fmla="val 4000"/>
+            </a:avLst>
+          </a:prstGeom>
+          <a:solidFill>
+            <a:srgbClr val="F2F6FC"/>
+          </a:solidFill>
+          <a:ln w="19050">
+            <a:solidFill>
+              <a:schemeClr val="accent1"/>
+            </a:solidFill>
+          </a:ln>
+        </p:spPr>
+        <p:txBody>
+          <a:bodyPr lIns="205740" tIns="160020" rIns="205740" bIns="114300">
+            <a:normAutofit/>
+          </a:bodyPr>
+          <a:lstStyle/>
+          <a:p>
+            <a:pPr marL="0" indent="0">
+              <a:buNone/>
+            </a:pPr>
+            <a:r>
+              <a:rPr lang="en-US" sz="1600" b="1" dirty="0"/>
+              <a:t>Pea color is set by a single gene.</a:t>
+            </a:r>
+          </a:p>
+          <a:p>
+            <a:pPr marL="0" indent="0">
+              <a:spcBef>
+                <a:spcPts val="400"/>
+              </a:spcBef>
+              <a:buNone/>
+            </a:pPr>
+            <a:r>
+              <a:rPr lang="en-US" sz="1600" dirty="0"/>
+              <a:t>Yellow (Y) is </a:t>
+            </a:r>
+            <a:r>
+              <a:rPr lang="en-US" sz="1600" b="1" dirty="0">
+                <a:solidFill>
+                  <a:srgbClr val="4472C4"/>
+                </a:solidFill>
+              </a:rPr>
+              <a:t>dominant</a:t>
+            </a:r>
+            <a:r>
+              <a:rPr lang="en-US" sz="1600" dirty="0"/>
+              <a:t>; green (y) is </a:t>
+            </a:r>
+            <a:r>
+              <a:rPr lang="en-US" sz="1600" b="1" dirty="0">
+                <a:solidFill>
+                  <a:srgbClr val="4472C4"/>
+                </a:solidFill>
+              </a:rPr>
+              <a:t>recessive</a:t>
+            </a:r>
+            <a:r>
+              <a:rPr lang="en-US" sz="1600" dirty="0"/>
+              <a:t>. A plant is green only if it inherits y from both parents.</a:t>
+            </a:r>
+          </a:p>
+          <a:p>
+            <a:pPr marL="0" indent="0">
+              <a:spcBef>
+                <a:spcPts val="400"/>
+              </a:spcBef>
+              <a:buNone/>
+            </a:pPr>
+            <a:r>
+              <a:rPr lang="en-US" sz="1600" dirty="0"/>
+              <a:t>Cross two Yy plants and the offspring are YY, Yy, yY, yy in equal proportion – and only yy shows green. So the theory predicts 3 yellow to every 1 green.</a:t>
+            </a:r>
+          </a:p>
+        </p:txBody>
+      </p:sp>
+      <p:sp>
+        <p:nvSpPr>
+          <p:cNvPr id="6" name="Payoff"/>
+          <p:cNvSpPr txBox="1"/>
+          <p:nvPr/>
+        </p:nvSpPr>
+        <p:spPr>
+          <a:xfrm>
+            <a:off x="838200" y="5450000"/>
+            <a:ext cx="10515600" cy="900000"/>
+          </a:xfrm>
+          <a:prstGeom prst="rect">
+            <a:avLst/>
+          </a:prstGeom>
+          <a:noFill/>
+        </p:spPr>
+        <p:txBody>
+          <a:bodyPr wrap="square" lIns="0" tIns="0" rIns="0" bIns="0">
+            <a:normAutofit/>
+          </a:bodyPr>
+          <a:lstStyle/>
+          <a:p>
+            <a:pPr marL="0" indent="0">
+              <a:buNone/>
+            </a:pPr>
+            <a:r>
+              <a:rPr lang="en-US" sz="1700" b="1" dirty="0">
+                <a:solidFill>
+                  <a:srgbClr val="C00000"/>
+                </a:solidFill>
+              </a:rPr>
+              <a:t>Mendel counted 0.751 and 0.249 – almost exactly 3/4 and 1/4. A frequency table is doing real scientific work here.</a:t>
+            </a:r>
+          </a:p>
+        </p:txBody>
+      </p:sp>
+    </p:spTree>
+    <p:extLst>
+      <p:ext uri="{BB962C8B-B14F-4D97-AF65-F5344CB8AC3E}">
+        <p14:creationId xmlns:p14="http://schemas.microsoft.com/office/powerpoint/2010/main" val="1517484021"/>
+      </p:ext>
+    </p:extLst>
+  </p:cSld>
+  <p:clrMapOvr>
+    <a:masterClrMapping/>
+  </p:clrMapOvr>
+  <p:timing>
+    <p:tnLst>
+      <p:par>
+        <p:cTn id="1" dur="indefinite" restart="never" nodeType="tmRoot">
+          <p:childTnLst>
+            <p:seq concurrent="1" nextAc="seek">
+              <p:cTn id="2" dur="indefinite" nodeType="mainSeq">
+                <p:childTnLst>
+                  <p:par>
+                    <p:cTn id="3" fill="hold">
+                      <p:stCondLst>
+                        <p:cond delay="indefinite"/>
+                      </p:stCondLst>
+                      <p:childTnLst>
+                        <p:par>
+                          <p:cTn id="4" fill="hold">
+                            <p:stCondLst>
+                              <p:cond delay="0"/>
+                            </p:stCondLst>
+                            <p:childTnLst>
+                              <p:par>
+                                <p:cTn id="5" presetID="1" presetClass="entr" presetSubtype="0" fill="hold" nodeType="clickEffect">
+                                  <p:stCondLst>
+                                    <p:cond delay="0"/>
+                                  </p:stCondLst>
+                                  <p:childTnLst>
+                                    <p:set>
+                                      <p:cBhvr>
+                                        <p:cTn id="6" dur="1" fill="hold">
+                                          <p:stCondLst>
+                                            <p:cond delay="0"/>
+                                          </p:stCondLst>
+                                        </p:cTn>
+                                        <p:tgtEl>
+                                          <p:spTgt spid="5"/>
+                                        </p:tgtEl>
+                                        <p:attrNameLst>
+                                          <p:attrName>style.visibility</p:attrName>
+                                        </p:attrNameLst>
+                                      </p:cBhvr>
+                                      <p:to>
+                                        <p:strVal val="visible"/>
+                                      </p:to>
+                                    </p:set>
+                                  </p:childTnLst>
+                                </p:cTn>
+                              </p:par>
+                            </p:childTnLst>
+                          </p:cTn>
+                        </p:par>
+                      </p:childTnLst>
+                    </p:cTn>
+                  </p:par>
+                  <p:par>
+                    <p:cTn id="7" fill="hold">
+                      <p:stCondLst>
+                        <p:cond delay="indefinite"/>
+                      </p:stCondLst>
+                      <p:childTnLst>
+                        <p:par>
+                          <p:cTn id="8" fill="hold">
+                            <p:stCondLst>
+                              <p:cond delay="0"/>
+                            </p:stCondLst>
+                            <p:childTnLst>
+                              <p:par>
+                                <p:cTn id="9" presetID="1" presetClass="entr" presetSubtype="0" fill="hold" nodeType="clickEffect">
+                                  <p:stCondLst>
+                                    <p:cond delay="0"/>
+                                  </p:stCondLst>
+                                  <p:childTnLst>
+                                    <p:set>
+                                      <p:cBhvr>
+                                        <p:cTn id="10" dur="1" fill="hold">
+                                          <p:stCondLst>
+                                            <p:cond delay="0"/>
+                                          </p:stCondLst>
+                                        </p:cTn>
+                                        <p:tgtEl>
+                                          <p:spTgt spid="6"/>
+                                        </p:tgtEl>
+                                        <p:attrNameLst>
+                                          <p:attrName>style.visibility</p:attrName>
+                                        </p:attrNameLst>
+                                      </p:cBhvr>
+                                      <p:to>
+                                        <p:strVal val="visible"/>
+                                      </p:to>
+                                    </p:set>
+                                  </p:childTnLst>
+                                </p:cTn>
+                              </p:par>
+                            </p:childTnLst>
+                          </p:cTn>
+                        </p:par>
+                      </p:childTnLst>
+                    </p:cTn>
+                  </p:par>
+                </p:childTnLst>
+              </p:cTn>
+              <p:prevCondLst>
+                <p:cond evt="onPrev" delay="0">
+                  <p:tgtEl>
+                    <p:sldTgt/>
+                  </p:tgtEl>
+                </p:cond>
+              </p:prevCondLst>
+              <p:nextCondLst>
+                <p:cond evt="onNext" delay="0">
+                  <p:tgtEl>
+                    <p:sldTgt/>
+                  </p:tgtEl>
+                </p:cond>
+              </p:nextCondLst>
+            </p:seq>
+          </p:childTnLst>
+        </p:cTn>
+      </p:par>
+    </p:tnLst>
+  </p:timing>
+</p:sld>
+</file>
+
+<file path=ppt/slides/slide12.xml><?xml version="1.0" encoding="utf-8"?>
+<p:sld xmlns:a="http://schemas.openxmlformats.org/drawingml/2006/main" xmlns:r="http://schemas.openxmlformats.org/officeDocument/2006/relationships" xmlns:p="http://schemas.openxmlformats.org/presentationml/2006/main">
+  <p:cSld>
+    <p:spTree>
+      <p:nvGrpSpPr>
+        <p:cNvPr id="1" name=""/>
+        <p:cNvGrpSpPr/>
+        <p:nvPr/>
+      </p:nvGrpSpPr>
+      <p:grpSpPr>
+        <a:xfrm>
+          <a:off x="0" y="0"/>
+          <a:ext cx="0" cy="0"/>
+          <a:chOff x="0" y="0"/>
+          <a:chExt cx="0" cy="0"/>
+        </a:xfrm>
+      </p:grpSpPr>
+      <p:sp>
+        <p:nvSpPr>
+          <p:cNvPr id="2" name="Title 1"/>
+          <p:cNvSpPr>
+            <a:spLocks noGrp="1"/>
+          </p:cNvSpPr>
+          <p:nvPr>
+            <p:ph type="title"/>
+          </p:nvPr>
+        </p:nvSpPr>
+        <p:spPr/>
+        <p:txBody>
+          <a:bodyPr>
+            <a:normAutofit/>
+          </a:bodyPr>
+          <a:lstStyle/>
+          <a:p>
+            <a:r>
+              <a:rPr lang="en-US" dirty="0"/>
+              <a:t>Try it out: A Frequency Table by Hand</a:t>
+            </a:r>
+          </a:p>
+        </p:txBody>
+      </p:sp>
+      <p:sp>
+        <p:nvSpPr>
+          <p:cNvPr id="3" name="Prompt"/>
+          <p:cNvSpPr txBox="1"/>
+          <p:nvPr/>
+        </p:nvSpPr>
+        <p:spPr>
+          <a:xfrm>
+            <a:off x="838200" y="1600200"/>
+            <a:ext cx="5250000" cy="4700000"/>
+          </a:xfrm>
+          <a:prstGeom prst="rect">
+            <a:avLst/>
+          </a:prstGeom>
+          <a:noFill/>
+        </p:spPr>
+        <p:txBody>
+          <a:bodyPr wrap="square">
+            <a:normAutofit/>
+          </a:bodyPr>
+          <a:lstStyle/>
+          <a:p>
+            <a:pPr marL="0" indent="0">
+              <a:buNone/>
+            </a:pPr>
+            <a:r>
+              <a:rPr lang="en-US" sz="1600" dirty="0"/>
+              <a:t>We put Pew's question to 20 students in this room: are you losing focus in class by checking your phone?</a:t>
+            </a:r>
+          </a:p>
+          <a:p>
+            <a:pPr marL="0" indent="0">
+              <a:spcBef>
+                <a:spcPts val="300"/>
+              </a:spcBef>
+              <a:buNone/>
+            </a:pPr>
+            <a:r>
+              <a:rPr lang="en-US" sz="1500" dirty="0">
+                <a:latin typeface="Consolas" panose="020B0609020204030204"/>
+              </a:rPr>
+              <a:t>Sometimes  Never  Rarely  Never  Often</a:t>
+            </a:r>
+          </a:p>
+          <a:p>
+            <a:pPr marL="0" indent="0">
+              <a:buNone/>
+            </a:pPr>
+            <a:r>
+              <a:rPr lang="en-US" sz="1500" dirty="0">
+                <a:latin typeface="Consolas" panose="020B0609020204030204"/>
+              </a:rPr>
+              <a:t>Rarely  Never  Sometimes  Rarely  Never</a:t>
+            </a:r>
+          </a:p>
+          <a:p>
+            <a:pPr marL="0" indent="0">
+              <a:buNone/>
+            </a:pPr>
+            <a:r>
+              <a:rPr lang="en-US" sz="1500" dirty="0">
+                <a:latin typeface="Consolas" panose="020B0609020204030204"/>
+              </a:rPr>
+              <a:t>Sometimes  Rarely  Never  Often  Sometimes</a:t>
+            </a:r>
+          </a:p>
+          <a:p>
+            <a:pPr marL="0" indent="0">
+              <a:buNone/>
+            </a:pPr>
+            <a:r>
+              <a:rPr lang="en-US" sz="1500" dirty="0">
+                <a:latin typeface="Consolas" panose="020B0609020204030204"/>
+              </a:rPr>
+              <a:t>Rarely  Never  Rarely  Sometimes  Never</a:t>
+            </a:r>
+          </a:p>
+          <a:p>
+            <a:pPr marL="0" indent="0">
+              <a:spcBef>
+                <a:spcPts val="700"/>
+              </a:spcBef>
+              <a:buNone/>
+            </a:pPr>
+            <a:r>
+              <a:rPr lang="en-US" sz="1600" b="1" dirty="0"/>
+              <a:t>Build the frequency table: frequency, relative frequency and cumulative relative frequency. Which is the modal category?</a:t>
+            </a:r>
+          </a:p>
+        </p:txBody>
+      </p:sp>
+      <p:graphicFrame>
+        <p:nvGraphicFramePr>
+          <p:cNvPr id="4" name="Answer table"/>
+          <p:cNvGraphicFramePr>
+            <a:graphicFrameLocks noGrp="1"/>
+          </p:cNvGraphicFramePr>
+          <p:nvPr/>
+        </p:nvGraphicFramePr>
+        <p:xfrm>
+          <a:off x="6400800" y="1750000"/>
+          <a:ext cx="5100000" cy="2220000"/>
+        </p:xfrm>
+        <a:graphic>
+          <a:graphicData uri="http://schemas.openxmlformats.org/drawingml/2006/table">
+            <a:tbl>
+              <a:tblPr firstRow="1" bandRow="1">
+                <a:tableStyleId>{5C22544A-7EE6-4342-B048-85BDC9FD1C3A}</a:tableStyleId>
+              </a:tblPr>
+              <a:tblGrid>
+                <a:gridCol w="1900000">
+                  <a:extLst>
+                    <a:ext uri="{9D8B030D-6E8A-4147-A177-3AD203B41FA5}">
+                      <a16:colId xmlns:a16="http://schemas.microsoft.com/office/drawing/2014/main" val="20000"/>
+                    </a:ext>
+                  </a:extLst>
+                </a:gridCol>
+                <a:gridCol w="900000">
+                  <a:extLst>
+                    <a:ext uri="{9D8B030D-6E8A-4147-A177-3AD203B41FA5}">
+                      <a16:colId xmlns:a16="http://schemas.microsoft.com/office/drawing/2014/main" val="20001"/>
+                    </a:ext>
+                  </a:extLst>
+                </a:gridCol>
+                <a:gridCol w="1150000">
+                  <a:extLst>
+                    <a:ext uri="{9D8B030D-6E8A-4147-A177-3AD203B41FA5}">
+                      <a16:colId xmlns:a16="http://schemas.microsoft.com/office/drawing/2014/main" val="20002"/>
+                    </a:ext>
+                  </a:extLst>
+                </a:gridCol>
+                <a:gridCol w="1150000">
+                  <a:extLst>
+                    <a:ext uri="{9D8B030D-6E8A-4147-A177-3AD203B41FA5}">
+                      <a16:colId xmlns:a16="http://schemas.microsoft.com/office/drawing/2014/main" val="20003"/>
+                    </a:ext>
+                  </a:extLst>
+                </a:gridCol>
+              </a:tblGrid>
+              <a:tr h="370000">
+                <a:tc>
+                  <a:txBody>
+                    <a:bodyPr/>
+                    <a:lstStyle/>
+                    <a:p>
+                      <a:pPr algn="l"/>
+                      <a:r>
+                        <a:rPr lang="en-US" sz="1400" dirty="0"/>
+                        <a:t>Response</a:t>
+                      </a:r>
+                    </a:p>
+                  </a:txBody>
+                  <a:tcPr marL="68580" marR="68580" marT="0" marB="0" anchor="ctr"/>
+                </a:tc>
+                <a:tc>
+                  <a:txBody>
+                    <a:bodyPr/>
+                    <a:lstStyle/>
+                    <a:p>
+                      <a:pPr algn="ctr"/>
+                      <a:r>
+                        <a:rPr lang="en-US" sz="1400" dirty="0"/>
+                        <a:t>f</a:t>
+                      </a:r>
+                    </a:p>
+                  </a:txBody>
+                  <a:tcPr marL="68580" marR="68580" marT="0" marB="0" anchor="ctr"/>
+                </a:tc>
+                <a:tc>
+                  <a:txBody>
+                    <a:bodyPr/>
+                    <a:lstStyle/>
+                    <a:p>
+                      <a:pPr algn="ctr"/>
+                      <a:r>
+                        <a:rPr lang="en-US" sz="1400" dirty="0"/>
+                        <a:t>Rel. freq.</a:t>
+                      </a:r>
+                    </a:p>
+                  </a:txBody>
+                  <a:tcPr marL="68580" marR="68580" marT="0" marB="0" anchor="ctr"/>
+                </a:tc>
+                <a:tc>
+                  <a:txBody>
+                    <a:bodyPr/>
+                    <a:lstStyle/>
+                    <a:p>
+                      <a:pPr algn="ctr"/>
+                      <a:r>
+                        <a:rPr lang="en-US" sz="1400" dirty="0"/>
+                        <a:t>Cum. rel. freq.</a:t>
+                      </a:r>
+                    </a:p>
+                  </a:txBody>
+                  <a:tcPr marL="68580" marR="68580" marT="0" marB="0" anchor="ctr"/>
+                </a:tc>
+                <a:extLst>
+                  <a:ext uri="{0D108BD9-81ED-4DB2-BD59-A6C34878D82A}">
+                    <a16:rowId xmlns:a16="http://schemas.microsoft.com/office/drawing/2014/main" val="10000"/>
+                  </a:ext>
+                </a:extLst>
+              </a:tr>
+              <a:tr h="370000">
+                <a:tc>
+                  <a:txBody>
+                    <a:bodyPr/>
+                    <a:lstStyle/>
+                    <a:p>
+                      <a:pPr algn="l"/>
+                      <a:r>
+                        <a:rPr lang="en-US" sz="1400" dirty="0"/>
+                        <a:t>Never</a:t>
+                      </a:r>
+                    </a:p>
+                  </a:txBody>
+                  <a:tcPr marL="68580" marR="68580" marT="0" marB="0" anchor="ctr"/>
+                </a:tc>
+                <a:tc>
+                  <a:txBody>
+                    <a:bodyPr/>
+                    <a:lstStyle/>
+                    <a:p>
+                      <a:pPr algn="ctr"/>
+                      <a:r>
+                        <a:rPr lang="en-US" sz="1400" dirty="0"/>
+                        <a:t>7</a:t>
+                      </a:r>
+                    </a:p>
+                  </a:txBody>
+                  <a:tcPr marL="68580" marR="68580" marT="0" marB="0" anchor="ctr"/>
+                </a:tc>
+                <a:tc>
+                  <a:txBody>
+                    <a:bodyPr/>
+                    <a:lstStyle/>
+                    <a:p>
+                      <a:pPr algn="ctr"/>
+                      <a:r>
+                        <a:rPr lang="en-US" sz="1400" dirty="0"/>
+                        <a:t>0.35</a:t>
+                      </a:r>
+                    </a:p>
+                  </a:txBody>
+                  <a:tcPr marL="68580" marR="68580" marT="0" marB="0" anchor="ctr"/>
+                </a:tc>
+                <a:tc>
+                  <a:txBody>
+                    <a:bodyPr/>
+                    <a:lstStyle/>
+                    <a:p>
+                      <a:pPr algn="ctr"/>
+                      <a:r>
+                        <a:rPr lang="en-US" sz="1400" dirty="0"/>
+                        <a:t>0.35</a:t>
+                      </a:r>
+                    </a:p>
+                  </a:txBody>
+                  <a:tcPr marL="68580" marR="68580" marT="0" marB="0" anchor="ctr"/>
+                </a:tc>
+                <a:extLst>
+                  <a:ext uri="{0D108BD9-81ED-4DB2-BD59-A6C34878D82A}">
+                    <a16:rowId xmlns:a16="http://schemas.microsoft.com/office/drawing/2014/main" val="10001"/>
+                  </a:ext>
+                </a:extLst>
+              </a:tr>
+              <a:tr h="370000">
+                <a:tc>
+                  <a:txBody>
+                    <a:bodyPr/>
+                    <a:lstStyle/>
+                    <a:p>
+                      <a:pPr algn="l"/>
+                      <a:r>
+                        <a:rPr lang="en-US" sz="1400" dirty="0"/>
+                        <a:t>Rarely</a:t>
+                      </a:r>
+                    </a:p>
+                  </a:txBody>
+                  <a:tcPr marL="68580" marR="68580" marT="0" marB="0" anchor="ctr"/>
+                </a:tc>
+                <a:tc>
+                  <a:txBody>
+                    <a:bodyPr/>
+                    <a:lstStyle/>
+                    <a:p>
+                      <a:pPr algn="ctr"/>
+                      <a:r>
+                        <a:rPr lang="en-US" sz="1400" dirty="0"/>
+                        <a:t>6</a:t>
+                      </a:r>
+                    </a:p>
+                  </a:txBody>
+                  <a:tcPr marL="68580" marR="68580" marT="0" marB="0" anchor="ctr"/>
+                </a:tc>
+                <a:tc>
+                  <a:txBody>
+                    <a:bodyPr/>
+                    <a:lstStyle/>
+                    <a:p>
+                      <a:pPr algn="ctr"/>
+                      <a:r>
+                        <a:rPr lang="en-US" sz="1400" dirty="0"/>
+                        <a:t>0.30</a:t>
+                      </a:r>
+                    </a:p>
+                  </a:txBody>
+                  <a:tcPr marL="68580" marR="68580" marT="0" marB="0" anchor="ctr"/>
+                </a:tc>
+                <a:tc>
+                  <a:txBody>
+                    <a:bodyPr/>
+                    <a:lstStyle/>
+                    <a:p>
+                      <a:pPr algn="ctr"/>
+                      <a:r>
+                        <a:rPr lang="en-US" sz="1400" dirty="0"/>
+                        <a:t>0.65</a:t>
+                      </a:r>
+                    </a:p>
+                  </a:txBody>
+                  <a:tcPr marL="68580" marR="68580" marT="0" marB="0" anchor="ctr"/>
+                </a:tc>
+                <a:extLst>
+                  <a:ext uri="{0D108BD9-81ED-4DB2-BD59-A6C34878D82A}">
+                    <a16:rowId xmlns:a16="http://schemas.microsoft.com/office/drawing/2014/main" val="10002"/>
+                  </a:ext>
+                </a:extLst>
+              </a:tr>
+              <a:tr h="370000">
+                <a:tc>
+                  <a:txBody>
+                    <a:bodyPr/>
+                    <a:lstStyle/>
+                    <a:p>
+                      <a:pPr algn="l"/>
+                      <a:r>
+                        <a:rPr lang="en-US" sz="1400" dirty="0"/>
+                        <a:t>Sometimes</a:t>
+                      </a:r>
+                    </a:p>
+                  </a:txBody>
+                  <a:tcPr marL="68580" marR="68580" marT="0" marB="0" anchor="ctr"/>
+                </a:tc>
+                <a:tc>
+                  <a:txBody>
+                    <a:bodyPr/>
+                    <a:lstStyle/>
+                    <a:p>
+                      <a:pPr algn="ctr"/>
+                      <a:r>
+                        <a:rPr lang="en-US" sz="1400" dirty="0"/>
+                        <a:t>5</a:t>
+                      </a:r>
+                    </a:p>
+                  </a:txBody>
+                  <a:tcPr marL="68580" marR="68580" marT="0" marB="0" anchor="ctr"/>
+                </a:tc>
+                <a:tc>
+                  <a:txBody>
+                    <a:bodyPr/>
+                    <a:lstStyle/>
+                    <a:p>
+                      <a:pPr algn="ctr"/>
+                      <a:r>
+                        <a:rPr lang="en-US" sz="1400" dirty="0"/>
+                        <a:t>0.25</a:t>
+                      </a:r>
+                    </a:p>
+                  </a:txBody>
+                  <a:tcPr marL="68580" marR="68580" marT="0" marB="0" anchor="ctr"/>
+                </a:tc>
+                <a:tc>
+                  <a:txBody>
+                    <a:bodyPr/>
+                    <a:lstStyle/>
+                    <a:p>
+                      <a:pPr algn="ctr"/>
+                      <a:r>
+                        <a:rPr lang="en-US" sz="1400" dirty="0"/>
+                        <a:t>0.90</a:t>
+                      </a:r>
+                    </a:p>
+                  </a:txBody>
+                  <a:tcPr marL="68580" marR="68580" marT="0" marB="0" anchor="ctr"/>
+                </a:tc>
+                <a:extLst>
+                  <a:ext uri="{0D108BD9-81ED-4DB2-BD59-A6C34878D82A}">
+                    <a16:rowId xmlns:a16="http://schemas.microsoft.com/office/drawing/2014/main" val="10003"/>
+                  </a:ext>
+                </a:extLst>
+              </a:tr>
+              <a:tr h="370000">
+                <a:tc>
+                  <a:txBody>
+                    <a:bodyPr/>
+                    <a:lstStyle/>
+                    <a:p>
+                      <a:pPr algn="l"/>
+                      <a:r>
+                        <a:rPr lang="en-US" sz="1400" dirty="0"/>
+                        <a:t>Often</a:t>
+                      </a:r>
+                    </a:p>
+                  </a:txBody>
+                  <a:tcPr marL="68580" marR="68580" marT="0" marB="0" anchor="ctr"/>
+                </a:tc>
+                <a:tc>
+                  <a:txBody>
+                    <a:bodyPr/>
+                    <a:lstStyle/>
+                    <a:p>
+                      <a:pPr algn="ctr"/>
+                      <a:r>
+                        <a:rPr lang="en-US" sz="1400" dirty="0"/>
+                        <a:t>2</a:t>
+                      </a:r>
+                    </a:p>
+                  </a:txBody>
+                  <a:tcPr marL="68580" marR="68580" marT="0" marB="0" anchor="ctr"/>
+                </a:tc>
+                <a:tc>
+                  <a:txBody>
+                    <a:bodyPr/>
+                    <a:lstStyle/>
+                    <a:p>
+                      <a:pPr algn="ctr"/>
+                      <a:r>
+                        <a:rPr lang="en-US" sz="1400" dirty="0"/>
+                        <a:t>0.10</a:t>
+                      </a:r>
+                    </a:p>
+                  </a:txBody>
+                  <a:tcPr marL="68580" marR="68580" marT="0" marB="0" anchor="ctr"/>
+                </a:tc>
+                <a:tc>
+                  <a:txBody>
+                    <a:bodyPr/>
+                    <a:lstStyle/>
+                    <a:p>
+                      <a:pPr algn="ctr"/>
+                      <a:r>
+                        <a:rPr lang="en-US" sz="1400" dirty="0"/>
+                        <a:t>1.00</a:t>
+                      </a:r>
+                    </a:p>
+                  </a:txBody>
+                  <a:tcPr marL="68580" marR="68580" marT="0" marB="0" anchor="ctr"/>
+                </a:tc>
+                <a:extLst>
+                  <a:ext uri="{0D108BD9-81ED-4DB2-BD59-A6C34878D82A}">
+                    <a16:rowId xmlns:a16="http://schemas.microsoft.com/office/drawing/2014/main" val="10004"/>
+                  </a:ext>
+                </a:extLst>
+              </a:tr>
+              <a:tr h="370000">
+                <a:tc>
+                  <a:txBody>
+                    <a:bodyPr/>
+                    <a:lstStyle/>
+                    <a:p>
+                      <a:pPr algn="l"/>
+                      <a:r>
+                        <a:rPr lang="en-US" sz="1400" dirty="0"/>
+                        <a:t>Total</a:t>
+                      </a:r>
+                    </a:p>
+                  </a:txBody>
+                  <a:tcPr marL="68580" marR="68580" marT="0" marB="0" anchor="ctr"/>
+                </a:tc>
+                <a:tc>
+                  <a:txBody>
+                    <a:bodyPr/>
+                    <a:lstStyle/>
+                    <a:p>
+                      <a:pPr algn="ctr"/>
+                      <a:r>
+                        <a:rPr lang="en-US" sz="1400" dirty="0"/>
+                        <a:t>20</a:t>
+                      </a:r>
+                    </a:p>
+                  </a:txBody>
+                  <a:tcPr marL="68580" marR="68580" marT="0" marB="0" anchor="ctr"/>
+                </a:tc>
+                <a:tc>
+                  <a:txBody>
+                    <a:bodyPr/>
+                    <a:lstStyle/>
+                    <a:p>
+                      <a:pPr algn="ctr"/>
+                      <a:r>
+                        <a:rPr lang="en-US" sz="1400" dirty="0"/>
+                        <a:t>1.00</a:t>
+                      </a:r>
+                    </a:p>
+                  </a:txBody>
+                  <a:tcPr marL="68580" marR="68580" marT="0" marB="0" anchor="ctr"/>
+                </a:tc>
+                <a:tc>
+                  <a:txBody>
+                    <a:bodyPr/>
+                    <a:lstStyle/>
+                    <a:p>
+                      <a:pPr algn="ctr"/>
+                      <a:endParaRPr/>
+                    </a:p>
+                  </a:txBody>
+                  <a:tcPr marL="68580" marR="68580" marT="0" marB="0" anchor="ctr"/>
+                </a:tc>
+                <a:extLst>
+                  <a:ext uri="{0D108BD9-81ED-4DB2-BD59-A6C34878D82A}">
+                    <a16:rowId xmlns:a16="http://schemas.microsoft.com/office/drawing/2014/main" val="10005"/>
+                  </a:ext>
+                </a:extLst>
+              </a:tr>
+            </a:tbl>
+          </a:graphicData>
+        </a:graphic>
+      </p:graphicFrame>
+      <p:sp>
+        <p:nvSpPr>
+          <p:cNvPr id="5" name="Takeaway"/>
+          <p:cNvSpPr txBox="1"/>
+          <p:nvPr/>
+        </p:nvSpPr>
+        <p:spPr>
+          <a:xfrm>
+            <a:off x="6400800" y="4230000"/>
+            <a:ext cx="5100000" cy="1400000"/>
+          </a:xfrm>
+          <a:prstGeom prst="rect">
+            <a:avLst/>
+          </a:prstGeom>
+          <a:noFill/>
+        </p:spPr>
+        <p:txBody>
+          <a:bodyPr wrap="square">
+            <a:normAutofit/>
+          </a:bodyPr>
+          <a:lstStyle/>
+          <a:p>
+            <a:pPr marL="0" indent="0">
+              <a:buNone/>
+            </a:pPr>
+            <a:r>
+              <a:rPr lang="en-US" sz="1500" b="1" dirty="0">
+                <a:solidFill>
+                  <a:srgbClr val="C00000"/>
+                </a:solidFill>
+              </a:rPr>
+              <a:t>Modal category: Never. Pew's 743 teens gave 0.39, 0.29, 0.24, 0.08 – 20 students landed within a few points of them.</a:t>
+            </a:r>
+          </a:p>
+        </p:txBody>
+      </p:sp>
+    </p:spTree>
+    <p:extLst>
+      <p:ext uri="{BB962C8B-B14F-4D97-AF65-F5344CB8AC3E}">
+        <p14:creationId xmlns:p14="http://schemas.microsoft.com/office/powerpoint/2010/main" val="1517484003"/>
+      </p:ext>
+    </p:extLst>
+  </p:cSld>
+  <p:clrMapOvr>
+    <a:masterClrMapping/>
+  </p:clrMapOvr>
+  <p:timing>
+    <p:tnLst>
+      <p:par>
+        <p:cTn id="1" dur="indefinite" restart="never" nodeType="tmRoot">
+          <p:childTnLst>
+            <p:seq concurrent="1" nextAc="seek">
+              <p:cTn id="2" dur="indefinite" nodeType="mainSeq">
+                <p:childTnLst>
+                  <p:par>
+                    <p:cTn id="3" fill="hold">
+                      <p:stCondLst>
+                        <p:cond delay="indefinite"/>
+                      </p:stCondLst>
+                      <p:childTnLst>
+                        <p:par>
+                          <p:cTn id="4" fill="hold">
+                            <p:stCondLst>
+                              <p:cond delay="0"/>
+                            </p:stCondLst>
+                            <p:childTnLst>
+                              <p:par>
+                                <p:cTn id="5" presetID="1" presetClass="entr" presetSubtype="0" fill="hold" nodeType="clickEffect">
+                                  <p:stCondLst>
+                                    <p:cond delay="0"/>
+                                  </p:stCondLst>
+                                  <p:childTnLst>
+                                    <p:set>
+                                      <p:cBhvr>
+                                        <p:cTn id="6" dur="1" fill="hold">
+                                          <p:stCondLst>
+                                            <p:cond delay="0"/>
+                                          </p:stCondLst>
+                                        </p:cTn>
+                                        <p:tgtEl>
+                                          <p:spTgt spid="4"/>
+                                        </p:tgtEl>
+                                        <p:attrNameLst>
+                                          <p:attrName>style.visibility</p:attrName>
+                                        </p:attrNameLst>
+                                      </p:cBhvr>
+                                      <p:to>
+                                        <p:strVal val="visible"/>
+                                      </p:to>
+                                    </p:set>
+                                  </p:childTnLst>
+                                </p:cTn>
+                              </p:par>
+                            </p:childTnLst>
+                          </p:cTn>
+                        </p:par>
+                      </p:childTnLst>
+                    </p:cTn>
+                  </p:par>
+                  <p:par>
+                    <p:cTn id="7" fill="hold">
+                      <p:stCondLst>
+                        <p:cond delay="indefinite"/>
+                      </p:stCondLst>
+                      <p:childTnLst>
+                        <p:par>
+                          <p:cTn id="8" fill="hold">
+                            <p:stCondLst>
+                              <p:cond delay="0"/>
+                            </p:stCondLst>
+                            <p:childTnLst>
+                              <p:par>
+                                <p:cTn id="9" presetID="1" presetClass="entr" presetSubtype="0" fill="hold" nodeType="clickEffect">
+                                  <p:stCondLst>
+                                    <p:cond delay="0"/>
+                                  </p:stCondLst>
+                                  <p:childTnLst>
+                                    <p:set>
+                                      <p:cBhvr>
+                                        <p:cTn id="10" dur="1" fill="hold">
+                                          <p:stCondLst>
+                                            <p:cond delay="0"/>
+                                          </p:stCondLst>
+                                        </p:cTn>
+                                        <p:tgtEl>
+                                          <p:spTgt spid="5"/>
+                                        </p:tgtEl>
+                                        <p:attrNameLst>
+                                          <p:attrName>style.visibility</p:attrName>
+                                        </p:attrNameLst>
+                                      </p:cBhvr>
+                                      <p:to>
+                                        <p:strVal val="visible"/>
+                                      </p:to>
+                                    </p:set>
+                                  </p:childTnLst>
+                                </p:cTn>
+                              </p:par>
+                            </p:childTnLst>
+                          </p:cTn>
+                        </p:par>
+                      </p:childTnLst>
+                    </p:cTn>
+                  </p:par>
+                </p:childTnLst>
+              </p:cTn>
+              <p:prevCondLst>
+                <p:cond evt="onPrev" delay="0">
+                  <p:tgtEl>
+                    <p:sldTgt/>
+                  </p:tgtEl>
+                </p:cond>
+              </p:prevCondLst>
+              <p:nextCondLst>
+                <p:cond evt="onNext" delay="0">
+                  <p:tgtEl>
+                    <p:sldTgt/>
+                  </p:tgtEl>
+                </p:cond>
+              </p:nextCondLst>
+            </p:seq>
+          </p:childTnLst>
+        </p:cTn>
+      </p:par>
+    </p:tnLst>
+  </p:timing>
+</p:sld>
+</file>
+
+<file path=ppt/slides/slide13.xml><?xml version="1.0" encoding="utf-8"?>
+<p:sld xmlns:a="http://schemas.openxmlformats.org/drawingml/2006/main" xmlns:r="http://schemas.openxmlformats.org/officeDocument/2006/relationships" xmlns:p="http://schemas.openxmlformats.org/presentationml/2006/main">
+  <p:cSld>
+    <p:spTree>
+      <p:nvGrpSpPr>
+        <p:cNvPr id="1" name=""/>
+        <p:cNvGrpSpPr/>
+        <p:nvPr/>
+      </p:nvGrpSpPr>
+      <p:grpSpPr>
+        <a:xfrm>
+          <a:off x="0" y="0"/>
+          <a:ext cx="0" cy="0"/>
+          <a:chOff x="0" y="0"/>
+          <a:chExt cx="0" cy="0"/>
+        </a:xfrm>
+      </p:grpSpPr>
+      <p:sp>
+        <p:nvSpPr>
+          <p:cNvPr id="6" name="Rectangle: Rounded Corners 5">
+            <a:extLst>
+              <a:ext uri="{FF2B5EF4-FFF2-40B4-BE49-F238E27FC236}">
+                <a16:creationId xmlns:a16="http://schemas.microsoft.com/office/drawing/2014/main" id="{2EC7F35D-317F-28D2-BBCE-99D9B2A1FD57}"/>
+              </a:ext>
+            </a:extLst>
+          </p:cNvPr>
+          <p:cNvSpPr/>
+          <p:nvPr/>
+        </p:nvSpPr>
+        <p:spPr>
+          <a:xfrm>
+            <a:off x="1021247" y="2501144"/>
+            <a:ext cx="3380510" cy="701963"/>
+          </a:xfrm>
+          <a:prstGeom prst="roundRect">
+            <a:avLst/>
+          </a:prstGeom>
+        </p:spPr>
+        <p:style>
+          <a:lnRef idx="2">
+            <a:schemeClr val="accent2">
+              <a:shade val="15000"/>
+            </a:schemeClr>
+          </a:lnRef>
+          <a:fillRef idx="1">
+            <a:schemeClr val="accent2"/>
+          </a:fillRef>
+          <a:effectRef idx="0">
+            <a:schemeClr val="accent2"/>
+          </a:effectRef>
+          <a:fontRef idx="minor">
+            <a:schemeClr val="lt1"/>
+          </a:fontRef>
+        </p:style>
+        <p:txBody>
+          <a:bodyPr rtlCol="0" anchor="ctr"/>
+          <a:lstStyle/>
+          <a:p>
+            <a:pPr algn="ctr"/>
+            <a:r>
+              <a:rPr lang="en-US" sz="2800" dirty="0"/>
+              <a:t>Qualitative Variables</a:t>
+            </a:r>
+          </a:p>
+        </p:txBody>
+      </p:sp>
+      <p:sp>
+        <p:nvSpPr>
+          <p:cNvPr id="7" name="Rectangle: Rounded Corners 6">
+            <a:extLst>
+              <a:ext uri="{FF2B5EF4-FFF2-40B4-BE49-F238E27FC236}">
+                <a16:creationId xmlns:a16="http://schemas.microsoft.com/office/drawing/2014/main" id="{97881567-2056-16CB-4560-290AC5D327DC}"/>
+              </a:ext>
+            </a:extLst>
+          </p:cNvPr>
+          <p:cNvSpPr/>
+          <p:nvPr/>
+        </p:nvSpPr>
+        <p:spPr>
+          <a:xfrm>
+            <a:off x="7808716" y="2514998"/>
+            <a:ext cx="3468883" cy="701963"/>
+          </a:xfrm>
+          <a:prstGeom prst="roundRect">
+            <a:avLst/>
+          </a:prstGeom>
+        </p:spPr>
+        <p:style>
+          <a:lnRef idx="2">
+            <a:schemeClr val="accent2">
+              <a:shade val="15000"/>
+            </a:schemeClr>
+          </a:lnRef>
+          <a:fillRef idx="1">
+            <a:schemeClr val="accent2"/>
+          </a:fillRef>
+          <a:effectRef idx="0">
+            <a:schemeClr val="accent2"/>
+          </a:effectRef>
+          <a:fontRef idx="minor">
+            <a:schemeClr val="lt1"/>
+          </a:fontRef>
+        </p:style>
+        <p:txBody>
+          <a:bodyPr rtlCol="0" anchor="ctr"/>
+          <a:lstStyle/>
+          <a:p>
+            <a:pPr algn="ctr"/>
+            <a:r>
+              <a:rPr lang="en-US" sz="2800" dirty="0"/>
+              <a:t>Quantitative Variables</a:t>
+            </a:r>
+          </a:p>
+        </p:txBody>
+      </p:sp>
+      <p:sp>
+        <p:nvSpPr>
+          <p:cNvPr id="8" name="TextBox 7">
+            <a:extLst>
+              <a:ext uri="{FF2B5EF4-FFF2-40B4-BE49-F238E27FC236}">
+                <a16:creationId xmlns:a16="http://schemas.microsoft.com/office/drawing/2014/main" id="{1660F8CB-99D1-AF64-D302-A3630815D19A}"/>
+              </a:ext>
+            </a:extLst>
+          </p:cNvPr>
+          <p:cNvSpPr txBox="1"/>
+          <p:nvPr/>
+        </p:nvSpPr>
+        <p:spPr>
+          <a:xfrm>
+            <a:off x="1002773" y="3401690"/>
+            <a:ext cx="3380508" cy="1015663"/>
+          </a:xfrm>
+          <a:prstGeom prst="rect">
+            <a:avLst/>
+          </a:prstGeom>
+          <a:solidFill>
+            <a:schemeClr val="bg1"/>
+          </a:solidFill>
+        </p:spPr>
+        <p:style>
+          <a:lnRef idx="2">
+            <a:schemeClr val="accent1"/>
+          </a:lnRef>
+          <a:fillRef idx="1">
+            <a:schemeClr val="lt1"/>
+          </a:fillRef>
+          <a:effectRef idx="0">
+            <a:schemeClr val="accent1"/>
+          </a:effectRef>
+          <a:fontRef idx="minor">
+            <a:schemeClr val="dk1"/>
+          </a:fontRef>
+        </p:style>
+        <p:txBody>
+          <a:bodyPr wrap="square" rtlCol="0">
+            <a:spAutoFit/>
+          </a:bodyPr>
+          <a:lstStyle/>
+          <a:p>
+            <a:pPr marL="285750" indent="-285750">
+              <a:buFont typeface="Arial" panose="020B0604020202020204" pitchFamily="34" charset="0"/>
+              <a:buChar char="•"/>
+            </a:pPr>
+            <a:r>
+              <a:rPr lang="en-US" sz="2000" dirty="0"/>
+              <a:t>Bar graph</a:t>
+            </a:r>
+          </a:p>
+          <a:p>
+            <a:pPr marL="285750" indent="-285750">
+              <a:buFont typeface="Arial" panose="020B0604020202020204" pitchFamily="34" charset="0"/>
+              <a:buChar char="•"/>
+            </a:pPr>
+            <a:r>
+              <a:rPr lang="en-US" sz="2000" dirty="0"/>
+              <a:t>Pie Chart</a:t>
+            </a:r>
+          </a:p>
+          <a:p>
+            <a:pPr marL="285750" indent="-285750">
+              <a:buFont typeface="Arial" panose="020B0604020202020204" pitchFamily="34" charset="0"/>
+              <a:buChar char="•"/>
+            </a:pPr>
+            <a:r>
+              <a:rPr lang="en-US" sz="2000" dirty="0"/>
+              <a:t>Pareto Chart</a:t>
+            </a:r>
+          </a:p>
+        </p:txBody>
+      </p:sp>
+      <p:sp>
+        <p:nvSpPr>
+          <p:cNvPr id="10" name="Rectangle 9">
+            <a:extLst>
+              <a:ext uri="{FF2B5EF4-FFF2-40B4-BE49-F238E27FC236}">
+                <a16:creationId xmlns:a16="http://schemas.microsoft.com/office/drawing/2014/main" id="{D5155137-1F8F-B30B-6371-056BD66E46D4}"/>
+              </a:ext>
+            </a:extLst>
+          </p:cNvPr>
+          <p:cNvSpPr/>
+          <p:nvPr/>
+        </p:nvSpPr>
+        <p:spPr>
+          <a:xfrm>
+            <a:off x="4290919" y="133926"/>
+            <a:ext cx="3406959" cy="701963"/>
+          </a:xfrm>
+          <a:prstGeom prst="rect">
+            <a:avLst/>
+          </a:prstGeom>
+        </p:spPr>
+        <p:style>
+          <a:lnRef idx="2">
+            <a:schemeClr val="accent1">
+              <a:shade val="15000"/>
+            </a:schemeClr>
+          </a:lnRef>
+          <a:fillRef idx="1">
+            <a:schemeClr val="accent1"/>
+          </a:fillRef>
+          <a:effectRef idx="0">
+            <a:schemeClr val="accent1"/>
+          </a:effectRef>
+          <a:fontRef idx="minor">
+            <a:schemeClr val="lt1"/>
+          </a:fontRef>
+        </p:style>
+        <p:txBody>
+          <a:bodyPr rtlCol="0" anchor="ctr"/>
+          <a:lstStyle/>
+          <a:p>
+            <a:pPr algn="ctr"/>
+            <a:r>
+              <a:rPr lang="en-US" dirty="0"/>
+              <a:t>Graphical Descriptions Of Data</a:t>
+            </a:r>
+          </a:p>
+        </p:txBody>
+      </p:sp>
+      <p:cxnSp>
+        <p:nvCxnSpPr>
+          <p:cNvPr id="12" name="Connector: Elbow 11">
+            <a:extLst>
+              <a:ext uri="{FF2B5EF4-FFF2-40B4-BE49-F238E27FC236}">
+                <a16:creationId xmlns:a16="http://schemas.microsoft.com/office/drawing/2014/main" id="{0E4B24D7-47EA-F860-D406-1737EE3EAC68}"/>
+              </a:ext>
+            </a:extLst>
+          </p:cNvPr>
+          <p:cNvCxnSpPr>
+            <a:cxnSpLocks/>
+            <a:stCxn id="25" idx="1"/>
+            <a:endCxn id="6" idx="0"/>
+          </p:cNvCxnSpPr>
+          <p:nvPr/>
+        </p:nvCxnSpPr>
+        <p:spPr>
+          <a:xfrm rot="10800000" flipV="1">
+            <a:off x="2711503" y="1524062"/>
+            <a:ext cx="1671779" cy="977081"/>
+          </a:xfrm>
+          <a:prstGeom prst="bentConnector2">
+            <a:avLst/>
+          </a:prstGeom>
+          <a:ln w="76200">
+            <a:tailEnd type="triangle"/>
+          </a:ln>
+        </p:spPr>
+        <p:style>
+          <a:lnRef idx="1">
+            <a:schemeClr val="accent1"/>
+          </a:lnRef>
+          <a:fillRef idx="0">
+            <a:schemeClr val="accent1"/>
+          </a:fillRef>
+          <a:effectRef idx="0">
+            <a:schemeClr val="accent1"/>
+          </a:effectRef>
+          <a:fontRef idx="minor">
+            <a:schemeClr val="tx1"/>
+          </a:fontRef>
+        </p:style>
+      </p:cxnSp>
+      <p:cxnSp>
+        <p:nvCxnSpPr>
+          <p:cNvPr id="14" name="Connector: Elbow 13">
+            <a:extLst>
+              <a:ext uri="{FF2B5EF4-FFF2-40B4-BE49-F238E27FC236}">
+                <a16:creationId xmlns:a16="http://schemas.microsoft.com/office/drawing/2014/main" id="{C3A0F894-932E-A39B-EE28-C0F756836744}"/>
+              </a:ext>
+            </a:extLst>
+          </p:cNvPr>
+          <p:cNvCxnSpPr>
+            <a:cxnSpLocks/>
+            <a:stCxn id="25" idx="3"/>
+            <a:endCxn id="7" idx="0"/>
+          </p:cNvCxnSpPr>
+          <p:nvPr/>
+        </p:nvCxnSpPr>
+        <p:spPr>
+          <a:xfrm>
+            <a:off x="7790240" y="1524063"/>
+            <a:ext cx="1752918" cy="990935"/>
+          </a:xfrm>
+          <a:prstGeom prst="bentConnector2">
+            <a:avLst/>
+          </a:prstGeom>
+          <a:ln w="76200">
+            <a:tailEnd type="triangle"/>
+          </a:ln>
+        </p:spPr>
+        <p:style>
+          <a:lnRef idx="1">
+            <a:schemeClr val="accent1"/>
+          </a:lnRef>
+          <a:fillRef idx="0">
+            <a:schemeClr val="accent1"/>
+          </a:fillRef>
+          <a:effectRef idx="0">
+            <a:schemeClr val="accent1"/>
+          </a:effectRef>
+          <a:fontRef idx="minor">
+            <a:schemeClr val="tx1"/>
+          </a:fontRef>
+        </p:style>
+      </p:cxnSp>
+      <p:sp>
+        <p:nvSpPr>
+          <p:cNvPr id="15" name="Rectangle 14">
+            <a:extLst>
+              <a:ext uri="{FF2B5EF4-FFF2-40B4-BE49-F238E27FC236}">
+                <a16:creationId xmlns:a16="http://schemas.microsoft.com/office/drawing/2014/main" id="{BB470C11-E3DA-41FB-321D-DF57E25C9C0E}"/>
+              </a:ext>
+            </a:extLst>
+          </p:cNvPr>
+          <p:cNvSpPr/>
+          <p:nvPr/>
+        </p:nvSpPr>
+        <p:spPr>
+          <a:xfrm>
+            <a:off x="4392520" y="4692471"/>
+            <a:ext cx="3406959" cy="701963"/>
+          </a:xfrm>
+          <a:prstGeom prst="rect">
+            <a:avLst/>
+          </a:prstGeom>
+        </p:spPr>
+        <p:style>
+          <a:lnRef idx="2">
+            <a:schemeClr val="accent1">
+              <a:shade val="15000"/>
+            </a:schemeClr>
+          </a:lnRef>
+          <a:fillRef idx="1">
+            <a:schemeClr val="accent1"/>
+          </a:fillRef>
+          <a:effectRef idx="0">
+            <a:schemeClr val="accent1"/>
+          </a:effectRef>
+          <a:fontRef idx="minor">
+            <a:schemeClr val="lt1"/>
+          </a:fontRef>
+        </p:style>
+        <p:txBody>
+          <a:bodyPr rtlCol="0" anchor="ctr"/>
+          <a:lstStyle/>
+          <a:p>
+            <a:pPr algn="ctr"/>
+            <a:r>
+              <a:rPr lang="en-US" sz="2400" dirty="0"/>
+              <a:t>Describe key features of the distribution</a:t>
+            </a:r>
+          </a:p>
+        </p:txBody>
+      </p:sp>
+      <p:sp>
+        <p:nvSpPr>
+          <p:cNvPr id="16" name="TextBox 15">
+            <a:extLst>
+              <a:ext uri="{FF2B5EF4-FFF2-40B4-BE49-F238E27FC236}">
+                <a16:creationId xmlns:a16="http://schemas.microsoft.com/office/drawing/2014/main" id="{DC7F01EC-1027-1A76-3043-99F0E76481CA}"/>
+              </a:ext>
+            </a:extLst>
+          </p:cNvPr>
+          <p:cNvSpPr txBox="1"/>
+          <p:nvPr/>
+        </p:nvSpPr>
+        <p:spPr>
+          <a:xfrm>
+            <a:off x="4404748" y="5567343"/>
+            <a:ext cx="3394731" cy="1200329"/>
+          </a:xfrm>
+          <a:prstGeom prst="rect">
+            <a:avLst/>
+          </a:prstGeom>
+          <a:solidFill>
+            <a:schemeClr val="bg1"/>
+          </a:solidFill>
+        </p:spPr>
+        <p:style>
+          <a:lnRef idx="2">
+            <a:schemeClr val="accent1"/>
+          </a:lnRef>
+          <a:fillRef idx="1">
+            <a:schemeClr val="lt1"/>
+          </a:fillRef>
+          <a:effectRef idx="0">
+            <a:schemeClr val="accent1"/>
+          </a:effectRef>
+          <a:fontRef idx="minor">
+            <a:schemeClr val="dk1"/>
+          </a:fontRef>
+        </p:style>
+        <p:txBody>
+          <a:bodyPr wrap="square" rtlCol="0">
+            <a:spAutoFit/>
+          </a:bodyPr>
+          <a:lstStyle/>
+          <a:p>
+            <a:pPr marL="285750" indent="-285750">
+              <a:buFont typeface="Arial" panose="020B0604020202020204" pitchFamily="34" charset="0"/>
+              <a:buChar char="•"/>
+            </a:pPr>
+            <a:r>
+              <a:rPr lang="en-US" dirty="0"/>
+              <a:t>Modal Category</a:t>
+            </a:r>
+          </a:p>
+          <a:p>
+            <a:pPr marL="285750" indent="-285750">
+              <a:buFont typeface="Arial" panose="020B0604020202020204" pitchFamily="34" charset="0"/>
+              <a:buChar char="•"/>
+            </a:pPr>
+            <a:r>
+              <a:rPr lang="en-US" dirty="0"/>
+              <a:t>Shape</a:t>
+            </a:r>
+          </a:p>
+          <a:p>
+            <a:pPr marL="285750" indent="-285750">
+              <a:buFont typeface="Arial" panose="020B0604020202020204" pitchFamily="34" charset="0"/>
+              <a:buChar char="•"/>
+            </a:pPr>
+            <a:r>
+              <a:rPr lang="en-US" dirty="0"/>
+              <a:t>Center</a:t>
+            </a:r>
+          </a:p>
+          <a:p>
+            <a:pPr marL="285750" indent="-285750">
+              <a:buFont typeface="Arial" panose="020B0604020202020204" pitchFamily="34" charset="0"/>
+              <a:buChar char="•"/>
+            </a:pPr>
+            <a:r>
+              <a:rPr lang="en-US" dirty="0"/>
+              <a:t>Spread</a:t>
+            </a:r>
+          </a:p>
+        </p:txBody>
+      </p:sp>
+      <p:cxnSp>
+        <p:nvCxnSpPr>
+          <p:cNvPr id="18" name="Connector: Elbow 17">
+            <a:extLst>
+              <a:ext uri="{FF2B5EF4-FFF2-40B4-BE49-F238E27FC236}">
+                <a16:creationId xmlns:a16="http://schemas.microsoft.com/office/drawing/2014/main" id="{433238C4-A2B4-5CCD-B93B-C3EEBA196CA4}"/>
+              </a:ext>
+            </a:extLst>
+          </p:cNvPr>
+          <p:cNvCxnSpPr>
+            <a:cxnSpLocks/>
+            <a:stCxn id="8" idx="2"/>
+            <a:endCxn id="15" idx="1"/>
+          </p:cNvCxnSpPr>
+          <p:nvPr/>
+        </p:nvCxnSpPr>
+        <p:spPr>
+          <a:xfrm rot="16200000" flipH="1">
+            <a:off x="3229723" y="3880656"/>
+            <a:ext cx="626100" cy="1699493"/>
+          </a:xfrm>
+          <a:prstGeom prst="bentConnector2">
+            <a:avLst/>
+          </a:prstGeom>
+          <a:ln w="76200">
+            <a:tailEnd type="triangle"/>
+          </a:ln>
+        </p:spPr>
+        <p:style>
+          <a:lnRef idx="1">
+            <a:schemeClr val="accent1"/>
+          </a:lnRef>
+          <a:fillRef idx="0">
+            <a:schemeClr val="accent1"/>
+          </a:fillRef>
+          <a:effectRef idx="0">
+            <a:schemeClr val="accent1"/>
+          </a:effectRef>
+          <a:fontRef idx="minor">
+            <a:schemeClr val="tx1"/>
+          </a:fontRef>
+        </p:style>
+      </p:cxnSp>
+      <p:cxnSp>
+        <p:nvCxnSpPr>
+          <p:cNvPr id="19" name="Connector: Elbow 18">
+            <a:extLst>
+              <a:ext uri="{FF2B5EF4-FFF2-40B4-BE49-F238E27FC236}">
+                <a16:creationId xmlns:a16="http://schemas.microsoft.com/office/drawing/2014/main" id="{BA6A9435-F7E6-7CDC-62E5-FCB2A9FCE741}"/>
+              </a:ext>
+            </a:extLst>
+          </p:cNvPr>
+          <p:cNvCxnSpPr>
+            <a:cxnSpLocks/>
+            <a:stCxn id="9" idx="2"/>
+            <a:endCxn id="15" idx="3"/>
+          </p:cNvCxnSpPr>
+          <p:nvPr/>
+        </p:nvCxnSpPr>
+        <p:spPr>
+          <a:xfrm rot="5400000">
+            <a:off x="8358269" y="3858563"/>
+            <a:ext cx="626101" cy="1743679"/>
+          </a:xfrm>
+          <a:prstGeom prst="bentConnector2">
+            <a:avLst/>
+          </a:prstGeom>
+          <a:ln w="76200">
+            <a:tailEnd type="triangle"/>
+          </a:ln>
+        </p:spPr>
+        <p:style>
+          <a:lnRef idx="1">
+            <a:schemeClr val="accent1"/>
+          </a:lnRef>
+          <a:fillRef idx="0">
+            <a:schemeClr val="accent1"/>
+          </a:fillRef>
+          <a:effectRef idx="0">
+            <a:schemeClr val="accent1"/>
+          </a:effectRef>
+          <a:fontRef idx="minor">
+            <a:schemeClr val="tx1"/>
+          </a:fontRef>
+        </p:style>
+      </p:cxnSp>
+      <p:sp>
+        <p:nvSpPr>
+          <p:cNvPr id="9" name="TextBox 8">
+            <a:extLst>
+              <a:ext uri="{FF2B5EF4-FFF2-40B4-BE49-F238E27FC236}">
+                <a16:creationId xmlns:a16="http://schemas.microsoft.com/office/drawing/2014/main" id="{91966676-BC35-3C86-F6B0-3253A01BE201}"/>
+              </a:ext>
+            </a:extLst>
+          </p:cNvPr>
+          <p:cNvSpPr txBox="1"/>
+          <p:nvPr/>
+        </p:nvSpPr>
+        <p:spPr>
+          <a:xfrm>
+            <a:off x="7808717" y="3401689"/>
+            <a:ext cx="3468882" cy="1015663"/>
+          </a:xfrm>
+          <a:prstGeom prst="rect">
+            <a:avLst/>
+          </a:prstGeom>
+          <a:solidFill>
+            <a:schemeClr val="bg1"/>
+          </a:solidFill>
+        </p:spPr>
+        <p:style>
+          <a:lnRef idx="2">
+            <a:schemeClr val="accent1"/>
+          </a:lnRef>
+          <a:fillRef idx="1">
+            <a:schemeClr val="lt1"/>
+          </a:fillRef>
+          <a:effectRef idx="0">
+            <a:schemeClr val="accent1"/>
+          </a:effectRef>
+          <a:fontRef idx="minor">
+            <a:schemeClr val="dk1"/>
+          </a:fontRef>
+        </p:style>
+        <p:txBody>
+          <a:bodyPr wrap="square" rtlCol="0">
+            <a:spAutoFit/>
+          </a:bodyPr>
+          <a:lstStyle/>
+          <a:p>
+            <a:pPr marL="285750" indent="-285750">
+              <a:buFont typeface="Arial" panose="020B0604020202020204" pitchFamily="34" charset="0"/>
+              <a:buChar char="•"/>
+            </a:pPr>
+            <a:r>
+              <a:rPr lang="en-US" sz="2000" dirty="0"/>
+              <a:t>Dot Plot</a:t>
+            </a:r>
+          </a:p>
+          <a:p>
+            <a:pPr marL="285750" indent="-285750">
+              <a:buFont typeface="Arial" panose="020B0604020202020204" pitchFamily="34" charset="0"/>
+              <a:buChar char="•"/>
+            </a:pPr>
+            <a:r>
+              <a:rPr lang="en-US" sz="2000" dirty="0"/>
+              <a:t>Stem Chart</a:t>
+            </a:r>
+          </a:p>
+          <a:p>
+            <a:pPr marL="285750" indent="-285750">
+              <a:buFont typeface="Arial" panose="020B0604020202020204" pitchFamily="34" charset="0"/>
+              <a:buChar char="•"/>
+            </a:pPr>
+            <a:r>
+              <a:rPr lang="en-US" sz="2000" dirty="0">
+                <a:solidFill>
+                  <a:schemeClr val="tx1"/>
+                </a:solidFill>
+              </a:rPr>
+              <a:t>Histogram</a:t>
+            </a:r>
+            <a:r>
+              <a:rPr lang="en-US" sz="2000" dirty="0"/>
+              <a:t> </a:t>
+            </a:r>
+          </a:p>
+        </p:txBody>
+      </p:sp>
+      <p:sp>
+        <p:nvSpPr>
+          <p:cNvPr id="25" name="Rectangle: Rounded Corners 24">
+            <a:extLst>
+              <a:ext uri="{FF2B5EF4-FFF2-40B4-BE49-F238E27FC236}">
+                <a16:creationId xmlns:a16="http://schemas.microsoft.com/office/drawing/2014/main" id="{C40DF31A-AF91-AF49-1BB8-8D6E76C29BA4}"/>
+              </a:ext>
+            </a:extLst>
+          </p:cNvPr>
+          <p:cNvSpPr/>
+          <p:nvPr/>
+        </p:nvSpPr>
+        <p:spPr>
+          <a:xfrm>
+            <a:off x="4383281" y="1173081"/>
+            <a:ext cx="3406959" cy="701963"/>
+          </a:xfrm>
+          <a:prstGeom prst="roundRect">
+            <a:avLst/>
+          </a:prstGeom>
+        </p:spPr>
+        <p:style>
+          <a:lnRef idx="2">
+            <a:schemeClr val="accent1">
+              <a:shade val="15000"/>
+            </a:schemeClr>
+          </a:lnRef>
+          <a:fillRef idx="1">
+            <a:schemeClr val="accent1"/>
+          </a:fillRef>
+          <a:effectRef idx="0">
+            <a:schemeClr val="accent1"/>
+          </a:effectRef>
+          <a:fontRef idx="minor">
+            <a:schemeClr val="lt1"/>
+          </a:fontRef>
+        </p:style>
+        <p:txBody>
+          <a:bodyPr rtlCol="0" anchor="ctr"/>
+          <a:lstStyle/>
+          <a:p>
+            <a:pPr algn="ctr"/>
+            <a:r>
+              <a:rPr lang="en-US" dirty="0"/>
+              <a:t>Frequency Tables</a:t>
+            </a:r>
+          </a:p>
+        </p:txBody>
+      </p:sp>
+      <p:sp>
+        <p:nvSpPr>
+          <p:cNvPr id="28" name="Arrow: Down 27">
+            <a:extLst>
+              <a:ext uri="{FF2B5EF4-FFF2-40B4-BE49-F238E27FC236}">
+                <a16:creationId xmlns:a16="http://schemas.microsoft.com/office/drawing/2014/main" id="{81F32552-BCAB-7E67-B88C-5F1E3B211CC8}"/>
+              </a:ext>
+            </a:extLst>
+          </p:cNvPr>
+          <p:cNvSpPr/>
+          <p:nvPr/>
+        </p:nvSpPr>
+        <p:spPr>
+          <a:xfrm>
+            <a:off x="5886554" y="866958"/>
+            <a:ext cx="418890" cy="337127"/>
+          </a:xfrm>
+          <a:prstGeom prst="downArrow">
+            <a:avLst/>
+          </a:prstGeom>
+          <a:solidFill>
+            <a:schemeClr val="accent1">
+              <a:lumMod val="40000"/>
+              <a:lumOff val="60000"/>
+            </a:schemeClr>
+          </a:solidFill>
+        </p:spPr>
+        <p:style>
+          <a:lnRef idx="2">
+            <a:schemeClr val="accent1">
+              <a:shade val="15000"/>
+            </a:schemeClr>
+          </a:lnRef>
+          <a:fillRef idx="1">
+            <a:schemeClr val="accent1"/>
+          </a:fillRef>
+          <a:effectRef idx="0">
+            <a:schemeClr val="accent1"/>
+          </a:effectRef>
+          <a:fontRef idx="minor">
+            <a:schemeClr val="lt1"/>
+          </a:fontRef>
+        </p:style>
+        <p:txBody>
+          <a:bodyPr rtlCol="0" anchor="ctr"/>
+          <a:lstStyle/>
+          <a:p>
+            <a:pPr algn="ctr"/>
+            <a:endParaRPr lang="en-US"/>
+          </a:p>
+        </p:txBody>
+      </p:sp>
+      <p:cxnSp>
+        <p:nvCxnSpPr>
+          <p:cNvPr id="30" name="Straight Arrow Connector 29">
+            <a:extLst>
+              <a:ext uri="{FF2B5EF4-FFF2-40B4-BE49-F238E27FC236}">
+                <a16:creationId xmlns:a16="http://schemas.microsoft.com/office/drawing/2014/main" id="{291E9938-8966-4DC4-C588-135EC5244D53}"/>
+              </a:ext>
+            </a:extLst>
+          </p:cNvPr>
+          <p:cNvCxnSpPr>
+            <a:stCxn id="25" idx="2"/>
+            <a:endCxn id="15" idx="0"/>
+          </p:cNvCxnSpPr>
+          <p:nvPr/>
+        </p:nvCxnSpPr>
+        <p:spPr>
+          <a:xfrm>
+            <a:off x="6086761" y="1875044"/>
+            <a:ext cx="9239" cy="2817427"/>
+          </a:xfrm>
+          <a:prstGeom prst="straightConnector1">
+            <a:avLst/>
+          </a:prstGeom>
+          <a:ln w="76200">
+            <a:tailEnd type="triangle"/>
+          </a:ln>
+        </p:spPr>
+        <p:style>
+          <a:lnRef idx="1">
+            <a:schemeClr val="accent1"/>
+          </a:lnRef>
+          <a:fillRef idx="0">
+            <a:schemeClr val="accent1"/>
+          </a:fillRef>
+          <a:effectRef idx="0">
+            <a:schemeClr val="accent1"/>
+          </a:effectRef>
+          <a:fontRef idx="minor">
+            <a:schemeClr val="tx1"/>
+          </a:fontRef>
+        </p:style>
+      </p:cxnSp>
+    </p:spTree>
+    <p:extLst>
+      <p:ext uri="{BB962C8B-B14F-4D97-AF65-F5344CB8AC3E}">
+        <p14:creationId xmlns:p14="http://schemas.microsoft.com/office/powerpoint/2010/main" val="779196973"/>
+      </p:ext>
+    </p:extLst>
+  </p:cSld>
+  <p:clrMapOvr>
+    <a:masterClrMapping/>
+  </p:clrMapOvr>
+</p:sld>
+</file>
+
+<file path=ppt/slides/slide14.xml><?xml version="1.0" encoding="utf-8"?>
+<p:sld xmlns:a="http://schemas.openxmlformats.org/drawingml/2006/main" xmlns:r="http://schemas.openxmlformats.org/officeDocument/2006/relationships" xmlns:p="http://schemas.openxmlformats.org/presentationml/2006/main">
+  <p:cSld>
+    <p:spTree>
+      <p:nvGrpSpPr>
+        <p:cNvPr id="1" name=""/>
+        <p:cNvGrpSpPr/>
+        <p:nvPr/>
+      </p:nvGrpSpPr>
+      <p:grpSpPr>
+        <a:xfrm>
+          <a:off x="0" y="0"/>
+          <a:ext cx="0" cy="0"/>
+          <a:chOff x="0" y="0"/>
+          <a:chExt cx="0" cy="0"/>
+        </a:xfrm>
+      </p:grpSpPr>
+      <p:sp>
+        <p:nvSpPr>
           <p:cNvPr id="2" name="Title 1"/>
           <p:cNvSpPr>
             <a:spLocks noGrp="1"/>
@@ -6626,7 +9052,7 @@
             </a:pPr>
             <a:r>
               <a:rPr lang="en-US" sz="1600" b="1" dirty="0"/>
-              <a:t>Build the frequency table. What is the modal value? Is the distribution symmetric, or skewed – and which way?</a:t>
+              <a:t>Build the frequency table. Which value comes up most often? Where do the values pile up, and how do they trail off?</a:t>
             </a:r>
           </a:p>
         </p:txBody>
@@ -7050,7 +9476,7 @@
                   <a:srgbClr val="C00000"/>
                 </a:solidFill>
               </a:rPr>
-              <a:t>Mode = 1. Median = 1 but the mean is 1.5: the mean is pulled above the median by the long right tail, so the distribution is skewed right.</a:t>
+              <a:t>The most common value is 1, but the mean is 1.5: the few large values pull the mean above where the bulk of the data sit – the same effect you saw on the center slide.</a:t>
             </a:r>
           </a:p>
         </p:txBody>
@@ -7188,7 +9614,7 @@
 </p:sld>
 </file>
 
-<file path=ppt/slides/slide11.xml><?xml version="1.0" encoding="utf-8"?>
+<file path=ppt/slides/slide15.xml><?xml version="1.0" encoding="utf-8"?>
 <p:sld xmlns:a="http://schemas.openxmlformats.org/drawingml/2006/main" xmlns:r="http://schemas.openxmlformats.org/officeDocument/2006/relationships" xmlns:p="http://schemas.openxmlformats.org/presentationml/2006/main">
   <p:cSld>
     <p:spTree>
@@ -7317,7 +9743,7 @@
 </p:sld>
 </file>
 
-<file path=ppt/slides/slide12.xml><?xml version="1.0" encoding="utf-8"?>
+<file path=ppt/slides/slide16.xml><?xml version="1.0" encoding="utf-8"?>
 <p:sld xmlns:a="http://schemas.openxmlformats.org/drawingml/2006/main" xmlns:r="http://schemas.openxmlformats.org/officeDocument/2006/relationships" xmlns:p="http://schemas.openxmlformats.org/presentationml/2006/main">
   <p:cSld>
     <p:spTree>
@@ -8444,7 +10870,7 @@
 </p:sld>
 </file>
 
-<file path=ppt/slides/slide13.xml><?xml version="1.0" encoding="utf-8"?>
+<file path=ppt/slides/slide17.xml><?xml version="1.0" encoding="utf-8"?>
 <p:sld xmlns:a="http://schemas.openxmlformats.org/drawingml/2006/main" xmlns:r="http://schemas.openxmlformats.org/officeDocument/2006/relationships" xmlns:p="http://schemas.openxmlformats.org/presentationml/2006/main">
   <p:cSld>
     <p:spTree>
@@ -8578,7 +11004,7 @@
 </p:sld>
 </file>
 
-<file path=ppt/slides/slide14.xml><?xml version="1.0" encoding="utf-8"?>
+<file path=ppt/slides/slide18.xml><?xml version="1.0" encoding="utf-8"?>
 <p:sld xmlns:a="http://schemas.openxmlformats.org/drawingml/2006/main" xmlns:r="http://schemas.openxmlformats.org/officeDocument/2006/relationships" xmlns:p="http://schemas.openxmlformats.org/presentationml/2006/main">
   <p:cSld>
     <p:spTree>
@@ -8672,7 +11098,7 @@
 </p:sld>
 </file>
 
-<file path=ppt/slides/slide15.xml><?xml version="1.0" encoding="utf-8"?>
+<file path=ppt/slides/slide19.xml><?xml version="1.0" encoding="utf-8"?>
 <p:sld xmlns:a="http://schemas.openxmlformats.org/drawingml/2006/main" xmlns:r="http://schemas.openxmlformats.org/officeDocument/2006/relationships" xmlns:p="http://schemas.openxmlformats.org/presentationml/2006/main">
   <p:cSld>
     <p:bg>
@@ -8964,466 +11390,6 @@
     <p:extLst>
       <p:ext uri="{BB962C8B-B14F-4D97-AF65-F5344CB8AC3E}">
         <p14:creationId xmlns:p14="http://schemas.microsoft.com/office/powerpoint/2010/main" val="17557199"/>
-      </p:ext>
-    </p:extLst>
-  </p:cSld>
-  <p:clrMapOvr>
-    <a:masterClrMapping/>
-  </p:clrMapOvr>
-</p:sld>
-</file>
-
-<file path=ppt/slides/slide16.xml><?xml version="1.0" encoding="utf-8"?>
-<p:sld xmlns:a="http://schemas.openxmlformats.org/drawingml/2006/main" xmlns:r="http://schemas.openxmlformats.org/officeDocument/2006/relationships" xmlns:p="http://schemas.openxmlformats.org/presentationml/2006/main">
-  <p:cSld>
-    <p:spTree>
-      <p:nvGrpSpPr>
-        <p:cNvPr id="1" name=""/>
-        <p:cNvGrpSpPr/>
-        <p:nvPr/>
-      </p:nvGrpSpPr>
-      <p:grpSpPr>
-        <a:xfrm>
-          <a:off x="0" y="0"/>
-          <a:ext cx="0" cy="0"/>
-          <a:chOff x="0" y="0"/>
-          <a:chExt cx="0" cy="0"/>
-        </a:xfrm>
-      </p:grpSpPr>
-      <p:pic>
-        <p:nvPicPr>
-          <p:cNvPr id="5" name="Picture 4">
-            <a:extLst>
-              <a:ext uri="{FF2B5EF4-FFF2-40B4-BE49-F238E27FC236}">
-                <a16:creationId xmlns:a16="http://schemas.microsoft.com/office/drawing/2014/main" id="{7EC6A261-0EA6-9E96-37C0-CB6898B1BD89}"/>
-              </a:ext>
-            </a:extLst>
-          </p:cNvPr>
-          <p:cNvPicPr>
-            <a:picLocks noChangeAspect="1"/>
-          </p:cNvPicPr>
-          <p:nvPr/>
-        </p:nvPicPr>
-        <p:blipFill>
-          <a:blip r:embed="rId2"/>
-          <a:stretch>
-            <a:fillRect/>
-          </a:stretch>
-        </p:blipFill>
-        <p:spPr>
-          <a:xfrm>
-            <a:off x="204974" y="1704974"/>
-            <a:ext cx="5891026" cy="3990975"/>
-          </a:xfrm>
-          <a:prstGeom prst="rect">
-            <a:avLst/>
-          </a:prstGeom>
-        </p:spPr>
-      </p:pic>
-      <p:pic>
-        <p:nvPicPr>
-          <p:cNvPr id="7" name="Picture 6">
-            <a:extLst>
-              <a:ext uri="{FF2B5EF4-FFF2-40B4-BE49-F238E27FC236}">
-                <a16:creationId xmlns:a16="http://schemas.microsoft.com/office/drawing/2014/main" id="{FAAAEAA6-C6FF-BCA1-1B38-7E475B4066C9}"/>
-              </a:ext>
-            </a:extLst>
-          </p:cNvPr>
-          <p:cNvPicPr>
-            <a:picLocks noChangeAspect="1"/>
-          </p:cNvPicPr>
-          <p:nvPr/>
-        </p:nvPicPr>
-        <p:blipFill>
-          <a:blip r:embed="rId3"/>
-          <a:stretch>
-            <a:fillRect/>
-          </a:stretch>
-        </p:blipFill>
-        <p:spPr>
-          <a:xfrm>
-            <a:off x="6200774" y="1478046"/>
-            <a:ext cx="5703693" cy="4217903"/>
-          </a:xfrm>
-          <a:prstGeom prst="rect">
-            <a:avLst/>
-          </a:prstGeom>
-        </p:spPr>
-      </p:pic>
-    </p:spTree>
-    <p:extLst>
-      <p:ext uri="{BB962C8B-B14F-4D97-AF65-F5344CB8AC3E}">
-        <p14:creationId xmlns:p14="http://schemas.microsoft.com/office/powerpoint/2010/main" val="2676625562"/>
-      </p:ext>
-    </p:extLst>
-  </p:cSld>
-  <p:clrMapOvr>
-    <a:masterClrMapping/>
-  </p:clrMapOvr>
-</p:sld>
-</file>
-
-<file path=ppt/slides/slide17.xml><?xml version="1.0" encoding="utf-8"?>
-<p:sld xmlns:a="http://schemas.openxmlformats.org/drawingml/2006/main" xmlns:r="http://schemas.openxmlformats.org/officeDocument/2006/relationships" xmlns:p="http://schemas.openxmlformats.org/presentationml/2006/main">
-  <p:cSld>
-    <p:spTree>
-      <p:nvGrpSpPr>
-        <p:cNvPr id="1" name=""/>
-        <p:cNvGrpSpPr/>
-        <p:nvPr/>
-      </p:nvGrpSpPr>
-      <p:grpSpPr>
-        <a:xfrm>
-          <a:off x="0" y="0"/>
-          <a:ext cx="0" cy="0"/>
-          <a:chOff x="0" y="0"/>
-          <a:chExt cx="0" cy="0"/>
-        </a:xfrm>
-      </p:grpSpPr>
-      <p:sp>
-        <p:nvSpPr>
-          <p:cNvPr id="3" name="Content Placeholder 2">
-            <a:extLst>
-              <a:ext uri="{FF2B5EF4-FFF2-40B4-BE49-F238E27FC236}">
-                <a16:creationId xmlns:a16="http://schemas.microsoft.com/office/drawing/2014/main" id="{8F09458B-9FCD-C074-086C-F92B55C26D73}"/>
-              </a:ext>
-            </a:extLst>
-          </p:cNvPr>
-          <p:cNvSpPr>
-            <a:spLocks noGrp="1"/>
-          </p:cNvSpPr>
-          <p:nvPr>
-            <p:ph idx="1"/>
-          </p:nvPr>
-        </p:nvSpPr>
-        <p:spPr/>
-        <p:txBody>
-          <a:bodyPr/>
-          <a:lstStyle/>
-          <a:p>
-            <a:r>
-              <a:rPr lang="en-US" b="1" dirty="0"/>
-              <a:t>Dot plots – </a:t>
-            </a:r>
-            <a:r>
-              <a:rPr lang="en-US" dirty="0"/>
-              <a:t>shows a dot for each observation placed above the value for that observation </a:t>
-            </a:r>
-          </a:p>
-          <a:p>
-            <a:pPr marL="0" indent="0">
-              <a:buNone/>
-            </a:pPr>
-            <a:endParaRPr lang="en-US" dirty="0"/>
-          </a:p>
-          <a:p>
-            <a:pPr marL="457200" lvl="1" indent="0">
-              <a:buNone/>
-            </a:pPr>
-            <a:r>
-              <a:rPr lang="en-US" b="1" dirty="0"/>
-              <a:t>Steps to construct a dot plot</a:t>
-            </a:r>
-          </a:p>
-          <a:p>
-            <a:pPr marL="914400" lvl="1" indent="-457200">
-              <a:buFont typeface="+mj-lt"/>
-              <a:buAutoNum type="arabicPeriod"/>
-            </a:pPr>
-            <a:r>
-              <a:rPr lang="en-US" b="1" dirty="0"/>
-              <a:t>Draw a horizontal line and mark the line with regular values of the variable</a:t>
-            </a:r>
-          </a:p>
-          <a:p>
-            <a:pPr marL="914400" lvl="1" indent="-457200">
-              <a:buFont typeface="+mj-lt"/>
-              <a:buAutoNum type="arabicPeriod"/>
-            </a:pPr>
-            <a:r>
-              <a:rPr lang="en-US" b="1" dirty="0"/>
-              <a:t>For each observation, place a dot above its value on the number line</a:t>
-            </a:r>
-          </a:p>
-          <a:p>
-            <a:pPr lvl="2">
-              <a:buFontTx/>
-              <a:buChar char="-"/>
-            </a:pPr>
-            <a:r>
-              <a:rPr lang="en-US" dirty="0"/>
-              <a:t>Works best with quantitative discrete data</a:t>
-            </a:r>
-          </a:p>
-          <a:p>
-            <a:pPr lvl="2">
-              <a:buFontTx/>
-              <a:buChar char="-"/>
-            </a:pPr>
-            <a:r>
-              <a:rPr lang="en-US" dirty="0"/>
-              <a:t>Doesn’t work well if the variable is continuous and takes on many distinct values…</a:t>
-            </a:r>
-          </a:p>
-          <a:p>
-            <a:pPr lvl="2">
-              <a:buFontTx/>
-              <a:buChar char="-"/>
-            </a:pPr>
-            <a:r>
-              <a:rPr lang="en-US" dirty="0"/>
-              <a:t>For continuous data, the values may need to be round to the nearest tenth or integer</a:t>
-            </a:r>
-          </a:p>
-          <a:p>
-            <a:pPr marL="457200" lvl="1" indent="0">
-              <a:buNone/>
-            </a:pPr>
-            <a:endParaRPr lang="en-US" dirty="0"/>
-          </a:p>
-        </p:txBody>
-      </p:sp>
-      <p:sp>
-        <p:nvSpPr>
-          <p:cNvPr id="4" name="Title 1">
-            <a:extLst>
-              <a:ext uri="{FF2B5EF4-FFF2-40B4-BE49-F238E27FC236}">
-                <a16:creationId xmlns:a16="http://schemas.microsoft.com/office/drawing/2014/main" id="{31FBAE74-D6F2-09F5-B523-7C2CC99DDC64}"/>
-              </a:ext>
-            </a:extLst>
-          </p:cNvPr>
-          <p:cNvSpPr>
-            <a:spLocks noGrp="1"/>
-          </p:cNvSpPr>
-          <p:nvPr>
-            <p:ph type="title"/>
-          </p:nvPr>
-        </p:nvSpPr>
-        <p:spPr>
-          <a:xfrm>
-            <a:off x="838200" y="365125"/>
-            <a:ext cx="10515600" cy="1325563"/>
-          </a:xfrm>
-        </p:spPr>
-        <p:txBody>
-          <a:bodyPr>
-            <a:normAutofit/>
-          </a:bodyPr>
-          <a:lstStyle/>
-          <a:p>
-            <a:r>
-              <a:rPr lang="en-US" sz="4000" dirty="0"/>
-              <a:t>Visualizing Distributions: Quantitative Variables </a:t>
-            </a:r>
-          </a:p>
-        </p:txBody>
-      </p:sp>
-    </p:spTree>
-    <p:extLst>
-      <p:ext uri="{BB962C8B-B14F-4D97-AF65-F5344CB8AC3E}">
-        <p14:creationId xmlns:p14="http://schemas.microsoft.com/office/powerpoint/2010/main" val="3307896714"/>
-      </p:ext>
-    </p:extLst>
-  </p:cSld>
-  <p:clrMapOvr>
-    <a:masterClrMapping/>
-  </p:clrMapOvr>
-</p:sld>
-</file>
-
-<file path=ppt/slides/slide18.xml><?xml version="1.0" encoding="utf-8"?>
-<p:sld xmlns:a="http://schemas.openxmlformats.org/drawingml/2006/main" xmlns:r="http://schemas.openxmlformats.org/officeDocument/2006/relationships" xmlns:p="http://schemas.openxmlformats.org/presentationml/2006/main">
-  <p:cSld>
-    <p:spTree>
-      <p:nvGrpSpPr>
-        <p:cNvPr id="1" name=""/>
-        <p:cNvGrpSpPr/>
-        <p:nvPr/>
-      </p:nvGrpSpPr>
-      <p:grpSpPr>
-        <a:xfrm>
-          <a:off x="0" y="0"/>
-          <a:ext cx="0" cy="0"/>
-          <a:chOff x="0" y="0"/>
-          <a:chExt cx="0" cy="0"/>
-        </a:xfrm>
-      </p:grpSpPr>
-      <p:pic>
-        <p:nvPicPr>
-          <p:cNvPr id="4" name="Picture 3">
-            <a:extLst>
-              <a:ext uri="{FF2B5EF4-FFF2-40B4-BE49-F238E27FC236}">
-                <a16:creationId xmlns:a16="http://schemas.microsoft.com/office/drawing/2014/main" id="{93CDB88E-8525-C007-528D-F06C6B57452E}"/>
-              </a:ext>
-            </a:extLst>
-          </p:cNvPr>
-          <p:cNvPicPr>
-            <a:picLocks noChangeAspect="1"/>
-          </p:cNvPicPr>
-          <p:nvPr/>
-        </p:nvPicPr>
-        <p:blipFill>
-          <a:blip r:embed="rId2"/>
-          <a:stretch>
-            <a:fillRect/>
-          </a:stretch>
-        </p:blipFill>
-        <p:spPr>
-          <a:xfrm>
-            <a:off x="1293091" y="176156"/>
-            <a:ext cx="9865915" cy="6681844"/>
-          </a:xfrm>
-          <a:prstGeom prst="rect">
-            <a:avLst/>
-          </a:prstGeom>
-        </p:spPr>
-      </p:pic>
-    </p:spTree>
-    <p:extLst>
-      <p:ext uri="{BB962C8B-B14F-4D97-AF65-F5344CB8AC3E}">
-        <p14:creationId xmlns:p14="http://schemas.microsoft.com/office/powerpoint/2010/main" val="297073414"/>
-      </p:ext>
-    </p:extLst>
-  </p:cSld>
-  <p:clrMapOvr>
-    <a:masterClrMapping/>
-  </p:clrMapOvr>
-</p:sld>
-</file>
-
-<file path=ppt/slides/slide19.xml><?xml version="1.0" encoding="utf-8"?>
-<p:sld xmlns:a="http://schemas.openxmlformats.org/drawingml/2006/main" xmlns:r="http://schemas.openxmlformats.org/officeDocument/2006/relationships" xmlns:p="http://schemas.openxmlformats.org/presentationml/2006/main">
-  <p:cSld>
-    <p:spTree>
-      <p:nvGrpSpPr>
-        <p:cNvPr id="1" name=""/>
-        <p:cNvGrpSpPr/>
-        <p:nvPr/>
-      </p:nvGrpSpPr>
-      <p:grpSpPr>
-        <a:xfrm>
-          <a:off x="0" y="0"/>
-          <a:ext cx="0" cy="0"/>
-          <a:chOff x="0" y="0"/>
-          <a:chExt cx="0" cy="0"/>
-        </a:xfrm>
-      </p:grpSpPr>
-      <p:sp>
-        <p:nvSpPr>
-          <p:cNvPr id="2" name="Title 1">
-            <a:extLst>
-              <a:ext uri="{FF2B5EF4-FFF2-40B4-BE49-F238E27FC236}">
-                <a16:creationId xmlns:a16="http://schemas.microsoft.com/office/drawing/2014/main" id="{A2418BEF-F19E-DBAD-FF9A-8FDF1FBD3654}"/>
-              </a:ext>
-            </a:extLst>
-          </p:cNvPr>
-          <p:cNvSpPr>
-            <a:spLocks noGrp="1"/>
-          </p:cNvSpPr>
-          <p:nvPr>
-            <p:ph type="title"/>
-          </p:nvPr>
-        </p:nvSpPr>
-        <p:spPr>
-          <a:xfrm>
-            <a:off x="838200" y="365126"/>
-            <a:ext cx="10515600" cy="825500"/>
-          </a:xfrm>
-        </p:spPr>
-        <p:txBody>
-          <a:bodyPr>
-            <a:normAutofit/>
-          </a:bodyPr>
-          <a:lstStyle/>
-          <a:p>
-            <a:r>
-              <a:rPr lang="en-US" sz="4000" dirty="0"/>
-              <a:t>Example: MPG and Engine Cylinders</a:t>
-            </a:r>
-          </a:p>
-        </p:txBody>
-      </p:sp>
-      <p:pic>
-        <p:nvPicPr>
-          <p:cNvPr id="6" name="Picture 5">
-            <a:extLst>
-              <a:ext uri="{FF2B5EF4-FFF2-40B4-BE49-F238E27FC236}">
-                <a16:creationId xmlns:a16="http://schemas.microsoft.com/office/drawing/2014/main" id="{60B6F122-13F2-0495-B148-F9F908F242F4}"/>
-              </a:ext>
-            </a:extLst>
-          </p:cNvPr>
-          <p:cNvPicPr>
-            <a:picLocks noChangeAspect="1"/>
-          </p:cNvPicPr>
-          <p:nvPr/>
-        </p:nvPicPr>
-        <p:blipFill>
-          <a:blip r:embed="rId2"/>
-          <a:stretch>
-            <a:fillRect/>
-          </a:stretch>
-        </p:blipFill>
-        <p:spPr>
-          <a:xfrm>
-            <a:off x="4376201" y="1764176"/>
-            <a:ext cx="7687748" cy="3943900"/>
-          </a:xfrm>
-          <a:prstGeom prst="rect">
-            <a:avLst/>
-          </a:prstGeom>
-        </p:spPr>
-      </p:pic>
-      <p:pic>
-        <p:nvPicPr>
-          <p:cNvPr id="1026" name="Picture 2" descr="The engine | How a Car Works">
-            <a:extLst>
-              <a:ext uri="{FF2B5EF4-FFF2-40B4-BE49-F238E27FC236}">
-                <a16:creationId xmlns:a16="http://schemas.microsoft.com/office/drawing/2014/main" id="{E678D63E-B7D3-7D74-1055-221F6D88A1C9}"/>
-              </a:ext>
-            </a:extLst>
-          </p:cNvPr>
-          <p:cNvPicPr>
-            <a:picLocks noChangeAspect="1" noChangeArrowheads="1"/>
-          </p:cNvPicPr>
-          <p:nvPr/>
-        </p:nvPicPr>
-        <p:blipFill>
-          <a:blip r:embed="rId3">
-            <a:extLst>
-              <a:ext uri="{28A0092B-C50C-407E-A947-70E740481C1C}">
-                <a14:useLocalDpi xmlns:a14="http://schemas.microsoft.com/office/drawing/2010/main" val="0"/>
-              </a:ext>
-            </a:extLst>
-          </a:blip>
-          <a:srcRect/>
-          <a:stretch>
-            <a:fillRect/>
-          </a:stretch>
-        </p:blipFill>
-        <p:spPr bwMode="auto">
-          <a:xfrm>
-            <a:off x="268288" y="1764176"/>
-            <a:ext cx="3979862" cy="4331823"/>
-          </a:xfrm>
-          <a:prstGeom prst="rect">
-            <a:avLst/>
-          </a:prstGeom>
-          <a:noFill/>
-          <a:extLst>
-            <a:ext uri="{909E8E84-426E-40DD-AFC4-6F175D3DCCD1}">
-              <a14:hiddenFill xmlns:a14="http://schemas.microsoft.com/office/drawing/2010/main">
-                <a:solidFill>
-                  <a:srgbClr val="FFFFFF"/>
-                </a:solidFill>
-              </a14:hiddenFill>
-            </a:ext>
-          </a:extLst>
-        </p:spPr>
-      </p:pic>
-    </p:spTree>
-    <p:extLst>
-      <p:ext uri="{BB962C8B-B14F-4D97-AF65-F5344CB8AC3E}">
-        <p14:creationId xmlns:p14="http://schemas.microsoft.com/office/powerpoint/2010/main" val="2654557613"/>
       </p:ext>
     </p:extLst>
   </p:cSld>
@@ -10416,6 +12382,466 @@
       </p:grpSpPr>
       <p:pic>
         <p:nvPicPr>
+          <p:cNvPr id="5" name="Picture 4">
+            <a:extLst>
+              <a:ext uri="{FF2B5EF4-FFF2-40B4-BE49-F238E27FC236}">
+                <a16:creationId xmlns:a16="http://schemas.microsoft.com/office/drawing/2014/main" id="{7EC6A261-0EA6-9E96-37C0-CB6898B1BD89}"/>
+              </a:ext>
+            </a:extLst>
+          </p:cNvPr>
+          <p:cNvPicPr>
+            <a:picLocks noChangeAspect="1"/>
+          </p:cNvPicPr>
+          <p:nvPr/>
+        </p:nvPicPr>
+        <p:blipFill>
+          <a:blip r:embed="rId2"/>
+          <a:stretch>
+            <a:fillRect/>
+          </a:stretch>
+        </p:blipFill>
+        <p:spPr>
+          <a:xfrm>
+            <a:off x="204974" y="1704974"/>
+            <a:ext cx="5891026" cy="3990975"/>
+          </a:xfrm>
+          <a:prstGeom prst="rect">
+            <a:avLst/>
+          </a:prstGeom>
+        </p:spPr>
+      </p:pic>
+      <p:pic>
+        <p:nvPicPr>
+          <p:cNvPr id="7" name="Picture 6">
+            <a:extLst>
+              <a:ext uri="{FF2B5EF4-FFF2-40B4-BE49-F238E27FC236}">
+                <a16:creationId xmlns:a16="http://schemas.microsoft.com/office/drawing/2014/main" id="{FAAAEAA6-C6FF-BCA1-1B38-7E475B4066C9}"/>
+              </a:ext>
+            </a:extLst>
+          </p:cNvPr>
+          <p:cNvPicPr>
+            <a:picLocks noChangeAspect="1"/>
+          </p:cNvPicPr>
+          <p:nvPr/>
+        </p:nvPicPr>
+        <p:blipFill>
+          <a:blip r:embed="rId3"/>
+          <a:stretch>
+            <a:fillRect/>
+          </a:stretch>
+        </p:blipFill>
+        <p:spPr>
+          <a:xfrm>
+            <a:off x="6200774" y="1478046"/>
+            <a:ext cx="5703693" cy="4217903"/>
+          </a:xfrm>
+          <a:prstGeom prst="rect">
+            <a:avLst/>
+          </a:prstGeom>
+        </p:spPr>
+      </p:pic>
+    </p:spTree>
+    <p:extLst>
+      <p:ext uri="{BB962C8B-B14F-4D97-AF65-F5344CB8AC3E}">
+        <p14:creationId xmlns:p14="http://schemas.microsoft.com/office/powerpoint/2010/main" val="2676625562"/>
+      </p:ext>
+    </p:extLst>
+  </p:cSld>
+  <p:clrMapOvr>
+    <a:masterClrMapping/>
+  </p:clrMapOvr>
+</p:sld>
+</file>
+
+<file path=ppt/slides/slide21.xml><?xml version="1.0" encoding="utf-8"?>
+<p:sld xmlns:a="http://schemas.openxmlformats.org/drawingml/2006/main" xmlns:r="http://schemas.openxmlformats.org/officeDocument/2006/relationships" xmlns:p="http://schemas.openxmlformats.org/presentationml/2006/main">
+  <p:cSld>
+    <p:spTree>
+      <p:nvGrpSpPr>
+        <p:cNvPr id="1" name=""/>
+        <p:cNvGrpSpPr/>
+        <p:nvPr/>
+      </p:nvGrpSpPr>
+      <p:grpSpPr>
+        <a:xfrm>
+          <a:off x="0" y="0"/>
+          <a:ext cx="0" cy="0"/>
+          <a:chOff x="0" y="0"/>
+          <a:chExt cx="0" cy="0"/>
+        </a:xfrm>
+      </p:grpSpPr>
+      <p:sp>
+        <p:nvSpPr>
+          <p:cNvPr id="3" name="Content Placeholder 2">
+            <a:extLst>
+              <a:ext uri="{FF2B5EF4-FFF2-40B4-BE49-F238E27FC236}">
+                <a16:creationId xmlns:a16="http://schemas.microsoft.com/office/drawing/2014/main" id="{8F09458B-9FCD-C074-086C-F92B55C26D73}"/>
+              </a:ext>
+            </a:extLst>
+          </p:cNvPr>
+          <p:cNvSpPr>
+            <a:spLocks noGrp="1"/>
+          </p:cNvSpPr>
+          <p:nvPr>
+            <p:ph idx="1"/>
+          </p:nvPr>
+        </p:nvSpPr>
+        <p:spPr/>
+        <p:txBody>
+          <a:bodyPr/>
+          <a:lstStyle/>
+          <a:p>
+            <a:r>
+              <a:rPr lang="en-US" b="1" dirty="0"/>
+              <a:t>Dot plots – </a:t>
+            </a:r>
+            <a:r>
+              <a:rPr lang="en-US" dirty="0"/>
+              <a:t>shows a dot for each observation placed above the value for that observation </a:t>
+            </a:r>
+          </a:p>
+          <a:p>
+            <a:pPr marL="0" indent="0">
+              <a:buNone/>
+            </a:pPr>
+            <a:endParaRPr lang="en-US" dirty="0"/>
+          </a:p>
+          <a:p>
+            <a:pPr marL="457200" lvl="1" indent="0">
+              <a:buNone/>
+            </a:pPr>
+            <a:r>
+              <a:rPr lang="en-US" b="1" dirty="0"/>
+              <a:t>Steps to construct a dot plot</a:t>
+            </a:r>
+          </a:p>
+          <a:p>
+            <a:pPr marL="914400" lvl="1" indent="-457200">
+              <a:buFont typeface="+mj-lt"/>
+              <a:buAutoNum type="arabicPeriod"/>
+            </a:pPr>
+            <a:r>
+              <a:rPr lang="en-US" b="1" dirty="0"/>
+              <a:t>Draw a horizontal line and mark the line with regular values of the variable</a:t>
+            </a:r>
+          </a:p>
+          <a:p>
+            <a:pPr marL="914400" lvl="1" indent="-457200">
+              <a:buFont typeface="+mj-lt"/>
+              <a:buAutoNum type="arabicPeriod"/>
+            </a:pPr>
+            <a:r>
+              <a:rPr lang="en-US" b="1" dirty="0"/>
+              <a:t>For each observation, place a dot above its value on the number line</a:t>
+            </a:r>
+          </a:p>
+          <a:p>
+            <a:pPr lvl="2">
+              <a:buFontTx/>
+              <a:buChar char="-"/>
+            </a:pPr>
+            <a:r>
+              <a:rPr lang="en-US" dirty="0"/>
+              <a:t>Works best with quantitative discrete data</a:t>
+            </a:r>
+          </a:p>
+          <a:p>
+            <a:pPr lvl="2">
+              <a:buFontTx/>
+              <a:buChar char="-"/>
+            </a:pPr>
+            <a:r>
+              <a:rPr lang="en-US" dirty="0"/>
+              <a:t>Doesn’t work well if the variable is continuous and takes on many distinct values…</a:t>
+            </a:r>
+          </a:p>
+          <a:p>
+            <a:pPr lvl="2">
+              <a:buFontTx/>
+              <a:buChar char="-"/>
+            </a:pPr>
+            <a:r>
+              <a:rPr lang="en-US" dirty="0"/>
+              <a:t>For continuous data, the values may need to be round to the nearest tenth or integer</a:t>
+            </a:r>
+          </a:p>
+          <a:p>
+            <a:pPr marL="457200" lvl="1" indent="0">
+              <a:buNone/>
+            </a:pPr>
+            <a:endParaRPr lang="en-US" dirty="0"/>
+          </a:p>
+        </p:txBody>
+      </p:sp>
+      <p:sp>
+        <p:nvSpPr>
+          <p:cNvPr id="4" name="Title 1">
+            <a:extLst>
+              <a:ext uri="{FF2B5EF4-FFF2-40B4-BE49-F238E27FC236}">
+                <a16:creationId xmlns:a16="http://schemas.microsoft.com/office/drawing/2014/main" id="{31FBAE74-D6F2-09F5-B523-7C2CC99DDC64}"/>
+              </a:ext>
+            </a:extLst>
+          </p:cNvPr>
+          <p:cNvSpPr>
+            <a:spLocks noGrp="1"/>
+          </p:cNvSpPr>
+          <p:nvPr>
+            <p:ph type="title"/>
+          </p:nvPr>
+        </p:nvSpPr>
+        <p:spPr>
+          <a:xfrm>
+            <a:off x="838200" y="365125"/>
+            <a:ext cx="10515600" cy="1325563"/>
+          </a:xfrm>
+        </p:spPr>
+        <p:txBody>
+          <a:bodyPr>
+            <a:normAutofit/>
+          </a:bodyPr>
+          <a:lstStyle/>
+          <a:p>
+            <a:r>
+              <a:rPr lang="en-US" sz="4000" dirty="0"/>
+              <a:t>Visualizing Distributions: Quantitative Variables </a:t>
+            </a:r>
+          </a:p>
+        </p:txBody>
+      </p:sp>
+    </p:spTree>
+    <p:extLst>
+      <p:ext uri="{BB962C8B-B14F-4D97-AF65-F5344CB8AC3E}">
+        <p14:creationId xmlns:p14="http://schemas.microsoft.com/office/powerpoint/2010/main" val="3307896714"/>
+      </p:ext>
+    </p:extLst>
+  </p:cSld>
+  <p:clrMapOvr>
+    <a:masterClrMapping/>
+  </p:clrMapOvr>
+</p:sld>
+</file>
+
+<file path=ppt/slides/slide22.xml><?xml version="1.0" encoding="utf-8"?>
+<p:sld xmlns:a="http://schemas.openxmlformats.org/drawingml/2006/main" xmlns:r="http://schemas.openxmlformats.org/officeDocument/2006/relationships" xmlns:p="http://schemas.openxmlformats.org/presentationml/2006/main">
+  <p:cSld>
+    <p:spTree>
+      <p:nvGrpSpPr>
+        <p:cNvPr id="1" name=""/>
+        <p:cNvGrpSpPr/>
+        <p:nvPr/>
+      </p:nvGrpSpPr>
+      <p:grpSpPr>
+        <a:xfrm>
+          <a:off x="0" y="0"/>
+          <a:ext cx="0" cy="0"/>
+          <a:chOff x="0" y="0"/>
+          <a:chExt cx="0" cy="0"/>
+        </a:xfrm>
+      </p:grpSpPr>
+      <p:pic>
+        <p:nvPicPr>
+          <p:cNvPr id="4" name="Picture 3">
+            <a:extLst>
+              <a:ext uri="{FF2B5EF4-FFF2-40B4-BE49-F238E27FC236}">
+                <a16:creationId xmlns:a16="http://schemas.microsoft.com/office/drawing/2014/main" id="{93CDB88E-8525-C007-528D-F06C6B57452E}"/>
+              </a:ext>
+            </a:extLst>
+          </p:cNvPr>
+          <p:cNvPicPr>
+            <a:picLocks noChangeAspect="1"/>
+          </p:cNvPicPr>
+          <p:nvPr/>
+        </p:nvPicPr>
+        <p:blipFill>
+          <a:blip r:embed="rId2"/>
+          <a:stretch>
+            <a:fillRect/>
+          </a:stretch>
+        </p:blipFill>
+        <p:spPr>
+          <a:xfrm>
+            <a:off x="1293091" y="176156"/>
+            <a:ext cx="9865915" cy="6681844"/>
+          </a:xfrm>
+          <a:prstGeom prst="rect">
+            <a:avLst/>
+          </a:prstGeom>
+        </p:spPr>
+      </p:pic>
+    </p:spTree>
+    <p:extLst>
+      <p:ext uri="{BB962C8B-B14F-4D97-AF65-F5344CB8AC3E}">
+        <p14:creationId xmlns:p14="http://schemas.microsoft.com/office/powerpoint/2010/main" val="297073414"/>
+      </p:ext>
+    </p:extLst>
+  </p:cSld>
+  <p:clrMapOvr>
+    <a:masterClrMapping/>
+  </p:clrMapOvr>
+</p:sld>
+</file>
+
+<file path=ppt/slides/slide23.xml><?xml version="1.0" encoding="utf-8"?>
+<p:sld xmlns:a="http://schemas.openxmlformats.org/drawingml/2006/main" xmlns:r="http://schemas.openxmlformats.org/officeDocument/2006/relationships" xmlns:p="http://schemas.openxmlformats.org/presentationml/2006/main">
+  <p:cSld>
+    <p:spTree>
+      <p:nvGrpSpPr>
+        <p:cNvPr id="1" name=""/>
+        <p:cNvGrpSpPr/>
+        <p:nvPr/>
+      </p:nvGrpSpPr>
+      <p:grpSpPr>
+        <a:xfrm>
+          <a:off x="0" y="0"/>
+          <a:ext cx="0" cy="0"/>
+          <a:chOff x="0" y="0"/>
+          <a:chExt cx="0" cy="0"/>
+        </a:xfrm>
+      </p:grpSpPr>
+      <p:sp>
+        <p:nvSpPr>
+          <p:cNvPr id="2" name="Title 1">
+            <a:extLst>
+              <a:ext uri="{FF2B5EF4-FFF2-40B4-BE49-F238E27FC236}">
+                <a16:creationId xmlns:a16="http://schemas.microsoft.com/office/drawing/2014/main" id="{A2418BEF-F19E-DBAD-FF9A-8FDF1FBD3654}"/>
+              </a:ext>
+            </a:extLst>
+          </p:cNvPr>
+          <p:cNvSpPr>
+            <a:spLocks noGrp="1"/>
+          </p:cNvSpPr>
+          <p:nvPr>
+            <p:ph type="title"/>
+          </p:nvPr>
+        </p:nvSpPr>
+        <p:spPr>
+          <a:xfrm>
+            <a:off x="838200" y="365126"/>
+            <a:ext cx="10515600" cy="825500"/>
+          </a:xfrm>
+        </p:spPr>
+        <p:txBody>
+          <a:bodyPr>
+            <a:normAutofit/>
+          </a:bodyPr>
+          <a:lstStyle/>
+          <a:p>
+            <a:r>
+              <a:rPr lang="en-US" sz="4000" dirty="0"/>
+              <a:t>Example: MPG and Engine Cylinders</a:t>
+            </a:r>
+          </a:p>
+        </p:txBody>
+      </p:sp>
+      <p:pic>
+        <p:nvPicPr>
+          <p:cNvPr id="6" name="Picture 5">
+            <a:extLst>
+              <a:ext uri="{FF2B5EF4-FFF2-40B4-BE49-F238E27FC236}">
+                <a16:creationId xmlns:a16="http://schemas.microsoft.com/office/drawing/2014/main" id="{60B6F122-13F2-0495-B148-F9F908F242F4}"/>
+              </a:ext>
+            </a:extLst>
+          </p:cNvPr>
+          <p:cNvPicPr>
+            <a:picLocks noChangeAspect="1"/>
+          </p:cNvPicPr>
+          <p:nvPr/>
+        </p:nvPicPr>
+        <p:blipFill>
+          <a:blip r:embed="rId2"/>
+          <a:stretch>
+            <a:fillRect/>
+          </a:stretch>
+        </p:blipFill>
+        <p:spPr>
+          <a:xfrm>
+            <a:off x="4376201" y="1764176"/>
+            <a:ext cx="7687748" cy="3943900"/>
+          </a:xfrm>
+          <a:prstGeom prst="rect">
+            <a:avLst/>
+          </a:prstGeom>
+        </p:spPr>
+      </p:pic>
+      <p:pic>
+        <p:nvPicPr>
+          <p:cNvPr id="1026" name="Picture 2" descr="The engine | How a Car Works">
+            <a:extLst>
+              <a:ext uri="{FF2B5EF4-FFF2-40B4-BE49-F238E27FC236}">
+                <a16:creationId xmlns:a16="http://schemas.microsoft.com/office/drawing/2014/main" id="{E678D63E-B7D3-7D74-1055-221F6D88A1C9}"/>
+              </a:ext>
+            </a:extLst>
+          </p:cNvPr>
+          <p:cNvPicPr>
+            <a:picLocks noChangeAspect="1" noChangeArrowheads="1"/>
+          </p:cNvPicPr>
+          <p:nvPr/>
+        </p:nvPicPr>
+        <p:blipFill>
+          <a:blip r:embed="rId3">
+            <a:extLst>
+              <a:ext uri="{28A0092B-C50C-407E-A947-70E740481C1C}">
+                <a14:useLocalDpi xmlns:a14="http://schemas.microsoft.com/office/drawing/2010/main" val="0"/>
+              </a:ext>
+            </a:extLst>
+          </a:blip>
+          <a:srcRect/>
+          <a:stretch>
+            <a:fillRect/>
+          </a:stretch>
+        </p:blipFill>
+        <p:spPr bwMode="auto">
+          <a:xfrm>
+            <a:off x="268288" y="1764176"/>
+            <a:ext cx="3979862" cy="4331823"/>
+          </a:xfrm>
+          <a:prstGeom prst="rect">
+            <a:avLst/>
+          </a:prstGeom>
+          <a:noFill/>
+          <a:extLst>
+            <a:ext uri="{909E8E84-426E-40DD-AFC4-6F175D3DCCD1}">
+              <a14:hiddenFill xmlns:a14="http://schemas.microsoft.com/office/drawing/2010/main">
+                <a:solidFill>
+                  <a:srgbClr val="FFFFFF"/>
+                </a:solidFill>
+              </a14:hiddenFill>
+            </a:ext>
+          </a:extLst>
+        </p:spPr>
+      </p:pic>
+    </p:spTree>
+    <p:extLst>
+      <p:ext uri="{BB962C8B-B14F-4D97-AF65-F5344CB8AC3E}">
+        <p14:creationId xmlns:p14="http://schemas.microsoft.com/office/powerpoint/2010/main" val="2654557613"/>
+      </p:ext>
+    </p:extLst>
+  </p:cSld>
+  <p:clrMapOvr>
+    <a:masterClrMapping/>
+  </p:clrMapOvr>
+</p:sld>
+</file>
+
+<file path=ppt/slides/slide24.xml><?xml version="1.0" encoding="utf-8"?>
+<p:sld xmlns:a="http://schemas.openxmlformats.org/drawingml/2006/main" xmlns:r="http://schemas.openxmlformats.org/officeDocument/2006/relationships" xmlns:p="http://schemas.openxmlformats.org/presentationml/2006/main">
+  <p:cSld>
+    <p:spTree>
+      <p:nvGrpSpPr>
+        <p:cNvPr id="1" name=""/>
+        <p:cNvGrpSpPr/>
+        <p:nvPr/>
+      </p:nvGrpSpPr>
+      <p:grpSpPr>
+        <a:xfrm>
+          <a:off x="0" y="0"/>
+          <a:ext cx="0" cy="0"/>
+          <a:chOff x="0" y="0"/>
+          <a:chExt cx="0" cy="0"/>
+        </a:xfrm>
+      </p:grpSpPr>
+      <p:pic>
+        <p:nvPicPr>
           <p:cNvPr id="4" name="Picture 3">
             <a:extLst>
               <a:ext uri="{FF2B5EF4-FFF2-40B4-BE49-F238E27FC236}">
@@ -10457,7 +12883,7 @@
 </p:sld>
 </file>
 
-<file path=ppt/slides/slide21.xml><?xml version="1.0" encoding="utf-8"?>
+<file path=ppt/slides/slide25.xml><?xml version="1.0" encoding="utf-8"?>
 <p:sld xmlns:a="http://schemas.openxmlformats.org/drawingml/2006/main" xmlns:r="http://schemas.openxmlformats.org/officeDocument/2006/relationships" xmlns:p="http://schemas.openxmlformats.org/presentationml/2006/main">
   <p:cSld>
     <p:spTree>
@@ -10950,7 +13376,7 @@
 </p:sld>
 </file>
 
-<file path=ppt/slides/slide22.xml><?xml version="1.0" encoding="utf-8"?>
+<file path=ppt/slides/slide26.xml><?xml version="1.0" encoding="utf-8"?>
 <p:sld xmlns:a="http://schemas.openxmlformats.org/drawingml/2006/main" xmlns:r="http://schemas.openxmlformats.org/officeDocument/2006/relationships" xmlns:p="http://schemas.openxmlformats.org/presentationml/2006/main">
   <p:cSld>
     <p:spTree>
@@ -11181,7 +13607,7 @@
 </p:sld>
 </file>
 
-<file path=ppt/slides/slide23.xml><?xml version="1.0" encoding="utf-8"?>
+<file path=ppt/slides/slide27.xml><?xml version="1.0" encoding="utf-8"?>
 <p:sld xmlns:a="http://schemas.openxmlformats.org/drawingml/2006/main" xmlns:r="http://schemas.openxmlformats.org/officeDocument/2006/relationships" xmlns:p="http://schemas.openxmlformats.org/presentationml/2006/main">
   <p:cSld>
     <p:spTree>
@@ -11595,7 +14021,7 @@
 </p:sld>
 </file>
 
-<file path=ppt/slides/slide24.xml><?xml version="1.0" encoding="utf-8"?>
+<file path=ppt/slides/slide28.xml><?xml version="1.0" encoding="utf-8"?>
 <p:sld xmlns:a="http://schemas.openxmlformats.org/drawingml/2006/main" xmlns:r="http://schemas.openxmlformats.org/officeDocument/2006/relationships" xmlns:p="http://schemas.openxmlformats.org/presentationml/2006/main">
   <p:cSld>
     <p:spTree>
@@ -11864,7 +14290,7 @@
 </p:sld>
 </file>
 
-<file path=ppt/slides/slide25.xml><?xml version="1.0" encoding="utf-8"?>
+<file path=ppt/slides/slide29.xml><?xml version="1.0" encoding="utf-8"?>
 <p:sld xmlns:a="http://schemas.openxmlformats.org/drawingml/2006/main" xmlns:r="http://schemas.openxmlformats.org/officeDocument/2006/relationships" xmlns:p="http://schemas.openxmlformats.org/presentationml/2006/main">
   <p:cSld>
     <p:spTree>
@@ -13462,7 +15888,796 @@
 </p:sld>
 </file>
 
-<file path=ppt/slides/slide26.xml><?xml version="1.0" encoding="utf-8"?>
+<file path=ppt/slides/slide3.xml><?xml version="1.0" encoding="utf-8"?>
+<p:sld xmlns:a="http://schemas.openxmlformats.org/drawingml/2006/main" xmlns:r="http://schemas.openxmlformats.org/officeDocument/2006/relationships" xmlns:p="http://schemas.openxmlformats.org/presentationml/2006/main">
+  <p:cSld>
+    <p:spTree>
+      <p:nvGrpSpPr>
+        <p:cNvPr id="1" name=""/>
+        <p:cNvGrpSpPr/>
+        <p:nvPr/>
+      </p:nvGrpSpPr>
+      <p:grpSpPr>
+        <a:xfrm>
+          <a:off x="0" y="0"/>
+          <a:ext cx="0" cy="0"/>
+          <a:chOff x="0" y="0"/>
+          <a:chExt cx="0" cy="0"/>
+        </a:xfrm>
+      </p:grpSpPr>
+      <p:sp>
+        <p:nvSpPr>
+          <p:cNvPr id="2" name="Title 1"/>
+          <p:cNvSpPr>
+            <a:spLocks noGrp="1"/>
+          </p:cNvSpPr>
+          <p:nvPr>
+            <p:ph type="title"/>
+          </p:nvPr>
+        </p:nvSpPr>
+        <p:spPr>
+          <a:xfrm>
+            <a:off x="838200" y="365126"/>
+            <a:ext cx="10515600" cy="519130"/>
+          </a:xfrm>
+        </p:spPr>
+        <p:txBody>
+          <a:bodyPr>
+            <a:normAutofit fontScale="90000"/>
+          </a:bodyPr>
+          <a:lstStyle/>
+          <a:p>
+            <a:r>
+              <a:rPr lang="en-US" dirty="0"/>
+              <a:t>Review</a:t>
+            </a:r>
+          </a:p>
+        </p:txBody>
+      </p:sp>
+      <p:sp>
+        <p:nvSpPr>
+          <p:cNvPr id="3" name="Question 1"/>
+          <p:cNvSpPr/>
+          <p:nvPr/>
+        </p:nvSpPr>
+        <p:spPr>
+          <a:xfrm>
+            <a:off x="838200" y="1075688"/>
+            <a:ext cx="10515600" cy="1230000"/>
+          </a:xfrm>
+          <a:prstGeom prst="roundRect">
+            <a:avLst>
+              <a:gd name="adj" fmla="val 4000"/>
+            </a:avLst>
+          </a:prstGeom>
+          <a:solidFill>
+            <a:srgbClr val="F2F6FC"/>
+          </a:solidFill>
+          <a:ln w="19050">
+            <a:solidFill>
+              <a:schemeClr val="accent1"/>
+            </a:solidFill>
+          </a:ln>
+        </p:spPr>
+        <p:txBody>
+          <a:bodyPr lIns="228600" tIns="182880" rIns="228600" bIns="91440" anchor="t">
+            <a:normAutofit/>
+          </a:bodyPr>
+          <a:lstStyle/>
+          <a:p>
+            <a:pPr marL="0" indent="0">
+              <a:buNone/>
+            </a:pPr>
+            <a:r>
+              <a:rPr lang="en-US" b="1" dirty="0">
+                <a:solidFill>
+                  <a:srgbClr val="4472C4"/>
+                </a:solidFill>
+              </a:rPr>
+              <a:t>1   </a:t>
+            </a:r>
+            <a:r>
+              <a:rPr lang="en-US" b="1" dirty="0"/>
+              <a:t>What do we call the way we collect the data?</a:t>
+            </a:r>
+          </a:p>
+        </p:txBody>
+      </p:sp>
+      <p:sp>
+        <p:nvSpPr>
+          <p:cNvPr id="4" name="Answer 1"/>
+          <p:cNvSpPr txBox="1"/>
+          <p:nvPr/>
+        </p:nvSpPr>
+        <p:spPr>
+          <a:xfrm>
+            <a:off x="1066800" y="1655688"/>
+            <a:ext cx="10058400" cy="558560"/>
+          </a:xfrm>
+          <a:prstGeom prst="rect">
+            <a:avLst/>
+          </a:prstGeom>
+          <a:noFill/>
+        </p:spPr>
+        <p:txBody>
+          <a:bodyPr wrap="square" lIns="0" tIns="0" rIns="0" bIns="0">
+            <a:normAutofit/>
+          </a:bodyPr>
+          <a:lstStyle/>
+          <a:p>
+            <a:pPr marL="0" indent="0">
+              <a:buNone/>
+            </a:pPr>
+            <a:r>
+              <a:rPr lang="en-US" dirty="0">
+                <a:solidFill>
+                  <a:srgbClr val="C00000"/>
+                </a:solidFill>
+              </a:rPr>
+              <a:t>The sampling design.</a:t>
+            </a:r>
+          </a:p>
+        </p:txBody>
+      </p:sp>
+      <p:sp>
+        <p:nvSpPr>
+          <p:cNvPr id="5" name="Question 2"/>
+          <p:cNvSpPr/>
+          <p:nvPr/>
+        </p:nvSpPr>
+        <p:spPr>
+          <a:xfrm>
+            <a:off x="838200" y="2385688"/>
+            <a:ext cx="10515600" cy="1230000"/>
+          </a:xfrm>
+          <a:prstGeom prst="roundRect">
+            <a:avLst>
+              <a:gd name="adj" fmla="val 4000"/>
+            </a:avLst>
+          </a:prstGeom>
+          <a:solidFill>
+            <a:srgbClr val="F2F6FC"/>
+          </a:solidFill>
+          <a:ln w="19050">
+            <a:solidFill>
+              <a:schemeClr val="accent1"/>
+            </a:solidFill>
+          </a:ln>
+        </p:spPr>
+        <p:txBody>
+          <a:bodyPr lIns="228600" tIns="182880" rIns="228600" bIns="91440" anchor="t">
+            <a:normAutofit/>
+          </a:bodyPr>
+          <a:lstStyle/>
+          <a:p>
+            <a:pPr marL="0" indent="0">
+              <a:buNone/>
+            </a:pPr>
+            <a:r>
+              <a:rPr lang="en-US" b="1" dirty="0">
+                <a:solidFill>
+                  <a:srgbClr val="4472C4"/>
+                </a:solidFill>
+              </a:rPr>
+              <a:t>2   </a:t>
+            </a:r>
+            <a:r>
+              <a:rPr lang="en-US" b="1" dirty="0"/>
+              <a:t>What are the three arms of statistics?</a:t>
+            </a:r>
+          </a:p>
+        </p:txBody>
+      </p:sp>
+      <p:sp>
+        <p:nvSpPr>
+          <p:cNvPr id="6" name="Answer 2"/>
+          <p:cNvSpPr txBox="1"/>
+          <p:nvPr/>
+        </p:nvSpPr>
+        <p:spPr>
+          <a:xfrm>
+            <a:off x="1066800" y="2965688"/>
+            <a:ext cx="10058400" cy="558560"/>
+          </a:xfrm>
+          <a:prstGeom prst="rect">
+            <a:avLst/>
+          </a:prstGeom>
+          <a:noFill/>
+        </p:spPr>
+        <p:txBody>
+          <a:bodyPr wrap="square" lIns="0" tIns="0" rIns="0" bIns="0">
+            <a:normAutofit/>
+          </a:bodyPr>
+          <a:lstStyle/>
+          <a:p>
+            <a:pPr marL="0" indent="0">
+              <a:buNone/>
+            </a:pPr>
+            <a:r>
+              <a:rPr lang="en-US" sz="1600" dirty="0">
+                <a:solidFill>
+                  <a:srgbClr val="C00000"/>
+                </a:solidFill>
+              </a:rPr>
+              <a:t>Design, description and inference.</a:t>
+            </a:r>
+          </a:p>
+        </p:txBody>
+      </p:sp>
+      <p:sp>
+        <p:nvSpPr>
+          <p:cNvPr id="7" name="Question 3"/>
+          <p:cNvSpPr/>
+          <p:nvPr/>
+        </p:nvSpPr>
+        <p:spPr>
+          <a:xfrm>
+            <a:off x="838200" y="3695688"/>
+            <a:ext cx="10515600" cy="1230000"/>
+          </a:xfrm>
+          <a:prstGeom prst="roundRect">
+            <a:avLst>
+              <a:gd name="adj" fmla="val 4000"/>
+            </a:avLst>
+          </a:prstGeom>
+          <a:solidFill>
+            <a:srgbClr val="F2F6FC"/>
+          </a:solidFill>
+          <a:ln w="19050">
+            <a:solidFill>
+              <a:schemeClr val="accent1"/>
+            </a:solidFill>
+          </a:ln>
+        </p:spPr>
+        <p:txBody>
+          <a:bodyPr lIns="228600" tIns="182880" rIns="228600" bIns="91440" anchor="t">
+            <a:normAutofit/>
+          </a:bodyPr>
+          <a:lstStyle/>
+          <a:p>
+            <a:pPr marL="0" indent="0">
+              <a:buNone/>
+            </a:pPr>
+            <a:r>
+              <a:rPr lang="en-US" b="1" dirty="0">
+                <a:solidFill>
+                  <a:srgbClr val="4472C4"/>
+                </a:solidFill>
+              </a:rPr>
+              <a:t>3   </a:t>
+            </a:r>
+            <a:r>
+              <a:rPr lang="en-US" b="1" dirty="0"/>
+              <a:t>Which one comes first, and why?</a:t>
+            </a:r>
+          </a:p>
+        </p:txBody>
+      </p:sp>
+      <p:sp>
+        <p:nvSpPr>
+          <p:cNvPr id="8" name="Answer 3"/>
+          <p:cNvSpPr txBox="1"/>
+          <p:nvPr/>
+        </p:nvSpPr>
+        <p:spPr>
+          <a:xfrm>
+            <a:off x="1066800" y="4275688"/>
+            <a:ext cx="10058400" cy="558560"/>
+          </a:xfrm>
+          <a:prstGeom prst="rect">
+            <a:avLst/>
+          </a:prstGeom>
+          <a:noFill/>
+        </p:spPr>
+        <p:txBody>
+          <a:bodyPr wrap="square" lIns="0" tIns="0" rIns="0" bIns="0">
+            <a:normAutofit/>
+          </a:bodyPr>
+          <a:lstStyle/>
+          <a:p>
+            <a:pPr marL="0" indent="0">
+              <a:buNone/>
+            </a:pPr>
+            <a:r>
+              <a:rPr lang="en-US" sz="1600" dirty="0">
+                <a:solidFill>
+                  <a:srgbClr val="C00000"/>
+                </a:solidFill>
+              </a:rPr>
+              <a:t>Design – how we plan to collect the data, settled before any data exists. No amount of description or inference repairs a bad design.</a:t>
+            </a:r>
+          </a:p>
+        </p:txBody>
+      </p:sp>
+      <p:sp>
+        <p:nvSpPr>
+          <p:cNvPr id="9" name="Question 4"/>
+          <p:cNvSpPr/>
+          <p:nvPr/>
+        </p:nvSpPr>
+        <p:spPr>
+          <a:xfrm>
+            <a:off x="838200" y="5005688"/>
+            <a:ext cx="10515600" cy="1230000"/>
+          </a:xfrm>
+          <a:prstGeom prst="roundRect">
+            <a:avLst>
+              <a:gd name="adj" fmla="val 4000"/>
+            </a:avLst>
+          </a:prstGeom>
+          <a:solidFill>
+            <a:srgbClr val="F2F6FC"/>
+          </a:solidFill>
+          <a:ln w="19050">
+            <a:solidFill>
+              <a:schemeClr val="accent1"/>
+            </a:solidFill>
+          </a:ln>
+        </p:spPr>
+        <p:txBody>
+          <a:bodyPr lIns="228600" tIns="182880" rIns="228600" bIns="91440" anchor="t">
+            <a:normAutofit/>
+          </a:bodyPr>
+          <a:lstStyle/>
+          <a:p>
+            <a:pPr marL="0" indent="0">
+              <a:buNone/>
+            </a:pPr>
+            <a:r>
+              <a:rPr lang="en-US" b="1" dirty="0">
+                <a:solidFill>
+                  <a:srgbClr val="4472C4"/>
+                </a:solidFill>
+              </a:rPr>
+              <a:t>4   </a:t>
+            </a:r>
+            <a:r>
+              <a:rPr lang="en-US" b="1" dirty="0"/>
+              <a:t>What is an estimate?</a:t>
+            </a:r>
+          </a:p>
+        </p:txBody>
+      </p:sp>
+      <p:sp>
+        <p:nvSpPr>
+          <p:cNvPr id="10" name="Answer 4"/>
+          <p:cNvSpPr txBox="1"/>
+          <p:nvPr/>
+        </p:nvSpPr>
+        <p:spPr>
+          <a:xfrm>
+            <a:off x="1066800" y="5585688"/>
+            <a:ext cx="10058400" cy="558560"/>
+          </a:xfrm>
+          <a:prstGeom prst="rect">
+            <a:avLst/>
+          </a:prstGeom>
+          <a:noFill/>
+        </p:spPr>
+        <p:txBody>
+          <a:bodyPr wrap="square" lIns="0" tIns="0" rIns="0" bIns="0">
+            <a:normAutofit/>
+          </a:bodyPr>
+          <a:lstStyle/>
+          <a:p>
+            <a:pPr marL="0" indent="0">
+              <a:buNone/>
+            </a:pPr>
+            <a:r>
+              <a:rPr lang="en-US" sz="1600" dirty="0">
+                <a:solidFill>
+                  <a:srgbClr val="C00000"/>
+                </a:solidFill>
+              </a:rPr>
+              <a:t>A statistic computed from a sample, used to approximate an unknown population parameter</a:t>
+            </a:r>
+          </a:p>
+        </p:txBody>
+      </p:sp>
+    </p:spTree>
+    <p:extLst>
+      <p:ext uri="{BB962C8B-B14F-4D97-AF65-F5344CB8AC3E}">
+        <p14:creationId xmlns:p14="http://schemas.microsoft.com/office/powerpoint/2010/main" val="1517484012"/>
+      </p:ext>
+    </p:extLst>
+  </p:cSld>
+  <p:clrMapOvr>
+    <a:masterClrMapping/>
+  </p:clrMapOvr>
+  <p:timing>
+    <p:tnLst>
+      <p:par>
+        <p:cTn id="1" dur="indefinite" restart="never" nodeType="tmRoot">
+          <p:childTnLst>
+            <p:seq concurrent="1" nextAc="seek">
+              <p:cTn id="2" dur="indefinite" nodeType="mainSeq">
+                <p:childTnLst>
+                  <p:par>
+                    <p:cTn id="3" fill="hold">
+                      <p:stCondLst>
+                        <p:cond delay="indefinite"/>
+                      </p:stCondLst>
+                      <p:childTnLst>
+                        <p:par>
+                          <p:cTn id="4" fill="hold">
+                            <p:stCondLst>
+                              <p:cond delay="0"/>
+                            </p:stCondLst>
+                            <p:childTnLst>
+                              <p:par>
+                                <p:cTn id="5" presetID="1" presetClass="entr" presetSubtype="0" fill="hold" nodeType="clickEffect">
+                                  <p:stCondLst>
+                                    <p:cond delay="0"/>
+                                  </p:stCondLst>
+                                  <p:childTnLst>
+                                    <p:set>
+                                      <p:cBhvr>
+                                        <p:cTn id="6" dur="1" fill="hold">
+                                          <p:stCondLst>
+                                            <p:cond delay="0"/>
+                                          </p:stCondLst>
+                                        </p:cTn>
+                                        <p:tgtEl>
+                                          <p:spTgt spid="3"/>
+                                        </p:tgtEl>
+                                        <p:attrNameLst>
+                                          <p:attrName>style.visibility</p:attrName>
+                                        </p:attrNameLst>
+                                      </p:cBhvr>
+                                      <p:to>
+                                        <p:strVal val="visible"/>
+                                      </p:to>
+                                    </p:set>
+                                  </p:childTnLst>
+                                </p:cTn>
+                              </p:par>
+                            </p:childTnLst>
+                          </p:cTn>
+                        </p:par>
+                      </p:childTnLst>
+                    </p:cTn>
+                  </p:par>
+                  <p:par>
+                    <p:cTn id="7" fill="hold">
+                      <p:stCondLst>
+                        <p:cond delay="indefinite"/>
+                      </p:stCondLst>
+                      <p:childTnLst>
+                        <p:par>
+                          <p:cTn id="8" fill="hold">
+                            <p:stCondLst>
+                              <p:cond delay="0"/>
+                            </p:stCondLst>
+                            <p:childTnLst>
+                              <p:par>
+                                <p:cTn id="9" presetID="1" presetClass="entr" presetSubtype="0" fill="hold" nodeType="clickEffect">
+                                  <p:stCondLst>
+                                    <p:cond delay="0"/>
+                                  </p:stCondLst>
+                                  <p:childTnLst>
+                                    <p:set>
+                                      <p:cBhvr>
+                                        <p:cTn id="10" dur="1" fill="hold">
+                                          <p:stCondLst>
+                                            <p:cond delay="0"/>
+                                          </p:stCondLst>
+                                        </p:cTn>
+                                        <p:tgtEl>
+                                          <p:spTgt spid="4"/>
+                                        </p:tgtEl>
+                                        <p:attrNameLst>
+                                          <p:attrName>style.visibility</p:attrName>
+                                        </p:attrNameLst>
+                                      </p:cBhvr>
+                                      <p:to>
+                                        <p:strVal val="visible"/>
+                                      </p:to>
+                                    </p:set>
+                                  </p:childTnLst>
+                                </p:cTn>
+                              </p:par>
+                            </p:childTnLst>
+                          </p:cTn>
+                        </p:par>
+                      </p:childTnLst>
+                    </p:cTn>
+                  </p:par>
+                  <p:par>
+                    <p:cTn id="11" fill="hold">
+                      <p:stCondLst>
+                        <p:cond delay="indefinite"/>
+                      </p:stCondLst>
+                      <p:childTnLst>
+                        <p:par>
+                          <p:cTn id="12" fill="hold">
+                            <p:stCondLst>
+                              <p:cond delay="0"/>
+                            </p:stCondLst>
+                            <p:childTnLst>
+                              <p:par>
+                                <p:cTn id="13" presetID="1" presetClass="entr" presetSubtype="0" fill="hold" nodeType="clickEffect">
+                                  <p:stCondLst>
+                                    <p:cond delay="0"/>
+                                  </p:stCondLst>
+                                  <p:childTnLst>
+                                    <p:set>
+                                      <p:cBhvr>
+                                        <p:cTn id="14" dur="1" fill="hold">
+                                          <p:stCondLst>
+                                            <p:cond delay="0"/>
+                                          </p:stCondLst>
+                                        </p:cTn>
+                                        <p:tgtEl>
+                                          <p:spTgt spid="5"/>
+                                        </p:tgtEl>
+                                        <p:attrNameLst>
+                                          <p:attrName>style.visibility</p:attrName>
+                                        </p:attrNameLst>
+                                      </p:cBhvr>
+                                      <p:to>
+                                        <p:strVal val="visible"/>
+                                      </p:to>
+                                    </p:set>
+                                  </p:childTnLst>
+                                </p:cTn>
+                              </p:par>
+                            </p:childTnLst>
+                          </p:cTn>
+                        </p:par>
+                      </p:childTnLst>
+                    </p:cTn>
+                  </p:par>
+                  <p:par>
+                    <p:cTn id="15" fill="hold">
+                      <p:stCondLst>
+                        <p:cond delay="indefinite"/>
+                      </p:stCondLst>
+                      <p:childTnLst>
+                        <p:par>
+                          <p:cTn id="16" fill="hold">
+                            <p:stCondLst>
+                              <p:cond delay="0"/>
+                            </p:stCondLst>
+                            <p:childTnLst>
+                              <p:par>
+                                <p:cTn id="17" presetID="1" presetClass="entr" presetSubtype="0" fill="hold" nodeType="clickEffect">
+                                  <p:stCondLst>
+                                    <p:cond delay="0"/>
+                                  </p:stCondLst>
+                                  <p:childTnLst>
+                                    <p:set>
+                                      <p:cBhvr>
+                                        <p:cTn id="18" dur="1" fill="hold">
+                                          <p:stCondLst>
+                                            <p:cond delay="0"/>
+                                          </p:stCondLst>
+                                        </p:cTn>
+                                        <p:tgtEl>
+                                          <p:spTgt spid="6"/>
+                                        </p:tgtEl>
+                                        <p:attrNameLst>
+                                          <p:attrName>style.visibility</p:attrName>
+                                        </p:attrNameLst>
+                                      </p:cBhvr>
+                                      <p:to>
+                                        <p:strVal val="visible"/>
+                                      </p:to>
+                                    </p:set>
+                                  </p:childTnLst>
+                                </p:cTn>
+                              </p:par>
+                            </p:childTnLst>
+                          </p:cTn>
+                        </p:par>
+                      </p:childTnLst>
+                    </p:cTn>
+                  </p:par>
+                  <p:par>
+                    <p:cTn id="19" fill="hold">
+                      <p:stCondLst>
+                        <p:cond delay="indefinite"/>
+                      </p:stCondLst>
+                      <p:childTnLst>
+                        <p:par>
+                          <p:cTn id="20" fill="hold">
+                            <p:stCondLst>
+                              <p:cond delay="0"/>
+                            </p:stCondLst>
+                            <p:childTnLst>
+                              <p:par>
+                                <p:cTn id="21" presetID="1" presetClass="entr" presetSubtype="0" fill="hold" nodeType="clickEffect">
+                                  <p:stCondLst>
+                                    <p:cond delay="0"/>
+                                  </p:stCondLst>
+                                  <p:childTnLst>
+                                    <p:set>
+                                      <p:cBhvr>
+                                        <p:cTn id="22" dur="1" fill="hold">
+                                          <p:stCondLst>
+                                            <p:cond delay="0"/>
+                                          </p:stCondLst>
+                                        </p:cTn>
+                                        <p:tgtEl>
+                                          <p:spTgt spid="7"/>
+                                        </p:tgtEl>
+                                        <p:attrNameLst>
+                                          <p:attrName>style.visibility</p:attrName>
+                                        </p:attrNameLst>
+                                      </p:cBhvr>
+                                      <p:to>
+                                        <p:strVal val="visible"/>
+                                      </p:to>
+                                    </p:set>
+                                  </p:childTnLst>
+                                </p:cTn>
+                              </p:par>
+                            </p:childTnLst>
+                          </p:cTn>
+                        </p:par>
+                      </p:childTnLst>
+                    </p:cTn>
+                  </p:par>
+                  <p:par>
+                    <p:cTn id="23" fill="hold">
+                      <p:stCondLst>
+                        <p:cond delay="indefinite"/>
+                      </p:stCondLst>
+                      <p:childTnLst>
+                        <p:par>
+                          <p:cTn id="24" fill="hold">
+                            <p:stCondLst>
+                              <p:cond delay="0"/>
+                            </p:stCondLst>
+                            <p:childTnLst>
+                              <p:par>
+                                <p:cTn id="25" presetID="1" presetClass="entr" presetSubtype="0" fill="hold" nodeType="clickEffect">
+                                  <p:stCondLst>
+                                    <p:cond delay="0"/>
+                                  </p:stCondLst>
+                                  <p:childTnLst>
+                                    <p:set>
+                                      <p:cBhvr>
+                                        <p:cTn id="26" dur="1" fill="hold">
+                                          <p:stCondLst>
+                                            <p:cond delay="0"/>
+                                          </p:stCondLst>
+                                        </p:cTn>
+                                        <p:tgtEl>
+                                          <p:spTgt spid="8"/>
+                                        </p:tgtEl>
+                                        <p:attrNameLst>
+                                          <p:attrName>style.visibility</p:attrName>
+                                        </p:attrNameLst>
+                                      </p:cBhvr>
+                                      <p:to>
+                                        <p:strVal val="visible"/>
+                                      </p:to>
+                                    </p:set>
+                                  </p:childTnLst>
+                                </p:cTn>
+                              </p:par>
+                            </p:childTnLst>
+                          </p:cTn>
+                        </p:par>
+                      </p:childTnLst>
+                    </p:cTn>
+                  </p:par>
+                  <p:par>
+                    <p:cTn id="27" fill="hold">
+                      <p:stCondLst>
+                        <p:cond delay="indefinite"/>
+                      </p:stCondLst>
+                      <p:childTnLst>
+                        <p:par>
+                          <p:cTn id="28" fill="hold">
+                            <p:stCondLst>
+                              <p:cond delay="0"/>
+                            </p:stCondLst>
+                            <p:childTnLst>
+                              <p:par>
+                                <p:cTn id="29" presetID="1" presetClass="entr" presetSubtype="0" fill="hold" nodeType="clickEffect">
+                                  <p:stCondLst>
+                                    <p:cond delay="0"/>
+                                  </p:stCondLst>
+                                  <p:childTnLst>
+                                    <p:set>
+                                      <p:cBhvr>
+                                        <p:cTn id="30" dur="1" fill="hold">
+                                          <p:stCondLst>
+                                            <p:cond delay="0"/>
+                                          </p:stCondLst>
+                                        </p:cTn>
+                                        <p:tgtEl>
+                                          <p:spTgt spid="9"/>
+                                        </p:tgtEl>
+                                        <p:attrNameLst>
+                                          <p:attrName>style.visibility</p:attrName>
+                                        </p:attrNameLst>
+                                      </p:cBhvr>
+                                      <p:to>
+                                        <p:strVal val="visible"/>
+                                      </p:to>
+                                    </p:set>
+                                  </p:childTnLst>
+                                </p:cTn>
+                              </p:par>
+                            </p:childTnLst>
+                          </p:cTn>
+                        </p:par>
+                      </p:childTnLst>
+                    </p:cTn>
+                  </p:par>
+                  <p:par>
+                    <p:cTn id="31" fill="hold">
+                      <p:stCondLst>
+                        <p:cond delay="indefinite"/>
+                      </p:stCondLst>
+                      <p:childTnLst>
+                        <p:par>
+                          <p:cTn id="32" fill="hold">
+                            <p:stCondLst>
+                              <p:cond delay="0"/>
+                            </p:stCondLst>
+                            <p:childTnLst>
+                              <p:par>
+                                <p:cTn id="33" presetID="1" presetClass="entr" presetSubtype="0" fill="hold" nodeType="clickEffect">
+                                  <p:stCondLst>
+                                    <p:cond delay="0"/>
+                                  </p:stCondLst>
+                                  <p:childTnLst>
+                                    <p:set>
+                                      <p:cBhvr>
+                                        <p:cTn id="34" dur="1" fill="hold">
+                                          <p:stCondLst>
+                                            <p:cond delay="0"/>
+                                          </p:stCondLst>
+                                        </p:cTn>
+                                        <p:tgtEl>
+                                          <p:spTgt spid="10"/>
+                                        </p:tgtEl>
+                                        <p:attrNameLst>
+                                          <p:attrName>style.visibility</p:attrName>
+                                        </p:attrNameLst>
+                                      </p:cBhvr>
+                                      <p:to>
+                                        <p:strVal val="visible"/>
+                                      </p:to>
+                                    </p:set>
+                                  </p:childTnLst>
+                                </p:cTn>
+                              </p:par>
+                            </p:childTnLst>
+                          </p:cTn>
+                        </p:par>
+                      </p:childTnLst>
+                    </p:cTn>
+                  </p:par>
+                </p:childTnLst>
+              </p:cTn>
+              <p:prevCondLst>
+                <p:cond evt="onPrev" delay="0">
+                  <p:tgtEl>
+                    <p:sldTgt/>
+                  </p:tgtEl>
+                </p:cond>
+              </p:prevCondLst>
+              <p:nextCondLst>
+                <p:cond evt="onNext" delay="0">
+                  <p:tgtEl>
+                    <p:sldTgt/>
+                  </p:tgtEl>
+                </p:cond>
+              </p:nextCondLst>
+            </p:seq>
+          </p:childTnLst>
+        </p:cTn>
+      </p:par>
+    </p:tnLst>
+  </p:timing>
+</p:sld>
+</file>
+
+<file path=ppt/slides/slide30.xml><?xml version="1.0" encoding="utf-8"?>
 <p:sld xmlns:a="http://schemas.openxmlformats.org/drawingml/2006/main" xmlns:r="http://schemas.openxmlformats.org/officeDocument/2006/relationships" xmlns:p="http://schemas.openxmlformats.org/presentationml/2006/main">
   <p:cSld>
     <p:spTree>
@@ -14309,7 +17524,7 @@
 </p:sld>
 </file>
 
-<file path=ppt/slides/slide27.xml><?xml version="1.0" encoding="utf-8"?>
+<file path=ppt/slides/slide31.xml><?xml version="1.0" encoding="utf-8"?>
 <p:sld xmlns:a="http://schemas.openxmlformats.org/drawingml/2006/main" xmlns:r="http://schemas.openxmlformats.org/officeDocument/2006/relationships" xmlns:p="http://schemas.openxmlformats.org/presentationml/2006/main">
   <p:cSld>
     <p:spTree>
@@ -14565,7 +17780,7 @@
 </p:sld>
 </file>
 
-<file path=ppt/slides/slide28.xml><?xml version="1.0" encoding="utf-8"?>
+<file path=ppt/slides/slide32.xml><?xml version="1.0" encoding="utf-8"?>
 <p:sld xmlns:a="http://schemas.openxmlformats.org/drawingml/2006/main" xmlns:r="http://schemas.openxmlformats.org/officeDocument/2006/relationships" xmlns:p="http://schemas.openxmlformats.org/presentationml/2006/main">
   <p:cSld>
     <p:spTree>
@@ -14717,795 +17932,6 @@
   <p:clrMapOvr>
     <a:masterClrMapping/>
   </p:clrMapOvr>
-</p:sld>
-</file>
-
-<file path=ppt/slides/slide3.xml><?xml version="1.0" encoding="utf-8"?>
-<p:sld xmlns:a="http://schemas.openxmlformats.org/drawingml/2006/main" xmlns:r="http://schemas.openxmlformats.org/officeDocument/2006/relationships" xmlns:p="http://schemas.openxmlformats.org/presentationml/2006/main">
-  <p:cSld>
-    <p:spTree>
-      <p:nvGrpSpPr>
-        <p:cNvPr id="1" name=""/>
-        <p:cNvGrpSpPr/>
-        <p:nvPr/>
-      </p:nvGrpSpPr>
-      <p:grpSpPr>
-        <a:xfrm>
-          <a:off x="0" y="0"/>
-          <a:ext cx="0" cy="0"/>
-          <a:chOff x="0" y="0"/>
-          <a:chExt cx="0" cy="0"/>
-        </a:xfrm>
-      </p:grpSpPr>
-      <p:sp>
-        <p:nvSpPr>
-          <p:cNvPr id="2" name="Title 1"/>
-          <p:cNvSpPr>
-            <a:spLocks noGrp="1"/>
-          </p:cNvSpPr>
-          <p:nvPr>
-            <p:ph type="title"/>
-          </p:nvPr>
-        </p:nvSpPr>
-        <p:spPr>
-          <a:xfrm>
-            <a:off x="838200" y="365126"/>
-            <a:ext cx="10515600" cy="519130"/>
-          </a:xfrm>
-        </p:spPr>
-        <p:txBody>
-          <a:bodyPr>
-            <a:normAutofit fontScale="90000"/>
-          </a:bodyPr>
-          <a:lstStyle/>
-          <a:p>
-            <a:r>
-              <a:rPr lang="en-US" dirty="0"/>
-              <a:t>Review</a:t>
-            </a:r>
-          </a:p>
-        </p:txBody>
-      </p:sp>
-      <p:sp>
-        <p:nvSpPr>
-          <p:cNvPr id="3" name="Question 1"/>
-          <p:cNvSpPr/>
-          <p:nvPr/>
-        </p:nvSpPr>
-        <p:spPr>
-          <a:xfrm>
-            <a:off x="838200" y="1075688"/>
-            <a:ext cx="10515600" cy="1230000"/>
-          </a:xfrm>
-          <a:prstGeom prst="roundRect">
-            <a:avLst>
-              <a:gd name="adj" fmla="val 4000"/>
-            </a:avLst>
-          </a:prstGeom>
-          <a:solidFill>
-            <a:srgbClr val="F2F6FC"/>
-          </a:solidFill>
-          <a:ln w="19050">
-            <a:solidFill>
-              <a:schemeClr val="accent1"/>
-            </a:solidFill>
-          </a:ln>
-        </p:spPr>
-        <p:txBody>
-          <a:bodyPr lIns="228600" tIns="182880" rIns="228600" bIns="91440" anchor="t">
-            <a:normAutofit/>
-          </a:bodyPr>
-          <a:lstStyle/>
-          <a:p>
-            <a:pPr marL="0" indent="0">
-              <a:buNone/>
-            </a:pPr>
-            <a:r>
-              <a:rPr lang="en-US" b="1" dirty="0">
-                <a:solidFill>
-                  <a:srgbClr val="4472C4"/>
-                </a:solidFill>
-              </a:rPr>
-              <a:t>1   </a:t>
-            </a:r>
-            <a:r>
-              <a:rPr lang="en-US" b="1" dirty="0"/>
-              <a:t>What do we call the way we collect the data?</a:t>
-            </a:r>
-          </a:p>
-        </p:txBody>
-      </p:sp>
-      <p:sp>
-        <p:nvSpPr>
-          <p:cNvPr id="4" name="Answer 1"/>
-          <p:cNvSpPr txBox="1"/>
-          <p:nvPr/>
-        </p:nvSpPr>
-        <p:spPr>
-          <a:xfrm>
-            <a:off x="1066800" y="1655688"/>
-            <a:ext cx="10058400" cy="558560"/>
-          </a:xfrm>
-          <a:prstGeom prst="rect">
-            <a:avLst/>
-          </a:prstGeom>
-          <a:noFill/>
-        </p:spPr>
-        <p:txBody>
-          <a:bodyPr wrap="square" lIns="0" tIns="0" rIns="0" bIns="0">
-            <a:normAutofit/>
-          </a:bodyPr>
-          <a:lstStyle/>
-          <a:p>
-            <a:pPr marL="0" indent="0">
-              <a:buNone/>
-            </a:pPr>
-            <a:r>
-              <a:rPr lang="en-US" dirty="0">
-                <a:solidFill>
-                  <a:srgbClr val="C00000"/>
-                </a:solidFill>
-              </a:rPr>
-              <a:t>The sampling design.</a:t>
-            </a:r>
-          </a:p>
-        </p:txBody>
-      </p:sp>
-      <p:sp>
-        <p:nvSpPr>
-          <p:cNvPr id="5" name="Question 2"/>
-          <p:cNvSpPr/>
-          <p:nvPr/>
-        </p:nvSpPr>
-        <p:spPr>
-          <a:xfrm>
-            <a:off x="838200" y="2385688"/>
-            <a:ext cx="10515600" cy="1230000"/>
-          </a:xfrm>
-          <a:prstGeom prst="roundRect">
-            <a:avLst>
-              <a:gd name="adj" fmla="val 4000"/>
-            </a:avLst>
-          </a:prstGeom>
-          <a:solidFill>
-            <a:srgbClr val="F2F6FC"/>
-          </a:solidFill>
-          <a:ln w="19050">
-            <a:solidFill>
-              <a:schemeClr val="accent1"/>
-            </a:solidFill>
-          </a:ln>
-        </p:spPr>
-        <p:txBody>
-          <a:bodyPr lIns="228600" tIns="182880" rIns="228600" bIns="91440" anchor="t">
-            <a:normAutofit/>
-          </a:bodyPr>
-          <a:lstStyle/>
-          <a:p>
-            <a:pPr marL="0" indent="0">
-              <a:buNone/>
-            </a:pPr>
-            <a:r>
-              <a:rPr lang="en-US" b="1" dirty="0">
-                <a:solidFill>
-                  <a:srgbClr val="4472C4"/>
-                </a:solidFill>
-              </a:rPr>
-              <a:t>2   </a:t>
-            </a:r>
-            <a:r>
-              <a:rPr lang="en-US" b="1" dirty="0"/>
-              <a:t>What are the three arms of statistics?</a:t>
-            </a:r>
-          </a:p>
-        </p:txBody>
-      </p:sp>
-      <p:sp>
-        <p:nvSpPr>
-          <p:cNvPr id="6" name="Answer 2"/>
-          <p:cNvSpPr txBox="1"/>
-          <p:nvPr/>
-        </p:nvSpPr>
-        <p:spPr>
-          <a:xfrm>
-            <a:off x="1066800" y="2965688"/>
-            <a:ext cx="10058400" cy="558560"/>
-          </a:xfrm>
-          <a:prstGeom prst="rect">
-            <a:avLst/>
-          </a:prstGeom>
-          <a:noFill/>
-        </p:spPr>
-        <p:txBody>
-          <a:bodyPr wrap="square" lIns="0" tIns="0" rIns="0" bIns="0">
-            <a:normAutofit/>
-          </a:bodyPr>
-          <a:lstStyle/>
-          <a:p>
-            <a:pPr marL="0" indent="0">
-              <a:buNone/>
-            </a:pPr>
-            <a:r>
-              <a:rPr lang="en-US" sz="1600" dirty="0">
-                <a:solidFill>
-                  <a:srgbClr val="C00000"/>
-                </a:solidFill>
-              </a:rPr>
-              <a:t>Design, description and inference.</a:t>
-            </a:r>
-          </a:p>
-        </p:txBody>
-      </p:sp>
-      <p:sp>
-        <p:nvSpPr>
-          <p:cNvPr id="7" name="Question 3"/>
-          <p:cNvSpPr/>
-          <p:nvPr/>
-        </p:nvSpPr>
-        <p:spPr>
-          <a:xfrm>
-            <a:off x="838200" y="3695688"/>
-            <a:ext cx="10515600" cy="1230000"/>
-          </a:xfrm>
-          <a:prstGeom prst="roundRect">
-            <a:avLst>
-              <a:gd name="adj" fmla="val 4000"/>
-            </a:avLst>
-          </a:prstGeom>
-          <a:solidFill>
-            <a:srgbClr val="F2F6FC"/>
-          </a:solidFill>
-          <a:ln w="19050">
-            <a:solidFill>
-              <a:schemeClr val="accent1"/>
-            </a:solidFill>
-          </a:ln>
-        </p:spPr>
-        <p:txBody>
-          <a:bodyPr lIns="228600" tIns="182880" rIns="228600" bIns="91440" anchor="t">
-            <a:normAutofit/>
-          </a:bodyPr>
-          <a:lstStyle/>
-          <a:p>
-            <a:pPr marL="0" indent="0">
-              <a:buNone/>
-            </a:pPr>
-            <a:r>
-              <a:rPr lang="en-US" b="1" dirty="0">
-                <a:solidFill>
-                  <a:srgbClr val="4472C4"/>
-                </a:solidFill>
-              </a:rPr>
-              <a:t>3   </a:t>
-            </a:r>
-            <a:r>
-              <a:rPr lang="en-US" b="1" dirty="0"/>
-              <a:t>Which one comes first, and why?</a:t>
-            </a:r>
-          </a:p>
-        </p:txBody>
-      </p:sp>
-      <p:sp>
-        <p:nvSpPr>
-          <p:cNvPr id="8" name="Answer 3"/>
-          <p:cNvSpPr txBox="1"/>
-          <p:nvPr/>
-        </p:nvSpPr>
-        <p:spPr>
-          <a:xfrm>
-            <a:off x="1066800" y="4275688"/>
-            <a:ext cx="10058400" cy="558560"/>
-          </a:xfrm>
-          <a:prstGeom prst="rect">
-            <a:avLst/>
-          </a:prstGeom>
-          <a:noFill/>
-        </p:spPr>
-        <p:txBody>
-          <a:bodyPr wrap="square" lIns="0" tIns="0" rIns="0" bIns="0">
-            <a:normAutofit/>
-          </a:bodyPr>
-          <a:lstStyle/>
-          <a:p>
-            <a:pPr marL="0" indent="0">
-              <a:buNone/>
-            </a:pPr>
-            <a:r>
-              <a:rPr lang="en-US" sz="1600" dirty="0">
-                <a:solidFill>
-                  <a:srgbClr val="C00000"/>
-                </a:solidFill>
-              </a:rPr>
-              <a:t>Design – how we plan to collect the data, settled before any data exists. No amount of description or inference repairs a bad design.</a:t>
-            </a:r>
-          </a:p>
-        </p:txBody>
-      </p:sp>
-      <p:sp>
-        <p:nvSpPr>
-          <p:cNvPr id="9" name="Question 4"/>
-          <p:cNvSpPr/>
-          <p:nvPr/>
-        </p:nvSpPr>
-        <p:spPr>
-          <a:xfrm>
-            <a:off x="838200" y="5005688"/>
-            <a:ext cx="10515600" cy="1230000"/>
-          </a:xfrm>
-          <a:prstGeom prst="roundRect">
-            <a:avLst>
-              <a:gd name="adj" fmla="val 4000"/>
-            </a:avLst>
-          </a:prstGeom>
-          <a:solidFill>
-            <a:srgbClr val="F2F6FC"/>
-          </a:solidFill>
-          <a:ln w="19050">
-            <a:solidFill>
-              <a:schemeClr val="accent1"/>
-            </a:solidFill>
-          </a:ln>
-        </p:spPr>
-        <p:txBody>
-          <a:bodyPr lIns="228600" tIns="182880" rIns="228600" bIns="91440" anchor="t">
-            <a:normAutofit/>
-          </a:bodyPr>
-          <a:lstStyle/>
-          <a:p>
-            <a:pPr marL="0" indent="0">
-              <a:buNone/>
-            </a:pPr>
-            <a:r>
-              <a:rPr lang="en-US" b="1" dirty="0">
-                <a:solidFill>
-                  <a:srgbClr val="4472C4"/>
-                </a:solidFill>
-              </a:rPr>
-              <a:t>4   </a:t>
-            </a:r>
-            <a:r>
-              <a:rPr lang="en-US" b="1" dirty="0"/>
-              <a:t>What is an estimate?</a:t>
-            </a:r>
-          </a:p>
-        </p:txBody>
-      </p:sp>
-      <p:sp>
-        <p:nvSpPr>
-          <p:cNvPr id="10" name="Answer 4"/>
-          <p:cNvSpPr txBox="1"/>
-          <p:nvPr/>
-        </p:nvSpPr>
-        <p:spPr>
-          <a:xfrm>
-            <a:off x="1066800" y="5585688"/>
-            <a:ext cx="10058400" cy="558560"/>
-          </a:xfrm>
-          <a:prstGeom prst="rect">
-            <a:avLst/>
-          </a:prstGeom>
-          <a:noFill/>
-        </p:spPr>
-        <p:txBody>
-          <a:bodyPr wrap="square" lIns="0" tIns="0" rIns="0" bIns="0">
-            <a:normAutofit/>
-          </a:bodyPr>
-          <a:lstStyle/>
-          <a:p>
-            <a:pPr marL="0" indent="0">
-              <a:buNone/>
-            </a:pPr>
-            <a:r>
-              <a:rPr lang="en-US" sz="1600" dirty="0">
-                <a:solidFill>
-                  <a:srgbClr val="C00000"/>
-                </a:solidFill>
-              </a:rPr>
-              <a:t>A statistic computed from a sample, used to approximate an unknown population parameter</a:t>
-            </a:r>
-          </a:p>
-        </p:txBody>
-      </p:sp>
-    </p:spTree>
-    <p:extLst>
-      <p:ext uri="{BB962C8B-B14F-4D97-AF65-F5344CB8AC3E}">
-        <p14:creationId xmlns:p14="http://schemas.microsoft.com/office/powerpoint/2010/main" val="1517484012"/>
-      </p:ext>
-    </p:extLst>
-  </p:cSld>
-  <p:clrMapOvr>
-    <a:masterClrMapping/>
-  </p:clrMapOvr>
-  <p:timing>
-    <p:tnLst>
-      <p:par>
-        <p:cTn id="1" dur="indefinite" restart="never" nodeType="tmRoot">
-          <p:childTnLst>
-            <p:seq concurrent="1" nextAc="seek">
-              <p:cTn id="2" dur="indefinite" nodeType="mainSeq">
-                <p:childTnLst>
-                  <p:par>
-                    <p:cTn id="3" fill="hold">
-                      <p:stCondLst>
-                        <p:cond delay="indefinite"/>
-                      </p:stCondLst>
-                      <p:childTnLst>
-                        <p:par>
-                          <p:cTn id="4" fill="hold">
-                            <p:stCondLst>
-                              <p:cond delay="0"/>
-                            </p:stCondLst>
-                            <p:childTnLst>
-                              <p:par>
-                                <p:cTn id="5" presetID="1" presetClass="entr" presetSubtype="0" fill="hold" nodeType="clickEffect">
-                                  <p:stCondLst>
-                                    <p:cond delay="0"/>
-                                  </p:stCondLst>
-                                  <p:childTnLst>
-                                    <p:set>
-                                      <p:cBhvr>
-                                        <p:cTn id="6" dur="1" fill="hold">
-                                          <p:stCondLst>
-                                            <p:cond delay="0"/>
-                                          </p:stCondLst>
-                                        </p:cTn>
-                                        <p:tgtEl>
-                                          <p:spTgt spid="3"/>
-                                        </p:tgtEl>
-                                        <p:attrNameLst>
-                                          <p:attrName>style.visibility</p:attrName>
-                                        </p:attrNameLst>
-                                      </p:cBhvr>
-                                      <p:to>
-                                        <p:strVal val="visible"/>
-                                      </p:to>
-                                    </p:set>
-                                  </p:childTnLst>
-                                </p:cTn>
-                              </p:par>
-                            </p:childTnLst>
-                          </p:cTn>
-                        </p:par>
-                      </p:childTnLst>
-                    </p:cTn>
-                  </p:par>
-                  <p:par>
-                    <p:cTn id="7" fill="hold">
-                      <p:stCondLst>
-                        <p:cond delay="indefinite"/>
-                      </p:stCondLst>
-                      <p:childTnLst>
-                        <p:par>
-                          <p:cTn id="8" fill="hold">
-                            <p:stCondLst>
-                              <p:cond delay="0"/>
-                            </p:stCondLst>
-                            <p:childTnLst>
-                              <p:par>
-                                <p:cTn id="9" presetID="1" presetClass="entr" presetSubtype="0" fill="hold" nodeType="clickEffect">
-                                  <p:stCondLst>
-                                    <p:cond delay="0"/>
-                                  </p:stCondLst>
-                                  <p:childTnLst>
-                                    <p:set>
-                                      <p:cBhvr>
-                                        <p:cTn id="10" dur="1" fill="hold">
-                                          <p:stCondLst>
-                                            <p:cond delay="0"/>
-                                          </p:stCondLst>
-                                        </p:cTn>
-                                        <p:tgtEl>
-                                          <p:spTgt spid="4"/>
-                                        </p:tgtEl>
-                                        <p:attrNameLst>
-                                          <p:attrName>style.visibility</p:attrName>
-                                        </p:attrNameLst>
-                                      </p:cBhvr>
-                                      <p:to>
-                                        <p:strVal val="visible"/>
-                                      </p:to>
-                                    </p:set>
-                                  </p:childTnLst>
-                                </p:cTn>
-                              </p:par>
-                            </p:childTnLst>
-                          </p:cTn>
-                        </p:par>
-                      </p:childTnLst>
-                    </p:cTn>
-                  </p:par>
-                  <p:par>
-                    <p:cTn id="11" fill="hold">
-                      <p:stCondLst>
-                        <p:cond delay="indefinite"/>
-                      </p:stCondLst>
-                      <p:childTnLst>
-                        <p:par>
-                          <p:cTn id="12" fill="hold">
-                            <p:stCondLst>
-                              <p:cond delay="0"/>
-                            </p:stCondLst>
-                            <p:childTnLst>
-                              <p:par>
-                                <p:cTn id="13" presetID="1" presetClass="entr" presetSubtype="0" fill="hold" nodeType="clickEffect">
-                                  <p:stCondLst>
-                                    <p:cond delay="0"/>
-                                  </p:stCondLst>
-                                  <p:childTnLst>
-                                    <p:set>
-                                      <p:cBhvr>
-                                        <p:cTn id="14" dur="1" fill="hold">
-                                          <p:stCondLst>
-                                            <p:cond delay="0"/>
-                                          </p:stCondLst>
-                                        </p:cTn>
-                                        <p:tgtEl>
-                                          <p:spTgt spid="5"/>
-                                        </p:tgtEl>
-                                        <p:attrNameLst>
-                                          <p:attrName>style.visibility</p:attrName>
-                                        </p:attrNameLst>
-                                      </p:cBhvr>
-                                      <p:to>
-                                        <p:strVal val="visible"/>
-                                      </p:to>
-                                    </p:set>
-                                  </p:childTnLst>
-                                </p:cTn>
-                              </p:par>
-                            </p:childTnLst>
-                          </p:cTn>
-                        </p:par>
-                      </p:childTnLst>
-                    </p:cTn>
-                  </p:par>
-                  <p:par>
-                    <p:cTn id="15" fill="hold">
-                      <p:stCondLst>
-                        <p:cond delay="indefinite"/>
-                      </p:stCondLst>
-                      <p:childTnLst>
-                        <p:par>
-                          <p:cTn id="16" fill="hold">
-                            <p:stCondLst>
-                              <p:cond delay="0"/>
-                            </p:stCondLst>
-                            <p:childTnLst>
-                              <p:par>
-                                <p:cTn id="17" presetID="1" presetClass="entr" presetSubtype="0" fill="hold" nodeType="clickEffect">
-                                  <p:stCondLst>
-                                    <p:cond delay="0"/>
-                                  </p:stCondLst>
-                                  <p:childTnLst>
-                                    <p:set>
-                                      <p:cBhvr>
-                                        <p:cTn id="18" dur="1" fill="hold">
-                                          <p:stCondLst>
-                                            <p:cond delay="0"/>
-                                          </p:stCondLst>
-                                        </p:cTn>
-                                        <p:tgtEl>
-                                          <p:spTgt spid="6"/>
-                                        </p:tgtEl>
-                                        <p:attrNameLst>
-                                          <p:attrName>style.visibility</p:attrName>
-                                        </p:attrNameLst>
-                                      </p:cBhvr>
-                                      <p:to>
-                                        <p:strVal val="visible"/>
-                                      </p:to>
-                                    </p:set>
-                                  </p:childTnLst>
-                                </p:cTn>
-                              </p:par>
-                            </p:childTnLst>
-                          </p:cTn>
-                        </p:par>
-                      </p:childTnLst>
-                    </p:cTn>
-                  </p:par>
-                  <p:par>
-                    <p:cTn id="19" fill="hold">
-                      <p:stCondLst>
-                        <p:cond delay="indefinite"/>
-                      </p:stCondLst>
-                      <p:childTnLst>
-                        <p:par>
-                          <p:cTn id="20" fill="hold">
-                            <p:stCondLst>
-                              <p:cond delay="0"/>
-                            </p:stCondLst>
-                            <p:childTnLst>
-                              <p:par>
-                                <p:cTn id="21" presetID="1" presetClass="entr" presetSubtype="0" fill="hold" nodeType="clickEffect">
-                                  <p:stCondLst>
-                                    <p:cond delay="0"/>
-                                  </p:stCondLst>
-                                  <p:childTnLst>
-                                    <p:set>
-                                      <p:cBhvr>
-                                        <p:cTn id="22" dur="1" fill="hold">
-                                          <p:stCondLst>
-                                            <p:cond delay="0"/>
-                                          </p:stCondLst>
-                                        </p:cTn>
-                                        <p:tgtEl>
-                                          <p:spTgt spid="7"/>
-                                        </p:tgtEl>
-                                        <p:attrNameLst>
-                                          <p:attrName>style.visibility</p:attrName>
-                                        </p:attrNameLst>
-                                      </p:cBhvr>
-                                      <p:to>
-                                        <p:strVal val="visible"/>
-                                      </p:to>
-                                    </p:set>
-                                  </p:childTnLst>
-                                </p:cTn>
-                              </p:par>
-                            </p:childTnLst>
-                          </p:cTn>
-                        </p:par>
-                      </p:childTnLst>
-                    </p:cTn>
-                  </p:par>
-                  <p:par>
-                    <p:cTn id="23" fill="hold">
-                      <p:stCondLst>
-                        <p:cond delay="indefinite"/>
-                      </p:stCondLst>
-                      <p:childTnLst>
-                        <p:par>
-                          <p:cTn id="24" fill="hold">
-                            <p:stCondLst>
-                              <p:cond delay="0"/>
-                            </p:stCondLst>
-                            <p:childTnLst>
-                              <p:par>
-                                <p:cTn id="25" presetID="1" presetClass="entr" presetSubtype="0" fill="hold" nodeType="clickEffect">
-                                  <p:stCondLst>
-                                    <p:cond delay="0"/>
-                                  </p:stCondLst>
-                                  <p:childTnLst>
-                                    <p:set>
-                                      <p:cBhvr>
-                                        <p:cTn id="26" dur="1" fill="hold">
-                                          <p:stCondLst>
-                                            <p:cond delay="0"/>
-                                          </p:stCondLst>
-                                        </p:cTn>
-                                        <p:tgtEl>
-                                          <p:spTgt spid="8"/>
-                                        </p:tgtEl>
-                                        <p:attrNameLst>
-                                          <p:attrName>style.visibility</p:attrName>
-                                        </p:attrNameLst>
-                                      </p:cBhvr>
-                                      <p:to>
-                                        <p:strVal val="visible"/>
-                                      </p:to>
-                                    </p:set>
-                                  </p:childTnLst>
-                                </p:cTn>
-                              </p:par>
-                            </p:childTnLst>
-                          </p:cTn>
-                        </p:par>
-                      </p:childTnLst>
-                    </p:cTn>
-                  </p:par>
-                  <p:par>
-                    <p:cTn id="27" fill="hold">
-                      <p:stCondLst>
-                        <p:cond delay="indefinite"/>
-                      </p:stCondLst>
-                      <p:childTnLst>
-                        <p:par>
-                          <p:cTn id="28" fill="hold">
-                            <p:stCondLst>
-                              <p:cond delay="0"/>
-                            </p:stCondLst>
-                            <p:childTnLst>
-                              <p:par>
-                                <p:cTn id="29" presetID="1" presetClass="entr" presetSubtype="0" fill="hold" nodeType="clickEffect">
-                                  <p:stCondLst>
-                                    <p:cond delay="0"/>
-                                  </p:stCondLst>
-                                  <p:childTnLst>
-                                    <p:set>
-                                      <p:cBhvr>
-                                        <p:cTn id="30" dur="1" fill="hold">
-                                          <p:stCondLst>
-                                            <p:cond delay="0"/>
-                                          </p:stCondLst>
-                                        </p:cTn>
-                                        <p:tgtEl>
-                                          <p:spTgt spid="9"/>
-                                        </p:tgtEl>
-                                        <p:attrNameLst>
-                                          <p:attrName>style.visibility</p:attrName>
-                                        </p:attrNameLst>
-                                      </p:cBhvr>
-                                      <p:to>
-                                        <p:strVal val="visible"/>
-                                      </p:to>
-                                    </p:set>
-                                  </p:childTnLst>
-                                </p:cTn>
-                              </p:par>
-                            </p:childTnLst>
-                          </p:cTn>
-                        </p:par>
-                      </p:childTnLst>
-                    </p:cTn>
-                  </p:par>
-                  <p:par>
-                    <p:cTn id="31" fill="hold">
-                      <p:stCondLst>
-                        <p:cond delay="indefinite"/>
-                      </p:stCondLst>
-                      <p:childTnLst>
-                        <p:par>
-                          <p:cTn id="32" fill="hold">
-                            <p:stCondLst>
-                              <p:cond delay="0"/>
-                            </p:stCondLst>
-                            <p:childTnLst>
-                              <p:par>
-                                <p:cTn id="33" presetID="1" presetClass="entr" presetSubtype="0" fill="hold" nodeType="clickEffect">
-                                  <p:stCondLst>
-                                    <p:cond delay="0"/>
-                                  </p:stCondLst>
-                                  <p:childTnLst>
-                                    <p:set>
-                                      <p:cBhvr>
-                                        <p:cTn id="34" dur="1" fill="hold">
-                                          <p:stCondLst>
-                                            <p:cond delay="0"/>
-                                          </p:stCondLst>
-                                        </p:cTn>
-                                        <p:tgtEl>
-                                          <p:spTgt spid="10"/>
-                                        </p:tgtEl>
-                                        <p:attrNameLst>
-                                          <p:attrName>style.visibility</p:attrName>
-                                        </p:attrNameLst>
-                                      </p:cBhvr>
-                                      <p:to>
-                                        <p:strVal val="visible"/>
-                                      </p:to>
-                                    </p:set>
-                                  </p:childTnLst>
-                                </p:cTn>
-                              </p:par>
-                            </p:childTnLst>
-                          </p:cTn>
-                        </p:par>
-                      </p:childTnLst>
-                    </p:cTn>
-                  </p:par>
-                </p:childTnLst>
-              </p:cTn>
-              <p:prevCondLst>
-                <p:cond evt="onPrev" delay="0">
-                  <p:tgtEl>
-                    <p:sldTgt/>
-                  </p:tgtEl>
-                </p:cond>
-              </p:prevCondLst>
-              <p:nextCondLst>
-                <p:cond evt="onNext" delay="0">
-                  <p:tgtEl>
-                    <p:sldTgt/>
-                  </p:tgtEl>
-                </p:cond>
-              </p:nextCondLst>
-            </p:seq>
-          </p:childTnLst>
-        </p:cTn>
-      </p:par>
-    </p:tnLst>
-  </p:timing>
 </p:sld>
 </file>
 
@@ -16124,13 +18550,7 @@
       </p:grpSpPr>
       <p:sp>
         <p:nvSpPr>
-          <p:cNvPr id="2" name="Title 1">
-            <a:extLst>
-              <a:ext uri="{FF2B5EF4-FFF2-40B4-BE49-F238E27FC236}">
-                <a16:creationId xmlns:a16="http://schemas.microsoft.com/office/drawing/2014/main" id="{746E7931-7E6D-2752-3470-1130A2671C60}"/>
-              </a:ext>
-            </a:extLst>
-          </p:cNvPr>
+          <p:cNvPr id="2" name="Title 1"/>
           <p:cNvSpPr>
             <a:spLocks noGrp="1"/>
           </p:cNvSpPr>
@@ -16140,222 +18560,28 @@
         </p:nvSpPr>
         <p:spPr/>
         <p:txBody>
-          <a:bodyPr/>
+          <a:bodyPr>
+            <a:normAutofit/>
+          </a:bodyPr>
           <a:lstStyle/>
           <a:p>
             <a:r>
               <a:rPr lang="en-US" dirty="0"/>
-              <a:t>Displaying Distributions: Frequency Tables</a:t>
+              <a:t>What to Look For: the Modal Category</a:t>
             </a:r>
           </a:p>
         </p:txBody>
       </p:sp>
-      <mc:AlternateContent xmlns:mc="http://schemas.openxmlformats.org/markup-compatibility/2006" xmlns:a14="http://schemas.microsoft.com/office/drawing/2010/main">
-        <mc:Choice Requires="a14">
-          <p:sp>
-            <p:nvSpPr>
-              <p:cNvPr id="3" name="Content Placeholder 2">
-                <a:extLst>
-                  <a:ext uri="{FF2B5EF4-FFF2-40B4-BE49-F238E27FC236}">
-                    <a16:creationId xmlns:a16="http://schemas.microsoft.com/office/drawing/2014/main" id="{F62BC55B-314A-1FBB-D20E-C5A204950191}"/>
-                  </a:ext>
-                </a:extLst>
-              </p:cNvPr>
-              <p:cNvSpPr>
-                <a:spLocks noGrp="1"/>
-              </p:cNvSpPr>
-              <p:nvPr>
-                <p:ph idx="1"/>
-              </p:nvPr>
-            </p:nvSpPr>
-            <p:spPr>
-              <a:xfrm>
-                <a:off x="838200" y="1825625"/>
-                <a:ext cx="4686300" cy="4351338"/>
-              </a:xfrm>
-            </p:spPr>
-            <p:txBody>
-              <a:bodyPr>
-                <a:normAutofit fontScale="70000" lnSpcReduction="20000"/>
-              </a:bodyPr>
-              <a:lstStyle/>
-              <a:p>
-                <a:r>
-                  <a:rPr lang="en-US" b="1" dirty="0"/>
-                  <a:t>Frequency table – </a:t>
-                </a:r>
-                <a:r>
-                  <a:rPr lang="en-US" dirty="0"/>
-                  <a:t>a table listing the distinct values of variable together with the number of observations of each value</a:t>
-                </a:r>
-              </a:p>
-              <a:p>
-                <a:endParaRPr lang="en-US" b="1" dirty="0"/>
-              </a:p>
-              <a:p>
-                <a:r>
-                  <a:rPr lang="en-US" b="1" dirty="0"/>
-                  <a:t>Frequency</a:t>
-                </a:r>
-                <a:r>
-                  <a:rPr lang="en-US" dirty="0"/>
-                  <a:t> – the number of times a value occurs</a:t>
-                </a:r>
-              </a:p>
-              <a:p>
-                <a:endParaRPr lang="en-US" dirty="0"/>
-              </a:p>
-              <a:p>
-                <a:r>
-                  <a:rPr lang="en-US" b="1" dirty="0"/>
-                  <a:t>Relative Frequency</a:t>
-                </a:r>
-                <a:r>
-                  <a:rPr lang="en-US" dirty="0"/>
-                  <a:t> – the proportion of observations that assume a given value</a:t>
-                </a:r>
-              </a:p>
-              <a:p>
-                <a:pPr marL="0" indent="0">
-                  <a:buNone/>
-                </a:pPr>
-                <a:r>
-                  <a:rPr lang="en-US" dirty="0"/>
-                  <a:t>	</a:t>
-                </a:r>
-                <a14:m>
-                  <m:oMath xmlns:m="http://schemas.openxmlformats.org/officeDocument/2006/math">
-                    <m:r>
-                      <m:rPr>
-                        <m:sty m:val="p"/>
-                      </m:rPr>
-                      <a:rPr lang="en-US" sz="3400" b="0" i="0" smtClean="0">
-                        <a:latin typeface="Cambria Math" panose="02040503050406030204" pitchFamily="18" charset="0"/>
-                      </a:rPr>
-                      <m:t>RF</m:t>
-                    </m:r>
-                    <m:r>
-                      <a:rPr lang="en-US" sz="3400" b="0" i="0" smtClean="0">
-                        <a:latin typeface="Cambria Math" panose="02040503050406030204" pitchFamily="18" charset="0"/>
-                      </a:rPr>
-                      <m:t>= </m:t>
-                    </m:r>
-                    <m:f>
-                      <m:fPr>
-                        <m:ctrlPr>
-                          <a:rPr lang="en-US" sz="3400" b="0" i="1" smtClean="0">
-                            <a:latin typeface="Cambria Math" panose="02040503050406030204" pitchFamily="18" charset="0"/>
-                          </a:rPr>
-                        </m:ctrlPr>
-                      </m:fPr>
-                      <m:num>
-                        <m:r>
-                          <a:rPr lang="en-US" sz="3400" b="0" i="1" smtClean="0">
-                            <a:latin typeface="Cambria Math" panose="02040503050406030204" pitchFamily="18" charset="0"/>
-                          </a:rPr>
-                          <m:t>𝑓</m:t>
-                        </m:r>
-                      </m:num>
-                      <m:den>
-                        <m:r>
-                          <a:rPr lang="en-US" sz="3400" b="0" i="1" smtClean="0">
-                            <a:latin typeface="Cambria Math" panose="02040503050406030204" pitchFamily="18" charset="0"/>
-                          </a:rPr>
-                          <m:t>𝑛</m:t>
-                        </m:r>
-                      </m:den>
-                    </m:f>
-                    <m:r>
-                      <a:rPr lang="en-US" sz="3400" b="0" i="1" smtClean="0">
-                        <a:latin typeface="Cambria Math" panose="02040503050406030204" pitchFamily="18" charset="0"/>
-                      </a:rPr>
-                      <m:t>,</m:t>
-                    </m:r>
-                  </m:oMath>
-                </a14:m>
-                <a:endParaRPr lang="en-US" dirty="0"/>
-              </a:p>
-              <a:p>
-                <a:r>
-                  <a:rPr lang="en-US" b="1" dirty="0"/>
-                  <a:t>Cumulative Relative Frequency </a:t>
-                </a:r>
-                <a:r>
-                  <a:rPr lang="en-US" dirty="0"/>
-                  <a:t>- the proportion of observations </a:t>
-                </a:r>
-                <a:r>
-                  <a:rPr lang="en-US" u="sng" dirty="0"/>
-                  <a:t>equal to or less than</a:t>
-                </a:r>
-                <a:r>
-                  <a:rPr lang="en-US" dirty="0"/>
-                  <a:t> a given value (more on this later)</a:t>
-                </a:r>
-              </a:p>
-            </p:txBody>
-          </p:sp>
-        </mc:Choice>
-        <mc:Fallback xmlns="">
-          <p:sp>
-            <p:nvSpPr>
-              <p:cNvPr id="3" name="Content Placeholder 2">
-                <a:extLst>
-                  <a:ext uri="{FF2B5EF4-FFF2-40B4-BE49-F238E27FC236}">
-                    <a16:creationId xmlns:a16="http://schemas.microsoft.com/office/drawing/2014/main" id="{F62BC55B-314A-1FBB-D20E-C5A204950191}"/>
-                  </a:ext>
-                </a:extLst>
-              </p:cNvPr>
-              <p:cNvSpPr>
-                <a:spLocks noGrp="1" noRot="1" noChangeAspect="1" noMove="1" noResize="1" noEditPoints="1" noAdjustHandles="1" noChangeArrowheads="1" noChangeShapeType="1" noTextEdit="1"/>
-              </p:cNvSpPr>
-              <p:nvPr>
-                <p:ph idx="1"/>
-              </p:nvPr>
-            </p:nvSpPr>
-            <p:spPr>
-              <a:xfrm>
-                <a:off x="838200" y="1825625"/>
-                <a:ext cx="4686300" cy="4351338"/>
-              </a:xfrm>
-              <a:blipFill>
-                <a:blip r:embed="rId2"/>
-                <a:stretch>
-                  <a:fillRect l="-1172" t="-2521" r="-2083"/>
-                </a:stretch>
-              </a:blipFill>
-            </p:spPr>
-            <p:txBody>
-              <a:bodyPr/>
-              <a:lstStyle/>
-              <a:p>
-                <a:r>
-                  <a:rPr lang="en-US">
-                    <a:noFill/>
-                  </a:rPr>
-                  <a:t> </a:t>
-                </a:r>
-              </a:p>
-            </p:txBody>
-          </p:sp>
-        </mc:Fallback>
-      </mc:AlternateContent>
       <p:sp>
         <p:nvSpPr>
-          <p:cNvPr id="5" name="TextBox 4">
-            <a:extLst>
-              <a:ext uri="{FF2B5EF4-FFF2-40B4-BE49-F238E27FC236}">
-                <a16:creationId xmlns:a16="http://schemas.microsoft.com/office/drawing/2014/main" id="{C16CEE11-2CF1-DEAD-BC8D-9BB706DE1AB6}"/>
-              </a:ext>
-            </a:extLst>
-          </p:cNvPr>
+          <p:cNvPr id="3" name="Definition"/>
           <p:cNvSpPr txBox="1"/>
           <p:nvPr/>
         </p:nvSpPr>
         <p:spPr>
           <a:xfrm>
-            <a:off x="6873497" y="1506022"/>
-            <a:ext cx="4392100" cy="369332"/>
+            <a:off x="838200" y="1480000"/>
+            <a:ext cx="10515600" cy="700000"/>
           </a:xfrm>
           <a:prstGeom prst="rect">
             <a:avLst/>
@@ -16363,112 +18589,85 @@
           <a:noFill/>
         </p:spPr>
         <p:txBody>
-          <a:bodyPr wrap="none" rtlCol="0">
-            <a:spAutoFit/>
+          <a:bodyPr wrap="square" lIns="0" tIns="0" rIns="0" bIns="0">
+            <a:normAutofit/>
           </a:bodyPr>
           <a:lstStyle/>
           <a:p>
-            <a:r>
-              <a:rPr lang="en-US" dirty="0"/>
-              <a:t>Ex. Are teens distracted by their cell phones?</a:t>
+            <a:pPr marL="0" indent="0">
+              <a:buNone/>
+            </a:pPr>
+            <a:r>
+              <a:rPr lang="en-US" sz="1800" dirty="0"/>
+              <a:t>Modal category – the category with the highest frequency. It is the feature we describe for a qualitative variable.</a:t>
             </a:r>
           </a:p>
         </p:txBody>
       </p:sp>
       <p:pic>
         <p:nvPicPr>
-          <p:cNvPr id="30" name="Table stage 1">
-            <a:extLst>
-              <a:ext uri="{FF2B5EF4-FFF2-40B4-BE49-F238E27FC236}">
-                <a16:creationId xmlns:a16="http://schemas.microsoft.com/office/drawing/2014/main" id="{A726F141-28A4-5B62-1A80-B214989D15D2}"/>
-              </a:ext>
-            </a:extLst>
-          </p:cNvPr>
+          <p:cNvPr id="4" name="Figure"/>
           <p:cNvPicPr>
             <a:picLocks noChangeAspect="1"/>
           </p:cNvPicPr>
           <p:nvPr/>
         </p:nvPicPr>
         <p:blipFill>
-          <a:blip r:embed="rId3"/>
+          <a:blip r:embed="rId2"/>
           <a:stretch>
             <a:fillRect/>
           </a:stretch>
         </p:blipFill>
         <p:spPr>
           <a:xfrm>
-            <a:off x="5661891" y="1887427"/>
-            <a:ext cx="6358151" cy="2636307"/>
+            <a:off x="1524000" y="1980000"/>
+            <a:ext cx="9144000" cy="3840000"/>
           </a:xfrm>
           <a:prstGeom prst="rect">
             <a:avLst/>
           </a:prstGeom>
         </p:spPr>
       </p:pic>
-      <p:pic>
-        <p:nvPicPr>
-          <p:cNvPr id="31" name="Table stage 2">
-            <a:extLst>
-              <a:ext uri="{FF2B5EF4-FFF2-40B4-BE49-F238E27FC236}">
-                <a16:creationId xmlns:a16="http://schemas.microsoft.com/office/drawing/2014/main" id="{A726F141-28A4-5B62-1A80-B214989D15D2}"/>
-              </a:ext>
-            </a:extLst>
-          </p:cNvPr>
-          <p:cNvPicPr>
-            <a:picLocks noChangeAspect="1"/>
-          </p:cNvPicPr>
+      <p:sp>
+        <p:nvSpPr>
+          <p:cNvPr id="5" name="Takeaway"/>
+          <p:cNvSpPr txBox="1"/>
           <p:nvPr/>
-        </p:nvPicPr>
-        <p:blipFill>
-          <a:blip r:embed="rId4"/>
-          <a:stretch>
-            <a:fillRect/>
-          </a:stretch>
-        </p:blipFill>
+        </p:nvSpPr>
         <p:spPr>
           <a:xfrm>
-            <a:off x="5661891" y="1887427"/>
-            <a:ext cx="6358151" cy="2636307"/>
+            <a:off x="838200" y="6000000"/>
+            <a:ext cx="10515600" cy="900000"/>
           </a:xfrm>
           <a:prstGeom prst="rect">
             <a:avLst/>
           </a:prstGeom>
+          <a:noFill/>
         </p:spPr>
-      </p:pic>
-      <p:pic>
-        <p:nvPicPr>
-          <p:cNvPr id="9" name="Picture 8">
-            <a:extLst>
-              <a:ext uri="{FF2B5EF4-FFF2-40B4-BE49-F238E27FC236}">
-                <a16:creationId xmlns:a16="http://schemas.microsoft.com/office/drawing/2014/main" id="{A726F141-28A4-5B62-1A80-B214989D15D2}"/>
-              </a:ext>
-            </a:extLst>
-          </p:cNvPr>
-          <p:cNvPicPr>
-            <a:picLocks noChangeAspect="1"/>
-          </p:cNvPicPr>
-          <p:nvPr/>
-        </p:nvPicPr>
-        <p:blipFill>
-          <a:blip r:embed="rId5"/>
-          <a:stretch>
-            <a:fillRect/>
-          </a:stretch>
-        </p:blipFill>
-        <p:spPr>
-          <a:xfrm>
-            <a:off x="5661891" y="1887427"/>
-            <a:ext cx="6358151" cy="2636307"/>
-          </a:xfrm>
-          <a:prstGeom prst="rect">
-            <a:avLst/>
-          </a:prstGeom>
-        </p:spPr>
-      </p:pic>
+        <p:txBody>
+          <a:bodyPr wrap="square" lIns="0" tIns="0" rIns="0" bIns="0">
+            <a:normAutofit/>
+          </a:bodyPr>
+          <a:lstStyle/>
+          <a:p>
+            <a:pPr marL="0" indent="0">
+              <a:buNone/>
+            </a:pPr>
+            <a:r>
+              <a:rPr lang="en-US" sz="1600" b="1" dirty="0">
+                <a:solidFill>
+                  <a:srgbClr val="C00000"/>
+                </a:solidFill>
+              </a:rPr>
+              <a:t>Never is the modal category. There are no numbers to average here, so the modal category is the whole summary – which is why shape, center and variability are reserved for quantitative variables.</a:t>
+            </a:r>
+          </a:p>
+        </p:txBody>
+      </p:sp>
     </p:spTree>
     <p:extLst>
       <p:ext uri="{BB962C8B-B14F-4D97-AF65-F5344CB8AC3E}">
-        <p14:creationId xmlns:p14="http://schemas.microsoft.com/office/powerpoint/2010/main" val="3307213172"/>
+        <p14:creationId xmlns:p14="http://schemas.microsoft.com/office/powerpoint/2010/main" val="1517484031"/>
       </p:ext>
     </p:extLst>
   </p:cSld>
@@ -16509,114 +18708,7 @@
                                           </p:stCondLst>
                                         </p:cTn>
                                         <p:tgtEl>
-                                          <p:spTgt spid="3">
-                                            <p:txEl>
-                                              <p:pRg st="4" end="5"/>
-                                            </p:txEl>
-                                          </p:spTgt>
-                                        </p:tgtEl>
-                                        <p:attrNameLst>
-                                          <p:attrName>style.visibility</p:attrName>
-                                        </p:attrNameLst>
-                                      </p:cBhvr>
-                                      <p:to>
-                                        <p:strVal val="visible"/>
-                                      </p:to>
-                                    </p:set>
-                                  </p:childTnLst>
-                                </p:cTn>
-                              </p:par>
-                              <p:par>
-                                <p:cTn id="7" presetID="1" presetClass="entr" presetSubtype="0" fill="hold" nodeType="withEffect">
-                                  <p:stCondLst>
-                                    <p:cond delay="0"/>
-                                  </p:stCondLst>
-                                  <p:childTnLst>
-                                    <p:set>
-                                      <p:cBhvr>
-                                        <p:cTn id="8" dur="1" fill="hold">
-                                          <p:stCondLst>
-                                            <p:cond delay="0"/>
-                                          </p:stCondLst>
-                                        </p:cTn>
-                                        <p:tgtEl>
-                                          <p:spTgt spid="31"/>
-                                        </p:tgtEl>
-                                        <p:attrNameLst>
-                                          <p:attrName>style.visibility</p:attrName>
-                                        </p:attrNameLst>
-                                      </p:cBhvr>
-                                      <p:to>
-                                        <p:strVal val="visible"/>
-                                      </p:to>
-                                    </p:set>
-                                  </p:childTnLst>
-                                </p:cTn>
-                              </p:par>
-                            </p:childTnLst>
-                          </p:cTn>
-                        </p:par>
-                      </p:childTnLst>
-                    </p:cTn>
-                  </p:par>
-                  <p:par>
-                    <p:cTn id="9" fill="hold">
-                      <p:stCondLst>
-                        <p:cond delay="indefinite"/>
-                      </p:stCondLst>
-                      <p:childTnLst>
-                        <p:par>
-                          <p:cTn id="10" fill="hold">
-                            <p:stCondLst>
-                              <p:cond delay="0"/>
-                            </p:stCondLst>
-                            <p:childTnLst>
-                              <p:par>
-                                <p:cTn id="11" presetID="1" presetClass="entr" presetSubtype="0" fill="hold" nodeType="clickEffect">
-                                  <p:stCondLst>
-                                    <p:cond delay="0"/>
-                                  </p:stCondLst>
-                                  <p:childTnLst>
-                                    <p:set>
-                                      <p:cBhvr>
-                                        <p:cTn id="12" dur="1" fill="hold">
-                                          <p:stCondLst>
-                                            <p:cond delay="0"/>
-                                          </p:stCondLst>
-                                        </p:cTn>
-                                        <p:tgtEl>
-                                          <p:spTgt spid="3">
-                                            <p:txEl>
-                                              <p:pRg st="6" end="6"/>
-                                            </p:txEl>
-                                          </p:spTgt>
-                                        </p:tgtEl>
-                                        <p:attrNameLst>
-                                          <p:attrName>style.visibility</p:attrName>
-                                        </p:attrNameLst>
-                                      </p:cBhvr>
-                                      <p:to>
-                                        <p:strVal val="visible"/>
-                                      </p:to>
-                                    </p:set>
-                                  </p:childTnLst>
-                                </p:cTn>
-                              </p:par>
-                              <p:par>
-                                <p:cTn id="13" presetID="1" presetClass="entr" presetSubtype="0" fill="hold" nodeType="withEffect">
-                                  <p:stCondLst>
-                                    <p:cond delay="0"/>
-                                  </p:stCondLst>
-                                  <p:childTnLst>
-                                    <p:set>
-                                      <p:cBhvr>
-                                        <p:cTn id="14" dur="1" fill="hold">
-                                          <p:stCondLst>
-                                            <p:cond delay="0"/>
-                                          </p:stCondLst>
-                                        </p:cTn>
-                                        <p:tgtEl>
-                                          <p:spTgt spid="9"/>
+                                          <p:spTgt spid="5"/>
                                         </p:tgtEl>
                                         <p:attrNameLst>
                                           <p:attrName>style.visibility</p:attrName>
@@ -16696,20 +18788,20 @@
           <a:p>
             <a:r>
               <a:rPr lang="en-US" dirty="0"/>
-              <a:t>Example: Mendel’s Pea Plants</a:t>
+              <a:t>What to Look For: Shape</a:t>
             </a:r>
           </a:p>
         </p:txBody>
       </p:sp>
       <p:sp>
         <p:nvSpPr>
-          <p:cNvPr id="3" name="Caption"/>
+          <p:cNvPr id="3" name="Definition"/>
           <p:cNvSpPr txBox="1"/>
           <p:nvPr/>
         </p:nvSpPr>
         <p:spPr>
           <a:xfrm>
-            <a:off x="838200" y="1560000"/>
+            <a:off x="838200" y="1480000"/>
             <a:ext cx="10515600" cy="700000"/>
           </a:xfrm>
           <a:prstGeom prst="rect">
@@ -16727,15 +18819,15 @@
               <a:buNone/>
             </a:pPr>
             <a:r>
-              <a:rPr lang="en-US" sz="1700" dirty="0"/>
-              <a:t>In one of Gregor Mendel’s classic studies he bred 8,023 pea plants and recorded the color of the peas – the seeds – that each plant produced.</a:t>
+              <a:rPr lang="en-US" sz="1800" dirty="0"/>
+              <a:t>Shape – do observations cluster into certain areas? Are the values spread out evenly, or piled up on one side?</a:t>
             </a:r>
           </a:p>
         </p:txBody>
       </p:sp>
       <p:pic>
         <p:nvPicPr>
-          <p:cNvPr id="4" name="Mendel table"/>
+          <p:cNvPr id="4" name="Figure"/>
           <p:cNvPicPr>
             <a:picLocks noChangeAspect="1"/>
           </p:cNvPicPr>
@@ -16749,8 +18841,8 @@
         </p:blipFill>
         <p:spPr>
           <a:xfrm>
-            <a:off x="838200" y="2750000"/>
-            <a:ext cx="5486400" cy="1859664"/>
+            <a:off x="1167500" y="1960000"/>
+            <a:ext cx="9857000" cy="4200000"/>
           </a:xfrm>
           <a:prstGeom prst="rect">
             <a:avLst/>
@@ -16759,102 +18851,13 @@
       </p:pic>
       <p:sp>
         <p:nvSpPr>
-          <p:cNvPr id="5" name="Genetics"/>
-          <p:cNvSpPr/>
-          <p:nvPr/>
-        </p:nvSpPr>
-        <p:spPr>
-          <a:xfrm>
-            <a:off x="6650000" y="2420000"/>
-            <a:ext cx="4703800" cy="2550000"/>
-          </a:xfrm>
-          <a:prstGeom prst="roundRect">
-            <a:avLst>
-              <a:gd name="adj" fmla="val 4000"/>
-            </a:avLst>
-          </a:prstGeom>
-          <a:solidFill>
-            <a:srgbClr val="F2F6FC"/>
-          </a:solidFill>
-          <a:ln w="19050">
-            <a:solidFill>
-              <a:schemeClr val="accent1"/>
-            </a:solidFill>
-          </a:ln>
-        </p:spPr>
-        <p:txBody>
-          <a:bodyPr lIns="205740" tIns="160020" rIns="205740" bIns="114300">
-            <a:normAutofit/>
-          </a:bodyPr>
-          <a:lstStyle/>
-          <a:p>
-            <a:pPr marL="0" indent="0">
-              <a:buNone/>
-            </a:pPr>
-            <a:r>
-              <a:rPr lang="en-US" sz="1600" b="1" dirty="0"/>
-              <a:t>Pea color is set by a single gene.</a:t>
-            </a:r>
-          </a:p>
-          <a:p>
-            <a:pPr marL="0" indent="0">
-              <a:spcBef>
-                <a:spcPts val="400"/>
-              </a:spcBef>
-              <a:buNone/>
-            </a:pPr>
-            <a:r>
-              <a:rPr lang="en-US" sz="1600" dirty="0"/>
-              <a:t>Yellow (Y) is </a:t>
-            </a:r>
-            <a:r>
-              <a:rPr lang="en-US" sz="1600" b="1" dirty="0">
-                <a:solidFill>
-                  <a:srgbClr val="4472C4"/>
-                </a:solidFill>
-              </a:rPr>
-              <a:t>dominant</a:t>
-            </a:r>
-            <a:r>
-              <a:rPr lang="en-US" sz="1600" dirty="0"/>
-              <a:t>; green (y) is </a:t>
-            </a:r>
-            <a:r>
-              <a:rPr lang="en-US" sz="1600" b="1" dirty="0">
-                <a:solidFill>
-                  <a:srgbClr val="4472C4"/>
-                </a:solidFill>
-              </a:rPr>
-              <a:t>recessive</a:t>
-            </a:r>
-            <a:r>
-              <a:rPr lang="en-US" sz="1600" dirty="0"/>
-              <a:t>. A plant is green only if it inherits y from both parents.</a:t>
-            </a:r>
-          </a:p>
-          <a:p>
-            <a:pPr marL="0" indent="0">
-              <a:spcBef>
-                <a:spcPts val="400"/>
-              </a:spcBef>
-              <a:buNone/>
-            </a:pPr>
-            <a:r>
-              <a:rPr lang="en-US" sz="1600" dirty="0"/>
-              <a:t>Cross two Yy plants and the offspring are YY, Yy, yY, yy in equal proportion – and only yy shows green. So the theory predicts 3 yellow to every 1 green.</a:t>
-            </a:r>
-          </a:p>
-        </p:txBody>
-      </p:sp>
-      <p:sp>
-        <p:nvSpPr>
-          <p:cNvPr id="6" name="Payoff"/>
+          <p:cNvPr id="5" name="Takeaway"/>
           <p:cNvSpPr txBox="1"/>
           <p:nvPr/>
         </p:nvSpPr>
         <p:spPr>
           <a:xfrm>
-            <a:off x="838200" y="5450000"/>
+            <a:off x="838200" y="6340000"/>
             <a:ext cx="10515600" cy="900000"/>
           </a:xfrm>
           <a:prstGeom prst="rect">
@@ -16872,12 +18875,12 @@
               <a:buNone/>
             </a:pPr>
             <a:r>
-              <a:rPr lang="en-US" sz="1700" b="1" dirty="0">
+              <a:rPr lang="en-US" sz="1600" b="1" dirty="0">
                 <a:solidFill>
                   <a:srgbClr val="C00000"/>
                 </a:solidFill>
               </a:rPr>
-              <a:t>Mendel counted 0.751 and 0.249 – almost exactly 3/4 and 1/4. A frequency table is doing real scientific work here.</a:t>
+              <a:t>For now just describe what you see: where do the values pile up, and how do they trail off on each side? The names for these shapes come later.</a:t>
             </a:r>
           </a:p>
         </p:txBody>
@@ -16885,7 +18888,7 @@
     </p:spTree>
     <p:extLst>
       <p:ext uri="{BB962C8B-B14F-4D97-AF65-F5344CB8AC3E}">
-        <p14:creationId xmlns:p14="http://schemas.microsoft.com/office/powerpoint/2010/main" val="1517484021"/>
+        <p14:creationId xmlns:p14="http://schemas.microsoft.com/office/powerpoint/2010/main" val="1517484032"/>
       </p:ext>
     </p:extLst>
   </p:cSld>
@@ -16927,51 +18930,6 @@
                                         </p:cTn>
                                         <p:tgtEl>
                                           <p:spTgt spid="5"/>
-                                        </p:tgtEl>
-                                        <p:attrNameLst>
-                                          <p:attrName>style.visibility</p:attrName>
-                                        </p:attrNameLst>
-                                      </p:cBhvr>
-                                      <p:to>
-                                        <p:strVal val="visible"/>
-                                      </p:to>
-                                    </p:set>
-                                  </p:childTnLst>
-                                </p:cTn>
-                              </p:par>
-                            </p:childTnLst>
-                          </p:cTn>
-                        </p:par>
-                      </p:childTnLst>
-                    </p:cTn>
-                  </p:par>
-                  <p:par>
-                    <p:cTn id="7" fill="hold">
-                      <p:stCondLst>
-                        <p:cond delay="indefinite"/>
-                      </p:stCondLst>
-                      <p:childTnLst>
-                        <p:par>
-                          <p:cTn id="8" fill="hold">
-                            <p:stCondLst>
-                              <p:cond delay="0"/>
-                            </p:stCondLst>
-                            <p:childTnLst>
-                              <p:par>
-                                <p:cTn id="9" presetID="1" presetClass="entr" presetSubtype="0" fill="hold" nodeType="clickEffect">
-                                  <p:stCondLst>
-                                    <p:cond delay="0"/>
-                                  </p:stCondLst>
-                                  <p:childTnLst>
-                                    <p:set>
-                                      <p:cBhvr>
-                                        <p:cTn id="10" dur="1" fill="hold">
-                                          <p:stCondLst>
-                                            <p:cond delay="0"/>
-                                          </p:stCondLst>
-                                        </p:cTn>
-                                        <p:tgtEl>
-                                          <p:spTgt spid="6"/>
                                         </p:tgtEl>
                                         <p:attrNameLst>
                                           <p:attrName>style.visibility</p:attrName>
@@ -17051,21 +19009,21 @@
           <a:p>
             <a:r>
               <a:rPr lang="en-US" dirty="0"/>
-              <a:t>Try it out: A Frequency Table by Hand</a:t>
+              <a:t>What to Look For: Center</a:t>
             </a:r>
           </a:p>
         </p:txBody>
       </p:sp>
       <p:sp>
         <p:nvSpPr>
-          <p:cNvPr id="3" name="Prompt"/>
+          <p:cNvPr id="3" name="Definition"/>
           <p:cNvSpPr txBox="1"/>
           <p:nvPr/>
         </p:nvSpPr>
         <p:spPr>
           <a:xfrm>
-            <a:off x="838200" y="1600200"/>
-            <a:ext cx="5250000" cy="4700000"/>
+            <a:off x="838200" y="1480000"/>
+            <a:ext cx="10515600" cy="700000"/>
           </a:xfrm>
           <a:prstGeom prst="rect">
             <a:avLst/>
@@ -17073,7 +19031,7 @@
           <a:noFill/>
         </p:spPr>
         <p:txBody>
-          <a:bodyPr wrap="square">
+          <a:bodyPr wrap="square" lIns="0" tIns="0" rIns="0" bIns="0">
             <a:normAutofit/>
           </a:bodyPr>
           <a:lstStyle/>
@@ -17082,498 +19040,36 @@
               <a:buNone/>
             </a:pPr>
             <a:r>
-              <a:rPr lang="en-US" sz="1600" dirty="0"/>
-              <a:t>We put Pew's question to 20 students in this room: are you losing focus in class by checking your phone?</a:t>
-            </a:r>
-          </a:p>
-          <a:p>
-            <a:pPr marL="0" indent="0">
-              <a:spcBef>
-                <a:spcPts val="300"/>
-              </a:spcBef>
-              <a:buNone/>
-            </a:pPr>
-            <a:r>
-              <a:rPr lang="en-US" sz="1500" dirty="0">
-                <a:latin typeface="Consolas" panose="020B0609020204030204"/>
-              </a:rPr>
-              <a:t>Sometimes  Never  Rarely  Never  Often</a:t>
-            </a:r>
-          </a:p>
-          <a:p>
-            <a:pPr marL="0" indent="0">
-              <a:buNone/>
-            </a:pPr>
-            <a:r>
-              <a:rPr lang="en-US" sz="1500" dirty="0">
-                <a:latin typeface="Consolas" panose="020B0609020204030204"/>
-              </a:rPr>
-              <a:t>Rarely  Never  Sometimes  Rarely  Never</a:t>
-            </a:r>
-          </a:p>
-          <a:p>
-            <a:pPr marL="0" indent="0">
-              <a:buNone/>
-            </a:pPr>
-            <a:r>
-              <a:rPr lang="en-US" sz="1500" dirty="0">
-                <a:latin typeface="Consolas" panose="020B0609020204030204"/>
-              </a:rPr>
-              <a:t>Sometimes  Rarely  Never  Often  Sometimes</a:t>
-            </a:r>
-          </a:p>
-          <a:p>
-            <a:pPr marL="0" indent="0">
-              <a:buNone/>
-            </a:pPr>
-            <a:r>
-              <a:rPr lang="en-US" sz="1500" dirty="0">
-                <a:latin typeface="Consolas" panose="020B0609020204030204"/>
-              </a:rPr>
-              <a:t>Rarely  Never  Rarely  Sometimes  Never</a:t>
-            </a:r>
-          </a:p>
-          <a:p>
-            <a:pPr marL="0" indent="0">
-              <a:spcBef>
-                <a:spcPts val="700"/>
-              </a:spcBef>
-              <a:buNone/>
-            </a:pPr>
-            <a:r>
-              <a:rPr lang="en-US" sz="1600" b="1" dirty="0"/>
-              <a:t>Build the frequency table: frequency, relative frequency and cumulative relative frequency. Which is the modal category?</a:t>
+              <a:rPr lang="en-US" sz="1800" dirty="0"/>
+              <a:t>Center – where is the middle of the distribution? Where does a typical value fall?</a:t>
             </a:r>
           </a:p>
         </p:txBody>
       </p:sp>
-      <p:graphicFrame>
-        <p:nvGraphicFramePr>
-          <p:cNvPr id="4" name="Answer table"/>
-          <p:cNvGraphicFramePr>
-            <a:graphicFrameLocks noGrp="1"/>
-          </p:cNvGraphicFramePr>
+      <p:pic>
+        <p:nvPicPr>
+          <p:cNvPr id="4" name="Figure"/>
+          <p:cNvPicPr>
+            <a:picLocks noChangeAspect="1"/>
+          </p:cNvPicPr>
           <p:nvPr/>
-        </p:nvGraphicFramePr>
-        <p:xfrm>
-          <a:off x="6400800" y="1750000"/>
-          <a:ext cx="5100000" cy="2220000"/>
-        </p:xfrm>
-        <a:graphic>
-          <a:graphicData uri="http://schemas.openxmlformats.org/drawingml/2006/table">
-            <a:tbl>
-              <a:tblPr firstRow="1" bandRow="1">
-                <a:tableStyleId>{5C22544A-7EE6-4342-B048-85BDC9FD1C3A}</a:tableStyleId>
-              </a:tblPr>
-              <a:tblGrid>
-                <a:gridCol w="1900000">
-                  <a:extLst>
-                    <a:ext uri="{9D8B030D-6E8A-4147-A177-3AD203B41FA5}">
-                      <a16:colId xmlns:a16="http://schemas.microsoft.com/office/drawing/2014/main" val="20000"/>
-                    </a:ext>
-                  </a:extLst>
-                </a:gridCol>
-                <a:gridCol w="900000">
-                  <a:extLst>
-                    <a:ext uri="{9D8B030D-6E8A-4147-A177-3AD203B41FA5}">
-                      <a16:colId xmlns:a16="http://schemas.microsoft.com/office/drawing/2014/main" val="20001"/>
-                    </a:ext>
-                  </a:extLst>
-                </a:gridCol>
-                <a:gridCol w="1150000">
-                  <a:extLst>
-                    <a:ext uri="{9D8B030D-6E8A-4147-A177-3AD203B41FA5}">
-                      <a16:colId xmlns:a16="http://schemas.microsoft.com/office/drawing/2014/main" val="20002"/>
-                    </a:ext>
-                  </a:extLst>
-                </a:gridCol>
-                <a:gridCol w="1150000">
-                  <a:extLst>
-                    <a:ext uri="{9D8B030D-6E8A-4147-A177-3AD203B41FA5}">
-                      <a16:colId xmlns:a16="http://schemas.microsoft.com/office/drawing/2014/main" val="20003"/>
-                    </a:ext>
-                  </a:extLst>
-                </a:gridCol>
-              </a:tblGrid>
-              <a:tr h="370000">
-                <a:tc>
-                  <a:txBody>
-                    <a:bodyPr/>
-                    <a:lstStyle/>
-                    <a:p>
-                      <a:pPr algn="l"/>
-                      <a:r>
-                        <a:rPr lang="en-US" sz="1400" dirty="0"/>
-                        <a:t>Response</a:t>
-                      </a:r>
-                    </a:p>
-                  </a:txBody>
-                  <a:tcPr marL="68580" marR="68580" marT="0" marB="0" anchor="ctr"/>
-                </a:tc>
-                <a:tc>
-                  <a:txBody>
-                    <a:bodyPr/>
-                    <a:lstStyle/>
-                    <a:p>
-                      <a:pPr algn="ctr"/>
-                      <a:r>
-                        <a:rPr lang="en-US" sz="1400" dirty="0"/>
-                        <a:t>f</a:t>
-                      </a:r>
-                    </a:p>
-                  </a:txBody>
-                  <a:tcPr marL="68580" marR="68580" marT="0" marB="0" anchor="ctr"/>
-                </a:tc>
-                <a:tc>
-                  <a:txBody>
-                    <a:bodyPr/>
-                    <a:lstStyle/>
-                    <a:p>
-                      <a:pPr algn="ctr"/>
-                      <a:r>
-                        <a:rPr lang="en-US" sz="1400" dirty="0"/>
-                        <a:t>Rel. freq.</a:t>
-                      </a:r>
-                    </a:p>
-                  </a:txBody>
-                  <a:tcPr marL="68580" marR="68580" marT="0" marB="0" anchor="ctr"/>
-                </a:tc>
-                <a:tc>
-                  <a:txBody>
-                    <a:bodyPr/>
-                    <a:lstStyle/>
-                    <a:p>
-                      <a:pPr algn="ctr"/>
-                      <a:r>
-                        <a:rPr lang="en-US" sz="1400" dirty="0"/>
-                        <a:t>Cum. rel. freq.</a:t>
-                      </a:r>
-                    </a:p>
-                  </a:txBody>
-                  <a:tcPr marL="68580" marR="68580" marT="0" marB="0" anchor="ctr"/>
-                </a:tc>
-                <a:extLst>
-                  <a:ext uri="{0D108BD9-81ED-4DB2-BD59-A6C34878D82A}">
-                    <a16:rowId xmlns:a16="http://schemas.microsoft.com/office/drawing/2014/main" val="10000"/>
-                  </a:ext>
-                </a:extLst>
-              </a:tr>
-              <a:tr h="370000">
-                <a:tc>
-                  <a:txBody>
-                    <a:bodyPr/>
-                    <a:lstStyle/>
-                    <a:p>
-                      <a:pPr algn="l"/>
-                      <a:r>
-                        <a:rPr lang="en-US" sz="1400" dirty="0"/>
-                        <a:t>Never</a:t>
-                      </a:r>
-                    </a:p>
-                  </a:txBody>
-                  <a:tcPr marL="68580" marR="68580" marT="0" marB="0" anchor="ctr"/>
-                </a:tc>
-                <a:tc>
-                  <a:txBody>
-                    <a:bodyPr/>
-                    <a:lstStyle/>
-                    <a:p>
-                      <a:pPr algn="ctr"/>
-                      <a:r>
-                        <a:rPr lang="en-US" sz="1400" dirty="0"/>
-                        <a:t>7</a:t>
-                      </a:r>
-                    </a:p>
-                  </a:txBody>
-                  <a:tcPr marL="68580" marR="68580" marT="0" marB="0" anchor="ctr"/>
-                </a:tc>
-                <a:tc>
-                  <a:txBody>
-                    <a:bodyPr/>
-                    <a:lstStyle/>
-                    <a:p>
-                      <a:pPr algn="ctr"/>
-                      <a:r>
-                        <a:rPr lang="en-US" sz="1400" dirty="0"/>
-                        <a:t>0.35</a:t>
-                      </a:r>
-                    </a:p>
-                  </a:txBody>
-                  <a:tcPr marL="68580" marR="68580" marT="0" marB="0" anchor="ctr"/>
-                </a:tc>
-                <a:tc>
-                  <a:txBody>
-                    <a:bodyPr/>
-                    <a:lstStyle/>
-                    <a:p>
-                      <a:pPr algn="ctr"/>
-                      <a:r>
-                        <a:rPr lang="en-US" sz="1400" dirty="0"/>
-                        <a:t>0.35</a:t>
-                      </a:r>
-                    </a:p>
-                  </a:txBody>
-                  <a:tcPr marL="68580" marR="68580" marT="0" marB="0" anchor="ctr"/>
-                </a:tc>
-                <a:extLst>
-                  <a:ext uri="{0D108BD9-81ED-4DB2-BD59-A6C34878D82A}">
-                    <a16:rowId xmlns:a16="http://schemas.microsoft.com/office/drawing/2014/main" val="10001"/>
-                  </a:ext>
-                </a:extLst>
-              </a:tr>
-              <a:tr h="370000">
-                <a:tc>
-                  <a:txBody>
-                    <a:bodyPr/>
-                    <a:lstStyle/>
-                    <a:p>
-                      <a:pPr algn="l"/>
-                      <a:r>
-                        <a:rPr lang="en-US" sz="1400" dirty="0"/>
-                        <a:t>Rarely</a:t>
-                      </a:r>
-                    </a:p>
-                  </a:txBody>
-                  <a:tcPr marL="68580" marR="68580" marT="0" marB="0" anchor="ctr"/>
-                </a:tc>
-                <a:tc>
-                  <a:txBody>
-                    <a:bodyPr/>
-                    <a:lstStyle/>
-                    <a:p>
-                      <a:pPr algn="ctr"/>
-                      <a:r>
-                        <a:rPr lang="en-US" sz="1400" dirty="0"/>
-                        <a:t>6</a:t>
-                      </a:r>
-                    </a:p>
-                  </a:txBody>
-                  <a:tcPr marL="68580" marR="68580" marT="0" marB="0" anchor="ctr"/>
-                </a:tc>
-                <a:tc>
-                  <a:txBody>
-                    <a:bodyPr/>
-                    <a:lstStyle/>
-                    <a:p>
-                      <a:pPr algn="ctr"/>
-                      <a:r>
-                        <a:rPr lang="en-US" sz="1400" dirty="0"/>
-                        <a:t>0.30</a:t>
-                      </a:r>
-                    </a:p>
-                  </a:txBody>
-                  <a:tcPr marL="68580" marR="68580" marT="0" marB="0" anchor="ctr"/>
-                </a:tc>
-                <a:tc>
-                  <a:txBody>
-                    <a:bodyPr/>
-                    <a:lstStyle/>
-                    <a:p>
-                      <a:pPr algn="ctr"/>
-                      <a:r>
-                        <a:rPr lang="en-US" sz="1400" dirty="0"/>
-                        <a:t>0.65</a:t>
-                      </a:r>
-                    </a:p>
-                  </a:txBody>
-                  <a:tcPr marL="68580" marR="68580" marT="0" marB="0" anchor="ctr"/>
-                </a:tc>
-                <a:extLst>
-                  <a:ext uri="{0D108BD9-81ED-4DB2-BD59-A6C34878D82A}">
-                    <a16:rowId xmlns:a16="http://schemas.microsoft.com/office/drawing/2014/main" val="10002"/>
-                  </a:ext>
-                </a:extLst>
-              </a:tr>
-              <a:tr h="370000">
-                <a:tc>
-                  <a:txBody>
-                    <a:bodyPr/>
-                    <a:lstStyle/>
-                    <a:p>
-                      <a:pPr algn="l"/>
-                      <a:r>
-                        <a:rPr lang="en-US" sz="1400" dirty="0"/>
-                        <a:t>Sometimes</a:t>
-                      </a:r>
-                    </a:p>
-                  </a:txBody>
-                  <a:tcPr marL="68580" marR="68580" marT="0" marB="0" anchor="ctr"/>
-                </a:tc>
-                <a:tc>
-                  <a:txBody>
-                    <a:bodyPr/>
-                    <a:lstStyle/>
-                    <a:p>
-                      <a:pPr algn="ctr"/>
-                      <a:r>
-                        <a:rPr lang="en-US" sz="1400" dirty="0"/>
-                        <a:t>5</a:t>
-                      </a:r>
-                    </a:p>
-                  </a:txBody>
-                  <a:tcPr marL="68580" marR="68580" marT="0" marB="0" anchor="ctr"/>
-                </a:tc>
-                <a:tc>
-                  <a:txBody>
-                    <a:bodyPr/>
-                    <a:lstStyle/>
-                    <a:p>
-                      <a:pPr algn="ctr"/>
-                      <a:r>
-                        <a:rPr lang="en-US" sz="1400" dirty="0"/>
-                        <a:t>0.25</a:t>
-                      </a:r>
-                    </a:p>
-                  </a:txBody>
-                  <a:tcPr marL="68580" marR="68580" marT="0" marB="0" anchor="ctr"/>
-                </a:tc>
-                <a:tc>
-                  <a:txBody>
-                    <a:bodyPr/>
-                    <a:lstStyle/>
-                    <a:p>
-                      <a:pPr algn="ctr"/>
-                      <a:r>
-                        <a:rPr lang="en-US" sz="1400" dirty="0"/>
-                        <a:t>0.90</a:t>
-                      </a:r>
-                    </a:p>
-                  </a:txBody>
-                  <a:tcPr marL="68580" marR="68580" marT="0" marB="0" anchor="ctr"/>
-                </a:tc>
-                <a:extLst>
-                  <a:ext uri="{0D108BD9-81ED-4DB2-BD59-A6C34878D82A}">
-                    <a16:rowId xmlns:a16="http://schemas.microsoft.com/office/drawing/2014/main" val="10003"/>
-                  </a:ext>
-                </a:extLst>
-              </a:tr>
-              <a:tr h="370000">
-                <a:tc>
-                  <a:txBody>
-                    <a:bodyPr/>
-                    <a:lstStyle/>
-                    <a:p>
-                      <a:pPr algn="l"/>
-                      <a:r>
-                        <a:rPr lang="en-US" sz="1400" dirty="0"/>
-                        <a:t>Often</a:t>
-                      </a:r>
-                    </a:p>
-                  </a:txBody>
-                  <a:tcPr marL="68580" marR="68580" marT="0" marB="0" anchor="ctr"/>
-                </a:tc>
-                <a:tc>
-                  <a:txBody>
-                    <a:bodyPr/>
-                    <a:lstStyle/>
-                    <a:p>
-                      <a:pPr algn="ctr"/>
-                      <a:r>
-                        <a:rPr lang="en-US" sz="1400" dirty="0"/>
-                        <a:t>2</a:t>
-                      </a:r>
-                    </a:p>
-                  </a:txBody>
-                  <a:tcPr marL="68580" marR="68580" marT="0" marB="0" anchor="ctr"/>
-                </a:tc>
-                <a:tc>
-                  <a:txBody>
-                    <a:bodyPr/>
-                    <a:lstStyle/>
-                    <a:p>
-                      <a:pPr algn="ctr"/>
-                      <a:r>
-                        <a:rPr lang="en-US" sz="1400" dirty="0"/>
-                        <a:t>0.10</a:t>
-                      </a:r>
-                    </a:p>
-                  </a:txBody>
-                  <a:tcPr marL="68580" marR="68580" marT="0" marB="0" anchor="ctr"/>
-                </a:tc>
-                <a:tc>
-                  <a:txBody>
-                    <a:bodyPr/>
-                    <a:lstStyle/>
-                    <a:p>
-                      <a:pPr algn="ctr"/>
-                      <a:r>
-                        <a:rPr lang="en-US" sz="1400" dirty="0"/>
-                        <a:t>1.00</a:t>
-                      </a:r>
-                    </a:p>
-                  </a:txBody>
-                  <a:tcPr marL="68580" marR="68580" marT="0" marB="0" anchor="ctr"/>
-                </a:tc>
-                <a:extLst>
-                  <a:ext uri="{0D108BD9-81ED-4DB2-BD59-A6C34878D82A}">
-                    <a16:rowId xmlns:a16="http://schemas.microsoft.com/office/drawing/2014/main" val="10004"/>
-                  </a:ext>
-                </a:extLst>
-              </a:tr>
-              <a:tr h="370000">
-                <a:tc>
-                  <a:txBody>
-                    <a:bodyPr/>
-                    <a:lstStyle/>
-                    <a:p>
-                      <a:pPr algn="l"/>
-                      <a:r>
-                        <a:rPr lang="en-US" sz="1400" dirty="0"/>
-                        <a:t>Total</a:t>
-                      </a:r>
-                    </a:p>
-                  </a:txBody>
-                  <a:tcPr marL="68580" marR="68580" marT="0" marB="0" anchor="ctr"/>
-                </a:tc>
-                <a:tc>
-                  <a:txBody>
-                    <a:bodyPr/>
-                    <a:lstStyle/>
-                    <a:p>
-                      <a:pPr algn="ctr"/>
-                      <a:r>
-                        <a:rPr lang="en-US" sz="1400" dirty="0"/>
-                        <a:t>20</a:t>
-                      </a:r>
-                    </a:p>
-                  </a:txBody>
-                  <a:tcPr marL="68580" marR="68580" marT="0" marB="0" anchor="ctr"/>
-                </a:tc>
-                <a:tc>
-                  <a:txBody>
-                    <a:bodyPr/>
-                    <a:lstStyle/>
-                    <a:p>
-                      <a:pPr algn="ctr"/>
-                      <a:r>
-                        <a:rPr lang="en-US" sz="1400" dirty="0"/>
-                        <a:t>1.00</a:t>
-                      </a:r>
-                    </a:p>
-                  </a:txBody>
-                  <a:tcPr marL="68580" marR="68580" marT="0" marB="0" anchor="ctr"/>
-                </a:tc>
-                <a:tc>
-                  <a:txBody>
-                    <a:bodyPr/>
-                    <a:lstStyle/>
-                    <a:p>
-                      <a:pPr algn="ctr"/>
-                      <a:endParaRPr/>
-                    </a:p>
-                  </a:txBody>
-                  <a:tcPr marL="68580" marR="68580" marT="0" marB="0" anchor="ctr"/>
-                </a:tc>
-                <a:extLst>
-                  <a:ext uri="{0D108BD9-81ED-4DB2-BD59-A6C34878D82A}">
-                    <a16:rowId xmlns:a16="http://schemas.microsoft.com/office/drawing/2014/main" val="10005"/>
-                  </a:ext>
-                </a:extLst>
-              </a:tr>
-            </a:tbl>
-          </a:graphicData>
-        </a:graphic>
-      </p:graphicFrame>
+        </p:nvPicPr>
+        <p:blipFill>
+          <a:blip r:embed="rId2"/>
+          <a:stretch>
+            <a:fillRect/>
+          </a:stretch>
+        </p:blipFill>
+        <p:spPr>
+          <a:xfrm>
+            <a:off x="838200" y="2050000"/>
+            <a:ext cx="10515600" cy="3566000"/>
+          </a:xfrm>
+          <a:prstGeom prst="rect">
+            <a:avLst/>
+          </a:prstGeom>
+        </p:spPr>
+      </p:pic>
       <p:sp>
         <p:nvSpPr>
           <p:cNvPr id="5" name="Takeaway"/>
@@ -17582,8 +19078,8 @@
         </p:nvSpPr>
         <p:spPr>
           <a:xfrm>
-            <a:off x="6400800" y="4230000"/>
-            <a:ext cx="5100000" cy="1400000"/>
+            <a:off x="838200" y="5796000"/>
+            <a:ext cx="10515600" cy="900000"/>
           </a:xfrm>
           <a:prstGeom prst="rect">
             <a:avLst/>
@@ -17591,7 +19087,7 @@
           <a:noFill/>
         </p:spPr>
         <p:txBody>
-          <a:bodyPr wrap="square">
+          <a:bodyPr wrap="square" lIns="0" tIns="0" rIns="0" bIns="0">
             <a:normAutofit/>
           </a:bodyPr>
           <a:lstStyle/>
@@ -17600,12 +19096,12 @@
               <a:buNone/>
             </a:pPr>
             <a:r>
-              <a:rPr lang="en-US" sz="1500" b="1" dirty="0">
+              <a:rPr lang="en-US" sz="1600" b="1" dirty="0">
                 <a:solidFill>
                   <a:srgbClr val="C00000"/>
                 </a:solidFill>
               </a:rPr>
-              <a:t>Modal category: Never. Pew's 743 teens gave 0.39, 0.29, 0.24, 0.08 – 20 students landed within a few points of them.</a:t>
+              <a:t>When the values pile up evenly the mean sits under the peak. When they trail off to one side the tail drags the mean away from where most of the data actually are – so the mean alone can mislead. Week 3 adds a second measure of center: the median.</a:t>
             </a:r>
           </a:p>
         </p:txBody>
@@ -17613,7 +19109,7 @@
     </p:spTree>
     <p:extLst>
       <p:ext uri="{BB962C8B-B14F-4D97-AF65-F5344CB8AC3E}">
-        <p14:creationId xmlns:p14="http://schemas.microsoft.com/office/powerpoint/2010/main" val="1517484003"/>
+        <p14:creationId xmlns:p14="http://schemas.microsoft.com/office/powerpoint/2010/main" val="1517484033"/>
       </p:ext>
     </p:extLst>
   </p:cSld>
@@ -17649,51 +19145,6 @@
                                     <p:set>
                                       <p:cBhvr>
                                         <p:cTn id="6" dur="1" fill="hold">
-                                          <p:stCondLst>
-                                            <p:cond delay="0"/>
-                                          </p:stCondLst>
-                                        </p:cTn>
-                                        <p:tgtEl>
-                                          <p:spTgt spid="4"/>
-                                        </p:tgtEl>
-                                        <p:attrNameLst>
-                                          <p:attrName>style.visibility</p:attrName>
-                                        </p:attrNameLst>
-                                      </p:cBhvr>
-                                      <p:to>
-                                        <p:strVal val="visible"/>
-                                      </p:to>
-                                    </p:set>
-                                  </p:childTnLst>
-                                </p:cTn>
-                              </p:par>
-                            </p:childTnLst>
-                          </p:cTn>
-                        </p:par>
-                      </p:childTnLst>
-                    </p:cTn>
-                  </p:par>
-                  <p:par>
-                    <p:cTn id="7" fill="hold">
-                      <p:stCondLst>
-                        <p:cond delay="indefinite"/>
-                      </p:stCondLst>
-                      <p:childTnLst>
-                        <p:par>
-                          <p:cTn id="8" fill="hold">
-                            <p:stCondLst>
-                              <p:cond delay="0"/>
-                            </p:stCondLst>
-                            <p:childTnLst>
-                              <p:par>
-                                <p:cTn id="9" presetID="1" presetClass="entr" presetSubtype="0" fill="hold" nodeType="clickEffect">
-                                  <p:stCondLst>
-                                    <p:cond delay="0"/>
-                                  </p:stCondLst>
-                                  <p:childTnLst>
-                                    <p:set>
-                                      <p:cBhvr>
-                                        <p:cTn id="10" dur="1" fill="hold">
                                           <p:stCondLst>
                                             <p:cond delay="0"/>
                                           </p:stCondLst>
@@ -17762,768 +19213,218 @@
       </p:grpSpPr>
       <p:sp>
         <p:nvSpPr>
-          <p:cNvPr id="6" name="Rectangle: Rounded Corners 5">
-            <a:extLst>
-              <a:ext uri="{FF2B5EF4-FFF2-40B4-BE49-F238E27FC236}">
-                <a16:creationId xmlns:a16="http://schemas.microsoft.com/office/drawing/2014/main" id="{2EC7F35D-317F-28D2-BBCE-99D9B2A1FD57}"/>
-              </a:ext>
-            </a:extLst>
-          </p:cNvPr>
-          <p:cNvSpPr/>
-          <p:nvPr/>
+          <p:cNvPr id="2" name="Title 1"/>
+          <p:cNvSpPr>
+            <a:spLocks noGrp="1"/>
+          </p:cNvSpPr>
+          <p:nvPr>
+            <p:ph type="title"/>
+          </p:nvPr>
         </p:nvSpPr>
-        <p:spPr>
-          <a:xfrm>
-            <a:off x="1021247" y="2501144"/>
-            <a:ext cx="3380510" cy="701963"/>
-          </a:xfrm>
-          <a:prstGeom prst="roundRect">
-            <a:avLst/>
-          </a:prstGeom>
-        </p:spPr>
-        <p:style>
-          <a:lnRef idx="2">
-            <a:schemeClr val="accent2">
-              <a:shade val="15000"/>
-            </a:schemeClr>
-          </a:lnRef>
-          <a:fillRef idx="1">
-            <a:schemeClr val="accent2"/>
-          </a:fillRef>
-          <a:effectRef idx="0">
-            <a:schemeClr val="accent2"/>
-          </a:effectRef>
-          <a:fontRef idx="minor">
-            <a:schemeClr val="lt1"/>
-          </a:fontRef>
-        </p:style>
+        <p:spPr/>
         <p:txBody>
-          <a:bodyPr rtlCol="0" anchor="ctr"/>
+          <a:bodyPr>
+            <a:normAutofit/>
+          </a:bodyPr>
           <a:lstStyle/>
           <a:p>
-            <a:pPr algn="ctr"/>
-            <a:r>
-              <a:rPr lang="en-US" sz="2800" dirty="0"/>
-              <a:t>Qualitative Variables</a:t>
+            <a:r>
+              <a:rPr lang="en-US" dirty="0"/>
+              <a:t>What to Look For: Variability</a:t>
             </a:r>
           </a:p>
         </p:txBody>
       </p:sp>
       <p:sp>
         <p:nvSpPr>
-          <p:cNvPr id="7" name="Rectangle: Rounded Corners 6">
-            <a:extLst>
-              <a:ext uri="{FF2B5EF4-FFF2-40B4-BE49-F238E27FC236}">
-                <a16:creationId xmlns:a16="http://schemas.microsoft.com/office/drawing/2014/main" id="{97881567-2056-16CB-4560-290AC5D327DC}"/>
-              </a:ext>
-            </a:extLst>
-          </p:cNvPr>
-          <p:cNvSpPr/>
-          <p:nvPr/>
-        </p:nvSpPr>
-        <p:spPr>
-          <a:xfrm>
-            <a:off x="7808716" y="2514998"/>
-            <a:ext cx="3468883" cy="701963"/>
-          </a:xfrm>
-          <a:prstGeom prst="roundRect">
-            <a:avLst/>
-          </a:prstGeom>
-        </p:spPr>
-        <p:style>
-          <a:lnRef idx="2">
-            <a:schemeClr val="accent2">
-              <a:shade val="15000"/>
-            </a:schemeClr>
-          </a:lnRef>
-          <a:fillRef idx="1">
-            <a:schemeClr val="accent2"/>
-          </a:fillRef>
-          <a:effectRef idx="0">
-            <a:schemeClr val="accent2"/>
-          </a:effectRef>
-          <a:fontRef idx="minor">
-            <a:schemeClr val="lt1"/>
-          </a:fontRef>
-        </p:style>
-        <p:txBody>
-          <a:bodyPr rtlCol="0" anchor="ctr"/>
-          <a:lstStyle/>
-          <a:p>
-            <a:pPr algn="ctr"/>
-            <a:r>
-              <a:rPr lang="en-US" sz="2800" dirty="0"/>
-              <a:t>Quantitative Variables</a:t>
-            </a:r>
-          </a:p>
-        </p:txBody>
-      </p:sp>
-      <p:sp>
-        <p:nvSpPr>
-          <p:cNvPr id="8" name="TextBox 7">
-            <a:extLst>
-              <a:ext uri="{FF2B5EF4-FFF2-40B4-BE49-F238E27FC236}">
-                <a16:creationId xmlns:a16="http://schemas.microsoft.com/office/drawing/2014/main" id="{1660F8CB-99D1-AF64-D302-A3630815D19A}"/>
-              </a:ext>
-            </a:extLst>
-          </p:cNvPr>
+          <p:cNvPr id="3" name="Definition"/>
           <p:cNvSpPr txBox="1"/>
           <p:nvPr/>
         </p:nvSpPr>
         <p:spPr>
           <a:xfrm>
-            <a:off x="1002773" y="3401690"/>
-            <a:ext cx="3380508" cy="1015663"/>
+            <a:off x="838200" y="1480000"/>
+            <a:ext cx="10515600" cy="700000"/>
           </a:xfrm>
           <a:prstGeom prst="rect">
             <a:avLst/>
           </a:prstGeom>
-          <a:solidFill>
-            <a:schemeClr val="bg1"/>
-          </a:solidFill>
+          <a:noFill/>
         </p:spPr>
-        <p:style>
-          <a:lnRef idx="2">
-            <a:schemeClr val="accent1"/>
-          </a:lnRef>
-          <a:fillRef idx="1">
-            <a:schemeClr val="lt1"/>
-          </a:fillRef>
-          <a:effectRef idx="0">
-            <a:schemeClr val="accent1"/>
-          </a:effectRef>
-          <a:fontRef idx="minor">
-            <a:schemeClr val="dk1"/>
-          </a:fontRef>
-        </p:style>
         <p:txBody>
-          <a:bodyPr wrap="square" rtlCol="0">
-            <a:spAutoFit/>
+          <a:bodyPr wrap="square" lIns="0" tIns="0" rIns="0" bIns="0">
+            <a:normAutofit/>
           </a:bodyPr>
           <a:lstStyle/>
           <a:p>
-            <a:pPr marL="285750" indent="-285750">
-              <a:buFont typeface="Arial" panose="020B0604020202020204" pitchFamily="34" charset="0"/>
-              <a:buChar char="•"/>
+            <a:pPr marL="0" indent="0">
+              <a:buNone/>
             </a:pPr>
             <a:r>
-              <a:rPr lang="en-US" sz="2000" dirty="0"/>
-              <a:t>Bar graph</a:t>
-            </a:r>
-          </a:p>
-          <a:p>
-            <a:pPr marL="285750" indent="-285750">
-              <a:buFont typeface="Arial" panose="020B0604020202020204" pitchFamily="34" charset="0"/>
-              <a:buChar char="•"/>
-            </a:pPr>
-            <a:r>
-              <a:rPr lang="en-US" sz="2000" dirty="0"/>
-              <a:t>Pie Chart</a:t>
-            </a:r>
-          </a:p>
-          <a:p>
-            <a:pPr marL="285750" indent="-285750">
-              <a:buFont typeface="Arial" panose="020B0604020202020204" pitchFamily="34" charset="0"/>
-              <a:buChar char="•"/>
-            </a:pPr>
-            <a:r>
-              <a:rPr lang="en-US" sz="2000" dirty="0"/>
-              <a:t>Pareto Chart</a:t>
+              <a:rPr lang="en-US" sz="1800" dirty="0"/>
+              <a:t>Variability – how tightly do observations cluster around the center of the distribution?</a:t>
             </a:r>
           </a:p>
         </p:txBody>
       </p:sp>
-      <p:sp>
-        <p:nvSpPr>
-          <p:cNvPr id="10" name="Rectangle 9">
-            <a:extLst>
-              <a:ext uri="{FF2B5EF4-FFF2-40B4-BE49-F238E27FC236}">
-                <a16:creationId xmlns:a16="http://schemas.microsoft.com/office/drawing/2014/main" id="{D5155137-1F8F-B30B-6371-056BD66E46D4}"/>
-              </a:ext>
-            </a:extLst>
-          </p:cNvPr>
-          <p:cNvSpPr/>
+      <p:pic>
+        <p:nvPicPr>
+          <p:cNvPr id="4" name="Figure"/>
+          <p:cNvPicPr>
+            <a:picLocks noChangeAspect="1"/>
+          </p:cNvPicPr>
           <p:nvPr/>
-        </p:nvSpPr>
+        </p:nvPicPr>
+        <p:blipFill>
+          <a:blip r:embed="rId2"/>
+          <a:stretch>
+            <a:fillRect/>
+          </a:stretch>
+        </p:blipFill>
         <p:spPr>
           <a:xfrm>
-            <a:off x="4290919" y="133926"/>
-            <a:ext cx="3406959" cy="701963"/>
+            <a:off x="838200" y="2050000"/>
+            <a:ext cx="10515600" cy="3566000"/>
           </a:xfrm>
           <a:prstGeom prst="rect">
             <a:avLst/>
           </a:prstGeom>
         </p:spPr>
-        <p:style>
-          <a:lnRef idx="2">
-            <a:schemeClr val="accent1">
-              <a:shade val="15000"/>
-            </a:schemeClr>
-          </a:lnRef>
-          <a:fillRef idx="1">
-            <a:schemeClr val="accent1"/>
-          </a:fillRef>
-          <a:effectRef idx="0">
-            <a:schemeClr val="accent1"/>
-          </a:effectRef>
-          <a:fontRef idx="minor">
-            <a:schemeClr val="lt1"/>
-          </a:fontRef>
-        </p:style>
-        <p:txBody>
-          <a:bodyPr rtlCol="0" anchor="ctr"/>
-          <a:lstStyle/>
-          <a:p>
-            <a:pPr algn="ctr"/>
-            <a:r>
-              <a:rPr lang="en-US" dirty="0"/>
-              <a:t>Graphical Descriptions Of Data</a:t>
-            </a:r>
-          </a:p>
-        </p:txBody>
-      </p:sp>
-      <p:cxnSp>
-        <p:nvCxnSpPr>
-          <p:cNvPr id="12" name="Connector: Elbow 11">
-            <a:extLst>
-              <a:ext uri="{FF2B5EF4-FFF2-40B4-BE49-F238E27FC236}">
-                <a16:creationId xmlns:a16="http://schemas.microsoft.com/office/drawing/2014/main" id="{0E4B24D7-47EA-F860-D406-1737EE3EAC68}"/>
-              </a:ext>
-            </a:extLst>
-          </p:cNvPr>
-          <p:cNvCxnSpPr>
-            <a:cxnSpLocks/>
-            <a:stCxn id="25" idx="1"/>
-            <a:endCxn id="6" idx="0"/>
-          </p:cNvCxnSpPr>
-          <p:nvPr/>
-        </p:nvCxnSpPr>
-        <p:spPr>
-          <a:xfrm rot="10800000" flipV="1">
-            <a:off x="2711503" y="1524062"/>
-            <a:ext cx="1671779" cy="977081"/>
-          </a:xfrm>
-          <a:prstGeom prst="bentConnector2">
-            <a:avLst/>
-          </a:prstGeom>
-          <a:ln w="76200">
-            <a:tailEnd type="triangle"/>
-          </a:ln>
-        </p:spPr>
-        <p:style>
-          <a:lnRef idx="1">
-            <a:schemeClr val="accent1"/>
-          </a:lnRef>
-          <a:fillRef idx="0">
-            <a:schemeClr val="accent1"/>
-          </a:fillRef>
-          <a:effectRef idx="0">
-            <a:schemeClr val="accent1"/>
-          </a:effectRef>
-          <a:fontRef idx="minor">
-            <a:schemeClr val="tx1"/>
-          </a:fontRef>
-        </p:style>
-      </p:cxnSp>
-      <p:cxnSp>
-        <p:nvCxnSpPr>
-          <p:cNvPr id="14" name="Connector: Elbow 13">
-            <a:extLst>
-              <a:ext uri="{FF2B5EF4-FFF2-40B4-BE49-F238E27FC236}">
-                <a16:creationId xmlns:a16="http://schemas.microsoft.com/office/drawing/2014/main" id="{C3A0F894-932E-A39B-EE28-C0F756836744}"/>
-              </a:ext>
-            </a:extLst>
-          </p:cNvPr>
-          <p:cNvCxnSpPr>
-            <a:cxnSpLocks/>
-            <a:stCxn id="25" idx="3"/>
-            <a:endCxn id="7" idx="0"/>
-          </p:cNvCxnSpPr>
-          <p:nvPr/>
-        </p:nvCxnSpPr>
-        <p:spPr>
-          <a:xfrm>
-            <a:off x="7790240" y="1524063"/>
-            <a:ext cx="1752918" cy="990935"/>
-          </a:xfrm>
-          <a:prstGeom prst="bentConnector2">
-            <a:avLst/>
-          </a:prstGeom>
-          <a:ln w="76200">
-            <a:tailEnd type="triangle"/>
-          </a:ln>
-        </p:spPr>
-        <p:style>
-          <a:lnRef idx="1">
-            <a:schemeClr val="accent1"/>
-          </a:lnRef>
-          <a:fillRef idx="0">
-            <a:schemeClr val="accent1"/>
-          </a:fillRef>
-          <a:effectRef idx="0">
-            <a:schemeClr val="accent1"/>
-          </a:effectRef>
-          <a:fontRef idx="minor">
-            <a:schemeClr val="tx1"/>
-          </a:fontRef>
-        </p:style>
-      </p:cxnSp>
+      </p:pic>
       <p:sp>
         <p:nvSpPr>
-          <p:cNvPr id="15" name="Rectangle 14">
-            <a:extLst>
-              <a:ext uri="{FF2B5EF4-FFF2-40B4-BE49-F238E27FC236}">
-                <a16:creationId xmlns:a16="http://schemas.microsoft.com/office/drawing/2014/main" id="{BB470C11-E3DA-41FB-321D-DF57E25C9C0E}"/>
-              </a:ext>
-            </a:extLst>
-          </p:cNvPr>
-          <p:cNvSpPr/>
-          <p:nvPr/>
-        </p:nvSpPr>
-        <p:spPr>
-          <a:xfrm>
-            <a:off x="4392520" y="4692471"/>
-            <a:ext cx="3406959" cy="701963"/>
-          </a:xfrm>
-          <a:prstGeom prst="rect">
-            <a:avLst/>
-          </a:prstGeom>
-        </p:spPr>
-        <p:style>
-          <a:lnRef idx="2">
-            <a:schemeClr val="accent1">
-              <a:shade val="15000"/>
-            </a:schemeClr>
-          </a:lnRef>
-          <a:fillRef idx="1">
-            <a:schemeClr val="accent1"/>
-          </a:fillRef>
-          <a:effectRef idx="0">
-            <a:schemeClr val="accent1"/>
-          </a:effectRef>
-          <a:fontRef idx="minor">
-            <a:schemeClr val="lt1"/>
-          </a:fontRef>
-        </p:style>
-        <p:txBody>
-          <a:bodyPr rtlCol="0" anchor="ctr"/>
-          <a:lstStyle/>
-          <a:p>
-            <a:pPr algn="ctr"/>
-            <a:r>
-              <a:rPr lang="en-US" sz="2400" dirty="0"/>
-              <a:t>Describe key features of the distribution</a:t>
-            </a:r>
-          </a:p>
-        </p:txBody>
-      </p:sp>
-      <p:sp>
-        <p:nvSpPr>
-          <p:cNvPr id="16" name="TextBox 15">
-            <a:extLst>
-              <a:ext uri="{FF2B5EF4-FFF2-40B4-BE49-F238E27FC236}">
-                <a16:creationId xmlns:a16="http://schemas.microsoft.com/office/drawing/2014/main" id="{DC7F01EC-1027-1A76-3043-99F0E76481CA}"/>
-              </a:ext>
-            </a:extLst>
-          </p:cNvPr>
+          <p:cNvPr id="5" name="Takeaway"/>
           <p:cNvSpPr txBox="1"/>
           <p:nvPr/>
         </p:nvSpPr>
         <p:spPr>
           <a:xfrm>
-            <a:off x="4404748" y="5567343"/>
-            <a:ext cx="3394731" cy="1200329"/>
+            <a:off x="838200" y="5796000"/>
+            <a:ext cx="10515600" cy="900000"/>
           </a:xfrm>
           <a:prstGeom prst="rect">
             <a:avLst/>
           </a:prstGeom>
-          <a:solidFill>
-            <a:schemeClr val="bg1"/>
-          </a:solidFill>
+          <a:noFill/>
         </p:spPr>
-        <p:style>
-          <a:lnRef idx="2">
-            <a:schemeClr val="accent1"/>
-          </a:lnRef>
-          <a:fillRef idx="1">
-            <a:schemeClr val="lt1"/>
-          </a:fillRef>
-          <a:effectRef idx="0">
-            <a:schemeClr val="accent1"/>
-          </a:effectRef>
-          <a:fontRef idx="minor">
-            <a:schemeClr val="dk1"/>
-          </a:fontRef>
-        </p:style>
         <p:txBody>
-          <a:bodyPr wrap="square" rtlCol="0">
-            <a:spAutoFit/>
+          <a:bodyPr wrap="square" lIns="0" tIns="0" rIns="0" bIns="0">
+            <a:normAutofit/>
           </a:bodyPr>
           <a:lstStyle/>
           <a:p>
-            <a:pPr marL="285750" indent="-285750">
-              <a:buFont typeface="Arial" panose="020B0604020202020204" pitchFamily="34" charset="0"/>
-              <a:buChar char="•"/>
+            <a:pPr marL="0" indent="0">
+              <a:buNone/>
             </a:pPr>
             <a:r>
-              <a:rPr lang="en-US" dirty="0"/>
-              <a:t>Modal Category</a:t>
-            </a:r>
-          </a:p>
-          <a:p>
-            <a:pPr marL="285750" indent="-285750">
-              <a:buFont typeface="Arial" panose="020B0604020202020204" pitchFamily="34" charset="0"/>
-              <a:buChar char="•"/>
-            </a:pPr>
-            <a:r>
-              <a:rPr lang="en-US" dirty="0"/>
-              <a:t>Shape</a:t>
-            </a:r>
-          </a:p>
-          <a:p>
-            <a:pPr marL="285750" indent="-285750">
-              <a:buFont typeface="Arial" panose="020B0604020202020204" pitchFamily="34" charset="0"/>
-              <a:buChar char="•"/>
-            </a:pPr>
-            <a:r>
-              <a:rPr lang="en-US" dirty="0"/>
-              <a:t>Center</a:t>
-            </a:r>
-          </a:p>
-          <a:p>
-            <a:pPr marL="285750" indent="-285750">
-              <a:buFont typeface="Arial" panose="020B0604020202020204" pitchFamily="34" charset="0"/>
-              <a:buChar char="•"/>
-            </a:pPr>
-            <a:r>
-              <a:rPr lang="en-US" dirty="0"/>
-              <a:t>Spread</a:t>
-            </a:r>
+              <a:rPr lang="en-US" sz="1600" b="1" dirty="0">
+                <a:solidFill>
+                  <a:srgbClr val="C00000"/>
+                </a:solidFill>
+              </a:rPr>
+              <a:t>Both distributions have the same center, and the axes are identical. Everything that differs between these two pictures is variability: how much the </a:t>
+            </a:r>
+            <a:r>
+              <a:rPr lang="en-US" sz="1600" b="1">
+                <a:solidFill>
+                  <a:srgbClr val="C00000"/>
+                </a:solidFill>
+              </a:rPr>
+              <a:t>data spread out.</a:t>
+            </a:r>
+            <a:endParaRPr lang="en-US" sz="1600" b="1" dirty="0">
+              <a:solidFill>
+                <a:srgbClr val="C00000"/>
+              </a:solidFill>
+            </a:endParaRPr>
           </a:p>
         </p:txBody>
       </p:sp>
-      <p:cxnSp>
-        <p:nvCxnSpPr>
-          <p:cNvPr id="18" name="Connector: Elbow 17">
-            <a:extLst>
-              <a:ext uri="{FF2B5EF4-FFF2-40B4-BE49-F238E27FC236}">
-                <a16:creationId xmlns:a16="http://schemas.microsoft.com/office/drawing/2014/main" id="{433238C4-A2B4-5CCD-B93B-C3EEBA196CA4}"/>
-              </a:ext>
-            </a:extLst>
-          </p:cNvPr>
-          <p:cNvCxnSpPr>
-            <a:cxnSpLocks/>
-            <a:stCxn id="8" idx="2"/>
-            <a:endCxn id="15" idx="1"/>
-          </p:cNvCxnSpPr>
-          <p:nvPr/>
-        </p:nvCxnSpPr>
-        <p:spPr>
-          <a:xfrm rot="16200000" flipH="1">
-            <a:off x="3229723" y="3880656"/>
-            <a:ext cx="626100" cy="1699493"/>
-          </a:xfrm>
-          <a:prstGeom prst="bentConnector2">
-            <a:avLst/>
-          </a:prstGeom>
-          <a:ln w="76200">
-            <a:tailEnd type="triangle"/>
-          </a:ln>
-        </p:spPr>
-        <p:style>
-          <a:lnRef idx="1">
-            <a:schemeClr val="accent1"/>
-          </a:lnRef>
-          <a:fillRef idx="0">
-            <a:schemeClr val="accent1"/>
-          </a:fillRef>
-          <a:effectRef idx="0">
-            <a:schemeClr val="accent1"/>
-          </a:effectRef>
-          <a:fontRef idx="minor">
-            <a:schemeClr val="tx1"/>
-          </a:fontRef>
-        </p:style>
-      </p:cxnSp>
-      <p:cxnSp>
-        <p:nvCxnSpPr>
-          <p:cNvPr id="19" name="Connector: Elbow 18">
-            <a:extLst>
-              <a:ext uri="{FF2B5EF4-FFF2-40B4-BE49-F238E27FC236}">
-                <a16:creationId xmlns:a16="http://schemas.microsoft.com/office/drawing/2014/main" id="{BA6A9435-F7E6-7CDC-62E5-FCB2A9FCE741}"/>
-              </a:ext>
-            </a:extLst>
-          </p:cNvPr>
-          <p:cNvCxnSpPr>
-            <a:cxnSpLocks/>
-            <a:stCxn id="9" idx="2"/>
-            <a:endCxn id="15" idx="3"/>
-          </p:cNvCxnSpPr>
-          <p:nvPr/>
-        </p:nvCxnSpPr>
-        <p:spPr>
-          <a:xfrm rot="5400000">
-            <a:off x="8358269" y="3858563"/>
-            <a:ext cx="626101" cy="1743679"/>
-          </a:xfrm>
-          <a:prstGeom prst="bentConnector2">
-            <a:avLst/>
-          </a:prstGeom>
-          <a:ln w="76200">
-            <a:tailEnd type="triangle"/>
-          </a:ln>
-        </p:spPr>
-        <p:style>
-          <a:lnRef idx="1">
-            <a:schemeClr val="accent1"/>
-          </a:lnRef>
-          <a:fillRef idx="0">
-            <a:schemeClr val="accent1"/>
-          </a:fillRef>
-          <a:effectRef idx="0">
-            <a:schemeClr val="accent1"/>
-          </a:effectRef>
-          <a:fontRef idx="minor">
-            <a:schemeClr val="tx1"/>
-          </a:fontRef>
-        </p:style>
-      </p:cxnSp>
-      <p:sp>
-        <p:nvSpPr>
-          <p:cNvPr id="9" name="TextBox 8">
-            <a:extLst>
-              <a:ext uri="{FF2B5EF4-FFF2-40B4-BE49-F238E27FC236}">
-                <a16:creationId xmlns:a16="http://schemas.microsoft.com/office/drawing/2014/main" id="{91966676-BC35-3C86-F6B0-3253A01BE201}"/>
-              </a:ext>
-            </a:extLst>
-          </p:cNvPr>
-          <p:cNvSpPr txBox="1"/>
-          <p:nvPr/>
-        </p:nvSpPr>
-        <p:spPr>
-          <a:xfrm>
-            <a:off x="7808717" y="3401689"/>
-            <a:ext cx="3468882" cy="1015663"/>
-          </a:xfrm>
-          <a:prstGeom prst="rect">
-            <a:avLst/>
-          </a:prstGeom>
-          <a:solidFill>
-            <a:schemeClr val="bg1"/>
-          </a:solidFill>
-        </p:spPr>
-        <p:style>
-          <a:lnRef idx="2">
-            <a:schemeClr val="accent1"/>
-          </a:lnRef>
-          <a:fillRef idx="1">
-            <a:schemeClr val="lt1"/>
-          </a:fillRef>
-          <a:effectRef idx="0">
-            <a:schemeClr val="accent1"/>
-          </a:effectRef>
-          <a:fontRef idx="minor">
-            <a:schemeClr val="dk1"/>
-          </a:fontRef>
-        </p:style>
-        <p:txBody>
-          <a:bodyPr wrap="square" rtlCol="0">
-            <a:spAutoFit/>
-          </a:bodyPr>
-          <a:lstStyle/>
-          <a:p>
-            <a:pPr marL="285750" indent="-285750">
-              <a:buFont typeface="Arial" panose="020B0604020202020204" pitchFamily="34" charset="0"/>
-              <a:buChar char="•"/>
-            </a:pPr>
-            <a:r>
-              <a:rPr lang="en-US" sz="2000" dirty="0"/>
-              <a:t>Dot Plot</a:t>
-            </a:r>
-          </a:p>
-          <a:p>
-            <a:pPr marL="285750" indent="-285750">
-              <a:buFont typeface="Arial" panose="020B0604020202020204" pitchFamily="34" charset="0"/>
-              <a:buChar char="•"/>
-            </a:pPr>
-            <a:r>
-              <a:rPr lang="en-US" sz="2000" dirty="0"/>
-              <a:t>Stem Chart</a:t>
-            </a:r>
-          </a:p>
-          <a:p>
-            <a:pPr marL="285750" indent="-285750">
-              <a:buFont typeface="Arial" panose="020B0604020202020204" pitchFamily="34" charset="0"/>
-              <a:buChar char="•"/>
-            </a:pPr>
-            <a:r>
-              <a:rPr lang="en-US" sz="2000" dirty="0">
-                <a:solidFill>
-                  <a:schemeClr val="tx1"/>
-                </a:solidFill>
-              </a:rPr>
-              <a:t>Histogram</a:t>
-            </a:r>
-            <a:r>
-              <a:rPr lang="en-US" sz="2000" dirty="0"/>
-              <a:t> </a:t>
-            </a:r>
-          </a:p>
-        </p:txBody>
-      </p:sp>
-      <p:sp>
-        <p:nvSpPr>
-          <p:cNvPr id="25" name="Rectangle: Rounded Corners 24">
-            <a:extLst>
-              <a:ext uri="{FF2B5EF4-FFF2-40B4-BE49-F238E27FC236}">
-                <a16:creationId xmlns:a16="http://schemas.microsoft.com/office/drawing/2014/main" id="{C40DF31A-AF91-AF49-1BB8-8D6E76C29BA4}"/>
-              </a:ext>
-            </a:extLst>
-          </p:cNvPr>
-          <p:cNvSpPr/>
-          <p:nvPr/>
-        </p:nvSpPr>
-        <p:spPr>
-          <a:xfrm>
-            <a:off x="4383281" y="1173081"/>
-            <a:ext cx="3406959" cy="701963"/>
-          </a:xfrm>
-          <a:prstGeom prst="roundRect">
-            <a:avLst/>
-          </a:prstGeom>
-        </p:spPr>
-        <p:style>
-          <a:lnRef idx="2">
-            <a:schemeClr val="accent1">
-              <a:shade val="15000"/>
-            </a:schemeClr>
-          </a:lnRef>
-          <a:fillRef idx="1">
-            <a:schemeClr val="accent1"/>
-          </a:fillRef>
-          <a:effectRef idx="0">
-            <a:schemeClr val="accent1"/>
-          </a:effectRef>
-          <a:fontRef idx="minor">
-            <a:schemeClr val="lt1"/>
-          </a:fontRef>
-        </p:style>
-        <p:txBody>
-          <a:bodyPr rtlCol="0" anchor="ctr"/>
-          <a:lstStyle/>
-          <a:p>
-            <a:pPr algn="ctr"/>
-            <a:r>
-              <a:rPr lang="en-US" dirty="0"/>
-              <a:t>Frequency Tables</a:t>
-            </a:r>
-          </a:p>
-        </p:txBody>
-      </p:sp>
-      <p:sp>
-        <p:nvSpPr>
-          <p:cNvPr id="28" name="Arrow: Down 27">
-            <a:extLst>
-              <a:ext uri="{FF2B5EF4-FFF2-40B4-BE49-F238E27FC236}">
-                <a16:creationId xmlns:a16="http://schemas.microsoft.com/office/drawing/2014/main" id="{81F32552-BCAB-7E67-B88C-5F1E3B211CC8}"/>
-              </a:ext>
-            </a:extLst>
-          </p:cNvPr>
-          <p:cNvSpPr/>
-          <p:nvPr/>
-        </p:nvSpPr>
-        <p:spPr>
-          <a:xfrm>
-            <a:off x="5886554" y="866958"/>
-            <a:ext cx="418890" cy="337127"/>
-          </a:xfrm>
-          <a:prstGeom prst="downArrow">
-            <a:avLst/>
-          </a:prstGeom>
-          <a:solidFill>
-            <a:schemeClr val="accent1">
-              <a:lumMod val="40000"/>
-              <a:lumOff val="60000"/>
-            </a:schemeClr>
-          </a:solidFill>
-        </p:spPr>
-        <p:style>
-          <a:lnRef idx="2">
-            <a:schemeClr val="accent1">
-              <a:shade val="15000"/>
-            </a:schemeClr>
-          </a:lnRef>
-          <a:fillRef idx="1">
-            <a:schemeClr val="accent1"/>
-          </a:fillRef>
-          <a:effectRef idx="0">
-            <a:schemeClr val="accent1"/>
-          </a:effectRef>
-          <a:fontRef idx="minor">
-            <a:schemeClr val="lt1"/>
-          </a:fontRef>
-        </p:style>
-        <p:txBody>
-          <a:bodyPr rtlCol="0" anchor="ctr"/>
-          <a:lstStyle/>
-          <a:p>
-            <a:pPr algn="ctr"/>
-            <a:endParaRPr lang="en-US"/>
-          </a:p>
-        </p:txBody>
-      </p:sp>
-      <p:cxnSp>
-        <p:nvCxnSpPr>
-          <p:cNvPr id="30" name="Straight Arrow Connector 29">
-            <a:extLst>
-              <a:ext uri="{FF2B5EF4-FFF2-40B4-BE49-F238E27FC236}">
-                <a16:creationId xmlns:a16="http://schemas.microsoft.com/office/drawing/2014/main" id="{291E9938-8966-4DC4-C588-135EC5244D53}"/>
-              </a:ext>
-            </a:extLst>
-          </p:cNvPr>
-          <p:cNvCxnSpPr>
-            <a:stCxn id="25" idx="2"/>
-            <a:endCxn id="15" idx="0"/>
-          </p:cNvCxnSpPr>
-          <p:nvPr/>
-        </p:nvCxnSpPr>
-        <p:spPr>
-          <a:xfrm>
-            <a:off x="6086761" y="1875044"/>
-            <a:ext cx="9239" cy="2817427"/>
-          </a:xfrm>
-          <a:prstGeom prst="straightConnector1">
-            <a:avLst/>
-          </a:prstGeom>
-          <a:ln w="76200">
-            <a:tailEnd type="triangle"/>
-          </a:ln>
-        </p:spPr>
-        <p:style>
-          <a:lnRef idx="1">
-            <a:schemeClr val="accent1"/>
-          </a:lnRef>
-          <a:fillRef idx="0">
-            <a:schemeClr val="accent1"/>
-          </a:fillRef>
-          <a:effectRef idx="0">
-            <a:schemeClr val="accent1"/>
-          </a:effectRef>
-          <a:fontRef idx="minor">
-            <a:schemeClr val="tx1"/>
-          </a:fontRef>
-        </p:style>
-      </p:cxnSp>
     </p:spTree>
     <p:extLst>
       <p:ext uri="{BB962C8B-B14F-4D97-AF65-F5344CB8AC3E}">
-        <p14:creationId xmlns:p14="http://schemas.microsoft.com/office/powerpoint/2010/main" val="779196973"/>
+        <p14:creationId xmlns:p14="http://schemas.microsoft.com/office/powerpoint/2010/main" val="1517484034"/>
       </p:ext>
     </p:extLst>
   </p:cSld>
   <p:clrMapOvr>
     <a:masterClrMapping/>
   </p:clrMapOvr>
+  <p:timing>
+    <p:tnLst>
+      <p:par>
+        <p:cTn id="1" dur="indefinite" restart="never" nodeType="tmRoot">
+          <p:childTnLst>
+            <p:seq concurrent="1" nextAc="seek">
+              <p:cTn id="2" dur="indefinite" nodeType="mainSeq">
+                <p:childTnLst>
+                  <p:par>
+                    <p:cTn id="3" fill="hold">
+                      <p:stCondLst>
+                        <p:cond delay="indefinite"/>
+                      </p:stCondLst>
+                      <p:childTnLst>
+                        <p:par>
+                          <p:cTn id="4" fill="hold">
+                            <p:stCondLst>
+                              <p:cond delay="0"/>
+                            </p:stCondLst>
+                            <p:childTnLst>
+                              <p:par>
+                                <p:cTn id="5" presetID="1" presetClass="entr" presetSubtype="0" fill="hold" nodeType="clickEffect">
+                                  <p:stCondLst>
+                                    <p:cond delay="0"/>
+                                  </p:stCondLst>
+                                  <p:childTnLst>
+                                    <p:set>
+                                      <p:cBhvr>
+                                        <p:cTn id="6" dur="1" fill="hold">
+                                          <p:stCondLst>
+                                            <p:cond delay="0"/>
+                                          </p:stCondLst>
+                                        </p:cTn>
+                                        <p:tgtEl>
+                                          <p:spTgt spid="5"/>
+                                        </p:tgtEl>
+                                        <p:attrNameLst>
+                                          <p:attrName>style.visibility</p:attrName>
+                                        </p:attrNameLst>
+                                      </p:cBhvr>
+                                      <p:to>
+                                        <p:strVal val="visible"/>
+                                      </p:to>
+                                    </p:set>
+                                  </p:childTnLst>
+                                </p:cTn>
+                              </p:par>
+                            </p:childTnLst>
+                          </p:cTn>
+                        </p:par>
+                      </p:childTnLst>
+                    </p:cTn>
+                  </p:par>
+                </p:childTnLst>
+              </p:cTn>
+              <p:prevCondLst>
+                <p:cond evt="onPrev" delay="0">
+                  <p:tgtEl>
+                    <p:sldTgt/>
+                  </p:tgtEl>
+                </p:cond>
+              </p:prevCondLst>
+              <p:nextCondLst>
+                <p:cond evt="onNext" delay="0">
+                  <p:tgtEl>
+                    <p:sldTgt/>
+                  </p:tgtEl>
+                </p:cond>
+              </p:nextCondLst>
+            </p:seq>
+          </p:childTnLst>
+        </p:cTn>
+      </p:par>
+    </p:tnLst>
+  </p:timing>
 </p:sld>
 </file>
 

--- a/docs/lecture_slides/Week 2/Week2_Lecture3_Slides_1_19_2024.pptx
+++ b/docs/lecture_slides/Week 2/Week2_Lecture3_Slides_1_19_2024.pptx
@@ -17,12 +17,12 @@
     <p:sldId id="342" r:id="rId11"/>
     <p:sldId id="346" r:id="rId12"/>
     <p:sldId id="343" r:id="rId13"/>
-    <p:sldId id="330" r:id="rId14"/>
     <p:sldId id="344" r:id="rId15"/>
     <p:sldId id="286" r:id="rId16"/>
     <p:sldId id="345" r:id="rId17"/>
     <p:sldId id="273" r:id="rId18"/>
     <p:sldId id="288" r:id="rId19"/>
+    <p:sldId id="330" r:id="rId14"/>
     <p:sldId id="277" r:id="rId20"/>
     <p:sldId id="287" r:id="rId21"/>
     <p:sldId id="282" r:id="rId22"/>
@@ -6797,7 +6797,7 @@
       </p:sp>
       <p:pic>
         <p:nvPicPr>
-          <p:cNvPr id="30" name="Table stage 1">
+          <p:cNvPr id="30" name="Table stage 1" descr="Frequency table of the teen survey showing the Response and Frequency columns only: Never 289, Rarely 216, Sometimes 178, Often 60, total 743.">
             <a:extLst>
               <a:ext uri="{FF2B5EF4-FFF2-40B4-BE49-F238E27FC236}">
                 <a16:creationId xmlns:a16="http://schemas.microsoft.com/office/drawing/2014/main" id="{A726F141-28A4-5B62-1A80-B214989D15D2}"/>
@@ -6827,7 +6827,7 @@
       </p:pic>
       <p:pic>
         <p:nvPicPr>
-          <p:cNvPr id="31" name="Table stage 2">
+          <p:cNvPr id="31" name="Table stage 2" descr="The same frequency table with a Relative Frequency column added: 0.39, 0.29, 0.24, 0.08, totalling 1.00.">
             <a:extLst>
               <a:ext uri="{FF2B5EF4-FFF2-40B4-BE49-F238E27FC236}">
                 <a16:creationId xmlns:a16="http://schemas.microsoft.com/office/drawing/2014/main" id="{A726F141-28A4-5B62-1A80-B214989D15D2}"/>
@@ -6857,7 +6857,7 @@
       </p:pic>
       <p:pic>
         <p:nvPicPr>
-          <p:cNvPr id="9" name="Picture 8">
+          <p:cNvPr id="9" name="Picture 8" descr="The completed frequency table with a Cumulative Relative Frequency column added: 0.39, 0.68, 0.92, 1.00.">
             <a:extLst>
               <a:ext uri="{FF2B5EF4-FFF2-40B4-BE49-F238E27FC236}">
                 <a16:creationId xmlns:a16="http://schemas.microsoft.com/office/drawing/2014/main" id="{A726F141-28A4-5B62-1A80-B214989D15D2}"/>
@@ -7155,7 +7155,7 @@
       </p:sp>
       <p:pic>
         <p:nvPicPr>
-          <p:cNvPr id="4" name="Mendel table"/>
+          <p:cNvPr id="4" name="Mendel table" descr="Frequency table of Mendel's pea colours: yellow 6022 with relative frequency 0.751, green 2001 with relative frequency 0.249, out of 8,023 plants - close to three yellow for every one green."/>
           <p:cNvPicPr>
             <a:picLocks noChangeAspect="1"/>
           </p:cNvPicPr>
@@ -7569,7 +7569,7 @@
       </p:sp>
       <p:graphicFrame>
         <p:nvGraphicFramePr>
-          <p:cNvPr id="4" name="Answer table"/>
+          <p:cNvPr id="4" name="Answer table" descr="Frequency table for the twenty class responses: Never 7 (0.35, 0.35), Rarely 6 (0.30, 0.65), Sometimes 5 (0.25, 0.90), Often 2 (0.10, 1.00), total 20."/>
           <p:cNvGraphicFramePr>
             <a:graphicFrameLocks noGrp="1"/>
           </p:cNvGraphicFramePr>
@@ -8182,6 +8182,35 @@
       </p:grpSpPr>
       <p:sp>
         <p:nvSpPr>
+          <p:cNvPr id="900" name="Title 1"/>
+          <p:cNvSpPr>
+            <a:spLocks noGrp="1"/>
+          </p:cNvSpPr>
+          <p:nvPr>
+            <p:ph type="title"/>
+          </p:nvPr>
+        </p:nvSpPr>
+        <p:spPr>
+          <a:xfrm>
+            <a:off x="-8000000" y="0"/>
+            <a:ext cx="6000000" cy="800000"/>
+          </a:xfrm>
+        </p:spPr>
+        <p:txBody>
+          <a:bodyPr>
+            <a:normAutofit/>
+          </a:bodyPr>
+          <a:lstStyle/>
+          <a:p>
+            <a:r>
+              <a:rPr lang="en-US" sz="1800" dirty="0"/>
+              <a:t>Graphical descriptions of data</a:t>
+            </a:r>
+          </a:p>
+        </p:txBody>
+      </p:sp>
+      <p:sp>
+        <p:nvSpPr>
           <p:cNvPr id="6" name="Rectangle: Rounded Corners 5">
             <a:extLst>
               <a:ext uri="{FF2B5EF4-FFF2-40B4-BE49-F238E27FC236}">
@@ -8617,7 +8646,7 @@
             </a:pPr>
             <a:r>
               <a:rPr lang="en-US" dirty="0"/>
-              <a:t>Spread</a:t>
+              <a:t>Variability</a:t>
             </a:r>
           </a:p>
         </p:txBody>
@@ -9059,7 +9088,7 @@
       </p:sp>
       <p:graphicFrame>
         <p:nvGraphicFramePr>
-          <p:cNvPr id="4" name="Answer table"/>
+          <p:cNvPr id="4" name="Answer table" descr="Frequency table of the ten sibling counts: 0 occurs twice, 1 four times, 2 twice, 3 once and 4 once, with relative frequencies 0.20, 0.40, 0.20, 0.10 and 0.10."/>
           <p:cNvGraphicFramePr>
             <a:graphicFrameLocks noGrp="1"/>
           </p:cNvGraphicFramePr>
@@ -9866,7 +9895,7 @@
       </p:sp>
       <p:graphicFrame>
         <p:nvGraphicFramePr>
-          <p:cNvPr id="4" name="Answer table"/>
+          <p:cNvPr id="4" name="Answer table" descr="Frequency table using whole-number bins: 1 to 2 contains 3 values, 2 to 3 contains 4, 3 to 4 contains 6 and 4 to 5 contains 2, out of 15."/>
           <p:cNvGraphicFramePr>
             <a:graphicFrameLocks noGrp="1"/>
           </p:cNvGraphicFramePr>
@@ -10205,7 +10234,7 @@
       </p:graphicFrame>
       <p:graphicFrame>
         <p:nvGraphicFramePr>
-          <p:cNvPr id="6" name="Second binning"/>
+          <p:cNvPr id="6" name="Second binning" descr="The same fifteen values in bins of width 0.5, giving counts of 2, 1, 0, 4, 3, 3 and 2 - the 2.0 to 2.5 bin is empty."/>
           <p:cNvGraphicFramePr>
             <a:graphicFrameLocks noGrp="1"/>
           </p:cNvGraphicFramePr>
@@ -10963,7 +10992,7 @@
       </p:pic>
       <p:pic>
         <p:nvPicPr>
-          <p:cNvPr id="14" name="Picture 13">
+          <p:cNvPr id="14" name="Picture 13" descr="Table of the Old Faithful data: for each of 272 eruptions the eruption time in minutes and the waiting time until the next eruption. The first rows read 3.600 and 79, 1.800 and 54, 3.333 and 74.">
             <a:extLst>
               <a:ext uri="{FF2B5EF4-FFF2-40B4-BE49-F238E27FC236}">
                 <a16:creationId xmlns:a16="http://schemas.microsoft.com/office/drawing/2014/main" id="{9B6079F2-E75F-5FC2-3656-4040AC7A68F1}"/>
@@ -11057,7 +11086,7 @@
       </p:sp>
       <p:pic>
         <p:nvPicPr>
-          <p:cNvPr id="4" name="Picture 3">
+          <p:cNvPr id="4" name="Picture 3" descr="Frequency table of Old Faithful waiting times in ten-minute bins: under 50 minutes 21, 50 to 60 56, 60 to 70 26, 70 to 80 77, 80 to 90 80, over 90 12, with relative and cumulative relative frequencies.">
             <a:extLst>
               <a:ext uri="{FF2B5EF4-FFF2-40B4-BE49-F238E27FC236}">
                 <a16:creationId xmlns:a16="http://schemas.microsoft.com/office/drawing/2014/main" id="{BC445D82-BC54-E443-F806-44E9E15C1C53}"/>
@@ -11357,7 +11386,7 @@
       </p:sp>
       <p:graphicFrame>
         <p:nvGraphicFramePr>
-          <p:cNvPr id="5" name="Content Placeholder 2">
+          <p:cNvPr id="5" name="Content Placeholder 2" descr="Flow diagram: graphical descriptions of data start from frequency tables, which branch to qualitative variables (bar graph, pie chart, Pareto chart) and quantitative variables (dot plot, stem chart, histogram); both branches lead to describing the key features of the distribution - modal category, shape, center and variability.">
             <a:extLst>
               <a:ext uri="{FF2B5EF4-FFF2-40B4-BE49-F238E27FC236}">
                 <a16:creationId xmlns:a16="http://schemas.microsoft.com/office/drawing/2014/main" id="{B7A7144C-3BB9-B0B9-1DF4-7E20D741B2C9}"/>
@@ -12380,9 +12409,38 @@
           <a:chExt cx="0" cy="0"/>
         </a:xfrm>
       </p:grpSpPr>
+      <p:sp>
+        <p:nvSpPr>
+          <p:cNvPr id="900" name="Title 1"/>
+          <p:cNvSpPr>
+            <a:spLocks noGrp="1"/>
+          </p:cNvSpPr>
+          <p:nvPr>
+            <p:ph type="title"/>
+          </p:nvPr>
+        </p:nvSpPr>
+        <p:spPr>
+          <a:xfrm>
+            <a:off x="-8000000" y="0"/>
+            <a:ext cx="6000000" cy="800000"/>
+          </a:xfrm>
+        </p:spPr>
+        <p:txBody>
+          <a:bodyPr>
+            <a:normAutofit/>
+          </a:bodyPr>
+          <a:lstStyle/>
+          <a:p>
+            <a:r>
+              <a:rPr lang="en-US" sz="1800" dirty="0"/>
+              <a:t>Bar graph and pie chart of the teen survey</a:t>
+            </a:r>
+          </a:p>
+        </p:txBody>
+      </p:sp>
       <p:pic>
         <p:nvPicPr>
-          <p:cNvPr id="5" name="Picture 4">
+          <p:cNvPr id="5" name="Picture 4" descr="Bar graph of the teen survey responses in decreasing order - Never, Rarely, Sometimes, Often - with relative frequency on the vertical axis.">
             <a:extLst>
               <a:ext uri="{FF2B5EF4-FFF2-40B4-BE49-F238E27FC236}">
                 <a16:creationId xmlns:a16="http://schemas.microsoft.com/office/drawing/2014/main" id="{7EC6A261-0EA6-9E96-37C0-CB6898B1BD89}"/>
@@ -12412,7 +12470,7 @@
       </p:pic>
       <p:pic>
         <p:nvPicPr>
-          <p:cNvPr id="7" name="Picture 6">
+          <p:cNvPr id="7" name="Picture 6" descr="Pie chart of the teen survey with every slice labelled in place: Never 0.39, Rarely 0.29, Sometimes 0.24, Often 0.08.">
             <a:extLst>
               <a:ext uri="{FF2B5EF4-FFF2-40B4-BE49-F238E27FC236}">
                 <a16:creationId xmlns:a16="http://schemas.microsoft.com/office/drawing/2014/main" id="{FAAAEAA6-C6FF-BCA1-1B38-7E475B4066C9}"/>
@@ -12638,9 +12696,38 @@
           <a:chExt cx="0" cy="0"/>
         </a:xfrm>
       </p:grpSpPr>
+      <p:sp>
+        <p:nvSpPr>
+          <p:cNvPr id="900" name="Title 1"/>
+          <p:cNvSpPr>
+            <a:spLocks noGrp="1"/>
+          </p:cNvSpPr>
+          <p:nvPr>
+            <p:ph type="title"/>
+          </p:nvPr>
+        </p:nvSpPr>
+        <p:spPr>
+          <a:xfrm>
+            <a:off x="-8000000" y="0"/>
+            <a:ext cx="6000000" cy="800000"/>
+          </a:xfrm>
+        </p:spPr>
+        <p:txBody>
+          <a:bodyPr>
+            <a:normAutofit/>
+          </a:bodyPr>
+          <a:lstStyle/>
+          <a:p>
+            <a:r>
+              <a:rPr lang="en-US" sz="1800" dirty="0"/>
+              <a:t>Dot plot of Old Faithful waiting times</a:t>
+            </a:r>
+          </a:p>
+        </p:txBody>
+      </p:sp>
       <p:pic>
         <p:nvPicPr>
-          <p:cNvPr id="4" name="Picture 3">
+          <p:cNvPr id="4" name="Picture 3" descr="Dot plot of Old Faithful waiting times, one dot per eruption. The dots form two clusters, one around 50 to 55 minutes and a larger one around 78 to 83 minutes, with a thin gap near 67 minutes.">
             <a:extLst>
               <a:ext uri="{FF2B5EF4-FFF2-40B4-BE49-F238E27FC236}">
                 <a16:creationId xmlns:a16="http://schemas.microsoft.com/office/drawing/2014/main" id="{93CDB88E-8525-C007-528D-F06C6B57452E}"/>
@@ -12735,7 +12822,7 @@
       </p:sp>
       <p:pic>
         <p:nvPicPr>
-          <p:cNvPr id="6" name="Picture 5">
+          <p:cNvPr id="6" name="Picture 5" descr="Table of the car data: observation number, miles per gallon, cylinders and model, from the Mazda RX4 at 21.0 mpg with 6 cylinders through to the Volvo 142E at 21.4 mpg with 4 cylinders, 32 cars in all.">
             <a:extLst>
               <a:ext uri="{FF2B5EF4-FFF2-40B4-BE49-F238E27FC236}">
                 <a16:creationId xmlns:a16="http://schemas.microsoft.com/office/drawing/2014/main" id="{60B6F122-13F2-0495-B148-F9F908F242F4}"/>
@@ -12765,7 +12852,7 @@
       </p:pic>
       <p:pic>
         <p:nvPicPr>
-          <p:cNvPr id="1026" name="Picture 2" descr="The engine | How a Car Works">
+          <p:cNvPr id="1026" name="Picture 2" descr="Cutaway illustration of a car engine, labelling the camshaft, pistons, valves, crankshaft and flywheel.">
             <a:extLst>
               <a:ext uri="{FF2B5EF4-FFF2-40B4-BE49-F238E27FC236}">
                 <a16:creationId xmlns:a16="http://schemas.microsoft.com/office/drawing/2014/main" id="{E678D63E-B7D3-7D74-1055-221F6D88A1C9}"/>
@@ -12840,9 +12927,38 @@
           <a:chExt cx="0" cy="0"/>
         </a:xfrm>
       </p:grpSpPr>
+      <p:sp>
+        <p:nvSpPr>
+          <p:cNvPr id="900" name="Title 1"/>
+          <p:cNvSpPr>
+            <a:spLocks noGrp="1"/>
+          </p:cNvSpPr>
+          <p:nvPr>
+            <p:ph type="title"/>
+          </p:nvPr>
+        </p:nvSpPr>
+        <p:spPr>
+          <a:xfrm>
+            <a:off x="-8000000" y="0"/>
+            <a:ext cx="6000000" cy="800000"/>
+          </a:xfrm>
+        </p:spPr>
+        <p:txBody>
+          <a:bodyPr>
+            <a:normAutofit/>
+          </a:bodyPr>
+          <a:lstStyle/>
+          <a:p>
+            <a:r>
+              <a:rPr lang="en-US" sz="1800" dirty="0"/>
+              <a:t>Dot plot of miles per gallon by cylinder count</a:t>
+            </a:r>
+          </a:p>
+        </p:txBody>
+      </p:sp>
       <p:pic>
         <p:nvPicPr>
-          <p:cNvPr id="4" name="Picture 3">
+          <p:cNvPr id="4" name="Picture 3" descr="Dot plot of miles per gallon for 32 car models. Cylinder count is shown by both shape and colour: 4-cylinder cars are blue circles and reach the highest mileage, up to about 34 mpg; 6-cylinder cars are orange triangles clustered near 18 to 21; 8-cylinder cars are green squares and sit lowest, from about 10 to 19 mpg.">
             <a:extLst>
               <a:ext uri="{FF2B5EF4-FFF2-40B4-BE49-F238E27FC236}">
                 <a16:creationId xmlns:a16="http://schemas.microsoft.com/office/drawing/2014/main" id="{15BCE4F3-B78E-72F0-EC01-6B2C24A47E6E}"/>
@@ -13264,7 +13380,7 @@
           </a:prstGeom>
           <a:ln w="38100">
             <a:solidFill>
-              <a:srgbClr val="FF0000"/>
+              <a:srgbClr val="C00000"/>
             </a:solidFill>
             <a:tailEnd type="triangle"/>
           </a:ln>
@@ -13343,7 +13459,7 @@
           </a:prstGeom>
           <a:ln w="38100">
             <a:solidFill>
-              <a:srgbClr val="FF0000"/>
+              <a:srgbClr val="C00000"/>
             </a:solidFill>
             <a:tailEnd type="triangle"/>
           </a:ln>
@@ -13430,7 +13546,7 @@
       </p:sp>
       <p:pic>
         <p:nvPicPr>
-          <p:cNvPr id="6" name="Picture 5">
+          <p:cNvPr id="6" name="Picture 5" descr="Table of the car data: observation number, miles per gallon, cylinders and model, from the Mazda RX4 at 21.0 mpg with 6 cylinders through to the Volvo 142E at 21.4 mpg with 4 cylinders, 32 cars in all.">
             <a:extLst>
               <a:ext uri="{FF2B5EF4-FFF2-40B4-BE49-F238E27FC236}">
                 <a16:creationId xmlns:a16="http://schemas.microsoft.com/office/drawing/2014/main" id="{60B6F122-13F2-0495-B148-F9F908F242F4}"/>
@@ -13460,7 +13576,7 @@
       </p:pic>
       <p:pic>
         <p:nvPicPr>
-          <p:cNvPr id="4" name="Picture 3">
+          <p:cNvPr id="4" name="Picture 3" descr="Dot plot of miles per gallon for 32 car models. Cylinder count is shown by both shape and colour: 4-cylinder cars are blue circles and reach the highest mileage, up to about 34 mpg; 6-cylinder cars are orange triangles clustered near 18 to 21; 8-cylinder cars are green squares and sit lowest, from about 10 to 19 mpg.">
             <a:extLst>
               <a:ext uri="{FF2B5EF4-FFF2-40B4-BE49-F238E27FC236}">
                 <a16:creationId xmlns:a16="http://schemas.microsoft.com/office/drawing/2014/main" id="{FB701B9A-D517-32D0-A350-4500F634B187}"/>
@@ -13490,7 +13606,7 @@
       </p:pic>
       <p:pic>
         <p:nvPicPr>
-          <p:cNvPr id="7" name="Picture 6">
+          <p:cNvPr id="7" name="Picture 6" descr="Stem and leaf plot of the mileage figures, with stems 10 through 33 for the whole-number part and leaves for the first decimal.">
             <a:extLst>
               <a:ext uri="{FF2B5EF4-FFF2-40B4-BE49-F238E27FC236}">
                 <a16:creationId xmlns:a16="http://schemas.microsoft.com/office/drawing/2014/main" id="{C4E7196C-9CAB-32E1-5755-5C8C7E55C899}"/>
@@ -13520,7 +13636,7 @@
       </p:pic>
       <p:pic>
         <p:nvPicPr>
-          <p:cNvPr id="8" name="Picture 7">
+          <p:cNvPr id="8" name="Picture 7" descr="The same stem and leaf plot with the stems combined in pairs, giving a more compact display with stems 10, 12, 14 and so on.">
             <a:extLst>
               <a:ext uri="{FF2B5EF4-FFF2-40B4-BE49-F238E27FC236}">
                 <a16:creationId xmlns:a16="http://schemas.microsoft.com/office/drawing/2014/main" id="{D6849ACD-33DD-B90C-2FCD-2F174EB768EE}"/>
@@ -14660,7 +14776,7 @@
           <a:noFill/>
           <a:ln w="38100">
             <a:solidFill>
-              <a:srgbClr val="FF0000"/>
+              <a:srgbClr val="C00000"/>
             </a:solidFill>
           </a:ln>
         </p:spPr>
@@ -15310,7 +15426,7 @@
       </p:sp>
       <p:pic>
         <p:nvPicPr>
-          <p:cNvPr id="6" name="Picture 5">
+          <p:cNvPr id="6" name="Picture 5" descr="Histogram of the twenty practice observations in five bins, each bar coloured to match the bin marked in the list of values above it. The bars rise to a peak of six in the middle bin and fall away on both sides.">
             <a:extLst>
               <a:ext uri="{FF2B5EF4-FFF2-40B4-BE49-F238E27FC236}">
                 <a16:creationId xmlns:a16="http://schemas.microsoft.com/office/drawing/2014/main" id="{AD8586AA-4204-7713-BBA1-0EA1B4445967}"/>
@@ -17014,7 +17130,7 @@
                 <a:r>
                   <a:rPr lang="en-US" dirty="0">
                     <a:solidFill>
-                      <a:srgbClr val="FF0000"/>
+                      <a:srgbClr val="C00000"/>
                     </a:solidFill>
                   </a:rPr>
                   <a:t>Square root method:       </a:t>
@@ -17024,7 +17140,7 @@
                     <m:r>
                       <a:rPr lang="en-US" b="0" i="1" smtClean="0">
                         <a:solidFill>
-                          <a:srgbClr val="FF0000"/>
+                          <a:srgbClr val="C00000"/>
                         </a:solidFill>
                         <a:latin typeface="Cambria Math" panose="02040503050406030204" pitchFamily="18" charset="0"/>
                       </a:rPr>
@@ -17033,7 +17149,7 @@
                     <m:r>
                       <a:rPr lang="en-US" b="0" i="0" smtClean="0">
                         <a:solidFill>
-                          <a:srgbClr val="FF0000"/>
+                          <a:srgbClr val="C00000"/>
                         </a:solidFill>
                         <a:latin typeface="Cambria Math" panose="02040503050406030204" pitchFamily="18" charset="0"/>
                       </a:rPr>
@@ -17045,7 +17161,7 @@
                       </m:rPr>
                       <a:rPr lang="en-US" b="0" i="0" smtClean="0">
                         <a:solidFill>
-                          <a:srgbClr val="FF0000"/>
+                          <a:srgbClr val="C00000"/>
                         </a:solidFill>
                         <a:latin typeface="Cambria Math" panose="02040503050406030204" pitchFamily="18" charset="0"/>
                       </a:rPr>
@@ -17054,7 +17170,7 @@
                     <m:r>
                       <a:rPr lang="en-US" b="0" i="0" smtClean="0">
                         <a:solidFill>
-                          <a:srgbClr val="FF0000"/>
+                          <a:srgbClr val="C00000"/>
                         </a:solidFill>
                         <a:latin typeface="Cambria Math" panose="02040503050406030204" pitchFamily="18" charset="0"/>
                       </a:rPr>
@@ -17066,7 +17182,7 @@
                         <m:ctrlPr>
                           <a:rPr lang="en-US" b="0" i="1" smtClean="0">
                             <a:solidFill>
-                              <a:srgbClr val="FF0000"/>
+                              <a:srgbClr val="C00000"/>
                             </a:solidFill>
                             <a:latin typeface="Cambria Math" panose="02040503050406030204" pitchFamily="18" charset="0"/>
                           </a:rPr>
@@ -17077,7 +17193,7 @@
                         <m:r>
                           <a:rPr lang="en-US" b="0" i="1" smtClean="0">
                             <a:solidFill>
-                              <a:srgbClr val="FF0000"/>
+                              <a:srgbClr val="C00000"/>
                             </a:solidFill>
                             <a:latin typeface="Cambria Math" panose="02040503050406030204" pitchFamily="18" charset="0"/>
                           </a:rPr>
@@ -17088,7 +17204,7 @@
                     <m:r>
                       <a:rPr lang="en-US" b="0" i="1" smtClean="0">
                         <a:solidFill>
-                          <a:srgbClr val="FF0000"/>
+                          <a:srgbClr val="C00000"/>
                         </a:solidFill>
                         <a:latin typeface="Cambria Math" panose="02040503050406030204" pitchFamily="18" charset="0"/>
                       </a:rPr>
@@ -17099,7 +17215,7 @@
                 <a:r>
                   <a:rPr lang="en-US" dirty="0">
                     <a:solidFill>
-                      <a:srgbClr val="FF0000"/>
+                      <a:srgbClr val="C00000"/>
                     </a:solidFill>
                   </a:rPr>
                   <a:t>       </a:t>
@@ -17110,7 +17226,7 @@
                 </a:r>
                 <a:endParaRPr lang="en-US" dirty="0">
                   <a:solidFill>
-                    <a:srgbClr val="FF0000"/>
+                    <a:srgbClr val="C00000"/>
                   </a:solidFill>
                 </a:endParaRPr>
               </a:p>
@@ -17384,7 +17500,7 @@
                   <a:buNone/>
                 </a:pPr>
                 <a:r>
-                  <a:rPr lang="en-US" sz="1050" b="0" i="0" dirty="0">
+                  <a:rPr lang="en-US" sz="1200" b="0" i="0" dirty="0">
                     <a:solidFill>
                       <a:srgbClr val="222222"/>
                     </a:solidFill>
@@ -17394,7 +17510,7 @@
                   <a:t>[1] Sturges, Herbert A. "The choice of a class interval." Journal of the </a:t>
                 </a:r>
                 <a:r>
-                  <a:rPr lang="en-US" sz="1050" b="0" i="0" dirty="0" err="1">
+                  <a:rPr lang="en-US" sz="1200" b="0" i="0" dirty="0" err="1">
                     <a:solidFill>
                       <a:srgbClr val="222222"/>
                     </a:solidFill>
@@ -17404,7 +17520,7 @@
                   <a:t>american</a:t>
                 </a:r>
                 <a:r>
-                  <a:rPr lang="en-US" sz="1050" b="0" i="0" dirty="0">
+                  <a:rPr lang="en-US" sz="1200" b="0" i="0" dirty="0">
                     <a:solidFill>
                       <a:srgbClr val="222222"/>
                     </a:solidFill>
@@ -17419,7 +17535,7 @@
                   <a:buNone/>
                 </a:pPr>
                 <a:r>
-                  <a:rPr lang="en-US" sz="1050" dirty="0">
+                  <a:rPr lang="en-US" sz="1200" dirty="0">
                     <a:solidFill>
                       <a:srgbClr val="222222"/>
                     </a:solidFill>
@@ -17428,7 +17544,7 @@
                   <a:t>[2] </a:t>
                 </a:r>
                 <a:r>
-                  <a:rPr lang="en-US" sz="1050" b="0" i="0" dirty="0">
+                  <a:rPr lang="en-US" sz="1200" b="0" i="0" dirty="0">
                     <a:solidFill>
                       <a:srgbClr val="222222"/>
                     </a:solidFill>
@@ -17438,7 +17554,7 @@
                   <a:t>Lane, David. </a:t>
                 </a:r>
                 <a:r>
-                  <a:rPr lang="en-US" sz="1050" b="0" i="1" dirty="0">
+                  <a:rPr lang="en-US" sz="1200" b="0" i="1" dirty="0">
                     <a:solidFill>
                       <a:srgbClr val="222222"/>
                     </a:solidFill>
@@ -17448,7 +17564,7 @@
                   <a:t>Online statistics education: A multimedia course of study</a:t>
                 </a:r>
                 <a:r>
-                  <a:rPr lang="en-US" sz="1050" b="0" i="0" dirty="0">
+                  <a:rPr lang="en-US" sz="1200" b="0" i="0" dirty="0">
                     <a:solidFill>
                       <a:srgbClr val="222222"/>
                     </a:solidFill>
@@ -17679,7 +17795,7 @@
       </p:sp>
       <p:pic>
         <p:nvPicPr>
-          <p:cNvPr id="5" name="Picture 4">
+          <p:cNvPr id="5" name="Picture 4" descr="Histogram of Old Faithful waiting times using only three very wide bins, too crude to show the two clusters.">
             <a:extLst>
               <a:ext uri="{FF2B5EF4-FFF2-40B4-BE49-F238E27FC236}">
                 <a16:creationId xmlns:a16="http://schemas.microsoft.com/office/drawing/2014/main" id="{1EB687C5-40BA-D0EA-5A63-59C5B8F474B5}"/>
@@ -17709,7 +17825,7 @@
       </p:pic>
       <p:pic>
         <p:nvPicPr>
-          <p:cNvPr id="9" name="Picture 8">
+          <p:cNvPr id="9" name="Picture 8" descr="The same waiting times in about a dozen bins, which shows the two clusters clearly.">
             <a:extLst>
               <a:ext uri="{FF2B5EF4-FFF2-40B4-BE49-F238E27FC236}">
                 <a16:creationId xmlns:a16="http://schemas.microsoft.com/office/drawing/2014/main" id="{958A48EC-CDD0-04BA-47F9-5B4CC4AE0872}"/>
@@ -17739,7 +17855,7 @@
       </p:pic>
       <p:pic>
         <p:nvPicPr>
-          <p:cNvPr id="11" name="Picture 10">
+          <p:cNvPr id="11" name="Picture 10" descr="The same waiting times in very many narrow bins, which breaks the shape into short bars and gaps.">
             <a:extLst>
               <a:ext uri="{FF2B5EF4-FFF2-40B4-BE49-F238E27FC236}">
                 <a16:creationId xmlns:a16="http://schemas.microsoft.com/office/drawing/2014/main" id="{78740C87-4A50-38E8-A519-55957D15C22E}"/>
@@ -17799,7 +17915,7 @@
       </p:grpSpPr>
       <p:pic>
         <p:nvPicPr>
-          <p:cNvPr id="4" name="Picture 3">
+          <p:cNvPr id="4" name="Picture 3" descr="Frequency table of Old Faithful waiting times in ten-minute bins with frequency, relative frequency and cumulative relative frequency.">
             <a:extLst>
               <a:ext uri="{FF2B5EF4-FFF2-40B4-BE49-F238E27FC236}">
                 <a16:creationId xmlns:a16="http://schemas.microsoft.com/office/drawing/2014/main" id="{43F76311-3A9D-2395-F921-58D84AC2F9B4}"/>
@@ -17829,7 +17945,7 @@
       </p:pic>
       <p:pic>
         <p:nvPicPr>
-          <p:cNvPr id="10" name="Picture 9">
+          <p:cNvPr id="10" name="Picture 9" descr="Histogram of Old Faithful waiting times in ten-minute bins, frequency on the vertical axis, showing two peaks either side of a dip near 65 minutes.">
             <a:extLst>
               <a:ext uri="{FF2B5EF4-FFF2-40B4-BE49-F238E27FC236}">
                 <a16:creationId xmlns:a16="http://schemas.microsoft.com/office/drawing/2014/main" id="{9AC59B7A-4888-2F53-4913-9DA0E60378A7}"/>
@@ -17859,7 +17975,7 @@
       </p:pic>
       <p:pic>
         <p:nvPicPr>
-          <p:cNvPr id="8" name="Picture 7">
+          <p:cNvPr id="8" name="Picture 7" descr="The same histogram with relative frequency on the vertical axis; the shape is identical, only the scale changes.">
             <a:extLst>
               <a:ext uri="{FF2B5EF4-FFF2-40B4-BE49-F238E27FC236}">
                 <a16:creationId xmlns:a16="http://schemas.microsoft.com/office/drawing/2014/main" id="{978CA529-7CC3-CAE2-9847-392C83BDC9D6}"/>
@@ -17960,9 +18076,38 @@
           <a:chExt cx="0" cy="0"/>
         </a:xfrm>
       </p:grpSpPr>
+      <p:sp>
+        <p:nvSpPr>
+          <p:cNvPr id="900" name="Title 1"/>
+          <p:cNvSpPr>
+            <a:spLocks noGrp="1"/>
+          </p:cNvSpPr>
+          <p:nvPr>
+            <p:ph type="title"/>
+          </p:nvPr>
+        </p:nvSpPr>
+        <p:spPr>
+          <a:xfrm>
+            <a:off x="-8000000" y="0"/>
+            <a:ext cx="6000000" cy="800000"/>
+          </a:xfrm>
+        </p:spPr>
+        <p:txBody>
+          <a:bodyPr>
+            <a:normAutofit/>
+          </a:bodyPr>
+          <a:lstStyle/>
+          <a:p>
+            <a:r>
+              <a:rPr lang="en-US" sz="1800" dirty="0"/>
+              <a:t>Where we stopped on Friday: the teen cell-phone survey</a:t>
+            </a:r>
+          </a:p>
+        </p:txBody>
+      </p:sp>
       <p:pic>
         <p:nvPicPr>
-          <p:cNvPr id="9" name="Picture 8">
+          <p:cNvPr id="9" name="Picture 8" descr="Bar chart of 743 U.S. teenagers answering whether checking their phone makes them lose focus in class. Never 0.39, Rarely 0.29, Sometimes 0.24, Often 0.08 - most teens say they rarely or never lose focus.">
             <a:extLst>
               <a:ext uri="{FF2B5EF4-FFF2-40B4-BE49-F238E27FC236}">
                 <a16:creationId xmlns:a16="http://schemas.microsoft.com/office/drawing/2014/main" id="{61327843-2234-FD4B-8B1B-E62A4EDD2B5A}"/>
@@ -18606,7 +18751,7 @@
       </p:sp>
       <p:pic>
         <p:nvPicPr>
-          <p:cNvPr id="4" name="Figure"/>
+          <p:cNvPr id="4" name="Figure" descr="Bar chart of the same teen survey with the tallest bar, Never at 289, picked out in red as the modal category. Rarely 216, Sometimes 178, Often 60."/>
           <p:cNvPicPr>
             <a:picLocks noChangeAspect="1"/>
           </p:cNvPicPr>
@@ -18827,7 +18972,7 @@
       </p:sp>
       <p:pic>
         <p:nvPicPr>
-          <p:cNvPr id="4" name="Figure"/>
+          <p:cNvPr id="4" name="Figure" descr="Four histograms showing different shapes: values piling up in the middle and thinning evenly on both sides; piling up on the left with a long trail to the right; piling up on the right with a long trail to the left; and piling up in two separate places with a gap between them."/>
           <p:cNvPicPr>
             <a:picLocks noChangeAspect="1"/>
           </p:cNvPicPr>
@@ -18849,42 +18994,6 @@
           </a:prstGeom>
         </p:spPr>
       </p:pic>
-      <p:sp>
-        <p:nvSpPr>
-          <p:cNvPr id="5" name="Takeaway"/>
-          <p:cNvSpPr txBox="1"/>
-          <p:nvPr/>
-        </p:nvSpPr>
-        <p:spPr>
-          <a:xfrm>
-            <a:off x="838200" y="6340000"/>
-            <a:ext cx="10515600" cy="900000"/>
-          </a:xfrm>
-          <a:prstGeom prst="rect">
-            <a:avLst/>
-          </a:prstGeom>
-          <a:noFill/>
-        </p:spPr>
-        <p:txBody>
-          <a:bodyPr wrap="square" lIns="0" tIns="0" rIns="0" bIns="0">
-            <a:normAutofit/>
-          </a:bodyPr>
-          <a:lstStyle/>
-          <a:p>
-            <a:pPr marL="0" indent="0">
-              <a:buNone/>
-            </a:pPr>
-            <a:r>
-              <a:rPr lang="en-US" sz="1600" b="1" dirty="0">
-                <a:solidFill>
-                  <a:srgbClr val="C00000"/>
-                </a:solidFill>
-              </a:rPr>
-              <a:t>For now just describe what you see: where do the values pile up, and how do they trail off on each side? The names for these shapes come later.</a:t>
-            </a:r>
-          </a:p>
-        </p:txBody>
-      </p:sp>
     </p:spTree>
     <p:extLst>
       <p:ext uri="{BB962C8B-B14F-4D97-AF65-F5344CB8AC3E}">
@@ -18895,81 +19004,6 @@
   <p:clrMapOvr>
     <a:masterClrMapping/>
   </p:clrMapOvr>
-  <p:timing>
-    <p:tnLst>
-      <p:par>
-        <p:cTn id="1" dur="indefinite" restart="never" nodeType="tmRoot">
-          <p:childTnLst>
-            <p:seq concurrent="1" nextAc="seek">
-              <p:cTn id="2" dur="indefinite" nodeType="mainSeq">
-                <p:childTnLst>
-                  <p:par>
-                    <p:cTn id="3" fill="hold">
-                      <p:stCondLst>
-                        <p:cond delay="indefinite"/>
-                      </p:stCondLst>
-                      <p:childTnLst>
-                        <p:par>
-                          <p:cTn id="4" fill="hold">
-                            <p:stCondLst>
-                              <p:cond delay="0"/>
-                            </p:stCondLst>
-                            <p:childTnLst>
-                              <p:par>
-                                <p:cTn id="5" presetID="1" presetClass="entr" presetSubtype="0" fill="hold" nodeType="clickEffect">
-                                  <p:stCondLst>
-                                    <p:cond delay="0"/>
-                                  </p:stCondLst>
-                                  <p:childTnLst>
-                                    <p:set>
-                                      <p:cBhvr>
-                                        <p:cTn id="6" dur="1" fill="hold">
-                                          <p:stCondLst>
-                                            <p:cond delay="0"/>
-                                          </p:stCondLst>
-                                        </p:cTn>
-                                        <p:tgtEl>
-                                          <p:spTgt spid="5"/>
-                                        </p:tgtEl>
-                                        <p:attrNameLst>
-                                          <p:attrName>style.visibility</p:attrName>
-                                        </p:attrNameLst>
-                                      </p:cBhvr>
-                                      <p:to>
-                                        <p:strVal val="visible"/>
-                                      </p:to>
-                                    </p:set>
-                                  </p:childTnLst>
-                                </p:cTn>
-                              </p:par>
-                            </p:childTnLst>
-                          </p:cTn>
-                        </p:par>
-                      </p:childTnLst>
-                    </p:cTn>
-                  </p:par>
-                </p:childTnLst>
-              </p:cTn>
-              <p:prevCondLst>
-                <p:cond evt="onPrev" delay="0">
-                  <p:tgtEl>
-                    <p:sldTgt/>
-                  </p:tgtEl>
-                </p:cond>
-              </p:prevCondLst>
-              <p:nextCondLst>
-                <p:cond evt="onNext" delay="0">
-                  <p:tgtEl>
-                    <p:sldTgt/>
-                  </p:tgtEl>
-                </p:cond>
-              </p:nextCondLst>
-            </p:seq>
-          </p:childTnLst>
-        </p:cTn>
-      </p:par>
-    </p:tnLst>
-  </p:timing>
 </p:sld>
 </file>
 
@@ -19048,7 +19082,7 @@
       </p:sp>
       <p:pic>
         <p:nvPicPr>
-          <p:cNvPr id="4" name="Figure"/>
+          <p:cNvPr id="4" name="Figure" descr="Two histograms with the mean drawn as a solid red line and the tallest bar marked by a dashed grey line. On the evenly piled distribution the mean sits under the peak; where the values trail off to the right the mean is pulled away from the peak, toward the tail."/>
           <p:cNvPicPr>
             <a:picLocks noChangeAspect="1"/>
           </p:cNvPicPr>
@@ -19101,7 +19135,7 @@
                   <a:srgbClr val="C00000"/>
                 </a:solidFill>
               </a:rPr>
-              <a:t>When the values pile up evenly the mean sits under the peak. When they trail off to one side the tail drags the mean away from where most of the data actually are – so the mean alone can mislead. Week 3 adds a second measure of center: the median.</a:t>
+              <a:t>When the values pile up evenly the mean sits under the peak. When they trail off to one side the tail drags the mean away from where most of the data actually are. the mean alone can mislead. </a:t>
             </a:r>
           </a:p>
         </p:txBody>
@@ -19269,7 +19303,7 @@
       </p:sp>
       <p:pic>
         <p:nvPicPr>
-          <p:cNvPr id="4" name="Figure"/>
+          <p:cNvPr id="4" name="Figure" descr="Two histograms on identical axes with the same center near 50. The first is narrow, with values packed close to the center; the second is far wider, spreading from about 10 to 90."/>
           <p:cNvPicPr>
             <a:picLocks noChangeAspect="1"/>
           </p:cNvPicPr>
@@ -19322,21 +19356,24 @@
                   <a:srgbClr val="C00000"/>
                 </a:solidFill>
               </a:rPr>
-              <a:t>Both distributions have the same center, and the axes are identical. Everything that differs between these two pictures is variability: how much the </a:t>
-            </a:r>
-            <a:r>
-              <a:rPr lang="en-US" sz="1600" b="1">
+              <a:t>Both distributions have the same center, and the axes are identical. Everything that differs between these two pictures is variability: </a:t>
+            </a:r>
+            <a:r>
+              <a:rPr lang="en-US" sz="1600" b="1" dirty="0" err="1">
                 <a:solidFill>
                   <a:srgbClr val="C00000"/>
                 </a:solidFill>
               </a:rPr>
-              <a:t>data spread out.</a:t>
-            </a:r>
-            <a:endParaRPr lang="en-US" sz="1600" b="1" dirty="0">
-              <a:solidFill>
-                <a:srgbClr val="C00000"/>
-              </a:solidFill>
-            </a:endParaRPr>
+              <a:t>e.g</a:t>
+            </a:r>
+            <a:r>
+              <a:rPr lang="en-US" sz="1600" b="1" dirty="0">
+                <a:solidFill>
+                  <a:srgbClr val="C00000"/>
+                </a:solidFill>
+              </a:rPr>
+              <a:t> how much the data spread out.</a:t>
+            </a:r>
           </a:p>
         </p:txBody>
       </p:sp>

--- a/docs/lecture_slides/Week 2/Week2_Lecture3_Slides_1_19_2024.pptx
+++ b/docs/lecture_slides/Week 2/Week2_Lecture3_Slides_1_19_2024.pptx
@@ -17,26 +17,13 @@
     <p:sldId id="342" r:id="rId11"/>
     <p:sldId id="346" r:id="rId12"/>
     <p:sldId id="343" r:id="rId13"/>
-    <p:sldId id="344" r:id="rId15"/>
-    <p:sldId id="286" r:id="rId16"/>
-    <p:sldId id="345" r:id="rId17"/>
-    <p:sldId id="273" r:id="rId18"/>
-    <p:sldId id="288" r:id="rId19"/>
-    <p:sldId id="330" r:id="rId14"/>
+    <p:sldId id="344" r:id="rId14"/>
+    <p:sldId id="286" r:id="rId15"/>
+    <p:sldId id="345" r:id="rId16"/>
+    <p:sldId id="273" r:id="rId17"/>
+    <p:sldId id="288" r:id="rId18"/>
+    <p:sldId id="330" r:id="rId19"/>
     <p:sldId id="277" r:id="rId20"/>
-    <p:sldId id="287" r:id="rId21"/>
-    <p:sldId id="282" r:id="rId22"/>
-    <p:sldId id="279" r:id="rId23"/>
-    <p:sldId id="280" r:id="rId24"/>
-    <p:sldId id="281" r:id="rId25"/>
-    <p:sldId id="274" r:id="rId26"/>
-    <p:sldId id="292" r:id="rId27"/>
-    <p:sldId id="293" r:id="rId28"/>
-    <p:sldId id="290" r:id="rId29"/>
-    <p:sldId id="328" r:id="rId30"/>
-    <p:sldId id="332" r:id="rId31"/>
-    <p:sldId id="295" r:id="rId32"/>
-    <p:sldId id="294" r:id="rId33"/>
   </p:sldIdLst>
   <p:sldSz cx="12192000" cy="6858000"/>
   <p:notesSz cx="6858000" cy="9144000"/>
@@ -3399,7 +3386,7 @@
           <a:p>
             <a:fld id="{06882561-BD16-4A95-ACA1-5204E478F2FE}" type="datetimeFigureOut">
               <a:rPr lang="en-US" smtClean="0"/>
-              <a:t>8/31/2026</a:t>
+              <a:t>9/2/2026</a:t>
             </a:fld>
             <a:endParaRPr lang="en-US"/>
           </a:p>
@@ -3597,7 +3584,7 @@
           <a:p>
             <a:fld id="{06882561-BD16-4A95-ACA1-5204E478F2FE}" type="datetimeFigureOut">
               <a:rPr lang="en-US" smtClean="0"/>
-              <a:t>8/31/2026</a:t>
+              <a:t>9/2/2026</a:t>
             </a:fld>
             <a:endParaRPr lang="en-US"/>
           </a:p>
@@ -3805,7 +3792,7 @@
           <a:p>
             <a:fld id="{06882561-BD16-4A95-ACA1-5204E478F2FE}" type="datetimeFigureOut">
               <a:rPr lang="en-US" smtClean="0"/>
-              <a:t>8/31/2026</a:t>
+              <a:t>9/2/2026</a:t>
             </a:fld>
             <a:endParaRPr lang="en-US"/>
           </a:p>
@@ -4003,7 +3990,7 @@
           <a:p>
             <a:fld id="{06882561-BD16-4A95-ACA1-5204E478F2FE}" type="datetimeFigureOut">
               <a:rPr lang="en-US" smtClean="0"/>
-              <a:t>8/31/2026</a:t>
+              <a:t>9/2/2026</a:t>
             </a:fld>
             <a:endParaRPr lang="en-US"/>
           </a:p>
@@ -4278,7 +4265,7 @@
           <a:p>
             <a:fld id="{06882561-BD16-4A95-ACA1-5204E478F2FE}" type="datetimeFigureOut">
               <a:rPr lang="en-US" smtClean="0"/>
-              <a:t>8/31/2026</a:t>
+              <a:t>9/2/2026</a:t>
             </a:fld>
             <a:endParaRPr lang="en-US"/>
           </a:p>
@@ -4543,7 +4530,7 @@
           <a:p>
             <a:fld id="{06882561-BD16-4A95-ACA1-5204E478F2FE}" type="datetimeFigureOut">
               <a:rPr lang="en-US" smtClean="0"/>
-              <a:t>8/31/2026</a:t>
+              <a:t>9/2/2026</a:t>
             </a:fld>
             <a:endParaRPr lang="en-US"/>
           </a:p>
@@ -4955,7 +4942,7 @@
           <a:p>
             <a:fld id="{06882561-BD16-4A95-ACA1-5204E478F2FE}" type="datetimeFigureOut">
               <a:rPr lang="en-US" smtClean="0"/>
-              <a:t>8/31/2026</a:t>
+              <a:t>9/2/2026</a:t>
             </a:fld>
             <a:endParaRPr lang="en-US"/>
           </a:p>
@@ -5096,7 +5083,7 @@
           <a:p>
             <a:fld id="{06882561-BD16-4A95-ACA1-5204E478F2FE}" type="datetimeFigureOut">
               <a:rPr lang="en-US" smtClean="0"/>
-              <a:t>8/31/2026</a:t>
+              <a:t>9/2/2026</a:t>
             </a:fld>
             <a:endParaRPr lang="en-US"/>
           </a:p>
@@ -5209,7 +5196,7 @@
           <a:p>
             <a:fld id="{06882561-BD16-4A95-ACA1-5204E478F2FE}" type="datetimeFigureOut">
               <a:rPr lang="en-US" smtClean="0"/>
-              <a:t>8/31/2026</a:t>
+              <a:t>9/2/2026</a:t>
             </a:fld>
             <a:endParaRPr lang="en-US"/>
           </a:p>
@@ -5520,7 +5507,7 @@
           <a:p>
             <a:fld id="{06882561-BD16-4A95-ACA1-5204E478F2FE}" type="datetimeFigureOut">
               <a:rPr lang="en-US" smtClean="0"/>
-              <a:t>8/31/2026</a:t>
+              <a:t>9/2/2026</a:t>
             </a:fld>
             <a:endParaRPr lang="en-US"/>
           </a:p>
@@ -5808,7 +5795,7 @@
           <a:p>
             <a:fld id="{06882561-BD16-4A95-ACA1-5204E478F2FE}" type="datetimeFigureOut">
               <a:rPr lang="en-US" smtClean="0"/>
-              <a:t>8/31/2026</a:t>
+              <a:t>9/2/2026</a:t>
             </a:fld>
             <a:endParaRPr lang="en-US"/>
           </a:p>
@@ -6049,7 +6036,7 @@
           <a:p>
             <a:fld id="{06882561-BD16-4A95-ACA1-5204E478F2FE}" type="datetimeFigureOut">
               <a:rPr lang="en-US" smtClean="0"/>
-              <a:t>8/31/2026</a:t>
+              <a:t>9/2/2026</a:t>
             </a:fld>
             <a:endParaRPr lang="en-US"/>
           </a:p>
@@ -8182,819 +8169,6 @@
       </p:grpSpPr>
       <p:sp>
         <p:nvSpPr>
-          <p:cNvPr id="900" name="Title 1"/>
-          <p:cNvSpPr>
-            <a:spLocks noGrp="1"/>
-          </p:cNvSpPr>
-          <p:nvPr>
-            <p:ph type="title"/>
-          </p:nvPr>
-        </p:nvSpPr>
-        <p:spPr>
-          <a:xfrm>
-            <a:off x="-8000000" y="0"/>
-            <a:ext cx="6000000" cy="800000"/>
-          </a:xfrm>
-        </p:spPr>
-        <p:txBody>
-          <a:bodyPr>
-            <a:normAutofit/>
-          </a:bodyPr>
-          <a:lstStyle/>
-          <a:p>
-            <a:r>
-              <a:rPr lang="en-US" sz="1800" dirty="0"/>
-              <a:t>Graphical descriptions of data</a:t>
-            </a:r>
-          </a:p>
-        </p:txBody>
-      </p:sp>
-      <p:sp>
-        <p:nvSpPr>
-          <p:cNvPr id="6" name="Rectangle: Rounded Corners 5">
-            <a:extLst>
-              <a:ext uri="{FF2B5EF4-FFF2-40B4-BE49-F238E27FC236}">
-                <a16:creationId xmlns:a16="http://schemas.microsoft.com/office/drawing/2014/main" id="{2EC7F35D-317F-28D2-BBCE-99D9B2A1FD57}"/>
-              </a:ext>
-            </a:extLst>
-          </p:cNvPr>
-          <p:cNvSpPr/>
-          <p:nvPr/>
-        </p:nvSpPr>
-        <p:spPr>
-          <a:xfrm>
-            <a:off x="1021247" y="2501144"/>
-            <a:ext cx="3380510" cy="701963"/>
-          </a:xfrm>
-          <a:prstGeom prst="roundRect">
-            <a:avLst/>
-          </a:prstGeom>
-        </p:spPr>
-        <p:style>
-          <a:lnRef idx="2">
-            <a:schemeClr val="accent2">
-              <a:shade val="15000"/>
-            </a:schemeClr>
-          </a:lnRef>
-          <a:fillRef idx="1">
-            <a:schemeClr val="accent2"/>
-          </a:fillRef>
-          <a:effectRef idx="0">
-            <a:schemeClr val="accent2"/>
-          </a:effectRef>
-          <a:fontRef idx="minor">
-            <a:schemeClr val="lt1"/>
-          </a:fontRef>
-        </p:style>
-        <p:txBody>
-          <a:bodyPr rtlCol="0" anchor="ctr"/>
-          <a:lstStyle/>
-          <a:p>
-            <a:pPr algn="ctr"/>
-            <a:r>
-              <a:rPr lang="en-US" sz="2800" dirty="0"/>
-              <a:t>Qualitative Variables</a:t>
-            </a:r>
-          </a:p>
-        </p:txBody>
-      </p:sp>
-      <p:sp>
-        <p:nvSpPr>
-          <p:cNvPr id="7" name="Rectangle: Rounded Corners 6">
-            <a:extLst>
-              <a:ext uri="{FF2B5EF4-FFF2-40B4-BE49-F238E27FC236}">
-                <a16:creationId xmlns:a16="http://schemas.microsoft.com/office/drawing/2014/main" id="{97881567-2056-16CB-4560-290AC5D327DC}"/>
-              </a:ext>
-            </a:extLst>
-          </p:cNvPr>
-          <p:cNvSpPr/>
-          <p:nvPr/>
-        </p:nvSpPr>
-        <p:spPr>
-          <a:xfrm>
-            <a:off x="7808716" y="2514998"/>
-            <a:ext cx="3468883" cy="701963"/>
-          </a:xfrm>
-          <a:prstGeom prst="roundRect">
-            <a:avLst/>
-          </a:prstGeom>
-        </p:spPr>
-        <p:style>
-          <a:lnRef idx="2">
-            <a:schemeClr val="accent2">
-              <a:shade val="15000"/>
-            </a:schemeClr>
-          </a:lnRef>
-          <a:fillRef idx="1">
-            <a:schemeClr val="accent2"/>
-          </a:fillRef>
-          <a:effectRef idx="0">
-            <a:schemeClr val="accent2"/>
-          </a:effectRef>
-          <a:fontRef idx="minor">
-            <a:schemeClr val="lt1"/>
-          </a:fontRef>
-        </p:style>
-        <p:txBody>
-          <a:bodyPr rtlCol="0" anchor="ctr"/>
-          <a:lstStyle/>
-          <a:p>
-            <a:pPr algn="ctr"/>
-            <a:r>
-              <a:rPr lang="en-US" sz="2800" dirty="0"/>
-              <a:t>Quantitative Variables</a:t>
-            </a:r>
-          </a:p>
-        </p:txBody>
-      </p:sp>
-      <p:sp>
-        <p:nvSpPr>
-          <p:cNvPr id="8" name="TextBox 7">
-            <a:extLst>
-              <a:ext uri="{FF2B5EF4-FFF2-40B4-BE49-F238E27FC236}">
-                <a16:creationId xmlns:a16="http://schemas.microsoft.com/office/drawing/2014/main" id="{1660F8CB-99D1-AF64-D302-A3630815D19A}"/>
-              </a:ext>
-            </a:extLst>
-          </p:cNvPr>
-          <p:cNvSpPr txBox="1"/>
-          <p:nvPr/>
-        </p:nvSpPr>
-        <p:spPr>
-          <a:xfrm>
-            <a:off x="1002773" y="3401690"/>
-            <a:ext cx="3380508" cy="1015663"/>
-          </a:xfrm>
-          <a:prstGeom prst="rect">
-            <a:avLst/>
-          </a:prstGeom>
-          <a:solidFill>
-            <a:schemeClr val="bg1"/>
-          </a:solidFill>
-        </p:spPr>
-        <p:style>
-          <a:lnRef idx="2">
-            <a:schemeClr val="accent1"/>
-          </a:lnRef>
-          <a:fillRef idx="1">
-            <a:schemeClr val="lt1"/>
-          </a:fillRef>
-          <a:effectRef idx="0">
-            <a:schemeClr val="accent1"/>
-          </a:effectRef>
-          <a:fontRef idx="minor">
-            <a:schemeClr val="dk1"/>
-          </a:fontRef>
-        </p:style>
-        <p:txBody>
-          <a:bodyPr wrap="square" rtlCol="0">
-            <a:spAutoFit/>
-          </a:bodyPr>
-          <a:lstStyle/>
-          <a:p>
-            <a:pPr marL="285750" indent="-285750">
-              <a:buFont typeface="Arial" panose="020B0604020202020204" pitchFamily="34" charset="0"/>
-              <a:buChar char="•"/>
-            </a:pPr>
-            <a:r>
-              <a:rPr lang="en-US" sz="2000" dirty="0"/>
-              <a:t>Bar graph</a:t>
-            </a:r>
-          </a:p>
-          <a:p>
-            <a:pPr marL="285750" indent="-285750">
-              <a:buFont typeface="Arial" panose="020B0604020202020204" pitchFamily="34" charset="0"/>
-              <a:buChar char="•"/>
-            </a:pPr>
-            <a:r>
-              <a:rPr lang="en-US" sz="2000" dirty="0"/>
-              <a:t>Pie Chart</a:t>
-            </a:r>
-          </a:p>
-          <a:p>
-            <a:pPr marL="285750" indent="-285750">
-              <a:buFont typeface="Arial" panose="020B0604020202020204" pitchFamily="34" charset="0"/>
-              <a:buChar char="•"/>
-            </a:pPr>
-            <a:r>
-              <a:rPr lang="en-US" sz="2000" dirty="0"/>
-              <a:t>Pareto Chart</a:t>
-            </a:r>
-          </a:p>
-        </p:txBody>
-      </p:sp>
-      <p:sp>
-        <p:nvSpPr>
-          <p:cNvPr id="10" name="Rectangle 9">
-            <a:extLst>
-              <a:ext uri="{FF2B5EF4-FFF2-40B4-BE49-F238E27FC236}">
-                <a16:creationId xmlns:a16="http://schemas.microsoft.com/office/drawing/2014/main" id="{D5155137-1F8F-B30B-6371-056BD66E46D4}"/>
-              </a:ext>
-            </a:extLst>
-          </p:cNvPr>
-          <p:cNvSpPr/>
-          <p:nvPr/>
-        </p:nvSpPr>
-        <p:spPr>
-          <a:xfrm>
-            <a:off x="4290919" y="133926"/>
-            <a:ext cx="3406959" cy="701963"/>
-          </a:xfrm>
-          <a:prstGeom prst="rect">
-            <a:avLst/>
-          </a:prstGeom>
-        </p:spPr>
-        <p:style>
-          <a:lnRef idx="2">
-            <a:schemeClr val="accent1">
-              <a:shade val="15000"/>
-            </a:schemeClr>
-          </a:lnRef>
-          <a:fillRef idx="1">
-            <a:schemeClr val="accent1"/>
-          </a:fillRef>
-          <a:effectRef idx="0">
-            <a:schemeClr val="accent1"/>
-          </a:effectRef>
-          <a:fontRef idx="minor">
-            <a:schemeClr val="lt1"/>
-          </a:fontRef>
-        </p:style>
-        <p:txBody>
-          <a:bodyPr rtlCol="0" anchor="ctr"/>
-          <a:lstStyle/>
-          <a:p>
-            <a:pPr algn="ctr"/>
-            <a:r>
-              <a:rPr lang="en-US" dirty="0"/>
-              <a:t>Graphical Descriptions Of Data</a:t>
-            </a:r>
-          </a:p>
-        </p:txBody>
-      </p:sp>
-      <p:cxnSp>
-        <p:nvCxnSpPr>
-          <p:cNvPr id="12" name="Connector: Elbow 11">
-            <a:extLst>
-              <a:ext uri="{FF2B5EF4-FFF2-40B4-BE49-F238E27FC236}">
-                <a16:creationId xmlns:a16="http://schemas.microsoft.com/office/drawing/2014/main" id="{0E4B24D7-47EA-F860-D406-1737EE3EAC68}"/>
-              </a:ext>
-            </a:extLst>
-          </p:cNvPr>
-          <p:cNvCxnSpPr>
-            <a:cxnSpLocks/>
-            <a:stCxn id="25" idx="1"/>
-            <a:endCxn id="6" idx="0"/>
-          </p:cNvCxnSpPr>
-          <p:nvPr/>
-        </p:nvCxnSpPr>
-        <p:spPr>
-          <a:xfrm rot="10800000" flipV="1">
-            <a:off x="2711503" y="1524062"/>
-            <a:ext cx="1671779" cy="977081"/>
-          </a:xfrm>
-          <a:prstGeom prst="bentConnector2">
-            <a:avLst/>
-          </a:prstGeom>
-          <a:ln w="76200">
-            <a:tailEnd type="triangle"/>
-          </a:ln>
-        </p:spPr>
-        <p:style>
-          <a:lnRef idx="1">
-            <a:schemeClr val="accent1"/>
-          </a:lnRef>
-          <a:fillRef idx="0">
-            <a:schemeClr val="accent1"/>
-          </a:fillRef>
-          <a:effectRef idx="0">
-            <a:schemeClr val="accent1"/>
-          </a:effectRef>
-          <a:fontRef idx="minor">
-            <a:schemeClr val="tx1"/>
-          </a:fontRef>
-        </p:style>
-      </p:cxnSp>
-      <p:cxnSp>
-        <p:nvCxnSpPr>
-          <p:cNvPr id="14" name="Connector: Elbow 13">
-            <a:extLst>
-              <a:ext uri="{FF2B5EF4-FFF2-40B4-BE49-F238E27FC236}">
-                <a16:creationId xmlns:a16="http://schemas.microsoft.com/office/drawing/2014/main" id="{C3A0F894-932E-A39B-EE28-C0F756836744}"/>
-              </a:ext>
-            </a:extLst>
-          </p:cNvPr>
-          <p:cNvCxnSpPr>
-            <a:cxnSpLocks/>
-            <a:stCxn id="25" idx="3"/>
-            <a:endCxn id="7" idx="0"/>
-          </p:cNvCxnSpPr>
-          <p:nvPr/>
-        </p:nvCxnSpPr>
-        <p:spPr>
-          <a:xfrm>
-            <a:off x="7790240" y="1524063"/>
-            <a:ext cx="1752918" cy="990935"/>
-          </a:xfrm>
-          <a:prstGeom prst="bentConnector2">
-            <a:avLst/>
-          </a:prstGeom>
-          <a:ln w="76200">
-            <a:tailEnd type="triangle"/>
-          </a:ln>
-        </p:spPr>
-        <p:style>
-          <a:lnRef idx="1">
-            <a:schemeClr val="accent1"/>
-          </a:lnRef>
-          <a:fillRef idx="0">
-            <a:schemeClr val="accent1"/>
-          </a:fillRef>
-          <a:effectRef idx="0">
-            <a:schemeClr val="accent1"/>
-          </a:effectRef>
-          <a:fontRef idx="minor">
-            <a:schemeClr val="tx1"/>
-          </a:fontRef>
-        </p:style>
-      </p:cxnSp>
-      <p:sp>
-        <p:nvSpPr>
-          <p:cNvPr id="15" name="Rectangle 14">
-            <a:extLst>
-              <a:ext uri="{FF2B5EF4-FFF2-40B4-BE49-F238E27FC236}">
-                <a16:creationId xmlns:a16="http://schemas.microsoft.com/office/drawing/2014/main" id="{BB470C11-E3DA-41FB-321D-DF57E25C9C0E}"/>
-              </a:ext>
-            </a:extLst>
-          </p:cNvPr>
-          <p:cNvSpPr/>
-          <p:nvPr/>
-        </p:nvSpPr>
-        <p:spPr>
-          <a:xfrm>
-            <a:off x="4392520" y="4692471"/>
-            <a:ext cx="3406959" cy="701963"/>
-          </a:xfrm>
-          <a:prstGeom prst="rect">
-            <a:avLst/>
-          </a:prstGeom>
-        </p:spPr>
-        <p:style>
-          <a:lnRef idx="2">
-            <a:schemeClr val="accent1">
-              <a:shade val="15000"/>
-            </a:schemeClr>
-          </a:lnRef>
-          <a:fillRef idx="1">
-            <a:schemeClr val="accent1"/>
-          </a:fillRef>
-          <a:effectRef idx="0">
-            <a:schemeClr val="accent1"/>
-          </a:effectRef>
-          <a:fontRef idx="minor">
-            <a:schemeClr val="lt1"/>
-          </a:fontRef>
-        </p:style>
-        <p:txBody>
-          <a:bodyPr rtlCol="0" anchor="ctr"/>
-          <a:lstStyle/>
-          <a:p>
-            <a:pPr algn="ctr"/>
-            <a:r>
-              <a:rPr lang="en-US" sz="2400" dirty="0"/>
-              <a:t>Describe key features of the distribution</a:t>
-            </a:r>
-          </a:p>
-        </p:txBody>
-      </p:sp>
-      <p:sp>
-        <p:nvSpPr>
-          <p:cNvPr id="16" name="TextBox 15">
-            <a:extLst>
-              <a:ext uri="{FF2B5EF4-FFF2-40B4-BE49-F238E27FC236}">
-                <a16:creationId xmlns:a16="http://schemas.microsoft.com/office/drawing/2014/main" id="{DC7F01EC-1027-1A76-3043-99F0E76481CA}"/>
-              </a:ext>
-            </a:extLst>
-          </p:cNvPr>
-          <p:cNvSpPr txBox="1"/>
-          <p:nvPr/>
-        </p:nvSpPr>
-        <p:spPr>
-          <a:xfrm>
-            <a:off x="4404748" y="5567343"/>
-            <a:ext cx="3394731" cy="1200329"/>
-          </a:xfrm>
-          <a:prstGeom prst="rect">
-            <a:avLst/>
-          </a:prstGeom>
-          <a:solidFill>
-            <a:schemeClr val="bg1"/>
-          </a:solidFill>
-        </p:spPr>
-        <p:style>
-          <a:lnRef idx="2">
-            <a:schemeClr val="accent1"/>
-          </a:lnRef>
-          <a:fillRef idx="1">
-            <a:schemeClr val="lt1"/>
-          </a:fillRef>
-          <a:effectRef idx="0">
-            <a:schemeClr val="accent1"/>
-          </a:effectRef>
-          <a:fontRef idx="minor">
-            <a:schemeClr val="dk1"/>
-          </a:fontRef>
-        </p:style>
-        <p:txBody>
-          <a:bodyPr wrap="square" rtlCol="0">
-            <a:spAutoFit/>
-          </a:bodyPr>
-          <a:lstStyle/>
-          <a:p>
-            <a:pPr marL="285750" indent="-285750">
-              <a:buFont typeface="Arial" panose="020B0604020202020204" pitchFamily="34" charset="0"/>
-              <a:buChar char="•"/>
-            </a:pPr>
-            <a:r>
-              <a:rPr lang="en-US" dirty="0"/>
-              <a:t>Modal Category</a:t>
-            </a:r>
-          </a:p>
-          <a:p>
-            <a:pPr marL="285750" indent="-285750">
-              <a:buFont typeface="Arial" panose="020B0604020202020204" pitchFamily="34" charset="0"/>
-              <a:buChar char="•"/>
-            </a:pPr>
-            <a:r>
-              <a:rPr lang="en-US" dirty="0"/>
-              <a:t>Shape</a:t>
-            </a:r>
-          </a:p>
-          <a:p>
-            <a:pPr marL="285750" indent="-285750">
-              <a:buFont typeface="Arial" panose="020B0604020202020204" pitchFamily="34" charset="0"/>
-              <a:buChar char="•"/>
-            </a:pPr>
-            <a:r>
-              <a:rPr lang="en-US" dirty="0"/>
-              <a:t>Center</a:t>
-            </a:r>
-          </a:p>
-          <a:p>
-            <a:pPr marL="285750" indent="-285750">
-              <a:buFont typeface="Arial" panose="020B0604020202020204" pitchFamily="34" charset="0"/>
-              <a:buChar char="•"/>
-            </a:pPr>
-            <a:r>
-              <a:rPr lang="en-US" dirty="0"/>
-              <a:t>Variability</a:t>
-            </a:r>
-          </a:p>
-        </p:txBody>
-      </p:sp>
-      <p:cxnSp>
-        <p:nvCxnSpPr>
-          <p:cNvPr id="18" name="Connector: Elbow 17">
-            <a:extLst>
-              <a:ext uri="{FF2B5EF4-FFF2-40B4-BE49-F238E27FC236}">
-                <a16:creationId xmlns:a16="http://schemas.microsoft.com/office/drawing/2014/main" id="{433238C4-A2B4-5CCD-B93B-C3EEBA196CA4}"/>
-              </a:ext>
-            </a:extLst>
-          </p:cNvPr>
-          <p:cNvCxnSpPr>
-            <a:cxnSpLocks/>
-            <a:stCxn id="8" idx="2"/>
-            <a:endCxn id="15" idx="1"/>
-          </p:cNvCxnSpPr>
-          <p:nvPr/>
-        </p:nvCxnSpPr>
-        <p:spPr>
-          <a:xfrm rot="16200000" flipH="1">
-            <a:off x="3229723" y="3880656"/>
-            <a:ext cx="626100" cy="1699493"/>
-          </a:xfrm>
-          <a:prstGeom prst="bentConnector2">
-            <a:avLst/>
-          </a:prstGeom>
-          <a:ln w="76200">
-            <a:tailEnd type="triangle"/>
-          </a:ln>
-        </p:spPr>
-        <p:style>
-          <a:lnRef idx="1">
-            <a:schemeClr val="accent1"/>
-          </a:lnRef>
-          <a:fillRef idx="0">
-            <a:schemeClr val="accent1"/>
-          </a:fillRef>
-          <a:effectRef idx="0">
-            <a:schemeClr val="accent1"/>
-          </a:effectRef>
-          <a:fontRef idx="minor">
-            <a:schemeClr val="tx1"/>
-          </a:fontRef>
-        </p:style>
-      </p:cxnSp>
-      <p:cxnSp>
-        <p:nvCxnSpPr>
-          <p:cNvPr id="19" name="Connector: Elbow 18">
-            <a:extLst>
-              <a:ext uri="{FF2B5EF4-FFF2-40B4-BE49-F238E27FC236}">
-                <a16:creationId xmlns:a16="http://schemas.microsoft.com/office/drawing/2014/main" id="{BA6A9435-F7E6-7CDC-62E5-FCB2A9FCE741}"/>
-              </a:ext>
-            </a:extLst>
-          </p:cNvPr>
-          <p:cNvCxnSpPr>
-            <a:cxnSpLocks/>
-            <a:stCxn id="9" idx="2"/>
-            <a:endCxn id="15" idx="3"/>
-          </p:cNvCxnSpPr>
-          <p:nvPr/>
-        </p:nvCxnSpPr>
-        <p:spPr>
-          <a:xfrm rot="5400000">
-            <a:off x="8358269" y="3858563"/>
-            <a:ext cx="626101" cy="1743679"/>
-          </a:xfrm>
-          <a:prstGeom prst="bentConnector2">
-            <a:avLst/>
-          </a:prstGeom>
-          <a:ln w="76200">
-            <a:tailEnd type="triangle"/>
-          </a:ln>
-        </p:spPr>
-        <p:style>
-          <a:lnRef idx="1">
-            <a:schemeClr val="accent1"/>
-          </a:lnRef>
-          <a:fillRef idx="0">
-            <a:schemeClr val="accent1"/>
-          </a:fillRef>
-          <a:effectRef idx="0">
-            <a:schemeClr val="accent1"/>
-          </a:effectRef>
-          <a:fontRef idx="minor">
-            <a:schemeClr val="tx1"/>
-          </a:fontRef>
-        </p:style>
-      </p:cxnSp>
-      <p:sp>
-        <p:nvSpPr>
-          <p:cNvPr id="9" name="TextBox 8">
-            <a:extLst>
-              <a:ext uri="{FF2B5EF4-FFF2-40B4-BE49-F238E27FC236}">
-                <a16:creationId xmlns:a16="http://schemas.microsoft.com/office/drawing/2014/main" id="{91966676-BC35-3C86-F6B0-3253A01BE201}"/>
-              </a:ext>
-            </a:extLst>
-          </p:cNvPr>
-          <p:cNvSpPr txBox="1"/>
-          <p:nvPr/>
-        </p:nvSpPr>
-        <p:spPr>
-          <a:xfrm>
-            <a:off x="7808717" y="3401689"/>
-            <a:ext cx="3468882" cy="1015663"/>
-          </a:xfrm>
-          <a:prstGeom prst="rect">
-            <a:avLst/>
-          </a:prstGeom>
-          <a:solidFill>
-            <a:schemeClr val="bg1"/>
-          </a:solidFill>
-        </p:spPr>
-        <p:style>
-          <a:lnRef idx="2">
-            <a:schemeClr val="accent1"/>
-          </a:lnRef>
-          <a:fillRef idx="1">
-            <a:schemeClr val="lt1"/>
-          </a:fillRef>
-          <a:effectRef idx="0">
-            <a:schemeClr val="accent1"/>
-          </a:effectRef>
-          <a:fontRef idx="minor">
-            <a:schemeClr val="dk1"/>
-          </a:fontRef>
-        </p:style>
-        <p:txBody>
-          <a:bodyPr wrap="square" rtlCol="0">
-            <a:spAutoFit/>
-          </a:bodyPr>
-          <a:lstStyle/>
-          <a:p>
-            <a:pPr marL="285750" indent="-285750">
-              <a:buFont typeface="Arial" panose="020B0604020202020204" pitchFamily="34" charset="0"/>
-              <a:buChar char="•"/>
-            </a:pPr>
-            <a:r>
-              <a:rPr lang="en-US" sz="2000" dirty="0"/>
-              <a:t>Dot Plot</a:t>
-            </a:r>
-          </a:p>
-          <a:p>
-            <a:pPr marL="285750" indent="-285750">
-              <a:buFont typeface="Arial" panose="020B0604020202020204" pitchFamily="34" charset="0"/>
-              <a:buChar char="•"/>
-            </a:pPr>
-            <a:r>
-              <a:rPr lang="en-US" sz="2000" dirty="0"/>
-              <a:t>Stem Chart</a:t>
-            </a:r>
-          </a:p>
-          <a:p>
-            <a:pPr marL="285750" indent="-285750">
-              <a:buFont typeface="Arial" panose="020B0604020202020204" pitchFamily="34" charset="0"/>
-              <a:buChar char="•"/>
-            </a:pPr>
-            <a:r>
-              <a:rPr lang="en-US" sz="2000" dirty="0">
-                <a:solidFill>
-                  <a:schemeClr val="tx1"/>
-                </a:solidFill>
-              </a:rPr>
-              <a:t>Histogram</a:t>
-            </a:r>
-            <a:r>
-              <a:rPr lang="en-US" sz="2000" dirty="0"/>
-              <a:t> </a:t>
-            </a:r>
-          </a:p>
-        </p:txBody>
-      </p:sp>
-      <p:sp>
-        <p:nvSpPr>
-          <p:cNvPr id="25" name="Rectangle: Rounded Corners 24">
-            <a:extLst>
-              <a:ext uri="{FF2B5EF4-FFF2-40B4-BE49-F238E27FC236}">
-                <a16:creationId xmlns:a16="http://schemas.microsoft.com/office/drawing/2014/main" id="{C40DF31A-AF91-AF49-1BB8-8D6E76C29BA4}"/>
-              </a:ext>
-            </a:extLst>
-          </p:cNvPr>
-          <p:cNvSpPr/>
-          <p:nvPr/>
-        </p:nvSpPr>
-        <p:spPr>
-          <a:xfrm>
-            <a:off x="4383281" y="1173081"/>
-            <a:ext cx="3406959" cy="701963"/>
-          </a:xfrm>
-          <a:prstGeom prst="roundRect">
-            <a:avLst/>
-          </a:prstGeom>
-        </p:spPr>
-        <p:style>
-          <a:lnRef idx="2">
-            <a:schemeClr val="accent1">
-              <a:shade val="15000"/>
-            </a:schemeClr>
-          </a:lnRef>
-          <a:fillRef idx="1">
-            <a:schemeClr val="accent1"/>
-          </a:fillRef>
-          <a:effectRef idx="0">
-            <a:schemeClr val="accent1"/>
-          </a:effectRef>
-          <a:fontRef idx="minor">
-            <a:schemeClr val="lt1"/>
-          </a:fontRef>
-        </p:style>
-        <p:txBody>
-          <a:bodyPr rtlCol="0" anchor="ctr"/>
-          <a:lstStyle/>
-          <a:p>
-            <a:pPr algn="ctr"/>
-            <a:r>
-              <a:rPr lang="en-US" dirty="0"/>
-              <a:t>Frequency Tables</a:t>
-            </a:r>
-          </a:p>
-        </p:txBody>
-      </p:sp>
-      <p:sp>
-        <p:nvSpPr>
-          <p:cNvPr id="28" name="Arrow: Down 27">
-            <a:extLst>
-              <a:ext uri="{FF2B5EF4-FFF2-40B4-BE49-F238E27FC236}">
-                <a16:creationId xmlns:a16="http://schemas.microsoft.com/office/drawing/2014/main" id="{81F32552-BCAB-7E67-B88C-5F1E3B211CC8}"/>
-              </a:ext>
-            </a:extLst>
-          </p:cNvPr>
-          <p:cNvSpPr/>
-          <p:nvPr/>
-        </p:nvSpPr>
-        <p:spPr>
-          <a:xfrm>
-            <a:off x="5886554" y="866958"/>
-            <a:ext cx="418890" cy="337127"/>
-          </a:xfrm>
-          <a:prstGeom prst="downArrow">
-            <a:avLst/>
-          </a:prstGeom>
-          <a:solidFill>
-            <a:schemeClr val="accent1">
-              <a:lumMod val="40000"/>
-              <a:lumOff val="60000"/>
-            </a:schemeClr>
-          </a:solidFill>
-        </p:spPr>
-        <p:style>
-          <a:lnRef idx="2">
-            <a:schemeClr val="accent1">
-              <a:shade val="15000"/>
-            </a:schemeClr>
-          </a:lnRef>
-          <a:fillRef idx="1">
-            <a:schemeClr val="accent1"/>
-          </a:fillRef>
-          <a:effectRef idx="0">
-            <a:schemeClr val="accent1"/>
-          </a:effectRef>
-          <a:fontRef idx="minor">
-            <a:schemeClr val="lt1"/>
-          </a:fontRef>
-        </p:style>
-        <p:txBody>
-          <a:bodyPr rtlCol="0" anchor="ctr"/>
-          <a:lstStyle/>
-          <a:p>
-            <a:pPr algn="ctr"/>
-            <a:endParaRPr lang="en-US"/>
-          </a:p>
-        </p:txBody>
-      </p:sp>
-      <p:cxnSp>
-        <p:nvCxnSpPr>
-          <p:cNvPr id="30" name="Straight Arrow Connector 29">
-            <a:extLst>
-              <a:ext uri="{FF2B5EF4-FFF2-40B4-BE49-F238E27FC236}">
-                <a16:creationId xmlns:a16="http://schemas.microsoft.com/office/drawing/2014/main" id="{291E9938-8966-4DC4-C588-135EC5244D53}"/>
-              </a:ext>
-            </a:extLst>
-          </p:cNvPr>
-          <p:cNvCxnSpPr>
-            <a:stCxn id="25" idx="2"/>
-            <a:endCxn id="15" idx="0"/>
-          </p:cNvCxnSpPr>
-          <p:nvPr/>
-        </p:nvCxnSpPr>
-        <p:spPr>
-          <a:xfrm>
-            <a:off x="6086761" y="1875044"/>
-            <a:ext cx="9239" cy="2817427"/>
-          </a:xfrm>
-          <a:prstGeom prst="straightConnector1">
-            <a:avLst/>
-          </a:prstGeom>
-          <a:ln w="76200">
-            <a:tailEnd type="triangle"/>
-          </a:ln>
-        </p:spPr>
-        <p:style>
-          <a:lnRef idx="1">
-            <a:schemeClr val="accent1"/>
-          </a:lnRef>
-          <a:fillRef idx="0">
-            <a:schemeClr val="accent1"/>
-          </a:fillRef>
-          <a:effectRef idx="0">
-            <a:schemeClr val="accent1"/>
-          </a:effectRef>
-          <a:fontRef idx="minor">
-            <a:schemeClr val="tx1"/>
-          </a:fontRef>
-        </p:style>
-      </p:cxnSp>
-    </p:spTree>
-    <p:extLst>
-      <p:ext uri="{BB962C8B-B14F-4D97-AF65-F5344CB8AC3E}">
-        <p14:creationId xmlns:p14="http://schemas.microsoft.com/office/powerpoint/2010/main" val="779196973"/>
-      </p:ext>
-    </p:extLst>
-  </p:cSld>
-  <p:clrMapOvr>
-    <a:masterClrMapping/>
-  </p:clrMapOvr>
-</p:sld>
-</file>
-
-<file path=ppt/slides/slide14.xml><?xml version="1.0" encoding="utf-8"?>
-<p:sld xmlns:a="http://schemas.openxmlformats.org/drawingml/2006/main" xmlns:r="http://schemas.openxmlformats.org/officeDocument/2006/relationships" xmlns:p="http://schemas.openxmlformats.org/presentationml/2006/main">
-  <p:cSld>
-    <p:spTree>
-      <p:nvGrpSpPr>
-        <p:cNvPr id="1" name=""/>
-        <p:cNvGrpSpPr/>
-        <p:nvPr/>
-      </p:nvGrpSpPr>
-      <p:grpSpPr>
-        <a:xfrm>
-          <a:off x="0" y="0"/>
-          <a:ext cx="0" cy="0"/>
-          <a:chOff x="0" y="0"/>
-          <a:chExt cx="0" cy="0"/>
-        </a:xfrm>
-      </p:grpSpPr>
-      <p:sp>
-        <p:nvSpPr>
           <p:cNvPr id="2" name="Title 1"/>
           <p:cNvSpPr>
             <a:spLocks noGrp="1"/>
@@ -9643,7 +8817,7 @@
 </p:sld>
 </file>
 
-<file path=ppt/slides/slide15.xml><?xml version="1.0" encoding="utf-8"?>
+<file path=ppt/slides/slide14.xml><?xml version="1.0" encoding="utf-8"?>
 <p:sld xmlns:a="http://schemas.openxmlformats.org/drawingml/2006/main" xmlns:r="http://schemas.openxmlformats.org/officeDocument/2006/relationships" xmlns:p="http://schemas.openxmlformats.org/presentationml/2006/main">
   <p:cSld>
     <p:spTree>
@@ -9772,7 +8946,7 @@
 </p:sld>
 </file>
 
-<file path=ppt/slides/slide16.xml><?xml version="1.0" encoding="utf-8"?>
+<file path=ppt/slides/slide15.xml><?xml version="1.0" encoding="utf-8"?>
 <p:sld xmlns:a="http://schemas.openxmlformats.org/drawingml/2006/main" xmlns:r="http://schemas.openxmlformats.org/officeDocument/2006/relationships" xmlns:p="http://schemas.openxmlformats.org/presentationml/2006/main">
   <p:cSld>
     <p:spTree>
@@ -10899,7 +10073,7 @@
 </p:sld>
 </file>
 
-<file path=ppt/slides/slide17.xml><?xml version="1.0" encoding="utf-8"?>
+<file path=ppt/slides/slide16.xml><?xml version="1.0" encoding="utf-8"?>
 <p:sld xmlns:a="http://schemas.openxmlformats.org/drawingml/2006/main" xmlns:r="http://schemas.openxmlformats.org/officeDocument/2006/relationships" xmlns:p="http://schemas.openxmlformats.org/presentationml/2006/main">
   <p:cSld>
     <p:spTree>
@@ -11033,7 +10207,7 @@
 </p:sld>
 </file>
 
-<file path=ppt/slides/slide18.xml><?xml version="1.0" encoding="utf-8"?>
+<file path=ppt/slides/slide17.xml><?xml version="1.0" encoding="utf-8"?>
 <p:sld xmlns:a="http://schemas.openxmlformats.org/drawingml/2006/main" xmlns:r="http://schemas.openxmlformats.org/officeDocument/2006/relationships" xmlns:p="http://schemas.openxmlformats.org/presentationml/2006/main">
   <p:cSld>
     <p:spTree>
@@ -11118,6 +10292,819 @@
     <p:extLst>
       <p:ext uri="{BB962C8B-B14F-4D97-AF65-F5344CB8AC3E}">
         <p14:creationId xmlns:p14="http://schemas.microsoft.com/office/powerpoint/2010/main" val="1892766331"/>
+      </p:ext>
+    </p:extLst>
+  </p:cSld>
+  <p:clrMapOvr>
+    <a:masterClrMapping/>
+  </p:clrMapOvr>
+</p:sld>
+</file>
+
+<file path=ppt/slides/slide18.xml><?xml version="1.0" encoding="utf-8"?>
+<p:sld xmlns:a="http://schemas.openxmlformats.org/drawingml/2006/main" xmlns:r="http://schemas.openxmlformats.org/officeDocument/2006/relationships" xmlns:p="http://schemas.openxmlformats.org/presentationml/2006/main">
+  <p:cSld>
+    <p:spTree>
+      <p:nvGrpSpPr>
+        <p:cNvPr id="1" name=""/>
+        <p:cNvGrpSpPr/>
+        <p:nvPr/>
+      </p:nvGrpSpPr>
+      <p:grpSpPr>
+        <a:xfrm>
+          <a:off x="0" y="0"/>
+          <a:ext cx="0" cy="0"/>
+          <a:chOff x="0" y="0"/>
+          <a:chExt cx="0" cy="0"/>
+        </a:xfrm>
+      </p:grpSpPr>
+      <p:sp>
+        <p:nvSpPr>
+          <p:cNvPr id="900" name="Title 1"/>
+          <p:cNvSpPr>
+            <a:spLocks noGrp="1"/>
+          </p:cNvSpPr>
+          <p:nvPr>
+            <p:ph type="title"/>
+          </p:nvPr>
+        </p:nvSpPr>
+        <p:spPr>
+          <a:xfrm>
+            <a:off x="-8000000" y="0"/>
+            <a:ext cx="6000000" cy="800000"/>
+          </a:xfrm>
+        </p:spPr>
+        <p:txBody>
+          <a:bodyPr>
+            <a:normAutofit/>
+          </a:bodyPr>
+          <a:lstStyle/>
+          <a:p>
+            <a:r>
+              <a:rPr lang="en-US" sz="1800" dirty="0"/>
+              <a:t>Graphical descriptions of data</a:t>
+            </a:r>
+          </a:p>
+        </p:txBody>
+      </p:sp>
+      <p:sp>
+        <p:nvSpPr>
+          <p:cNvPr id="6" name="Rectangle: Rounded Corners 5">
+            <a:extLst>
+              <a:ext uri="{FF2B5EF4-FFF2-40B4-BE49-F238E27FC236}">
+                <a16:creationId xmlns:a16="http://schemas.microsoft.com/office/drawing/2014/main" id="{2EC7F35D-317F-28D2-BBCE-99D9B2A1FD57}"/>
+              </a:ext>
+            </a:extLst>
+          </p:cNvPr>
+          <p:cNvSpPr/>
+          <p:nvPr/>
+        </p:nvSpPr>
+        <p:spPr>
+          <a:xfrm>
+            <a:off x="1021247" y="2501144"/>
+            <a:ext cx="3380510" cy="701963"/>
+          </a:xfrm>
+          <a:prstGeom prst="roundRect">
+            <a:avLst/>
+          </a:prstGeom>
+        </p:spPr>
+        <p:style>
+          <a:lnRef idx="2">
+            <a:schemeClr val="accent2">
+              <a:shade val="15000"/>
+            </a:schemeClr>
+          </a:lnRef>
+          <a:fillRef idx="1">
+            <a:schemeClr val="accent2"/>
+          </a:fillRef>
+          <a:effectRef idx="0">
+            <a:schemeClr val="accent2"/>
+          </a:effectRef>
+          <a:fontRef idx="minor">
+            <a:schemeClr val="lt1"/>
+          </a:fontRef>
+        </p:style>
+        <p:txBody>
+          <a:bodyPr rtlCol="0" anchor="ctr"/>
+          <a:lstStyle/>
+          <a:p>
+            <a:pPr algn="ctr"/>
+            <a:r>
+              <a:rPr lang="en-US" sz="2800" dirty="0"/>
+              <a:t>Qualitative Variables</a:t>
+            </a:r>
+          </a:p>
+        </p:txBody>
+      </p:sp>
+      <p:sp>
+        <p:nvSpPr>
+          <p:cNvPr id="7" name="Rectangle: Rounded Corners 6">
+            <a:extLst>
+              <a:ext uri="{FF2B5EF4-FFF2-40B4-BE49-F238E27FC236}">
+                <a16:creationId xmlns:a16="http://schemas.microsoft.com/office/drawing/2014/main" id="{97881567-2056-16CB-4560-290AC5D327DC}"/>
+              </a:ext>
+            </a:extLst>
+          </p:cNvPr>
+          <p:cNvSpPr/>
+          <p:nvPr/>
+        </p:nvSpPr>
+        <p:spPr>
+          <a:xfrm>
+            <a:off x="7808716" y="2514998"/>
+            <a:ext cx="3468883" cy="701963"/>
+          </a:xfrm>
+          <a:prstGeom prst="roundRect">
+            <a:avLst/>
+          </a:prstGeom>
+        </p:spPr>
+        <p:style>
+          <a:lnRef idx="2">
+            <a:schemeClr val="accent2">
+              <a:shade val="15000"/>
+            </a:schemeClr>
+          </a:lnRef>
+          <a:fillRef idx="1">
+            <a:schemeClr val="accent2"/>
+          </a:fillRef>
+          <a:effectRef idx="0">
+            <a:schemeClr val="accent2"/>
+          </a:effectRef>
+          <a:fontRef idx="minor">
+            <a:schemeClr val="lt1"/>
+          </a:fontRef>
+        </p:style>
+        <p:txBody>
+          <a:bodyPr rtlCol="0" anchor="ctr"/>
+          <a:lstStyle/>
+          <a:p>
+            <a:pPr algn="ctr"/>
+            <a:r>
+              <a:rPr lang="en-US" sz="2800" dirty="0"/>
+              <a:t>Quantitative Variables</a:t>
+            </a:r>
+          </a:p>
+        </p:txBody>
+      </p:sp>
+      <p:sp>
+        <p:nvSpPr>
+          <p:cNvPr id="8" name="TextBox 7">
+            <a:extLst>
+              <a:ext uri="{FF2B5EF4-FFF2-40B4-BE49-F238E27FC236}">
+                <a16:creationId xmlns:a16="http://schemas.microsoft.com/office/drawing/2014/main" id="{1660F8CB-99D1-AF64-D302-A3630815D19A}"/>
+              </a:ext>
+            </a:extLst>
+          </p:cNvPr>
+          <p:cNvSpPr txBox="1"/>
+          <p:nvPr/>
+        </p:nvSpPr>
+        <p:spPr>
+          <a:xfrm>
+            <a:off x="1002773" y="3401690"/>
+            <a:ext cx="3380508" cy="1015663"/>
+          </a:xfrm>
+          <a:prstGeom prst="rect">
+            <a:avLst/>
+          </a:prstGeom>
+          <a:solidFill>
+            <a:schemeClr val="bg1"/>
+          </a:solidFill>
+        </p:spPr>
+        <p:style>
+          <a:lnRef idx="2">
+            <a:schemeClr val="accent1"/>
+          </a:lnRef>
+          <a:fillRef idx="1">
+            <a:schemeClr val="lt1"/>
+          </a:fillRef>
+          <a:effectRef idx="0">
+            <a:schemeClr val="accent1"/>
+          </a:effectRef>
+          <a:fontRef idx="minor">
+            <a:schemeClr val="dk1"/>
+          </a:fontRef>
+        </p:style>
+        <p:txBody>
+          <a:bodyPr wrap="square" rtlCol="0">
+            <a:spAutoFit/>
+          </a:bodyPr>
+          <a:lstStyle/>
+          <a:p>
+            <a:pPr marL="285750" indent="-285750">
+              <a:buFont typeface="Arial" panose="020B0604020202020204" pitchFamily="34" charset="0"/>
+              <a:buChar char="•"/>
+            </a:pPr>
+            <a:r>
+              <a:rPr lang="en-US" sz="2000" dirty="0"/>
+              <a:t>Bar graph</a:t>
+            </a:r>
+          </a:p>
+          <a:p>
+            <a:pPr marL="285750" indent="-285750">
+              <a:buFont typeface="Arial" panose="020B0604020202020204" pitchFamily="34" charset="0"/>
+              <a:buChar char="•"/>
+            </a:pPr>
+            <a:r>
+              <a:rPr lang="en-US" sz="2000" dirty="0"/>
+              <a:t>Pie Chart</a:t>
+            </a:r>
+          </a:p>
+          <a:p>
+            <a:pPr marL="285750" indent="-285750">
+              <a:buFont typeface="Arial" panose="020B0604020202020204" pitchFamily="34" charset="0"/>
+              <a:buChar char="•"/>
+            </a:pPr>
+            <a:r>
+              <a:rPr lang="en-US" sz="2000" dirty="0"/>
+              <a:t>Pareto Chart</a:t>
+            </a:r>
+          </a:p>
+        </p:txBody>
+      </p:sp>
+      <p:sp>
+        <p:nvSpPr>
+          <p:cNvPr id="10" name="Rectangle 9">
+            <a:extLst>
+              <a:ext uri="{FF2B5EF4-FFF2-40B4-BE49-F238E27FC236}">
+                <a16:creationId xmlns:a16="http://schemas.microsoft.com/office/drawing/2014/main" id="{D5155137-1F8F-B30B-6371-056BD66E46D4}"/>
+              </a:ext>
+            </a:extLst>
+          </p:cNvPr>
+          <p:cNvSpPr/>
+          <p:nvPr/>
+        </p:nvSpPr>
+        <p:spPr>
+          <a:xfrm>
+            <a:off x="4290919" y="133926"/>
+            <a:ext cx="3406959" cy="701963"/>
+          </a:xfrm>
+          <a:prstGeom prst="rect">
+            <a:avLst/>
+          </a:prstGeom>
+        </p:spPr>
+        <p:style>
+          <a:lnRef idx="2">
+            <a:schemeClr val="accent1">
+              <a:shade val="15000"/>
+            </a:schemeClr>
+          </a:lnRef>
+          <a:fillRef idx="1">
+            <a:schemeClr val="accent1"/>
+          </a:fillRef>
+          <a:effectRef idx="0">
+            <a:schemeClr val="accent1"/>
+          </a:effectRef>
+          <a:fontRef idx="minor">
+            <a:schemeClr val="lt1"/>
+          </a:fontRef>
+        </p:style>
+        <p:txBody>
+          <a:bodyPr rtlCol="0" anchor="ctr"/>
+          <a:lstStyle/>
+          <a:p>
+            <a:pPr algn="ctr"/>
+            <a:r>
+              <a:rPr lang="en-US" dirty="0"/>
+              <a:t>Graphical Descriptions Of Data</a:t>
+            </a:r>
+          </a:p>
+        </p:txBody>
+      </p:sp>
+      <p:cxnSp>
+        <p:nvCxnSpPr>
+          <p:cNvPr id="12" name="Connector: Elbow 11">
+            <a:extLst>
+              <a:ext uri="{FF2B5EF4-FFF2-40B4-BE49-F238E27FC236}">
+                <a16:creationId xmlns:a16="http://schemas.microsoft.com/office/drawing/2014/main" id="{0E4B24D7-47EA-F860-D406-1737EE3EAC68}"/>
+              </a:ext>
+            </a:extLst>
+          </p:cNvPr>
+          <p:cNvCxnSpPr>
+            <a:cxnSpLocks/>
+            <a:stCxn id="25" idx="1"/>
+            <a:endCxn id="6" idx="0"/>
+          </p:cNvCxnSpPr>
+          <p:nvPr/>
+        </p:nvCxnSpPr>
+        <p:spPr>
+          <a:xfrm rot="10800000" flipV="1">
+            <a:off x="2711503" y="1524062"/>
+            <a:ext cx="1671779" cy="977081"/>
+          </a:xfrm>
+          <a:prstGeom prst="bentConnector2">
+            <a:avLst/>
+          </a:prstGeom>
+          <a:ln w="76200">
+            <a:tailEnd type="triangle"/>
+          </a:ln>
+        </p:spPr>
+        <p:style>
+          <a:lnRef idx="1">
+            <a:schemeClr val="accent1"/>
+          </a:lnRef>
+          <a:fillRef idx="0">
+            <a:schemeClr val="accent1"/>
+          </a:fillRef>
+          <a:effectRef idx="0">
+            <a:schemeClr val="accent1"/>
+          </a:effectRef>
+          <a:fontRef idx="minor">
+            <a:schemeClr val="tx1"/>
+          </a:fontRef>
+        </p:style>
+      </p:cxnSp>
+      <p:cxnSp>
+        <p:nvCxnSpPr>
+          <p:cNvPr id="14" name="Connector: Elbow 13">
+            <a:extLst>
+              <a:ext uri="{FF2B5EF4-FFF2-40B4-BE49-F238E27FC236}">
+                <a16:creationId xmlns:a16="http://schemas.microsoft.com/office/drawing/2014/main" id="{C3A0F894-932E-A39B-EE28-C0F756836744}"/>
+              </a:ext>
+            </a:extLst>
+          </p:cNvPr>
+          <p:cNvCxnSpPr>
+            <a:cxnSpLocks/>
+            <a:stCxn id="25" idx="3"/>
+            <a:endCxn id="7" idx="0"/>
+          </p:cNvCxnSpPr>
+          <p:nvPr/>
+        </p:nvCxnSpPr>
+        <p:spPr>
+          <a:xfrm>
+            <a:off x="7790240" y="1524063"/>
+            <a:ext cx="1752918" cy="990935"/>
+          </a:xfrm>
+          <a:prstGeom prst="bentConnector2">
+            <a:avLst/>
+          </a:prstGeom>
+          <a:ln w="76200">
+            <a:tailEnd type="triangle"/>
+          </a:ln>
+        </p:spPr>
+        <p:style>
+          <a:lnRef idx="1">
+            <a:schemeClr val="accent1"/>
+          </a:lnRef>
+          <a:fillRef idx="0">
+            <a:schemeClr val="accent1"/>
+          </a:fillRef>
+          <a:effectRef idx="0">
+            <a:schemeClr val="accent1"/>
+          </a:effectRef>
+          <a:fontRef idx="minor">
+            <a:schemeClr val="tx1"/>
+          </a:fontRef>
+        </p:style>
+      </p:cxnSp>
+      <p:sp>
+        <p:nvSpPr>
+          <p:cNvPr id="15" name="Rectangle 14">
+            <a:extLst>
+              <a:ext uri="{FF2B5EF4-FFF2-40B4-BE49-F238E27FC236}">
+                <a16:creationId xmlns:a16="http://schemas.microsoft.com/office/drawing/2014/main" id="{BB470C11-E3DA-41FB-321D-DF57E25C9C0E}"/>
+              </a:ext>
+            </a:extLst>
+          </p:cNvPr>
+          <p:cNvSpPr/>
+          <p:nvPr/>
+        </p:nvSpPr>
+        <p:spPr>
+          <a:xfrm>
+            <a:off x="4392520" y="4692471"/>
+            <a:ext cx="3406959" cy="701963"/>
+          </a:xfrm>
+          <a:prstGeom prst="rect">
+            <a:avLst/>
+          </a:prstGeom>
+        </p:spPr>
+        <p:style>
+          <a:lnRef idx="2">
+            <a:schemeClr val="accent1">
+              <a:shade val="15000"/>
+            </a:schemeClr>
+          </a:lnRef>
+          <a:fillRef idx="1">
+            <a:schemeClr val="accent1"/>
+          </a:fillRef>
+          <a:effectRef idx="0">
+            <a:schemeClr val="accent1"/>
+          </a:effectRef>
+          <a:fontRef idx="minor">
+            <a:schemeClr val="lt1"/>
+          </a:fontRef>
+        </p:style>
+        <p:txBody>
+          <a:bodyPr rtlCol="0" anchor="ctr"/>
+          <a:lstStyle/>
+          <a:p>
+            <a:pPr algn="ctr"/>
+            <a:r>
+              <a:rPr lang="en-US" sz="2400" dirty="0"/>
+              <a:t>Describe key features of the distribution</a:t>
+            </a:r>
+          </a:p>
+        </p:txBody>
+      </p:sp>
+      <p:sp>
+        <p:nvSpPr>
+          <p:cNvPr id="16" name="TextBox 15">
+            <a:extLst>
+              <a:ext uri="{FF2B5EF4-FFF2-40B4-BE49-F238E27FC236}">
+                <a16:creationId xmlns:a16="http://schemas.microsoft.com/office/drawing/2014/main" id="{DC7F01EC-1027-1A76-3043-99F0E76481CA}"/>
+              </a:ext>
+            </a:extLst>
+          </p:cNvPr>
+          <p:cNvSpPr txBox="1"/>
+          <p:nvPr/>
+        </p:nvSpPr>
+        <p:spPr>
+          <a:xfrm>
+            <a:off x="4404748" y="5567343"/>
+            <a:ext cx="3394731" cy="1200329"/>
+          </a:xfrm>
+          <a:prstGeom prst="rect">
+            <a:avLst/>
+          </a:prstGeom>
+          <a:solidFill>
+            <a:schemeClr val="bg1"/>
+          </a:solidFill>
+        </p:spPr>
+        <p:style>
+          <a:lnRef idx="2">
+            <a:schemeClr val="accent1"/>
+          </a:lnRef>
+          <a:fillRef idx="1">
+            <a:schemeClr val="lt1"/>
+          </a:fillRef>
+          <a:effectRef idx="0">
+            <a:schemeClr val="accent1"/>
+          </a:effectRef>
+          <a:fontRef idx="minor">
+            <a:schemeClr val="dk1"/>
+          </a:fontRef>
+        </p:style>
+        <p:txBody>
+          <a:bodyPr wrap="square" rtlCol="0">
+            <a:spAutoFit/>
+          </a:bodyPr>
+          <a:lstStyle/>
+          <a:p>
+            <a:pPr marL="285750" indent="-285750">
+              <a:buFont typeface="Arial" panose="020B0604020202020204" pitchFamily="34" charset="0"/>
+              <a:buChar char="•"/>
+            </a:pPr>
+            <a:r>
+              <a:rPr lang="en-US" dirty="0"/>
+              <a:t>Modal Category</a:t>
+            </a:r>
+          </a:p>
+          <a:p>
+            <a:pPr marL="285750" indent="-285750">
+              <a:buFont typeface="Arial" panose="020B0604020202020204" pitchFamily="34" charset="0"/>
+              <a:buChar char="•"/>
+            </a:pPr>
+            <a:r>
+              <a:rPr lang="en-US" dirty="0"/>
+              <a:t>Shape</a:t>
+            </a:r>
+          </a:p>
+          <a:p>
+            <a:pPr marL="285750" indent="-285750">
+              <a:buFont typeface="Arial" panose="020B0604020202020204" pitchFamily="34" charset="0"/>
+              <a:buChar char="•"/>
+            </a:pPr>
+            <a:r>
+              <a:rPr lang="en-US" dirty="0"/>
+              <a:t>Center</a:t>
+            </a:r>
+          </a:p>
+          <a:p>
+            <a:pPr marL="285750" indent="-285750">
+              <a:buFont typeface="Arial" panose="020B0604020202020204" pitchFamily="34" charset="0"/>
+              <a:buChar char="•"/>
+            </a:pPr>
+            <a:r>
+              <a:rPr lang="en-US" dirty="0"/>
+              <a:t>Variability</a:t>
+            </a:r>
+          </a:p>
+        </p:txBody>
+      </p:sp>
+      <p:cxnSp>
+        <p:nvCxnSpPr>
+          <p:cNvPr id="18" name="Connector: Elbow 17">
+            <a:extLst>
+              <a:ext uri="{FF2B5EF4-FFF2-40B4-BE49-F238E27FC236}">
+                <a16:creationId xmlns:a16="http://schemas.microsoft.com/office/drawing/2014/main" id="{433238C4-A2B4-5CCD-B93B-C3EEBA196CA4}"/>
+              </a:ext>
+            </a:extLst>
+          </p:cNvPr>
+          <p:cNvCxnSpPr>
+            <a:cxnSpLocks/>
+            <a:stCxn id="8" idx="2"/>
+            <a:endCxn id="15" idx="1"/>
+          </p:cNvCxnSpPr>
+          <p:nvPr/>
+        </p:nvCxnSpPr>
+        <p:spPr>
+          <a:xfrm rot="16200000" flipH="1">
+            <a:off x="3229723" y="3880656"/>
+            <a:ext cx="626100" cy="1699493"/>
+          </a:xfrm>
+          <a:prstGeom prst="bentConnector2">
+            <a:avLst/>
+          </a:prstGeom>
+          <a:ln w="76200">
+            <a:tailEnd type="triangle"/>
+          </a:ln>
+        </p:spPr>
+        <p:style>
+          <a:lnRef idx="1">
+            <a:schemeClr val="accent1"/>
+          </a:lnRef>
+          <a:fillRef idx="0">
+            <a:schemeClr val="accent1"/>
+          </a:fillRef>
+          <a:effectRef idx="0">
+            <a:schemeClr val="accent1"/>
+          </a:effectRef>
+          <a:fontRef idx="minor">
+            <a:schemeClr val="tx1"/>
+          </a:fontRef>
+        </p:style>
+      </p:cxnSp>
+      <p:cxnSp>
+        <p:nvCxnSpPr>
+          <p:cNvPr id="19" name="Connector: Elbow 18">
+            <a:extLst>
+              <a:ext uri="{FF2B5EF4-FFF2-40B4-BE49-F238E27FC236}">
+                <a16:creationId xmlns:a16="http://schemas.microsoft.com/office/drawing/2014/main" id="{BA6A9435-F7E6-7CDC-62E5-FCB2A9FCE741}"/>
+              </a:ext>
+            </a:extLst>
+          </p:cNvPr>
+          <p:cNvCxnSpPr>
+            <a:cxnSpLocks/>
+            <a:stCxn id="9" idx="2"/>
+            <a:endCxn id="15" idx="3"/>
+          </p:cNvCxnSpPr>
+          <p:nvPr/>
+        </p:nvCxnSpPr>
+        <p:spPr>
+          <a:xfrm rot="5400000">
+            <a:off x="8358269" y="3858563"/>
+            <a:ext cx="626101" cy="1743679"/>
+          </a:xfrm>
+          <a:prstGeom prst="bentConnector2">
+            <a:avLst/>
+          </a:prstGeom>
+          <a:ln w="76200">
+            <a:tailEnd type="triangle"/>
+          </a:ln>
+        </p:spPr>
+        <p:style>
+          <a:lnRef idx="1">
+            <a:schemeClr val="accent1"/>
+          </a:lnRef>
+          <a:fillRef idx="0">
+            <a:schemeClr val="accent1"/>
+          </a:fillRef>
+          <a:effectRef idx="0">
+            <a:schemeClr val="accent1"/>
+          </a:effectRef>
+          <a:fontRef idx="minor">
+            <a:schemeClr val="tx1"/>
+          </a:fontRef>
+        </p:style>
+      </p:cxnSp>
+      <p:sp>
+        <p:nvSpPr>
+          <p:cNvPr id="9" name="TextBox 8">
+            <a:extLst>
+              <a:ext uri="{FF2B5EF4-FFF2-40B4-BE49-F238E27FC236}">
+                <a16:creationId xmlns:a16="http://schemas.microsoft.com/office/drawing/2014/main" id="{91966676-BC35-3C86-F6B0-3253A01BE201}"/>
+              </a:ext>
+            </a:extLst>
+          </p:cNvPr>
+          <p:cNvSpPr txBox="1"/>
+          <p:nvPr/>
+        </p:nvSpPr>
+        <p:spPr>
+          <a:xfrm>
+            <a:off x="7808717" y="3401689"/>
+            <a:ext cx="3468882" cy="1015663"/>
+          </a:xfrm>
+          <a:prstGeom prst="rect">
+            <a:avLst/>
+          </a:prstGeom>
+          <a:solidFill>
+            <a:schemeClr val="bg1"/>
+          </a:solidFill>
+        </p:spPr>
+        <p:style>
+          <a:lnRef idx="2">
+            <a:schemeClr val="accent1"/>
+          </a:lnRef>
+          <a:fillRef idx="1">
+            <a:schemeClr val="lt1"/>
+          </a:fillRef>
+          <a:effectRef idx="0">
+            <a:schemeClr val="accent1"/>
+          </a:effectRef>
+          <a:fontRef idx="minor">
+            <a:schemeClr val="dk1"/>
+          </a:fontRef>
+        </p:style>
+        <p:txBody>
+          <a:bodyPr wrap="square" rtlCol="0">
+            <a:spAutoFit/>
+          </a:bodyPr>
+          <a:lstStyle/>
+          <a:p>
+            <a:pPr marL="285750" indent="-285750">
+              <a:buFont typeface="Arial" panose="020B0604020202020204" pitchFamily="34" charset="0"/>
+              <a:buChar char="•"/>
+            </a:pPr>
+            <a:r>
+              <a:rPr lang="en-US" sz="2000" dirty="0"/>
+              <a:t>Dot Plot</a:t>
+            </a:r>
+          </a:p>
+          <a:p>
+            <a:pPr marL="285750" indent="-285750">
+              <a:buFont typeface="Arial" panose="020B0604020202020204" pitchFamily="34" charset="0"/>
+              <a:buChar char="•"/>
+            </a:pPr>
+            <a:r>
+              <a:rPr lang="en-US" sz="2000" dirty="0"/>
+              <a:t>Stem Chart</a:t>
+            </a:r>
+          </a:p>
+          <a:p>
+            <a:pPr marL="285750" indent="-285750">
+              <a:buFont typeface="Arial" panose="020B0604020202020204" pitchFamily="34" charset="0"/>
+              <a:buChar char="•"/>
+            </a:pPr>
+            <a:r>
+              <a:rPr lang="en-US" sz="2000" dirty="0">
+                <a:solidFill>
+                  <a:schemeClr val="tx1"/>
+                </a:solidFill>
+              </a:rPr>
+              <a:t>Histogram</a:t>
+            </a:r>
+            <a:r>
+              <a:rPr lang="en-US" sz="2000" dirty="0"/>
+              <a:t> </a:t>
+            </a:r>
+          </a:p>
+        </p:txBody>
+      </p:sp>
+      <p:sp>
+        <p:nvSpPr>
+          <p:cNvPr id="25" name="Rectangle: Rounded Corners 24">
+            <a:extLst>
+              <a:ext uri="{FF2B5EF4-FFF2-40B4-BE49-F238E27FC236}">
+                <a16:creationId xmlns:a16="http://schemas.microsoft.com/office/drawing/2014/main" id="{C40DF31A-AF91-AF49-1BB8-8D6E76C29BA4}"/>
+              </a:ext>
+            </a:extLst>
+          </p:cNvPr>
+          <p:cNvSpPr/>
+          <p:nvPr/>
+        </p:nvSpPr>
+        <p:spPr>
+          <a:xfrm>
+            <a:off x="4383281" y="1173081"/>
+            <a:ext cx="3406959" cy="701963"/>
+          </a:xfrm>
+          <a:prstGeom prst="roundRect">
+            <a:avLst/>
+          </a:prstGeom>
+        </p:spPr>
+        <p:style>
+          <a:lnRef idx="2">
+            <a:schemeClr val="accent1">
+              <a:shade val="15000"/>
+            </a:schemeClr>
+          </a:lnRef>
+          <a:fillRef idx="1">
+            <a:schemeClr val="accent1"/>
+          </a:fillRef>
+          <a:effectRef idx="0">
+            <a:schemeClr val="accent1"/>
+          </a:effectRef>
+          <a:fontRef idx="minor">
+            <a:schemeClr val="lt1"/>
+          </a:fontRef>
+        </p:style>
+        <p:txBody>
+          <a:bodyPr rtlCol="0" anchor="ctr"/>
+          <a:lstStyle/>
+          <a:p>
+            <a:pPr algn="ctr"/>
+            <a:r>
+              <a:rPr lang="en-US" dirty="0"/>
+              <a:t>Frequency Tables</a:t>
+            </a:r>
+          </a:p>
+        </p:txBody>
+      </p:sp>
+      <p:sp>
+        <p:nvSpPr>
+          <p:cNvPr id="28" name="Arrow: Down 27">
+            <a:extLst>
+              <a:ext uri="{FF2B5EF4-FFF2-40B4-BE49-F238E27FC236}">
+                <a16:creationId xmlns:a16="http://schemas.microsoft.com/office/drawing/2014/main" id="{81F32552-BCAB-7E67-B88C-5F1E3B211CC8}"/>
+              </a:ext>
+            </a:extLst>
+          </p:cNvPr>
+          <p:cNvSpPr/>
+          <p:nvPr/>
+        </p:nvSpPr>
+        <p:spPr>
+          <a:xfrm>
+            <a:off x="5886554" y="866958"/>
+            <a:ext cx="418890" cy="337127"/>
+          </a:xfrm>
+          <a:prstGeom prst="downArrow">
+            <a:avLst/>
+          </a:prstGeom>
+          <a:solidFill>
+            <a:schemeClr val="accent1">
+              <a:lumMod val="40000"/>
+              <a:lumOff val="60000"/>
+            </a:schemeClr>
+          </a:solidFill>
+        </p:spPr>
+        <p:style>
+          <a:lnRef idx="2">
+            <a:schemeClr val="accent1">
+              <a:shade val="15000"/>
+            </a:schemeClr>
+          </a:lnRef>
+          <a:fillRef idx="1">
+            <a:schemeClr val="accent1"/>
+          </a:fillRef>
+          <a:effectRef idx="0">
+            <a:schemeClr val="accent1"/>
+          </a:effectRef>
+          <a:fontRef idx="minor">
+            <a:schemeClr val="lt1"/>
+          </a:fontRef>
+        </p:style>
+        <p:txBody>
+          <a:bodyPr rtlCol="0" anchor="ctr"/>
+          <a:lstStyle/>
+          <a:p>
+            <a:pPr algn="ctr"/>
+            <a:endParaRPr lang="en-US"/>
+          </a:p>
+        </p:txBody>
+      </p:sp>
+      <p:cxnSp>
+        <p:nvCxnSpPr>
+          <p:cNvPr id="30" name="Straight Arrow Connector 29">
+            <a:extLst>
+              <a:ext uri="{FF2B5EF4-FFF2-40B4-BE49-F238E27FC236}">
+                <a16:creationId xmlns:a16="http://schemas.microsoft.com/office/drawing/2014/main" id="{291E9938-8966-4DC4-C588-135EC5244D53}"/>
+              </a:ext>
+            </a:extLst>
+          </p:cNvPr>
+          <p:cNvCxnSpPr>
+            <a:stCxn id="25" idx="2"/>
+            <a:endCxn id="15" idx="0"/>
+          </p:cNvCxnSpPr>
+          <p:nvPr/>
+        </p:nvCxnSpPr>
+        <p:spPr>
+          <a:xfrm>
+            <a:off x="6086761" y="1875044"/>
+            <a:ext cx="9239" cy="2817427"/>
+          </a:xfrm>
+          <a:prstGeom prst="straightConnector1">
+            <a:avLst/>
+          </a:prstGeom>
+          <a:ln w="76200">
+            <a:tailEnd type="triangle"/>
+          </a:ln>
+        </p:spPr>
+        <p:style>
+          <a:lnRef idx="1">
+            <a:schemeClr val="accent1"/>
+          </a:lnRef>
+          <a:fillRef idx="0">
+            <a:schemeClr val="accent1"/>
+          </a:fillRef>
+          <a:effectRef idx="0">
+            <a:schemeClr val="accent1"/>
+          </a:effectRef>
+          <a:fontRef idx="minor">
+            <a:schemeClr val="tx1"/>
+          </a:fontRef>
+        </p:style>
+      </p:cxnSp>
+    </p:spTree>
+    <p:extLst>
+      <p:ext uri="{BB962C8B-B14F-4D97-AF65-F5344CB8AC3E}">
+        <p14:creationId xmlns:p14="http://schemas.microsoft.com/office/powerpoint/2010/main" val="779196973"/>
       </p:ext>
     </p:extLst>
   </p:cSld>
@@ -12392,3618 +12379,6 @@
 </p:sld>
 </file>
 
-<file path=ppt/slides/slide20.xml><?xml version="1.0" encoding="utf-8"?>
-<p:sld xmlns:a="http://schemas.openxmlformats.org/drawingml/2006/main" xmlns:r="http://schemas.openxmlformats.org/officeDocument/2006/relationships" xmlns:p="http://schemas.openxmlformats.org/presentationml/2006/main">
-  <p:cSld>
-    <p:spTree>
-      <p:nvGrpSpPr>
-        <p:cNvPr id="1" name=""/>
-        <p:cNvGrpSpPr/>
-        <p:nvPr/>
-      </p:nvGrpSpPr>
-      <p:grpSpPr>
-        <a:xfrm>
-          <a:off x="0" y="0"/>
-          <a:ext cx="0" cy="0"/>
-          <a:chOff x="0" y="0"/>
-          <a:chExt cx="0" cy="0"/>
-        </a:xfrm>
-      </p:grpSpPr>
-      <p:sp>
-        <p:nvSpPr>
-          <p:cNvPr id="900" name="Title 1"/>
-          <p:cNvSpPr>
-            <a:spLocks noGrp="1"/>
-          </p:cNvSpPr>
-          <p:nvPr>
-            <p:ph type="title"/>
-          </p:nvPr>
-        </p:nvSpPr>
-        <p:spPr>
-          <a:xfrm>
-            <a:off x="-8000000" y="0"/>
-            <a:ext cx="6000000" cy="800000"/>
-          </a:xfrm>
-        </p:spPr>
-        <p:txBody>
-          <a:bodyPr>
-            <a:normAutofit/>
-          </a:bodyPr>
-          <a:lstStyle/>
-          <a:p>
-            <a:r>
-              <a:rPr lang="en-US" sz="1800" dirty="0"/>
-              <a:t>Bar graph and pie chart of the teen survey</a:t>
-            </a:r>
-          </a:p>
-        </p:txBody>
-      </p:sp>
-      <p:pic>
-        <p:nvPicPr>
-          <p:cNvPr id="5" name="Picture 4" descr="Bar graph of the teen survey responses in decreasing order - Never, Rarely, Sometimes, Often - with relative frequency on the vertical axis.">
-            <a:extLst>
-              <a:ext uri="{FF2B5EF4-FFF2-40B4-BE49-F238E27FC236}">
-                <a16:creationId xmlns:a16="http://schemas.microsoft.com/office/drawing/2014/main" id="{7EC6A261-0EA6-9E96-37C0-CB6898B1BD89}"/>
-              </a:ext>
-            </a:extLst>
-          </p:cNvPr>
-          <p:cNvPicPr>
-            <a:picLocks noChangeAspect="1"/>
-          </p:cNvPicPr>
-          <p:nvPr/>
-        </p:nvPicPr>
-        <p:blipFill>
-          <a:blip r:embed="rId2"/>
-          <a:stretch>
-            <a:fillRect/>
-          </a:stretch>
-        </p:blipFill>
-        <p:spPr>
-          <a:xfrm>
-            <a:off x="204974" y="1704974"/>
-            <a:ext cx="5891026" cy="3990975"/>
-          </a:xfrm>
-          <a:prstGeom prst="rect">
-            <a:avLst/>
-          </a:prstGeom>
-        </p:spPr>
-      </p:pic>
-      <p:pic>
-        <p:nvPicPr>
-          <p:cNvPr id="7" name="Picture 6" descr="Pie chart of the teen survey with every slice labelled in place: Never 0.39, Rarely 0.29, Sometimes 0.24, Often 0.08.">
-            <a:extLst>
-              <a:ext uri="{FF2B5EF4-FFF2-40B4-BE49-F238E27FC236}">
-                <a16:creationId xmlns:a16="http://schemas.microsoft.com/office/drawing/2014/main" id="{FAAAEAA6-C6FF-BCA1-1B38-7E475B4066C9}"/>
-              </a:ext>
-            </a:extLst>
-          </p:cNvPr>
-          <p:cNvPicPr>
-            <a:picLocks noChangeAspect="1"/>
-          </p:cNvPicPr>
-          <p:nvPr/>
-        </p:nvPicPr>
-        <p:blipFill>
-          <a:blip r:embed="rId3"/>
-          <a:stretch>
-            <a:fillRect/>
-          </a:stretch>
-        </p:blipFill>
-        <p:spPr>
-          <a:xfrm>
-            <a:off x="6200774" y="1478046"/>
-            <a:ext cx="5703693" cy="4217903"/>
-          </a:xfrm>
-          <a:prstGeom prst="rect">
-            <a:avLst/>
-          </a:prstGeom>
-        </p:spPr>
-      </p:pic>
-    </p:spTree>
-    <p:extLst>
-      <p:ext uri="{BB962C8B-B14F-4D97-AF65-F5344CB8AC3E}">
-        <p14:creationId xmlns:p14="http://schemas.microsoft.com/office/powerpoint/2010/main" val="2676625562"/>
-      </p:ext>
-    </p:extLst>
-  </p:cSld>
-  <p:clrMapOvr>
-    <a:masterClrMapping/>
-  </p:clrMapOvr>
-</p:sld>
-</file>
-
-<file path=ppt/slides/slide21.xml><?xml version="1.0" encoding="utf-8"?>
-<p:sld xmlns:a="http://schemas.openxmlformats.org/drawingml/2006/main" xmlns:r="http://schemas.openxmlformats.org/officeDocument/2006/relationships" xmlns:p="http://schemas.openxmlformats.org/presentationml/2006/main">
-  <p:cSld>
-    <p:spTree>
-      <p:nvGrpSpPr>
-        <p:cNvPr id="1" name=""/>
-        <p:cNvGrpSpPr/>
-        <p:nvPr/>
-      </p:nvGrpSpPr>
-      <p:grpSpPr>
-        <a:xfrm>
-          <a:off x="0" y="0"/>
-          <a:ext cx="0" cy="0"/>
-          <a:chOff x="0" y="0"/>
-          <a:chExt cx="0" cy="0"/>
-        </a:xfrm>
-      </p:grpSpPr>
-      <p:sp>
-        <p:nvSpPr>
-          <p:cNvPr id="3" name="Content Placeholder 2">
-            <a:extLst>
-              <a:ext uri="{FF2B5EF4-FFF2-40B4-BE49-F238E27FC236}">
-                <a16:creationId xmlns:a16="http://schemas.microsoft.com/office/drawing/2014/main" id="{8F09458B-9FCD-C074-086C-F92B55C26D73}"/>
-              </a:ext>
-            </a:extLst>
-          </p:cNvPr>
-          <p:cNvSpPr>
-            <a:spLocks noGrp="1"/>
-          </p:cNvSpPr>
-          <p:nvPr>
-            <p:ph idx="1"/>
-          </p:nvPr>
-        </p:nvSpPr>
-        <p:spPr/>
-        <p:txBody>
-          <a:bodyPr/>
-          <a:lstStyle/>
-          <a:p>
-            <a:r>
-              <a:rPr lang="en-US" b="1" dirty="0"/>
-              <a:t>Dot plots – </a:t>
-            </a:r>
-            <a:r>
-              <a:rPr lang="en-US" dirty="0"/>
-              <a:t>shows a dot for each observation placed above the value for that observation </a:t>
-            </a:r>
-          </a:p>
-          <a:p>
-            <a:pPr marL="0" indent="0">
-              <a:buNone/>
-            </a:pPr>
-            <a:endParaRPr lang="en-US" dirty="0"/>
-          </a:p>
-          <a:p>
-            <a:pPr marL="457200" lvl="1" indent="0">
-              <a:buNone/>
-            </a:pPr>
-            <a:r>
-              <a:rPr lang="en-US" b="1" dirty="0"/>
-              <a:t>Steps to construct a dot plot</a:t>
-            </a:r>
-          </a:p>
-          <a:p>
-            <a:pPr marL="914400" lvl="1" indent="-457200">
-              <a:buFont typeface="+mj-lt"/>
-              <a:buAutoNum type="arabicPeriod"/>
-            </a:pPr>
-            <a:r>
-              <a:rPr lang="en-US" b="1" dirty="0"/>
-              <a:t>Draw a horizontal line and mark the line with regular values of the variable</a:t>
-            </a:r>
-          </a:p>
-          <a:p>
-            <a:pPr marL="914400" lvl="1" indent="-457200">
-              <a:buFont typeface="+mj-lt"/>
-              <a:buAutoNum type="arabicPeriod"/>
-            </a:pPr>
-            <a:r>
-              <a:rPr lang="en-US" b="1" dirty="0"/>
-              <a:t>For each observation, place a dot above its value on the number line</a:t>
-            </a:r>
-          </a:p>
-          <a:p>
-            <a:pPr lvl="2">
-              <a:buFontTx/>
-              <a:buChar char="-"/>
-            </a:pPr>
-            <a:r>
-              <a:rPr lang="en-US" dirty="0"/>
-              <a:t>Works best with quantitative discrete data</a:t>
-            </a:r>
-          </a:p>
-          <a:p>
-            <a:pPr lvl="2">
-              <a:buFontTx/>
-              <a:buChar char="-"/>
-            </a:pPr>
-            <a:r>
-              <a:rPr lang="en-US" dirty="0"/>
-              <a:t>Doesn’t work well if the variable is continuous and takes on many distinct values…</a:t>
-            </a:r>
-          </a:p>
-          <a:p>
-            <a:pPr lvl="2">
-              <a:buFontTx/>
-              <a:buChar char="-"/>
-            </a:pPr>
-            <a:r>
-              <a:rPr lang="en-US" dirty="0"/>
-              <a:t>For continuous data, the values may need to be round to the nearest tenth or integer</a:t>
-            </a:r>
-          </a:p>
-          <a:p>
-            <a:pPr marL="457200" lvl="1" indent="0">
-              <a:buNone/>
-            </a:pPr>
-            <a:endParaRPr lang="en-US" dirty="0"/>
-          </a:p>
-        </p:txBody>
-      </p:sp>
-      <p:sp>
-        <p:nvSpPr>
-          <p:cNvPr id="4" name="Title 1">
-            <a:extLst>
-              <a:ext uri="{FF2B5EF4-FFF2-40B4-BE49-F238E27FC236}">
-                <a16:creationId xmlns:a16="http://schemas.microsoft.com/office/drawing/2014/main" id="{31FBAE74-D6F2-09F5-B523-7C2CC99DDC64}"/>
-              </a:ext>
-            </a:extLst>
-          </p:cNvPr>
-          <p:cNvSpPr>
-            <a:spLocks noGrp="1"/>
-          </p:cNvSpPr>
-          <p:nvPr>
-            <p:ph type="title"/>
-          </p:nvPr>
-        </p:nvSpPr>
-        <p:spPr>
-          <a:xfrm>
-            <a:off x="838200" y="365125"/>
-            <a:ext cx="10515600" cy="1325563"/>
-          </a:xfrm>
-        </p:spPr>
-        <p:txBody>
-          <a:bodyPr>
-            <a:normAutofit/>
-          </a:bodyPr>
-          <a:lstStyle/>
-          <a:p>
-            <a:r>
-              <a:rPr lang="en-US" sz="4000" dirty="0"/>
-              <a:t>Visualizing Distributions: Quantitative Variables </a:t>
-            </a:r>
-          </a:p>
-        </p:txBody>
-      </p:sp>
-    </p:spTree>
-    <p:extLst>
-      <p:ext uri="{BB962C8B-B14F-4D97-AF65-F5344CB8AC3E}">
-        <p14:creationId xmlns:p14="http://schemas.microsoft.com/office/powerpoint/2010/main" val="3307896714"/>
-      </p:ext>
-    </p:extLst>
-  </p:cSld>
-  <p:clrMapOvr>
-    <a:masterClrMapping/>
-  </p:clrMapOvr>
-</p:sld>
-</file>
-
-<file path=ppt/slides/slide22.xml><?xml version="1.0" encoding="utf-8"?>
-<p:sld xmlns:a="http://schemas.openxmlformats.org/drawingml/2006/main" xmlns:r="http://schemas.openxmlformats.org/officeDocument/2006/relationships" xmlns:p="http://schemas.openxmlformats.org/presentationml/2006/main">
-  <p:cSld>
-    <p:spTree>
-      <p:nvGrpSpPr>
-        <p:cNvPr id="1" name=""/>
-        <p:cNvGrpSpPr/>
-        <p:nvPr/>
-      </p:nvGrpSpPr>
-      <p:grpSpPr>
-        <a:xfrm>
-          <a:off x="0" y="0"/>
-          <a:ext cx="0" cy="0"/>
-          <a:chOff x="0" y="0"/>
-          <a:chExt cx="0" cy="0"/>
-        </a:xfrm>
-      </p:grpSpPr>
-      <p:sp>
-        <p:nvSpPr>
-          <p:cNvPr id="900" name="Title 1"/>
-          <p:cNvSpPr>
-            <a:spLocks noGrp="1"/>
-          </p:cNvSpPr>
-          <p:nvPr>
-            <p:ph type="title"/>
-          </p:nvPr>
-        </p:nvSpPr>
-        <p:spPr>
-          <a:xfrm>
-            <a:off x="-8000000" y="0"/>
-            <a:ext cx="6000000" cy="800000"/>
-          </a:xfrm>
-        </p:spPr>
-        <p:txBody>
-          <a:bodyPr>
-            <a:normAutofit/>
-          </a:bodyPr>
-          <a:lstStyle/>
-          <a:p>
-            <a:r>
-              <a:rPr lang="en-US" sz="1800" dirty="0"/>
-              <a:t>Dot plot of Old Faithful waiting times</a:t>
-            </a:r>
-          </a:p>
-        </p:txBody>
-      </p:sp>
-      <p:pic>
-        <p:nvPicPr>
-          <p:cNvPr id="4" name="Picture 3" descr="Dot plot of Old Faithful waiting times, one dot per eruption. The dots form two clusters, one around 50 to 55 minutes and a larger one around 78 to 83 minutes, with a thin gap near 67 minutes.">
-            <a:extLst>
-              <a:ext uri="{FF2B5EF4-FFF2-40B4-BE49-F238E27FC236}">
-                <a16:creationId xmlns:a16="http://schemas.microsoft.com/office/drawing/2014/main" id="{93CDB88E-8525-C007-528D-F06C6B57452E}"/>
-              </a:ext>
-            </a:extLst>
-          </p:cNvPr>
-          <p:cNvPicPr>
-            <a:picLocks noChangeAspect="1"/>
-          </p:cNvPicPr>
-          <p:nvPr/>
-        </p:nvPicPr>
-        <p:blipFill>
-          <a:blip r:embed="rId2"/>
-          <a:stretch>
-            <a:fillRect/>
-          </a:stretch>
-        </p:blipFill>
-        <p:spPr>
-          <a:xfrm>
-            <a:off x="1293091" y="176156"/>
-            <a:ext cx="9865915" cy="6681844"/>
-          </a:xfrm>
-          <a:prstGeom prst="rect">
-            <a:avLst/>
-          </a:prstGeom>
-        </p:spPr>
-      </p:pic>
-    </p:spTree>
-    <p:extLst>
-      <p:ext uri="{BB962C8B-B14F-4D97-AF65-F5344CB8AC3E}">
-        <p14:creationId xmlns:p14="http://schemas.microsoft.com/office/powerpoint/2010/main" val="297073414"/>
-      </p:ext>
-    </p:extLst>
-  </p:cSld>
-  <p:clrMapOvr>
-    <a:masterClrMapping/>
-  </p:clrMapOvr>
-</p:sld>
-</file>
-
-<file path=ppt/slides/slide23.xml><?xml version="1.0" encoding="utf-8"?>
-<p:sld xmlns:a="http://schemas.openxmlformats.org/drawingml/2006/main" xmlns:r="http://schemas.openxmlformats.org/officeDocument/2006/relationships" xmlns:p="http://schemas.openxmlformats.org/presentationml/2006/main">
-  <p:cSld>
-    <p:spTree>
-      <p:nvGrpSpPr>
-        <p:cNvPr id="1" name=""/>
-        <p:cNvGrpSpPr/>
-        <p:nvPr/>
-      </p:nvGrpSpPr>
-      <p:grpSpPr>
-        <a:xfrm>
-          <a:off x="0" y="0"/>
-          <a:ext cx="0" cy="0"/>
-          <a:chOff x="0" y="0"/>
-          <a:chExt cx="0" cy="0"/>
-        </a:xfrm>
-      </p:grpSpPr>
-      <p:sp>
-        <p:nvSpPr>
-          <p:cNvPr id="2" name="Title 1">
-            <a:extLst>
-              <a:ext uri="{FF2B5EF4-FFF2-40B4-BE49-F238E27FC236}">
-                <a16:creationId xmlns:a16="http://schemas.microsoft.com/office/drawing/2014/main" id="{A2418BEF-F19E-DBAD-FF9A-8FDF1FBD3654}"/>
-              </a:ext>
-            </a:extLst>
-          </p:cNvPr>
-          <p:cNvSpPr>
-            <a:spLocks noGrp="1"/>
-          </p:cNvSpPr>
-          <p:nvPr>
-            <p:ph type="title"/>
-          </p:nvPr>
-        </p:nvSpPr>
-        <p:spPr>
-          <a:xfrm>
-            <a:off x="838200" y="365126"/>
-            <a:ext cx="10515600" cy="825500"/>
-          </a:xfrm>
-        </p:spPr>
-        <p:txBody>
-          <a:bodyPr>
-            <a:normAutofit/>
-          </a:bodyPr>
-          <a:lstStyle/>
-          <a:p>
-            <a:r>
-              <a:rPr lang="en-US" sz="4000" dirty="0"/>
-              <a:t>Example: MPG and Engine Cylinders</a:t>
-            </a:r>
-          </a:p>
-        </p:txBody>
-      </p:sp>
-      <p:pic>
-        <p:nvPicPr>
-          <p:cNvPr id="6" name="Picture 5" descr="Table of the car data: observation number, miles per gallon, cylinders and model, from the Mazda RX4 at 21.0 mpg with 6 cylinders through to the Volvo 142E at 21.4 mpg with 4 cylinders, 32 cars in all.">
-            <a:extLst>
-              <a:ext uri="{FF2B5EF4-FFF2-40B4-BE49-F238E27FC236}">
-                <a16:creationId xmlns:a16="http://schemas.microsoft.com/office/drawing/2014/main" id="{60B6F122-13F2-0495-B148-F9F908F242F4}"/>
-              </a:ext>
-            </a:extLst>
-          </p:cNvPr>
-          <p:cNvPicPr>
-            <a:picLocks noChangeAspect="1"/>
-          </p:cNvPicPr>
-          <p:nvPr/>
-        </p:nvPicPr>
-        <p:blipFill>
-          <a:blip r:embed="rId2"/>
-          <a:stretch>
-            <a:fillRect/>
-          </a:stretch>
-        </p:blipFill>
-        <p:spPr>
-          <a:xfrm>
-            <a:off x="4376201" y="1764176"/>
-            <a:ext cx="7687748" cy="3943900"/>
-          </a:xfrm>
-          <a:prstGeom prst="rect">
-            <a:avLst/>
-          </a:prstGeom>
-        </p:spPr>
-      </p:pic>
-      <p:pic>
-        <p:nvPicPr>
-          <p:cNvPr id="1026" name="Picture 2" descr="Cutaway illustration of a car engine, labelling the camshaft, pistons, valves, crankshaft and flywheel.">
-            <a:extLst>
-              <a:ext uri="{FF2B5EF4-FFF2-40B4-BE49-F238E27FC236}">
-                <a16:creationId xmlns:a16="http://schemas.microsoft.com/office/drawing/2014/main" id="{E678D63E-B7D3-7D74-1055-221F6D88A1C9}"/>
-              </a:ext>
-            </a:extLst>
-          </p:cNvPr>
-          <p:cNvPicPr>
-            <a:picLocks noChangeAspect="1" noChangeArrowheads="1"/>
-          </p:cNvPicPr>
-          <p:nvPr/>
-        </p:nvPicPr>
-        <p:blipFill>
-          <a:blip r:embed="rId3">
-            <a:extLst>
-              <a:ext uri="{28A0092B-C50C-407E-A947-70E740481C1C}">
-                <a14:useLocalDpi xmlns:a14="http://schemas.microsoft.com/office/drawing/2010/main" val="0"/>
-              </a:ext>
-            </a:extLst>
-          </a:blip>
-          <a:srcRect/>
-          <a:stretch>
-            <a:fillRect/>
-          </a:stretch>
-        </p:blipFill>
-        <p:spPr bwMode="auto">
-          <a:xfrm>
-            <a:off x="268288" y="1764176"/>
-            <a:ext cx="3979862" cy="4331823"/>
-          </a:xfrm>
-          <a:prstGeom prst="rect">
-            <a:avLst/>
-          </a:prstGeom>
-          <a:noFill/>
-          <a:extLst>
-            <a:ext uri="{909E8E84-426E-40DD-AFC4-6F175D3DCCD1}">
-              <a14:hiddenFill xmlns:a14="http://schemas.microsoft.com/office/drawing/2010/main">
-                <a:solidFill>
-                  <a:srgbClr val="FFFFFF"/>
-                </a:solidFill>
-              </a14:hiddenFill>
-            </a:ext>
-          </a:extLst>
-        </p:spPr>
-      </p:pic>
-    </p:spTree>
-    <p:extLst>
-      <p:ext uri="{BB962C8B-B14F-4D97-AF65-F5344CB8AC3E}">
-        <p14:creationId xmlns:p14="http://schemas.microsoft.com/office/powerpoint/2010/main" val="2654557613"/>
-      </p:ext>
-    </p:extLst>
-  </p:cSld>
-  <p:clrMapOvr>
-    <a:masterClrMapping/>
-  </p:clrMapOvr>
-</p:sld>
-</file>
-
-<file path=ppt/slides/slide24.xml><?xml version="1.0" encoding="utf-8"?>
-<p:sld xmlns:a="http://schemas.openxmlformats.org/drawingml/2006/main" xmlns:r="http://schemas.openxmlformats.org/officeDocument/2006/relationships" xmlns:p="http://schemas.openxmlformats.org/presentationml/2006/main">
-  <p:cSld>
-    <p:spTree>
-      <p:nvGrpSpPr>
-        <p:cNvPr id="1" name=""/>
-        <p:cNvGrpSpPr/>
-        <p:nvPr/>
-      </p:nvGrpSpPr>
-      <p:grpSpPr>
-        <a:xfrm>
-          <a:off x="0" y="0"/>
-          <a:ext cx="0" cy="0"/>
-          <a:chOff x="0" y="0"/>
-          <a:chExt cx="0" cy="0"/>
-        </a:xfrm>
-      </p:grpSpPr>
-      <p:sp>
-        <p:nvSpPr>
-          <p:cNvPr id="900" name="Title 1"/>
-          <p:cNvSpPr>
-            <a:spLocks noGrp="1"/>
-          </p:cNvSpPr>
-          <p:nvPr>
-            <p:ph type="title"/>
-          </p:nvPr>
-        </p:nvSpPr>
-        <p:spPr>
-          <a:xfrm>
-            <a:off x="-8000000" y="0"/>
-            <a:ext cx="6000000" cy="800000"/>
-          </a:xfrm>
-        </p:spPr>
-        <p:txBody>
-          <a:bodyPr>
-            <a:normAutofit/>
-          </a:bodyPr>
-          <a:lstStyle/>
-          <a:p>
-            <a:r>
-              <a:rPr lang="en-US" sz="1800" dirty="0"/>
-              <a:t>Dot plot of miles per gallon by cylinder count</a:t>
-            </a:r>
-          </a:p>
-        </p:txBody>
-      </p:sp>
-      <p:pic>
-        <p:nvPicPr>
-          <p:cNvPr id="4" name="Picture 3" descr="Dot plot of miles per gallon for 32 car models. Cylinder count is shown by both shape and colour: 4-cylinder cars are blue circles and reach the highest mileage, up to about 34 mpg; 6-cylinder cars are orange triangles clustered near 18 to 21; 8-cylinder cars are green squares and sit lowest, from about 10 to 19 mpg.">
-            <a:extLst>
-              <a:ext uri="{FF2B5EF4-FFF2-40B4-BE49-F238E27FC236}">
-                <a16:creationId xmlns:a16="http://schemas.microsoft.com/office/drawing/2014/main" id="{15BCE4F3-B78E-72F0-EC01-6B2C24A47E6E}"/>
-              </a:ext>
-            </a:extLst>
-          </p:cNvPr>
-          <p:cNvPicPr>
-            <a:picLocks noChangeAspect="1"/>
-          </p:cNvPicPr>
-          <p:nvPr/>
-        </p:nvPicPr>
-        <p:blipFill>
-          <a:blip r:embed="rId2"/>
-          <a:stretch>
-            <a:fillRect/>
-          </a:stretch>
-        </p:blipFill>
-        <p:spPr>
-          <a:xfrm>
-            <a:off x="954365" y="0"/>
-            <a:ext cx="10283269" cy="6858000"/>
-          </a:xfrm>
-          <a:prstGeom prst="rect">
-            <a:avLst/>
-          </a:prstGeom>
-        </p:spPr>
-      </p:pic>
-    </p:spTree>
-    <p:extLst>
-      <p:ext uri="{BB962C8B-B14F-4D97-AF65-F5344CB8AC3E}">
-        <p14:creationId xmlns:p14="http://schemas.microsoft.com/office/powerpoint/2010/main" val="3025165951"/>
-      </p:ext>
-    </p:extLst>
-  </p:cSld>
-  <p:clrMapOvr>
-    <a:masterClrMapping/>
-  </p:clrMapOvr>
-</p:sld>
-</file>
-
-<file path=ppt/slides/slide25.xml><?xml version="1.0" encoding="utf-8"?>
-<p:sld xmlns:a="http://schemas.openxmlformats.org/drawingml/2006/main" xmlns:r="http://schemas.openxmlformats.org/officeDocument/2006/relationships" xmlns:p="http://schemas.openxmlformats.org/presentationml/2006/main">
-  <p:cSld>
-    <p:spTree>
-      <p:nvGrpSpPr>
-        <p:cNvPr id="1" name=""/>
-        <p:cNvGrpSpPr/>
-        <p:nvPr/>
-      </p:nvGrpSpPr>
-      <p:grpSpPr>
-        <a:xfrm>
-          <a:off x="0" y="0"/>
-          <a:ext cx="0" cy="0"/>
-          <a:chOff x="0" y="0"/>
-          <a:chExt cx="0" cy="0"/>
-        </a:xfrm>
-      </p:grpSpPr>
-      <p:sp>
-        <p:nvSpPr>
-          <p:cNvPr id="2" name="Title 1">
-            <a:extLst>
-              <a:ext uri="{FF2B5EF4-FFF2-40B4-BE49-F238E27FC236}">
-                <a16:creationId xmlns:a16="http://schemas.microsoft.com/office/drawing/2014/main" id="{A2418BEF-F19E-DBAD-FF9A-8FDF1FBD3654}"/>
-              </a:ext>
-            </a:extLst>
-          </p:cNvPr>
-          <p:cNvSpPr>
-            <a:spLocks noGrp="1"/>
-          </p:cNvSpPr>
-          <p:nvPr>
-            <p:ph type="title"/>
-          </p:nvPr>
-        </p:nvSpPr>
-        <p:spPr/>
-        <p:txBody>
-          <a:bodyPr>
-            <a:normAutofit/>
-          </a:bodyPr>
-          <a:lstStyle/>
-          <a:p>
-            <a:r>
-              <a:rPr lang="en-US" sz="4000" dirty="0"/>
-              <a:t>Visualizing Distributions: Quantitative Variables </a:t>
-            </a:r>
-          </a:p>
-        </p:txBody>
-      </p:sp>
-      <p:sp>
-        <p:nvSpPr>
-          <p:cNvPr id="3" name="Content Placeholder 2">
-            <a:extLst>
-              <a:ext uri="{FF2B5EF4-FFF2-40B4-BE49-F238E27FC236}">
-                <a16:creationId xmlns:a16="http://schemas.microsoft.com/office/drawing/2014/main" id="{55423648-85AB-3CBC-D261-04D672727C90}"/>
-              </a:ext>
-            </a:extLst>
-          </p:cNvPr>
-          <p:cNvSpPr>
-            <a:spLocks noGrp="1"/>
-          </p:cNvSpPr>
-          <p:nvPr>
-            <p:ph idx="1"/>
-          </p:nvPr>
-        </p:nvSpPr>
-        <p:spPr>
-          <a:xfrm>
-            <a:off x="238125" y="1825624"/>
-            <a:ext cx="8065365" cy="4918075"/>
-          </a:xfrm>
-        </p:spPr>
-        <p:txBody>
-          <a:bodyPr>
-            <a:normAutofit/>
-          </a:bodyPr>
-          <a:lstStyle/>
-          <a:p>
-            <a:endParaRPr lang="en-US" b="1" dirty="0"/>
-          </a:p>
-          <a:p>
-            <a:pPr marL="457200" lvl="1" indent="0">
-              <a:buNone/>
-            </a:pPr>
-            <a:r>
-              <a:rPr lang="en-US" b="1" dirty="0"/>
-              <a:t>Stem and leaf plot – </a:t>
-            </a:r>
-            <a:r>
-              <a:rPr lang="en-US" dirty="0"/>
-              <a:t>like a dot plot, a stem and leaf diagram also displays individual observations. </a:t>
-            </a:r>
-          </a:p>
-          <a:p>
-            <a:pPr marL="457200" lvl="1" indent="0">
-              <a:buNone/>
-            </a:pPr>
-            <a:r>
-              <a:rPr lang="en-US" b="1" dirty="0"/>
-              <a:t>Stem </a:t>
-            </a:r>
-            <a:r>
-              <a:rPr lang="en-US" dirty="0"/>
-              <a:t>– all the digits in an observation except the last digit</a:t>
-            </a:r>
-          </a:p>
-          <a:p>
-            <a:pPr marL="457200" lvl="1" indent="0">
-              <a:buNone/>
-            </a:pPr>
-            <a:r>
-              <a:rPr lang="en-US" b="1" dirty="0"/>
-              <a:t>Leaf</a:t>
-            </a:r>
-            <a:r>
-              <a:rPr lang="en-US" dirty="0"/>
-              <a:t> – the last digit in an observation</a:t>
-            </a:r>
-            <a:endParaRPr lang="en-US" b="1" dirty="0"/>
-          </a:p>
-          <a:p>
-            <a:pPr marL="457200" lvl="1" indent="0">
-              <a:buNone/>
-            </a:pPr>
-            <a:r>
-              <a:rPr lang="en-US" b="1" dirty="0"/>
-              <a:t>Steps to construct a stem and leaf plot</a:t>
-            </a:r>
-          </a:p>
-          <a:p>
-            <a:pPr marL="914400" lvl="1" indent="-457200">
-              <a:buFont typeface="+mj-lt"/>
-              <a:buAutoNum type="arabicPeriod"/>
-            </a:pPr>
-            <a:r>
-              <a:rPr lang="en-US" b="1" dirty="0"/>
-              <a:t>Sort the data in order from smallest to largest.</a:t>
-            </a:r>
-          </a:p>
-          <a:p>
-            <a:pPr marL="914400" lvl="1" indent="-457200">
-              <a:buFont typeface="+mj-lt"/>
-              <a:buAutoNum type="arabicPeriod"/>
-            </a:pPr>
-            <a:r>
-              <a:rPr lang="en-US" b="1" dirty="0"/>
-              <a:t>Place the stems in a column in increasing order</a:t>
-            </a:r>
-          </a:p>
-          <a:p>
-            <a:pPr marL="914400" lvl="1" indent="-457200">
-              <a:buFont typeface="+mj-lt"/>
-              <a:buAutoNum type="arabicPeriod"/>
-            </a:pPr>
-            <a:r>
-              <a:rPr lang="en-US" b="1" dirty="0"/>
-              <a:t>Place a vertical line to the right of the stems</a:t>
-            </a:r>
-          </a:p>
-          <a:p>
-            <a:pPr marL="914400" lvl="1" indent="-457200">
-              <a:buFont typeface="+mj-lt"/>
-              <a:buAutoNum type="arabicPeriod"/>
-            </a:pPr>
-            <a:r>
-              <a:rPr lang="en-US" b="1" dirty="0"/>
-              <a:t>To the right of the vertical line, fill in the leaves that correspond with each stem in increasing order</a:t>
-            </a:r>
-          </a:p>
-        </p:txBody>
-      </p:sp>
-      <p:cxnSp>
-        <p:nvCxnSpPr>
-          <p:cNvPr id="8" name="Straight Connector 7">
-            <a:extLst>
-              <a:ext uri="{FF2B5EF4-FFF2-40B4-BE49-F238E27FC236}">
-                <a16:creationId xmlns:a16="http://schemas.microsoft.com/office/drawing/2014/main" id="{076F8EEE-5CDB-A30C-103E-14D517265954}"/>
-              </a:ext>
-            </a:extLst>
-          </p:cNvPr>
-          <p:cNvCxnSpPr/>
-          <p:nvPr/>
-        </p:nvCxnSpPr>
-        <p:spPr>
-          <a:xfrm>
-            <a:off x="8968509" y="4082473"/>
-            <a:ext cx="3020291" cy="0"/>
-          </a:xfrm>
-          <a:prstGeom prst="line">
-            <a:avLst/>
-          </a:prstGeom>
-          <a:ln w="38100">
-            <a:solidFill>
-              <a:schemeClr val="tx1"/>
-            </a:solidFill>
-          </a:ln>
-        </p:spPr>
-        <p:style>
-          <a:lnRef idx="1">
-            <a:schemeClr val="accent1"/>
-          </a:lnRef>
-          <a:fillRef idx="0">
-            <a:schemeClr val="accent1"/>
-          </a:fillRef>
-          <a:effectRef idx="0">
-            <a:schemeClr val="accent1"/>
-          </a:effectRef>
-          <a:fontRef idx="minor">
-            <a:schemeClr val="tx1"/>
-          </a:fontRef>
-        </p:style>
-      </p:cxnSp>
-      <p:cxnSp>
-        <p:nvCxnSpPr>
-          <p:cNvPr id="9" name="Straight Connector 8">
-            <a:extLst>
-              <a:ext uri="{FF2B5EF4-FFF2-40B4-BE49-F238E27FC236}">
-                <a16:creationId xmlns:a16="http://schemas.microsoft.com/office/drawing/2014/main" id="{CDD83D42-36EE-26DF-33FE-3BD77AB3DD71}"/>
-              </a:ext>
-            </a:extLst>
-          </p:cNvPr>
-          <p:cNvCxnSpPr>
-            <a:cxnSpLocks/>
-          </p:cNvCxnSpPr>
-          <p:nvPr/>
-        </p:nvCxnSpPr>
-        <p:spPr>
-          <a:xfrm flipV="1">
-            <a:off x="10543309" y="3627582"/>
-            <a:ext cx="0" cy="2948709"/>
-          </a:xfrm>
-          <a:prstGeom prst="line">
-            <a:avLst/>
-          </a:prstGeom>
-          <a:ln w="38100">
-            <a:solidFill>
-              <a:schemeClr val="tx1"/>
-            </a:solidFill>
-          </a:ln>
-        </p:spPr>
-        <p:style>
-          <a:lnRef idx="1">
-            <a:schemeClr val="accent1"/>
-          </a:lnRef>
-          <a:fillRef idx="0">
-            <a:schemeClr val="accent1"/>
-          </a:fillRef>
-          <a:effectRef idx="0">
-            <a:schemeClr val="accent1"/>
-          </a:effectRef>
-          <a:fontRef idx="minor">
-            <a:schemeClr val="tx1"/>
-          </a:fontRef>
-        </p:style>
-      </p:cxnSp>
-      <p:sp>
-        <p:nvSpPr>
-          <p:cNvPr id="12" name="TextBox 11">
-            <a:extLst>
-              <a:ext uri="{FF2B5EF4-FFF2-40B4-BE49-F238E27FC236}">
-                <a16:creationId xmlns:a16="http://schemas.microsoft.com/office/drawing/2014/main" id="{F428CF57-AEF1-F10F-618C-3AA3F2C9DD91}"/>
-              </a:ext>
-            </a:extLst>
-          </p:cNvPr>
-          <p:cNvSpPr txBox="1"/>
-          <p:nvPr/>
-        </p:nvSpPr>
-        <p:spPr>
-          <a:xfrm>
-            <a:off x="9397125" y="3713141"/>
-            <a:ext cx="807337" cy="369332"/>
-          </a:xfrm>
-          <a:prstGeom prst="rect">
-            <a:avLst/>
-          </a:prstGeom>
-          <a:noFill/>
-        </p:spPr>
-        <p:txBody>
-          <a:bodyPr wrap="none" rtlCol="0">
-            <a:spAutoFit/>
-          </a:bodyPr>
-          <a:lstStyle/>
-          <a:p>
-            <a:r>
-              <a:rPr lang="en-US" dirty="0"/>
-              <a:t>Stems </a:t>
-            </a:r>
-          </a:p>
-        </p:txBody>
-      </p:sp>
-      <p:sp>
-        <p:nvSpPr>
-          <p:cNvPr id="13" name="TextBox 12">
-            <a:extLst>
-              <a:ext uri="{FF2B5EF4-FFF2-40B4-BE49-F238E27FC236}">
-                <a16:creationId xmlns:a16="http://schemas.microsoft.com/office/drawing/2014/main" id="{809F37A8-5990-6A9E-3D34-A5A0A49D381D}"/>
-              </a:ext>
-            </a:extLst>
-          </p:cNvPr>
-          <p:cNvSpPr txBox="1"/>
-          <p:nvPr/>
-        </p:nvSpPr>
-        <p:spPr>
-          <a:xfrm>
-            <a:off x="10789825" y="3713141"/>
-            <a:ext cx="864660" cy="369332"/>
-          </a:xfrm>
-          <a:prstGeom prst="rect">
-            <a:avLst/>
-          </a:prstGeom>
-          <a:noFill/>
-        </p:spPr>
-        <p:txBody>
-          <a:bodyPr wrap="none" rtlCol="0">
-            <a:spAutoFit/>
-          </a:bodyPr>
-          <a:lstStyle/>
-          <a:p>
-            <a:r>
-              <a:rPr lang="en-US" dirty="0"/>
-              <a:t>Leaves </a:t>
-            </a:r>
-          </a:p>
-        </p:txBody>
-      </p:sp>
-      <p:sp>
-        <p:nvSpPr>
-          <p:cNvPr id="14" name="TextBox 13">
-            <a:extLst>
-              <a:ext uri="{FF2B5EF4-FFF2-40B4-BE49-F238E27FC236}">
-                <a16:creationId xmlns:a16="http://schemas.microsoft.com/office/drawing/2014/main" id="{5F59F44D-2921-4D83-B0E5-CE1DCCECF4D6}"/>
-              </a:ext>
-            </a:extLst>
-          </p:cNvPr>
-          <p:cNvSpPr txBox="1"/>
-          <p:nvPr/>
-        </p:nvSpPr>
-        <p:spPr>
-          <a:xfrm>
-            <a:off x="10371121" y="2476995"/>
-            <a:ext cx="418704" cy="369332"/>
-          </a:xfrm>
-          <a:prstGeom prst="rect">
-            <a:avLst/>
-          </a:prstGeom>
-          <a:noFill/>
-        </p:spPr>
-        <p:txBody>
-          <a:bodyPr wrap="none" rtlCol="0">
-            <a:spAutoFit/>
-          </a:bodyPr>
-          <a:lstStyle/>
-          <a:p>
-            <a:r>
-              <a:rPr lang="en-US" dirty="0"/>
-              <a:t>82</a:t>
-            </a:r>
-          </a:p>
-        </p:txBody>
-      </p:sp>
-      <p:cxnSp>
-        <p:nvCxnSpPr>
-          <p:cNvPr id="16" name="Straight Arrow Connector 15">
-            <a:extLst>
-              <a:ext uri="{FF2B5EF4-FFF2-40B4-BE49-F238E27FC236}">
-                <a16:creationId xmlns:a16="http://schemas.microsoft.com/office/drawing/2014/main" id="{29468D34-472F-2504-FDF2-79B2ED88C287}"/>
-              </a:ext>
-            </a:extLst>
-          </p:cNvPr>
-          <p:cNvCxnSpPr>
-            <a:cxnSpLocks/>
-          </p:cNvCxnSpPr>
-          <p:nvPr/>
-        </p:nvCxnSpPr>
-        <p:spPr>
-          <a:xfrm flipH="1">
-            <a:off x="10188880" y="2771795"/>
-            <a:ext cx="315982" cy="1512866"/>
-          </a:xfrm>
-          <a:prstGeom prst="straightConnector1">
-            <a:avLst/>
-          </a:prstGeom>
-          <a:ln w="38100">
-            <a:solidFill>
-              <a:srgbClr val="C00000"/>
-            </a:solidFill>
-            <a:tailEnd type="triangle"/>
-          </a:ln>
-        </p:spPr>
-        <p:style>
-          <a:lnRef idx="1">
-            <a:schemeClr val="accent1"/>
-          </a:lnRef>
-          <a:fillRef idx="0">
-            <a:schemeClr val="accent1"/>
-          </a:fillRef>
-          <a:effectRef idx="0">
-            <a:schemeClr val="accent1"/>
-          </a:effectRef>
-          <a:fontRef idx="minor">
-            <a:schemeClr val="tx1"/>
-          </a:fontRef>
-        </p:style>
-      </p:cxnSp>
-      <p:sp>
-        <p:nvSpPr>
-          <p:cNvPr id="18" name="TextBox 17">
-            <a:extLst>
-              <a:ext uri="{FF2B5EF4-FFF2-40B4-BE49-F238E27FC236}">
-                <a16:creationId xmlns:a16="http://schemas.microsoft.com/office/drawing/2014/main" id="{C784D934-AA0C-5E59-F64A-F238184E5036}"/>
-              </a:ext>
-            </a:extLst>
-          </p:cNvPr>
-          <p:cNvSpPr txBox="1"/>
-          <p:nvPr/>
-        </p:nvSpPr>
-        <p:spPr>
-          <a:xfrm>
-            <a:off x="10069461" y="4267139"/>
-            <a:ext cx="947695" cy="369332"/>
-          </a:xfrm>
-          <a:prstGeom prst="rect">
-            <a:avLst/>
-          </a:prstGeom>
-          <a:noFill/>
-        </p:spPr>
-        <p:txBody>
-          <a:bodyPr wrap="none" rtlCol="0">
-            <a:spAutoFit/>
-          </a:bodyPr>
-          <a:lstStyle/>
-          <a:p>
-            <a:r>
-              <a:rPr lang="en-US" dirty="0"/>
-              <a:t>8          2</a:t>
-            </a:r>
-          </a:p>
-        </p:txBody>
-      </p:sp>
-      <p:cxnSp>
-        <p:nvCxnSpPr>
-          <p:cNvPr id="20" name="Straight Arrow Connector 19">
-            <a:extLst>
-              <a:ext uri="{FF2B5EF4-FFF2-40B4-BE49-F238E27FC236}">
-                <a16:creationId xmlns:a16="http://schemas.microsoft.com/office/drawing/2014/main" id="{30F6A166-0263-3F11-F469-05F0F88801FA}"/>
-              </a:ext>
-            </a:extLst>
-          </p:cNvPr>
-          <p:cNvCxnSpPr>
-            <a:cxnSpLocks/>
-          </p:cNvCxnSpPr>
-          <p:nvPr/>
-        </p:nvCxnSpPr>
-        <p:spPr>
-          <a:xfrm>
-            <a:off x="10633078" y="2771795"/>
-            <a:ext cx="236403" cy="1512866"/>
-          </a:xfrm>
-          <a:prstGeom prst="straightConnector1">
-            <a:avLst/>
-          </a:prstGeom>
-          <a:ln w="38100">
-            <a:solidFill>
-              <a:srgbClr val="C00000"/>
-            </a:solidFill>
-            <a:tailEnd type="triangle"/>
-          </a:ln>
-        </p:spPr>
-        <p:style>
-          <a:lnRef idx="1">
-            <a:schemeClr val="accent1"/>
-          </a:lnRef>
-          <a:fillRef idx="0">
-            <a:schemeClr val="accent1"/>
-          </a:fillRef>
-          <a:effectRef idx="0">
-            <a:schemeClr val="accent1"/>
-          </a:effectRef>
-          <a:fontRef idx="minor">
-            <a:schemeClr val="tx1"/>
-          </a:fontRef>
-        </p:style>
-      </p:cxnSp>
-    </p:spTree>
-    <p:extLst>
-      <p:ext uri="{BB962C8B-B14F-4D97-AF65-F5344CB8AC3E}">
-        <p14:creationId xmlns:p14="http://schemas.microsoft.com/office/powerpoint/2010/main" val="4217852999"/>
-      </p:ext>
-    </p:extLst>
-  </p:cSld>
-  <p:clrMapOvr>
-    <a:masterClrMapping/>
-  </p:clrMapOvr>
-</p:sld>
-</file>
-
-<file path=ppt/slides/slide26.xml><?xml version="1.0" encoding="utf-8"?>
-<p:sld xmlns:a="http://schemas.openxmlformats.org/drawingml/2006/main" xmlns:r="http://schemas.openxmlformats.org/officeDocument/2006/relationships" xmlns:p="http://schemas.openxmlformats.org/presentationml/2006/main">
-  <p:cSld>
-    <p:spTree>
-      <p:nvGrpSpPr>
-        <p:cNvPr id="1" name=""/>
-        <p:cNvGrpSpPr/>
-        <p:nvPr/>
-      </p:nvGrpSpPr>
-      <p:grpSpPr>
-        <a:xfrm>
-          <a:off x="0" y="0"/>
-          <a:ext cx="0" cy="0"/>
-          <a:chOff x="0" y="0"/>
-          <a:chExt cx="0" cy="0"/>
-        </a:xfrm>
-      </p:grpSpPr>
-      <p:sp>
-        <p:nvSpPr>
-          <p:cNvPr id="2" name="Title 1">
-            <a:extLst>
-              <a:ext uri="{FF2B5EF4-FFF2-40B4-BE49-F238E27FC236}">
-                <a16:creationId xmlns:a16="http://schemas.microsoft.com/office/drawing/2014/main" id="{A2418BEF-F19E-DBAD-FF9A-8FDF1FBD3654}"/>
-              </a:ext>
-            </a:extLst>
-          </p:cNvPr>
-          <p:cNvSpPr>
-            <a:spLocks noGrp="1"/>
-          </p:cNvSpPr>
-          <p:nvPr>
-            <p:ph type="title"/>
-          </p:nvPr>
-        </p:nvSpPr>
-        <p:spPr>
-          <a:xfrm>
-            <a:off x="80818" y="28257"/>
-            <a:ext cx="10515600" cy="825500"/>
-          </a:xfrm>
-        </p:spPr>
-        <p:txBody>
-          <a:bodyPr>
-            <a:normAutofit/>
-          </a:bodyPr>
-          <a:lstStyle/>
-          <a:p>
-            <a:r>
-              <a:rPr lang="en-US" sz="3200" dirty="0"/>
-              <a:t>Example: MPG</a:t>
-            </a:r>
-          </a:p>
-        </p:txBody>
-      </p:sp>
-      <p:pic>
-        <p:nvPicPr>
-          <p:cNvPr id="6" name="Picture 5" descr="Table of the car data: observation number, miles per gallon, cylinders and model, from the Mazda RX4 at 21.0 mpg with 6 cylinders through to the Volvo 142E at 21.4 mpg with 4 cylinders, 32 cars in all.">
-            <a:extLst>
-              <a:ext uri="{FF2B5EF4-FFF2-40B4-BE49-F238E27FC236}">
-                <a16:creationId xmlns:a16="http://schemas.microsoft.com/office/drawing/2014/main" id="{60B6F122-13F2-0495-B148-F9F908F242F4}"/>
-              </a:ext>
-            </a:extLst>
-          </p:cNvPr>
-          <p:cNvPicPr>
-            <a:picLocks noChangeAspect="1"/>
-          </p:cNvPicPr>
-          <p:nvPr/>
-        </p:nvPicPr>
-        <p:blipFill>
-          <a:blip r:embed="rId2"/>
-          <a:stretch>
-            <a:fillRect/>
-          </a:stretch>
-        </p:blipFill>
-        <p:spPr>
-          <a:xfrm>
-            <a:off x="293728" y="4285672"/>
-            <a:ext cx="4645094" cy="2382985"/>
-          </a:xfrm>
-          <a:prstGeom prst="rect">
-            <a:avLst/>
-          </a:prstGeom>
-        </p:spPr>
-      </p:pic>
-      <p:pic>
-        <p:nvPicPr>
-          <p:cNvPr id="4" name="Picture 3" descr="Dot plot of miles per gallon for 32 car models. Cylinder count is shown by both shape and colour: 4-cylinder cars are blue circles and reach the highest mileage, up to about 34 mpg; 6-cylinder cars are orange triangles clustered near 18 to 21; 8-cylinder cars are green squares and sit lowest, from about 10 to 19 mpg.">
-            <a:extLst>
-              <a:ext uri="{FF2B5EF4-FFF2-40B4-BE49-F238E27FC236}">
-                <a16:creationId xmlns:a16="http://schemas.microsoft.com/office/drawing/2014/main" id="{FB701B9A-D517-32D0-A350-4500F634B187}"/>
-              </a:ext>
-            </a:extLst>
-          </p:cNvPr>
-          <p:cNvPicPr>
-            <a:picLocks noChangeAspect="1"/>
-          </p:cNvPicPr>
-          <p:nvPr/>
-        </p:nvPicPr>
-        <p:blipFill>
-          <a:blip r:embed="rId3"/>
-          <a:stretch>
-            <a:fillRect/>
-          </a:stretch>
-        </p:blipFill>
-        <p:spPr>
-          <a:xfrm>
-            <a:off x="293728" y="818384"/>
-            <a:ext cx="5275799" cy="3518475"/>
-          </a:xfrm>
-          <a:prstGeom prst="rect">
-            <a:avLst/>
-          </a:prstGeom>
-        </p:spPr>
-      </p:pic>
-      <p:pic>
-        <p:nvPicPr>
-          <p:cNvPr id="7" name="Picture 6" descr="Stem and leaf plot of the mileage figures, with stems 10 through 33 for the whole-number part and leaves for the first decimal.">
-            <a:extLst>
-              <a:ext uri="{FF2B5EF4-FFF2-40B4-BE49-F238E27FC236}">
-                <a16:creationId xmlns:a16="http://schemas.microsoft.com/office/drawing/2014/main" id="{C4E7196C-9CAB-32E1-5755-5C8C7E55C899}"/>
-              </a:ext>
-            </a:extLst>
-          </p:cNvPr>
-          <p:cNvPicPr>
-            <a:picLocks noChangeAspect="1"/>
-          </p:cNvPicPr>
-          <p:nvPr/>
-        </p:nvPicPr>
-        <p:blipFill>
-          <a:blip r:embed="rId4"/>
-          <a:stretch>
-            <a:fillRect/>
-          </a:stretch>
-        </p:blipFill>
-        <p:spPr>
-          <a:xfrm>
-            <a:off x="6622475" y="466136"/>
-            <a:ext cx="2543175" cy="6202521"/>
-          </a:xfrm>
-          <a:prstGeom prst="rect">
-            <a:avLst/>
-          </a:prstGeom>
-        </p:spPr>
-      </p:pic>
-      <p:pic>
-        <p:nvPicPr>
-          <p:cNvPr id="8" name="Picture 7" descr="The same stem and leaf plot with the stems combined in pairs, giving a more compact display with stems 10, 12, 14 and so on.">
-            <a:extLst>
-              <a:ext uri="{FF2B5EF4-FFF2-40B4-BE49-F238E27FC236}">
-                <a16:creationId xmlns:a16="http://schemas.microsoft.com/office/drawing/2014/main" id="{D6849ACD-33DD-B90C-2FCD-2F174EB768EE}"/>
-              </a:ext>
-            </a:extLst>
-          </p:cNvPr>
-          <p:cNvPicPr>
-            <a:picLocks noChangeAspect="1"/>
-          </p:cNvPicPr>
-          <p:nvPr/>
-        </p:nvPicPr>
-        <p:blipFill>
-          <a:blip r:embed="rId5"/>
-          <a:stretch>
-            <a:fillRect/>
-          </a:stretch>
-        </p:blipFill>
-        <p:spPr>
-          <a:xfrm>
-            <a:off x="9657544" y="2131695"/>
-            <a:ext cx="2453640" cy="3489960"/>
-          </a:xfrm>
-          <a:prstGeom prst="rect">
-            <a:avLst/>
-          </a:prstGeom>
-        </p:spPr>
-      </p:pic>
-      <p:sp>
-        <p:nvSpPr>
-          <p:cNvPr id="10" name="Arrow: Right 9">
-            <a:extLst>
-              <a:ext uri="{FF2B5EF4-FFF2-40B4-BE49-F238E27FC236}">
-                <a16:creationId xmlns:a16="http://schemas.microsoft.com/office/drawing/2014/main" id="{C86389B6-E359-7156-60D5-5AC30ED7B48C}"/>
-              </a:ext>
-            </a:extLst>
-          </p:cNvPr>
-          <p:cNvSpPr/>
-          <p:nvPr/>
-        </p:nvSpPr>
-        <p:spPr>
-          <a:xfrm>
-            <a:off x="9165650" y="3260436"/>
-            <a:ext cx="708023" cy="480291"/>
-          </a:xfrm>
-          <a:prstGeom prst="rightArrow">
-            <a:avLst/>
-          </a:prstGeom>
-        </p:spPr>
-        <p:style>
-          <a:lnRef idx="2">
-            <a:schemeClr val="accent1">
-              <a:shade val="15000"/>
-            </a:schemeClr>
-          </a:lnRef>
-          <a:fillRef idx="1">
-            <a:schemeClr val="accent1"/>
-          </a:fillRef>
-          <a:effectRef idx="0">
-            <a:schemeClr val="accent1"/>
-          </a:effectRef>
-          <a:fontRef idx="minor">
-            <a:schemeClr val="lt1"/>
-          </a:fontRef>
-        </p:style>
-        <p:txBody>
-          <a:bodyPr rtlCol="0" anchor="ctr"/>
-          <a:lstStyle/>
-          <a:p>
-            <a:pPr algn="ctr"/>
-            <a:endParaRPr lang="en-US"/>
-          </a:p>
-        </p:txBody>
-      </p:sp>
-    </p:spTree>
-    <p:extLst>
-      <p:ext uri="{BB962C8B-B14F-4D97-AF65-F5344CB8AC3E}">
-        <p14:creationId xmlns:p14="http://schemas.microsoft.com/office/powerpoint/2010/main" val="284844963"/>
-      </p:ext>
-    </p:extLst>
-  </p:cSld>
-  <p:clrMapOvr>
-    <a:masterClrMapping/>
-  </p:clrMapOvr>
-</p:sld>
-</file>
-
-<file path=ppt/slides/slide27.xml><?xml version="1.0" encoding="utf-8"?>
-<p:sld xmlns:a="http://schemas.openxmlformats.org/drawingml/2006/main" xmlns:r="http://schemas.openxmlformats.org/officeDocument/2006/relationships" xmlns:p="http://schemas.openxmlformats.org/presentationml/2006/main">
-  <p:cSld>
-    <p:spTree>
-      <p:nvGrpSpPr>
-        <p:cNvPr id="1" name=""/>
-        <p:cNvGrpSpPr/>
-        <p:nvPr/>
-      </p:nvGrpSpPr>
-      <p:grpSpPr>
-        <a:xfrm>
-          <a:off x="0" y="0"/>
-          <a:ext cx="0" cy="0"/>
-          <a:chOff x="0" y="0"/>
-          <a:chExt cx="0" cy="0"/>
-        </a:xfrm>
-      </p:grpSpPr>
-      <p:sp>
-        <p:nvSpPr>
-          <p:cNvPr id="2" name="Title 1">
-            <a:extLst>
-              <a:ext uri="{FF2B5EF4-FFF2-40B4-BE49-F238E27FC236}">
-                <a16:creationId xmlns:a16="http://schemas.microsoft.com/office/drawing/2014/main" id="{6EA75132-6122-451D-8580-53616DB7E950}"/>
-              </a:ext>
-            </a:extLst>
-          </p:cNvPr>
-          <p:cNvSpPr>
-            <a:spLocks noGrp="1"/>
-          </p:cNvSpPr>
-          <p:nvPr>
-            <p:ph type="title"/>
-          </p:nvPr>
-        </p:nvSpPr>
-        <p:spPr>
-          <a:xfrm>
-            <a:off x="838199" y="0"/>
-            <a:ext cx="10808856" cy="1942810"/>
-          </a:xfrm>
-        </p:spPr>
-        <p:txBody>
-          <a:bodyPr vert="horz" lIns="91440" tIns="45720" rIns="91440" bIns="45720" rtlCol="0" anchor="b">
-            <a:normAutofit/>
-          </a:bodyPr>
-          <a:lstStyle/>
-          <a:p>
-            <a:r>
-              <a:rPr lang="en-US" sz="4000" kern="1200" dirty="0">
-                <a:solidFill>
-                  <a:schemeClr val="tx1"/>
-                </a:solidFill>
-                <a:latin typeface="+mj-lt"/>
-                <a:ea typeface="+mj-ea"/>
-                <a:cs typeface="+mj-cs"/>
-              </a:rPr>
-              <a:t>Try it out: Stem and leaf plot</a:t>
-            </a:r>
-          </a:p>
-        </p:txBody>
-      </p:sp>
-      <p:sp>
-        <p:nvSpPr>
-          <p:cNvPr id="4" name="Content Placeholder 2">
-            <a:extLst>
-              <a:ext uri="{FF2B5EF4-FFF2-40B4-BE49-F238E27FC236}">
-                <a16:creationId xmlns:a16="http://schemas.microsoft.com/office/drawing/2014/main" id="{C933D906-CF81-5AD4-2902-D9DD0E0EF8B7}"/>
-              </a:ext>
-            </a:extLst>
-          </p:cNvPr>
-          <p:cNvSpPr txBox="1">
-            <a:spLocks/>
-          </p:cNvSpPr>
-          <p:nvPr/>
-        </p:nvSpPr>
-        <p:spPr>
-          <a:xfrm>
-            <a:off x="838199" y="2686323"/>
-            <a:ext cx="7659256" cy="3433583"/>
-          </a:xfrm>
-          <a:prstGeom prst="rect">
-            <a:avLst/>
-          </a:prstGeom>
-        </p:spPr>
-        <p:txBody>
-          <a:bodyPr vert="horz" lIns="91440" tIns="45720" rIns="91440" bIns="45720" rtlCol="0">
-            <a:normAutofit/>
-          </a:bodyPr>
-          <a:lstStyle>
-            <a:lvl1pPr marL="228600" indent="-228600" algn="l" defTabSz="914400" rtl="0" eaLnBrk="1" latinLnBrk="0" hangingPunct="1">
-              <a:lnSpc>
-                <a:spcPct val="90000"/>
-              </a:lnSpc>
-              <a:spcBef>
-                <a:spcPts val="1000"/>
-              </a:spcBef>
-              <a:buFont typeface="Arial" panose="020B0604020202020204" pitchFamily="34" charset="0"/>
-              <a:buChar char="•"/>
-              <a:defRPr sz="2800" kern="1200">
-                <a:solidFill>
-                  <a:schemeClr val="tx1"/>
-                </a:solidFill>
-                <a:latin typeface="+mn-lt"/>
-                <a:ea typeface="+mn-ea"/>
-                <a:cs typeface="+mn-cs"/>
-              </a:defRPr>
-            </a:lvl1pPr>
-            <a:lvl2pPr marL="685800" indent="-228600" algn="l" defTabSz="914400" rtl="0" eaLnBrk="1" latinLnBrk="0" hangingPunct="1">
-              <a:lnSpc>
-                <a:spcPct val="90000"/>
-              </a:lnSpc>
-              <a:spcBef>
-                <a:spcPts val="500"/>
-              </a:spcBef>
-              <a:buFont typeface="Arial" panose="020B0604020202020204" pitchFamily="34" charset="0"/>
-              <a:buChar char="•"/>
-              <a:defRPr sz="2400" kern="1200">
-                <a:solidFill>
-                  <a:schemeClr val="tx1"/>
-                </a:solidFill>
-                <a:latin typeface="+mn-lt"/>
-                <a:ea typeface="+mn-ea"/>
-                <a:cs typeface="+mn-cs"/>
-              </a:defRPr>
-            </a:lvl2pPr>
-            <a:lvl3pPr marL="1143000" indent="-228600" algn="l" defTabSz="914400" rtl="0" eaLnBrk="1" latinLnBrk="0" hangingPunct="1">
-              <a:lnSpc>
-                <a:spcPct val="90000"/>
-              </a:lnSpc>
-              <a:spcBef>
-                <a:spcPts val="500"/>
-              </a:spcBef>
-              <a:buFont typeface="Arial" panose="020B0604020202020204" pitchFamily="34" charset="0"/>
-              <a:buChar char="•"/>
-              <a:defRPr sz="2000" kern="1200">
-                <a:solidFill>
-                  <a:schemeClr val="tx1"/>
-                </a:solidFill>
-                <a:latin typeface="+mn-lt"/>
-                <a:ea typeface="+mn-ea"/>
-                <a:cs typeface="+mn-cs"/>
-              </a:defRPr>
-            </a:lvl3pPr>
-            <a:lvl4pPr marL="1600200" indent="-228600" algn="l" defTabSz="914400" rtl="0" eaLnBrk="1" latinLnBrk="0" hangingPunct="1">
-              <a:lnSpc>
-                <a:spcPct val="90000"/>
-              </a:lnSpc>
-              <a:spcBef>
-                <a:spcPts val="500"/>
-              </a:spcBef>
-              <a:buFont typeface="Arial" panose="020B0604020202020204" pitchFamily="34" charset="0"/>
-              <a:buChar char="•"/>
-              <a:defRPr sz="1800" kern="1200">
-                <a:solidFill>
-                  <a:schemeClr val="tx1"/>
-                </a:solidFill>
-                <a:latin typeface="+mn-lt"/>
-                <a:ea typeface="+mn-ea"/>
-                <a:cs typeface="+mn-cs"/>
-              </a:defRPr>
-            </a:lvl4pPr>
-            <a:lvl5pPr marL="2057400" indent="-228600" algn="l" defTabSz="914400" rtl="0" eaLnBrk="1" latinLnBrk="0" hangingPunct="1">
-              <a:lnSpc>
-                <a:spcPct val="90000"/>
-              </a:lnSpc>
-              <a:spcBef>
-                <a:spcPts val="500"/>
-              </a:spcBef>
-              <a:buFont typeface="Arial" panose="020B0604020202020204" pitchFamily="34" charset="0"/>
-              <a:buChar char="•"/>
-              <a:defRPr sz="1800" kern="1200">
-                <a:solidFill>
-                  <a:schemeClr val="tx1"/>
-                </a:solidFill>
-                <a:latin typeface="+mn-lt"/>
-                <a:ea typeface="+mn-ea"/>
-                <a:cs typeface="+mn-cs"/>
-              </a:defRPr>
-            </a:lvl5pPr>
-            <a:lvl6pPr marL="2514600" indent="-228600" algn="l" defTabSz="914400" rtl="0" eaLnBrk="1" latinLnBrk="0" hangingPunct="1">
-              <a:lnSpc>
-                <a:spcPct val="90000"/>
-              </a:lnSpc>
-              <a:spcBef>
-                <a:spcPts val="500"/>
-              </a:spcBef>
-              <a:buFont typeface="Arial" panose="020B0604020202020204" pitchFamily="34" charset="0"/>
-              <a:buChar char="•"/>
-              <a:defRPr sz="1800" kern="1200">
-                <a:solidFill>
-                  <a:schemeClr val="tx1"/>
-                </a:solidFill>
-                <a:latin typeface="+mn-lt"/>
-                <a:ea typeface="+mn-ea"/>
-                <a:cs typeface="+mn-cs"/>
-              </a:defRPr>
-            </a:lvl6pPr>
-            <a:lvl7pPr marL="2971800" indent="-228600" algn="l" defTabSz="914400" rtl="0" eaLnBrk="1" latinLnBrk="0" hangingPunct="1">
-              <a:lnSpc>
-                <a:spcPct val="90000"/>
-              </a:lnSpc>
-              <a:spcBef>
-                <a:spcPts val="500"/>
-              </a:spcBef>
-              <a:buFont typeface="Arial" panose="020B0604020202020204" pitchFamily="34" charset="0"/>
-              <a:buChar char="•"/>
-              <a:defRPr sz="1800" kern="1200">
-                <a:solidFill>
-                  <a:schemeClr val="tx1"/>
-                </a:solidFill>
-                <a:latin typeface="+mn-lt"/>
-                <a:ea typeface="+mn-ea"/>
-                <a:cs typeface="+mn-cs"/>
-              </a:defRPr>
-            </a:lvl7pPr>
-            <a:lvl8pPr marL="3429000" indent="-228600" algn="l" defTabSz="914400" rtl="0" eaLnBrk="1" latinLnBrk="0" hangingPunct="1">
-              <a:lnSpc>
-                <a:spcPct val="90000"/>
-              </a:lnSpc>
-              <a:spcBef>
-                <a:spcPts val="500"/>
-              </a:spcBef>
-              <a:buFont typeface="Arial" panose="020B0604020202020204" pitchFamily="34" charset="0"/>
-              <a:buChar char="•"/>
-              <a:defRPr sz="1800" kern="1200">
-                <a:solidFill>
-                  <a:schemeClr val="tx1"/>
-                </a:solidFill>
-                <a:latin typeface="+mn-lt"/>
-                <a:ea typeface="+mn-ea"/>
-                <a:cs typeface="+mn-cs"/>
-              </a:defRPr>
-            </a:lvl8pPr>
-            <a:lvl9pPr marL="3886200" indent="-228600" algn="l" defTabSz="914400" rtl="0" eaLnBrk="1" latinLnBrk="0" hangingPunct="1">
-              <a:lnSpc>
-                <a:spcPct val="90000"/>
-              </a:lnSpc>
-              <a:spcBef>
-                <a:spcPts val="500"/>
-              </a:spcBef>
-              <a:buFont typeface="Arial" panose="020B0604020202020204" pitchFamily="34" charset="0"/>
-              <a:buChar char="•"/>
-              <a:defRPr sz="1800" kern="1200">
-                <a:solidFill>
-                  <a:schemeClr val="tx1"/>
-                </a:solidFill>
-                <a:latin typeface="+mn-lt"/>
-                <a:ea typeface="+mn-ea"/>
-                <a:cs typeface="+mn-cs"/>
-              </a:defRPr>
-            </a:lvl9pPr>
-          </a:lstStyle>
-          <a:p>
-            <a:pPr marL="0" marR="0" lvl="0" indent="0" algn="l" defTabSz="914400" rtl="0" eaLnBrk="1" fontAlgn="auto" latinLnBrk="0" hangingPunct="1">
-              <a:lnSpc>
-                <a:spcPct val="90000"/>
-              </a:lnSpc>
-              <a:spcBef>
-                <a:spcPts val="1000"/>
-              </a:spcBef>
-              <a:spcAft>
-                <a:spcPts val="0"/>
-              </a:spcAft>
-              <a:buClrTx/>
-              <a:buSzTx/>
-              <a:buFont typeface="Arial" panose="020B0604020202020204" pitchFamily="34" charset="0"/>
-              <a:buNone/>
-              <a:tabLst/>
-              <a:defRPr/>
-            </a:pPr>
-            <a:r>
-              <a:rPr kumimoji="0" lang="en-US" sz="2400" b="0" i="0" u="none" strike="noStrike" kern="1200" cap="none" spc="0" normalizeH="0" baseline="0" noProof="0" dirty="0">
-                <a:ln>
-                  <a:noFill/>
-                </a:ln>
-                <a:solidFill>
-                  <a:prstClr val="black"/>
-                </a:solidFill>
-                <a:effectLst/>
-                <a:uLnTx/>
-                <a:uFillTx/>
-                <a:latin typeface="Calibri" panose="020F0502020204030204"/>
-                <a:ea typeface="+mn-ea"/>
-                <a:cs typeface="+mn-cs"/>
-              </a:rPr>
-              <a:t>Data = 4.2,  3.8,  4.6,  3.2,  2.7,  8.2, 9.1, 0.2,  1.2,  6.2</a:t>
-            </a:r>
-            <a:endParaRPr kumimoji="0" lang="en-US" sz="2000" b="0" i="0" u="none" strike="noStrike" kern="1200" cap="none" spc="0" normalizeH="0" baseline="0" noProof="0" dirty="0">
-              <a:ln>
-                <a:noFill/>
-              </a:ln>
-              <a:solidFill>
-                <a:prstClr val="black"/>
-              </a:solidFill>
-              <a:effectLst/>
-              <a:uLnTx/>
-              <a:uFillTx/>
-              <a:latin typeface="Calibri" panose="020F0502020204030204"/>
-              <a:ea typeface="+mn-ea"/>
-              <a:cs typeface="+mn-cs"/>
-            </a:endParaRPr>
-          </a:p>
-          <a:p>
-            <a:pPr marL="228600" marR="0" lvl="0" indent="-228600" algn="l" defTabSz="914400" rtl="0" eaLnBrk="1" fontAlgn="auto" latinLnBrk="0" hangingPunct="1">
-              <a:lnSpc>
-                <a:spcPct val="90000"/>
-              </a:lnSpc>
-              <a:spcBef>
-                <a:spcPts val="1000"/>
-              </a:spcBef>
-              <a:spcAft>
-                <a:spcPts val="0"/>
-              </a:spcAft>
-              <a:buClrTx/>
-              <a:buSzTx/>
-              <a:buFont typeface="Arial" panose="020B0604020202020204" pitchFamily="34" charset="0"/>
-              <a:buChar char="•"/>
-              <a:tabLst/>
-              <a:defRPr/>
-            </a:pPr>
-            <a:endParaRPr kumimoji="0" lang="en-US" sz="2000" b="0" i="0" u="none" strike="noStrike" kern="1200" cap="none" spc="0" normalizeH="0" baseline="0" noProof="0" dirty="0">
-              <a:ln>
-                <a:noFill/>
-              </a:ln>
-              <a:solidFill>
-                <a:prstClr val="black"/>
-              </a:solidFill>
-              <a:effectLst/>
-              <a:uLnTx/>
-              <a:uFillTx/>
-              <a:latin typeface="Calibri" panose="020F0502020204030204"/>
-              <a:ea typeface="+mn-ea"/>
-              <a:cs typeface="+mn-cs"/>
-            </a:endParaRPr>
-          </a:p>
-          <a:p>
-            <a:pPr marL="228600" marR="0" lvl="0" indent="-228600" algn="l" defTabSz="914400" rtl="0" eaLnBrk="1" fontAlgn="auto" latinLnBrk="0" hangingPunct="1">
-              <a:lnSpc>
-                <a:spcPct val="90000"/>
-              </a:lnSpc>
-              <a:spcBef>
-                <a:spcPts val="1000"/>
-              </a:spcBef>
-              <a:spcAft>
-                <a:spcPts val="0"/>
-              </a:spcAft>
-              <a:buClrTx/>
-              <a:buSzTx/>
-              <a:buFont typeface="Arial" panose="020B0604020202020204" pitchFamily="34" charset="0"/>
-              <a:buChar char="•"/>
-              <a:tabLst/>
-              <a:defRPr/>
-            </a:pPr>
-            <a:endParaRPr kumimoji="0" lang="en-US" sz="2000" b="0" i="0" u="none" strike="noStrike" kern="1200" cap="none" spc="0" normalizeH="0" baseline="0" noProof="0" dirty="0">
-              <a:ln>
-                <a:noFill/>
-              </a:ln>
-              <a:solidFill>
-                <a:prstClr val="black"/>
-              </a:solidFill>
-              <a:effectLst/>
-              <a:uLnTx/>
-              <a:uFillTx/>
-              <a:latin typeface="Calibri" panose="020F0502020204030204"/>
-              <a:ea typeface="+mn-ea"/>
-              <a:cs typeface="+mn-cs"/>
-            </a:endParaRPr>
-          </a:p>
-          <a:p>
-            <a:pPr marL="228600" marR="0" lvl="0" indent="-228600" algn="l" defTabSz="914400" rtl="0" eaLnBrk="1" fontAlgn="auto" latinLnBrk="0" hangingPunct="1">
-              <a:lnSpc>
-                <a:spcPct val="90000"/>
-              </a:lnSpc>
-              <a:spcBef>
-                <a:spcPts val="1000"/>
-              </a:spcBef>
-              <a:spcAft>
-                <a:spcPts val="0"/>
-              </a:spcAft>
-              <a:buClrTx/>
-              <a:buSzTx/>
-              <a:buFont typeface="Arial" panose="020B0604020202020204" pitchFamily="34" charset="0"/>
-              <a:buChar char="•"/>
-              <a:tabLst/>
-              <a:defRPr/>
-            </a:pPr>
-            <a:endParaRPr kumimoji="0" lang="en-US" sz="2000" b="0" i="0" u="none" strike="noStrike" kern="1200" cap="none" spc="0" normalizeH="0" baseline="0" noProof="0" dirty="0">
-              <a:ln>
-                <a:noFill/>
-              </a:ln>
-              <a:solidFill>
-                <a:prstClr val="black"/>
-              </a:solidFill>
-              <a:effectLst/>
-              <a:uLnTx/>
-              <a:uFillTx/>
-              <a:latin typeface="Calibri" panose="020F0502020204030204"/>
-              <a:ea typeface="+mn-ea"/>
-              <a:cs typeface="+mn-cs"/>
-            </a:endParaRPr>
-          </a:p>
-        </p:txBody>
-      </p:sp>
-    </p:spTree>
-    <p:extLst>
-      <p:ext uri="{BB962C8B-B14F-4D97-AF65-F5344CB8AC3E}">
-        <p14:creationId xmlns:p14="http://schemas.microsoft.com/office/powerpoint/2010/main" val="3925933073"/>
-      </p:ext>
-    </p:extLst>
-  </p:cSld>
-  <p:clrMapOvr>
-    <a:masterClrMapping/>
-  </p:clrMapOvr>
-</p:sld>
-</file>
-
-<file path=ppt/slides/slide28.xml><?xml version="1.0" encoding="utf-8"?>
-<p:sld xmlns:a="http://schemas.openxmlformats.org/drawingml/2006/main" xmlns:r="http://schemas.openxmlformats.org/officeDocument/2006/relationships" xmlns:p="http://schemas.openxmlformats.org/presentationml/2006/main">
-  <p:cSld>
-    <p:spTree>
-      <p:nvGrpSpPr>
-        <p:cNvPr id="1" name=""/>
-        <p:cNvGrpSpPr/>
-        <p:nvPr/>
-      </p:nvGrpSpPr>
-      <p:grpSpPr>
-        <a:xfrm>
-          <a:off x="0" y="0"/>
-          <a:ext cx="0" cy="0"/>
-          <a:chOff x="0" y="0"/>
-          <a:chExt cx="0" cy="0"/>
-        </a:xfrm>
-      </p:grpSpPr>
-      <p:sp>
-        <p:nvSpPr>
-          <p:cNvPr id="2" name="Title 1">
-            <a:extLst>
-              <a:ext uri="{FF2B5EF4-FFF2-40B4-BE49-F238E27FC236}">
-                <a16:creationId xmlns:a16="http://schemas.microsoft.com/office/drawing/2014/main" id="{A2418BEF-F19E-DBAD-FF9A-8FDF1FBD3654}"/>
-              </a:ext>
-            </a:extLst>
-          </p:cNvPr>
-          <p:cNvSpPr>
-            <a:spLocks noGrp="1"/>
-          </p:cNvSpPr>
-          <p:nvPr>
-            <p:ph type="title"/>
-          </p:nvPr>
-        </p:nvSpPr>
-        <p:spPr/>
-        <p:txBody>
-          <a:bodyPr>
-            <a:normAutofit/>
-          </a:bodyPr>
-          <a:lstStyle/>
-          <a:p>
-            <a:r>
-              <a:rPr lang="en-US" sz="4000" dirty="0"/>
-              <a:t>Visualizing Distributions: Quantitative Variables </a:t>
-            </a:r>
-          </a:p>
-        </p:txBody>
-      </p:sp>
-      <mc:AlternateContent xmlns:mc="http://schemas.openxmlformats.org/markup-compatibility/2006" xmlns:a14="http://schemas.microsoft.com/office/drawing/2010/main">
-        <mc:Choice Requires="a14">
-          <p:sp>
-            <p:nvSpPr>
-              <p:cNvPr id="3" name="Content Placeholder 2">
-                <a:extLst>
-                  <a:ext uri="{FF2B5EF4-FFF2-40B4-BE49-F238E27FC236}">
-                    <a16:creationId xmlns:a16="http://schemas.microsoft.com/office/drawing/2014/main" id="{058FD37C-6477-7C00-926C-1FB666199849}"/>
-                  </a:ext>
-                </a:extLst>
-              </p:cNvPr>
-              <p:cNvSpPr>
-                <a:spLocks noGrp="1"/>
-              </p:cNvSpPr>
-              <p:nvPr>
-                <p:ph idx="1"/>
-              </p:nvPr>
-            </p:nvSpPr>
-            <p:spPr>
-              <a:xfrm>
-                <a:off x="238125" y="1825624"/>
-                <a:ext cx="11408930" cy="4918075"/>
-              </a:xfrm>
-            </p:spPr>
-            <p:txBody>
-              <a:bodyPr>
-                <a:normAutofit/>
-              </a:bodyPr>
-              <a:lstStyle/>
-              <a:p>
-                <a:endParaRPr lang="en-US" b="1" dirty="0"/>
-              </a:p>
-              <a:p>
-                <a:pPr marL="457200" lvl="1" indent="0">
-                  <a:buNone/>
-                </a:pPr>
-                <a:r>
-                  <a:rPr lang="en-US" b="1" dirty="0"/>
-                  <a:t>Stem and leaf plots </a:t>
-                </a:r>
-                <a:r>
-                  <a:rPr lang="en-US" dirty="0"/>
-                  <a:t>and </a:t>
-                </a:r>
-                <a:r>
-                  <a:rPr lang="en-US" b="1" dirty="0"/>
-                  <a:t>dot plots</a:t>
-                </a:r>
-                <a:r>
-                  <a:rPr lang="en-US" dirty="0"/>
-                  <a:t> are unwieldy for large </a:t>
-                </a:r>
-                <a14:m>
-                  <m:oMath xmlns:m="http://schemas.openxmlformats.org/officeDocument/2006/math">
-                    <m:r>
-                      <a:rPr lang="en-US" b="0" i="1" smtClean="0">
-                        <a:latin typeface="Cambria Math" panose="02040503050406030204" pitchFamily="18" charset="0"/>
-                      </a:rPr>
-                      <m:t>𝑛</m:t>
-                    </m:r>
-                  </m:oMath>
-                </a14:m>
-                <a:r>
-                  <a:rPr lang="en-US" dirty="0"/>
-                  <a:t> </a:t>
-                </a:r>
-              </a:p>
-              <a:p>
-                <a:pPr marL="457200" lvl="1" indent="0">
-                  <a:buNone/>
-                </a:pPr>
-                <a:endParaRPr lang="en-US" dirty="0"/>
-              </a:p>
-              <a:p>
-                <a:pPr marL="457200" lvl="1" indent="0">
-                  <a:buNone/>
-                </a:pPr>
-                <a:r>
-                  <a:rPr lang="en-US" b="1" dirty="0"/>
-                  <a:t>Histogram </a:t>
-                </a:r>
-                <a:r>
-                  <a:rPr lang="en-US" dirty="0"/>
-                  <a:t>– uses bars to portray the frequencies or relative frequencies of the possible outcomes for a quantitative variable </a:t>
-                </a:r>
-              </a:p>
-              <a:p>
-                <a:pPr marL="914400" lvl="2" indent="0">
-                  <a:buNone/>
-                </a:pPr>
-                <a:endParaRPr lang="en-US" b="1" dirty="0"/>
-              </a:p>
-              <a:p>
-                <a:pPr marL="457200" lvl="1" indent="0">
-                  <a:buNone/>
-                </a:pPr>
-                <a:r>
-                  <a:rPr lang="en-US" b="1" dirty="0"/>
-                  <a:t>Steps to construct a histogram </a:t>
-                </a:r>
-              </a:p>
-              <a:p>
-                <a:pPr marL="914400" lvl="1" indent="-457200">
-                  <a:buFont typeface="+mj-lt"/>
-                  <a:buAutoNum type="arabicPeriod"/>
-                </a:pPr>
-                <a:r>
-                  <a:rPr lang="en-US" b="1" dirty="0"/>
-                  <a:t>Divide the range of the data into intervals of equal width</a:t>
-                </a:r>
-              </a:p>
-              <a:p>
-                <a:pPr marL="914400" lvl="1" indent="-457200">
-                  <a:buFont typeface="+mj-lt"/>
-                  <a:buAutoNum type="arabicPeriod"/>
-                </a:pPr>
-                <a:r>
-                  <a:rPr lang="en-US" b="1" dirty="0"/>
-                  <a:t>Compute the frequency of each interval (</a:t>
-                </a:r>
-                <a:r>
-                  <a:rPr lang="en-US" b="1" dirty="0" err="1"/>
-                  <a:t>i.e</a:t>
-                </a:r>
-                <a:r>
-                  <a:rPr lang="en-US" b="1" dirty="0"/>
-                  <a:t> construct the frequency table)</a:t>
-                </a:r>
-              </a:p>
-              <a:p>
-                <a:pPr marL="914400" lvl="1" indent="-457200">
-                  <a:buFont typeface="+mj-lt"/>
-                  <a:buAutoNum type="arabicPeriod"/>
-                </a:pPr>
-                <a:r>
-                  <a:rPr lang="en-US" b="1" dirty="0"/>
-                  <a:t>Label the x-axis with the values or endpoints of each interval.</a:t>
-                </a:r>
-              </a:p>
-              <a:p>
-                <a:pPr marL="914400" lvl="1" indent="-457200">
-                  <a:buFont typeface="+mj-lt"/>
-                  <a:buAutoNum type="arabicPeriod"/>
-                </a:pPr>
-                <a:r>
-                  <a:rPr lang="en-US" b="1" dirty="0"/>
-                  <a:t>Draw a bar over each value or interval with height equal to its frequency or relative frequency</a:t>
-                </a:r>
-              </a:p>
-              <a:p>
-                <a:pPr marL="914400" lvl="1" indent="-457200">
-                  <a:buFont typeface="+mj-lt"/>
-                  <a:buAutoNum type="arabicPeriod"/>
-                </a:pPr>
-                <a:endParaRPr lang="en-US" b="1" dirty="0"/>
-              </a:p>
-              <a:p>
-                <a:pPr marL="457200" lvl="1" indent="0">
-                  <a:buNone/>
-                </a:pPr>
-                <a:endParaRPr lang="en-US" b="1" dirty="0"/>
-              </a:p>
-            </p:txBody>
-          </p:sp>
-        </mc:Choice>
-        <mc:Fallback xmlns="">
-          <p:sp>
-            <p:nvSpPr>
-              <p:cNvPr id="3" name="Content Placeholder 2">
-                <a:extLst>
-                  <a:ext uri="{FF2B5EF4-FFF2-40B4-BE49-F238E27FC236}">
-                    <a16:creationId xmlns:a16="http://schemas.microsoft.com/office/drawing/2014/main" id="{058FD37C-6477-7C00-926C-1FB666199849}"/>
-                  </a:ext>
-                </a:extLst>
-              </p:cNvPr>
-              <p:cNvSpPr>
-                <a:spLocks noGrp="1" noRot="1" noChangeAspect="1" noMove="1" noResize="1" noEditPoints="1" noAdjustHandles="1" noChangeArrowheads="1" noChangeShapeType="1" noTextEdit="1"/>
-              </p:cNvSpPr>
-              <p:nvPr>
-                <p:ph idx="1"/>
-              </p:nvPr>
-            </p:nvSpPr>
-            <p:spPr>
-              <a:xfrm>
-                <a:off x="238125" y="1825624"/>
-                <a:ext cx="11408930" cy="4918075"/>
-              </a:xfrm>
-              <a:blipFill>
-                <a:blip r:embed="rId2"/>
-                <a:stretch>
-                  <a:fillRect/>
-                </a:stretch>
-              </a:blipFill>
-            </p:spPr>
-            <p:txBody>
-              <a:bodyPr/>
-              <a:lstStyle/>
-              <a:p>
-                <a:r>
-                  <a:rPr lang="en-US">
-                    <a:noFill/>
-                  </a:rPr>
-                  <a:t> </a:t>
-                </a:r>
-              </a:p>
-            </p:txBody>
-          </p:sp>
-        </mc:Fallback>
-      </mc:AlternateContent>
-    </p:spTree>
-    <p:extLst>
-      <p:ext uri="{BB962C8B-B14F-4D97-AF65-F5344CB8AC3E}">
-        <p14:creationId xmlns:p14="http://schemas.microsoft.com/office/powerpoint/2010/main" val="3233036324"/>
-      </p:ext>
-    </p:extLst>
-  </p:cSld>
-  <p:clrMapOvr>
-    <a:masterClrMapping/>
-  </p:clrMapOvr>
-</p:sld>
-</file>
-
-<file path=ppt/slides/slide29.xml><?xml version="1.0" encoding="utf-8"?>
-<p:sld xmlns:a="http://schemas.openxmlformats.org/drawingml/2006/main" xmlns:r="http://schemas.openxmlformats.org/officeDocument/2006/relationships" xmlns:p="http://schemas.openxmlformats.org/presentationml/2006/main">
-  <p:cSld>
-    <p:spTree>
-      <p:nvGrpSpPr>
-        <p:cNvPr id="1" name=""/>
-        <p:cNvGrpSpPr/>
-        <p:nvPr/>
-      </p:nvGrpSpPr>
-      <p:grpSpPr>
-        <a:xfrm>
-          <a:off x="0" y="0"/>
-          <a:ext cx="0" cy="0"/>
-          <a:chOff x="0" y="0"/>
-          <a:chExt cx="0" cy="0"/>
-        </a:xfrm>
-      </p:grpSpPr>
-      <p:sp>
-        <p:nvSpPr>
-          <p:cNvPr id="2" name="Title 1">
-            <a:extLst>
-              <a:ext uri="{FF2B5EF4-FFF2-40B4-BE49-F238E27FC236}">
-                <a16:creationId xmlns:a16="http://schemas.microsoft.com/office/drawing/2014/main" id="{6EA75132-6122-451D-8580-53616DB7E950}"/>
-              </a:ext>
-            </a:extLst>
-          </p:cNvPr>
-          <p:cNvSpPr>
-            <a:spLocks noGrp="1"/>
-          </p:cNvSpPr>
-          <p:nvPr>
-            <p:ph type="title"/>
-          </p:nvPr>
-        </p:nvSpPr>
-        <p:spPr>
-          <a:xfrm>
-            <a:off x="123824" y="272525"/>
-            <a:ext cx="10808856" cy="742660"/>
-          </a:xfrm>
-        </p:spPr>
-        <p:txBody>
-          <a:bodyPr vert="horz" lIns="91440" tIns="45720" rIns="91440" bIns="45720" rtlCol="0" anchor="b">
-            <a:normAutofit/>
-          </a:bodyPr>
-          <a:lstStyle/>
-          <a:p>
-            <a:r>
-              <a:rPr lang="en-US" sz="4000" kern="1200" dirty="0">
-                <a:solidFill>
-                  <a:schemeClr val="tx1"/>
-                </a:solidFill>
-                <a:latin typeface="+mj-lt"/>
-                <a:ea typeface="+mj-ea"/>
-                <a:cs typeface="+mj-cs"/>
-              </a:rPr>
-              <a:t>Try it out: Histogram</a:t>
-            </a:r>
-          </a:p>
-        </p:txBody>
-      </p:sp>
-      <p:sp>
-        <p:nvSpPr>
-          <p:cNvPr id="4" name="Content Placeholder 2">
-            <a:extLst>
-              <a:ext uri="{FF2B5EF4-FFF2-40B4-BE49-F238E27FC236}">
-                <a16:creationId xmlns:a16="http://schemas.microsoft.com/office/drawing/2014/main" id="{C933D906-CF81-5AD4-2902-D9DD0E0EF8B7}"/>
-              </a:ext>
-            </a:extLst>
-          </p:cNvPr>
-          <p:cNvSpPr txBox="1">
-            <a:spLocks/>
-          </p:cNvSpPr>
-          <p:nvPr/>
-        </p:nvSpPr>
-        <p:spPr>
-          <a:xfrm>
-            <a:off x="445365" y="2714328"/>
-            <a:ext cx="11746635" cy="1429343"/>
-          </a:xfrm>
-          <a:prstGeom prst="rect">
-            <a:avLst/>
-          </a:prstGeom>
-        </p:spPr>
-        <p:txBody>
-          <a:bodyPr vert="horz" lIns="91440" tIns="45720" rIns="91440" bIns="45720" rtlCol="0">
-            <a:normAutofit/>
-          </a:bodyPr>
-          <a:lstStyle>
-            <a:lvl1pPr marL="228600" indent="-228600" algn="l" defTabSz="914400" rtl="0" eaLnBrk="1" latinLnBrk="0" hangingPunct="1">
-              <a:lnSpc>
-                <a:spcPct val="90000"/>
-              </a:lnSpc>
-              <a:spcBef>
-                <a:spcPts val="1000"/>
-              </a:spcBef>
-              <a:buFont typeface="Arial" panose="020B0604020202020204" pitchFamily="34" charset="0"/>
-              <a:buChar char="•"/>
-              <a:defRPr sz="2800" kern="1200">
-                <a:solidFill>
-                  <a:schemeClr val="tx1"/>
-                </a:solidFill>
-                <a:latin typeface="+mn-lt"/>
-                <a:ea typeface="+mn-ea"/>
-                <a:cs typeface="+mn-cs"/>
-              </a:defRPr>
-            </a:lvl1pPr>
-            <a:lvl2pPr marL="685800" indent="-228600" algn="l" defTabSz="914400" rtl="0" eaLnBrk="1" latinLnBrk="0" hangingPunct="1">
-              <a:lnSpc>
-                <a:spcPct val="90000"/>
-              </a:lnSpc>
-              <a:spcBef>
-                <a:spcPts val="500"/>
-              </a:spcBef>
-              <a:buFont typeface="Arial" panose="020B0604020202020204" pitchFamily="34" charset="0"/>
-              <a:buChar char="•"/>
-              <a:defRPr sz="2400" kern="1200">
-                <a:solidFill>
-                  <a:schemeClr val="tx1"/>
-                </a:solidFill>
-                <a:latin typeface="+mn-lt"/>
-                <a:ea typeface="+mn-ea"/>
-                <a:cs typeface="+mn-cs"/>
-              </a:defRPr>
-            </a:lvl2pPr>
-            <a:lvl3pPr marL="1143000" indent="-228600" algn="l" defTabSz="914400" rtl="0" eaLnBrk="1" latinLnBrk="0" hangingPunct="1">
-              <a:lnSpc>
-                <a:spcPct val="90000"/>
-              </a:lnSpc>
-              <a:spcBef>
-                <a:spcPts val="500"/>
-              </a:spcBef>
-              <a:buFont typeface="Arial" panose="020B0604020202020204" pitchFamily="34" charset="0"/>
-              <a:buChar char="•"/>
-              <a:defRPr sz="2000" kern="1200">
-                <a:solidFill>
-                  <a:schemeClr val="tx1"/>
-                </a:solidFill>
-                <a:latin typeface="+mn-lt"/>
-                <a:ea typeface="+mn-ea"/>
-                <a:cs typeface="+mn-cs"/>
-              </a:defRPr>
-            </a:lvl3pPr>
-            <a:lvl4pPr marL="1600200" indent="-228600" algn="l" defTabSz="914400" rtl="0" eaLnBrk="1" latinLnBrk="0" hangingPunct="1">
-              <a:lnSpc>
-                <a:spcPct val="90000"/>
-              </a:lnSpc>
-              <a:spcBef>
-                <a:spcPts val="500"/>
-              </a:spcBef>
-              <a:buFont typeface="Arial" panose="020B0604020202020204" pitchFamily="34" charset="0"/>
-              <a:buChar char="•"/>
-              <a:defRPr sz="1800" kern="1200">
-                <a:solidFill>
-                  <a:schemeClr val="tx1"/>
-                </a:solidFill>
-                <a:latin typeface="+mn-lt"/>
-                <a:ea typeface="+mn-ea"/>
-                <a:cs typeface="+mn-cs"/>
-              </a:defRPr>
-            </a:lvl4pPr>
-            <a:lvl5pPr marL="2057400" indent="-228600" algn="l" defTabSz="914400" rtl="0" eaLnBrk="1" latinLnBrk="0" hangingPunct="1">
-              <a:lnSpc>
-                <a:spcPct val="90000"/>
-              </a:lnSpc>
-              <a:spcBef>
-                <a:spcPts val="500"/>
-              </a:spcBef>
-              <a:buFont typeface="Arial" panose="020B0604020202020204" pitchFamily="34" charset="0"/>
-              <a:buChar char="•"/>
-              <a:defRPr sz="1800" kern="1200">
-                <a:solidFill>
-                  <a:schemeClr val="tx1"/>
-                </a:solidFill>
-                <a:latin typeface="+mn-lt"/>
-                <a:ea typeface="+mn-ea"/>
-                <a:cs typeface="+mn-cs"/>
-              </a:defRPr>
-            </a:lvl5pPr>
-            <a:lvl6pPr marL="2514600" indent="-228600" algn="l" defTabSz="914400" rtl="0" eaLnBrk="1" latinLnBrk="0" hangingPunct="1">
-              <a:lnSpc>
-                <a:spcPct val="90000"/>
-              </a:lnSpc>
-              <a:spcBef>
-                <a:spcPts val="500"/>
-              </a:spcBef>
-              <a:buFont typeface="Arial" panose="020B0604020202020204" pitchFamily="34" charset="0"/>
-              <a:buChar char="•"/>
-              <a:defRPr sz="1800" kern="1200">
-                <a:solidFill>
-                  <a:schemeClr val="tx1"/>
-                </a:solidFill>
-                <a:latin typeface="+mn-lt"/>
-                <a:ea typeface="+mn-ea"/>
-                <a:cs typeface="+mn-cs"/>
-              </a:defRPr>
-            </a:lvl6pPr>
-            <a:lvl7pPr marL="2971800" indent="-228600" algn="l" defTabSz="914400" rtl="0" eaLnBrk="1" latinLnBrk="0" hangingPunct="1">
-              <a:lnSpc>
-                <a:spcPct val="90000"/>
-              </a:lnSpc>
-              <a:spcBef>
-                <a:spcPts val="500"/>
-              </a:spcBef>
-              <a:buFont typeface="Arial" panose="020B0604020202020204" pitchFamily="34" charset="0"/>
-              <a:buChar char="•"/>
-              <a:defRPr sz="1800" kern="1200">
-                <a:solidFill>
-                  <a:schemeClr val="tx1"/>
-                </a:solidFill>
-                <a:latin typeface="+mn-lt"/>
-                <a:ea typeface="+mn-ea"/>
-                <a:cs typeface="+mn-cs"/>
-              </a:defRPr>
-            </a:lvl7pPr>
-            <a:lvl8pPr marL="3429000" indent="-228600" algn="l" defTabSz="914400" rtl="0" eaLnBrk="1" latinLnBrk="0" hangingPunct="1">
-              <a:lnSpc>
-                <a:spcPct val="90000"/>
-              </a:lnSpc>
-              <a:spcBef>
-                <a:spcPts val="500"/>
-              </a:spcBef>
-              <a:buFont typeface="Arial" panose="020B0604020202020204" pitchFamily="34" charset="0"/>
-              <a:buChar char="•"/>
-              <a:defRPr sz="1800" kern="1200">
-                <a:solidFill>
-                  <a:schemeClr val="tx1"/>
-                </a:solidFill>
-                <a:latin typeface="+mn-lt"/>
-                <a:ea typeface="+mn-ea"/>
-                <a:cs typeface="+mn-cs"/>
-              </a:defRPr>
-            </a:lvl8pPr>
-            <a:lvl9pPr marL="3886200" indent="-228600" algn="l" defTabSz="914400" rtl="0" eaLnBrk="1" latinLnBrk="0" hangingPunct="1">
-              <a:lnSpc>
-                <a:spcPct val="90000"/>
-              </a:lnSpc>
-              <a:spcBef>
-                <a:spcPts val="500"/>
-              </a:spcBef>
-              <a:buFont typeface="Arial" panose="020B0604020202020204" pitchFamily="34" charset="0"/>
-              <a:buChar char="•"/>
-              <a:defRPr sz="1800" kern="1200">
-                <a:solidFill>
-                  <a:schemeClr val="tx1"/>
-                </a:solidFill>
-                <a:latin typeface="+mn-lt"/>
-                <a:ea typeface="+mn-ea"/>
-                <a:cs typeface="+mn-cs"/>
-              </a:defRPr>
-            </a:lvl9pPr>
-          </a:lstStyle>
-          <a:p>
-            <a:pPr marL="0" marR="0" lvl="0" indent="0" algn="l" defTabSz="914400" rtl="0" eaLnBrk="1" fontAlgn="auto" latinLnBrk="0" hangingPunct="1">
-              <a:lnSpc>
-                <a:spcPct val="90000"/>
-              </a:lnSpc>
-              <a:spcBef>
-                <a:spcPts val="1000"/>
-              </a:spcBef>
-              <a:spcAft>
-                <a:spcPts val="0"/>
-              </a:spcAft>
-              <a:buClrTx/>
-              <a:buSzTx/>
-              <a:buFont typeface="Arial" panose="020B0604020202020204" pitchFamily="34" charset="0"/>
-              <a:buNone/>
-              <a:tabLst/>
-              <a:defRPr/>
-            </a:pPr>
-            <a:r>
-              <a:rPr lang="en-US" sz="2400" dirty="0">
-                <a:solidFill>
-                  <a:prstClr val="black"/>
-                </a:solidFill>
-                <a:latin typeface="Calibri" panose="020F0502020204030204"/>
-              </a:rPr>
-              <a:t>x</a:t>
-            </a:r>
-            <a:r>
-              <a:rPr kumimoji="0" lang="en-US" sz="2400" b="0" i="0" u="none" strike="noStrike" kern="1200" cap="none" spc="0" normalizeH="0" baseline="0" noProof="0" dirty="0">
-                <a:ln>
-                  <a:noFill/>
-                </a:ln>
-                <a:solidFill>
-                  <a:prstClr val="black"/>
-                </a:solidFill>
-                <a:effectLst/>
-                <a:uLnTx/>
-                <a:uFillTx/>
-                <a:latin typeface="Calibri" panose="020F0502020204030204"/>
-                <a:ea typeface="+mn-ea"/>
-                <a:cs typeface="+mn-cs"/>
-              </a:rPr>
-              <a:t> </a:t>
-            </a:r>
-            <a:r>
-              <a:rPr kumimoji="0" lang="en-US" sz="2000" b="0" i="0" u="none" strike="noStrike" kern="1200" cap="none" spc="0" normalizeH="0" baseline="0" noProof="0" dirty="0">
-                <a:ln>
-                  <a:noFill/>
-                </a:ln>
-                <a:solidFill>
-                  <a:prstClr val="black"/>
-                </a:solidFill>
-                <a:effectLst/>
-                <a:uLnTx/>
-                <a:uFillTx/>
-                <a:latin typeface="Calibri" panose="020F0502020204030204"/>
-                <a:ea typeface="+mn-ea"/>
-                <a:cs typeface="+mn-cs"/>
-              </a:rPr>
-              <a:t>= -1.5, -1.2, -1.0, -0.8, -0.7, -0.6, -0.1, -0.1,  0.1,  0.1,  0.1,  0.6,  0.6,  0.8,  1.1,  1.2,  1.3,  1.8,  1.9,  2.4 </a:t>
-            </a:r>
-          </a:p>
-          <a:p>
-            <a:pPr marL="228600" marR="0" lvl="0" indent="-228600" algn="l" defTabSz="914400" rtl="0" eaLnBrk="1" fontAlgn="auto" latinLnBrk="0" hangingPunct="1">
-              <a:lnSpc>
-                <a:spcPct val="90000"/>
-              </a:lnSpc>
-              <a:spcBef>
-                <a:spcPts val="1000"/>
-              </a:spcBef>
-              <a:spcAft>
-                <a:spcPts val="0"/>
-              </a:spcAft>
-              <a:buClrTx/>
-              <a:buSzTx/>
-              <a:buFont typeface="Arial" panose="020B0604020202020204" pitchFamily="34" charset="0"/>
-              <a:buChar char="•"/>
-              <a:tabLst/>
-              <a:defRPr/>
-            </a:pPr>
-            <a:endParaRPr kumimoji="0" lang="en-US" sz="2000" b="0" i="0" u="none" strike="noStrike" kern="1200" cap="none" spc="0" normalizeH="0" baseline="0" noProof="0" dirty="0">
-              <a:ln>
-                <a:noFill/>
-              </a:ln>
-              <a:solidFill>
-                <a:prstClr val="black"/>
-              </a:solidFill>
-              <a:effectLst/>
-              <a:uLnTx/>
-              <a:uFillTx/>
-              <a:latin typeface="Calibri" panose="020F0502020204030204"/>
-              <a:ea typeface="+mn-ea"/>
-              <a:cs typeface="+mn-cs"/>
-            </a:endParaRPr>
-          </a:p>
-        </p:txBody>
-      </p:sp>
-      <p:sp>
-        <p:nvSpPr>
-          <p:cNvPr id="8" name="Rectangle 7">
-            <a:extLst>
-              <a:ext uri="{FF2B5EF4-FFF2-40B4-BE49-F238E27FC236}">
-                <a16:creationId xmlns:a16="http://schemas.microsoft.com/office/drawing/2014/main" id="{6F213490-33AD-E45E-125B-D7FA89BFD34B}"/>
-              </a:ext>
-            </a:extLst>
-          </p:cNvPr>
-          <p:cNvSpPr/>
-          <p:nvPr/>
-        </p:nvSpPr>
-        <p:spPr>
-          <a:xfrm>
-            <a:off x="886692" y="2714328"/>
-            <a:ext cx="1551708" cy="352425"/>
-          </a:xfrm>
-          <a:prstGeom prst="rect">
-            <a:avLst/>
-          </a:prstGeom>
-          <a:noFill/>
-          <a:ln w="38100">
-            <a:solidFill>
-              <a:srgbClr val="C00000"/>
-            </a:solidFill>
-          </a:ln>
-        </p:spPr>
-        <p:style>
-          <a:lnRef idx="2">
-            <a:schemeClr val="accent1">
-              <a:shade val="15000"/>
-            </a:schemeClr>
-          </a:lnRef>
-          <a:fillRef idx="1">
-            <a:schemeClr val="accent1"/>
-          </a:fillRef>
-          <a:effectRef idx="0">
-            <a:schemeClr val="accent1"/>
-          </a:effectRef>
-          <a:fontRef idx="minor">
-            <a:schemeClr val="lt1"/>
-          </a:fontRef>
-        </p:style>
-        <p:txBody>
-          <a:bodyPr rtlCol="0" anchor="ctr"/>
-          <a:lstStyle/>
-          <a:p>
-            <a:pPr marL="0" marR="0" lvl="0" indent="0" algn="ctr" defTabSz="914400" rtl="0" eaLnBrk="1" fontAlgn="auto" latinLnBrk="0" hangingPunct="1">
-              <a:lnSpc>
-                <a:spcPct val="100000"/>
-              </a:lnSpc>
-              <a:spcBef>
-                <a:spcPts val="0"/>
-              </a:spcBef>
-              <a:spcAft>
-                <a:spcPts val="0"/>
-              </a:spcAft>
-              <a:buClrTx/>
-              <a:buSzTx/>
-              <a:buFontTx/>
-              <a:buNone/>
-              <a:tabLst/>
-              <a:defRPr/>
-            </a:pPr>
-            <a:endParaRPr kumimoji="0" lang="en-US" sz="1800" b="0" i="0" u="none" strike="noStrike" kern="1200" cap="none" spc="0" normalizeH="0" baseline="0" noProof="0">
-              <a:ln>
-                <a:noFill/>
-              </a:ln>
-              <a:solidFill>
-                <a:prstClr val="white"/>
-              </a:solidFill>
-              <a:effectLst/>
-              <a:uLnTx/>
-              <a:uFillTx/>
-              <a:latin typeface="Calibri" panose="020F0502020204030204"/>
-              <a:ea typeface="+mn-ea"/>
-              <a:cs typeface="+mn-cs"/>
-            </a:endParaRPr>
-          </a:p>
-        </p:txBody>
-      </p:sp>
-      <p:sp>
-        <p:nvSpPr>
-          <p:cNvPr id="10" name="Rectangle 9">
-            <a:extLst>
-              <a:ext uri="{FF2B5EF4-FFF2-40B4-BE49-F238E27FC236}">
-                <a16:creationId xmlns:a16="http://schemas.microsoft.com/office/drawing/2014/main" id="{162BE3A7-1702-3816-F90B-109E53109E51}"/>
-              </a:ext>
-            </a:extLst>
-          </p:cNvPr>
-          <p:cNvSpPr/>
-          <p:nvPr/>
-        </p:nvSpPr>
-        <p:spPr>
-          <a:xfrm>
-            <a:off x="2438400" y="2717637"/>
-            <a:ext cx="2613891" cy="352425"/>
-          </a:xfrm>
-          <a:prstGeom prst="rect">
-            <a:avLst/>
-          </a:prstGeom>
-          <a:noFill/>
-          <a:ln w="38100">
-            <a:solidFill>
-              <a:srgbClr val="00B050"/>
-            </a:solidFill>
-          </a:ln>
-        </p:spPr>
-        <p:style>
-          <a:lnRef idx="2">
-            <a:schemeClr val="accent1">
-              <a:shade val="15000"/>
-            </a:schemeClr>
-          </a:lnRef>
-          <a:fillRef idx="1">
-            <a:schemeClr val="accent1"/>
-          </a:fillRef>
-          <a:effectRef idx="0">
-            <a:schemeClr val="accent1"/>
-          </a:effectRef>
-          <a:fontRef idx="minor">
-            <a:schemeClr val="lt1"/>
-          </a:fontRef>
-        </p:style>
-        <p:txBody>
-          <a:bodyPr rtlCol="0" anchor="ctr"/>
-          <a:lstStyle/>
-          <a:p>
-            <a:pPr marL="0" marR="0" lvl="0" indent="0" algn="ctr" defTabSz="914400" rtl="0" eaLnBrk="1" fontAlgn="auto" latinLnBrk="0" hangingPunct="1">
-              <a:lnSpc>
-                <a:spcPct val="100000"/>
-              </a:lnSpc>
-              <a:spcBef>
-                <a:spcPts val="0"/>
-              </a:spcBef>
-              <a:spcAft>
-                <a:spcPts val="0"/>
-              </a:spcAft>
-              <a:buClrTx/>
-              <a:buSzTx/>
-              <a:buFontTx/>
-              <a:buNone/>
-              <a:tabLst/>
-              <a:defRPr/>
-            </a:pPr>
-            <a:endParaRPr kumimoji="0" lang="en-US" sz="1800" b="0" i="0" u="none" strike="noStrike" kern="1200" cap="none" spc="0" normalizeH="0" baseline="0" noProof="0">
-              <a:ln>
-                <a:noFill/>
-              </a:ln>
-              <a:solidFill>
-                <a:prstClr val="white"/>
-              </a:solidFill>
-              <a:effectLst/>
-              <a:uLnTx/>
-              <a:uFillTx/>
-              <a:latin typeface="Calibri" panose="020F0502020204030204"/>
-              <a:ea typeface="+mn-ea"/>
-              <a:cs typeface="+mn-cs"/>
-            </a:endParaRPr>
-          </a:p>
-        </p:txBody>
-      </p:sp>
-      <p:sp>
-        <p:nvSpPr>
-          <p:cNvPr id="11" name="Rectangle 10">
-            <a:extLst>
-              <a:ext uri="{FF2B5EF4-FFF2-40B4-BE49-F238E27FC236}">
-                <a16:creationId xmlns:a16="http://schemas.microsoft.com/office/drawing/2014/main" id="{E32DFA3D-1F2D-810A-D784-FDFCB6351755}"/>
-              </a:ext>
-            </a:extLst>
-          </p:cNvPr>
-          <p:cNvSpPr/>
-          <p:nvPr/>
-        </p:nvSpPr>
-        <p:spPr>
-          <a:xfrm>
-            <a:off x="5056909" y="2714082"/>
-            <a:ext cx="3034146" cy="352425"/>
-          </a:xfrm>
-          <a:prstGeom prst="rect">
-            <a:avLst/>
-          </a:prstGeom>
-          <a:noFill/>
-          <a:ln w="38100">
-            <a:solidFill>
-              <a:srgbClr val="0070C0"/>
-            </a:solidFill>
-          </a:ln>
-        </p:spPr>
-        <p:style>
-          <a:lnRef idx="2">
-            <a:schemeClr val="accent1">
-              <a:shade val="15000"/>
-            </a:schemeClr>
-          </a:lnRef>
-          <a:fillRef idx="1">
-            <a:schemeClr val="accent1"/>
-          </a:fillRef>
-          <a:effectRef idx="0">
-            <a:schemeClr val="accent1"/>
-          </a:effectRef>
-          <a:fontRef idx="minor">
-            <a:schemeClr val="lt1"/>
-          </a:fontRef>
-        </p:style>
-        <p:txBody>
-          <a:bodyPr rtlCol="0" anchor="ctr"/>
-          <a:lstStyle/>
-          <a:p>
-            <a:pPr marL="0" marR="0" lvl="0" indent="0" algn="ctr" defTabSz="914400" rtl="0" eaLnBrk="1" fontAlgn="auto" latinLnBrk="0" hangingPunct="1">
-              <a:lnSpc>
-                <a:spcPct val="100000"/>
-              </a:lnSpc>
-              <a:spcBef>
-                <a:spcPts val="0"/>
-              </a:spcBef>
-              <a:spcAft>
-                <a:spcPts val="0"/>
-              </a:spcAft>
-              <a:buClrTx/>
-              <a:buSzTx/>
-              <a:buFontTx/>
-              <a:buNone/>
-              <a:tabLst/>
-              <a:defRPr/>
-            </a:pPr>
-            <a:endParaRPr kumimoji="0" lang="en-US" sz="1800" b="0" i="0" u="none" strike="noStrike" kern="1200" cap="none" spc="0" normalizeH="0" baseline="0" noProof="0">
-              <a:ln>
-                <a:noFill/>
-              </a:ln>
-              <a:solidFill>
-                <a:prstClr val="white"/>
-              </a:solidFill>
-              <a:effectLst/>
-              <a:uLnTx/>
-              <a:uFillTx/>
-              <a:latin typeface="Calibri" panose="020F0502020204030204"/>
-              <a:ea typeface="+mn-ea"/>
-              <a:cs typeface="+mn-cs"/>
-            </a:endParaRPr>
-          </a:p>
-        </p:txBody>
-      </p:sp>
-      <p:sp>
-        <p:nvSpPr>
-          <p:cNvPr id="12" name="TextBox 11">
-            <a:extLst>
-              <a:ext uri="{FF2B5EF4-FFF2-40B4-BE49-F238E27FC236}">
-                <a16:creationId xmlns:a16="http://schemas.microsoft.com/office/drawing/2014/main" id="{F7DB1E14-5CA4-E52D-1D4D-540E17BC5261}"/>
-              </a:ext>
-            </a:extLst>
-          </p:cNvPr>
-          <p:cNvSpPr txBox="1"/>
-          <p:nvPr/>
-        </p:nvSpPr>
-        <p:spPr>
-          <a:xfrm>
-            <a:off x="1335373" y="2244437"/>
-            <a:ext cx="654346" cy="369332"/>
-          </a:xfrm>
-          <a:prstGeom prst="rect">
-            <a:avLst/>
-          </a:prstGeom>
-          <a:noFill/>
-        </p:spPr>
-        <p:txBody>
-          <a:bodyPr wrap="none" rtlCol="0">
-            <a:spAutoFit/>
-          </a:bodyPr>
-          <a:lstStyle/>
-          <a:p>
-            <a:pPr marL="0" marR="0" lvl="0" indent="0" algn="l" defTabSz="914400" rtl="0" eaLnBrk="1" fontAlgn="auto" latinLnBrk="0" hangingPunct="1">
-              <a:lnSpc>
-                <a:spcPct val="100000"/>
-              </a:lnSpc>
-              <a:spcBef>
-                <a:spcPts val="0"/>
-              </a:spcBef>
-              <a:spcAft>
-                <a:spcPts val="0"/>
-              </a:spcAft>
-              <a:buClrTx/>
-              <a:buSzTx/>
-              <a:buFontTx/>
-              <a:buNone/>
-              <a:tabLst/>
-              <a:defRPr/>
-            </a:pPr>
-            <a:r>
-              <a:rPr kumimoji="0" lang="en-US" sz="1800" b="0" i="0" u="none" strike="noStrike" kern="1200" cap="none" spc="0" normalizeH="0" baseline="0" noProof="0" dirty="0">
-                <a:ln>
-                  <a:noFill/>
-                </a:ln>
-                <a:solidFill>
-                  <a:prstClr val="black"/>
-                </a:solidFill>
-                <a:effectLst/>
-                <a:uLnTx/>
-                <a:uFillTx/>
-                <a:latin typeface="Calibri" panose="020F0502020204030204"/>
-                <a:ea typeface="+mn-ea"/>
-                <a:cs typeface="+mn-cs"/>
-              </a:rPr>
-              <a:t>Bin 1</a:t>
-            </a:r>
-          </a:p>
-        </p:txBody>
-      </p:sp>
-      <p:sp>
-        <p:nvSpPr>
-          <p:cNvPr id="13" name="TextBox 12">
-            <a:extLst>
-              <a:ext uri="{FF2B5EF4-FFF2-40B4-BE49-F238E27FC236}">
-                <a16:creationId xmlns:a16="http://schemas.microsoft.com/office/drawing/2014/main" id="{4349E00A-FD2A-8691-15B7-0AA80B145502}"/>
-              </a:ext>
-            </a:extLst>
-          </p:cNvPr>
-          <p:cNvSpPr txBox="1"/>
-          <p:nvPr/>
-        </p:nvSpPr>
-        <p:spPr>
-          <a:xfrm>
-            <a:off x="3533258" y="2244437"/>
-            <a:ext cx="654346" cy="369332"/>
-          </a:xfrm>
-          <a:prstGeom prst="rect">
-            <a:avLst/>
-          </a:prstGeom>
-          <a:noFill/>
-        </p:spPr>
-        <p:txBody>
-          <a:bodyPr wrap="none" rtlCol="0">
-            <a:spAutoFit/>
-          </a:bodyPr>
-          <a:lstStyle/>
-          <a:p>
-            <a:pPr marL="0" marR="0" lvl="0" indent="0" algn="l" defTabSz="914400" rtl="0" eaLnBrk="1" fontAlgn="auto" latinLnBrk="0" hangingPunct="1">
-              <a:lnSpc>
-                <a:spcPct val="100000"/>
-              </a:lnSpc>
-              <a:spcBef>
-                <a:spcPts val="0"/>
-              </a:spcBef>
-              <a:spcAft>
-                <a:spcPts val="0"/>
-              </a:spcAft>
-              <a:buClrTx/>
-              <a:buSzTx/>
-              <a:buFontTx/>
-              <a:buNone/>
-              <a:tabLst/>
-              <a:defRPr/>
-            </a:pPr>
-            <a:r>
-              <a:rPr kumimoji="0" lang="en-US" sz="1800" b="0" i="0" u="none" strike="noStrike" kern="1200" cap="none" spc="0" normalizeH="0" baseline="0" noProof="0" dirty="0">
-                <a:ln>
-                  <a:noFill/>
-                </a:ln>
-                <a:solidFill>
-                  <a:prstClr val="black"/>
-                </a:solidFill>
-                <a:effectLst/>
-                <a:uLnTx/>
-                <a:uFillTx/>
-                <a:latin typeface="Calibri" panose="020F0502020204030204"/>
-                <a:ea typeface="+mn-ea"/>
-                <a:cs typeface="+mn-cs"/>
-              </a:rPr>
-              <a:t>Bin 2</a:t>
-            </a:r>
-          </a:p>
-        </p:txBody>
-      </p:sp>
-      <p:sp>
-        <p:nvSpPr>
-          <p:cNvPr id="14" name="TextBox 13">
-            <a:extLst>
-              <a:ext uri="{FF2B5EF4-FFF2-40B4-BE49-F238E27FC236}">
-                <a16:creationId xmlns:a16="http://schemas.microsoft.com/office/drawing/2014/main" id="{C0EBB7CE-1134-61D1-9E84-7D80185C0A5D}"/>
-              </a:ext>
-            </a:extLst>
-          </p:cNvPr>
-          <p:cNvSpPr txBox="1"/>
-          <p:nvPr/>
-        </p:nvSpPr>
-        <p:spPr>
-          <a:xfrm>
-            <a:off x="6246809" y="2244437"/>
-            <a:ext cx="654346" cy="369332"/>
-          </a:xfrm>
-          <a:prstGeom prst="rect">
-            <a:avLst/>
-          </a:prstGeom>
-          <a:noFill/>
-        </p:spPr>
-        <p:txBody>
-          <a:bodyPr wrap="none" rtlCol="0">
-            <a:spAutoFit/>
-          </a:bodyPr>
-          <a:lstStyle/>
-          <a:p>
-            <a:pPr marL="0" marR="0" lvl="0" indent="0" algn="l" defTabSz="914400" rtl="0" eaLnBrk="1" fontAlgn="auto" latinLnBrk="0" hangingPunct="1">
-              <a:lnSpc>
-                <a:spcPct val="100000"/>
-              </a:lnSpc>
-              <a:spcBef>
-                <a:spcPts val="0"/>
-              </a:spcBef>
-              <a:spcAft>
-                <a:spcPts val="0"/>
-              </a:spcAft>
-              <a:buClrTx/>
-              <a:buSzTx/>
-              <a:buFontTx/>
-              <a:buNone/>
-              <a:tabLst/>
-              <a:defRPr/>
-            </a:pPr>
-            <a:r>
-              <a:rPr kumimoji="0" lang="en-US" sz="1800" b="0" i="0" u="none" strike="noStrike" kern="1200" cap="none" spc="0" normalizeH="0" baseline="0" noProof="0" dirty="0">
-                <a:ln>
-                  <a:noFill/>
-                </a:ln>
-                <a:solidFill>
-                  <a:prstClr val="black"/>
-                </a:solidFill>
-                <a:effectLst/>
-                <a:uLnTx/>
-                <a:uFillTx/>
-                <a:latin typeface="Calibri" panose="020F0502020204030204"/>
-                <a:ea typeface="+mn-ea"/>
-                <a:cs typeface="+mn-cs"/>
-              </a:rPr>
-              <a:t>Bin 3</a:t>
-            </a:r>
-          </a:p>
-        </p:txBody>
-      </p:sp>
-      <p:sp>
-        <p:nvSpPr>
-          <p:cNvPr id="15" name="TextBox 14">
-            <a:extLst>
-              <a:ext uri="{FF2B5EF4-FFF2-40B4-BE49-F238E27FC236}">
-                <a16:creationId xmlns:a16="http://schemas.microsoft.com/office/drawing/2014/main" id="{66E79703-FDB1-EE29-83CF-5DB78B5B6876}"/>
-              </a:ext>
-            </a:extLst>
-          </p:cNvPr>
-          <p:cNvSpPr txBox="1"/>
-          <p:nvPr/>
-        </p:nvSpPr>
-        <p:spPr>
-          <a:xfrm>
-            <a:off x="9047449" y="2244437"/>
-            <a:ext cx="654346" cy="369332"/>
-          </a:xfrm>
-          <a:prstGeom prst="rect">
-            <a:avLst/>
-          </a:prstGeom>
-          <a:noFill/>
-        </p:spPr>
-        <p:txBody>
-          <a:bodyPr wrap="none" rtlCol="0">
-            <a:spAutoFit/>
-          </a:bodyPr>
-          <a:lstStyle/>
-          <a:p>
-            <a:pPr marL="0" marR="0" lvl="0" indent="0" algn="l" defTabSz="914400" rtl="0" eaLnBrk="1" fontAlgn="auto" latinLnBrk="0" hangingPunct="1">
-              <a:lnSpc>
-                <a:spcPct val="100000"/>
-              </a:lnSpc>
-              <a:spcBef>
-                <a:spcPts val="0"/>
-              </a:spcBef>
-              <a:spcAft>
-                <a:spcPts val="0"/>
-              </a:spcAft>
-              <a:buClrTx/>
-              <a:buSzTx/>
-              <a:buFontTx/>
-              <a:buNone/>
-              <a:tabLst/>
-              <a:defRPr/>
-            </a:pPr>
-            <a:r>
-              <a:rPr kumimoji="0" lang="en-US" sz="1800" b="0" i="0" u="none" strike="noStrike" kern="1200" cap="none" spc="0" normalizeH="0" baseline="0" noProof="0" dirty="0">
-                <a:ln>
-                  <a:noFill/>
-                </a:ln>
-                <a:solidFill>
-                  <a:prstClr val="black"/>
-                </a:solidFill>
-                <a:effectLst/>
-                <a:uLnTx/>
-                <a:uFillTx/>
-                <a:latin typeface="Calibri" panose="020F0502020204030204"/>
-                <a:ea typeface="+mn-ea"/>
-                <a:cs typeface="+mn-cs"/>
-              </a:rPr>
-              <a:t>Bin 4</a:t>
-            </a:r>
-          </a:p>
-        </p:txBody>
-      </p:sp>
-      <mc:AlternateContent xmlns:mc="http://schemas.openxmlformats.org/markup-compatibility/2006" xmlns:a14="http://schemas.microsoft.com/office/drawing/2010/main">
-        <mc:Choice Requires="a14">
-          <p:sp>
-            <p:nvSpPr>
-              <p:cNvPr id="3" name="TextBox 2">
-                <a:extLst>
-                  <a:ext uri="{FF2B5EF4-FFF2-40B4-BE49-F238E27FC236}">
-                    <a16:creationId xmlns:a16="http://schemas.microsoft.com/office/drawing/2014/main" id="{227883C8-8643-0C42-12FE-77851E1B8346}"/>
-                  </a:ext>
-                </a:extLst>
-              </p:cNvPr>
-              <p:cNvSpPr txBox="1"/>
-              <p:nvPr/>
-            </p:nvSpPr>
-            <p:spPr>
-              <a:xfrm>
-                <a:off x="591127" y="1330036"/>
-                <a:ext cx="8783495" cy="461665"/>
-              </a:xfrm>
-              <a:prstGeom prst="rect">
-                <a:avLst/>
-              </a:prstGeom>
-              <a:noFill/>
-            </p:spPr>
-            <p:txBody>
-              <a:bodyPr wrap="none" rtlCol="0">
-                <a:spAutoFit/>
-              </a:bodyPr>
-              <a:lstStyle/>
-              <a:p>
-                <a:r>
-                  <a:rPr lang="en-US" sz="2400" dirty="0"/>
-                  <a:t>Consider the following </a:t>
-                </a:r>
-                <a14:m>
-                  <m:oMath xmlns:m="http://schemas.openxmlformats.org/officeDocument/2006/math">
-                    <m:r>
-                      <a:rPr lang="en-US" sz="2400" b="0" i="1" smtClean="0">
-                        <a:latin typeface="Cambria Math" panose="02040503050406030204" pitchFamily="18" charset="0"/>
-                      </a:rPr>
-                      <m:t>𝑛</m:t>
-                    </m:r>
-                    <m:r>
-                      <a:rPr lang="en-US" sz="2400" b="0" i="1" smtClean="0">
-                        <a:latin typeface="Cambria Math" panose="02040503050406030204" pitchFamily="18" charset="0"/>
-                      </a:rPr>
-                      <m:t>=20 </m:t>
-                    </m:r>
-                  </m:oMath>
-                </a14:m>
-                <a:r>
-                  <a:rPr lang="en-US" sz="2400" dirty="0"/>
-                  <a:t> observations of a continuous variable</a:t>
-                </a:r>
-              </a:p>
-            </p:txBody>
-          </p:sp>
-        </mc:Choice>
-        <mc:Fallback xmlns="">
-          <p:sp>
-            <p:nvSpPr>
-              <p:cNvPr id="3" name="TextBox 2">
-                <a:extLst>
-                  <a:ext uri="{FF2B5EF4-FFF2-40B4-BE49-F238E27FC236}">
-                    <a16:creationId xmlns:a16="http://schemas.microsoft.com/office/drawing/2014/main" id="{227883C8-8643-0C42-12FE-77851E1B8346}"/>
-                  </a:ext>
-                </a:extLst>
-              </p:cNvPr>
-              <p:cNvSpPr txBox="1">
-                <a:spLocks noRot="1" noChangeAspect="1" noMove="1" noResize="1" noEditPoints="1" noAdjustHandles="1" noChangeArrowheads="1" noChangeShapeType="1" noTextEdit="1"/>
-              </p:cNvSpPr>
-              <p:nvPr/>
-            </p:nvSpPr>
-            <p:spPr>
-              <a:xfrm>
-                <a:off x="591127" y="1330036"/>
-                <a:ext cx="8783495" cy="461665"/>
-              </a:xfrm>
-              <a:prstGeom prst="rect">
-                <a:avLst/>
-              </a:prstGeom>
-              <a:blipFill>
-                <a:blip r:embed="rId2"/>
-                <a:stretch>
-                  <a:fillRect l="-1110" t="-10526" b="-28947"/>
-                </a:stretch>
-              </a:blipFill>
-            </p:spPr>
-            <p:txBody>
-              <a:bodyPr/>
-              <a:lstStyle/>
-              <a:p>
-                <a:r>
-                  <a:rPr lang="en-US">
-                    <a:noFill/>
-                  </a:rPr>
-                  <a:t> </a:t>
-                </a:r>
-              </a:p>
-            </p:txBody>
-          </p:sp>
-        </mc:Fallback>
-      </mc:AlternateContent>
-      <p:sp>
-        <p:nvSpPr>
-          <p:cNvPr id="17" name="TextBox 16">
-            <a:extLst>
-              <a:ext uri="{FF2B5EF4-FFF2-40B4-BE49-F238E27FC236}">
-                <a16:creationId xmlns:a16="http://schemas.microsoft.com/office/drawing/2014/main" id="{EA35771E-E8CA-C571-F4E4-AD86BA85E2A3}"/>
-              </a:ext>
-            </a:extLst>
-          </p:cNvPr>
-          <p:cNvSpPr txBox="1"/>
-          <p:nvPr/>
-        </p:nvSpPr>
-        <p:spPr>
-          <a:xfrm>
-            <a:off x="10452380" y="2288978"/>
-            <a:ext cx="654346" cy="369332"/>
-          </a:xfrm>
-          <a:prstGeom prst="rect">
-            <a:avLst/>
-          </a:prstGeom>
-          <a:noFill/>
-        </p:spPr>
-        <p:txBody>
-          <a:bodyPr wrap="none" rtlCol="0">
-            <a:spAutoFit/>
-          </a:bodyPr>
-          <a:lstStyle/>
-          <a:p>
-            <a:pPr marL="0" marR="0" lvl="0" indent="0" algn="l" defTabSz="914400" rtl="0" eaLnBrk="1" fontAlgn="auto" latinLnBrk="0" hangingPunct="1">
-              <a:lnSpc>
-                <a:spcPct val="100000"/>
-              </a:lnSpc>
-              <a:spcBef>
-                <a:spcPts val="0"/>
-              </a:spcBef>
-              <a:spcAft>
-                <a:spcPts val="0"/>
-              </a:spcAft>
-              <a:buClrTx/>
-              <a:buSzTx/>
-              <a:buFontTx/>
-              <a:buNone/>
-              <a:tabLst/>
-              <a:defRPr/>
-            </a:pPr>
-            <a:r>
-              <a:rPr kumimoji="0" lang="en-US" sz="1800" b="0" i="0" u="none" strike="noStrike" kern="1200" cap="none" spc="0" normalizeH="0" baseline="0" noProof="0" dirty="0">
-                <a:ln>
-                  <a:noFill/>
-                </a:ln>
-                <a:solidFill>
-                  <a:prstClr val="black"/>
-                </a:solidFill>
-                <a:effectLst/>
-                <a:uLnTx/>
-                <a:uFillTx/>
-                <a:latin typeface="Calibri" panose="020F0502020204030204"/>
-                <a:ea typeface="+mn-ea"/>
-                <a:cs typeface="+mn-cs"/>
-              </a:rPr>
-              <a:t>Bin 5</a:t>
-            </a:r>
-          </a:p>
-        </p:txBody>
-      </p:sp>
-      <p:pic>
-        <p:nvPicPr>
-          <p:cNvPr id="6" name="Picture 5" descr="Histogram of the twenty practice observations in five bins, each bar coloured to match the bin marked in the list of values above it. The bars rise to a peak of six in the middle bin and fall away on both sides.">
-            <a:extLst>
-              <a:ext uri="{FF2B5EF4-FFF2-40B4-BE49-F238E27FC236}">
-                <a16:creationId xmlns:a16="http://schemas.microsoft.com/office/drawing/2014/main" id="{AD8586AA-4204-7713-BBA1-0EA1B4445967}"/>
-              </a:ext>
-            </a:extLst>
-          </p:cNvPr>
-          <p:cNvPicPr>
-            <a:picLocks noChangeAspect="1"/>
-          </p:cNvPicPr>
-          <p:nvPr/>
-        </p:nvPicPr>
-        <p:blipFill>
-          <a:blip r:embed="rId3"/>
-          <a:stretch>
-            <a:fillRect/>
-          </a:stretch>
-        </p:blipFill>
-        <p:spPr>
-          <a:xfrm>
-            <a:off x="2544543" y="3490844"/>
-            <a:ext cx="7287642" cy="3286584"/>
-          </a:xfrm>
-          <a:prstGeom prst="rect">
-            <a:avLst/>
-          </a:prstGeom>
-        </p:spPr>
-      </p:pic>
-      <p:sp>
-        <p:nvSpPr>
-          <p:cNvPr id="18" name="Rectangle 17">
-            <a:extLst>
-              <a:ext uri="{FF2B5EF4-FFF2-40B4-BE49-F238E27FC236}">
-                <a16:creationId xmlns:a16="http://schemas.microsoft.com/office/drawing/2014/main" id="{F2DE21B1-71D4-A42F-0951-CFE21E065BD5}"/>
-              </a:ext>
-            </a:extLst>
-          </p:cNvPr>
-          <p:cNvSpPr/>
-          <p:nvPr/>
-        </p:nvSpPr>
-        <p:spPr>
-          <a:xfrm>
-            <a:off x="8091055" y="2717637"/>
-            <a:ext cx="2447636" cy="352425"/>
-          </a:xfrm>
-          <a:prstGeom prst="rect">
-            <a:avLst/>
-          </a:prstGeom>
-          <a:noFill/>
-          <a:ln w="38100">
-            <a:solidFill>
-              <a:srgbClr val="FFFF00"/>
-            </a:solidFill>
-          </a:ln>
-        </p:spPr>
-        <p:style>
-          <a:lnRef idx="2">
-            <a:schemeClr val="accent1">
-              <a:shade val="15000"/>
-            </a:schemeClr>
-          </a:lnRef>
-          <a:fillRef idx="1">
-            <a:schemeClr val="accent1"/>
-          </a:fillRef>
-          <a:effectRef idx="0">
-            <a:schemeClr val="accent1"/>
-          </a:effectRef>
-          <a:fontRef idx="minor">
-            <a:schemeClr val="lt1"/>
-          </a:fontRef>
-        </p:style>
-        <p:txBody>
-          <a:bodyPr rtlCol="0" anchor="ctr"/>
-          <a:lstStyle/>
-          <a:p>
-            <a:pPr marL="0" marR="0" lvl="0" indent="0" algn="ctr" defTabSz="914400" rtl="0" eaLnBrk="1" fontAlgn="auto" latinLnBrk="0" hangingPunct="1">
-              <a:lnSpc>
-                <a:spcPct val="100000"/>
-              </a:lnSpc>
-              <a:spcBef>
-                <a:spcPts val="0"/>
-              </a:spcBef>
-              <a:spcAft>
-                <a:spcPts val="0"/>
-              </a:spcAft>
-              <a:buClrTx/>
-              <a:buSzTx/>
-              <a:buFontTx/>
-              <a:buNone/>
-              <a:tabLst/>
-              <a:defRPr/>
-            </a:pPr>
-            <a:endParaRPr kumimoji="0" lang="en-US" sz="1800" b="0" i="0" u="none" strike="noStrike" kern="1200" cap="none" spc="0" normalizeH="0" baseline="0" noProof="0">
-              <a:ln>
-                <a:noFill/>
-              </a:ln>
-              <a:solidFill>
-                <a:prstClr val="white"/>
-              </a:solidFill>
-              <a:effectLst/>
-              <a:uLnTx/>
-              <a:uFillTx/>
-              <a:latin typeface="Calibri" panose="020F0502020204030204"/>
-              <a:ea typeface="+mn-ea"/>
-              <a:cs typeface="+mn-cs"/>
-            </a:endParaRPr>
-          </a:p>
-        </p:txBody>
-      </p:sp>
-      <p:sp>
-        <p:nvSpPr>
-          <p:cNvPr id="9" name="Rectangle 8">
-            <a:extLst>
-              <a:ext uri="{FF2B5EF4-FFF2-40B4-BE49-F238E27FC236}">
-                <a16:creationId xmlns:a16="http://schemas.microsoft.com/office/drawing/2014/main" id="{526F3A87-5B31-0332-7EB2-3FEAC81845AC}"/>
-              </a:ext>
-            </a:extLst>
-          </p:cNvPr>
-          <p:cNvSpPr/>
-          <p:nvPr/>
-        </p:nvSpPr>
-        <p:spPr>
-          <a:xfrm>
-            <a:off x="10538691" y="2711982"/>
-            <a:ext cx="481725" cy="352425"/>
-          </a:xfrm>
-          <a:prstGeom prst="rect">
-            <a:avLst/>
-          </a:prstGeom>
-          <a:noFill/>
-          <a:ln w="38100">
-            <a:solidFill>
-              <a:srgbClr val="FFC000"/>
-            </a:solidFill>
-          </a:ln>
-        </p:spPr>
-        <p:style>
-          <a:lnRef idx="2">
-            <a:schemeClr val="accent1">
-              <a:shade val="15000"/>
-            </a:schemeClr>
-          </a:lnRef>
-          <a:fillRef idx="1">
-            <a:schemeClr val="accent1"/>
-          </a:fillRef>
-          <a:effectRef idx="0">
-            <a:schemeClr val="accent1"/>
-          </a:effectRef>
-          <a:fontRef idx="minor">
-            <a:schemeClr val="lt1"/>
-          </a:fontRef>
-        </p:style>
-        <p:txBody>
-          <a:bodyPr rtlCol="0" anchor="ctr"/>
-          <a:lstStyle/>
-          <a:p>
-            <a:pPr marL="0" marR="0" lvl="0" indent="0" algn="ctr" defTabSz="914400" rtl="0" eaLnBrk="1" fontAlgn="auto" latinLnBrk="0" hangingPunct="1">
-              <a:lnSpc>
-                <a:spcPct val="100000"/>
-              </a:lnSpc>
-              <a:spcBef>
-                <a:spcPts val="0"/>
-              </a:spcBef>
-              <a:spcAft>
-                <a:spcPts val="0"/>
-              </a:spcAft>
-              <a:buClrTx/>
-              <a:buSzTx/>
-              <a:buFontTx/>
-              <a:buNone/>
-              <a:tabLst/>
-              <a:defRPr/>
-            </a:pPr>
-            <a:endParaRPr kumimoji="0" lang="en-US" sz="1800" b="0" i="0" u="none" strike="noStrike" kern="1200" cap="none" spc="0" normalizeH="0" baseline="0" noProof="0">
-              <a:ln>
-                <a:noFill/>
-              </a:ln>
-              <a:solidFill>
-                <a:prstClr val="white"/>
-              </a:solidFill>
-              <a:effectLst/>
-              <a:uLnTx/>
-              <a:uFillTx/>
-              <a:latin typeface="Calibri" panose="020F0502020204030204"/>
-              <a:ea typeface="+mn-ea"/>
-              <a:cs typeface="+mn-cs"/>
-            </a:endParaRPr>
-          </a:p>
-        </p:txBody>
-      </p:sp>
-    </p:spTree>
-    <p:extLst>
-      <p:ext uri="{BB962C8B-B14F-4D97-AF65-F5344CB8AC3E}">
-        <p14:creationId xmlns:p14="http://schemas.microsoft.com/office/powerpoint/2010/main" val="805339777"/>
-      </p:ext>
-    </p:extLst>
-  </p:cSld>
-  <p:clrMapOvr>
-    <a:masterClrMapping/>
-  </p:clrMapOvr>
-  <p:timing>
-    <p:tnLst>
-      <p:par>
-        <p:cTn id="1" dur="indefinite" restart="never" nodeType="tmRoot">
-          <p:childTnLst>
-            <p:seq concurrent="1" nextAc="seek">
-              <p:cTn id="2" dur="indefinite" nodeType="mainSeq">
-                <p:childTnLst>
-                  <p:par>
-                    <p:cTn id="3" fill="hold">
-                      <p:stCondLst>
-                        <p:cond delay="indefinite"/>
-                      </p:stCondLst>
-                      <p:childTnLst>
-                        <p:par>
-                          <p:cTn id="4" fill="hold">
-                            <p:stCondLst>
-                              <p:cond delay="0"/>
-                            </p:stCondLst>
-                            <p:childTnLst>
-                              <p:par>
-                                <p:cTn id="5" presetID="1" presetClass="entr" presetSubtype="0" fill="hold" grpId="0" nodeType="clickEffect">
-                                  <p:stCondLst>
-                                    <p:cond delay="0"/>
-                                  </p:stCondLst>
-                                  <p:childTnLst>
-                                    <p:set>
-                                      <p:cBhvr>
-                                        <p:cTn id="6" dur="1" fill="hold">
-                                          <p:stCondLst>
-                                            <p:cond delay="0"/>
-                                          </p:stCondLst>
-                                        </p:cTn>
-                                        <p:tgtEl>
-                                          <p:spTgt spid="12"/>
-                                        </p:tgtEl>
-                                        <p:attrNameLst>
-                                          <p:attrName>style.visibility</p:attrName>
-                                        </p:attrNameLst>
-                                      </p:cBhvr>
-                                      <p:to>
-                                        <p:strVal val="visible"/>
-                                      </p:to>
-                                    </p:set>
-                                  </p:childTnLst>
-                                </p:cTn>
-                              </p:par>
-                              <p:par>
-                                <p:cTn id="7" presetID="1" presetClass="entr" presetSubtype="0" fill="hold" grpId="0" nodeType="withEffect">
-                                  <p:stCondLst>
-                                    <p:cond delay="0"/>
-                                  </p:stCondLst>
-                                  <p:childTnLst>
-                                    <p:set>
-                                      <p:cBhvr>
-                                        <p:cTn id="8" dur="1" fill="hold">
-                                          <p:stCondLst>
-                                            <p:cond delay="0"/>
-                                          </p:stCondLst>
-                                        </p:cTn>
-                                        <p:tgtEl>
-                                          <p:spTgt spid="8"/>
-                                        </p:tgtEl>
-                                        <p:attrNameLst>
-                                          <p:attrName>style.visibility</p:attrName>
-                                        </p:attrNameLst>
-                                      </p:cBhvr>
-                                      <p:to>
-                                        <p:strVal val="visible"/>
-                                      </p:to>
-                                    </p:set>
-                                  </p:childTnLst>
-                                </p:cTn>
-                              </p:par>
-                              <p:par>
-                                <p:cTn id="9" presetID="1" presetClass="entr" presetSubtype="0" fill="hold" grpId="0" nodeType="withEffect">
-                                  <p:stCondLst>
-                                    <p:cond delay="0"/>
-                                  </p:stCondLst>
-                                  <p:childTnLst>
-                                    <p:set>
-                                      <p:cBhvr>
-                                        <p:cTn id="10" dur="1" fill="hold">
-                                          <p:stCondLst>
-                                            <p:cond delay="0"/>
-                                          </p:stCondLst>
-                                        </p:cTn>
-                                        <p:tgtEl>
-                                          <p:spTgt spid="9"/>
-                                        </p:tgtEl>
-                                        <p:attrNameLst>
-                                          <p:attrName>style.visibility</p:attrName>
-                                        </p:attrNameLst>
-                                      </p:cBhvr>
-                                      <p:to>
-                                        <p:strVal val="visible"/>
-                                      </p:to>
-                                    </p:set>
-                                  </p:childTnLst>
-                                </p:cTn>
-                              </p:par>
-                              <p:par>
-                                <p:cTn id="11" presetID="1" presetClass="entr" presetSubtype="0" fill="hold" grpId="0" nodeType="withEffect">
-                                  <p:stCondLst>
-                                    <p:cond delay="0"/>
-                                  </p:stCondLst>
-                                  <p:childTnLst>
-                                    <p:set>
-                                      <p:cBhvr>
-                                        <p:cTn id="12" dur="1" fill="hold">
-                                          <p:stCondLst>
-                                            <p:cond delay="0"/>
-                                          </p:stCondLst>
-                                        </p:cTn>
-                                        <p:tgtEl>
-                                          <p:spTgt spid="10"/>
-                                        </p:tgtEl>
-                                        <p:attrNameLst>
-                                          <p:attrName>style.visibility</p:attrName>
-                                        </p:attrNameLst>
-                                      </p:cBhvr>
-                                      <p:to>
-                                        <p:strVal val="visible"/>
-                                      </p:to>
-                                    </p:set>
-                                  </p:childTnLst>
-                                </p:cTn>
-                              </p:par>
-                              <p:par>
-                                <p:cTn id="13" presetID="1" presetClass="entr" presetSubtype="0" fill="hold" grpId="0" nodeType="withEffect">
-                                  <p:stCondLst>
-                                    <p:cond delay="0"/>
-                                  </p:stCondLst>
-                                  <p:childTnLst>
-                                    <p:set>
-                                      <p:cBhvr>
-                                        <p:cTn id="14" dur="1" fill="hold">
-                                          <p:stCondLst>
-                                            <p:cond delay="0"/>
-                                          </p:stCondLst>
-                                        </p:cTn>
-                                        <p:tgtEl>
-                                          <p:spTgt spid="11"/>
-                                        </p:tgtEl>
-                                        <p:attrNameLst>
-                                          <p:attrName>style.visibility</p:attrName>
-                                        </p:attrNameLst>
-                                      </p:cBhvr>
-                                      <p:to>
-                                        <p:strVal val="visible"/>
-                                      </p:to>
-                                    </p:set>
-                                  </p:childTnLst>
-                                </p:cTn>
-                              </p:par>
-                              <p:par>
-                                <p:cTn id="15" presetID="1" presetClass="entr" presetSubtype="0" fill="hold" grpId="0" nodeType="withEffect">
-                                  <p:stCondLst>
-                                    <p:cond delay="0"/>
-                                  </p:stCondLst>
-                                  <p:childTnLst>
-                                    <p:set>
-                                      <p:cBhvr>
-                                        <p:cTn id="16" dur="1" fill="hold">
-                                          <p:stCondLst>
-                                            <p:cond delay="0"/>
-                                          </p:stCondLst>
-                                        </p:cTn>
-                                        <p:tgtEl>
-                                          <p:spTgt spid="13"/>
-                                        </p:tgtEl>
-                                        <p:attrNameLst>
-                                          <p:attrName>style.visibility</p:attrName>
-                                        </p:attrNameLst>
-                                      </p:cBhvr>
-                                      <p:to>
-                                        <p:strVal val="visible"/>
-                                      </p:to>
-                                    </p:set>
-                                  </p:childTnLst>
-                                </p:cTn>
-                              </p:par>
-                              <p:par>
-                                <p:cTn id="17" presetID="1" presetClass="entr" presetSubtype="0" fill="hold" grpId="0" nodeType="withEffect">
-                                  <p:stCondLst>
-                                    <p:cond delay="0"/>
-                                  </p:stCondLst>
-                                  <p:childTnLst>
-                                    <p:set>
-                                      <p:cBhvr>
-                                        <p:cTn id="18" dur="1" fill="hold">
-                                          <p:stCondLst>
-                                            <p:cond delay="0"/>
-                                          </p:stCondLst>
-                                        </p:cTn>
-                                        <p:tgtEl>
-                                          <p:spTgt spid="14"/>
-                                        </p:tgtEl>
-                                        <p:attrNameLst>
-                                          <p:attrName>style.visibility</p:attrName>
-                                        </p:attrNameLst>
-                                      </p:cBhvr>
-                                      <p:to>
-                                        <p:strVal val="visible"/>
-                                      </p:to>
-                                    </p:set>
-                                  </p:childTnLst>
-                                </p:cTn>
-                              </p:par>
-                              <p:par>
-                                <p:cTn id="19" presetID="1" presetClass="entr" presetSubtype="0" fill="hold" grpId="0" nodeType="withEffect">
-                                  <p:stCondLst>
-                                    <p:cond delay="0"/>
-                                  </p:stCondLst>
-                                  <p:childTnLst>
-                                    <p:set>
-                                      <p:cBhvr>
-                                        <p:cTn id="20" dur="1" fill="hold">
-                                          <p:stCondLst>
-                                            <p:cond delay="0"/>
-                                          </p:stCondLst>
-                                        </p:cTn>
-                                        <p:tgtEl>
-                                          <p:spTgt spid="15"/>
-                                        </p:tgtEl>
-                                        <p:attrNameLst>
-                                          <p:attrName>style.visibility</p:attrName>
-                                        </p:attrNameLst>
-                                      </p:cBhvr>
-                                      <p:to>
-                                        <p:strVal val="visible"/>
-                                      </p:to>
-                                    </p:set>
-                                  </p:childTnLst>
-                                </p:cTn>
-                              </p:par>
-                              <p:par>
-                                <p:cTn id="21" presetID="1" presetClass="entr" presetSubtype="0" fill="hold" grpId="0" nodeType="withEffect">
-                                  <p:stCondLst>
-                                    <p:cond delay="0"/>
-                                  </p:stCondLst>
-                                  <p:childTnLst>
-                                    <p:set>
-                                      <p:cBhvr>
-                                        <p:cTn id="22" dur="1" fill="hold">
-                                          <p:stCondLst>
-                                            <p:cond delay="0"/>
-                                          </p:stCondLst>
-                                        </p:cTn>
-                                        <p:tgtEl>
-                                          <p:spTgt spid="17"/>
-                                        </p:tgtEl>
-                                        <p:attrNameLst>
-                                          <p:attrName>style.visibility</p:attrName>
-                                        </p:attrNameLst>
-                                      </p:cBhvr>
-                                      <p:to>
-                                        <p:strVal val="visible"/>
-                                      </p:to>
-                                    </p:set>
-                                  </p:childTnLst>
-                                </p:cTn>
-                              </p:par>
-                            </p:childTnLst>
-                          </p:cTn>
-                        </p:par>
-                      </p:childTnLst>
-                    </p:cTn>
-                  </p:par>
-                  <p:par>
-                    <p:cTn id="23" fill="hold">
-                      <p:stCondLst>
-                        <p:cond delay="indefinite"/>
-                      </p:stCondLst>
-                      <p:childTnLst>
-                        <p:par>
-                          <p:cTn id="24" fill="hold">
-                            <p:stCondLst>
-                              <p:cond delay="0"/>
-                            </p:stCondLst>
-                            <p:childTnLst>
-                              <p:par>
-                                <p:cTn id="25" presetID="1" presetClass="entr" presetSubtype="0" fill="hold" nodeType="clickEffect">
-                                  <p:stCondLst>
-                                    <p:cond delay="0"/>
-                                  </p:stCondLst>
-                                  <p:childTnLst>
-                                    <p:set>
-                                      <p:cBhvr>
-                                        <p:cTn id="26" dur="1" fill="hold">
-                                          <p:stCondLst>
-                                            <p:cond delay="0"/>
-                                          </p:stCondLst>
-                                        </p:cTn>
-                                        <p:tgtEl>
-                                          <p:spTgt spid="6"/>
-                                        </p:tgtEl>
-                                        <p:attrNameLst>
-                                          <p:attrName>style.visibility</p:attrName>
-                                        </p:attrNameLst>
-                                      </p:cBhvr>
-                                      <p:to>
-                                        <p:strVal val="visible"/>
-                                      </p:to>
-                                    </p:set>
-                                  </p:childTnLst>
-                                </p:cTn>
-                              </p:par>
-                              <p:par>
-                                <p:cTn id="27" presetID="1" presetClass="entr" presetSubtype="0" fill="hold" grpId="0" nodeType="withEffect">
-                                  <p:stCondLst>
-                                    <p:cond delay="0"/>
-                                  </p:stCondLst>
-                                  <p:childTnLst>
-                                    <p:set>
-                                      <p:cBhvr>
-                                        <p:cTn id="28" dur="1" fill="hold">
-                                          <p:stCondLst>
-                                            <p:cond delay="0"/>
-                                          </p:stCondLst>
-                                        </p:cTn>
-                                        <p:tgtEl>
-                                          <p:spTgt spid="18"/>
-                                        </p:tgtEl>
-                                        <p:attrNameLst>
-                                          <p:attrName>style.visibility</p:attrName>
-                                        </p:attrNameLst>
-                                      </p:cBhvr>
-                                      <p:to>
-                                        <p:strVal val="visible"/>
-                                      </p:to>
-                                    </p:set>
-                                  </p:childTnLst>
-                                </p:cTn>
-                              </p:par>
-                            </p:childTnLst>
-                          </p:cTn>
-                        </p:par>
-                      </p:childTnLst>
-                    </p:cTn>
-                  </p:par>
-                </p:childTnLst>
-              </p:cTn>
-              <p:prevCondLst>
-                <p:cond evt="onPrev" delay="0">
-                  <p:tgtEl>
-                    <p:sldTgt/>
-                  </p:tgtEl>
-                </p:cond>
-              </p:prevCondLst>
-              <p:nextCondLst>
-                <p:cond evt="onNext" delay="0">
-                  <p:tgtEl>
-                    <p:sldTgt/>
-                  </p:tgtEl>
-                </p:cond>
-              </p:nextCondLst>
-            </p:seq>
-          </p:childTnLst>
-        </p:cTn>
-      </p:par>
-    </p:tnLst>
-    <p:bldLst>
-      <p:bldP spid="8" grpId="0" animBg="1"/>
-      <p:bldP spid="10" grpId="0" animBg="1"/>
-      <p:bldP spid="11" grpId="0" animBg="1"/>
-      <p:bldP spid="12" grpId="0"/>
-      <p:bldP spid="13" grpId="0"/>
-      <p:bldP spid="14" grpId="0"/>
-      <p:bldP spid="15" grpId="0"/>
-      <p:bldP spid="17" grpId="0"/>
-      <p:bldP spid="18" grpId="0" animBg="1"/>
-      <p:bldP spid="9" grpId="0" animBg="1"/>
-    </p:bldLst>
-  </p:timing>
-</p:sld>
-</file>
-
 <file path=ppt/slides/slide3.xml><?xml version="1.0" encoding="utf-8"?>
 <p:sld xmlns:a="http://schemas.openxmlformats.org/drawingml/2006/main" xmlns:r="http://schemas.openxmlformats.org/officeDocument/2006/relationships" xmlns:p="http://schemas.openxmlformats.org/presentationml/2006/main">
   <p:cSld>
@@ -16793,1264 +13168,6 @@
 </p:sld>
 </file>
 
-<file path=ppt/slides/slide30.xml><?xml version="1.0" encoding="utf-8"?>
-<p:sld xmlns:a="http://schemas.openxmlformats.org/drawingml/2006/main" xmlns:r="http://schemas.openxmlformats.org/officeDocument/2006/relationships" xmlns:p="http://schemas.openxmlformats.org/presentationml/2006/main">
-  <p:cSld>
-    <p:spTree>
-      <p:nvGrpSpPr>
-        <p:cNvPr id="1" name=""/>
-        <p:cNvGrpSpPr/>
-        <p:nvPr/>
-      </p:nvGrpSpPr>
-      <p:grpSpPr>
-        <a:xfrm>
-          <a:off x="0" y="0"/>
-          <a:ext cx="0" cy="0"/>
-          <a:chOff x="0" y="0"/>
-          <a:chExt cx="0" cy="0"/>
-        </a:xfrm>
-      </p:grpSpPr>
-      <p:sp>
-        <p:nvSpPr>
-          <p:cNvPr id="2" name="Title 1">
-            <a:extLst>
-              <a:ext uri="{FF2B5EF4-FFF2-40B4-BE49-F238E27FC236}">
-                <a16:creationId xmlns:a16="http://schemas.microsoft.com/office/drawing/2014/main" id="{87738ABF-62AA-E160-D36F-52F78653B00A}"/>
-              </a:ext>
-            </a:extLst>
-          </p:cNvPr>
-          <p:cNvSpPr>
-            <a:spLocks noGrp="1"/>
-          </p:cNvSpPr>
-          <p:nvPr>
-            <p:ph type="title"/>
-          </p:nvPr>
-        </p:nvSpPr>
-        <p:spPr/>
-        <p:txBody>
-          <a:bodyPr/>
-          <a:lstStyle/>
-          <a:p>
-            <a:r>
-              <a:rPr lang="en-US" dirty="0"/>
-              <a:t>How to choose the number of Bins?</a:t>
-            </a:r>
-          </a:p>
-        </p:txBody>
-      </p:sp>
-      <mc:AlternateContent xmlns:mc="http://schemas.openxmlformats.org/markup-compatibility/2006" xmlns:a14="http://schemas.microsoft.com/office/drawing/2010/main">
-        <mc:Choice Requires="a14">
-          <p:sp>
-            <p:nvSpPr>
-              <p:cNvPr id="3" name="Content Placeholder 2">
-                <a:extLst>
-                  <a:ext uri="{FF2B5EF4-FFF2-40B4-BE49-F238E27FC236}">
-                    <a16:creationId xmlns:a16="http://schemas.microsoft.com/office/drawing/2014/main" id="{C4D5FB28-1A6C-7A86-F4F5-8287DC49DBD8}"/>
-                  </a:ext>
-                </a:extLst>
-              </p:cNvPr>
-              <p:cNvSpPr>
-                <a:spLocks noGrp="1"/>
-              </p:cNvSpPr>
-              <p:nvPr>
-                <p:ph idx="1"/>
-              </p:nvPr>
-            </p:nvSpPr>
-            <p:spPr>
-              <a:xfrm>
-                <a:off x="838200" y="1825625"/>
-                <a:ext cx="10515600" cy="4796848"/>
-              </a:xfrm>
-            </p:spPr>
-            <p:txBody>
-              <a:bodyPr>
-                <a:normAutofit fontScale="77500" lnSpcReduction="20000"/>
-              </a:bodyPr>
-              <a:lstStyle/>
-              <a:p>
-                <a:r>
-                  <a:rPr lang="en-US" sz="2400" dirty="0"/>
-                  <a:t>How to choose the best number of bins is not a straightforward question and there is a lot of literature on the subject</a:t>
-                </a:r>
-              </a:p>
-              <a:p>
-                <a:pPr marL="0" indent="0">
-                  <a:buNone/>
-                </a:pPr>
-                <a:endParaRPr lang="en-US" sz="2400" dirty="0"/>
-              </a:p>
-              <a:p>
-                <a:r>
-                  <a:rPr lang="en-US" sz="2400" dirty="0"/>
-                  <a:t>We can construct our histogram using a specific </a:t>
-                </a:r>
-                <a:r>
-                  <a:rPr lang="en-US" sz="2400" dirty="0" err="1"/>
-                  <a:t>binwidth</a:t>
-                </a:r>
-                <a:r>
-                  <a:rPr lang="en-US" sz="2400" dirty="0"/>
-                  <a:t> </a:t>
-                </a:r>
-                <a14:m>
-                  <m:oMath xmlns:m="http://schemas.openxmlformats.org/officeDocument/2006/math">
-                    <m:r>
-                      <a:rPr lang="en-US" sz="2400" b="0" i="1" smtClean="0">
-                        <a:latin typeface="Cambria Math" panose="02040503050406030204" pitchFamily="18" charset="0"/>
-                      </a:rPr>
-                      <m:t>𝑤</m:t>
-                    </m:r>
-                  </m:oMath>
-                </a14:m>
-                <a:r>
-                  <a:rPr lang="en-US" sz="2400" dirty="0"/>
-                  <a:t> or under a set number of bins </a:t>
-                </a:r>
-                <a14:m>
-                  <m:oMath xmlns:m="http://schemas.openxmlformats.org/officeDocument/2006/math">
-                    <m:r>
-                      <a:rPr lang="en-US" sz="2400" b="0" i="1" smtClean="0">
-                        <a:latin typeface="Cambria Math" panose="02040503050406030204" pitchFamily="18" charset="0"/>
-                      </a:rPr>
-                      <m:t>𝑘</m:t>
-                    </m:r>
-                  </m:oMath>
-                </a14:m>
-                <a:r>
-                  <a:rPr lang="en-US" sz="2400" dirty="0"/>
-                  <a:t> </a:t>
-                </a:r>
-                <a:endParaRPr lang="en-US" dirty="0"/>
-              </a:p>
-              <a:p>
-                <a14:m>
-                  <m:oMath xmlns:m="http://schemas.openxmlformats.org/officeDocument/2006/math">
-                    <m:r>
-                      <a:rPr lang="en-US" b="0" i="1" smtClean="0">
-                        <a:latin typeface="Cambria Math" panose="02040503050406030204" pitchFamily="18" charset="0"/>
-                      </a:rPr>
-                      <m:t>𝑤</m:t>
-                    </m:r>
-                    <m:r>
-                      <a:rPr lang="en-US" b="0" i="1" smtClean="0">
-                        <a:latin typeface="Cambria Math" panose="02040503050406030204" pitchFamily="18" charset="0"/>
-                      </a:rPr>
-                      <m:t>=</m:t>
-                    </m:r>
-                    <m:f>
-                      <m:fPr>
-                        <m:ctrlPr>
-                          <a:rPr lang="en-US" b="0" i="1" smtClean="0">
-                            <a:latin typeface="Cambria Math" panose="02040503050406030204" pitchFamily="18" charset="0"/>
-                          </a:rPr>
-                        </m:ctrlPr>
-                      </m:fPr>
-                      <m:num>
-                        <m:func>
-                          <m:funcPr>
-                            <m:ctrlPr>
-                              <a:rPr lang="en-US" b="0" i="0" smtClean="0">
-                                <a:latin typeface="Cambria Math" panose="02040503050406030204" pitchFamily="18" charset="0"/>
-                              </a:rPr>
-                            </m:ctrlPr>
-                          </m:funcPr>
-                          <m:fName>
-                            <m:r>
-                              <m:rPr>
-                                <m:sty m:val="p"/>
-                              </m:rPr>
-                              <a:rPr lang="en-US" b="0" i="0" smtClean="0">
-                                <a:latin typeface="Cambria Math" panose="02040503050406030204" pitchFamily="18" charset="0"/>
-                              </a:rPr>
-                              <m:t>max</m:t>
-                            </m:r>
-                          </m:fName>
-                          <m:e>
-                            <m:r>
-                              <a:rPr lang="en-US" b="0" i="1" smtClean="0">
-                                <a:latin typeface="Cambria Math" panose="02040503050406030204" pitchFamily="18" charset="0"/>
-                              </a:rPr>
-                              <m:t>𝑥</m:t>
-                            </m:r>
-                            <m:r>
-                              <a:rPr lang="en-US" b="0" i="1" smtClean="0">
-                                <a:latin typeface="Cambria Math" panose="02040503050406030204" pitchFamily="18" charset="0"/>
-                              </a:rPr>
-                              <m:t> −</m:t>
-                            </m:r>
-                            <m:func>
-                              <m:funcPr>
-                                <m:ctrlPr>
-                                  <a:rPr lang="en-US" b="0" i="0" smtClean="0">
-                                    <a:latin typeface="Cambria Math" panose="02040503050406030204" pitchFamily="18" charset="0"/>
-                                  </a:rPr>
-                                </m:ctrlPr>
-                              </m:funcPr>
-                              <m:fName>
-                                <m:r>
-                                  <m:rPr>
-                                    <m:sty m:val="p"/>
-                                  </m:rPr>
-                                  <a:rPr lang="en-US" b="0" i="0" smtClean="0">
-                                    <a:latin typeface="Cambria Math" panose="02040503050406030204" pitchFamily="18" charset="0"/>
-                                  </a:rPr>
-                                  <m:t>min</m:t>
-                                </m:r>
-                              </m:fName>
-                              <m:e>
-                                <m:r>
-                                  <a:rPr lang="en-US" b="0" i="1" smtClean="0">
-                                    <a:latin typeface="Cambria Math" panose="02040503050406030204" pitchFamily="18" charset="0"/>
-                                  </a:rPr>
-                                  <m:t>𝑥</m:t>
-                                </m:r>
-                              </m:e>
-                            </m:func>
-                          </m:e>
-                        </m:func>
-                      </m:num>
-                      <m:den>
-                        <m:r>
-                          <a:rPr lang="en-US" b="0" i="1" smtClean="0">
-                            <a:latin typeface="Cambria Math" panose="02040503050406030204" pitchFamily="18" charset="0"/>
-                          </a:rPr>
-                          <m:t>𝑘</m:t>
-                        </m:r>
-                      </m:den>
-                    </m:f>
-                  </m:oMath>
-                </a14:m>
-                <a:r>
-                  <a:rPr lang="en-US" dirty="0"/>
-                  <a:t>            or           </a:t>
-                </a:r>
-                <a14:m>
-                  <m:oMath xmlns:m="http://schemas.openxmlformats.org/officeDocument/2006/math">
-                    <m:r>
-                      <a:rPr lang="en-US" b="0" i="1" smtClean="0">
-                        <a:latin typeface="Cambria Math" panose="02040503050406030204" pitchFamily="18" charset="0"/>
-                      </a:rPr>
-                      <m:t>𝑘</m:t>
-                    </m:r>
-                    <m:r>
-                      <a:rPr lang="en-US" b="0" i="1" smtClean="0">
-                        <a:latin typeface="Cambria Math" panose="02040503050406030204" pitchFamily="18" charset="0"/>
-                      </a:rPr>
-                      <m:t>=</m:t>
-                    </m:r>
-                    <m:f>
-                      <m:fPr>
-                        <m:ctrlPr>
-                          <a:rPr lang="en-US" b="0" i="1" smtClean="0">
-                            <a:latin typeface="Cambria Math" panose="02040503050406030204" pitchFamily="18" charset="0"/>
-                          </a:rPr>
-                        </m:ctrlPr>
-                      </m:fPr>
-                      <m:num>
-                        <m:func>
-                          <m:funcPr>
-                            <m:ctrlPr>
-                              <a:rPr lang="en-US" b="0" i="0" smtClean="0">
-                                <a:latin typeface="Cambria Math" panose="02040503050406030204" pitchFamily="18" charset="0"/>
-                              </a:rPr>
-                            </m:ctrlPr>
-                          </m:funcPr>
-                          <m:fName>
-                            <m:r>
-                              <m:rPr>
-                                <m:sty m:val="p"/>
-                              </m:rPr>
-                              <a:rPr lang="en-US" b="0" i="0" smtClean="0">
-                                <a:latin typeface="Cambria Math" panose="02040503050406030204" pitchFamily="18" charset="0"/>
-                              </a:rPr>
-                              <m:t>max</m:t>
-                            </m:r>
-                          </m:fName>
-                          <m:e>
-                            <m:r>
-                              <a:rPr lang="en-US" b="0" i="1" smtClean="0">
-                                <a:latin typeface="Cambria Math" panose="02040503050406030204" pitchFamily="18" charset="0"/>
-                              </a:rPr>
-                              <m:t>𝑥</m:t>
-                            </m:r>
-                            <m:r>
-                              <a:rPr lang="en-US" b="0" i="1" smtClean="0">
-                                <a:latin typeface="Cambria Math" panose="02040503050406030204" pitchFamily="18" charset="0"/>
-                              </a:rPr>
-                              <m:t> −</m:t>
-                            </m:r>
-                            <m:func>
-                              <m:funcPr>
-                                <m:ctrlPr>
-                                  <a:rPr lang="en-US" b="0" i="0" smtClean="0">
-                                    <a:latin typeface="Cambria Math" panose="02040503050406030204" pitchFamily="18" charset="0"/>
-                                  </a:rPr>
-                                </m:ctrlPr>
-                              </m:funcPr>
-                              <m:fName>
-                                <m:r>
-                                  <m:rPr>
-                                    <m:sty m:val="p"/>
-                                  </m:rPr>
-                                  <a:rPr lang="en-US" b="0" i="0" smtClean="0">
-                                    <a:latin typeface="Cambria Math" panose="02040503050406030204" pitchFamily="18" charset="0"/>
-                                  </a:rPr>
-                                  <m:t>min</m:t>
-                                </m:r>
-                              </m:fName>
-                              <m:e>
-                                <m:r>
-                                  <a:rPr lang="en-US" b="0" i="1" smtClean="0">
-                                    <a:latin typeface="Cambria Math" panose="02040503050406030204" pitchFamily="18" charset="0"/>
-                                  </a:rPr>
-                                  <m:t>𝑥</m:t>
-                                </m:r>
-                              </m:e>
-                            </m:func>
-                          </m:e>
-                        </m:func>
-                      </m:num>
-                      <m:den>
-                        <m:r>
-                          <a:rPr lang="en-US" b="0" i="1" smtClean="0">
-                            <a:latin typeface="Cambria Math" panose="02040503050406030204" pitchFamily="18" charset="0"/>
-                          </a:rPr>
-                          <m:t>𝑤</m:t>
-                        </m:r>
-                      </m:den>
-                    </m:f>
-                  </m:oMath>
-                </a14:m>
-                <a:endParaRPr lang="en-US" dirty="0"/>
-              </a:p>
-              <a:p>
-                <a:endParaRPr lang="en-US" dirty="0"/>
-              </a:p>
-              <a:p>
-                <a:r>
-                  <a:rPr lang="en-US" dirty="0">
-                    <a:solidFill>
-                      <a:srgbClr val="C00000"/>
-                    </a:solidFill>
-                  </a:rPr>
-                  <a:t>Square root method:       </a:t>
-                </a:r>
-                <a14:m>
-                  <m:oMath xmlns:m="http://schemas.openxmlformats.org/officeDocument/2006/math">
-                    <m:r>
-                      <a:rPr lang="en-US" b="0" i="1" smtClean="0">
-                        <a:solidFill>
-                          <a:srgbClr val="C00000"/>
-                        </a:solidFill>
-                        <a:latin typeface="Cambria Math" panose="02040503050406030204" pitchFamily="18" charset="0"/>
-                      </a:rPr>
-                      <m:t>𝑘</m:t>
-                    </m:r>
-                    <m:r>
-                      <a:rPr lang="en-US" b="0" i="0" smtClean="0">
-                        <a:solidFill>
-                          <a:srgbClr val="C00000"/>
-                        </a:solidFill>
-                        <a:latin typeface="Cambria Math" panose="02040503050406030204" pitchFamily="18" charset="0"/>
-                      </a:rPr>
-                      <m:t>=</m:t>
-                    </m:r>
-                    <m:r>
-                      <m:rPr>
-                        <m:sty m:val="p"/>
-                      </m:rPr>
-                      <a:rPr lang="en-US" b="0" i="0" smtClean="0">
-                        <a:solidFill>
-                          <a:srgbClr val="C00000"/>
-                        </a:solidFill>
-                        <a:latin typeface="Cambria Math" panose="02040503050406030204" pitchFamily="18" charset="0"/>
-                      </a:rPr>
-                      <m:t>round</m:t>
-                    </m:r>
-                    <m:r>
-                      <a:rPr lang="en-US" b="0" i="0" smtClean="0">
-                        <a:solidFill>
-                          <a:srgbClr val="C00000"/>
-                        </a:solidFill>
-                        <a:latin typeface="Cambria Math" panose="02040503050406030204" pitchFamily="18" charset="0"/>
-                      </a:rPr>
-                      <m:t>(</m:t>
-                    </m:r>
-                    <m:rad>
-                      <m:radPr>
-                        <m:degHide m:val="on"/>
-                        <m:ctrlPr>
-                          <a:rPr lang="en-US" b="0" i="1" smtClean="0">
-                            <a:solidFill>
-                              <a:srgbClr val="C00000"/>
-                            </a:solidFill>
-                            <a:latin typeface="Cambria Math" panose="02040503050406030204" pitchFamily="18" charset="0"/>
-                          </a:rPr>
-                        </m:ctrlPr>
-                      </m:radPr>
-                      <m:deg/>
-                      <m:e>
-                        <m:r>
-                          <a:rPr lang="en-US" b="0" i="1" smtClean="0">
-                            <a:solidFill>
-                              <a:srgbClr val="C00000"/>
-                            </a:solidFill>
-                            <a:latin typeface="Cambria Math" panose="02040503050406030204" pitchFamily="18" charset="0"/>
-                          </a:rPr>
-                          <m:t>𝑛</m:t>
-                        </m:r>
-                      </m:e>
-                    </m:rad>
-                    <m:r>
-                      <a:rPr lang="en-US" b="0" i="1" smtClean="0">
-                        <a:solidFill>
-                          <a:srgbClr val="C00000"/>
-                        </a:solidFill>
-                        <a:latin typeface="Cambria Math" panose="02040503050406030204" pitchFamily="18" charset="0"/>
-                      </a:rPr>
-                      <m:t>)</m:t>
-                    </m:r>
-                  </m:oMath>
-                </a14:m>
-                <a:r>
-                  <a:rPr lang="en-US" dirty="0">
-                    <a:solidFill>
-                      <a:srgbClr val="C00000"/>
-                    </a:solidFill>
-                  </a:rPr>
-                  <a:t>       </a:t>
-                </a:r>
-                <a:r>
-                  <a:rPr lang="en-US" dirty="0"/>
-                  <a:t>(A fairly safe and basic rule of thumb)</a:t>
-                </a:r>
-                <a:endParaRPr lang="en-US" dirty="0">
-                  <a:solidFill>
-                    <a:srgbClr val="C00000"/>
-                  </a:solidFill>
-                </a:endParaRPr>
-              </a:p>
-              <a:p>
-                <a:endParaRPr lang="en-US" dirty="0"/>
-              </a:p>
-              <a:p>
-                <a14:m>
-                  <m:oMath xmlns:m="http://schemas.openxmlformats.org/officeDocument/2006/math">
-                    <m:sSup>
-                      <m:sSupPr>
-                        <m:ctrlPr>
-                          <a:rPr lang="en-US" b="0" i="0" smtClean="0">
-                            <a:latin typeface="Cambria Math" panose="02040503050406030204" pitchFamily="18" charset="0"/>
-                          </a:rPr>
-                        </m:ctrlPr>
-                      </m:sSupPr>
-                      <m:e>
-                        <m:r>
-                          <m:rPr>
-                            <m:sty m:val="p"/>
-                          </m:rPr>
-                          <a:rPr lang="en-US" b="0" i="0" smtClean="0">
-                            <a:latin typeface="Cambria Math" panose="02040503050406030204" pitchFamily="18" charset="0"/>
-                          </a:rPr>
-                          <m:t>Sturges</m:t>
-                        </m:r>
-                        <m:r>
-                          <a:rPr lang="en-US" b="0" i="0" smtClean="0">
-                            <a:latin typeface="Cambria Math" panose="02040503050406030204" pitchFamily="18" charset="0"/>
-                          </a:rPr>
-                          <m:t> </m:t>
-                        </m:r>
-                        <m:r>
-                          <m:rPr>
-                            <m:sty m:val="p"/>
-                          </m:rPr>
-                          <a:rPr lang="en-US" b="0" i="0" smtClean="0">
-                            <a:latin typeface="Cambria Math" panose="02040503050406030204" pitchFamily="18" charset="0"/>
-                          </a:rPr>
-                          <m:t>Rule</m:t>
-                        </m:r>
-                      </m:e>
-                      <m:sup>
-                        <m:r>
-                          <a:rPr lang="en-US" b="0" i="1" smtClean="0">
-                            <a:latin typeface="Cambria Math" panose="02040503050406030204" pitchFamily="18" charset="0"/>
-                          </a:rPr>
-                          <m:t>[1]</m:t>
-                        </m:r>
-                      </m:sup>
-                    </m:sSup>
-                  </m:oMath>
-                </a14:m>
-                <a:r>
-                  <a:rPr lang="en-US" dirty="0"/>
-                  <a:t>:             </a:t>
-                </a:r>
-                <a14:m>
-                  <m:oMath xmlns:m="http://schemas.openxmlformats.org/officeDocument/2006/math">
-                    <m:r>
-                      <a:rPr lang="en-US" b="0" i="1" smtClean="0">
-                        <a:latin typeface="Cambria Math" panose="02040503050406030204" pitchFamily="18" charset="0"/>
-                      </a:rPr>
-                      <m:t>𝑘</m:t>
-                    </m:r>
-                    <m:r>
-                      <a:rPr lang="en-US" b="0" i="1" smtClean="0">
-                        <a:latin typeface="Cambria Math" panose="02040503050406030204" pitchFamily="18" charset="0"/>
-                      </a:rPr>
-                      <m:t>=</m:t>
-                    </m:r>
-                    <m:func>
-                      <m:funcPr>
-                        <m:ctrlPr>
-                          <a:rPr lang="en-US" b="0" i="1" smtClean="0">
-                            <a:latin typeface="Cambria Math" panose="02040503050406030204" pitchFamily="18" charset="0"/>
-                          </a:rPr>
-                        </m:ctrlPr>
-                      </m:funcPr>
-                      <m:fName>
-                        <m:sSub>
-                          <m:sSubPr>
-                            <m:ctrlPr>
-                              <a:rPr lang="en-US" b="0" i="0" smtClean="0">
-                                <a:latin typeface="Cambria Math" panose="02040503050406030204" pitchFamily="18" charset="0"/>
-                              </a:rPr>
-                            </m:ctrlPr>
-                          </m:sSubPr>
-                          <m:e>
-                            <m:r>
-                              <m:rPr>
-                                <m:sty m:val="p"/>
-                              </m:rPr>
-                              <a:rPr lang="en-US" b="0" i="0" smtClean="0">
-                                <a:latin typeface="Cambria Math" panose="02040503050406030204" pitchFamily="18" charset="0"/>
-                              </a:rPr>
-                              <m:t>round</m:t>
-                            </m:r>
-                            <m:r>
-                              <a:rPr lang="en-US" b="0" i="0" smtClean="0">
-                                <a:latin typeface="Cambria Math" panose="02040503050406030204" pitchFamily="18" charset="0"/>
-                              </a:rPr>
-                              <m:t>(</m:t>
-                            </m:r>
-                            <m:r>
-                              <m:rPr>
-                                <m:sty m:val="p"/>
-                              </m:rPr>
-                              <a:rPr lang="en-US" b="0" i="0" smtClean="0">
-                                <a:latin typeface="Cambria Math" panose="02040503050406030204" pitchFamily="18" charset="0"/>
-                              </a:rPr>
-                              <m:t>log</m:t>
-                            </m:r>
-                          </m:e>
-                          <m:sub>
-                            <m:r>
-                              <a:rPr lang="en-US" b="0" i="1" smtClean="0">
-                                <a:latin typeface="Cambria Math" panose="02040503050406030204" pitchFamily="18" charset="0"/>
-                              </a:rPr>
-                              <m:t>2</m:t>
-                            </m:r>
-                          </m:sub>
-                        </m:sSub>
-                      </m:fName>
-                      <m:e>
-                        <m:r>
-                          <a:rPr lang="en-US" b="0" i="1" smtClean="0">
-                            <a:latin typeface="Cambria Math" panose="02040503050406030204" pitchFamily="18" charset="0"/>
-                          </a:rPr>
-                          <m:t>𝑛</m:t>
-                        </m:r>
-                        <m:r>
-                          <a:rPr lang="en-US" b="0" i="1" smtClean="0">
-                            <a:latin typeface="Cambria Math" panose="02040503050406030204" pitchFamily="18" charset="0"/>
-                          </a:rPr>
-                          <m:t>)+1 </m:t>
-                        </m:r>
-                      </m:e>
-                    </m:func>
-                  </m:oMath>
-                </a14:m>
-                <a:r>
-                  <a:rPr lang="en-US" dirty="0"/>
-                  <a:t>    (not great for </a:t>
-                </a:r>
-                <a14:m>
-                  <m:oMath xmlns:m="http://schemas.openxmlformats.org/officeDocument/2006/math">
-                    <m:r>
-                      <a:rPr lang="en-US" b="0" i="1" smtClean="0">
-                        <a:latin typeface="Cambria Math" panose="02040503050406030204" pitchFamily="18" charset="0"/>
-                      </a:rPr>
-                      <m:t>𝑛</m:t>
-                    </m:r>
-                    <m:r>
-                      <a:rPr lang="en-US" b="0" i="1" smtClean="0">
-                        <a:latin typeface="Cambria Math" panose="02040503050406030204" pitchFamily="18" charset="0"/>
-                      </a:rPr>
-                      <m:t>&lt;30</m:t>
-                    </m:r>
-                  </m:oMath>
-                </a14:m>
-                <a:r>
-                  <a:rPr lang="en-US" dirty="0"/>
-                  <a:t>)</a:t>
-                </a:r>
-              </a:p>
-              <a:p>
-                <a:endParaRPr lang="en-US" dirty="0"/>
-              </a:p>
-              <a:p>
-                <a14:m>
-                  <m:oMath xmlns:m="http://schemas.openxmlformats.org/officeDocument/2006/math">
-                    <m:sSup>
-                      <m:sSupPr>
-                        <m:ctrlPr>
-                          <a:rPr lang="en-US" b="0" i="0" smtClean="0">
-                            <a:latin typeface="Cambria Math" panose="02040503050406030204" pitchFamily="18" charset="0"/>
-                          </a:rPr>
-                        </m:ctrlPr>
-                      </m:sSupPr>
-                      <m:e>
-                        <m:r>
-                          <m:rPr>
-                            <m:sty m:val="p"/>
-                          </m:rPr>
-                          <a:rPr lang="en-US" b="0" i="0" smtClean="0">
-                            <a:latin typeface="Cambria Math" panose="02040503050406030204" pitchFamily="18" charset="0"/>
-                          </a:rPr>
-                          <m:t>Rices</m:t>
-                        </m:r>
-                        <m:r>
-                          <a:rPr lang="en-US" b="0" i="0" smtClean="0">
-                            <a:latin typeface="Cambria Math" panose="02040503050406030204" pitchFamily="18" charset="0"/>
-                          </a:rPr>
-                          <m:t> </m:t>
-                        </m:r>
-                        <m:r>
-                          <m:rPr>
-                            <m:sty m:val="p"/>
-                          </m:rPr>
-                          <a:rPr lang="en-US" b="0" i="0" smtClean="0">
-                            <a:latin typeface="Cambria Math" panose="02040503050406030204" pitchFamily="18" charset="0"/>
-                          </a:rPr>
-                          <m:t>Rule</m:t>
-                        </m:r>
-                      </m:e>
-                      <m:sup>
-                        <m:r>
-                          <a:rPr lang="en-US" b="0" i="1" smtClean="0">
-                            <a:latin typeface="Cambria Math" panose="02040503050406030204" pitchFamily="18" charset="0"/>
-                          </a:rPr>
-                          <m:t>[2]</m:t>
-                        </m:r>
-                      </m:sup>
-                    </m:sSup>
-                  </m:oMath>
-                </a14:m>
-                <a:r>
-                  <a:rPr lang="en-US" dirty="0"/>
-                  <a:t>:                  </a:t>
-                </a:r>
-                <a14:m>
-                  <m:oMath xmlns:m="http://schemas.openxmlformats.org/officeDocument/2006/math">
-                    <m:r>
-                      <a:rPr lang="en-US" b="0" i="1" smtClean="0">
-                        <a:latin typeface="Cambria Math" panose="02040503050406030204" pitchFamily="18" charset="0"/>
-                      </a:rPr>
-                      <m:t>𝑘</m:t>
-                    </m:r>
-                    <m:r>
-                      <a:rPr lang="en-US" b="0" i="1" smtClean="0">
-                        <a:latin typeface="Cambria Math" panose="02040503050406030204" pitchFamily="18" charset="0"/>
-                      </a:rPr>
-                      <m:t>=2</m:t>
-                    </m:r>
-                    <m:rad>
-                      <m:radPr>
-                        <m:ctrlPr>
-                          <a:rPr lang="en-US" b="0" i="1" smtClean="0">
-                            <a:latin typeface="Cambria Math" panose="02040503050406030204" pitchFamily="18" charset="0"/>
-                          </a:rPr>
-                        </m:ctrlPr>
-                      </m:radPr>
-                      <m:deg>
-                        <m:r>
-                          <a:rPr lang="en-US" b="0" i="1" smtClean="0">
-                            <a:latin typeface="Cambria Math" panose="02040503050406030204" pitchFamily="18" charset="0"/>
-                          </a:rPr>
-                          <m:t>3</m:t>
-                        </m:r>
-                      </m:deg>
-                      <m:e>
-                        <m:r>
-                          <a:rPr lang="en-US" b="0" i="1" smtClean="0">
-                            <a:latin typeface="Cambria Math" panose="02040503050406030204" pitchFamily="18" charset="0"/>
-                          </a:rPr>
-                          <m:t>𝑛</m:t>
-                        </m:r>
-                      </m:e>
-                    </m:rad>
-                  </m:oMath>
-                </a14:m>
-                <a:endParaRPr lang="en-US" dirty="0"/>
-              </a:p>
-              <a:p>
-                <a:endParaRPr lang="en-US" dirty="0"/>
-              </a:p>
-              <a:p>
-                <a:pPr marL="0" indent="0">
-                  <a:buNone/>
-                </a:pPr>
-                <a:r>
-                  <a:rPr lang="en-US" sz="1200" b="0" i="0" dirty="0">
-                    <a:solidFill>
-                      <a:srgbClr val="222222"/>
-                    </a:solidFill>
-                    <a:effectLst/>
-                    <a:latin typeface="Arial" panose="020B0604020202020204" pitchFamily="34" charset="0"/>
-                  </a:rPr>
-                  <a:t>[1] Sturges, Herbert A. "The choice of a class interval." Journal of the </a:t>
-                </a:r>
-                <a:r>
-                  <a:rPr lang="en-US" sz="1200" b="0" i="0" dirty="0" err="1">
-                    <a:solidFill>
-                      <a:srgbClr val="222222"/>
-                    </a:solidFill>
-                    <a:effectLst/>
-                    <a:latin typeface="Arial" panose="020B0604020202020204" pitchFamily="34" charset="0"/>
-                  </a:rPr>
-                  <a:t>american</a:t>
-                </a:r>
-                <a:r>
-                  <a:rPr lang="en-US" sz="1200" b="0" i="0" dirty="0">
-                    <a:solidFill>
-                      <a:srgbClr val="222222"/>
-                    </a:solidFill>
-                    <a:effectLst/>
-                    <a:latin typeface="Arial" panose="020B0604020202020204" pitchFamily="34" charset="0"/>
-                  </a:rPr>
-                  <a:t> statistical association 21.153 (1926): 65-66.</a:t>
-                </a:r>
-              </a:p>
-              <a:p>
-                <a:pPr marL="0" indent="0">
-                  <a:buNone/>
-                </a:pPr>
-                <a:r>
-                  <a:rPr lang="en-US" sz="1200" dirty="0">
-                    <a:solidFill>
-                      <a:srgbClr val="222222"/>
-                    </a:solidFill>
-                    <a:latin typeface="Arial" panose="020B0604020202020204" pitchFamily="34" charset="0"/>
-                  </a:rPr>
-                  <a:t>[2] </a:t>
-                </a:r>
-                <a:r>
-                  <a:rPr lang="en-US" sz="1200" b="0" i="0" dirty="0">
-                    <a:solidFill>
-                      <a:srgbClr val="222222"/>
-                    </a:solidFill>
-                    <a:effectLst/>
-                    <a:latin typeface="Arial" panose="020B0604020202020204" pitchFamily="34" charset="0"/>
-                  </a:rPr>
-                  <a:t>Lane, David. </a:t>
-                </a:r>
-                <a:r>
-                  <a:rPr lang="en-US" sz="1200" b="0" i="1" dirty="0">
-                    <a:solidFill>
-                      <a:srgbClr val="222222"/>
-                    </a:solidFill>
-                    <a:effectLst/>
-                    <a:latin typeface="Arial" panose="020B0604020202020204" pitchFamily="34" charset="0"/>
-                  </a:rPr>
-                  <a:t>Online statistics education: A multimedia course of study</a:t>
-                </a:r>
-                <a:r>
-                  <a:rPr lang="en-US" sz="1200" b="0" i="0" dirty="0">
-                    <a:solidFill>
-                      <a:srgbClr val="222222"/>
-                    </a:solidFill>
-                    <a:effectLst/>
-                    <a:latin typeface="Arial" panose="020B0604020202020204" pitchFamily="34" charset="0"/>
-                  </a:rPr>
-                  <a:t>. Association for the Advancement of Computing in Education (AACE), 2003. – Chapter 2 “Graphing Distributions </a:t>
-                </a:r>
-              </a:p>
-              <a:p>
-                <a:pPr marL="0" indent="0">
-                  <a:buNone/>
-                </a:pPr>
-                <a:endParaRPr lang="en-US" sz="1400" dirty="0"/>
-              </a:p>
-            </p:txBody>
-          </p:sp>
-        </mc:Choice>
-        <mc:Fallback xmlns="">
-          <p:sp>
-            <p:nvSpPr>
-              <p:cNvPr id="3" name="Content Placeholder 2">
-                <a:extLst>
-                  <a:ext uri="{FF2B5EF4-FFF2-40B4-BE49-F238E27FC236}">
-                    <a16:creationId xmlns:a16="http://schemas.microsoft.com/office/drawing/2014/main" id="{C4D5FB28-1A6C-7A86-F4F5-8287DC49DBD8}"/>
-                  </a:ext>
-                </a:extLst>
-              </p:cNvPr>
-              <p:cNvSpPr>
-                <a:spLocks noGrp="1" noRot="1" noChangeAspect="1" noMove="1" noResize="1" noEditPoints="1" noAdjustHandles="1" noChangeArrowheads="1" noChangeShapeType="1" noTextEdit="1"/>
-              </p:cNvSpPr>
-              <p:nvPr>
-                <p:ph idx="1"/>
-              </p:nvPr>
-            </p:nvSpPr>
-            <p:spPr>
-              <a:xfrm>
-                <a:off x="838200" y="1825625"/>
-                <a:ext cx="10515600" cy="4796848"/>
-              </a:xfrm>
-              <a:blipFill>
-                <a:blip r:embed="rId2"/>
-                <a:stretch>
-                  <a:fillRect l="-696" t="-2160" r="-290"/>
-                </a:stretch>
-              </a:blipFill>
-            </p:spPr>
-            <p:txBody>
-              <a:bodyPr/>
-              <a:lstStyle/>
-              <a:p>
-                <a:r>
-                  <a:rPr lang="en-US">
-                    <a:noFill/>
-                  </a:rPr>
-                  <a:t> </a:t>
-                </a:r>
-              </a:p>
-            </p:txBody>
-          </p:sp>
-        </mc:Fallback>
-      </mc:AlternateContent>
-    </p:spTree>
-    <p:extLst>
-      <p:ext uri="{BB962C8B-B14F-4D97-AF65-F5344CB8AC3E}">
-        <p14:creationId xmlns:p14="http://schemas.microsoft.com/office/powerpoint/2010/main" val="1820344069"/>
-      </p:ext>
-    </p:extLst>
-  </p:cSld>
-  <p:clrMapOvr>
-    <a:masterClrMapping/>
-  </p:clrMapOvr>
-</p:sld>
-</file>
-
-<file path=ppt/slides/slide31.xml><?xml version="1.0" encoding="utf-8"?>
-<p:sld xmlns:a="http://schemas.openxmlformats.org/drawingml/2006/main" xmlns:r="http://schemas.openxmlformats.org/officeDocument/2006/relationships" xmlns:p="http://schemas.openxmlformats.org/presentationml/2006/main">
-  <p:cSld>
-    <p:spTree>
-      <p:nvGrpSpPr>
-        <p:cNvPr id="1" name=""/>
-        <p:cNvGrpSpPr/>
-        <p:nvPr/>
-      </p:nvGrpSpPr>
-      <p:grpSpPr>
-        <a:xfrm>
-          <a:off x="0" y="0"/>
-          <a:ext cx="0" cy="0"/>
-          <a:chOff x="0" y="0"/>
-          <a:chExt cx="0" cy="0"/>
-        </a:xfrm>
-      </p:grpSpPr>
-      <p:sp>
-        <p:nvSpPr>
-          <p:cNvPr id="2" name="Title 1">
-            <a:extLst>
-              <a:ext uri="{FF2B5EF4-FFF2-40B4-BE49-F238E27FC236}">
-                <a16:creationId xmlns:a16="http://schemas.microsoft.com/office/drawing/2014/main" id="{A2418BEF-F19E-DBAD-FF9A-8FDF1FBD3654}"/>
-              </a:ext>
-            </a:extLst>
-          </p:cNvPr>
-          <p:cNvSpPr>
-            <a:spLocks noGrp="1"/>
-          </p:cNvSpPr>
-          <p:nvPr>
-            <p:ph type="title"/>
-          </p:nvPr>
-        </p:nvSpPr>
-        <p:spPr/>
-        <p:txBody>
-          <a:bodyPr>
-            <a:normAutofit/>
-          </a:bodyPr>
-          <a:lstStyle/>
-          <a:p>
-            <a:r>
-              <a:rPr lang="en-US" sz="4000" dirty="0"/>
-              <a:t>Some tips</a:t>
-            </a:r>
-          </a:p>
-        </p:txBody>
-      </p:sp>
-      <p:sp>
-        <p:nvSpPr>
-          <p:cNvPr id="3" name="Content Placeholder 2">
-            <a:extLst>
-              <a:ext uri="{FF2B5EF4-FFF2-40B4-BE49-F238E27FC236}">
-                <a16:creationId xmlns:a16="http://schemas.microsoft.com/office/drawing/2014/main" id="{058FD37C-6477-7C00-926C-1FB666199849}"/>
-              </a:ext>
-            </a:extLst>
-          </p:cNvPr>
-          <p:cNvSpPr>
-            <a:spLocks noGrp="1"/>
-          </p:cNvSpPr>
-          <p:nvPr>
-            <p:ph idx="1"/>
-          </p:nvPr>
-        </p:nvSpPr>
-        <p:spPr>
-          <a:xfrm>
-            <a:off x="238125" y="1533236"/>
-            <a:ext cx="5857875" cy="5210463"/>
-          </a:xfrm>
-        </p:spPr>
-        <p:txBody>
-          <a:bodyPr>
-            <a:normAutofit fontScale="77500" lnSpcReduction="20000"/>
-          </a:bodyPr>
-          <a:lstStyle/>
-          <a:p>
-            <a:r>
-              <a:rPr lang="en-US" dirty="0"/>
-              <a:t>If </a:t>
-            </a:r>
-            <a:r>
-              <a:rPr lang="en-US" u="sng" dirty="0"/>
-              <a:t>too few</a:t>
-            </a:r>
-            <a:r>
-              <a:rPr lang="en-US" dirty="0"/>
-              <a:t> intervals are used, then the graph will be too crude</a:t>
-            </a:r>
-          </a:p>
-          <a:p>
-            <a:endParaRPr lang="en-US" dirty="0"/>
-          </a:p>
-          <a:p>
-            <a:r>
-              <a:rPr lang="en-US" dirty="0"/>
-              <a:t>If </a:t>
-            </a:r>
-            <a:r>
-              <a:rPr lang="en-US" u="sng" dirty="0"/>
-              <a:t>too many</a:t>
-            </a:r>
-            <a:r>
-              <a:rPr lang="en-US" dirty="0"/>
-              <a:t> intervals are used, graph will contain many short bars and gaps. </a:t>
-            </a:r>
-          </a:p>
-          <a:p>
-            <a:pPr marL="457200" lvl="1" indent="0">
-              <a:buNone/>
-            </a:pPr>
-            <a:r>
-              <a:rPr lang="en-US" dirty="0"/>
-              <a:t>Usually  between 5 - 15 intervals are enough. </a:t>
-            </a:r>
-          </a:p>
-          <a:p>
-            <a:pPr marL="457200" lvl="1" indent="0">
-              <a:buNone/>
-            </a:pPr>
-            <a:endParaRPr lang="en-US" dirty="0"/>
-          </a:p>
-          <a:p>
-            <a:r>
-              <a:rPr lang="en-US" dirty="0"/>
-              <a:t>Most plotting software will automatically choose the number of bins. </a:t>
-            </a:r>
-          </a:p>
-          <a:p>
-            <a:pPr marL="0" indent="0">
-              <a:buNone/>
-            </a:pPr>
-            <a:endParaRPr lang="en-US" dirty="0"/>
-          </a:p>
-          <a:p>
-            <a:r>
-              <a:rPr lang="en-US" b="1" u="sng" dirty="0"/>
-              <a:t>ALWAYS</a:t>
-            </a:r>
-            <a:r>
-              <a:rPr lang="en-US" dirty="0"/>
-              <a:t> plot the histogram to get an idea about the shape of the distribution of a quantitative variable </a:t>
-            </a:r>
-          </a:p>
-          <a:p>
-            <a:endParaRPr lang="en-US" dirty="0"/>
-          </a:p>
-          <a:p>
-            <a:r>
-              <a:rPr lang="en-US" dirty="0"/>
-              <a:t>Is the number of observations is small (say n &lt; 50) then it’s a good idea to supplement a histogram with a dot plot or stem plot</a:t>
-            </a:r>
-          </a:p>
-        </p:txBody>
-      </p:sp>
-      <p:pic>
-        <p:nvPicPr>
-          <p:cNvPr id="5" name="Picture 4" descr="Histogram of Old Faithful waiting times using only three very wide bins, too crude to show the two clusters.">
-            <a:extLst>
-              <a:ext uri="{FF2B5EF4-FFF2-40B4-BE49-F238E27FC236}">
-                <a16:creationId xmlns:a16="http://schemas.microsoft.com/office/drawing/2014/main" id="{1EB687C5-40BA-D0EA-5A63-59C5B8F474B5}"/>
-              </a:ext>
-            </a:extLst>
-          </p:cNvPr>
-          <p:cNvPicPr>
-            <a:picLocks noChangeAspect="1"/>
-          </p:cNvPicPr>
-          <p:nvPr/>
-        </p:nvPicPr>
-        <p:blipFill>
-          <a:blip r:embed="rId2"/>
-          <a:stretch>
-            <a:fillRect/>
-          </a:stretch>
-        </p:blipFill>
-        <p:spPr>
-          <a:xfrm>
-            <a:off x="7301566" y="1"/>
-            <a:ext cx="4256175" cy="2552700"/>
-          </a:xfrm>
-          <a:prstGeom prst="rect">
-            <a:avLst/>
-          </a:prstGeom>
-        </p:spPr>
-      </p:pic>
-      <p:pic>
-        <p:nvPicPr>
-          <p:cNvPr id="9" name="Picture 8" descr="The same waiting times in about a dozen bins, which shows the two clusters clearly.">
-            <a:extLst>
-              <a:ext uri="{FF2B5EF4-FFF2-40B4-BE49-F238E27FC236}">
-                <a16:creationId xmlns:a16="http://schemas.microsoft.com/office/drawing/2014/main" id="{958A48EC-CDD0-04BA-47F9-5B4CC4AE0872}"/>
-              </a:ext>
-            </a:extLst>
-          </p:cNvPr>
-          <p:cNvPicPr>
-            <a:picLocks noChangeAspect="1"/>
-          </p:cNvPicPr>
-          <p:nvPr/>
-        </p:nvPicPr>
-        <p:blipFill>
-          <a:blip r:embed="rId3"/>
-          <a:stretch>
-            <a:fillRect/>
-          </a:stretch>
-        </p:blipFill>
-        <p:spPr>
-          <a:xfrm>
-            <a:off x="7301565" y="2256176"/>
-            <a:ext cx="4366397" cy="2283962"/>
-          </a:xfrm>
-          <a:prstGeom prst="rect">
-            <a:avLst/>
-          </a:prstGeom>
-        </p:spPr>
-      </p:pic>
-      <p:pic>
-        <p:nvPicPr>
-          <p:cNvPr id="11" name="Picture 10" descr="The same waiting times in very many narrow bins, which breaks the shape into short bars and gaps.">
-            <a:extLst>
-              <a:ext uri="{FF2B5EF4-FFF2-40B4-BE49-F238E27FC236}">
-                <a16:creationId xmlns:a16="http://schemas.microsoft.com/office/drawing/2014/main" id="{78740C87-4A50-38E8-A519-55957D15C22E}"/>
-              </a:ext>
-            </a:extLst>
-          </p:cNvPr>
-          <p:cNvPicPr>
-            <a:picLocks noChangeAspect="1"/>
-          </p:cNvPicPr>
-          <p:nvPr/>
-        </p:nvPicPr>
-        <p:blipFill>
-          <a:blip r:embed="rId4"/>
-          <a:stretch>
-            <a:fillRect/>
-          </a:stretch>
-        </p:blipFill>
-        <p:spPr>
-          <a:xfrm>
-            <a:off x="7320453" y="4467408"/>
-            <a:ext cx="4347509" cy="2276291"/>
-          </a:xfrm>
-          <a:prstGeom prst="rect">
-            <a:avLst/>
-          </a:prstGeom>
-        </p:spPr>
-      </p:pic>
-    </p:spTree>
-    <p:extLst>
-      <p:ext uri="{BB962C8B-B14F-4D97-AF65-F5344CB8AC3E}">
-        <p14:creationId xmlns:p14="http://schemas.microsoft.com/office/powerpoint/2010/main" val="3534669903"/>
-      </p:ext>
-    </p:extLst>
-  </p:cSld>
-  <p:clrMapOvr>
-    <a:masterClrMapping/>
-  </p:clrMapOvr>
-</p:sld>
-</file>
-
-<file path=ppt/slides/slide32.xml><?xml version="1.0" encoding="utf-8"?>
-<p:sld xmlns:a="http://schemas.openxmlformats.org/drawingml/2006/main" xmlns:r="http://schemas.openxmlformats.org/officeDocument/2006/relationships" xmlns:p="http://schemas.openxmlformats.org/presentationml/2006/main">
-  <p:cSld>
-    <p:spTree>
-      <p:nvGrpSpPr>
-        <p:cNvPr id="1" name=""/>
-        <p:cNvGrpSpPr/>
-        <p:nvPr/>
-      </p:nvGrpSpPr>
-      <p:grpSpPr>
-        <a:xfrm>
-          <a:off x="0" y="0"/>
-          <a:ext cx="0" cy="0"/>
-          <a:chOff x="0" y="0"/>
-          <a:chExt cx="0" cy="0"/>
-        </a:xfrm>
-      </p:grpSpPr>
-      <p:pic>
-        <p:nvPicPr>
-          <p:cNvPr id="4" name="Picture 3" descr="Frequency table of Old Faithful waiting times in ten-minute bins with frequency, relative frequency and cumulative relative frequency.">
-            <a:extLst>
-              <a:ext uri="{FF2B5EF4-FFF2-40B4-BE49-F238E27FC236}">
-                <a16:creationId xmlns:a16="http://schemas.microsoft.com/office/drawing/2014/main" id="{43F76311-3A9D-2395-F921-58D84AC2F9B4}"/>
-              </a:ext>
-            </a:extLst>
-          </p:cNvPr>
-          <p:cNvPicPr>
-            <a:picLocks noChangeAspect="1"/>
-          </p:cNvPicPr>
-          <p:nvPr/>
-        </p:nvPicPr>
-        <p:blipFill>
-          <a:blip r:embed="rId2"/>
-          <a:stretch>
-            <a:fillRect/>
-          </a:stretch>
-        </p:blipFill>
-        <p:spPr>
-          <a:xfrm>
-            <a:off x="406043" y="2371724"/>
-            <a:ext cx="5299432" cy="2512843"/>
-          </a:xfrm>
-          <a:prstGeom prst="rect">
-            <a:avLst/>
-          </a:prstGeom>
-        </p:spPr>
-      </p:pic>
-      <p:pic>
-        <p:nvPicPr>
-          <p:cNvPr id="10" name="Picture 9" descr="Histogram of Old Faithful waiting times in ten-minute bins, frequency on the vertical axis, showing two peaks either side of a dip near 65 minutes.">
-            <a:extLst>
-              <a:ext uri="{FF2B5EF4-FFF2-40B4-BE49-F238E27FC236}">
-                <a16:creationId xmlns:a16="http://schemas.microsoft.com/office/drawing/2014/main" id="{9AC59B7A-4888-2F53-4913-9DA0E60378A7}"/>
-              </a:ext>
-            </a:extLst>
-          </p:cNvPr>
-          <p:cNvPicPr>
-            <a:picLocks noChangeAspect="1"/>
-          </p:cNvPicPr>
-          <p:nvPr/>
-        </p:nvPicPr>
-        <p:blipFill>
-          <a:blip r:embed="rId3"/>
-          <a:stretch>
-            <a:fillRect/>
-          </a:stretch>
-        </p:blipFill>
-        <p:spPr>
-          <a:xfrm>
-            <a:off x="6096000" y="3428176"/>
-            <a:ext cx="5972175" cy="3429824"/>
-          </a:xfrm>
-          <a:prstGeom prst="rect">
-            <a:avLst/>
-          </a:prstGeom>
-        </p:spPr>
-      </p:pic>
-      <p:pic>
-        <p:nvPicPr>
-          <p:cNvPr id="8" name="Picture 7" descr="The same histogram with relative frequency on the vertical axis; the shape is identical, only the scale changes.">
-            <a:extLst>
-              <a:ext uri="{FF2B5EF4-FFF2-40B4-BE49-F238E27FC236}">
-                <a16:creationId xmlns:a16="http://schemas.microsoft.com/office/drawing/2014/main" id="{978CA529-7CC3-CAE2-9847-392C83BDC9D6}"/>
-              </a:ext>
-            </a:extLst>
-          </p:cNvPr>
-          <p:cNvPicPr>
-            <a:picLocks noChangeAspect="1"/>
-          </p:cNvPicPr>
-          <p:nvPr/>
-        </p:nvPicPr>
-        <p:blipFill>
-          <a:blip r:embed="rId4"/>
-          <a:stretch>
-            <a:fillRect/>
-          </a:stretch>
-        </p:blipFill>
-        <p:spPr>
-          <a:xfrm>
-            <a:off x="5920644" y="171451"/>
-            <a:ext cx="6271356" cy="3790950"/>
-          </a:xfrm>
-          <a:prstGeom prst="rect">
-            <a:avLst/>
-          </a:prstGeom>
-        </p:spPr>
-      </p:pic>
-      <p:sp>
-        <p:nvSpPr>
-          <p:cNvPr id="11" name="Title 1">
-            <a:extLst>
-              <a:ext uri="{FF2B5EF4-FFF2-40B4-BE49-F238E27FC236}">
-                <a16:creationId xmlns:a16="http://schemas.microsoft.com/office/drawing/2014/main" id="{4A4E0D4A-62CF-AB62-D6A7-48E60442E41C}"/>
-              </a:ext>
-            </a:extLst>
-          </p:cNvPr>
-          <p:cNvSpPr>
-            <a:spLocks noGrp="1"/>
-          </p:cNvSpPr>
-          <p:nvPr>
-            <p:ph type="title"/>
-          </p:nvPr>
-        </p:nvSpPr>
-        <p:spPr>
-          <a:xfrm>
-            <a:off x="560209" y="1546224"/>
-            <a:ext cx="4991100" cy="825500"/>
-          </a:xfrm>
-        </p:spPr>
-        <p:txBody>
-          <a:bodyPr>
-            <a:normAutofit/>
-          </a:bodyPr>
-          <a:lstStyle/>
-          <a:p>
-            <a:r>
-              <a:rPr lang="en-US" sz="2400" dirty="0"/>
-              <a:t>Example: Old Faithful Eruption Times</a:t>
-            </a:r>
-          </a:p>
-        </p:txBody>
-      </p:sp>
-    </p:spTree>
-    <p:extLst>
-      <p:ext uri="{BB962C8B-B14F-4D97-AF65-F5344CB8AC3E}">
-        <p14:creationId xmlns:p14="http://schemas.microsoft.com/office/powerpoint/2010/main" val="726230392"/>
-      </p:ext>
-    </p:extLst>
-  </p:cSld>
-  <p:clrMapOvr>
-    <a:masterClrMapping/>
-  </p:clrMapOvr>
-</p:sld>
-</file>
-
 <file path=ppt/slides/slide4.xml><?xml version="1.0" encoding="utf-8"?>
 <p:sld xmlns:a="http://schemas.openxmlformats.org/drawingml/2006/main" xmlns:r="http://schemas.openxmlformats.org/officeDocument/2006/relationships" xmlns:p="http://schemas.openxmlformats.org/presentationml/2006/main">
   <p:cSld>
